--- a/docs/test/golden-outputs/p2-sinsa-r3/sinsa_trading_r3_basic.pptx
+++ b/docs/test/golden-outputs/p2-sinsa-r3/sinsa_trading_r3_basic.pptx
@@ -12,9 +12,10 @@
     <p:sldId id="260" r:id="rId6"/>
     <p:sldId id="261" r:id="rId7"/>
     <p:sldId id="262" r:id="rId8"/>
+    <p:sldId id="263" r:id="rId9"/>
   </p:sldIdLst>
   <p:notesMasterIdLst>
-    <p:notesMasterId r:id="rId9"/>
+    <p:notesMasterId r:id="rId10"/>
   </p:notesMasterIdLst>
   <p:sldSz cx="12192000" cy="6858000"/>
   <p:notesSz cx="6858000" cy="12192000"/>
@@ -1060,6 +1061,94 @@
             <a:fld id="{F7021451-1387-4CA6-816F-3879F97B5CBC}" type="slidenum">
               <a:rPr lang="en-US"/>
               <a:t>7</a:t>
+            </a:fld>
+            <a:endParaRPr lang="en-US"/>
+          </a:p>
+        </p:txBody>
+      </p:sp>
+    </p:spTree>
+    <p:extLst>
+      <p:ext uri="{BB962C8B-B14F-4D97-AF65-F5344CB8AC3E}">
+        <p14:creationId xmlns:p14="http://schemas.microsoft.com/office/powerpoint/2010/main" val="1024086991"/>
+      </p:ext>
+    </p:extLst>
+  </p:cSld>
+  <p:clrMapOvr>
+    <a:masterClrMapping/>
+  </p:clrMapOvr>
+</p:notes>
+</file>
+
+<file path=ppt/notesSlides/notesSlide8.xml><?xml version="1.0" encoding="utf-8"?>
+<p:notes xmlns:a="http://schemas.openxmlformats.org/drawingml/2006/main" xmlns:r="http://schemas.openxmlformats.org/officeDocument/2006/relationships" xmlns:p="http://schemas.openxmlformats.org/presentationml/2006/main">
+  <p:cSld>
+    <p:spTree>
+      <p:nvGrpSpPr>
+        <p:cNvPr id="1" name=""/>
+        <p:cNvGrpSpPr/>
+        <p:nvPr/>
+      </p:nvGrpSpPr>
+      <p:grpSpPr>
+        <a:xfrm>
+          <a:off x="0" y="0"/>
+          <a:ext cx="0" cy="0"/>
+          <a:chOff x="0" y="0"/>
+          <a:chExt cx="0" cy="0"/>
+        </a:xfrm>
+      </p:grpSpPr>
+      <p:sp>
+        <p:nvSpPr>
+          <p:cNvPr id="2" name="Slide Image Placeholder 1"/>
+          <p:cNvSpPr>
+            <a:spLocks noGrp="1" noRot="1" noChangeAspect="1"/>
+          </p:cNvSpPr>
+          <p:nvPr>
+            <p:ph type="sldImg"/>
+          </p:nvPr>
+        </p:nvSpPr>
+        <p:spPr/>
+      </p:sp>
+      <p:sp>
+        <p:nvSpPr>
+          <p:cNvPr id="3" name="Notes Placeholder 2"/>
+          <p:cNvSpPr>
+            <a:spLocks noGrp="1"/>
+          </p:cNvSpPr>
+          <p:nvPr>
+            <p:ph type="body" idx="1"/>
+          </p:nvPr>
+        </p:nvSpPr>
+        <p:spPr/>
+        <p:txBody>
+          <a:bodyPr/>
+          <a:lstStyle/>
+          <a:p>
+            <a:r>
+              <a:rPr lang="en-US" dirty="0"/>
+              <a:t/>
+            </a:r>
+            <a:endParaRPr lang="en-US" dirty="0"/>
+          </a:p>
+        </p:txBody>
+      </p:sp>
+      <p:sp>
+        <p:nvSpPr>
+          <p:cNvPr id="4" name="Slide Number Placeholder 3"/>
+          <p:cNvSpPr>
+            <a:spLocks noGrp="1"/>
+          </p:cNvSpPr>
+          <p:nvPr>
+            <p:ph type="sldNum" sz="quarter" idx="10"/>
+          </p:nvPr>
+        </p:nvSpPr>
+        <p:spPr/>
+        <p:txBody>
+          <a:bodyPr/>
+          <a:lstStyle/>
+          <a:p>
+            <a:fld id="{F7021451-1387-4CA6-816F-3879F97B5CBC}" type="slidenum">
+              <a:rPr lang="en-US"/>
+              <a:t>8</a:t>
             </a:fld>
             <a:endParaRPr lang="en-US"/>
           </a:p>
@@ -2021,7 +2110,7 @@
                 <a:ea typeface="맑은 고딕" pitchFamily="34" charset="-122"/>
                 <a:cs typeface="맑은 고딕" pitchFamily="34" charset="-120"/>
               </a:rPr>
-              <a:t>2026.09.20  |  수석 자문역  |  CREDEAL 투자자문</a:t>
+              <a:t>2026.09.21  |  수석 자문역  |  CREDEAL 투자자문</a:t>
             </a:r>
             <a:endParaRPr lang="en-US" sz="900" dirty="0"/>
           </a:p>
@@ -2426,10 +2515,13 @@
           <a:lstStyle/>
           <a:p>
             <a:pPr indent="0" marL="0">
-              <a:buNone/>
-            </a:pPr>
-            <a:r>
-              <a:rPr lang="en-US" sz="1700" b="1" dirty="0">
+              <a:lnSpc>
+                <a:spcPct val="100000"/>
+              </a:lnSpc>
+              <a:buNone/>
+            </a:pPr>
+            <a:r>
+              <a:rPr lang="en-US" sz="2200" b="1" dirty="0">
                 <a:solidFill>
                   <a:srgbClr val="132A3A"/>
                 </a:solidFill>
@@ -2439,7 +2531,7 @@
               </a:rPr>
               <a:t>760억 원</a:t>
             </a:r>
-            <a:endParaRPr lang="en-US" sz="1700" dirty="0"/>
+            <a:endParaRPr lang="en-US" sz="2200" dirty="0"/>
           </a:p>
         </p:txBody>
       </p:sp>
@@ -2533,10 +2625,13 @@
           <a:lstStyle/>
           <a:p>
             <a:pPr indent="0" marL="0">
-              <a:buNone/>
-            </a:pPr>
-            <a:r>
-              <a:rPr lang="en-US" sz="1700" b="1" dirty="0">
+              <a:lnSpc>
+                <a:spcPct val="100000"/>
+              </a:lnSpc>
+              <a:buNone/>
+            </a:pPr>
+            <a:r>
+              <a:rPr lang="en-US" sz="1200" b="1" dirty="0">
                 <a:solidFill>
                   <a:srgbClr val="132A3A"/>
                 </a:solidFill>
@@ -2546,7 +2641,7 @@
               </a:rPr>
               <a:t>서울특별시 강남구 신사동 590</a:t>
             </a:r>
-            <a:endParaRPr lang="en-US" sz="1700" dirty="0"/>
+            <a:endParaRPr lang="en-US" sz="1200" dirty="0"/>
           </a:p>
         </p:txBody>
       </p:sp>
@@ -2640,10 +2735,13 @@
           <a:lstStyle/>
           <a:p>
             <a:pPr indent="0" marL="0">
-              <a:buNone/>
-            </a:pPr>
-            <a:r>
-              <a:rPr lang="en-US" sz="1700" b="1" dirty="0">
+              <a:lnSpc>
+                <a:spcPct val="100000"/>
+              </a:lnSpc>
+              <a:buNone/>
+            </a:pPr>
+            <a:r>
+              <a:rPr lang="en-US" sz="1200" b="1" dirty="0">
                 <a:solidFill>
                   <a:srgbClr val="132A3A"/>
                 </a:solidFill>
@@ -2653,7 +2751,7 @@
               </a:rPr>
               <a:t>1,061.9㎡ (321.2평)</a:t>
             </a:r>
-            <a:endParaRPr lang="en-US" sz="1700" dirty="0"/>
+            <a:endParaRPr lang="en-US" sz="1200" dirty="0"/>
           </a:p>
         </p:txBody>
       </p:sp>
@@ -2747,10 +2845,13 @@
           <a:lstStyle/>
           <a:p>
             <a:pPr indent="0" marL="0">
-              <a:buNone/>
-            </a:pPr>
-            <a:r>
-              <a:rPr lang="en-US" sz="1700" b="1" dirty="0">
+              <a:lnSpc>
+                <a:spcPct val="100000"/>
+              </a:lnSpc>
+              <a:buNone/>
+            </a:pPr>
+            <a:r>
+              <a:rPr lang="en-US" sz="1200" b="1" dirty="0">
                 <a:solidFill>
                   <a:srgbClr val="132A3A"/>
                 </a:solidFill>
@@ -2760,7 +2861,7 @@
               </a:rPr>
               <a:t>3,341.8㎡ (1,010.9평)</a:t>
             </a:r>
-            <a:endParaRPr lang="en-US" sz="1700" dirty="0"/>
+            <a:endParaRPr lang="en-US" sz="1200" dirty="0"/>
           </a:p>
         </p:txBody>
       </p:sp>
@@ -2854,10 +2955,13 @@
           <a:lstStyle/>
           <a:p>
             <a:pPr indent="0" marL="0">
-              <a:buNone/>
-            </a:pPr>
-            <a:r>
-              <a:rPr lang="en-US" sz="1700" b="1" dirty="0">
+              <a:lnSpc>
+                <a:spcPct val="100000"/>
+              </a:lnSpc>
+              <a:buNone/>
+            </a:pPr>
+            <a:r>
+              <a:rPr lang="en-US" sz="1800" b="1" dirty="0">
                 <a:solidFill>
                   <a:srgbClr val="132A3A"/>
                 </a:solidFill>
@@ -2867,7 +2971,7 @@
               </a:rPr>
               <a:t>제3종일반주거지역</a:t>
             </a:r>
-            <a:endParaRPr lang="en-US" sz="1700" dirty="0"/>
+            <a:endParaRPr lang="en-US" sz="1800" dirty="0"/>
           </a:p>
         </p:txBody>
       </p:sp>
@@ -2961,10 +3065,13 @@
           <a:lstStyle/>
           <a:p>
             <a:pPr indent="0" marL="0">
-              <a:buNone/>
-            </a:pPr>
-            <a:r>
-              <a:rPr lang="en-US" sz="1700" b="1" dirty="0">
+              <a:lnSpc>
+                <a:spcPct val="100000"/>
+              </a:lnSpc>
+              <a:buNone/>
+            </a:pPr>
+            <a:r>
+              <a:rPr lang="en-US" sz="1400" b="1" dirty="0">
                 <a:solidFill>
                   <a:srgbClr val="132A3A"/>
                 </a:solidFill>
@@ -2974,7 +3081,7 @@
               </a:rPr>
               <a:t>지하 2층 ~ 지상 6층</a:t>
             </a:r>
-            <a:endParaRPr lang="en-US" sz="1700" dirty="0"/>
+            <a:endParaRPr lang="en-US" sz="1400" dirty="0"/>
           </a:p>
         </p:txBody>
       </p:sp>
@@ -3068,10 +3175,13 @@
           <a:lstStyle/>
           <a:p>
             <a:pPr indent="0" marL="0">
-              <a:buNone/>
-            </a:pPr>
-            <a:r>
-              <a:rPr lang="en-US" sz="1700" b="1" dirty="0">
+              <a:lnSpc>
+                <a:spcPct val="100000"/>
+              </a:lnSpc>
+              <a:buNone/>
+            </a:pPr>
+            <a:r>
+              <a:rPr lang="en-US" sz="2200" b="1" dirty="0">
                 <a:solidFill>
                   <a:srgbClr val="132A3A"/>
                 </a:solidFill>
@@ -3081,7 +3191,7 @@
               </a:rPr>
               <a:t>1998년</a:t>
             </a:r>
-            <a:endParaRPr lang="en-US" sz="1700" dirty="0"/>
+            <a:endParaRPr lang="en-US" sz="2200" dirty="0"/>
           </a:p>
         </p:txBody>
       </p:sp>
@@ -3175,10 +3285,13 @@
           <a:lstStyle/>
           <a:p>
             <a:pPr indent="0" marL="0">
-              <a:buNone/>
-            </a:pPr>
-            <a:r>
-              <a:rPr lang="en-US" sz="1700" b="1" dirty="0">
+              <a:lnSpc>
+                <a:spcPct val="100000"/>
+              </a:lnSpc>
+              <a:buNone/>
+            </a:pPr>
+            <a:r>
+              <a:rPr lang="en-US" sz="1200" b="1" dirty="0">
                 <a:solidFill>
                   <a:srgbClr val="132A3A"/>
                 </a:solidFill>
@@ -3188,7 +3301,7 @@
               </a:rPr>
               <a:t>자주식 5대 / 기계식 21대 (총 26대)</a:t>
             </a:r>
-            <a:endParaRPr lang="en-US" sz="1700" dirty="0"/>
+            <a:endParaRPr lang="en-US" sz="1200" dirty="0"/>
           </a:p>
         </p:txBody>
       </p:sp>
@@ -3357,7 +3470,7 @@
                 <a:ea typeface="맑은 고딕" pitchFamily="34" charset="-122"/>
                 <a:cs typeface="맑은 고딕" pitchFamily="34" charset="-120"/>
               </a:rPr>
-              <a:t>입지 가치: 대중교통 역세권 입지, 해당 권역 업무·상업 중심지 배후 수요 확보</a:t>
+              <a:t>입지 가치: 압구정역 도보 5분 역세권 및 논현로 이면 코너 (북측 8m, 동측 6m) 접면, GBD 업무·상업 중심지 배후 수요 확보</a:t>
             </a:r>
             <a:endParaRPr lang="en-US" sz="1000" dirty="0"/>
           </a:p>
@@ -3922,7 +4035,7 @@
         <p:spPr>
           <a:xfrm>
             <a:off x="502920" y="1645920"/>
-            <a:ext cx="1920240" cy="329184"/>
+            <a:ext cx="1920240" cy="274320"/>
           </a:xfrm>
           <a:prstGeom prst="rect">
             <a:avLst/>
@@ -3941,7 +4054,7 @@
               <a:buNone/>
             </a:pPr>
             <a:r>
-              <a:rPr lang="en-US" sz="1200" dirty="0">
+              <a:rPr lang="en-US" sz="1100" dirty="0">
                 <a:solidFill>
                   <a:srgbClr val="5B6B73"/>
                 </a:solidFill>
@@ -3951,7 +4064,7 @@
               </a:rPr>
               <a:t>소재지</a:t>
             </a:r>
-            <a:endParaRPr lang="en-US" sz="1200" dirty="0"/>
+            <a:endParaRPr lang="en-US" sz="1100" dirty="0"/>
           </a:p>
         </p:txBody>
       </p:sp>
@@ -3964,7 +4077,7 @@
         <p:spPr>
           <a:xfrm>
             <a:off x="2423160" y="1645920"/>
-            <a:ext cx="4937760" cy="329184"/>
+            <a:ext cx="4937760" cy="274320"/>
           </a:xfrm>
           <a:prstGeom prst="rect">
             <a:avLst/>
@@ -3983,7 +4096,7 @@
               <a:buNone/>
             </a:pPr>
             <a:r>
-              <a:rPr lang="en-US" sz="1200" b="1" dirty="0">
+              <a:rPr lang="en-US" sz="1100" b="1" dirty="0">
                 <a:solidFill>
                   <a:srgbClr val="132A3A"/>
                 </a:solidFill>
@@ -3993,7 +4106,7 @@
               </a:rPr>
               <a:t>서울특별시 강남구 신사동 590</a:t>
             </a:r>
-            <a:endParaRPr lang="en-US" sz="1200" dirty="0"/>
+            <a:endParaRPr lang="en-US" sz="1100" dirty="0"/>
           </a:p>
         </p:txBody>
       </p:sp>
@@ -4005,7 +4118,7 @@
         </p:nvSpPr>
         <p:spPr>
           <a:xfrm>
-            <a:off x="502920" y="1975104"/>
+            <a:off x="502920" y="1920240"/>
             <a:ext cx="6858000" cy="0"/>
           </a:xfrm>
           <a:prstGeom prst="line">
@@ -4028,8 +4141,8 @@
         </p:nvSpPr>
         <p:spPr>
           <a:xfrm>
-            <a:off x="502920" y="1975104"/>
-            <a:ext cx="1920240" cy="329184"/>
+            <a:off x="502920" y="1920240"/>
+            <a:ext cx="1920240" cy="274320"/>
           </a:xfrm>
           <a:prstGeom prst="rect">
             <a:avLst/>
@@ -4048,7 +4161,7 @@
               <a:buNone/>
             </a:pPr>
             <a:r>
-              <a:rPr lang="en-US" sz="1200" dirty="0">
+              <a:rPr lang="en-US" sz="1100" dirty="0">
                 <a:solidFill>
                   <a:srgbClr val="5B6B73"/>
                 </a:solidFill>
@@ -4058,7 +4171,7 @@
               </a:rPr>
               <a:t>대지면적</a:t>
             </a:r>
-            <a:endParaRPr lang="en-US" sz="1200" dirty="0"/>
+            <a:endParaRPr lang="en-US" sz="1100" dirty="0"/>
           </a:p>
         </p:txBody>
       </p:sp>
@@ -4070,8 +4183,8 @@
         </p:nvSpPr>
         <p:spPr>
           <a:xfrm>
-            <a:off x="2423160" y="1975104"/>
-            <a:ext cx="4937760" cy="329184"/>
+            <a:off x="2423160" y="1920240"/>
+            <a:ext cx="4937760" cy="274320"/>
           </a:xfrm>
           <a:prstGeom prst="rect">
             <a:avLst/>
@@ -4090,7 +4203,7 @@
               <a:buNone/>
             </a:pPr>
             <a:r>
-              <a:rPr lang="en-US" sz="1200" b="1" dirty="0">
+              <a:rPr lang="en-US" sz="1100" b="1" dirty="0">
                 <a:solidFill>
                   <a:srgbClr val="132A3A"/>
                 </a:solidFill>
@@ -4100,7 +4213,7 @@
               </a:rPr>
               <a:t>1,061.9㎡ (321.2평)</a:t>
             </a:r>
-            <a:endParaRPr lang="en-US" sz="1200" dirty="0"/>
+            <a:endParaRPr lang="en-US" sz="1100" dirty="0"/>
           </a:p>
         </p:txBody>
       </p:sp>
@@ -4112,7 +4225,7 @@
         </p:nvSpPr>
         <p:spPr>
           <a:xfrm>
-            <a:off x="502920" y="2304288"/>
+            <a:off x="502920" y="2194560"/>
             <a:ext cx="6858000" cy="0"/>
           </a:xfrm>
           <a:prstGeom prst="line">
@@ -4135,8 +4248,8 @@
         </p:nvSpPr>
         <p:spPr>
           <a:xfrm>
-            <a:off x="502920" y="2304288"/>
-            <a:ext cx="1920240" cy="329184"/>
+            <a:off x="502920" y="2194560"/>
+            <a:ext cx="1920240" cy="274320"/>
           </a:xfrm>
           <a:prstGeom prst="rect">
             <a:avLst/>
@@ -4155,7 +4268,7 @@
               <a:buNone/>
             </a:pPr>
             <a:r>
-              <a:rPr lang="en-US" sz="1200" dirty="0">
+              <a:rPr lang="en-US" sz="1100" dirty="0">
                 <a:solidFill>
                   <a:srgbClr val="5B6B73"/>
                 </a:solidFill>
@@ -4165,7 +4278,7 @@
               </a:rPr>
               <a:t>연면적</a:t>
             </a:r>
-            <a:endParaRPr lang="en-US" sz="1200" dirty="0"/>
+            <a:endParaRPr lang="en-US" sz="1100" dirty="0"/>
           </a:p>
         </p:txBody>
       </p:sp>
@@ -4177,8 +4290,8 @@
         </p:nvSpPr>
         <p:spPr>
           <a:xfrm>
-            <a:off x="2423160" y="2304288"/>
-            <a:ext cx="4937760" cy="329184"/>
+            <a:off x="2423160" y="2194560"/>
+            <a:ext cx="4937760" cy="274320"/>
           </a:xfrm>
           <a:prstGeom prst="rect">
             <a:avLst/>
@@ -4197,7 +4310,7 @@
               <a:buNone/>
             </a:pPr>
             <a:r>
-              <a:rPr lang="en-US" sz="1200" b="1" dirty="0">
+              <a:rPr lang="en-US" sz="1100" b="1" dirty="0">
                 <a:solidFill>
                   <a:srgbClr val="132A3A"/>
                 </a:solidFill>
@@ -4207,7 +4320,7 @@
               </a:rPr>
               <a:t>3,341.8㎡ (1,010.9평)</a:t>
             </a:r>
-            <a:endParaRPr lang="en-US" sz="1200" dirty="0"/>
+            <a:endParaRPr lang="en-US" sz="1100" dirty="0"/>
           </a:p>
         </p:txBody>
       </p:sp>
@@ -4219,7 +4332,7 @@
         </p:nvSpPr>
         <p:spPr>
           <a:xfrm>
-            <a:off x="502920" y="2633472"/>
+            <a:off x="502920" y="2468880"/>
             <a:ext cx="6858000" cy="0"/>
           </a:xfrm>
           <a:prstGeom prst="line">
@@ -4242,8 +4355,8 @@
         </p:nvSpPr>
         <p:spPr>
           <a:xfrm>
-            <a:off x="502920" y="2633472"/>
-            <a:ext cx="1920240" cy="329184"/>
+            <a:off x="502920" y="2468880"/>
+            <a:ext cx="1920240" cy="274320"/>
           </a:xfrm>
           <a:prstGeom prst="rect">
             <a:avLst/>
@@ -4262,7 +4375,7 @@
               <a:buNone/>
             </a:pPr>
             <a:r>
-              <a:rPr lang="en-US" sz="1200" dirty="0">
+              <a:rPr lang="en-US" sz="1100" dirty="0">
                 <a:solidFill>
                   <a:srgbClr val="5B6B73"/>
                 </a:solidFill>
@@ -4272,7 +4385,7 @@
               </a:rPr>
               <a:t>용도지역</a:t>
             </a:r>
-            <a:endParaRPr lang="en-US" sz="1200" dirty="0"/>
+            <a:endParaRPr lang="en-US" sz="1100" dirty="0"/>
           </a:p>
         </p:txBody>
       </p:sp>
@@ -4284,8 +4397,8 @@
         </p:nvSpPr>
         <p:spPr>
           <a:xfrm>
-            <a:off x="2423160" y="2633472"/>
-            <a:ext cx="4937760" cy="329184"/>
+            <a:off x="2423160" y="2468880"/>
+            <a:ext cx="4937760" cy="274320"/>
           </a:xfrm>
           <a:prstGeom prst="rect">
             <a:avLst/>
@@ -4304,7 +4417,7 @@
               <a:buNone/>
             </a:pPr>
             <a:r>
-              <a:rPr lang="en-US" sz="1200" b="1" dirty="0">
+              <a:rPr lang="en-US" sz="1100" b="1" dirty="0">
                 <a:solidFill>
                   <a:srgbClr val="132A3A"/>
                 </a:solidFill>
@@ -4314,7 +4427,7 @@
               </a:rPr>
               <a:t>제3종일반주거지역</a:t>
             </a:r>
-            <a:endParaRPr lang="en-US" sz="1200" dirty="0"/>
+            <a:endParaRPr lang="en-US" sz="1100" dirty="0"/>
           </a:p>
         </p:txBody>
       </p:sp>
@@ -4326,7 +4439,7 @@
         </p:nvSpPr>
         <p:spPr>
           <a:xfrm>
-            <a:off x="502920" y="2962656"/>
+            <a:off x="502920" y="2743200"/>
             <a:ext cx="6858000" cy="0"/>
           </a:xfrm>
           <a:prstGeom prst="line">
@@ -4349,8 +4462,8 @@
         </p:nvSpPr>
         <p:spPr>
           <a:xfrm>
-            <a:off x="502920" y="2962656"/>
-            <a:ext cx="1920240" cy="329184"/>
+            <a:off x="502920" y="2743200"/>
+            <a:ext cx="1920240" cy="274320"/>
           </a:xfrm>
           <a:prstGeom prst="rect">
             <a:avLst/>
@@ -4369,7 +4482,7 @@
               <a:buNone/>
             </a:pPr>
             <a:r>
-              <a:rPr lang="en-US" sz="1200" dirty="0">
+              <a:rPr lang="en-US" sz="1100" dirty="0">
                 <a:solidFill>
                   <a:srgbClr val="5B6B73"/>
                 </a:solidFill>
@@ -4379,7 +4492,7 @@
               </a:rPr>
               <a:t>규모</a:t>
             </a:r>
-            <a:endParaRPr lang="en-US" sz="1200" dirty="0"/>
+            <a:endParaRPr lang="en-US" sz="1100" dirty="0"/>
           </a:p>
         </p:txBody>
       </p:sp>
@@ -4391,8 +4504,8 @@
         </p:nvSpPr>
         <p:spPr>
           <a:xfrm>
-            <a:off x="2423160" y="2962656"/>
-            <a:ext cx="4937760" cy="329184"/>
+            <a:off x="2423160" y="2743200"/>
+            <a:ext cx="4937760" cy="274320"/>
           </a:xfrm>
           <a:prstGeom prst="rect">
             <a:avLst/>
@@ -4411,7 +4524,7 @@
               <a:buNone/>
             </a:pPr>
             <a:r>
-              <a:rPr lang="en-US" sz="1200" b="1" dirty="0">
+              <a:rPr lang="en-US" sz="1100" b="1" dirty="0">
                 <a:solidFill>
                   <a:srgbClr val="132A3A"/>
                 </a:solidFill>
@@ -4421,7 +4534,7 @@
               </a:rPr>
               <a:t>지하 2층 ~ 지상 6층</a:t>
             </a:r>
-            <a:endParaRPr lang="en-US" sz="1200" dirty="0"/>
+            <a:endParaRPr lang="en-US" sz="1100" dirty="0"/>
           </a:p>
         </p:txBody>
       </p:sp>
@@ -4433,7 +4546,7 @@
         </p:nvSpPr>
         <p:spPr>
           <a:xfrm>
-            <a:off x="502920" y="3291840"/>
+            <a:off x="502920" y="3017520"/>
             <a:ext cx="6858000" cy="0"/>
           </a:xfrm>
           <a:prstGeom prst="line">
@@ -4456,8 +4569,8 @@
         </p:nvSpPr>
         <p:spPr>
           <a:xfrm>
-            <a:off x="502920" y="3291840"/>
-            <a:ext cx="1920240" cy="329184"/>
+            <a:off x="502920" y="3017520"/>
+            <a:ext cx="1920240" cy="274320"/>
           </a:xfrm>
           <a:prstGeom prst="rect">
             <a:avLst/>
@@ -4476,7 +4589,7 @@
               <a:buNone/>
             </a:pPr>
             <a:r>
-              <a:rPr lang="en-US" sz="1200" dirty="0">
+              <a:rPr lang="en-US" sz="1100" dirty="0">
                 <a:solidFill>
                   <a:srgbClr val="5B6B73"/>
                 </a:solidFill>
@@ -4486,7 +4599,7 @@
               </a:rPr>
               <a:t>준공연도</a:t>
             </a:r>
-            <a:endParaRPr lang="en-US" sz="1200" dirty="0"/>
+            <a:endParaRPr lang="en-US" sz="1100" dirty="0"/>
           </a:p>
         </p:txBody>
       </p:sp>
@@ -4498,8 +4611,8 @@
         </p:nvSpPr>
         <p:spPr>
           <a:xfrm>
-            <a:off x="2423160" y="3291840"/>
-            <a:ext cx="4937760" cy="329184"/>
+            <a:off x="2423160" y="3017520"/>
+            <a:ext cx="4937760" cy="274320"/>
           </a:xfrm>
           <a:prstGeom prst="rect">
             <a:avLst/>
@@ -4518,7 +4631,7 @@
               <a:buNone/>
             </a:pPr>
             <a:r>
-              <a:rPr lang="en-US" sz="1200" b="1" dirty="0">
+              <a:rPr lang="en-US" sz="1100" b="1" dirty="0">
                 <a:solidFill>
                   <a:srgbClr val="132A3A"/>
                 </a:solidFill>
@@ -4528,13 +4641,227 @@
               </a:rPr>
               <a:t>1998년</a:t>
             </a:r>
-            <a:endParaRPr lang="en-US" sz="1200" dirty="0"/>
+            <a:endParaRPr lang="en-US" sz="1100" dirty="0"/>
           </a:p>
         </p:txBody>
       </p:sp>
       <p:sp>
         <p:nvSpPr>
           <p:cNvPr id="24" name="Shape 22"/>
+          <p:cNvSpPr/>
+          <p:nvPr/>
+        </p:nvSpPr>
+        <p:spPr>
+          <a:xfrm>
+            <a:off x="502920" y="3291840"/>
+            <a:ext cx="6858000" cy="0"/>
+          </a:xfrm>
+          <a:prstGeom prst="line">
+            <a:avLst/>
+          </a:prstGeom>
+          <a:noFill/>
+          <a:ln w="3810">
+            <a:solidFill>
+              <a:srgbClr val="CBD5E0"/>
+            </a:solidFill>
+            <a:prstDash val="solid"/>
+          </a:ln>
+        </p:spPr>
+      </p:sp>
+      <p:sp>
+        <p:nvSpPr>
+          <p:cNvPr id="25" name="Text 23"/>
+          <p:cNvSpPr/>
+          <p:nvPr/>
+        </p:nvSpPr>
+        <p:spPr>
+          <a:xfrm>
+            <a:off x="502920" y="3291840"/>
+            <a:ext cx="1920240" cy="274320"/>
+          </a:xfrm>
+          <a:prstGeom prst="rect">
+            <a:avLst/>
+          </a:prstGeom>
+          <a:noFill/>
+          <a:ln/>
+        </p:spPr>
+        <p:txBody>
+          <a:bodyPr wrap="square" lIns="0" tIns="0" rIns="0" bIns="0" rtlCol="0" anchor="ctr"/>
+          <a:lstStyle/>
+          <a:p>
+            <a:pPr indent="0" marL="0">
+              <a:lnSpc>
+                <a:spcPct val="115000"/>
+              </a:lnSpc>
+              <a:buNone/>
+            </a:pPr>
+            <a:r>
+              <a:rPr lang="en-US" sz="1100" dirty="0">
+                <a:solidFill>
+                  <a:srgbClr val="5B6B73"/>
+                </a:solidFill>
+                <a:latin typeface="맑은 고딕" pitchFamily="34" charset="0"/>
+                <a:ea typeface="맑은 고딕" pitchFamily="34" charset="-122"/>
+                <a:cs typeface="맑은 고딕" pitchFamily="34" charset="-120"/>
+              </a:rPr>
+              <a:t>주차대수</a:t>
+            </a:r>
+            <a:endParaRPr lang="en-US" sz="1100" dirty="0"/>
+          </a:p>
+        </p:txBody>
+      </p:sp>
+      <p:sp>
+        <p:nvSpPr>
+          <p:cNvPr id="26" name="Text 24"/>
+          <p:cNvSpPr/>
+          <p:nvPr/>
+        </p:nvSpPr>
+        <p:spPr>
+          <a:xfrm>
+            <a:off x="2423160" y="3291840"/>
+            <a:ext cx="4937760" cy="274320"/>
+          </a:xfrm>
+          <a:prstGeom prst="rect">
+            <a:avLst/>
+          </a:prstGeom>
+          <a:noFill/>
+          <a:ln/>
+        </p:spPr>
+        <p:txBody>
+          <a:bodyPr wrap="square" lIns="0" tIns="0" rIns="0" bIns="0" rtlCol="0" anchor="ctr"/>
+          <a:lstStyle/>
+          <a:p>
+            <a:pPr indent="0" marL="0">
+              <a:lnSpc>
+                <a:spcPct val="115000"/>
+              </a:lnSpc>
+              <a:buNone/>
+            </a:pPr>
+            <a:r>
+              <a:rPr lang="en-US" sz="1100" b="1" dirty="0">
+                <a:solidFill>
+                  <a:srgbClr val="132A3A"/>
+                </a:solidFill>
+                <a:latin typeface="맑은 고딕" pitchFamily="34" charset="0"/>
+                <a:ea typeface="맑은 고딕" pitchFamily="34" charset="-122"/>
+                <a:cs typeface="맑은 고딕" pitchFamily="34" charset="-120"/>
+              </a:rPr>
+              <a:t>자주식 5대 / 기계식 21대 (총 26대)</a:t>
+            </a:r>
+            <a:endParaRPr lang="en-US" sz="1100" dirty="0"/>
+          </a:p>
+        </p:txBody>
+      </p:sp>
+      <p:sp>
+        <p:nvSpPr>
+          <p:cNvPr id="27" name="Shape 25"/>
+          <p:cNvSpPr/>
+          <p:nvPr/>
+        </p:nvSpPr>
+        <p:spPr>
+          <a:xfrm>
+            <a:off x="502920" y="3566160"/>
+            <a:ext cx="6858000" cy="0"/>
+          </a:xfrm>
+          <a:prstGeom prst="line">
+            <a:avLst/>
+          </a:prstGeom>
+          <a:noFill/>
+          <a:ln w="3810">
+            <a:solidFill>
+              <a:srgbClr val="CBD5E0"/>
+            </a:solidFill>
+            <a:prstDash val="solid"/>
+          </a:ln>
+        </p:spPr>
+      </p:sp>
+      <p:sp>
+        <p:nvSpPr>
+          <p:cNvPr id="28" name="Text 26"/>
+          <p:cNvSpPr/>
+          <p:nvPr/>
+        </p:nvSpPr>
+        <p:spPr>
+          <a:xfrm>
+            <a:off x="502920" y="3566160"/>
+            <a:ext cx="1920240" cy="274320"/>
+          </a:xfrm>
+          <a:prstGeom prst="rect">
+            <a:avLst/>
+          </a:prstGeom>
+          <a:noFill/>
+          <a:ln/>
+        </p:spPr>
+        <p:txBody>
+          <a:bodyPr wrap="square" lIns="0" tIns="0" rIns="0" bIns="0" rtlCol="0" anchor="ctr"/>
+          <a:lstStyle/>
+          <a:p>
+            <a:pPr indent="0" marL="0">
+              <a:lnSpc>
+                <a:spcPct val="115000"/>
+              </a:lnSpc>
+              <a:buNone/>
+            </a:pPr>
+            <a:r>
+              <a:rPr lang="en-US" sz="1100" dirty="0">
+                <a:solidFill>
+                  <a:srgbClr val="5B6B73"/>
+                </a:solidFill>
+                <a:latin typeface="맑은 고딕" pitchFamily="34" charset="0"/>
+                <a:ea typeface="맑은 고딕" pitchFamily="34" charset="-122"/>
+                <a:cs typeface="맑은 고딕" pitchFamily="34" charset="-120"/>
+              </a:rPr>
+              <a:t>승강기</a:t>
+            </a:r>
+            <a:endParaRPr lang="en-US" sz="1100" dirty="0"/>
+          </a:p>
+        </p:txBody>
+      </p:sp>
+      <p:sp>
+        <p:nvSpPr>
+          <p:cNvPr id="29" name="Text 27"/>
+          <p:cNvSpPr/>
+          <p:nvPr/>
+        </p:nvSpPr>
+        <p:spPr>
+          <a:xfrm>
+            <a:off x="2423160" y="3566160"/>
+            <a:ext cx="4937760" cy="274320"/>
+          </a:xfrm>
+          <a:prstGeom prst="rect">
+            <a:avLst/>
+          </a:prstGeom>
+          <a:noFill/>
+          <a:ln/>
+        </p:spPr>
+        <p:txBody>
+          <a:bodyPr wrap="square" lIns="0" tIns="0" rIns="0" bIns="0" rtlCol="0" anchor="ctr"/>
+          <a:lstStyle/>
+          <a:p>
+            <a:pPr indent="0" marL="0">
+              <a:lnSpc>
+                <a:spcPct val="115000"/>
+              </a:lnSpc>
+              <a:buNone/>
+            </a:pPr>
+            <a:r>
+              <a:rPr lang="en-US" sz="1100" b="1" dirty="0">
+                <a:solidFill>
+                  <a:srgbClr val="132A3A"/>
+                </a:solidFill>
+                <a:latin typeface="맑은 고딕" pitchFamily="34" charset="0"/>
+                <a:ea typeface="맑은 고딕" pitchFamily="34" charset="-122"/>
+                <a:cs typeface="맑은 고딕" pitchFamily="34" charset="-120"/>
+              </a:rPr>
+              <a:t>1대</a:t>
+            </a:r>
+            <a:endParaRPr lang="en-US" sz="1100" dirty="0"/>
+          </a:p>
+        </p:txBody>
+      </p:sp>
+      <p:sp>
+        <p:nvSpPr>
+          <p:cNvPr id="30" name="Shape 28"/>
           <p:cNvSpPr/>
           <p:nvPr/>
         </p:nvSpPr>
@@ -4559,7 +4886,7 @@
       </p:sp>
       <p:sp>
         <p:nvSpPr>
-          <p:cNvPr id="25" name="Text 23"/>
+          <p:cNvPr id="31" name="Text 29"/>
           <p:cNvSpPr/>
           <p:nvPr/>
         </p:nvSpPr>
@@ -4598,7 +4925,7 @@
       </p:sp>
       <p:sp>
         <p:nvSpPr>
-          <p:cNvPr id="26" name="Text 24"/>
+          <p:cNvPr id="32" name="Text 30"/>
           <p:cNvSpPr/>
           <p:nvPr/>
         </p:nvSpPr>
@@ -4637,7 +4964,7 @@
       </p:sp>
       <p:sp>
         <p:nvSpPr>
-          <p:cNvPr id="27" name="Shape 25"/>
+          <p:cNvPr id="33" name="Shape 31"/>
           <p:cNvSpPr/>
           <p:nvPr/>
         </p:nvSpPr>
@@ -4660,7 +4987,7 @@
       </p:sp>
       <p:sp>
         <p:nvSpPr>
-          <p:cNvPr id="28" name="Text 26"/>
+          <p:cNvPr id="34" name="Text 32"/>
           <p:cNvSpPr/>
           <p:nvPr/>
         </p:nvSpPr>
@@ -4699,7 +5026,7 @@
       </p:sp>
       <p:sp>
         <p:nvSpPr>
-          <p:cNvPr id="29" name="Text 27"/>
+          <p:cNvPr id="35" name="Text 33"/>
           <p:cNvSpPr/>
           <p:nvPr/>
         </p:nvSpPr>
@@ -4738,7 +5065,7 @@
       </p:sp>
       <p:sp>
         <p:nvSpPr>
-          <p:cNvPr id="30" name="Shape 28"/>
+          <p:cNvPr id="36" name="Shape 34"/>
           <p:cNvSpPr/>
           <p:nvPr/>
         </p:nvSpPr>
@@ -4761,7 +5088,7 @@
       </p:sp>
       <p:pic>
         <p:nvPicPr>
-          <p:cNvPr id="31" name="Image 0" descr="preencoded.png">    </p:cNvPr>
+          <p:cNvPr id="37" name="Image 0" descr="preencoded.png">    </p:cNvPr>
           <p:cNvPicPr>
             <a:picLocks noChangeAspect="1"/>
           </p:cNvPicPr>
@@ -4784,7 +5111,7 @@
       </p:pic>
       <p:sp>
         <p:nvSpPr>
-          <p:cNvPr id="32" name="Shape 29"/>
+          <p:cNvPr id="38" name="Shape 35"/>
           <p:cNvSpPr/>
           <p:nvPr/>
         </p:nvSpPr>
@@ -4806,7 +5133,7 @@
       </p:sp>
       <p:sp>
         <p:nvSpPr>
-          <p:cNvPr id="33" name="Shape 30"/>
+          <p:cNvPr id="39" name="Shape 36"/>
           <p:cNvSpPr/>
           <p:nvPr/>
         </p:nvSpPr>
@@ -4826,7 +5153,7 @@
       </p:sp>
       <p:sp>
         <p:nvSpPr>
-          <p:cNvPr id="34" name="Text 31"/>
+          <p:cNvPr id="40" name="Text 37"/>
           <p:cNvSpPr/>
           <p:nvPr/>
         </p:nvSpPr>
@@ -4865,7 +5192,7 @@
       </p:sp>
       <p:sp>
         <p:nvSpPr>
-          <p:cNvPr id="35" name="Text 32"/>
+          <p:cNvPr id="41" name="Text 38"/>
           <p:cNvSpPr/>
           <p:nvPr/>
         </p:nvSpPr>
@@ -4956,7 +5283,7 @@
       </p:sp>
       <p:sp>
         <p:nvSpPr>
-          <p:cNvPr id="36" name="Text 33"/>
+          <p:cNvPr id="42" name="Text 39"/>
           <p:cNvSpPr/>
           <p:nvPr/>
         </p:nvSpPr>
@@ -4995,7 +5322,7 @@
       </p:sp>
       <p:sp>
         <p:nvSpPr>
-          <p:cNvPr id="37" name="Text 34"/>
+          <p:cNvPr id="43" name="Text 40"/>
           <p:cNvSpPr/>
           <p:nvPr/>
         </p:nvSpPr>
@@ -5300,7 +5627,7 @@
                 <a:ea typeface="맑은 고딕" pitchFamily="34" charset="-122"/>
                 <a:cs typeface="맑은 고딕" pitchFamily="34" charset="-120"/>
               </a:rPr>
-              <a:t>대중교통</a:t>
+              <a:t>소재지</a:t>
             </a:r>
             <a:endParaRPr lang="en-US" sz="1300" dirty="0"/>
           </a:p>
@@ -5342,7 +5669,7 @@
                 <a:ea typeface="맑은 고딕" pitchFamily="34" charset="-122"/>
                 <a:cs typeface="맑은 고딕" pitchFamily="34" charset="-120"/>
               </a:rPr>
-              <a:t>인접 지하철역 역세권 (상세 확인 필요)</a:t>
+              <a:t>서울특별시 강남구 신사동 590</a:t>
             </a:r>
             <a:endParaRPr lang="en-US" sz="1300" dirty="0"/>
           </a:p>
@@ -5407,7 +5734,7 @@
                 <a:ea typeface="맑은 고딕" pitchFamily="34" charset="-122"/>
                 <a:cs typeface="맑은 고딕" pitchFamily="34" charset="-120"/>
               </a:rPr>
-              <a:t>상권권역</a:t>
+              <a:t>대중교통</a:t>
             </a:r>
             <a:endParaRPr lang="en-US" sz="1300" dirty="0"/>
           </a:p>
@@ -5449,7 +5776,7 @@
                 <a:ea typeface="맑은 고딕" pitchFamily="34" charset="-122"/>
                 <a:cs typeface="맑은 고딕" pitchFamily="34" charset="-120"/>
               </a:rPr>
-              <a:t>760억 주요 상업·업무 권역</a:t>
+              <a:t>압구정역 도보 5분 (약 450m)</a:t>
             </a:r>
             <a:endParaRPr lang="en-US" sz="1300" dirty="0"/>
           </a:p>
@@ -5463,12 +5790,333 @@
         </p:nvSpPr>
         <p:spPr>
           <a:xfrm>
-            <a:off x="5989320" y="2926080"/>
-            <a:ext cx="5571439" cy="658368"/>
+            <a:off x="5989320" y="2788920"/>
+            <a:ext cx="5571439" cy="0"/>
+          </a:xfrm>
+          <a:prstGeom prst="line">
+            <a:avLst/>
+          </a:prstGeom>
+          <a:noFill/>
+          <a:ln w="3810">
+            <a:solidFill>
+              <a:srgbClr val="CBD5E0"/>
+            </a:solidFill>
+            <a:prstDash val="solid"/>
+          </a:ln>
+        </p:spPr>
+      </p:sp>
+      <p:sp>
+        <p:nvSpPr>
+          <p:cNvPr id="14" name="Text 11"/>
+          <p:cNvSpPr/>
+          <p:nvPr/>
+        </p:nvSpPr>
+        <p:spPr>
+          <a:xfrm>
+            <a:off x="5989320" y="2788920"/>
+            <a:ext cx="1560003" cy="493776"/>
+          </a:xfrm>
+          <a:prstGeom prst="rect">
+            <a:avLst/>
+          </a:prstGeom>
+          <a:noFill/>
+          <a:ln/>
+        </p:spPr>
+        <p:txBody>
+          <a:bodyPr wrap="square" lIns="0" tIns="0" rIns="0" bIns="0" rtlCol="0" anchor="ctr"/>
+          <a:lstStyle/>
+          <a:p>
+            <a:pPr indent="0" marL="0">
+              <a:lnSpc>
+                <a:spcPct val="115000"/>
+              </a:lnSpc>
+              <a:buNone/>
+            </a:pPr>
+            <a:r>
+              <a:rPr lang="en-US" sz="1300" dirty="0">
+                <a:solidFill>
+                  <a:srgbClr val="5B6B73"/>
+                </a:solidFill>
+                <a:latin typeface="맑은 고딕" pitchFamily="34" charset="0"/>
+                <a:ea typeface="맑은 고딕" pitchFamily="34" charset="-122"/>
+                <a:cs typeface="맑은 고딕" pitchFamily="34" charset="-120"/>
+              </a:rPr>
+              <a:t>도로접면</a:t>
+            </a:r>
+            <a:endParaRPr lang="en-US" sz="1300" dirty="0"/>
+          </a:p>
+        </p:txBody>
+      </p:sp>
+      <p:sp>
+        <p:nvSpPr>
+          <p:cNvPr id="15" name="Text 12"/>
+          <p:cNvSpPr/>
+          <p:nvPr/>
+        </p:nvSpPr>
+        <p:spPr>
+          <a:xfrm>
+            <a:off x="7549323" y="2788920"/>
+            <a:ext cx="4011436" cy="493776"/>
+          </a:xfrm>
+          <a:prstGeom prst="rect">
+            <a:avLst/>
+          </a:prstGeom>
+          <a:noFill/>
+          <a:ln/>
+        </p:spPr>
+        <p:txBody>
+          <a:bodyPr wrap="square" lIns="0" tIns="0" rIns="0" bIns="0" rtlCol="0" anchor="ctr"/>
+          <a:lstStyle/>
+          <a:p>
+            <a:pPr indent="0" marL="0">
+              <a:lnSpc>
+                <a:spcPct val="115000"/>
+              </a:lnSpc>
+              <a:buNone/>
+            </a:pPr>
+            <a:r>
+              <a:rPr lang="en-US" sz="1300" b="1" dirty="0">
+                <a:solidFill>
+                  <a:srgbClr val="132A3A"/>
+                </a:solidFill>
+                <a:latin typeface="맑은 고딕" pitchFamily="34" charset="0"/>
+                <a:ea typeface="맑은 고딕" pitchFamily="34" charset="-122"/>
+                <a:cs typeface="맑은 고딕" pitchFamily="34" charset="-120"/>
+              </a:rPr>
+              <a:t>논현로 이면 코너 (북측 8m, 동측 6m)</a:t>
+            </a:r>
+            <a:endParaRPr lang="en-US" sz="1300" dirty="0"/>
+          </a:p>
+        </p:txBody>
+      </p:sp>
+      <p:sp>
+        <p:nvSpPr>
+          <p:cNvPr id="16" name="Shape 13"/>
+          <p:cNvSpPr/>
+          <p:nvPr/>
+        </p:nvSpPr>
+        <p:spPr>
+          <a:xfrm>
+            <a:off x="5989320" y="3282696"/>
+            <a:ext cx="5571439" cy="0"/>
+          </a:xfrm>
+          <a:prstGeom prst="line">
+            <a:avLst/>
+          </a:prstGeom>
+          <a:noFill/>
+          <a:ln w="3810">
+            <a:solidFill>
+              <a:srgbClr val="CBD5E0"/>
+            </a:solidFill>
+            <a:prstDash val="solid"/>
+          </a:ln>
+        </p:spPr>
+      </p:sp>
+      <p:sp>
+        <p:nvSpPr>
+          <p:cNvPr id="17" name="Text 14"/>
+          <p:cNvSpPr/>
+          <p:nvPr/>
+        </p:nvSpPr>
+        <p:spPr>
+          <a:xfrm>
+            <a:off x="5989320" y="3282696"/>
+            <a:ext cx="1560003" cy="493776"/>
+          </a:xfrm>
+          <a:prstGeom prst="rect">
+            <a:avLst/>
+          </a:prstGeom>
+          <a:noFill/>
+          <a:ln/>
+        </p:spPr>
+        <p:txBody>
+          <a:bodyPr wrap="square" lIns="0" tIns="0" rIns="0" bIns="0" rtlCol="0" anchor="ctr"/>
+          <a:lstStyle/>
+          <a:p>
+            <a:pPr indent="0" marL="0">
+              <a:lnSpc>
+                <a:spcPct val="115000"/>
+              </a:lnSpc>
+              <a:buNone/>
+            </a:pPr>
+            <a:r>
+              <a:rPr lang="en-US" sz="1300" dirty="0">
+                <a:solidFill>
+                  <a:srgbClr val="5B6B73"/>
+                </a:solidFill>
+                <a:latin typeface="맑은 고딕" pitchFamily="34" charset="0"/>
+                <a:ea typeface="맑은 고딕" pitchFamily="34" charset="-122"/>
+                <a:cs typeface="맑은 고딕" pitchFamily="34" charset="-120"/>
+              </a:rPr>
+              <a:t>상권권역</a:t>
+            </a:r>
+            <a:endParaRPr lang="en-US" sz="1300" dirty="0"/>
+          </a:p>
+        </p:txBody>
+      </p:sp>
+      <p:sp>
+        <p:nvSpPr>
+          <p:cNvPr id="18" name="Text 15"/>
+          <p:cNvSpPr/>
+          <p:nvPr/>
+        </p:nvSpPr>
+        <p:spPr>
+          <a:xfrm>
+            <a:off x="7549323" y="3282696"/>
+            <a:ext cx="4011436" cy="493776"/>
+          </a:xfrm>
+          <a:prstGeom prst="rect">
+            <a:avLst/>
+          </a:prstGeom>
+          <a:noFill/>
+          <a:ln/>
+        </p:spPr>
+        <p:txBody>
+          <a:bodyPr wrap="square" lIns="0" tIns="0" rIns="0" bIns="0" rtlCol="0" anchor="ctr"/>
+          <a:lstStyle/>
+          <a:p>
+            <a:pPr indent="0" marL="0">
+              <a:lnSpc>
+                <a:spcPct val="115000"/>
+              </a:lnSpc>
+              <a:buNone/>
+            </a:pPr>
+            <a:r>
+              <a:rPr lang="en-US" sz="1300" b="1" dirty="0">
+                <a:solidFill>
+                  <a:srgbClr val="132A3A"/>
+                </a:solidFill>
+                <a:latin typeface="맑은 고딕" pitchFamily="34" charset="0"/>
+                <a:ea typeface="맑은 고딕" pitchFamily="34" charset="-122"/>
+                <a:cs typeface="맑은 고딕" pitchFamily="34" charset="-120"/>
+              </a:rPr>
+              <a:t>GBD 주요 상업·업무 권역</a:t>
+            </a:r>
+            <a:endParaRPr lang="en-US" sz="1300" dirty="0"/>
+          </a:p>
+        </p:txBody>
+      </p:sp>
+      <p:sp>
+        <p:nvSpPr>
+          <p:cNvPr id="19" name="Shape 16"/>
+          <p:cNvSpPr/>
+          <p:nvPr/>
+        </p:nvSpPr>
+        <p:spPr>
+          <a:xfrm>
+            <a:off x="5989320" y="3776472"/>
+            <a:ext cx="5571439" cy="0"/>
+          </a:xfrm>
+          <a:prstGeom prst="line">
+            <a:avLst/>
+          </a:prstGeom>
+          <a:noFill/>
+          <a:ln w="3810">
+            <a:solidFill>
+              <a:srgbClr val="CBD5E0"/>
+            </a:solidFill>
+            <a:prstDash val="solid"/>
+          </a:ln>
+        </p:spPr>
+      </p:sp>
+      <p:sp>
+        <p:nvSpPr>
+          <p:cNvPr id="20" name="Text 17"/>
+          <p:cNvSpPr/>
+          <p:nvPr/>
+        </p:nvSpPr>
+        <p:spPr>
+          <a:xfrm>
+            <a:off x="5989320" y="3776472"/>
+            <a:ext cx="1560003" cy="493776"/>
+          </a:xfrm>
+          <a:prstGeom prst="rect">
+            <a:avLst/>
+          </a:prstGeom>
+          <a:noFill/>
+          <a:ln/>
+        </p:spPr>
+        <p:txBody>
+          <a:bodyPr wrap="square" lIns="0" tIns="0" rIns="0" bIns="0" rtlCol="0" anchor="ctr"/>
+          <a:lstStyle/>
+          <a:p>
+            <a:pPr indent="0" marL="0">
+              <a:lnSpc>
+                <a:spcPct val="115000"/>
+              </a:lnSpc>
+              <a:buNone/>
+            </a:pPr>
+            <a:r>
+              <a:rPr lang="en-US" sz="1300" dirty="0">
+                <a:solidFill>
+                  <a:srgbClr val="5B6B73"/>
+                </a:solidFill>
+                <a:latin typeface="맑은 고딕" pitchFamily="34" charset="0"/>
+                <a:ea typeface="맑은 고딕" pitchFamily="34" charset="-122"/>
+                <a:cs typeface="맑은 고딕" pitchFamily="34" charset="-120"/>
+              </a:rPr>
+              <a:t>주요시설</a:t>
+            </a:r>
+            <a:endParaRPr lang="en-US" sz="1300" dirty="0"/>
+          </a:p>
+        </p:txBody>
+      </p:sp>
+      <p:sp>
+        <p:nvSpPr>
+          <p:cNvPr id="21" name="Text 18"/>
+          <p:cNvSpPr/>
+          <p:nvPr/>
+        </p:nvSpPr>
+        <p:spPr>
+          <a:xfrm>
+            <a:off x="7549323" y="3776472"/>
+            <a:ext cx="4011436" cy="493776"/>
+          </a:xfrm>
+          <a:prstGeom prst="rect">
+            <a:avLst/>
+          </a:prstGeom>
+          <a:noFill/>
+          <a:ln/>
+        </p:spPr>
+        <p:txBody>
+          <a:bodyPr wrap="square" lIns="0" tIns="0" rIns="0" bIns="0" rtlCol="0" anchor="ctr"/>
+          <a:lstStyle/>
+          <a:p>
+            <a:pPr indent="0" marL="0">
+              <a:lnSpc>
+                <a:spcPct val="115000"/>
+              </a:lnSpc>
+              <a:buNone/>
+            </a:pPr>
+            <a:r>
+              <a:rPr lang="en-US" sz="1300" b="1" dirty="0">
+                <a:solidFill>
+                  <a:srgbClr val="132A3A"/>
+                </a:solidFill>
+                <a:latin typeface="맑은 고딕" pitchFamily="34" charset="0"/>
+                <a:ea typeface="맑은 고딕" pitchFamily="34" charset="-122"/>
+                <a:cs typeface="맑은 고딕" pitchFamily="34" charset="-120"/>
+              </a:rPr>
+              <a:t>강남을지병원사거리 도보 3분 (약 200m)</a:t>
+            </a:r>
+            <a:endParaRPr lang="en-US" sz="1300" dirty="0"/>
+          </a:p>
+        </p:txBody>
+      </p:sp>
+      <p:sp>
+        <p:nvSpPr>
+          <p:cNvPr id="22" name="Shape 19"/>
+          <p:cNvSpPr/>
+          <p:nvPr/>
+        </p:nvSpPr>
+        <p:spPr>
+          <a:xfrm>
+            <a:off x="5989320" y="4407408"/>
+            <a:ext cx="5571439" cy="1316736"/>
           </a:xfrm>
           <a:prstGeom prst="roundRect">
             <a:avLst>
-              <a:gd name="adj" fmla="val 8333"/>
+              <a:gd name="adj" fmla="val 4167"/>
             </a:avLst>
           </a:prstGeom>
           <a:solidFill>
@@ -5479,14 +6127,14 @@
       </p:sp>
       <p:sp>
         <p:nvSpPr>
-          <p:cNvPr id="14" name="Shape 11"/>
-          <p:cNvSpPr/>
-          <p:nvPr/>
-        </p:nvSpPr>
-        <p:spPr>
-          <a:xfrm>
-            <a:off x="5989320" y="2980944"/>
-            <a:ext cx="36576" cy="548640"/>
+          <p:cNvPr id="23" name="Shape 20"/>
+          <p:cNvSpPr/>
+          <p:nvPr/>
+        </p:nvSpPr>
+        <p:spPr>
+          <a:xfrm>
+            <a:off x="5989320" y="4462272"/>
+            <a:ext cx="36576" cy="1207008"/>
           </a:xfrm>
           <a:prstGeom prst="rect">
             <a:avLst/>
@@ -5499,13 +6147,13 @@
       </p:sp>
       <p:sp>
         <p:nvSpPr>
-          <p:cNvPr id="15" name="Text 12"/>
-          <p:cNvSpPr/>
-          <p:nvPr/>
-        </p:nvSpPr>
-        <p:spPr>
-          <a:xfrm>
-            <a:off x="6135624" y="3017520"/>
+          <p:cNvPr id="24" name="Text 21"/>
+          <p:cNvSpPr/>
+          <p:nvPr/>
+        </p:nvSpPr>
+        <p:spPr>
+          <a:xfrm>
+            <a:off x="6135624" y="4498848"/>
             <a:ext cx="5315407" cy="201168"/>
           </a:xfrm>
           <a:prstGeom prst="rect">
@@ -5538,14 +6186,14 @@
       </p:sp>
       <p:sp>
         <p:nvSpPr>
-          <p:cNvPr id="16" name="Text 13"/>
-          <p:cNvSpPr/>
-          <p:nvPr/>
-        </p:nvSpPr>
-        <p:spPr>
-          <a:xfrm>
-            <a:off x="6135624" y="3218688"/>
-            <a:ext cx="5315407" cy="329184"/>
+          <p:cNvPr id="25" name="Text 22"/>
+          <p:cNvSpPr/>
+          <p:nvPr/>
+        </p:nvSpPr>
+        <p:spPr>
+          <a:xfrm>
+            <a:off x="6135624" y="4700016"/>
+            <a:ext cx="5315407" cy="987552"/>
           </a:xfrm>
           <a:prstGeom prst="rect">
             <a:avLst/>
@@ -5573,15 +6221,63 @@
                 <a:ea typeface="맑은 고딕" pitchFamily="34" charset="-122"/>
                 <a:cs typeface="맑은 고딕" pitchFamily="34" charset="-120"/>
               </a:rPr>
-              <a:t>760억 배후 상권 기반 안정적 임대 수요</a:t>
+              <a:t>압구정역 도보 역세권으로 양호한 대중교통 접근성</a:t>
             </a:r>
             <a:endParaRPr lang="en-US" sz="980" dirty="0"/>
           </a:p>
-        </p:txBody>
-      </p:sp>
-      <p:sp>
-        <p:nvSpPr>
-          <p:cNvPr id="17" name="Text 14"/>
+          <a:p>
+            <a:pPr marL="342900" indent="-342900">
+              <a:lnSpc>
+                <a:spcPct val="108000"/>
+              </a:lnSpc>
+              <a:spcBef>
+                <a:spcPts val="300"/>
+              </a:spcBef>
+              <a:buSzPct val="100000"/>
+              <a:buChar char="•"/>
+            </a:pPr>
+            <a:r>
+              <a:rPr lang="en-US" sz="980" dirty="0">
+                <a:solidFill>
+                  <a:srgbClr val="2B2B2B"/>
+                </a:solidFill>
+                <a:latin typeface="맑은 고딕" pitchFamily="34" charset="0"/>
+                <a:ea typeface="맑은 고딕" pitchFamily="34" charset="-122"/>
+                <a:cs typeface="맑은 고딕" pitchFamily="34" charset="-120"/>
+              </a:rPr>
+              <a:t>논현로 이면 코너 (북측 8m, 동측 6m) 접면 차량 진출입 양호</a:t>
+            </a:r>
+            <a:endParaRPr lang="en-US" sz="980" dirty="0"/>
+          </a:p>
+          <a:p>
+            <a:pPr marL="342900" indent="-342900">
+              <a:lnSpc>
+                <a:spcPct val="108000"/>
+              </a:lnSpc>
+              <a:spcBef>
+                <a:spcPts val="300"/>
+              </a:spcBef>
+              <a:buSzPct val="100000"/>
+              <a:buChar char="•"/>
+            </a:pPr>
+            <a:r>
+              <a:rPr lang="en-US" sz="980" dirty="0">
+                <a:solidFill>
+                  <a:srgbClr val="2B2B2B"/>
+                </a:solidFill>
+                <a:latin typeface="맑은 고딕" pitchFamily="34" charset="0"/>
+                <a:ea typeface="맑은 고딕" pitchFamily="34" charset="-122"/>
+                <a:cs typeface="맑은 고딕" pitchFamily="34" charset="-120"/>
+              </a:rPr>
+              <a:t>GBD 배후 상권 기반 안정적 임대 수요</a:t>
+            </a:r>
+            <a:endParaRPr lang="en-US" sz="980" dirty="0"/>
+          </a:p>
+        </p:txBody>
+      </p:sp>
+      <p:sp>
+        <p:nvSpPr>
+          <p:cNvPr id="26" name="Text 23"/>
           <p:cNvSpPr/>
           <p:nvPr/>
         </p:nvSpPr>
@@ -5620,7 +6316,7 @@
       </p:sp>
       <p:sp>
         <p:nvSpPr>
-          <p:cNvPr id="18" name="Text 15"/>
+          <p:cNvPr id="27" name="Text 24"/>
           <p:cNvSpPr/>
           <p:nvPr/>
         </p:nvSpPr>
@@ -5859,7 +6555,7 @@
                 <a:ea typeface="맑은 고딕" pitchFamily="34" charset="-122"/>
                 <a:cs typeface="맑은 고딕" pitchFamily="34" charset="-120"/>
               </a:rPr>
-              <a:t>토지 현황</a:t>
+              <a:t>토지이용계획 · 규제 분석</a:t>
             </a:r>
             <a:endParaRPr lang="en-US" sz="1100" dirty="0"/>
           </a:p>
@@ -5874,7 +6570,7 @@
         <p:spPr>
           <a:xfrm>
             <a:off x="502920" y="1645920"/>
-            <a:ext cx="1920240" cy="402336"/>
+            <a:ext cx="1920240" cy="329184"/>
           </a:xfrm>
           <a:prstGeom prst="rect">
             <a:avLst/>
@@ -5893,7 +6589,7 @@
               <a:buNone/>
             </a:pPr>
             <a:r>
-              <a:rPr lang="en-US" sz="1350" dirty="0">
+              <a:rPr lang="en-US" sz="1200" dirty="0">
                 <a:solidFill>
                   <a:srgbClr val="5B6B73"/>
                 </a:solidFill>
@@ -5903,7 +6599,7 @@
               </a:rPr>
               <a:t>대지면적</a:t>
             </a:r>
-            <a:endParaRPr lang="en-US" sz="1350" dirty="0"/>
+            <a:endParaRPr lang="en-US" sz="1200" dirty="0"/>
           </a:p>
         </p:txBody>
       </p:sp>
@@ -5916,7 +6612,7 @@
         <p:spPr>
           <a:xfrm>
             <a:off x="2423160" y="1645920"/>
-            <a:ext cx="4937760" cy="402336"/>
+            <a:ext cx="4937760" cy="329184"/>
           </a:xfrm>
           <a:prstGeom prst="rect">
             <a:avLst/>
@@ -5935,7 +6631,7 @@
               <a:buNone/>
             </a:pPr>
             <a:r>
-              <a:rPr lang="en-US" sz="1350" b="1" dirty="0">
+              <a:rPr lang="en-US" sz="1200" b="1" dirty="0">
                 <a:solidFill>
                   <a:srgbClr val="132A3A"/>
                 </a:solidFill>
@@ -5945,7 +6641,7 @@
               </a:rPr>
               <a:t>1,061.9㎡ (321.2평)</a:t>
             </a:r>
-            <a:endParaRPr lang="en-US" sz="1350" dirty="0"/>
+            <a:endParaRPr lang="en-US" sz="1200" dirty="0"/>
           </a:p>
         </p:txBody>
       </p:sp>
@@ -5957,7 +6653,7 @@
         </p:nvSpPr>
         <p:spPr>
           <a:xfrm>
-            <a:off x="502920" y="2048256"/>
+            <a:off x="502920" y="1975104"/>
             <a:ext cx="6858000" cy="0"/>
           </a:xfrm>
           <a:prstGeom prst="line">
@@ -5980,8 +6676,8 @@
         </p:nvSpPr>
         <p:spPr>
           <a:xfrm>
-            <a:off x="502920" y="2048256"/>
-            <a:ext cx="1920240" cy="402336"/>
+            <a:off x="502920" y="1975104"/>
+            <a:ext cx="1920240" cy="329184"/>
           </a:xfrm>
           <a:prstGeom prst="rect">
             <a:avLst/>
@@ -6000,7 +6696,7 @@
               <a:buNone/>
             </a:pPr>
             <a:r>
-              <a:rPr lang="en-US" sz="1350" dirty="0">
+              <a:rPr lang="en-US" sz="1200" dirty="0">
                 <a:solidFill>
                   <a:srgbClr val="5B6B73"/>
                 </a:solidFill>
@@ -6008,9 +6704,9 @@
                 <a:ea typeface="맑은 고딕" pitchFamily="34" charset="-122"/>
                 <a:cs typeface="맑은 고딕" pitchFamily="34" charset="-120"/>
               </a:rPr>
-              <a:t>연면적</a:t>
-            </a:r>
-            <a:endParaRPr lang="en-US" sz="1350" dirty="0"/>
+              <a:t>용도지역</a:t>
+            </a:r>
+            <a:endParaRPr lang="en-US" sz="1200" dirty="0"/>
           </a:p>
         </p:txBody>
       </p:sp>
@@ -6022,8 +6718,8 @@
         </p:nvSpPr>
         <p:spPr>
           <a:xfrm>
-            <a:off x="2423160" y="2048256"/>
-            <a:ext cx="4937760" cy="402336"/>
+            <a:off x="2423160" y="1975104"/>
+            <a:ext cx="4937760" cy="329184"/>
           </a:xfrm>
           <a:prstGeom prst="rect">
             <a:avLst/>
@@ -6042,7 +6738,7 @@
               <a:buNone/>
             </a:pPr>
             <a:r>
-              <a:rPr lang="en-US" sz="1350" b="1" dirty="0">
+              <a:rPr lang="en-US" sz="1200" b="1" dirty="0">
                 <a:solidFill>
                   <a:srgbClr val="132A3A"/>
                 </a:solidFill>
@@ -6050,9 +6746,9 @@
                 <a:ea typeface="맑은 고딕" pitchFamily="34" charset="-122"/>
                 <a:cs typeface="맑은 고딕" pitchFamily="34" charset="-120"/>
               </a:rPr>
-              <a:t>3,341.8㎡ (1,010.9평)</a:t>
-            </a:r>
-            <a:endParaRPr lang="en-US" sz="1350" dirty="0"/>
+              <a:t>제3종일반주거지역</a:t>
+            </a:r>
+            <a:endParaRPr lang="en-US" sz="1200" dirty="0"/>
           </a:p>
         </p:txBody>
       </p:sp>
@@ -6064,7 +6760,7 @@
         </p:nvSpPr>
         <p:spPr>
           <a:xfrm>
-            <a:off x="502920" y="2450592"/>
+            <a:off x="502920" y="2304288"/>
             <a:ext cx="6858000" cy="0"/>
           </a:xfrm>
           <a:prstGeom prst="line">
@@ -6087,8 +6783,8 @@
         </p:nvSpPr>
         <p:spPr>
           <a:xfrm>
-            <a:off x="502920" y="2450592"/>
-            <a:ext cx="1920240" cy="402336"/>
+            <a:off x="502920" y="2304288"/>
+            <a:ext cx="1920240" cy="329184"/>
           </a:xfrm>
           <a:prstGeom prst="rect">
             <a:avLst/>
@@ -6107,7 +6803,7 @@
               <a:buNone/>
             </a:pPr>
             <a:r>
-              <a:rPr lang="en-US" sz="1350" dirty="0">
+              <a:rPr lang="en-US" sz="1200" dirty="0">
                 <a:solidFill>
                   <a:srgbClr val="5B6B73"/>
                 </a:solidFill>
@@ -6115,9 +6811,9 @@
                 <a:ea typeface="맑은 고딕" pitchFamily="34" charset="-122"/>
                 <a:cs typeface="맑은 고딕" pitchFamily="34" charset="-120"/>
               </a:rPr>
-              <a:t>용도지역</a:t>
-            </a:r>
-            <a:endParaRPr lang="en-US" sz="1350" dirty="0"/>
+              <a:t>건폐율</a:t>
+            </a:r>
+            <a:endParaRPr lang="en-US" sz="1200" dirty="0"/>
           </a:p>
         </p:txBody>
       </p:sp>
@@ -6129,8 +6825,8 @@
         </p:nvSpPr>
         <p:spPr>
           <a:xfrm>
-            <a:off x="2423160" y="2450592"/>
-            <a:ext cx="4937760" cy="402336"/>
+            <a:off x="2423160" y="2304288"/>
+            <a:ext cx="4937760" cy="329184"/>
           </a:xfrm>
           <a:prstGeom prst="rect">
             <a:avLst/>
@@ -6149,7 +6845,7 @@
               <a:buNone/>
             </a:pPr>
             <a:r>
-              <a:rPr lang="en-US" sz="1350" b="1" dirty="0">
+              <a:rPr lang="en-US" sz="1200" b="1" dirty="0">
                 <a:solidFill>
                   <a:srgbClr val="132A3A"/>
                 </a:solidFill>
@@ -6157,15 +6853,443 @@
                 <a:ea typeface="맑은 고딕" pitchFamily="34" charset="-122"/>
                 <a:cs typeface="맑은 고딕" pitchFamily="34" charset="-120"/>
               </a:rPr>
-              <a:t>제3종일반주거지역</a:t>
-            </a:r>
-            <a:endParaRPr lang="en-US" sz="1350" dirty="0"/>
+              <a:t>현행 51.3% (법정 상한 50%)</a:t>
+            </a:r>
+            <a:endParaRPr lang="en-US" sz="1200" dirty="0"/>
           </a:p>
         </p:txBody>
       </p:sp>
       <p:sp>
         <p:nvSpPr>
           <p:cNvPr id="15" name="Shape 13"/>
+          <p:cNvSpPr/>
+          <p:nvPr/>
+        </p:nvSpPr>
+        <p:spPr>
+          <a:xfrm>
+            <a:off x="502920" y="2633472"/>
+            <a:ext cx="6858000" cy="0"/>
+          </a:xfrm>
+          <a:prstGeom prst="line">
+            <a:avLst/>
+          </a:prstGeom>
+          <a:noFill/>
+          <a:ln w="3810">
+            <a:solidFill>
+              <a:srgbClr val="CBD5E0"/>
+            </a:solidFill>
+            <a:prstDash val="solid"/>
+          </a:ln>
+        </p:spPr>
+      </p:sp>
+      <p:sp>
+        <p:nvSpPr>
+          <p:cNvPr id="16" name="Text 14"/>
+          <p:cNvSpPr/>
+          <p:nvPr/>
+        </p:nvSpPr>
+        <p:spPr>
+          <a:xfrm>
+            <a:off x="502920" y="2633472"/>
+            <a:ext cx="1920240" cy="329184"/>
+          </a:xfrm>
+          <a:prstGeom prst="rect">
+            <a:avLst/>
+          </a:prstGeom>
+          <a:noFill/>
+          <a:ln/>
+        </p:spPr>
+        <p:txBody>
+          <a:bodyPr wrap="square" lIns="0" tIns="0" rIns="0" bIns="0" rtlCol="0" anchor="ctr"/>
+          <a:lstStyle/>
+          <a:p>
+            <a:pPr indent="0" marL="0">
+              <a:lnSpc>
+                <a:spcPct val="115000"/>
+              </a:lnSpc>
+              <a:buNone/>
+            </a:pPr>
+            <a:r>
+              <a:rPr lang="en-US" sz="1200" dirty="0">
+                <a:solidFill>
+                  <a:srgbClr val="5B6B73"/>
+                </a:solidFill>
+                <a:latin typeface="맑은 고딕" pitchFamily="34" charset="0"/>
+                <a:ea typeface="맑은 고딕" pitchFamily="34" charset="-122"/>
+                <a:cs typeface="맑은 고딕" pitchFamily="34" charset="-120"/>
+              </a:rPr>
+              <a:t>용적률</a:t>
+            </a:r>
+            <a:endParaRPr lang="en-US" sz="1200" dirty="0"/>
+          </a:p>
+        </p:txBody>
+      </p:sp>
+      <p:sp>
+        <p:nvSpPr>
+          <p:cNvPr id="17" name="Text 15"/>
+          <p:cNvSpPr/>
+          <p:nvPr/>
+        </p:nvSpPr>
+        <p:spPr>
+          <a:xfrm>
+            <a:off x="2423160" y="2633472"/>
+            <a:ext cx="4937760" cy="329184"/>
+          </a:xfrm>
+          <a:prstGeom prst="rect">
+            <a:avLst/>
+          </a:prstGeom>
+          <a:noFill/>
+          <a:ln/>
+        </p:spPr>
+        <p:txBody>
+          <a:bodyPr wrap="square" lIns="0" tIns="0" rIns="0" bIns="0" rtlCol="0" anchor="ctr"/>
+          <a:lstStyle/>
+          <a:p>
+            <a:pPr indent="0" marL="0">
+              <a:lnSpc>
+                <a:spcPct val="115000"/>
+              </a:lnSpc>
+              <a:buNone/>
+            </a:pPr>
+            <a:r>
+              <a:rPr lang="en-US" sz="1200" b="1" dirty="0">
+                <a:solidFill>
+                  <a:srgbClr val="132A3A"/>
+                </a:solidFill>
+                <a:latin typeface="맑은 고딕" pitchFamily="34" charset="0"/>
+                <a:ea typeface="맑은 고딕" pitchFamily="34" charset="-122"/>
+                <a:cs typeface="맑은 고딕" pitchFamily="34" charset="-120"/>
+              </a:rPr>
+              <a:t>현행 237.2% (법정 상한 250%)</a:t>
+            </a:r>
+            <a:endParaRPr lang="en-US" sz="1200" dirty="0"/>
+          </a:p>
+        </p:txBody>
+      </p:sp>
+      <p:sp>
+        <p:nvSpPr>
+          <p:cNvPr id="18" name="Shape 16"/>
+          <p:cNvSpPr/>
+          <p:nvPr/>
+        </p:nvSpPr>
+        <p:spPr>
+          <a:xfrm>
+            <a:off x="502920" y="2962656"/>
+            <a:ext cx="6858000" cy="0"/>
+          </a:xfrm>
+          <a:prstGeom prst="line">
+            <a:avLst/>
+          </a:prstGeom>
+          <a:noFill/>
+          <a:ln w="3810">
+            <a:solidFill>
+              <a:srgbClr val="CBD5E0"/>
+            </a:solidFill>
+            <a:prstDash val="solid"/>
+          </a:ln>
+        </p:spPr>
+      </p:sp>
+      <p:sp>
+        <p:nvSpPr>
+          <p:cNvPr id="19" name="Text 17"/>
+          <p:cNvSpPr/>
+          <p:nvPr/>
+        </p:nvSpPr>
+        <p:spPr>
+          <a:xfrm>
+            <a:off x="502920" y="2962656"/>
+            <a:ext cx="1920240" cy="329184"/>
+          </a:xfrm>
+          <a:prstGeom prst="rect">
+            <a:avLst/>
+          </a:prstGeom>
+          <a:noFill/>
+          <a:ln/>
+        </p:spPr>
+        <p:txBody>
+          <a:bodyPr wrap="square" lIns="0" tIns="0" rIns="0" bIns="0" rtlCol="0" anchor="ctr"/>
+          <a:lstStyle/>
+          <a:p>
+            <a:pPr indent="0" marL="0">
+              <a:lnSpc>
+                <a:spcPct val="115000"/>
+              </a:lnSpc>
+              <a:buNone/>
+            </a:pPr>
+            <a:r>
+              <a:rPr lang="en-US" sz="1200" dirty="0">
+                <a:solidFill>
+                  <a:srgbClr val="5B6B73"/>
+                </a:solidFill>
+                <a:latin typeface="맑은 고딕" pitchFamily="34" charset="0"/>
+                <a:ea typeface="맑은 고딕" pitchFamily="34" charset="-122"/>
+                <a:cs typeface="맑은 고딕" pitchFamily="34" charset="-120"/>
+              </a:rPr>
+              <a:t>도로접면</a:t>
+            </a:r>
+            <a:endParaRPr lang="en-US" sz="1200" dirty="0"/>
+          </a:p>
+        </p:txBody>
+      </p:sp>
+      <p:sp>
+        <p:nvSpPr>
+          <p:cNvPr id="20" name="Text 18"/>
+          <p:cNvSpPr/>
+          <p:nvPr/>
+        </p:nvSpPr>
+        <p:spPr>
+          <a:xfrm>
+            <a:off x="2423160" y="2962656"/>
+            <a:ext cx="4937760" cy="329184"/>
+          </a:xfrm>
+          <a:prstGeom prst="rect">
+            <a:avLst/>
+          </a:prstGeom>
+          <a:noFill/>
+          <a:ln/>
+        </p:spPr>
+        <p:txBody>
+          <a:bodyPr wrap="square" lIns="0" tIns="0" rIns="0" bIns="0" rtlCol="0" anchor="ctr"/>
+          <a:lstStyle/>
+          <a:p>
+            <a:pPr indent="0" marL="0">
+              <a:lnSpc>
+                <a:spcPct val="115000"/>
+              </a:lnSpc>
+              <a:buNone/>
+            </a:pPr>
+            <a:r>
+              <a:rPr lang="en-US" sz="1200" b="1" dirty="0">
+                <a:solidFill>
+                  <a:srgbClr val="132A3A"/>
+                </a:solidFill>
+                <a:latin typeface="맑은 고딕" pitchFamily="34" charset="0"/>
+                <a:ea typeface="맑은 고딕" pitchFamily="34" charset="-122"/>
+                <a:cs typeface="맑은 고딕" pitchFamily="34" charset="-120"/>
+              </a:rPr>
+              <a:t>논현로 이면 코너 (북측 8m, 동측 6m)</a:t>
+            </a:r>
+            <a:endParaRPr lang="en-US" sz="1200" dirty="0"/>
+          </a:p>
+        </p:txBody>
+      </p:sp>
+      <p:sp>
+        <p:nvSpPr>
+          <p:cNvPr id="21" name="Shape 19"/>
+          <p:cNvSpPr/>
+          <p:nvPr/>
+        </p:nvSpPr>
+        <p:spPr>
+          <a:xfrm>
+            <a:off x="502920" y="3291840"/>
+            <a:ext cx="6858000" cy="0"/>
+          </a:xfrm>
+          <a:prstGeom prst="line">
+            <a:avLst/>
+          </a:prstGeom>
+          <a:noFill/>
+          <a:ln w="3810">
+            <a:solidFill>
+              <a:srgbClr val="CBD5E0"/>
+            </a:solidFill>
+            <a:prstDash val="solid"/>
+          </a:ln>
+        </p:spPr>
+      </p:sp>
+      <p:sp>
+        <p:nvSpPr>
+          <p:cNvPr id="22" name="Text 20"/>
+          <p:cNvSpPr/>
+          <p:nvPr/>
+        </p:nvSpPr>
+        <p:spPr>
+          <a:xfrm>
+            <a:off x="502920" y="3291840"/>
+            <a:ext cx="1920240" cy="329184"/>
+          </a:xfrm>
+          <a:prstGeom prst="rect">
+            <a:avLst/>
+          </a:prstGeom>
+          <a:noFill/>
+          <a:ln/>
+        </p:spPr>
+        <p:txBody>
+          <a:bodyPr wrap="square" lIns="0" tIns="0" rIns="0" bIns="0" rtlCol="0" anchor="ctr"/>
+          <a:lstStyle/>
+          <a:p>
+            <a:pPr indent="0" marL="0">
+              <a:lnSpc>
+                <a:spcPct val="115000"/>
+              </a:lnSpc>
+              <a:buNone/>
+            </a:pPr>
+            <a:r>
+              <a:rPr lang="en-US" sz="1200" dirty="0">
+                <a:solidFill>
+                  <a:srgbClr val="5B6B73"/>
+                </a:solidFill>
+                <a:latin typeface="맑은 고딕" pitchFamily="34" charset="0"/>
+                <a:ea typeface="맑은 고딕" pitchFamily="34" charset="-122"/>
+                <a:cs typeface="맑은 고딕" pitchFamily="34" charset="-120"/>
+              </a:rPr>
+              <a:t>지목</a:t>
+            </a:r>
+            <a:endParaRPr lang="en-US" sz="1200" dirty="0"/>
+          </a:p>
+        </p:txBody>
+      </p:sp>
+      <p:sp>
+        <p:nvSpPr>
+          <p:cNvPr id="23" name="Text 21"/>
+          <p:cNvSpPr/>
+          <p:nvPr/>
+        </p:nvSpPr>
+        <p:spPr>
+          <a:xfrm>
+            <a:off x="2423160" y="3291840"/>
+            <a:ext cx="4937760" cy="329184"/>
+          </a:xfrm>
+          <a:prstGeom prst="rect">
+            <a:avLst/>
+          </a:prstGeom>
+          <a:noFill/>
+          <a:ln/>
+        </p:spPr>
+        <p:txBody>
+          <a:bodyPr wrap="square" lIns="0" tIns="0" rIns="0" bIns="0" rtlCol="0" anchor="ctr"/>
+          <a:lstStyle/>
+          <a:p>
+            <a:pPr indent="0" marL="0">
+              <a:lnSpc>
+                <a:spcPct val="115000"/>
+              </a:lnSpc>
+              <a:buNone/>
+            </a:pPr>
+            <a:r>
+              <a:rPr lang="en-US" sz="1200" b="1" dirty="0">
+                <a:solidFill>
+                  <a:srgbClr val="132A3A"/>
+                </a:solidFill>
+                <a:latin typeface="맑은 고딕" pitchFamily="34" charset="0"/>
+                <a:ea typeface="맑은 고딕" pitchFamily="34" charset="-122"/>
+                <a:cs typeface="맑은 고딕" pitchFamily="34" charset="-120"/>
+              </a:rPr>
+              <a:t>대</a:t>
+            </a:r>
+            <a:endParaRPr lang="en-US" sz="1200" dirty="0"/>
+          </a:p>
+        </p:txBody>
+      </p:sp>
+      <p:sp>
+        <p:nvSpPr>
+          <p:cNvPr id="24" name="Shape 22"/>
+          <p:cNvSpPr/>
+          <p:nvPr/>
+        </p:nvSpPr>
+        <p:spPr>
+          <a:xfrm>
+            <a:off x="502920" y="3621024"/>
+            <a:ext cx="6858000" cy="0"/>
+          </a:xfrm>
+          <a:prstGeom prst="line">
+            <a:avLst/>
+          </a:prstGeom>
+          <a:noFill/>
+          <a:ln w="3810">
+            <a:solidFill>
+              <a:srgbClr val="CBD5E0"/>
+            </a:solidFill>
+            <a:prstDash val="solid"/>
+          </a:ln>
+        </p:spPr>
+      </p:sp>
+      <p:sp>
+        <p:nvSpPr>
+          <p:cNvPr id="25" name="Text 23"/>
+          <p:cNvSpPr/>
+          <p:nvPr/>
+        </p:nvSpPr>
+        <p:spPr>
+          <a:xfrm>
+            <a:off x="502920" y="3621024"/>
+            <a:ext cx="1920240" cy="329184"/>
+          </a:xfrm>
+          <a:prstGeom prst="rect">
+            <a:avLst/>
+          </a:prstGeom>
+          <a:noFill/>
+          <a:ln/>
+        </p:spPr>
+        <p:txBody>
+          <a:bodyPr wrap="square" lIns="0" tIns="0" rIns="0" bIns="0" rtlCol="0" anchor="ctr"/>
+          <a:lstStyle/>
+          <a:p>
+            <a:pPr indent="0" marL="0">
+              <a:lnSpc>
+                <a:spcPct val="115000"/>
+              </a:lnSpc>
+              <a:buNone/>
+            </a:pPr>
+            <a:r>
+              <a:rPr lang="en-US" sz="1200" dirty="0">
+                <a:solidFill>
+                  <a:srgbClr val="5B6B73"/>
+                </a:solidFill>
+                <a:latin typeface="맑은 고딕" pitchFamily="34" charset="0"/>
+                <a:ea typeface="맑은 고딕" pitchFamily="34" charset="-122"/>
+                <a:cs typeface="맑은 고딕" pitchFamily="34" charset="-120"/>
+              </a:rPr>
+              <a:t>토지평당가</a:t>
+            </a:r>
+            <a:endParaRPr lang="en-US" sz="1200" dirty="0"/>
+          </a:p>
+        </p:txBody>
+      </p:sp>
+      <p:sp>
+        <p:nvSpPr>
+          <p:cNvPr id="26" name="Text 24"/>
+          <p:cNvSpPr/>
+          <p:nvPr/>
+        </p:nvSpPr>
+        <p:spPr>
+          <a:xfrm>
+            <a:off x="2423160" y="3621024"/>
+            <a:ext cx="4937760" cy="329184"/>
+          </a:xfrm>
+          <a:prstGeom prst="rect">
+            <a:avLst/>
+          </a:prstGeom>
+          <a:noFill/>
+          <a:ln/>
+        </p:spPr>
+        <p:txBody>
+          <a:bodyPr wrap="square" lIns="0" tIns="0" rIns="0" bIns="0" rtlCol="0" anchor="ctr"/>
+          <a:lstStyle/>
+          <a:p>
+            <a:pPr indent="0" marL="0">
+              <a:lnSpc>
+                <a:spcPct val="115000"/>
+              </a:lnSpc>
+              <a:buNone/>
+            </a:pPr>
+            <a:r>
+              <a:rPr lang="en-US" sz="1200" b="1" dirty="0">
+                <a:solidFill>
+                  <a:srgbClr val="132A3A"/>
+                </a:solidFill>
+                <a:latin typeface="맑은 고딕" pitchFamily="34" charset="0"/>
+                <a:ea typeface="맑은 고딕" pitchFamily="34" charset="-122"/>
+                <a:cs typeface="맑은 고딕" pitchFamily="34" charset="-120"/>
+              </a:rPr>
+              <a:t>약 23,659만 원/평</a:t>
+            </a:r>
+            <a:endParaRPr lang="en-US" sz="1200" dirty="0"/>
+          </a:p>
+        </p:txBody>
+      </p:sp>
+      <p:sp>
+        <p:nvSpPr>
+          <p:cNvPr id="27" name="Shape 25"/>
           <p:cNvSpPr/>
           <p:nvPr/>
         </p:nvSpPr>
@@ -6186,20 +7310,43 @@
           </a:ln>
         </p:spPr>
       </p:sp>
-      <p:sp>
-        <p:nvSpPr>
-          <p:cNvPr id="16" name="Shape 14"/>
-          <p:cNvSpPr/>
-          <p:nvPr/>
-        </p:nvSpPr>
+      <p:pic>
+        <p:nvPicPr>
+          <p:cNvPr id="28" name="Image 0" descr="preencoded.png">    </p:cNvPr>
+          <p:cNvPicPr>
+            <a:picLocks noChangeAspect="1"/>
+          </p:cNvPicPr>
+          <p:nvPr/>
+        </p:nvPicPr>
+        <p:blipFill>
+          <a:blip r:embed="rId1"/>
+          <a:srcRect l="0" r="0" t="0" b="0"/>
+          <a:stretch/>
+        </p:blipFill>
         <p:spPr>
           <a:xfrm>
             <a:off x="7720279" y="1645920"/>
-            <a:ext cx="3840480" cy="2103120"/>
+            <a:ext cx="3840480" cy="2926080"/>
+          </a:xfrm>
+          <a:prstGeom prst="rect">
+            <a:avLst/>
+          </a:prstGeom>
+        </p:spPr>
+      </p:pic>
+      <p:sp>
+        <p:nvSpPr>
+          <p:cNvPr id="29" name="Shape 26"/>
+          <p:cNvSpPr/>
+          <p:nvPr/>
+        </p:nvSpPr>
+        <p:spPr>
+          <a:xfrm>
+            <a:off x="7720279" y="4681728"/>
+            <a:ext cx="3840480" cy="1508760"/>
           </a:xfrm>
           <a:prstGeom prst="roundRect">
             <a:avLst>
-              <a:gd name="adj" fmla="val 2609"/>
+              <a:gd name="adj" fmla="val 3636"/>
             </a:avLst>
           </a:prstGeom>
           <a:solidFill>
@@ -6210,14 +7357,14 @@
       </p:sp>
       <p:sp>
         <p:nvSpPr>
-          <p:cNvPr id="17" name="Shape 15"/>
-          <p:cNvSpPr/>
-          <p:nvPr/>
-        </p:nvSpPr>
-        <p:spPr>
-          <a:xfrm>
-            <a:off x="7720279" y="1700784"/>
-            <a:ext cx="36576" cy="1993392"/>
+          <p:cNvPr id="30" name="Shape 27"/>
+          <p:cNvSpPr/>
+          <p:nvPr/>
+        </p:nvSpPr>
+        <p:spPr>
+          <a:xfrm>
+            <a:off x="7720279" y="4736592"/>
+            <a:ext cx="36576" cy="1399032"/>
           </a:xfrm>
           <a:prstGeom prst="rect">
             <a:avLst/>
@@ -6230,13 +7377,13 @@
       </p:sp>
       <p:sp>
         <p:nvSpPr>
-          <p:cNvPr id="18" name="Text 16"/>
-          <p:cNvSpPr/>
-          <p:nvPr/>
-        </p:nvSpPr>
-        <p:spPr>
-          <a:xfrm>
-            <a:off x="7866583" y="1737360"/>
+          <p:cNvPr id="31" name="Text 28"/>
+          <p:cNvSpPr/>
+          <p:nvPr/>
+        </p:nvSpPr>
+        <p:spPr>
+          <a:xfrm>
+            <a:off x="7866583" y="4773168"/>
             <a:ext cx="3584448" cy="201168"/>
           </a:xfrm>
           <a:prstGeom prst="rect">
@@ -6261,7 +7408,7 @@
                 <a:ea typeface="맑은 고딕" pitchFamily="34" charset="-122"/>
                 <a:cs typeface="맑은 고딕" pitchFamily="34" charset="-120"/>
               </a:rPr>
-              <a:t>토지 및 건축 규제 포인트</a:t>
+              <a:t>자산 하이라이트</a:t>
             </a:r>
             <a:endParaRPr lang="en-US" sz="1050" dirty="0"/>
           </a:p>
@@ -6269,14 +7416,14 @@
       </p:sp>
       <p:sp>
         <p:nvSpPr>
-          <p:cNvPr id="19" name="Text 17"/>
-          <p:cNvSpPr/>
-          <p:nvPr/>
-        </p:nvSpPr>
-        <p:spPr>
-          <a:xfrm>
-            <a:off x="7866583" y="1938528"/>
-            <a:ext cx="3584448" cy="1773936"/>
+          <p:cNvPr id="32" name="Text 29"/>
+          <p:cNvSpPr/>
+          <p:nvPr/>
+        </p:nvSpPr>
+        <p:spPr>
+          <a:xfrm>
+            <a:off x="7866583" y="4974336"/>
+            <a:ext cx="3584448" cy="1179576"/>
           </a:xfrm>
           <a:prstGeom prst="rect">
             <a:avLst/>
@@ -6304,235 +7451,15 @@
                 <a:ea typeface="맑은 고딕" pitchFamily="34" charset="-122"/>
                 <a:cs typeface="맑은 고딕" pitchFamily="34" charset="-120"/>
               </a:rPr>
-              <a:t>용도지역·용도지구 기준 건폐율/용적률 상한 확인</a:t>
+              <a:t>현 건폐율 51.3%, 용적률 237.2% (법정 상한: 건폐율 50%, 용적률 250%) • 제3종일반주거지역 기준 법정 상한 대비 용적률 상향 및 밸류애드 잠재력 보유 • 논현로 이면 코너 (북측 8m, 동측 6m) 접면으로 보행자 접근성 및 차량 진출입 동선 우수</a:t>
             </a:r>
             <a:endParaRPr lang="en-US" sz="980" dirty="0"/>
           </a:p>
-          <a:p>
-            <a:pPr marL="342900" indent="-342900">
-              <a:lnSpc>
-                <a:spcPct val="108000"/>
-              </a:lnSpc>
-              <a:spcBef>
-                <a:spcPts val="300"/>
-              </a:spcBef>
-              <a:buSzPct val="100000"/>
-              <a:buChar char="•"/>
-            </a:pPr>
-            <a:r>
-              <a:rPr lang="en-US" sz="980" dirty="0">
-                <a:solidFill>
-                  <a:srgbClr val="2B2B2B"/>
-                </a:solidFill>
-                <a:latin typeface="맑은 고딕" pitchFamily="34" charset="0"/>
-                <a:ea typeface="맑은 고딕" pitchFamily="34" charset="-122"/>
-                <a:cs typeface="맑은 고딕" pitchFamily="34" charset="-120"/>
-              </a:rPr>
-              <a:t>필지 형상 및 접도 조건에 따른 건축 가능 면적 검토</a:t>
-            </a:r>
-            <a:endParaRPr lang="en-US" sz="980" dirty="0"/>
-          </a:p>
-          <a:p>
-            <a:pPr marL="342900" indent="-342900">
-              <a:lnSpc>
-                <a:spcPct val="108000"/>
-              </a:lnSpc>
-              <a:spcBef>
-                <a:spcPts val="300"/>
-              </a:spcBef>
-              <a:buSzPct val="100000"/>
-              <a:buChar char="•"/>
-            </a:pPr>
-            <a:r>
-              <a:rPr lang="en-US" sz="980" dirty="0">
-                <a:solidFill>
-                  <a:srgbClr val="2B2B2B"/>
-                </a:solidFill>
-                <a:latin typeface="맑은 고딕" pitchFamily="34" charset="0"/>
-                <a:ea typeface="맑은 고딕" pitchFamily="34" charset="-122"/>
-                <a:cs typeface="맑은 고딕" pitchFamily="34" charset="-120"/>
-              </a:rPr>
-              <a:t>토지이용계획 열람 및 개발행위허가 제한 여부 확인</a:t>
-            </a:r>
-            <a:endParaRPr lang="en-US" sz="980" dirty="0"/>
-          </a:p>
-        </p:txBody>
-      </p:sp>
-      <p:sp>
-        <p:nvSpPr>
-          <p:cNvPr id="20" name="Shape 18"/>
-          <p:cNvSpPr/>
-          <p:nvPr/>
-        </p:nvSpPr>
-        <p:spPr>
-          <a:xfrm>
-            <a:off x="7720279" y="3977640"/>
-            <a:ext cx="3840480" cy="2148840"/>
-          </a:xfrm>
-          <a:prstGeom prst="roundRect">
-            <a:avLst>
-              <a:gd name="adj" fmla="val 2553"/>
-            </a:avLst>
-          </a:prstGeom>
-          <a:solidFill>
-            <a:srgbClr val="E8F4F8"/>
-          </a:solidFill>
-          <a:ln/>
-        </p:spPr>
-      </p:sp>
-      <p:sp>
-        <p:nvSpPr>
-          <p:cNvPr id="21" name="Shape 19"/>
-          <p:cNvSpPr/>
-          <p:nvPr/>
-        </p:nvSpPr>
-        <p:spPr>
-          <a:xfrm>
-            <a:off x="7720279" y="4032504"/>
-            <a:ext cx="36576" cy="2039112"/>
-          </a:xfrm>
-          <a:prstGeom prst="rect">
-            <a:avLst/>
-          </a:prstGeom>
-          <a:solidFill>
-            <a:srgbClr val="2E6E82"/>
-          </a:solidFill>
-          <a:ln/>
-        </p:spPr>
-      </p:sp>
-      <p:sp>
-        <p:nvSpPr>
-          <p:cNvPr id="22" name="Text 20"/>
-          <p:cNvSpPr/>
-          <p:nvPr/>
-        </p:nvSpPr>
-        <p:spPr>
-          <a:xfrm>
-            <a:off x="7866583" y="4069080"/>
-            <a:ext cx="3584448" cy="201168"/>
-          </a:xfrm>
-          <a:prstGeom prst="rect">
-            <a:avLst/>
-          </a:prstGeom>
-          <a:noFill/>
-          <a:ln/>
-        </p:spPr>
-        <p:txBody>
-          <a:bodyPr wrap="square" lIns="0" tIns="0" rIns="0" bIns="0" rtlCol="0" anchor="ctr"/>
-          <a:lstStyle/>
-          <a:p>
-            <a:pPr indent="0" marL="0">
-              <a:buNone/>
-            </a:pPr>
-            <a:r>
-              <a:rPr lang="en-US" sz="1050" b="1" dirty="0">
-                <a:solidFill>
-                  <a:srgbClr val="2E6E82"/>
-                </a:solidFill>
-                <a:latin typeface="맑은 고딕" pitchFamily="34" charset="0"/>
-                <a:ea typeface="맑은 고딕" pitchFamily="34" charset="-122"/>
-                <a:cs typeface="맑은 고딕" pitchFamily="34" charset="-120"/>
-              </a:rPr>
-              <a:t>권리관계 및 공적장부</a:t>
-            </a:r>
-            <a:endParaRPr lang="en-US" sz="1050" dirty="0"/>
-          </a:p>
-        </p:txBody>
-      </p:sp>
-      <p:sp>
-        <p:nvSpPr>
-          <p:cNvPr id="23" name="Text 21"/>
-          <p:cNvSpPr/>
-          <p:nvPr/>
-        </p:nvSpPr>
-        <p:spPr>
-          <a:xfrm>
-            <a:off x="7866583" y="4270248"/>
-            <a:ext cx="3584448" cy="1819656"/>
-          </a:xfrm>
-          <a:prstGeom prst="rect">
-            <a:avLst/>
-          </a:prstGeom>
-          <a:noFill/>
-          <a:ln/>
-        </p:spPr>
-        <p:txBody>
-          <a:bodyPr wrap="square" lIns="0" tIns="0" rIns="0" bIns="0" rtlCol="0" anchor="t"/>
-          <a:lstStyle/>
-          <a:p>
-            <a:pPr marL="342900" indent="-342900">
-              <a:lnSpc>
-                <a:spcPct val="108000"/>
-              </a:lnSpc>
-              <a:buSzPct val="100000"/>
-              <a:buChar char="•"/>
-            </a:pPr>
-            <a:r>
-              <a:rPr lang="en-US" sz="980" dirty="0">
-                <a:solidFill>
-                  <a:srgbClr val="2B2B2B"/>
-                </a:solidFill>
-                <a:latin typeface="맑은 고딕" pitchFamily="34" charset="0"/>
-                <a:ea typeface="맑은 고딕" pitchFamily="34" charset="-122"/>
-                <a:cs typeface="맑은 고딕" pitchFamily="34" charset="-120"/>
-              </a:rPr>
-              <a:t>등기부등본 갑구 소유권 및 을구 근저당·가압류 확인</a:t>
-            </a:r>
-            <a:endParaRPr lang="en-US" sz="980" dirty="0"/>
-          </a:p>
-          <a:p>
-            <a:pPr marL="342900" indent="-342900">
-              <a:lnSpc>
-                <a:spcPct val="108000"/>
-              </a:lnSpc>
-              <a:spcBef>
-                <a:spcPts val="300"/>
-              </a:spcBef>
-              <a:buSzPct val="100000"/>
-              <a:buChar char="•"/>
-            </a:pPr>
-            <a:r>
-              <a:rPr lang="en-US" sz="980" dirty="0">
-                <a:solidFill>
-                  <a:srgbClr val="2B2B2B"/>
-                </a:solidFill>
-                <a:latin typeface="맑은 고딕" pitchFamily="34" charset="0"/>
-                <a:ea typeface="맑은 고딕" pitchFamily="34" charset="-122"/>
-                <a:cs typeface="맑은 고딕" pitchFamily="34" charset="-120"/>
-              </a:rPr>
-              <a:t>건축물대장 기재 사항과 실물 현황 대조 점검</a:t>
-            </a:r>
-            <a:endParaRPr lang="en-US" sz="980" dirty="0"/>
-          </a:p>
-          <a:p>
-            <a:pPr marL="342900" indent="-342900">
-              <a:lnSpc>
-                <a:spcPct val="108000"/>
-              </a:lnSpc>
-              <a:spcBef>
-                <a:spcPts val="300"/>
-              </a:spcBef>
-              <a:buSzPct val="100000"/>
-              <a:buChar char="•"/>
-            </a:pPr>
-            <a:r>
-              <a:rPr lang="en-US" sz="980" dirty="0">
-                <a:solidFill>
-                  <a:srgbClr val="2B2B2B"/>
-                </a:solidFill>
-                <a:latin typeface="맑은 고딕" pitchFamily="34" charset="0"/>
-                <a:ea typeface="맑은 고딕" pitchFamily="34" charset="-122"/>
-                <a:cs typeface="맑은 고딕" pitchFamily="34" charset="-120"/>
-              </a:rPr>
-              <a:t>개별공시지가 및 실거래가 비교 분석</a:t>
-            </a:r>
-            <a:endParaRPr lang="en-US" sz="980" dirty="0"/>
-          </a:p>
-        </p:txBody>
-      </p:sp>
-      <p:sp>
-        <p:nvSpPr>
-          <p:cNvPr id="24" name="Text 22"/>
+        </p:txBody>
+      </p:sp>
+      <p:sp>
+        <p:nvSpPr>
+          <p:cNvPr id="33" name="Text 30"/>
           <p:cNvSpPr/>
           <p:nvPr/>
         </p:nvSpPr>
@@ -6571,7 +7498,7 @@
       </p:sp>
       <p:sp>
         <p:nvSpPr>
-          <p:cNvPr id="25" name="Text 23"/>
+          <p:cNvPr id="34" name="Text 31"/>
           <p:cNvSpPr/>
           <p:nvPr/>
         </p:nvSpPr>
@@ -6732,7 +7659,7 @@
                 <a:ea typeface="Arial" pitchFamily="34" charset="-122"/>
                 <a:cs typeface="Arial" pitchFamily="34" charset="-120"/>
               </a:rPr>
-              <a:t>Gallery</a:t>
+              <a:t>Cadastral</a:t>
             </a:r>
             <a:endParaRPr lang="en-US" sz="950" dirty="0"/>
           </a:p>
@@ -6771,145 +7698,182 @@
                 <a:ea typeface="맑은 고딕" pitchFamily="34" charset="-122"/>
                 <a:cs typeface="맑은 고딕" pitchFamily="34" charset="-120"/>
               </a:rPr>
-              <a:t>현장 사진</a:t>
+              <a:t>지적도</a:t>
             </a:r>
             <a:endParaRPr lang="en-US" sz="2300" dirty="0"/>
           </a:p>
         </p:txBody>
       </p:sp>
-      <p:sp>
-        <p:nvSpPr>
-          <p:cNvPr id="6" name="Shape 4"/>
-          <p:cNvSpPr/>
-          <p:nvPr/>
-        </p:nvSpPr>
-        <p:spPr>
-          <a:xfrm>
-            <a:off x="502920" y="1234440"/>
-            <a:ext cx="3600602" cy="2290572"/>
-          </a:xfrm>
-          <a:prstGeom prst="roundRect">
-            <a:avLst>
-              <a:gd name="adj" fmla="val 2395"/>
-            </a:avLst>
-          </a:prstGeom>
-          <a:solidFill>
-            <a:srgbClr val="F0F0F0"/>
-          </a:solidFill>
-          <a:ln w="6350">
+      <p:pic>
+        <p:nvPicPr>
+          <p:cNvPr id="6" name="Image 0" descr="preencoded.png">    </p:cNvPr>
+          <p:cNvPicPr>
+            <a:picLocks noChangeAspect="1"/>
+          </p:cNvPicPr>
+          <p:nvPr/>
+        </p:nvPicPr>
+        <p:blipFill>
+          <a:blip r:embed="rId1"/>
+          <a:stretch>
+            <a:fillRect/>
+          </a:stretch>
+        </p:blipFill>
+        <p:spPr>
+          <a:xfrm>
+            <a:off x="502920" y="1481328"/>
+            <a:ext cx="5120640" cy="4114800"/>
+          </a:xfrm>
+          <a:prstGeom prst="rect">
+            <a:avLst/>
+          </a:prstGeom>
+        </p:spPr>
+      </p:pic>
+      <p:sp>
+        <p:nvSpPr>
+          <p:cNvPr id="7" name="Text 4"/>
+          <p:cNvSpPr/>
+          <p:nvPr/>
+        </p:nvSpPr>
+        <p:spPr>
+          <a:xfrm>
+            <a:off x="5989320" y="1481328"/>
+            <a:ext cx="5571439" cy="237744"/>
+          </a:xfrm>
+          <a:prstGeom prst="rect">
+            <a:avLst/>
+          </a:prstGeom>
+          <a:noFill/>
+          <a:ln/>
+        </p:spPr>
+        <p:txBody>
+          <a:bodyPr wrap="square" lIns="0" tIns="0" rIns="0" bIns="0" rtlCol="0" anchor="ctr"/>
+          <a:lstStyle/>
+          <a:p>
+            <a:pPr indent="0" marL="0">
+              <a:buNone/>
+            </a:pPr>
+            <a:r>
+              <a:rPr lang="en-US" sz="1100" b="1" dirty="0">
+                <a:solidFill>
+                  <a:srgbClr val="132A3A"/>
+                </a:solidFill>
+                <a:latin typeface="맑은 고딕" pitchFamily="34" charset="0"/>
+                <a:ea typeface="맑은 고딕" pitchFamily="34" charset="-122"/>
+                <a:cs typeface="맑은 고딕" pitchFamily="34" charset="-120"/>
+              </a:rPr>
+              <a:t>연속지적도 (V-World)</a:t>
+            </a:r>
+            <a:endParaRPr lang="en-US" sz="1100" dirty="0"/>
+          </a:p>
+        </p:txBody>
+      </p:sp>
+      <p:sp>
+        <p:nvSpPr>
+          <p:cNvPr id="8" name="Text 5"/>
+          <p:cNvSpPr/>
+          <p:nvPr/>
+        </p:nvSpPr>
+        <p:spPr>
+          <a:xfrm>
+            <a:off x="5989320" y="1801368"/>
+            <a:ext cx="1560003" cy="493776"/>
+          </a:xfrm>
+          <a:prstGeom prst="rect">
+            <a:avLst/>
+          </a:prstGeom>
+          <a:noFill/>
+          <a:ln/>
+        </p:spPr>
+        <p:txBody>
+          <a:bodyPr wrap="square" lIns="0" tIns="0" rIns="0" bIns="0" rtlCol="0" anchor="ctr"/>
+          <a:lstStyle/>
+          <a:p>
+            <a:pPr indent="0" marL="0">
+              <a:lnSpc>
+                <a:spcPct val="115000"/>
+              </a:lnSpc>
+              <a:buNone/>
+            </a:pPr>
+            <a:r>
+              <a:rPr lang="en-US" sz="1300" dirty="0">
+                <a:solidFill>
+                  <a:srgbClr val="5B6B73"/>
+                </a:solidFill>
+                <a:latin typeface="맑은 고딕" pitchFamily="34" charset="0"/>
+                <a:ea typeface="맑은 고딕" pitchFamily="34" charset="-122"/>
+                <a:cs typeface="맑은 고딕" pitchFamily="34" charset="-120"/>
+              </a:rPr>
+              <a:t>대지면적</a:t>
+            </a:r>
+            <a:endParaRPr lang="en-US" sz="1300" dirty="0"/>
+          </a:p>
+        </p:txBody>
+      </p:sp>
+      <p:sp>
+        <p:nvSpPr>
+          <p:cNvPr id="9" name="Text 6"/>
+          <p:cNvSpPr/>
+          <p:nvPr/>
+        </p:nvSpPr>
+        <p:spPr>
+          <a:xfrm>
+            <a:off x="7549323" y="1801368"/>
+            <a:ext cx="4011436" cy="493776"/>
+          </a:xfrm>
+          <a:prstGeom prst="rect">
+            <a:avLst/>
+          </a:prstGeom>
+          <a:noFill/>
+          <a:ln/>
+        </p:spPr>
+        <p:txBody>
+          <a:bodyPr wrap="square" lIns="0" tIns="0" rIns="0" bIns="0" rtlCol="0" anchor="ctr"/>
+          <a:lstStyle/>
+          <a:p>
+            <a:pPr indent="0" marL="0">
+              <a:lnSpc>
+                <a:spcPct val="115000"/>
+              </a:lnSpc>
+              <a:buNone/>
+            </a:pPr>
+            <a:r>
+              <a:rPr lang="en-US" sz="1300" b="1" dirty="0">
+                <a:solidFill>
+                  <a:srgbClr val="132A3A"/>
+                </a:solidFill>
+                <a:latin typeface="맑은 고딕" pitchFamily="34" charset="0"/>
+                <a:ea typeface="맑은 고딕" pitchFamily="34" charset="-122"/>
+                <a:cs typeface="맑은 고딕" pitchFamily="34" charset="-120"/>
+              </a:rPr>
+              <a:t>1,061.9㎡ (321.2평)</a:t>
+            </a:r>
+            <a:endParaRPr lang="en-US" sz="1300" dirty="0"/>
+          </a:p>
+        </p:txBody>
+      </p:sp>
+      <p:sp>
+        <p:nvSpPr>
+          <p:cNvPr id="10" name="Shape 7"/>
+          <p:cNvSpPr/>
+          <p:nvPr/>
+        </p:nvSpPr>
+        <p:spPr>
+          <a:xfrm>
+            <a:off x="5989320" y="2295144"/>
+            <a:ext cx="5571439" cy="0"/>
+          </a:xfrm>
+          <a:prstGeom prst="line">
+            <a:avLst/>
+          </a:prstGeom>
+          <a:noFill/>
+          <a:ln w="3810">
             <a:solidFill>
-              <a:srgbClr val="E0E0E0"/>
+              <a:srgbClr val="CBD5E0"/>
             </a:solidFill>
             <a:prstDash val="solid"/>
           </a:ln>
         </p:spPr>
       </p:sp>
-      <p:pic>
-        <p:nvPicPr>
-          <p:cNvPr id="7" name="Image 0" descr="preencoded.png">    </p:cNvPr>
-          <p:cNvPicPr>
-            <a:picLocks noChangeAspect="1"/>
-          </p:cNvPicPr>
-          <p:nvPr/>
-        </p:nvPicPr>
-        <p:blipFill>
-          <a:blip r:embed="rId1"/>
-          <a:srcRect l="0" r="0" t="0" b="0"/>
-          <a:stretch/>
-        </p:blipFill>
-        <p:spPr>
-          <a:xfrm>
-            <a:off x="502920" y="1234440"/>
-            <a:ext cx="3600602" cy="2290572"/>
-          </a:xfrm>
-          <a:prstGeom prst="rect">
-            <a:avLst/>
-          </a:prstGeom>
-        </p:spPr>
-      </p:pic>
-      <p:sp>
-        <p:nvSpPr>
-          <p:cNvPr id="8" name="Shape 5"/>
-          <p:cNvSpPr/>
-          <p:nvPr/>
-        </p:nvSpPr>
-        <p:spPr>
-          <a:xfrm>
-            <a:off x="576072" y="1307592"/>
-            <a:ext cx="868680" cy="237744"/>
-          </a:xfrm>
-          <a:prstGeom prst="rect">
-            <a:avLst/>
-          </a:prstGeom>
-          <a:solidFill>
-            <a:srgbClr val="10161F">
-              <a:alpha val="80000"/>
-            </a:srgbClr>
-          </a:solidFill>
-          <a:ln/>
-        </p:spPr>
-      </p:sp>
-      <p:sp>
-        <p:nvSpPr>
-          <p:cNvPr id="9" name="Text 6"/>
-          <p:cNvSpPr/>
-          <p:nvPr/>
-        </p:nvSpPr>
-        <p:spPr>
-          <a:xfrm>
-            <a:off x="576072" y="1307592"/>
-            <a:ext cx="868680" cy="237744"/>
-          </a:xfrm>
-          <a:prstGeom prst="rect">
-            <a:avLst/>
-          </a:prstGeom>
-          <a:noFill/>
-          <a:ln/>
-        </p:spPr>
-        <p:txBody>
-          <a:bodyPr wrap="square" lIns="0" tIns="0" rIns="0" bIns="0" rtlCol="0" anchor="ctr"/>
-          <a:lstStyle/>
-          <a:p>
-            <a:pPr algn="ctr" indent="0" marL="0">
-              <a:buNone/>
-            </a:pPr>
-            <a:r>
-              <a:rPr lang="en-US" sz="900" b="1" dirty="0">
-                <a:solidFill>
-                  <a:srgbClr val="FFFFFF"/>
-                </a:solidFill>
-                <a:latin typeface="맑은 고딕" pitchFamily="34" charset="0"/>
-                <a:ea typeface="맑은 고딕" pitchFamily="34" charset="-122"/>
-                <a:cs typeface="맑은 고딕" pitchFamily="34" charset="-120"/>
-              </a:rPr>
-              <a:t>건물 외관</a:t>
-            </a:r>
-            <a:endParaRPr lang="en-US" sz="900" dirty="0"/>
-          </a:p>
-        </p:txBody>
-      </p:sp>
-      <p:sp>
-        <p:nvSpPr>
-          <p:cNvPr id="10" name="Shape 7"/>
-          <p:cNvSpPr/>
-          <p:nvPr/>
-        </p:nvSpPr>
-        <p:spPr>
-          <a:xfrm>
-            <a:off x="502920" y="3232404"/>
-            <a:ext cx="3600602" cy="292608"/>
-          </a:xfrm>
-          <a:prstGeom prst="rect">
-            <a:avLst/>
-          </a:prstGeom>
-          <a:solidFill>
-            <a:srgbClr val="000000">
-              <a:alpha val="60000"/>
-            </a:srgbClr>
-          </a:solidFill>
-          <a:ln/>
-        </p:spPr>
-      </p:sp>
       <p:sp>
         <p:nvSpPr>
           <p:cNvPr id="11" name="Text 8"/>
@@ -6918,728 +7882,341 @@
         </p:nvSpPr>
         <p:spPr>
           <a:xfrm>
-            <a:off x="612648" y="3232404"/>
-            <a:ext cx="3381146" cy="292608"/>
-          </a:xfrm>
-          <a:prstGeom prst="rect">
-            <a:avLst/>
-          </a:prstGeom>
-          <a:noFill/>
-          <a:ln/>
-        </p:spPr>
-        <p:txBody>
-          <a:bodyPr wrap="square" lIns="0" tIns="0" rIns="0" bIns="0" rtlCol="0" anchor="ctr"/>
-          <a:lstStyle/>
-          <a:p>
-            <a:pPr indent="0" marL="0">
-              <a:buNone/>
-            </a:pPr>
-            <a:r>
-              <a:rPr lang="en-US" sz="900" dirty="0">
-                <a:solidFill>
-                  <a:srgbClr val="FFFFFF"/>
-                </a:solidFill>
-                <a:latin typeface="맑은 고딕" pitchFamily="34" charset="0"/>
-                <a:ea typeface="맑은 고딕" pitchFamily="34" charset="-122"/>
-                <a:cs typeface="맑은 고딕" pitchFamily="34" charset="-120"/>
-              </a:rPr>
-              <a:t>신사동 590 ICL 빌딩 전경 및 대로변 코너 입지</a:t>
-            </a:r>
-            <a:endParaRPr lang="en-US" sz="900" dirty="0"/>
-          </a:p>
-        </p:txBody>
-      </p:sp>
-      <p:sp>
-        <p:nvSpPr>
-          <p:cNvPr id="12" name="Shape 9"/>
-          <p:cNvSpPr/>
-          <p:nvPr/>
-        </p:nvSpPr>
-        <p:spPr>
-          <a:xfrm>
-            <a:off x="4231538" y="1234440"/>
-            <a:ext cx="3600602" cy="2290572"/>
-          </a:xfrm>
-          <a:prstGeom prst="roundRect">
-            <a:avLst>
-              <a:gd name="adj" fmla="val 2395"/>
-            </a:avLst>
-          </a:prstGeom>
-          <a:solidFill>
-            <a:srgbClr val="F0F0F0"/>
-          </a:solidFill>
-          <a:ln w="6350">
+            <a:off x="5989320" y="2295144"/>
+            <a:ext cx="1560003" cy="493776"/>
+          </a:xfrm>
+          <a:prstGeom prst="rect">
+            <a:avLst/>
+          </a:prstGeom>
+          <a:noFill/>
+          <a:ln/>
+        </p:spPr>
+        <p:txBody>
+          <a:bodyPr wrap="square" lIns="0" tIns="0" rIns="0" bIns="0" rtlCol="0" anchor="ctr"/>
+          <a:lstStyle/>
+          <a:p>
+            <a:pPr indent="0" marL="0">
+              <a:lnSpc>
+                <a:spcPct val="115000"/>
+              </a:lnSpc>
+              <a:buNone/>
+            </a:pPr>
+            <a:r>
+              <a:rPr lang="en-US" sz="1300" dirty="0">
+                <a:solidFill>
+                  <a:srgbClr val="5B6B73"/>
+                </a:solidFill>
+                <a:latin typeface="맑은 고딕" pitchFamily="34" charset="0"/>
+                <a:ea typeface="맑은 고딕" pitchFamily="34" charset="-122"/>
+                <a:cs typeface="맑은 고딕" pitchFamily="34" charset="-120"/>
+              </a:rPr>
+              <a:t>용도지역</a:t>
+            </a:r>
+            <a:endParaRPr lang="en-US" sz="1300" dirty="0"/>
+          </a:p>
+        </p:txBody>
+      </p:sp>
+      <p:sp>
+        <p:nvSpPr>
+          <p:cNvPr id="12" name="Text 9"/>
+          <p:cNvSpPr/>
+          <p:nvPr/>
+        </p:nvSpPr>
+        <p:spPr>
+          <a:xfrm>
+            <a:off x="7549323" y="2295144"/>
+            <a:ext cx="4011436" cy="493776"/>
+          </a:xfrm>
+          <a:prstGeom prst="rect">
+            <a:avLst/>
+          </a:prstGeom>
+          <a:noFill/>
+          <a:ln/>
+        </p:spPr>
+        <p:txBody>
+          <a:bodyPr wrap="square" lIns="0" tIns="0" rIns="0" bIns="0" rtlCol="0" anchor="ctr"/>
+          <a:lstStyle/>
+          <a:p>
+            <a:pPr indent="0" marL="0">
+              <a:lnSpc>
+                <a:spcPct val="115000"/>
+              </a:lnSpc>
+              <a:buNone/>
+            </a:pPr>
+            <a:r>
+              <a:rPr lang="en-US" sz="1300" b="1" dirty="0">
+                <a:solidFill>
+                  <a:srgbClr val="132A3A"/>
+                </a:solidFill>
+                <a:latin typeface="맑은 고딕" pitchFamily="34" charset="0"/>
+                <a:ea typeface="맑은 고딕" pitchFamily="34" charset="-122"/>
+                <a:cs typeface="맑은 고딕" pitchFamily="34" charset="-120"/>
+              </a:rPr>
+              <a:t>제3종일반주거지역</a:t>
+            </a:r>
+            <a:endParaRPr lang="en-US" sz="1300" dirty="0"/>
+          </a:p>
+        </p:txBody>
+      </p:sp>
+      <p:sp>
+        <p:nvSpPr>
+          <p:cNvPr id="13" name="Shape 10"/>
+          <p:cNvSpPr/>
+          <p:nvPr/>
+        </p:nvSpPr>
+        <p:spPr>
+          <a:xfrm>
+            <a:off x="5989320" y="2788920"/>
+            <a:ext cx="5571439" cy="0"/>
+          </a:xfrm>
+          <a:prstGeom prst="line">
+            <a:avLst/>
+          </a:prstGeom>
+          <a:noFill/>
+          <a:ln w="3810">
             <a:solidFill>
-              <a:srgbClr val="E0E0E0"/>
+              <a:srgbClr val="CBD5E0"/>
             </a:solidFill>
             <a:prstDash val="solid"/>
           </a:ln>
         </p:spPr>
       </p:sp>
-      <p:pic>
-        <p:nvPicPr>
-          <p:cNvPr id="13" name="Image 1" descr="preencoded.png">    </p:cNvPr>
-          <p:cNvPicPr>
-            <a:picLocks noChangeAspect="1"/>
-          </p:cNvPicPr>
-          <p:nvPr/>
-        </p:nvPicPr>
-        <p:blipFill>
-          <a:blip r:embed="rId2"/>
-          <a:srcRect l="0" r="0" t="0" b="0"/>
-          <a:stretch/>
-        </p:blipFill>
-        <p:spPr>
-          <a:xfrm>
-            <a:off x="4231538" y="1234440"/>
-            <a:ext cx="3600602" cy="2290572"/>
-          </a:xfrm>
-          <a:prstGeom prst="rect">
-            <a:avLst/>
-          </a:prstGeom>
-        </p:spPr>
-      </p:pic>
-      <p:sp>
-        <p:nvSpPr>
-          <p:cNvPr id="14" name="Shape 10"/>
-          <p:cNvSpPr/>
-          <p:nvPr/>
-        </p:nvSpPr>
-        <p:spPr>
-          <a:xfrm>
-            <a:off x="4304690" y="1307592"/>
-            <a:ext cx="868680" cy="237744"/>
-          </a:xfrm>
-          <a:prstGeom prst="rect">
-            <a:avLst/>
-          </a:prstGeom>
-          <a:solidFill>
-            <a:srgbClr val="10161F">
-              <a:alpha val="80000"/>
-            </a:srgbClr>
-          </a:solidFill>
-          <a:ln/>
-        </p:spPr>
-      </p:sp>
-      <p:sp>
-        <p:nvSpPr>
-          <p:cNvPr id="15" name="Text 11"/>
-          <p:cNvSpPr/>
-          <p:nvPr/>
-        </p:nvSpPr>
-        <p:spPr>
-          <a:xfrm>
-            <a:off x="4304690" y="1307592"/>
-            <a:ext cx="868680" cy="237744"/>
-          </a:xfrm>
-          <a:prstGeom prst="rect">
-            <a:avLst/>
-          </a:prstGeom>
-          <a:noFill/>
-          <a:ln/>
-        </p:spPr>
-        <p:txBody>
-          <a:bodyPr wrap="square" lIns="0" tIns="0" rIns="0" bIns="0" rtlCol="0" anchor="ctr"/>
-          <a:lstStyle/>
-          <a:p>
-            <a:pPr algn="ctr" indent="0" marL="0">
-              <a:buNone/>
-            </a:pPr>
-            <a:r>
-              <a:rPr lang="en-US" sz="900" b="1" dirty="0">
-                <a:solidFill>
-                  <a:srgbClr val="FFFFFF"/>
-                </a:solidFill>
-                <a:latin typeface="맑은 고딕" pitchFamily="34" charset="0"/>
-                <a:ea typeface="맑은 고딕" pitchFamily="34" charset="-122"/>
-                <a:cs typeface="맑은 고딕" pitchFamily="34" charset="-120"/>
-              </a:rPr>
-              <a:t>주 출입구</a:t>
-            </a:r>
-            <a:endParaRPr lang="en-US" sz="900" dirty="0"/>
-          </a:p>
-        </p:txBody>
-      </p:sp>
-      <p:sp>
-        <p:nvSpPr>
-          <p:cNvPr id="16" name="Shape 12"/>
-          <p:cNvSpPr/>
-          <p:nvPr/>
-        </p:nvSpPr>
-        <p:spPr>
-          <a:xfrm>
-            <a:off x="4231538" y="3232404"/>
-            <a:ext cx="3600602" cy="292608"/>
-          </a:xfrm>
-          <a:prstGeom prst="rect">
-            <a:avLst/>
-          </a:prstGeom>
-          <a:solidFill>
-            <a:srgbClr val="000000">
-              <a:alpha val="60000"/>
-            </a:srgbClr>
-          </a:solidFill>
-          <a:ln/>
-        </p:spPr>
-      </p:sp>
-      <p:sp>
-        <p:nvSpPr>
-          <p:cNvPr id="17" name="Text 13"/>
-          <p:cNvSpPr/>
-          <p:nvPr/>
-        </p:nvSpPr>
-        <p:spPr>
-          <a:xfrm>
-            <a:off x="4341266" y="3232404"/>
-            <a:ext cx="3381146" cy="292608"/>
-          </a:xfrm>
-          <a:prstGeom prst="rect">
-            <a:avLst/>
-          </a:prstGeom>
-          <a:noFill/>
-          <a:ln/>
-        </p:spPr>
-        <p:txBody>
-          <a:bodyPr wrap="square" lIns="0" tIns="0" rIns="0" bIns="0" rtlCol="0" anchor="ctr"/>
-          <a:lstStyle/>
-          <a:p>
-            <a:pPr indent="0" marL="0">
-              <a:buNone/>
-            </a:pPr>
-            <a:r>
-              <a:rPr lang="en-US" sz="900" dirty="0">
-                <a:solidFill>
-                  <a:srgbClr val="FFFFFF"/>
-                </a:solidFill>
-                <a:latin typeface="맑은 고딕" pitchFamily="34" charset="0"/>
-                <a:ea typeface="맑은 고딕" pitchFamily="34" charset="-122"/>
-                <a:cs typeface="맑은 고딕" pitchFamily="34" charset="-120"/>
-              </a:rPr>
-              <a:t>지상 진입로 및 1층 전면 상가부</a:t>
-            </a:r>
-            <a:endParaRPr lang="en-US" sz="900" dirty="0"/>
-          </a:p>
-        </p:txBody>
-      </p:sp>
-      <p:sp>
-        <p:nvSpPr>
-          <p:cNvPr id="18" name="Shape 14"/>
-          <p:cNvSpPr/>
-          <p:nvPr/>
-        </p:nvSpPr>
-        <p:spPr>
-          <a:xfrm>
-            <a:off x="7960157" y="1234440"/>
-            <a:ext cx="3600602" cy="2290572"/>
-          </a:xfrm>
-          <a:prstGeom prst="roundRect">
-            <a:avLst>
-              <a:gd name="adj" fmla="val 2395"/>
-            </a:avLst>
-          </a:prstGeom>
-          <a:solidFill>
-            <a:srgbClr val="F0F0F0"/>
-          </a:solidFill>
-          <a:ln w="6350">
+      <p:sp>
+        <p:nvSpPr>
+          <p:cNvPr id="14" name="Text 11"/>
+          <p:cNvSpPr/>
+          <p:nvPr/>
+        </p:nvSpPr>
+        <p:spPr>
+          <a:xfrm>
+            <a:off x="5989320" y="2788920"/>
+            <a:ext cx="1560003" cy="493776"/>
+          </a:xfrm>
+          <a:prstGeom prst="rect">
+            <a:avLst/>
+          </a:prstGeom>
+          <a:noFill/>
+          <a:ln/>
+        </p:spPr>
+        <p:txBody>
+          <a:bodyPr wrap="square" lIns="0" tIns="0" rIns="0" bIns="0" rtlCol="0" anchor="ctr"/>
+          <a:lstStyle/>
+          <a:p>
+            <a:pPr indent="0" marL="0">
+              <a:lnSpc>
+                <a:spcPct val="115000"/>
+              </a:lnSpc>
+              <a:buNone/>
+            </a:pPr>
+            <a:r>
+              <a:rPr lang="en-US" sz="1300" dirty="0">
+                <a:solidFill>
+                  <a:srgbClr val="5B6B73"/>
+                </a:solidFill>
+                <a:latin typeface="맑은 고딕" pitchFamily="34" charset="0"/>
+                <a:ea typeface="맑은 고딕" pitchFamily="34" charset="-122"/>
+                <a:cs typeface="맑은 고딕" pitchFamily="34" charset="-120"/>
+              </a:rPr>
+              <a:t>건폐율</a:t>
+            </a:r>
+            <a:endParaRPr lang="en-US" sz="1300" dirty="0"/>
+          </a:p>
+        </p:txBody>
+      </p:sp>
+      <p:sp>
+        <p:nvSpPr>
+          <p:cNvPr id="15" name="Text 12"/>
+          <p:cNvSpPr/>
+          <p:nvPr/>
+        </p:nvSpPr>
+        <p:spPr>
+          <a:xfrm>
+            <a:off x="7549323" y="2788920"/>
+            <a:ext cx="4011436" cy="493776"/>
+          </a:xfrm>
+          <a:prstGeom prst="rect">
+            <a:avLst/>
+          </a:prstGeom>
+          <a:noFill/>
+          <a:ln/>
+        </p:spPr>
+        <p:txBody>
+          <a:bodyPr wrap="square" lIns="0" tIns="0" rIns="0" bIns="0" rtlCol="0" anchor="ctr"/>
+          <a:lstStyle/>
+          <a:p>
+            <a:pPr indent="0" marL="0">
+              <a:lnSpc>
+                <a:spcPct val="115000"/>
+              </a:lnSpc>
+              <a:buNone/>
+            </a:pPr>
+            <a:r>
+              <a:rPr lang="en-US" sz="1300" b="1" dirty="0">
+                <a:solidFill>
+                  <a:srgbClr val="132A3A"/>
+                </a:solidFill>
+                <a:latin typeface="맑은 고딕" pitchFamily="34" charset="0"/>
+                <a:ea typeface="맑은 고딕" pitchFamily="34" charset="-122"/>
+                <a:cs typeface="맑은 고딕" pitchFamily="34" charset="-120"/>
+              </a:rPr>
+              <a:t>현행 51.3% (법정 상한 50%)</a:t>
+            </a:r>
+            <a:endParaRPr lang="en-US" sz="1300" dirty="0"/>
+          </a:p>
+        </p:txBody>
+      </p:sp>
+      <p:sp>
+        <p:nvSpPr>
+          <p:cNvPr id="16" name="Shape 13"/>
+          <p:cNvSpPr/>
+          <p:nvPr/>
+        </p:nvSpPr>
+        <p:spPr>
+          <a:xfrm>
+            <a:off x="5989320" y="3282696"/>
+            <a:ext cx="5571439" cy="0"/>
+          </a:xfrm>
+          <a:prstGeom prst="line">
+            <a:avLst/>
+          </a:prstGeom>
+          <a:noFill/>
+          <a:ln w="3810">
             <a:solidFill>
-              <a:srgbClr val="E0E0E0"/>
+              <a:srgbClr val="CBD5E0"/>
             </a:solidFill>
             <a:prstDash val="solid"/>
           </a:ln>
         </p:spPr>
       </p:sp>
-      <p:pic>
-        <p:nvPicPr>
-          <p:cNvPr id="19" name="Image 2" descr="preencoded.png">    </p:cNvPr>
-          <p:cNvPicPr>
-            <a:picLocks noChangeAspect="1"/>
-          </p:cNvPicPr>
-          <p:nvPr/>
-        </p:nvPicPr>
-        <p:blipFill>
-          <a:blip r:embed="rId3"/>
-          <a:srcRect l="0" r="0" t="0" b="0"/>
-          <a:stretch/>
-        </p:blipFill>
-        <p:spPr>
-          <a:xfrm>
-            <a:off x="7960157" y="1234440"/>
-            <a:ext cx="3600602" cy="2290572"/>
-          </a:xfrm>
-          <a:prstGeom prst="rect">
-            <a:avLst/>
-          </a:prstGeom>
-        </p:spPr>
-      </p:pic>
-      <p:sp>
-        <p:nvSpPr>
-          <p:cNvPr id="20" name="Shape 15"/>
-          <p:cNvSpPr/>
-          <p:nvPr/>
-        </p:nvSpPr>
-        <p:spPr>
-          <a:xfrm>
-            <a:off x="8033309" y="1307592"/>
-            <a:ext cx="868680" cy="237744"/>
-          </a:xfrm>
-          <a:prstGeom prst="rect">
-            <a:avLst/>
-          </a:prstGeom>
-          <a:solidFill>
-            <a:srgbClr val="10161F">
-              <a:alpha val="80000"/>
-            </a:srgbClr>
-          </a:solidFill>
-          <a:ln/>
-        </p:spPr>
-      </p:sp>
-      <p:sp>
-        <p:nvSpPr>
-          <p:cNvPr id="21" name="Text 16"/>
-          <p:cNvSpPr/>
-          <p:nvPr/>
-        </p:nvSpPr>
-        <p:spPr>
-          <a:xfrm>
-            <a:off x="8033309" y="1307592"/>
-            <a:ext cx="868680" cy="237744"/>
-          </a:xfrm>
-          <a:prstGeom prst="rect">
-            <a:avLst/>
-          </a:prstGeom>
-          <a:noFill/>
-          <a:ln/>
-        </p:spPr>
-        <p:txBody>
-          <a:bodyPr wrap="square" lIns="0" tIns="0" rIns="0" bIns="0" rtlCol="0" anchor="ctr"/>
-          <a:lstStyle/>
-          <a:p>
-            <a:pPr algn="ctr" indent="0" marL="0">
-              <a:buNone/>
-            </a:pPr>
-            <a:r>
-              <a:rPr lang="en-US" sz="900" b="1" dirty="0">
-                <a:solidFill>
-                  <a:srgbClr val="FFFFFF"/>
-                </a:solidFill>
-                <a:latin typeface="맑은 고딕" pitchFamily="34" charset="0"/>
-                <a:ea typeface="맑은 고딕" pitchFamily="34" charset="-122"/>
-                <a:cs typeface="맑은 고딕" pitchFamily="34" charset="-120"/>
-              </a:rPr>
-              <a:t>실내 공간</a:t>
-            </a:r>
-            <a:endParaRPr lang="en-US" sz="900" dirty="0"/>
-          </a:p>
-        </p:txBody>
-      </p:sp>
-      <p:sp>
-        <p:nvSpPr>
-          <p:cNvPr id="22" name="Shape 17"/>
-          <p:cNvSpPr/>
-          <p:nvPr/>
-        </p:nvSpPr>
-        <p:spPr>
-          <a:xfrm>
-            <a:off x="7960157" y="3232404"/>
-            <a:ext cx="3600602" cy="292608"/>
-          </a:xfrm>
-          <a:prstGeom prst="rect">
-            <a:avLst/>
-          </a:prstGeom>
-          <a:solidFill>
-            <a:srgbClr val="000000">
-              <a:alpha val="60000"/>
-            </a:srgbClr>
-          </a:solidFill>
-          <a:ln/>
-        </p:spPr>
-      </p:sp>
-      <p:sp>
-        <p:nvSpPr>
-          <p:cNvPr id="23" name="Text 18"/>
-          <p:cNvSpPr/>
-          <p:nvPr/>
-        </p:nvSpPr>
-        <p:spPr>
-          <a:xfrm>
-            <a:off x="8069885" y="3232404"/>
-            <a:ext cx="3381146" cy="292608"/>
-          </a:xfrm>
-          <a:prstGeom prst="rect">
-            <a:avLst/>
-          </a:prstGeom>
-          <a:noFill/>
-          <a:ln/>
-        </p:spPr>
-        <p:txBody>
-          <a:bodyPr wrap="square" lIns="0" tIns="0" rIns="0" bIns="0" rtlCol="0" anchor="ctr"/>
-          <a:lstStyle/>
-          <a:p>
-            <a:pPr indent="0" marL="0">
-              <a:buNone/>
-            </a:pPr>
-            <a:r>
-              <a:rPr lang="en-US" sz="900" dirty="0">
-                <a:solidFill>
-                  <a:srgbClr val="FFFFFF"/>
-                </a:solidFill>
-                <a:latin typeface="맑은 고딕" pitchFamily="34" charset="0"/>
-                <a:ea typeface="맑은 고딕" pitchFamily="34" charset="-122"/>
-                <a:cs typeface="맑은 고딕" pitchFamily="34" charset="-120"/>
-              </a:rPr>
-              <a:t>건물 측면부 및 도로 접면</a:t>
-            </a:r>
-            <a:endParaRPr lang="en-US" sz="900" dirty="0"/>
-          </a:p>
-        </p:txBody>
-      </p:sp>
-      <p:sp>
-        <p:nvSpPr>
-          <p:cNvPr id="24" name="Shape 19"/>
-          <p:cNvSpPr/>
-          <p:nvPr/>
-        </p:nvSpPr>
-        <p:spPr>
-          <a:xfrm>
-            <a:off x="502920" y="3653028"/>
-            <a:ext cx="3600602" cy="2290572"/>
-          </a:xfrm>
-          <a:prstGeom prst="roundRect">
-            <a:avLst>
-              <a:gd name="adj" fmla="val 2395"/>
-            </a:avLst>
-          </a:prstGeom>
-          <a:solidFill>
-            <a:srgbClr val="F0F0F0"/>
-          </a:solidFill>
-          <a:ln w="6350">
-            <a:solidFill>
-              <a:srgbClr val="E0E0E0"/>
-            </a:solidFill>
-            <a:prstDash val="solid"/>
-          </a:ln>
-        </p:spPr>
-      </p:sp>
-      <p:pic>
-        <p:nvPicPr>
-          <p:cNvPr id="25" name="Image 3" descr="preencoded.png">    </p:cNvPr>
-          <p:cNvPicPr>
-            <a:picLocks noChangeAspect="1"/>
-          </p:cNvPicPr>
-          <p:nvPr/>
-        </p:nvPicPr>
-        <p:blipFill>
-          <a:blip r:embed="rId4"/>
-          <a:srcRect l="0" r="0" t="0" b="0"/>
-          <a:stretch/>
-        </p:blipFill>
-        <p:spPr>
-          <a:xfrm>
-            <a:off x="502920" y="3653028"/>
-            <a:ext cx="3600602" cy="2290572"/>
-          </a:xfrm>
-          <a:prstGeom prst="rect">
-            <a:avLst/>
-          </a:prstGeom>
-        </p:spPr>
-      </p:pic>
-      <p:sp>
-        <p:nvSpPr>
-          <p:cNvPr id="26" name="Shape 20"/>
-          <p:cNvSpPr/>
-          <p:nvPr/>
-        </p:nvSpPr>
-        <p:spPr>
-          <a:xfrm>
-            <a:off x="576072" y="3726180"/>
-            <a:ext cx="822960" cy="237744"/>
-          </a:xfrm>
-          <a:prstGeom prst="rect">
-            <a:avLst/>
-          </a:prstGeom>
-          <a:solidFill>
-            <a:srgbClr val="10161F">
-              <a:alpha val="80000"/>
-            </a:srgbClr>
-          </a:solidFill>
-          <a:ln/>
-        </p:spPr>
-      </p:sp>
-      <p:sp>
-        <p:nvSpPr>
-          <p:cNvPr id="27" name="Text 21"/>
-          <p:cNvSpPr/>
-          <p:nvPr/>
-        </p:nvSpPr>
-        <p:spPr>
-          <a:xfrm>
-            <a:off x="576072" y="3726180"/>
-            <a:ext cx="822960" cy="237744"/>
-          </a:xfrm>
-          <a:prstGeom prst="rect">
-            <a:avLst/>
-          </a:prstGeom>
-          <a:noFill/>
-          <a:ln/>
-        </p:spPr>
-        <p:txBody>
-          <a:bodyPr wrap="square" lIns="0" tIns="0" rIns="0" bIns="0" rtlCol="0" anchor="ctr"/>
-          <a:lstStyle/>
-          <a:p>
-            <a:pPr algn="ctr" indent="0" marL="0">
-              <a:buNone/>
-            </a:pPr>
-            <a:r>
-              <a:rPr lang="en-US" sz="900" b="1" dirty="0">
-                <a:solidFill>
-                  <a:srgbClr val="FFFFFF"/>
-                </a:solidFill>
-                <a:latin typeface="맑은 고딕" pitchFamily="34" charset="0"/>
-                <a:ea typeface="맑은 고딕" pitchFamily="34" charset="-122"/>
-                <a:cs typeface="맑은 고딕" pitchFamily="34" charset="-120"/>
-              </a:rPr>
-              <a:t>주차장</a:t>
-            </a:r>
-            <a:endParaRPr lang="en-US" sz="900" dirty="0"/>
-          </a:p>
-        </p:txBody>
-      </p:sp>
-      <p:sp>
-        <p:nvSpPr>
-          <p:cNvPr id="28" name="Shape 22"/>
-          <p:cNvSpPr/>
-          <p:nvPr/>
-        </p:nvSpPr>
-        <p:spPr>
-          <a:xfrm>
-            <a:off x="502920" y="5650992"/>
-            <a:ext cx="3600602" cy="292608"/>
-          </a:xfrm>
-          <a:prstGeom prst="rect">
-            <a:avLst/>
-          </a:prstGeom>
-          <a:solidFill>
-            <a:srgbClr val="000000">
-              <a:alpha val="60000"/>
-            </a:srgbClr>
-          </a:solidFill>
-          <a:ln/>
-        </p:spPr>
-      </p:sp>
-      <p:sp>
-        <p:nvSpPr>
-          <p:cNvPr id="29" name="Text 23"/>
-          <p:cNvSpPr/>
-          <p:nvPr/>
-        </p:nvSpPr>
-        <p:spPr>
-          <a:xfrm>
-            <a:off x="612648" y="5650992"/>
-            <a:ext cx="3381146" cy="292608"/>
-          </a:xfrm>
-          <a:prstGeom prst="rect">
-            <a:avLst/>
-          </a:prstGeom>
-          <a:noFill/>
-          <a:ln/>
-        </p:spPr>
-        <p:txBody>
-          <a:bodyPr wrap="square" lIns="0" tIns="0" rIns="0" bIns="0" rtlCol="0" anchor="ctr"/>
-          <a:lstStyle/>
-          <a:p>
-            <a:pPr indent="0" marL="0">
-              <a:buNone/>
-            </a:pPr>
-            <a:r>
-              <a:rPr lang="en-US" sz="900" dirty="0">
-                <a:solidFill>
-                  <a:srgbClr val="FFFFFF"/>
-                </a:solidFill>
-                <a:latin typeface="맑은 고딕" pitchFamily="34" charset="0"/>
-                <a:ea typeface="맑은 고딕" pitchFamily="34" charset="-122"/>
-                <a:cs typeface="맑은 고딕" pitchFamily="34" charset="-120"/>
-              </a:rPr>
-              <a:t>자주식/기계식 주차장 진입로 (총 26대)</a:t>
-            </a:r>
-            <a:endParaRPr lang="en-US" sz="900" dirty="0"/>
-          </a:p>
-        </p:txBody>
-      </p:sp>
-      <p:sp>
-        <p:nvSpPr>
-          <p:cNvPr id="30" name="Shape 24"/>
-          <p:cNvSpPr/>
-          <p:nvPr/>
-        </p:nvSpPr>
-        <p:spPr>
-          <a:xfrm>
-            <a:off x="4231538" y="3653028"/>
-            <a:ext cx="3600602" cy="2290572"/>
-          </a:xfrm>
-          <a:prstGeom prst="roundRect">
-            <a:avLst>
-              <a:gd name="adj" fmla="val 2395"/>
-            </a:avLst>
-          </a:prstGeom>
-          <a:solidFill>
-            <a:srgbClr val="F0F0F0"/>
-          </a:solidFill>
-          <a:ln w="6350">
-            <a:solidFill>
-              <a:srgbClr val="E0E0E0"/>
-            </a:solidFill>
-            <a:prstDash val="solid"/>
-          </a:ln>
-        </p:spPr>
-      </p:sp>
-      <p:pic>
-        <p:nvPicPr>
-          <p:cNvPr id="31" name="Image 4" descr="preencoded.png">    </p:cNvPr>
-          <p:cNvPicPr>
-            <a:picLocks noChangeAspect="1"/>
-          </p:cNvPicPr>
-          <p:nvPr/>
-        </p:nvPicPr>
-        <p:blipFill>
-          <a:blip r:embed="rId5"/>
-          <a:srcRect l="0" r="0" t="0" b="0"/>
-          <a:stretch/>
-        </p:blipFill>
-        <p:spPr>
-          <a:xfrm>
-            <a:off x="4231538" y="3653028"/>
-            <a:ext cx="3600602" cy="2290572"/>
-          </a:xfrm>
-          <a:prstGeom prst="rect">
-            <a:avLst/>
-          </a:prstGeom>
-        </p:spPr>
-      </p:pic>
-      <p:sp>
-        <p:nvSpPr>
-          <p:cNvPr id="32" name="Shape 25"/>
-          <p:cNvSpPr/>
-          <p:nvPr/>
-        </p:nvSpPr>
-        <p:spPr>
-          <a:xfrm>
-            <a:off x="4304690" y="3726180"/>
-            <a:ext cx="996696" cy="237744"/>
-          </a:xfrm>
-          <a:prstGeom prst="rect">
-            <a:avLst/>
-          </a:prstGeom>
-          <a:solidFill>
-            <a:srgbClr val="10161F">
-              <a:alpha val="80000"/>
-            </a:srgbClr>
-          </a:solidFill>
-          <a:ln/>
-        </p:spPr>
-      </p:sp>
-      <p:sp>
-        <p:nvSpPr>
-          <p:cNvPr id="33" name="Text 26"/>
-          <p:cNvSpPr/>
-          <p:nvPr/>
-        </p:nvSpPr>
-        <p:spPr>
-          <a:xfrm>
-            <a:off x="4304690" y="3726180"/>
-            <a:ext cx="996696" cy="237744"/>
-          </a:xfrm>
-          <a:prstGeom prst="rect">
-            <a:avLst/>
-          </a:prstGeom>
-          <a:noFill/>
-          <a:ln/>
-        </p:spPr>
-        <p:txBody>
-          <a:bodyPr wrap="square" lIns="0" tIns="0" rIns="0" bIns="0" rtlCol="0" anchor="ctr"/>
-          <a:lstStyle/>
-          <a:p>
-            <a:pPr algn="ctr" indent="0" marL="0">
-              <a:buNone/>
-            </a:pPr>
-            <a:r>
-              <a:rPr lang="en-US" sz="900" b="1" dirty="0">
-                <a:solidFill>
-                  <a:srgbClr val="FFFFFF"/>
-                </a:solidFill>
-                <a:latin typeface="맑은 고딕" pitchFamily="34" charset="0"/>
-                <a:ea typeface="맑은 고딕" pitchFamily="34" charset="-122"/>
-                <a:cs typeface="맑은 고딕" pitchFamily="34" charset="-120"/>
-              </a:rPr>
-              <a:t>옥상/테라스</a:t>
-            </a:r>
-            <a:endParaRPr lang="en-US" sz="900" dirty="0"/>
-          </a:p>
-        </p:txBody>
-      </p:sp>
-      <p:sp>
-        <p:nvSpPr>
-          <p:cNvPr id="34" name="Shape 27"/>
-          <p:cNvSpPr/>
-          <p:nvPr/>
-        </p:nvSpPr>
-        <p:spPr>
-          <a:xfrm>
-            <a:off x="4231538" y="5650992"/>
-            <a:ext cx="3600602" cy="292608"/>
-          </a:xfrm>
-          <a:prstGeom prst="rect">
-            <a:avLst/>
-          </a:prstGeom>
-          <a:solidFill>
-            <a:srgbClr val="000000">
-              <a:alpha val="60000"/>
-            </a:srgbClr>
-          </a:solidFill>
-          <a:ln/>
-        </p:spPr>
-      </p:sp>
-      <p:sp>
-        <p:nvSpPr>
-          <p:cNvPr id="35" name="Text 28"/>
-          <p:cNvSpPr/>
-          <p:nvPr/>
-        </p:nvSpPr>
-        <p:spPr>
-          <a:xfrm>
-            <a:off x="4341266" y="5650992"/>
-            <a:ext cx="3381146" cy="292608"/>
-          </a:xfrm>
-          <a:prstGeom prst="rect">
-            <a:avLst/>
-          </a:prstGeom>
-          <a:noFill/>
-          <a:ln/>
-        </p:spPr>
-        <p:txBody>
-          <a:bodyPr wrap="square" lIns="0" tIns="0" rIns="0" bIns="0" rtlCol="0" anchor="ctr"/>
-          <a:lstStyle/>
-          <a:p>
-            <a:pPr indent="0" marL="0">
-              <a:buNone/>
-            </a:pPr>
-            <a:r>
-              <a:rPr lang="en-US" sz="900" dirty="0">
-                <a:solidFill>
-                  <a:srgbClr val="FFFFFF"/>
-                </a:solidFill>
-                <a:latin typeface="맑은 고딕" pitchFamily="34" charset="0"/>
-                <a:ea typeface="맑은 고딕" pitchFamily="34" charset="-122"/>
-                <a:cs typeface="맑은 고딕" pitchFamily="34" charset="-120"/>
-              </a:rPr>
-              <a:t>상층부 외관 및 옥상 공간</a:t>
-            </a:r>
-            <a:endParaRPr lang="en-US" sz="900" dirty="0"/>
-          </a:p>
-        </p:txBody>
-      </p:sp>
-      <p:sp>
-        <p:nvSpPr>
-          <p:cNvPr id="36" name="Text 29"/>
+      <p:sp>
+        <p:nvSpPr>
+          <p:cNvPr id="17" name="Text 14"/>
+          <p:cNvSpPr/>
+          <p:nvPr/>
+        </p:nvSpPr>
+        <p:spPr>
+          <a:xfrm>
+            <a:off x="5989320" y="3282696"/>
+            <a:ext cx="1560003" cy="493776"/>
+          </a:xfrm>
+          <a:prstGeom prst="rect">
+            <a:avLst/>
+          </a:prstGeom>
+          <a:noFill/>
+          <a:ln/>
+        </p:spPr>
+        <p:txBody>
+          <a:bodyPr wrap="square" lIns="0" tIns="0" rIns="0" bIns="0" rtlCol="0" anchor="ctr"/>
+          <a:lstStyle/>
+          <a:p>
+            <a:pPr indent="0" marL="0">
+              <a:lnSpc>
+                <a:spcPct val="115000"/>
+              </a:lnSpc>
+              <a:buNone/>
+            </a:pPr>
+            <a:r>
+              <a:rPr lang="en-US" sz="1300" dirty="0">
+                <a:solidFill>
+                  <a:srgbClr val="5B6B73"/>
+                </a:solidFill>
+                <a:latin typeface="맑은 고딕" pitchFamily="34" charset="0"/>
+                <a:ea typeface="맑은 고딕" pitchFamily="34" charset="-122"/>
+                <a:cs typeface="맑은 고딕" pitchFamily="34" charset="-120"/>
+              </a:rPr>
+              <a:t>용적률</a:t>
+            </a:r>
+            <a:endParaRPr lang="en-US" sz="1300" dirty="0"/>
+          </a:p>
+        </p:txBody>
+      </p:sp>
+      <p:sp>
+        <p:nvSpPr>
+          <p:cNvPr id="18" name="Text 15"/>
+          <p:cNvSpPr/>
+          <p:nvPr/>
+        </p:nvSpPr>
+        <p:spPr>
+          <a:xfrm>
+            <a:off x="7549323" y="3282696"/>
+            <a:ext cx="4011436" cy="493776"/>
+          </a:xfrm>
+          <a:prstGeom prst="rect">
+            <a:avLst/>
+          </a:prstGeom>
+          <a:noFill/>
+          <a:ln/>
+        </p:spPr>
+        <p:txBody>
+          <a:bodyPr wrap="square" lIns="0" tIns="0" rIns="0" bIns="0" rtlCol="0" anchor="ctr"/>
+          <a:lstStyle/>
+          <a:p>
+            <a:pPr indent="0" marL="0">
+              <a:lnSpc>
+                <a:spcPct val="115000"/>
+              </a:lnSpc>
+              <a:buNone/>
+            </a:pPr>
+            <a:r>
+              <a:rPr lang="en-US" sz="1300" b="1" dirty="0">
+                <a:solidFill>
+                  <a:srgbClr val="132A3A"/>
+                </a:solidFill>
+                <a:latin typeface="맑은 고딕" pitchFamily="34" charset="0"/>
+                <a:ea typeface="맑은 고딕" pitchFamily="34" charset="-122"/>
+                <a:cs typeface="맑은 고딕" pitchFamily="34" charset="-120"/>
+              </a:rPr>
+              <a:t>현행 237.2% (법정 상한 250%)</a:t>
+            </a:r>
+            <a:endParaRPr lang="en-US" sz="1300" dirty="0"/>
+          </a:p>
+        </p:txBody>
+      </p:sp>
+      <p:sp>
+        <p:nvSpPr>
+          <p:cNvPr id="19" name="Text 16"/>
+          <p:cNvSpPr/>
+          <p:nvPr/>
+        </p:nvSpPr>
+        <p:spPr>
+          <a:xfrm>
+            <a:off x="5989320" y="5715000"/>
+            <a:ext cx="5571439" cy="384048"/>
+          </a:xfrm>
+          <a:prstGeom prst="rect">
+            <a:avLst/>
+          </a:prstGeom>
+          <a:noFill/>
+          <a:ln/>
+        </p:spPr>
+        <p:txBody>
+          <a:bodyPr wrap="square" lIns="0" tIns="0" rIns="0" bIns="0" rtlCol="0" anchor="ctr"/>
+          <a:lstStyle/>
+          <a:p>
+            <a:pPr indent="0" marL="0">
+              <a:lnSpc>
+                <a:spcPct val="125000"/>
+              </a:lnSpc>
+              <a:buNone/>
+            </a:pPr>
+            <a:r>
+              <a:rPr lang="en-US" sz="1100" dirty="0">
+                <a:solidFill>
+                  <a:srgbClr val="8A9AA3"/>
+                </a:solidFill>
+                <a:latin typeface="맑은 고딕" pitchFamily="34" charset="0"/>
+                <a:ea typeface="맑은 고딕" pitchFamily="34" charset="-122"/>
+                <a:cs typeface="맑은 고딕" pitchFamily="34" charset="-120"/>
+              </a:rPr>
+              <a:t>© V-World 국토교통부 | 2026</a:t>
+            </a:r>
+            <a:endParaRPr lang="en-US" sz="1100" dirty="0"/>
+          </a:p>
+        </p:txBody>
+      </p:sp>
+      <p:sp>
+        <p:nvSpPr>
+          <p:cNvPr id="20" name="Text 17"/>
           <p:cNvSpPr/>
           <p:nvPr/>
         </p:nvSpPr>
@@ -7678,7 +8255,7 @@
       </p:sp>
       <p:sp>
         <p:nvSpPr>
-          <p:cNvPr id="37" name="Text 30"/>
+          <p:cNvPr id="21" name="Text 18"/>
           <p:cNvSpPr/>
           <p:nvPr/>
         </p:nvSpPr>
@@ -7726,6 +8303,1113 @@
 <file path=ppt/slides/slide7.xml><?xml version="1.0" encoding="utf-8"?>
 <p:sld xmlns:a="http://schemas.openxmlformats.org/drawingml/2006/main" xmlns:r="http://schemas.openxmlformats.org/officeDocument/2006/relationships" xmlns:p="http://schemas.openxmlformats.org/presentationml/2006/main">
   <p:cSld name="Slide 7">
+    <p:bg>
+      <p:bgPr>
+        <a:solidFill>
+          <a:srgbClr val="FFFFFF"/>
+        </a:solidFill>
+      </p:bgPr>
+    </p:bg>
+    <p:spTree>
+      <p:nvGrpSpPr>
+        <p:cNvPr id="1" name=""/>
+        <p:cNvGrpSpPr/>
+        <p:nvPr/>
+      </p:nvGrpSpPr>
+      <p:grpSpPr>
+        <a:xfrm>
+          <a:off x="0" y="0"/>
+          <a:ext cx="0" cy="0"/>
+          <a:chOff x="0" y="0"/>
+          <a:chExt cx="0" cy="0"/>
+        </a:xfrm>
+      </p:grpSpPr>
+      <p:sp>
+        <p:nvSpPr>
+          <p:cNvPr id="2" name="Shape 0"/>
+          <p:cNvSpPr/>
+          <p:nvPr/>
+        </p:nvSpPr>
+        <p:spPr>
+          <a:xfrm>
+            <a:off x="502920" y="457200"/>
+            <a:ext cx="384048" cy="384048"/>
+          </a:xfrm>
+          <a:prstGeom prst="ellipse">
+            <a:avLst/>
+          </a:prstGeom>
+          <a:solidFill>
+            <a:srgbClr val="B8860B"/>
+          </a:solidFill>
+          <a:ln/>
+        </p:spPr>
+      </p:sp>
+      <p:sp>
+        <p:nvSpPr>
+          <p:cNvPr id="3" name="Text 1"/>
+          <p:cNvSpPr/>
+          <p:nvPr/>
+        </p:nvSpPr>
+        <p:spPr>
+          <a:xfrm>
+            <a:off x="502920" y="457200"/>
+            <a:ext cx="384048" cy="384048"/>
+          </a:xfrm>
+          <a:prstGeom prst="rect">
+            <a:avLst/>
+          </a:prstGeom>
+          <a:noFill/>
+          <a:ln/>
+        </p:spPr>
+        <p:txBody>
+          <a:bodyPr wrap="square" lIns="0" tIns="0" rIns="0" bIns="0" rtlCol="0" anchor="ctr"/>
+          <a:lstStyle/>
+          <a:p>
+            <a:pPr algn="ctr" indent="0" marL="0">
+              <a:buNone/>
+            </a:pPr>
+            <a:r>
+              <a:rPr lang="en-US" sz="1300" b="1" dirty="0">
+                <a:solidFill>
+                  <a:srgbClr val="FFFFFF"/>
+                </a:solidFill>
+                <a:latin typeface="Arial" pitchFamily="34" charset="0"/>
+                <a:ea typeface="Arial" pitchFamily="34" charset="-122"/>
+                <a:cs typeface="Arial" pitchFamily="34" charset="-120"/>
+              </a:rPr>
+              <a:t>07</a:t>
+            </a:r>
+            <a:endParaRPr lang="en-US" sz="1300" dirty="0"/>
+          </a:p>
+        </p:txBody>
+      </p:sp>
+      <p:sp>
+        <p:nvSpPr>
+          <p:cNvPr id="4" name="Text 2"/>
+          <p:cNvSpPr/>
+          <p:nvPr/>
+        </p:nvSpPr>
+        <p:spPr>
+          <a:xfrm>
+            <a:off x="1069848" y="457200"/>
+            <a:ext cx="10490911" cy="182880"/>
+          </a:xfrm>
+          <a:prstGeom prst="rect">
+            <a:avLst/>
+          </a:prstGeom>
+          <a:noFill/>
+          <a:ln/>
+        </p:spPr>
+        <p:txBody>
+          <a:bodyPr wrap="square" lIns="0" tIns="0" rIns="0" bIns="0" rtlCol="0" anchor="ctr"/>
+          <a:lstStyle/>
+          <a:p>
+            <a:pPr indent="0" marL="0">
+              <a:buNone/>
+            </a:pPr>
+            <a:r>
+              <a:rPr lang="en-US" sz="950" b="1" spc="200" kern="0" dirty="0">
+                <a:solidFill>
+                  <a:srgbClr val="B8860B"/>
+                </a:solidFill>
+                <a:latin typeface="Arial" pitchFamily="34" charset="0"/>
+                <a:ea typeface="Arial" pitchFamily="34" charset="-122"/>
+                <a:cs typeface="Arial" pitchFamily="34" charset="-120"/>
+              </a:rPr>
+              <a:t>Gallery</a:t>
+            </a:r>
+            <a:endParaRPr lang="en-US" sz="950" dirty="0"/>
+          </a:p>
+        </p:txBody>
+      </p:sp>
+      <p:sp>
+        <p:nvSpPr>
+          <p:cNvPr id="5" name="Text 3"/>
+          <p:cNvSpPr/>
+          <p:nvPr/>
+        </p:nvSpPr>
+        <p:spPr>
+          <a:xfrm>
+            <a:off x="1069848" y="640080"/>
+            <a:ext cx="10490911" cy="365760"/>
+          </a:xfrm>
+          <a:prstGeom prst="rect">
+            <a:avLst/>
+          </a:prstGeom>
+          <a:noFill/>
+          <a:ln/>
+        </p:spPr>
+        <p:txBody>
+          <a:bodyPr wrap="square" lIns="0" tIns="0" rIns="0" bIns="0" rtlCol="0" anchor="ctr"/>
+          <a:lstStyle/>
+          <a:p>
+            <a:pPr indent="0" marL="0">
+              <a:buNone/>
+            </a:pPr>
+            <a:r>
+              <a:rPr lang="en-US" sz="2300" b="1" dirty="0">
+                <a:solidFill>
+                  <a:srgbClr val="132A3A"/>
+                </a:solidFill>
+                <a:latin typeface="맑은 고딕" pitchFamily="34" charset="0"/>
+                <a:ea typeface="맑은 고딕" pitchFamily="34" charset="-122"/>
+                <a:cs typeface="맑은 고딕" pitchFamily="34" charset="-120"/>
+              </a:rPr>
+              <a:t>현장 사진</a:t>
+            </a:r>
+            <a:endParaRPr lang="en-US" sz="2300" dirty="0"/>
+          </a:p>
+        </p:txBody>
+      </p:sp>
+      <p:sp>
+        <p:nvSpPr>
+          <p:cNvPr id="6" name="Shape 4"/>
+          <p:cNvSpPr/>
+          <p:nvPr/>
+        </p:nvSpPr>
+        <p:spPr>
+          <a:xfrm>
+            <a:off x="502920" y="1234440"/>
+            <a:ext cx="3600602" cy="2290572"/>
+          </a:xfrm>
+          <a:prstGeom prst="roundRect">
+            <a:avLst>
+              <a:gd name="adj" fmla="val 2395"/>
+            </a:avLst>
+          </a:prstGeom>
+          <a:solidFill>
+            <a:srgbClr val="F0F0F0"/>
+          </a:solidFill>
+          <a:ln w="6350">
+            <a:solidFill>
+              <a:srgbClr val="E0E0E0"/>
+            </a:solidFill>
+            <a:prstDash val="solid"/>
+          </a:ln>
+        </p:spPr>
+      </p:sp>
+      <p:pic>
+        <p:nvPicPr>
+          <p:cNvPr id="7" name="Image 0" descr="preencoded.png">    </p:cNvPr>
+          <p:cNvPicPr>
+            <a:picLocks noChangeAspect="1"/>
+          </p:cNvPicPr>
+          <p:nvPr/>
+        </p:nvPicPr>
+        <p:blipFill>
+          <a:blip r:embed="rId1"/>
+          <a:srcRect l="0" r="0" t="0" b="0"/>
+          <a:stretch/>
+        </p:blipFill>
+        <p:spPr>
+          <a:xfrm>
+            <a:off x="502920" y="1234440"/>
+            <a:ext cx="3600602" cy="2290572"/>
+          </a:xfrm>
+          <a:prstGeom prst="rect">
+            <a:avLst/>
+          </a:prstGeom>
+        </p:spPr>
+      </p:pic>
+      <p:sp>
+        <p:nvSpPr>
+          <p:cNvPr id="8" name="Shape 5"/>
+          <p:cNvSpPr/>
+          <p:nvPr/>
+        </p:nvSpPr>
+        <p:spPr>
+          <a:xfrm>
+            <a:off x="576072" y="1307592"/>
+            <a:ext cx="868680" cy="237744"/>
+          </a:xfrm>
+          <a:prstGeom prst="rect">
+            <a:avLst/>
+          </a:prstGeom>
+          <a:solidFill>
+            <a:srgbClr val="10161F">
+              <a:alpha val="80000"/>
+            </a:srgbClr>
+          </a:solidFill>
+          <a:ln/>
+        </p:spPr>
+      </p:sp>
+      <p:sp>
+        <p:nvSpPr>
+          <p:cNvPr id="9" name="Text 6"/>
+          <p:cNvSpPr/>
+          <p:nvPr/>
+        </p:nvSpPr>
+        <p:spPr>
+          <a:xfrm>
+            <a:off x="576072" y="1307592"/>
+            <a:ext cx="868680" cy="237744"/>
+          </a:xfrm>
+          <a:prstGeom prst="rect">
+            <a:avLst/>
+          </a:prstGeom>
+          <a:noFill/>
+          <a:ln/>
+        </p:spPr>
+        <p:txBody>
+          <a:bodyPr wrap="square" lIns="0" tIns="0" rIns="0" bIns="0" rtlCol="0" anchor="ctr"/>
+          <a:lstStyle/>
+          <a:p>
+            <a:pPr algn="ctr" indent="0" marL="0">
+              <a:buNone/>
+            </a:pPr>
+            <a:r>
+              <a:rPr lang="en-US" sz="900" b="1" dirty="0">
+                <a:solidFill>
+                  <a:srgbClr val="FFFFFF"/>
+                </a:solidFill>
+                <a:latin typeface="맑은 고딕" pitchFamily="34" charset="0"/>
+                <a:ea typeface="맑은 고딕" pitchFamily="34" charset="-122"/>
+                <a:cs typeface="맑은 고딕" pitchFamily="34" charset="-120"/>
+              </a:rPr>
+              <a:t>건물 외관</a:t>
+            </a:r>
+            <a:endParaRPr lang="en-US" sz="900" dirty="0"/>
+          </a:p>
+        </p:txBody>
+      </p:sp>
+      <p:sp>
+        <p:nvSpPr>
+          <p:cNvPr id="10" name="Shape 7"/>
+          <p:cNvSpPr/>
+          <p:nvPr/>
+        </p:nvSpPr>
+        <p:spPr>
+          <a:xfrm>
+            <a:off x="502920" y="3232404"/>
+            <a:ext cx="3600602" cy="292608"/>
+          </a:xfrm>
+          <a:prstGeom prst="rect">
+            <a:avLst/>
+          </a:prstGeom>
+          <a:solidFill>
+            <a:srgbClr val="000000">
+              <a:alpha val="60000"/>
+            </a:srgbClr>
+          </a:solidFill>
+          <a:ln/>
+        </p:spPr>
+      </p:sp>
+      <p:sp>
+        <p:nvSpPr>
+          <p:cNvPr id="11" name="Text 8"/>
+          <p:cNvSpPr/>
+          <p:nvPr/>
+        </p:nvSpPr>
+        <p:spPr>
+          <a:xfrm>
+            <a:off x="612648" y="3232404"/>
+            <a:ext cx="3381146" cy="292608"/>
+          </a:xfrm>
+          <a:prstGeom prst="rect">
+            <a:avLst/>
+          </a:prstGeom>
+          <a:noFill/>
+          <a:ln/>
+        </p:spPr>
+        <p:txBody>
+          <a:bodyPr wrap="square" lIns="0" tIns="0" rIns="0" bIns="0" rtlCol="0" anchor="ctr"/>
+          <a:lstStyle/>
+          <a:p>
+            <a:pPr indent="0" marL="0">
+              <a:buNone/>
+            </a:pPr>
+            <a:r>
+              <a:rPr lang="en-US" sz="900" dirty="0">
+                <a:solidFill>
+                  <a:srgbClr val="FFFFFF"/>
+                </a:solidFill>
+                <a:latin typeface="맑은 고딕" pitchFamily="34" charset="0"/>
+                <a:ea typeface="맑은 고딕" pitchFamily="34" charset="-122"/>
+                <a:cs typeface="맑은 고딕" pitchFamily="34" charset="-120"/>
+              </a:rPr>
+              <a:t>신사동 590 ICL 빌딩 전경 및 대로변 코너 입지</a:t>
+            </a:r>
+            <a:endParaRPr lang="en-US" sz="900" dirty="0"/>
+          </a:p>
+        </p:txBody>
+      </p:sp>
+      <p:sp>
+        <p:nvSpPr>
+          <p:cNvPr id="12" name="Shape 9"/>
+          <p:cNvSpPr/>
+          <p:nvPr/>
+        </p:nvSpPr>
+        <p:spPr>
+          <a:xfrm>
+            <a:off x="4231538" y="1234440"/>
+            <a:ext cx="3600602" cy="2290572"/>
+          </a:xfrm>
+          <a:prstGeom prst="roundRect">
+            <a:avLst>
+              <a:gd name="adj" fmla="val 2395"/>
+            </a:avLst>
+          </a:prstGeom>
+          <a:solidFill>
+            <a:srgbClr val="F0F0F0"/>
+          </a:solidFill>
+          <a:ln w="6350">
+            <a:solidFill>
+              <a:srgbClr val="E0E0E0"/>
+            </a:solidFill>
+            <a:prstDash val="solid"/>
+          </a:ln>
+        </p:spPr>
+      </p:sp>
+      <p:pic>
+        <p:nvPicPr>
+          <p:cNvPr id="13" name="Image 1" descr="preencoded.png">    </p:cNvPr>
+          <p:cNvPicPr>
+            <a:picLocks noChangeAspect="1"/>
+          </p:cNvPicPr>
+          <p:nvPr/>
+        </p:nvPicPr>
+        <p:blipFill>
+          <a:blip r:embed="rId2"/>
+          <a:srcRect l="0" r="0" t="0" b="0"/>
+          <a:stretch/>
+        </p:blipFill>
+        <p:spPr>
+          <a:xfrm>
+            <a:off x="4231538" y="1234440"/>
+            <a:ext cx="3600602" cy="2290572"/>
+          </a:xfrm>
+          <a:prstGeom prst="rect">
+            <a:avLst/>
+          </a:prstGeom>
+        </p:spPr>
+      </p:pic>
+      <p:sp>
+        <p:nvSpPr>
+          <p:cNvPr id="14" name="Shape 10"/>
+          <p:cNvSpPr/>
+          <p:nvPr/>
+        </p:nvSpPr>
+        <p:spPr>
+          <a:xfrm>
+            <a:off x="4304690" y="1307592"/>
+            <a:ext cx="868680" cy="237744"/>
+          </a:xfrm>
+          <a:prstGeom prst="rect">
+            <a:avLst/>
+          </a:prstGeom>
+          <a:solidFill>
+            <a:srgbClr val="10161F">
+              <a:alpha val="80000"/>
+            </a:srgbClr>
+          </a:solidFill>
+          <a:ln/>
+        </p:spPr>
+      </p:sp>
+      <p:sp>
+        <p:nvSpPr>
+          <p:cNvPr id="15" name="Text 11"/>
+          <p:cNvSpPr/>
+          <p:nvPr/>
+        </p:nvSpPr>
+        <p:spPr>
+          <a:xfrm>
+            <a:off x="4304690" y="1307592"/>
+            <a:ext cx="868680" cy="237744"/>
+          </a:xfrm>
+          <a:prstGeom prst="rect">
+            <a:avLst/>
+          </a:prstGeom>
+          <a:noFill/>
+          <a:ln/>
+        </p:spPr>
+        <p:txBody>
+          <a:bodyPr wrap="square" lIns="0" tIns="0" rIns="0" bIns="0" rtlCol="0" anchor="ctr"/>
+          <a:lstStyle/>
+          <a:p>
+            <a:pPr algn="ctr" indent="0" marL="0">
+              <a:buNone/>
+            </a:pPr>
+            <a:r>
+              <a:rPr lang="en-US" sz="900" b="1" dirty="0">
+                <a:solidFill>
+                  <a:srgbClr val="FFFFFF"/>
+                </a:solidFill>
+                <a:latin typeface="맑은 고딕" pitchFamily="34" charset="0"/>
+                <a:ea typeface="맑은 고딕" pitchFamily="34" charset="-122"/>
+                <a:cs typeface="맑은 고딕" pitchFamily="34" charset="-120"/>
+              </a:rPr>
+              <a:t>주 출입구</a:t>
+            </a:r>
+            <a:endParaRPr lang="en-US" sz="900" dirty="0"/>
+          </a:p>
+        </p:txBody>
+      </p:sp>
+      <p:sp>
+        <p:nvSpPr>
+          <p:cNvPr id="16" name="Shape 12"/>
+          <p:cNvSpPr/>
+          <p:nvPr/>
+        </p:nvSpPr>
+        <p:spPr>
+          <a:xfrm>
+            <a:off x="4231538" y="3232404"/>
+            <a:ext cx="3600602" cy="292608"/>
+          </a:xfrm>
+          <a:prstGeom prst="rect">
+            <a:avLst/>
+          </a:prstGeom>
+          <a:solidFill>
+            <a:srgbClr val="000000">
+              <a:alpha val="60000"/>
+            </a:srgbClr>
+          </a:solidFill>
+          <a:ln/>
+        </p:spPr>
+      </p:sp>
+      <p:sp>
+        <p:nvSpPr>
+          <p:cNvPr id="17" name="Text 13"/>
+          <p:cNvSpPr/>
+          <p:nvPr/>
+        </p:nvSpPr>
+        <p:spPr>
+          <a:xfrm>
+            <a:off x="4341266" y="3232404"/>
+            <a:ext cx="3381146" cy="292608"/>
+          </a:xfrm>
+          <a:prstGeom prst="rect">
+            <a:avLst/>
+          </a:prstGeom>
+          <a:noFill/>
+          <a:ln/>
+        </p:spPr>
+        <p:txBody>
+          <a:bodyPr wrap="square" lIns="0" tIns="0" rIns="0" bIns="0" rtlCol="0" anchor="ctr"/>
+          <a:lstStyle/>
+          <a:p>
+            <a:pPr indent="0" marL="0">
+              <a:buNone/>
+            </a:pPr>
+            <a:r>
+              <a:rPr lang="en-US" sz="900" dirty="0">
+                <a:solidFill>
+                  <a:srgbClr val="FFFFFF"/>
+                </a:solidFill>
+                <a:latin typeface="맑은 고딕" pitchFamily="34" charset="0"/>
+                <a:ea typeface="맑은 고딕" pitchFamily="34" charset="-122"/>
+                <a:cs typeface="맑은 고딕" pitchFamily="34" charset="-120"/>
+              </a:rPr>
+              <a:t>지상 진입로 및 1층 전면 상가부</a:t>
+            </a:r>
+            <a:endParaRPr lang="en-US" sz="900" dirty="0"/>
+          </a:p>
+        </p:txBody>
+      </p:sp>
+      <p:sp>
+        <p:nvSpPr>
+          <p:cNvPr id="18" name="Shape 14"/>
+          <p:cNvSpPr/>
+          <p:nvPr/>
+        </p:nvSpPr>
+        <p:spPr>
+          <a:xfrm>
+            <a:off x="7960157" y="1234440"/>
+            <a:ext cx="3600602" cy="2290572"/>
+          </a:xfrm>
+          <a:prstGeom prst="roundRect">
+            <a:avLst>
+              <a:gd name="adj" fmla="val 2395"/>
+            </a:avLst>
+          </a:prstGeom>
+          <a:solidFill>
+            <a:srgbClr val="F0F0F0"/>
+          </a:solidFill>
+          <a:ln w="6350">
+            <a:solidFill>
+              <a:srgbClr val="E0E0E0"/>
+            </a:solidFill>
+            <a:prstDash val="solid"/>
+          </a:ln>
+        </p:spPr>
+      </p:sp>
+      <p:pic>
+        <p:nvPicPr>
+          <p:cNvPr id="19" name="Image 2" descr="preencoded.png">    </p:cNvPr>
+          <p:cNvPicPr>
+            <a:picLocks noChangeAspect="1"/>
+          </p:cNvPicPr>
+          <p:nvPr/>
+        </p:nvPicPr>
+        <p:blipFill>
+          <a:blip r:embed="rId3"/>
+          <a:srcRect l="0" r="0" t="0" b="0"/>
+          <a:stretch/>
+        </p:blipFill>
+        <p:spPr>
+          <a:xfrm>
+            <a:off x="7960157" y="1234440"/>
+            <a:ext cx="3600602" cy="2290572"/>
+          </a:xfrm>
+          <a:prstGeom prst="rect">
+            <a:avLst/>
+          </a:prstGeom>
+        </p:spPr>
+      </p:pic>
+      <p:sp>
+        <p:nvSpPr>
+          <p:cNvPr id="20" name="Shape 15"/>
+          <p:cNvSpPr/>
+          <p:nvPr/>
+        </p:nvSpPr>
+        <p:spPr>
+          <a:xfrm>
+            <a:off x="8033309" y="1307592"/>
+            <a:ext cx="868680" cy="237744"/>
+          </a:xfrm>
+          <a:prstGeom prst="rect">
+            <a:avLst/>
+          </a:prstGeom>
+          <a:solidFill>
+            <a:srgbClr val="10161F">
+              <a:alpha val="80000"/>
+            </a:srgbClr>
+          </a:solidFill>
+          <a:ln/>
+        </p:spPr>
+      </p:sp>
+      <p:sp>
+        <p:nvSpPr>
+          <p:cNvPr id="21" name="Text 16"/>
+          <p:cNvSpPr/>
+          <p:nvPr/>
+        </p:nvSpPr>
+        <p:spPr>
+          <a:xfrm>
+            <a:off x="8033309" y="1307592"/>
+            <a:ext cx="868680" cy="237744"/>
+          </a:xfrm>
+          <a:prstGeom prst="rect">
+            <a:avLst/>
+          </a:prstGeom>
+          <a:noFill/>
+          <a:ln/>
+        </p:spPr>
+        <p:txBody>
+          <a:bodyPr wrap="square" lIns="0" tIns="0" rIns="0" bIns="0" rtlCol="0" anchor="ctr"/>
+          <a:lstStyle/>
+          <a:p>
+            <a:pPr algn="ctr" indent="0" marL="0">
+              <a:buNone/>
+            </a:pPr>
+            <a:r>
+              <a:rPr lang="en-US" sz="900" b="1" dirty="0">
+                <a:solidFill>
+                  <a:srgbClr val="FFFFFF"/>
+                </a:solidFill>
+                <a:latin typeface="맑은 고딕" pitchFamily="34" charset="0"/>
+                <a:ea typeface="맑은 고딕" pitchFamily="34" charset="-122"/>
+                <a:cs typeface="맑은 고딕" pitchFamily="34" charset="-120"/>
+              </a:rPr>
+              <a:t>실내 공간</a:t>
+            </a:r>
+            <a:endParaRPr lang="en-US" sz="900" dirty="0"/>
+          </a:p>
+        </p:txBody>
+      </p:sp>
+      <p:sp>
+        <p:nvSpPr>
+          <p:cNvPr id="22" name="Shape 17"/>
+          <p:cNvSpPr/>
+          <p:nvPr/>
+        </p:nvSpPr>
+        <p:spPr>
+          <a:xfrm>
+            <a:off x="7960157" y="3232404"/>
+            <a:ext cx="3600602" cy="292608"/>
+          </a:xfrm>
+          <a:prstGeom prst="rect">
+            <a:avLst/>
+          </a:prstGeom>
+          <a:solidFill>
+            <a:srgbClr val="000000">
+              <a:alpha val="60000"/>
+            </a:srgbClr>
+          </a:solidFill>
+          <a:ln/>
+        </p:spPr>
+      </p:sp>
+      <p:sp>
+        <p:nvSpPr>
+          <p:cNvPr id="23" name="Text 18"/>
+          <p:cNvSpPr/>
+          <p:nvPr/>
+        </p:nvSpPr>
+        <p:spPr>
+          <a:xfrm>
+            <a:off x="8069885" y="3232404"/>
+            <a:ext cx="3381146" cy="292608"/>
+          </a:xfrm>
+          <a:prstGeom prst="rect">
+            <a:avLst/>
+          </a:prstGeom>
+          <a:noFill/>
+          <a:ln/>
+        </p:spPr>
+        <p:txBody>
+          <a:bodyPr wrap="square" lIns="0" tIns="0" rIns="0" bIns="0" rtlCol="0" anchor="ctr"/>
+          <a:lstStyle/>
+          <a:p>
+            <a:pPr indent="0" marL="0">
+              <a:buNone/>
+            </a:pPr>
+            <a:r>
+              <a:rPr lang="en-US" sz="900" dirty="0">
+                <a:solidFill>
+                  <a:srgbClr val="FFFFFF"/>
+                </a:solidFill>
+                <a:latin typeface="맑은 고딕" pitchFamily="34" charset="0"/>
+                <a:ea typeface="맑은 고딕" pitchFamily="34" charset="-122"/>
+                <a:cs typeface="맑은 고딕" pitchFamily="34" charset="-120"/>
+              </a:rPr>
+              <a:t>건물 측면부 및 도로 접면</a:t>
+            </a:r>
+            <a:endParaRPr lang="en-US" sz="900" dirty="0"/>
+          </a:p>
+        </p:txBody>
+      </p:sp>
+      <p:sp>
+        <p:nvSpPr>
+          <p:cNvPr id="24" name="Shape 19"/>
+          <p:cNvSpPr/>
+          <p:nvPr/>
+        </p:nvSpPr>
+        <p:spPr>
+          <a:xfrm>
+            <a:off x="502920" y="3653028"/>
+            <a:ext cx="3600602" cy="2290572"/>
+          </a:xfrm>
+          <a:prstGeom prst="roundRect">
+            <a:avLst>
+              <a:gd name="adj" fmla="val 2395"/>
+            </a:avLst>
+          </a:prstGeom>
+          <a:solidFill>
+            <a:srgbClr val="F0F0F0"/>
+          </a:solidFill>
+          <a:ln w="6350">
+            <a:solidFill>
+              <a:srgbClr val="E0E0E0"/>
+            </a:solidFill>
+            <a:prstDash val="solid"/>
+          </a:ln>
+        </p:spPr>
+      </p:sp>
+      <p:pic>
+        <p:nvPicPr>
+          <p:cNvPr id="25" name="Image 3" descr="preencoded.png">    </p:cNvPr>
+          <p:cNvPicPr>
+            <a:picLocks noChangeAspect="1"/>
+          </p:cNvPicPr>
+          <p:nvPr/>
+        </p:nvPicPr>
+        <p:blipFill>
+          <a:blip r:embed="rId4"/>
+          <a:srcRect l="0" r="0" t="0" b="0"/>
+          <a:stretch/>
+        </p:blipFill>
+        <p:spPr>
+          <a:xfrm>
+            <a:off x="502920" y="3653028"/>
+            <a:ext cx="3600602" cy="2290572"/>
+          </a:xfrm>
+          <a:prstGeom prst="rect">
+            <a:avLst/>
+          </a:prstGeom>
+        </p:spPr>
+      </p:pic>
+      <p:sp>
+        <p:nvSpPr>
+          <p:cNvPr id="26" name="Shape 20"/>
+          <p:cNvSpPr/>
+          <p:nvPr/>
+        </p:nvSpPr>
+        <p:spPr>
+          <a:xfrm>
+            <a:off x="576072" y="3726180"/>
+            <a:ext cx="822960" cy="237744"/>
+          </a:xfrm>
+          <a:prstGeom prst="rect">
+            <a:avLst/>
+          </a:prstGeom>
+          <a:solidFill>
+            <a:srgbClr val="10161F">
+              <a:alpha val="80000"/>
+            </a:srgbClr>
+          </a:solidFill>
+          <a:ln/>
+        </p:spPr>
+      </p:sp>
+      <p:sp>
+        <p:nvSpPr>
+          <p:cNvPr id="27" name="Text 21"/>
+          <p:cNvSpPr/>
+          <p:nvPr/>
+        </p:nvSpPr>
+        <p:spPr>
+          <a:xfrm>
+            <a:off x="576072" y="3726180"/>
+            <a:ext cx="822960" cy="237744"/>
+          </a:xfrm>
+          <a:prstGeom prst="rect">
+            <a:avLst/>
+          </a:prstGeom>
+          <a:noFill/>
+          <a:ln/>
+        </p:spPr>
+        <p:txBody>
+          <a:bodyPr wrap="square" lIns="0" tIns="0" rIns="0" bIns="0" rtlCol="0" anchor="ctr"/>
+          <a:lstStyle/>
+          <a:p>
+            <a:pPr algn="ctr" indent="0" marL="0">
+              <a:buNone/>
+            </a:pPr>
+            <a:r>
+              <a:rPr lang="en-US" sz="900" b="1" dirty="0">
+                <a:solidFill>
+                  <a:srgbClr val="FFFFFF"/>
+                </a:solidFill>
+                <a:latin typeface="맑은 고딕" pitchFamily="34" charset="0"/>
+                <a:ea typeface="맑은 고딕" pitchFamily="34" charset="-122"/>
+                <a:cs typeface="맑은 고딕" pitchFamily="34" charset="-120"/>
+              </a:rPr>
+              <a:t>주차장</a:t>
+            </a:r>
+            <a:endParaRPr lang="en-US" sz="900" dirty="0"/>
+          </a:p>
+        </p:txBody>
+      </p:sp>
+      <p:sp>
+        <p:nvSpPr>
+          <p:cNvPr id="28" name="Shape 22"/>
+          <p:cNvSpPr/>
+          <p:nvPr/>
+        </p:nvSpPr>
+        <p:spPr>
+          <a:xfrm>
+            <a:off x="502920" y="5650992"/>
+            <a:ext cx="3600602" cy="292608"/>
+          </a:xfrm>
+          <a:prstGeom prst="rect">
+            <a:avLst/>
+          </a:prstGeom>
+          <a:solidFill>
+            <a:srgbClr val="000000">
+              <a:alpha val="60000"/>
+            </a:srgbClr>
+          </a:solidFill>
+          <a:ln/>
+        </p:spPr>
+      </p:sp>
+      <p:sp>
+        <p:nvSpPr>
+          <p:cNvPr id="29" name="Text 23"/>
+          <p:cNvSpPr/>
+          <p:nvPr/>
+        </p:nvSpPr>
+        <p:spPr>
+          <a:xfrm>
+            <a:off x="612648" y="5650992"/>
+            <a:ext cx="3381146" cy="292608"/>
+          </a:xfrm>
+          <a:prstGeom prst="rect">
+            <a:avLst/>
+          </a:prstGeom>
+          <a:noFill/>
+          <a:ln/>
+        </p:spPr>
+        <p:txBody>
+          <a:bodyPr wrap="square" lIns="0" tIns="0" rIns="0" bIns="0" rtlCol="0" anchor="ctr"/>
+          <a:lstStyle/>
+          <a:p>
+            <a:pPr indent="0" marL="0">
+              <a:buNone/>
+            </a:pPr>
+            <a:r>
+              <a:rPr lang="en-US" sz="900" dirty="0">
+                <a:solidFill>
+                  <a:srgbClr val="FFFFFF"/>
+                </a:solidFill>
+                <a:latin typeface="맑은 고딕" pitchFamily="34" charset="0"/>
+                <a:ea typeface="맑은 고딕" pitchFamily="34" charset="-122"/>
+                <a:cs typeface="맑은 고딕" pitchFamily="34" charset="-120"/>
+              </a:rPr>
+              <a:t>자주식/기계식 주차장 진입로 (총 26대)</a:t>
+            </a:r>
+            <a:endParaRPr lang="en-US" sz="900" dirty="0"/>
+          </a:p>
+        </p:txBody>
+      </p:sp>
+      <p:sp>
+        <p:nvSpPr>
+          <p:cNvPr id="30" name="Shape 24"/>
+          <p:cNvSpPr/>
+          <p:nvPr/>
+        </p:nvSpPr>
+        <p:spPr>
+          <a:xfrm>
+            <a:off x="4231538" y="3653028"/>
+            <a:ext cx="3600602" cy="2290572"/>
+          </a:xfrm>
+          <a:prstGeom prst="roundRect">
+            <a:avLst>
+              <a:gd name="adj" fmla="val 2395"/>
+            </a:avLst>
+          </a:prstGeom>
+          <a:solidFill>
+            <a:srgbClr val="F0F0F0"/>
+          </a:solidFill>
+          <a:ln w="6350">
+            <a:solidFill>
+              <a:srgbClr val="E0E0E0"/>
+            </a:solidFill>
+            <a:prstDash val="solid"/>
+          </a:ln>
+        </p:spPr>
+      </p:sp>
+      <p:pic>
+        <p:nvPicPr>
+          <p:cNvPr id="31" name="Image 4" descr="preencoded.png">    </p:cNvPr>
+          <p:cNvPicPr>
+            <a:picLocks noChangeAspect="1"/>
+          </p:cNvPicPr>
+          <p:nvPr/>
+        </p:nvPicPr>
+        <p:blipFill>
+          <a:blip r:embed="rId5"/>
+          <a:srcRect l="0" r="0" t="0" b="0"/>
+          <a:stretch/>
+        </p:blipFill>
+        <p:spPr>
+          <a:xfrm>
+            <a:off x="4231538" y="3653028"/>
+            <a:ext cx="3600602" cy="2290572"/>
+          </a:xfrm>
+          <a:prstGeom prst="rect">
+            <a:avLst/>
+          </a:prstGeom>
+        </p:spPr>
+      </p:pic>
+      <p:sp>
+        <p:nvSpPr>
+          <p:cNvPr id="32" name="Shape 25"/>
+          <p:cNvSpPr/>
+          <p:nvPr/>
+        </p:nvSpPr>
+        <p:spPr>
+          <a:xfrm>
+            <a:off x="4304690" y="3726180"/>
+            <a:ext cx="996696" cy="237744"/>
+          </a:xfrm>
+          <a:prstGeom prst="rect">
+            <a:avLst/>
+          </a:prstGeom>
+          <a:solidFill>
+            <a:srgbClr val="10161F">
+              <a:alpha val="80000"/>
+            </a:srgbClr>
+          </a:solidFill>
+          <a:ln/>
+        </p:spPr>
+      </p:sp>
+      <p:sp>
+        <p:nvSpPr>
+          <p:cNvPr id="33" name="Text 26"/>
+          <p:cNvSpPr/>
+          <p:nvPr/>
+        </p:nvSpPr>
+        <p:spPr>
+          <a:xfrm>
+            <a:off x="4304690" y="3726180"/>
+            <a:ext cx="996696" cy="237744"/>
+          </a:xfrm>
+          <a:prstGeom prst="rect">
+            <a:avLst/>
+          </a:prstGeom>
+          <a:noFill/>
+          <a:ln/>
+        </p:spPr>
+        <p:txBody>
+          <a:bodyPr wrap="square" lIns="0" tIns="0" rIns="0" bIns="0" rtlCol="0" anchor="ctr"/>
+          <a:lstStyle/>
+          <a:p>
+            <a:pPr algn="ctr" indent="0" marL="0">
+              <a:buNone/>
+            </a:pPr>
+            <a:r>
+              <a:rPr lang="en-US" sz="900" b="1" dirty="0">
+                <a:solidFill>
+                  <a:srgbClr val="FFFFFF"/>
+                </a:solidFill>
+                <a:latin typeface="맑은 고딕" pitchFamily="34" charset="0"/>
+                <a:ea typeface="맑은 고딕" pitchFamily="34" charset="-122"/>
+                <a:cs typeface="맑은 고딕" pitchFamily="34" charset="-120"/>
+              </a:rPr>
+              <a:t>옥상/테라스</a:t>
+            </a:r>
+            <a:endParaRPr lang="en-US" sz="900" dirty="0"/>
+          </a:p>
+        </p:txBody>
+      </p:sp>
+      <p:sp>
+        <p:nvSpPr>
+          <p:cNvPr id="34" name="Shape 27"/>
+          <p:cNvSpPr/>
+          <p:nvPr/>
+        </p:nvSpPr>
+        <p:spPr>
+          <a:xfrm>
+            <a:off x="4231538" y="5650992"/>
+            <a:ext cx="3600602" cy="292608"/>
+          </a:xfrm>
+          <a:prstGeom prst="rect">
+            <a:avLst/>
+          </a:prstGeom>
+          <a:solidFill>
+            <a:srgbClr val="000000">
+              <a:alpha val="60000"/>
+            </a:srgbClr>
+          </a:solidFill>
+          <a:ln/>
+        </p:spPr>
+      </p:sp>
+      <p:sp>
+        <p:nvSpPr>
+          <p:cNvPr id="35" name="Text 28"/>
+          <p:cNvSpPr/>
+          <p:nvPr/>
+        </p:nvSpPr>
+        <p:spPr>
+          <a:xfrm>
+            <a:off x="4341266" y="5650992"/>
+            <a:ext cx="3381146" cy="292608"/>
+          </a:xfrm>
+          <a:prstGeom prst="rect">
+            <a:avLst/>
+          </a:prstGeom>
+          <a:noFill/>
+          <a:ln/>
+        </p:spPr>
+        <p:txBody>
+          <a:bodyPr wrap="square" lIns="0" tIns="0" rIns="0" bIns="0" rtlCol="0" anchor="ctr"/>
+          <a:lstStyle/>
+          <a:p>
+            <a:pPr indent="0" marL="0">
+              <a:buNone/>
+            </a:pPr>
+            <a:r>
+              <a:rPr lang="en-US" sz="900" dirty="0">
+                <a:solidFill>
+                  <a:srgbClr val="FFFFFF"/>
+                </a:solidFill>
+                <a:latin typeface="맑은 고딕" pitchFamily="34" charset="0"/>
+                <a:ea typeface="맑은 고딕" pitchFamily="34" charset="-122"/>
+                <a:cs typeface="맑은 고딕" pitchFamily="34" charset="-120"/>
+              </a:rPr>
+              <a:t>상층부 외관 및 옥상 공간</a:t>
+            </a:r>
+            <a:endParaRPr lang="en-US" sz="900" dirty="0"/>
+          </a:p>
+        </p:txBody>
+      </p:sp>
+      <p:sp>
+        <p:nvSpPr>
+          <p:cNvPr id="36" name="Text 29"/>
+          <p:cNvSpPr/>
+          <p:nvPr/>
+        </p:nvSpPr>
+        <p:spPr>
+          <a:xfrm>
+            <a:off x="502920" y="6382512"/>
+            <a:ext cx="7315200" cy="219456"/>
+          </a:xfrm>
+          <a:prstGeom prst="rect">
+            <a:avLst/>
+          </a:prstGeom>
+          <a:noFill/>
+          <a:ln/>
+        </p:spPr>
+        <p:txBody>
+          <a:bodyPr wrap="square" lIns="0" tIns="0" rIns="0" bIns="0" rtlCol="0" anchor="ctr"/>
+          <a:lstStyle/>
+          <a:p>
+            <a:pPr indent="0" marL="0">
+              <a:buNone/>
+            </a:pPr>
+            <a:r>
+              <a:rPr lang="en-US" sz="800" dirty="0">
+                <a:solidFill>
+                  <a:srgbClr val="5B6B73"/>
+                </a:solidFill>
+                <a:latin typeface="맑은 고딕" pitchFamily="34" charset="0"/>
+                <a:ea typeface="맑은 고딕" pitchFamily="34" charset="-122"/>
+                <a:cs typeface="맑은 고딕" pitchFamily="34" charset="-120"/>
+              </a:rPr>
+              <a:t>CRE DEAL   |   IM-SINSA-590</a:t>
+            </a:r>
+            <a:endParaRPr lang="en-US" sz="800" dirty="0"/>
+          </a:p>
+        </p:txBody>
+      </p:sp>
+      <p:sp>
+        <p:nvSpPr>
+          <p:cNvPr id="37" name="Text 30"/>
+          <p:cNvSpPr/>
+          <p:nvPr/>
+        </p:nvSpPr>
+        <p:spPr>
+          <a:xfrm>
+            <a:off x="10774375" y="6382512"/>
+            <a:ext cx="914400" cy="219456"/>
+          </a:xfrm>
+          <a:prstGeom prst="rect">
+            <a:avLst/>
+          </a:prstGeom>
+          <a:noFill/>
+          <a:ln/>
+        </p:spPr>
+        <p:txBody>
+          <a:bodyPr wrap="square" lIns="0" tIns="0" rIns="0" bIns="0" rtlCol="0" anchor="ctr"/>
+          <a:lstStyle/>
+          <a:p>
+            <a:pPr algn="r" indent="0" marL="0">
+              <a:buNone/>
+            </a:pPr>
+            <a:r>
+              <a:rPr lang="en-US" sz="900" b="1" dirty="0">
+                <a:solidFill>
+                  <a:srgbClr val="B8860B"/>
+                </a:solidFill>
+                <a:latin typeface="Arial" pitchFamily="34" charset="0"/>
+                <a:ea typeface="Arial" pitchFamily="34" charset="-122"/>
+                <a:cs typeface="Arial" pitchFamily="34" charset="-120"/>
+              </a:rPr>
+              <a:t>7</a:t>
+            </a:r>
+            <a:endParaRPr lang="en-US" sz="900" dirty="0"/>
+          </a:p>
+        </p:txBody>
+      </p:sp>
+    </p:spTree>
+  </p:cSld>
+  <p:clrMapOvr>
+    <a:masterClrMapping/>
+  </p:clrMapOvr>
+</p:sld>
+</file>
+
+<file path=ppt/slides/slide8.xml><?xml version="1.0" encoding="utf-8"?>
+<p:sld xmlns:a="http://schemas.openxmlformats.org/drawingml/2006/main" xmlns:r="http://schemas.openxmlformats.org/officeDocument/2006/relationships" xmlns:p="http://schemas.openxmlformats.org/presentationml/2006/main">
+  <p:cSld name="Slide 8">
     <p:bg>
       <p:bgPr>
         <a:solidFill>
@@ -7800,7 +9484,7 @@
                 <a:ea typeface="Arial" pitchFamily="34" charset="-122"/>
                 <a:cs typeface="Arial" pitchFamily="34" charset="-120"/>
               </a:rPr>
-              <a:t>07</a:t>
+              <a:t>08</a:t>
             </a:r>
             <a:endParaRPr lang="en-US" sz="1300" dirty="0"/>
           </a:p>
@@ -9395,7 +11079,7 @@
                 <a:ea typeface="Arial" pitchFamily="34" charset="-122"/>
                 <a:cs typeface="Arial" pitchFamily="34" charset="-120"/>
               </a:rPr>
-              <a:t>7</a:t>
+              <a:t>8</a:t>
             </a:r>
             <a:endParaRPr lang="en-US" sz="900" dirty="0"/>
           </a:p>

--- a/docs/test/golden-outputs/p2-sinsa-r3/sinsa_trading_r3_basic.pptx
+++ b/docs/test/golden-outputs/p2-sinsa-r3/sinsa_trading_r3_basic.pptx
@@ -12,10 +12,9 @@
     <p:sldId id="260" r:id="rId6"/>
     <p:sldId id="261" r:id="rId7"/>
     <p:sldId id="262" r:id="rId8"/>
-    <p:sldId id="263" r:id="rId9"/>
   </p:sldIdLst>
   <p:notesMasterIdLst>
-    <p:notesMasterId r:id="rId10"/>
+    <p:notesMasterId r:id="rId9"/>
   </p:notesMasterIdLst>
   <p:sldSz cx="12192000" cy="6858000"/>
   <p:notesSz cx="6858000" cy="12192000"/>
@@ -1061,94 +1060,6 @@
             <a:fld id="{F7021451-1387-4CA6-816F-3879F97B5CBC}" type="slidenum">
               <a:rPr lang="en-US"/>
               <a:t>7</a:t>
-            </a:fld>
-            <a:endParaRPr lang="en-US"/>
-          </a:p>
-        </p:txBody>
-      </p:sp>
-    </p:spTree>
-    <p:extLst>
-      <p:ext uri="{BB962C8B-B14F-4D97-AF65-F5344CB8AC3E}">
-        <p14:creationId xmlns:p14="http://schemas.microsoft.com/office/powerpoint/2010/main" val="1024086991"/>
-      </p:ext>
-    </p:extLst>
-  </p:cSld>
-  <p:clrMapOvr>
-    <a:masterClrMapping/>
-  </p:clrMapOvr>
-</p:notes>
-</file>
-
-<file path=ppt/notesSlides/notesSlide8.xml><?xml version="1.0" encoding="utf-8"?>
-<p:notes xmlns:a="http://schemas.openxmlformats.org/drawingml/2006/main" xmlns:r="http://schemas.openxmlformats.org/officeDocument/2006/relationships" xmlns:p="http://schemas.openxmlformats.org/presentationml/2006/main">
-  <p:cSld>
-    <p:spTree>
-      <p:nvGrpSpPr>
-        <p:cNvPr id="1" name=""/>
-        <p:cNvGrpSpPr/>
-        <p:nvPr/>
-      </p:nvGrpSpPr>
-      <p:grpSpPr>
-        <a:xfrm>
-          <a:off x="0" y="0"/>
-          <a:ext cx="0" cy="0"/>
-          <a:chOff x="0" y="0"/>
-          <a:chExt cx="0" cy="0"/>
-        </a:xfrm>
-      </p:grpSpPr>
-      <p:sp>
-        <p:nvSpPr>
-          <p:cNvPr id="2" name="Slide Image Placeholder 1"/>
-          <p:cNvSpPr>
-            <a:spLocks noGrp="1" noRot="1" noChangeAspect="1"/>
-          </p:cNvSpPr>
-          <p:nvPr>
-            <p:ph type="sldImg"/>
-          </p:nvPr>
-        </p:nvSpPr>
-        <p:spPr/>
-      </p:sp>
-      <p:sp>
-        <p:nvSpPr>
-          <p:cNvPr id="3" name="Notes Placeholder 2"/>
-          <p:cNvSpPr>
-            <a:spLocks noGrp="1"/>
-          </p:cNvSpPr>
-          <p:nvPr>
-            <p:ph type="body" idx="1"/>
-          </p:nvPr>
-        </p:nvSpPr>
-        <p:spPr/>
-        <p:txBody>
-          <a:bodyPr/>
-          <a:lstStyle/>
-          <a:p>
-            <a:r>
-              <a:rPr lang="en-US" dirty="0"/>
-              <a:t/>
-            </a:r>
-            <a:endParaRPr lang="en-US" dirty="0"/>
-          </a:p>
-        </p:txBody>
-      </p:sp>
-      <p:sp>
-        <p:nvSpPr>
-          <p:cNvPr id="4" name="Slide Number Placeholder 3"/>
-          <p:cNvSpPr>
-            <a:spLocks noGrp="1"/>
-          </p:cNvSpPr>
-          <p:nvPr>
-            <p:ph type="sldNum" sz="quarter" idx="10"/>
-          </p:nvPr>
-        </p:nvSpPr>
-        <p:spPr/>
-        <p:txBody>
-          <a:bodyPr/>
-          <a:lstStyle/>
-          <a:p>
-            <a:fld id="{F7021451-1387-4CA6-816F-3879F97B5CBC}" type="slidenum">
-              <a:rPr lang="en-US"/>
-              <a:t>8</a:t>
             </a:fld>
             <a:endParaRPr lang="en-US"/>
           </a:p>
@@ -5600,7 +5511,7 @@
         <p:spPr>
           <a:xfrm>
             <a:off x="5989320" y="1801368"/>
-            <a:ext cx="1560003" cy="493776"/>
+            <a:ext cx="1560003" cy="347472"/>
           </a:xfrm>
           <a:prstGeom prst="rect">
             <a:avLst/>
@@ -5619,7 +5530,7 @@
               <a:buNone/>
             </a:pPr>
             <a:r>
-              <a:rPr lang="en-US" sz="1300" dirty="0">
+              <a:rPr lang="en-US" sz="1150" dirty="0">
                 <a:solidFill>
                   <a:srgbClr val="5B6B73"/>
                 </a:solidFill>
@@ -5629,7 +5540,7 @@
               </a:rPr>
               <a:t>소재지</a:t>
             </a:r>
-            <a:endParaRPr lang="en-US" sz="1300" dirty="0"/>
+            <a:endParaRPr lang="en-US" sz="1150" dirty="0"/>
           </a:p>
         </p:txBody>
       </p:sp>
@@ -5642,7 +5553,7 @@
         <p:spPr>
           <a:xfrm>
             <a:off x="7549323" y="1801368"/>
-            <a:ext cx="4011436" cy="493776"/>
+            <a:ext cx="4011436" cy="347472"/>
           </a:xfrm>
           <a:prstGeom prst="rect">
             <a:avLst/>
@@ -5661,7 +5572,7 @@
               <a:buNone/>
             </a:pPr>
             <a:r>
-              <a:rPr lang="en-US" sz="1300" b="1" dirty="0">
+              <a:rPr lang="en-US" sz="1150" b="1" dirty="0">
                 <a:solidFill>
                   <a:srgbClr val="132A3A"/>
                 </a:solidFill>
@@ -5671,7 +5582,7 @@
               </a:rPr>
               <a:t>서울특별시 강남구 신사동 590</a:t>
             </a:r>
-            <a:endParaRPr lang="en-US" sz="1300" dirty="0"/>
+            <a:endParaRPr lang="en-US" sz="1150" dirty="0"/>
           </a:p>
         </p:txBody>
       </p:sp>
@@ -5683,7 +5594,7 @@
         </p:nvSpPr>
         <p:spPr>
           <a:xfrm>
-            <a:off x="5989320" y="2295144"/>
+            <a:off x="5989320" y="2148840"/>
             <a:ext cx="5571439" cy="0"/>
           </a:xfrm>
           <a:prstGeom prst="line">
@@ -5706,8 +5617,8 @@
         </p:nvSpPr>
         <p:spPr>
           <a:xfrm>
-            <a:off x="5989320" y="2295144"/>
-            <a:ext cx="1560003" cy="493776"/>
+            <a:off x="5989320" y="2148840"/>
+            <a:ext cx="1560003" cy="347472"/>
           </a:xfrm>
           <a:prstGeom prst="rect">
             <a:avLst/>
@@ -5726,7 +5637,7 @@
               <a:buNone/>
             </a:pPr>
             <a:r>
-              <a:rPr lang="en-US" sz="1300" dirty="0">
+              <a:rPr lang="en-US" sz="1150" dirty="0">
                 <a:solidFill>
                   <a:srgbClr val="5B6B73"/>
                 </a:solidFill>
@@ -5736,7 +5647,7 @@
               </a:rPr>
               <a:t>대중교통</a:t>
             </a:r>
-            <a:endParaRPr lang="en-US" sz="1300" dirty="0"/>
+            <a:endParaRPr lang="en-US" sz="1150" dirty="0"/>
           </a:p>
         </p:txBody>
       </p:sp>
@@ -5748,8 +5659,8 @@
         </p:nvSpPr>
         <p:spPr>
           <a:xfrm>
-            <a:off x="7549323" y="2295144"/>
-            <a:ext cx="4011436" cy="493776"/>
+            <a:off x="7549323" y="2148840"/>
+            <a:ext cx="4011436" cy="347472"/>
           </a:xfrm>
           <a:prstGeom prst="rect">
             <a:avLst/>
@@ -5768,7 +5679,7 @@
               <a:buNone/>
             </a:pPr>
             <a:r>
-              <a:rPr lang="en-US" sz="1300" b="1" dirty="0">
+              <a:rPr lang="en-US" sz="1150" b="1" dirty="0">
                 <a:solidFill>
                   <a:srgbClr val="132A3A"/>
                 </a:solidFill>
@@ -5778,7 +5689,7 @@
               </a:rPr>
               <a:t>압구정역 도보 5분 (약 450m)</a:t>
             </a:r>
-            <a:endParaRPr lang="en-US" sz="1300" dirty="0"/>
+            <a:endParaRPr lang="en-US" sz="1150" dirty="0"/>
           </a:p>
         </p:txBody>
       </p:sp>
@@ -5790,7 +5701,7 @@
         </p:nvSpPr>
         <p:spPr>
           <a:xfrm>
-            <a:off x="5989320" y="2788920"/>
+            <a:off x="5989320" y="2496312"/>
             <a:ext cx="5571439" cy="0"/>
           </a:xfrm>
           <a:prstGeom prst="line">
@@ -5813,8 +5724,8 @@
         </p:nvSpPr>
         <p:spPr>
           <a:xfrm>
-            <a:off x="5989320" y="2788920"/>
-            <a:ext cx="1560003" cy="493776"/>
+            <a:off x="5989320" y="2496312"/>
+            <a:ext cx="1560003" cy="347472"/>
           </a:xfrm>
           <a:prstGeom prst="rect">
             <a:avLst/>
@@ -5833,7 +5744,7 @@
               <a:buNone/>
             </a:pPr>
             <a:r>
-              <a:rPr lang="en-US" sz="1300" dirty="0">
+              <a:rPr lang="en-US" sz="1150" dirty="0">
                 <a:solidFill>
                   <a:srgbClr val="5B6B73"/>
                 </a:solidFill>
@@ -5843,7 +5754,7 @@
               </a:rPr>
               <a:t>도로접면</a:t>
             </a:r>
-            <a:endParaRPr lang="en-US" sz="1300" dirty="0"/>
+            <a:endParaRPr lang="en-US" sz="1150" dirty="0"/>
           </a:p>
         </p:txBody>
       </p:sp>
@@ -5855,8 +5766,8 @@
         </p:nvSpPr>
         <p:spPr>
           <a:xfrm>
-            <a:off x="7549323" y="2788920"/>
-            <a:ext cx="4011436" cy="493776"/>
+            <a:off x="7549323" y="2496312"/>
+            <a:ext cx="4011436" cy="347472"/>
           </a:xfrm>
           <a:prstGeom prst="rect">
             <a:avLst/>
@@ -5875,7 +5786,7 @@
               <a:buNone/>
             </a:pPr>
             <a:r>
-              <a:rPr lang="en-US" sz="1300" b="1" dirty="0">
+              <a:rPr lang="en-US" sz="1150" b="1" dirty="0">
                 <a:solidFill>
                   <a:srgbClr val="132A3A"/>
                 </a:solidFill>
@@ -5885,7 +5796,7 @@
               </a:rPr>
               <a:t>논현로 이면 코너 (북측 8m, 동측 6m)</a:t>
             </a:r>
-            <a:endParaRPr lang="en-US" sz="1300" dirty="0"/>
+            <a:endParaRPr lang="en-US" sz="1150" dirty="0"/>
           </a:p>
         </p:txBody>
       </p:sp>
@@ -5897,7 +5808,7 @@
         </p:nvSpPr>
         <p:spPr>
           <a:xfrm>
-            <a:off x="5989320" y="3282696"/>
+            <a:off x="5989320" y="2843784"/>
             <a:ext cx="5571439" cy="0"/>
           </a:xfrm>
           <a:prstGeom prst="line">
@@ -5920,8 +5831,8 @@
         </p:nvSpPr>
         <p:spPr>
           <a:xfrm>
-            <a:off x="5989320" y="3282696"/>
-            <a:ext cx="1560003" cy="493776"/>
+            <a:off x="5989320" y="2843784"/>
+            <a:ext cx="1560003" cy="347472"/>
           </a:xfrm>
           <a:prstGeom prst="rect">
             <a:avLst/>
@@ -5940,7 +5851,7 @@
               <a:buNone/>
             </a:pPr>
             <a:r>
-              <a:rPr lang="en-US" sz="1300" dirty="0">
+              <a:rPr lang="en-US" sz="1150" dirty="0">
                 <a:solidFill>
                   <a:srgbClr val="5B6B73"/>
                 </a:solidFill>
@@ -5950,7 +5861,7 @@
               </a:rPr>
               <a:t>상권권역</a:t>
             </a:r>
-            <a:endParaRPr lang="en-US" sz="1300" dirty="0"/>
+            <a:endParaRPr lang="en-US" sz="1150" dirty="0"/>
           </a:p>
         </p:txBody>
       </p:sp>
@@ -5962,8 +5873,8 @@
         </p:nvSpPr>
         <p:spPr>
           <a:xfrm>
-            <a:off x="7549323" y="3282696"/>
-            <a:ext cx="4011436" cy="493776"/>
+            <a:off x="7549323" y="2843784"/>
+            <a:ext cx="4011436" cy="347472"/>
           </a:xfrm>
           <a:prstGeom prst="rect">
             <a:avLst/>
@@ -5982,7 +5893,7 @@
               <a:buNone/>
             </a:pPr>
             <a:r>
-              <a:rPr lang="en-US" sz="1300" b="1" dirty="0">
+              <a:rPr lang="en-US" sz="1150" b="1" dirty="0">
                 <a:solidFill>
                   <a:srgbClr val="132A3A"/>
                 </a:solidFill>
@@ -5992,7 +5903,7 @@
               </a:rPr>
               <a:t>GBD 주요 상업·업무 권역</a:t>
             </a:r>
-            <a:endParaRPr lang="en-US" sz="1300" dirty="0"/>
+            <a:endParaRPr lang="en-US" sz="1150" dirty="0"/>
           </a:p>
         </p:txBody>
       </p:sp>
@@ -6004,7 +5915,7 @@
         </p:nvSpPr>
         <p:spPr>
           <a:xfrm>
-            <a:off x="5989320" y="3776472"/>
+            <a:off x="5989320" y="3191256"/>
             <a:ext cx="5571439" cy="0"/>
           </a:xfrm>
           <a:prstGeom prst="line">
@@ -6027,8 +5938,8 @@
         </p:nvSpPr>
         <p:spPr>
           <a:xfrm>
-            <a:off x="5989320" y="3776472"/>
-            <a:ext cx="1560003" cy="493776"/>
+            <a:off x="5989320" y="3191256"/>
+            <a:ext cx="1560003" cy="347472"/>
           </a:xfrm>
           <a:prstGeom prst="rect">
             <a:avLst/>
@@ -6047,7 +5958,7 @@
               <a:buNone/>
             </a:pPr>
             <a:r>
-              <a:rPr lang="en-US" sz="1300" dirty="0">
+              <a:rPr lang="en-US" sz="1150" dirty="0">
                 <a:solidFill>
                   <a:srgbClr val="5B6B73"/>
                 </a:solidFill>
@@ -6057,7 +5968,7 @@
               </a:rPr>
               <a:t>주요시설</a:t>
             </a:r>
-            <a:endParaRPr lang="en-US" sz="1300" dirty="0"/>
+            <a:endParaRPr lang="en-US" sz="1150" dirty="0"/>
           </a:p>
         </p:txBody>
       </p:sp>
@@ -6069,8 +5980,8 @@
         </p:nvSpPr>
         <p:spPr>
           <a:xfrm>
-            <a:off x="7549323" y="3776472"/>
-            <a:ext cx="4011436" cy="493776"/>
+            <a:off x="7549323" y="3191256"/>
+            <a:ext cx="4011436" cy="347472"/>
           </a:xfrm>
           <a:prstGeom prst="rect">
             <a:avLst/>
@@ -6089,7 +6000,7 @@
               <a:buNone/>
             </a:pPr>
             <a:r>
-              <a:rPr lang="en-US" sz="1300" b="1" dirty="0">
+              <a:rPr lang="en-US" sz="1150" b="1" dirty="0">
                 <a:solidFill>
                   <a:srgbClr val="132A3A"/>
                 </a:solidFill>
@@ -6099,7 +6010,7 @@
               </a:rPr>
               <a:t>강남을지병원사거리 도보 3분 (약 200m)</a:t>
             </a:r>
-            <a:endParaRPr lang="en-US" sz="1300" dirty="0"/>
+            <a:endParaRPr lang="en-US" sz="1150" dirty="0"/>
           </a:p>
         </p:txBody>
       </p:sp>
@@ -6111,7 +6022,7 @@
         </p:nvSpPr>
         <p:spPr>
           <a:xfrm>
-            <a:off x="5989320" y="4407408"/>
+            <a:off x="5989320" y="3648456"/>
             <a:ext cx="5571439" cy="1316736"/>
           </a:xfrm>
           <a:prstGeom prst="roundRect">
@@ -6133,7 +6044,7 @@
         </p:nvSpPr>
         <p:spPr>
           <a:xfrm>
-            <a:off x="5989320" y="4462272"/>
+            <a:off x="5989320" y="3703320"/>
             <a:ext cx="36576" cy="1207008"/>
           </a:xfrm>
           <a:prstGeom prst="rect">
@@ -6153,7 +6064,7 @@
         </p:nvSpPr>
         <p:spPr>
           <a:xfrm>
-            <a:off x="6135624" y="4498848"/>
+            <a:off x="6135624" y="3739896"/>
             <a:ext cx="5315407" cy="201168"/>
           </a:xfrm>
           <a:prstGeom prst="rect">
@@ -6192,7 +6103,7 @@
         </p:nvSpPr>
         <p:spPr>
           <a:xfrm>
-            <a:off x="6135624" y="4700016"/>
+            <a:off x="6135624" y="3941064"/>
             <a:ext cx="5315407" cy="987552"/>
           </a:xfrm>
           <a:prstGeom prst="rect">
@@ -6477,7 +6388,7 @@
                 <a:ea typeface="Arial" pitchFamily="34" charset="-122"/>
                 <a:cs typeface="Arial" pitchFamily="34" charset="-120"/>
               </a:rPr>
-              <a:t>토지 정보</a:t>
+              <a:t>Land &amp; Cadastral</a:t>
             </a:r>
             <a:endParaRPr lang="en-US" sz="950" dirty="0"/>
           </a:p>
@@ -6522,16 +6433,40 @@
           </a:p>
         </p:txBody>
       </p:sp>
-      <p:sp>
-        <p:nvSpPr>
-          <p:cNvPr id="6" name="Text 4"/>
-          <p:cNvSpPr/>
-          <p:nvPr/>
-        </p:nvSpPr>
-        <p:spPr>
-          <a:xfrm>
-            <a:off x="502920" y="1371600"/>
-            <a:ext cx="6858000" cy="237744"/>
+      <p:pic>
+        <p:nvPicPr>
+          <p:cNvPr id="6" name="Image 0" descr="preencoded.png">    </p:cNvPr>
+          <p:cNvPicPr>
+            <a:picLocks noChangeAspect="1"/>
+          </p:cNvPicPr>
+          <p:nvPr/>
+        </p:nvPicPr>
+        <p:blipFill>
+          <a:blip r:embed="rId1"/>
+          <a:stretch>
+            <a:fillRect/>
+          </a:stretch>
+        </p:blipFill>
+        <p:spPr>
+          <a:xfrm>
+            <a:off x="502920" y="1481328"/>
+            <a:ext cx="5120640" cy="4114800"/>
+          </a:xfrm>
+          <a:prstGeom prst="rect">
+            <a:avLst/>
+          </a:prstGeom>
+        </p:spPr>
+      </p:pic>
+      <p:sp>
+        <p:nvSpPr>
+          <p:cNvPr id="7" name="Text 4"/>
+          <p:cNvSpPr/>
+          <p:nvPr/>
+        </p:nvSpPr>
+        <p:spPr>
+          <a:xfrm>
+            <a:off x="5989320" y="1481328"/>
+            <a:ext cx="5571439" cy="237744"/>
           </a:xfrm>
           <a:prstGeom prst="rect">
             <a:avLst/>
@@ -6563,14 +6498,14 @@
       </p:sp>
       <p:sp>
         <p:nvSpPr>
-          <p:cNvPr id="7" name="Text 5"/>
-          <p:cNvSpPr/>
-          <p:nvPr/>
-        </p:nvSpPr>
-        <p:spPr>
-          <a:xfrm>
-            <a:off x="502920" y="1645920"/>
-            <a:ext cx="1920240" cy="329184"/>
+          <p:cNvPr id="8" name="Text 5"/>
+          <p:cNvSpPr/>
+          <p:nvPr/>
+        </p:nvSpPr>
+        <p:spPr>
+          <a:xfrm>
+            <a:off x="5989320" y="1801368"/>
+            <a:ext cx="1560003" cy="347472"/>
           </a:xfrm>
           <a:prstGeom prst="rect">
             <a:avLst/>
@@ -6589,7 +6524,7 @@
               <a:buNone/>
             </a:pPr>
             <a:r>
-              <a:rPr lang="en-US" sz="1200" dirty="0">
+              <a:rPr lang="en-US" sz="1150" dirty="0">
                 <a:solidFill>
                   <a:srgbClr val="5B6B73"/>
                 </a:solidFill>
@@ -6599,20 +6534,20 @@
               </a:rPr>
               <a:t>대지면적</a:t>
             </a:r>
-            <a:endParaRPr lang="en-US" sz="1200" dirty="0"/>
-          </a:p>
-        </p:txBody>
-      </p:sp>
-      <p:sp>
-        <p:nvSpPr>
-          <p:cNvPr id="8" name="Text 6"/>
-          <p:cNvSpPr/>
-          <p:nvPr/>
-        </p:nvSpPr>
-        <p:spPr>
-          <a:xfrm>
-            <a:off x="2423160" y="1645920"/>
-            <a:ext cx="4937760" cy="329184"/>
+            <a:endParaRPr lang="en-US" sz="1150" dirty="0"/>
+          </a:p>
+        </p:txBody>
+      </p:sp>
+      <p:sp>
+        <p:nvSpPr>
+          <p:cNvPr id="9" name="Text 6"/>
+          <p:cNvSpPr/>
+          <p:nvPr/>
+        </p:nvSpPr>
+        <p:spPr>
+          <a:xfrm>
+            <a:off x="7549323" y="1801368"/>
+            <a:ext cx="4011436" cy="347472"/>
           </a:xfrm>
           <a:prstGeom prst="rect">
             <a:avLst/>
@@ -6631,7 +6566,7 @@
               <a:buNone/>
             </a:pPr>
             <a:r>
-              <a:rPr lang="en-US" sz="1200" b="1" dirty="0">
+              <a:rPr lang="en-US" sz="1150" b="1" dirty="0">
                 <a:solidFill>
                   <a:srgbClr val="132A3A"/>
                 </a:solidFill>
@@ -6641,20 +6576,20 @@
               </a:rPr>
               <a:t>1,061.9㎡ (321.2평)</a:t>
             </a:r>
-            <a:endParaRPr lang="en-US" sz="1200" dirty="0"/>
-          </a:p>
-        </p:txBody>
-      </p:sp>
-      <p:sp>
-        <p:nvSpPr>
-          <p:cNvPr id="9" name="Shape 7"/>
-          <p:cNvSpPr/>
-          <p:nvPr/>
-        </p:nvSpPr>
-        <p:spPr>
-          <a:xfrm>
-            <a:off x="502920" y="1975104"/>
-            <a:ext cx="6858000" cy="0"/>
+            <a:endParaRPr lang="en-US" sz="1150" dirty="0"/>
+          </a:p>
+        </p:txBody>
+      </p:sp>
+      <p:sp>
+        <p:nvSpPr>
+          <p:cNvPr id="10" name="Shape 7"/>
+          <p:cNvSpPr/>
+          <p:nvPr/>
+        </p:nvSpPr>
+        <p:spPr>
+          <a:xfrm>
+            <a:off x="5989320" y="2148840"/>
+            <a:ext cx="5571439" cy="0"/>
           </a:xfrm>
           <a:prstGeom prst="line">
             <a:avLst/>
@@ -6670,14 +6605,14 @@
       </p:sp>
       <p:sp>
         <p:nvSpPr>
-          <p:cNvPr id="10" name="Text 8"/>
-          <p:cNvSpPr/>
-          <p:nvPr/>
-        </p:nvSpPr>
-        <p:spPr>
-          <a:xfrm>
-            <a:off x="502920" y="1975104"/>
-            <a:ext cx="1920240" cy="329184"/>
+          <p:cNvPr id="11" name="Text 8"/>
+          <p:cNvSpPr/>
+          <p:nvPr/>
+        </p:nvSpPr>
+        <p:spPr>
+          <a:xfrm>
+            <a:off x="5989320" y="2148840"/>
+            <a:ext cx="1560003" cy="347472"/>
           </a:xfrm>
           <a:prstGeom prst="rect">
             <a:avLst/>
@@ -6696,7 +6631,7 @@
               <a:buNone/>
             </a:pPr>
             <a:r>
-              <a:rPr lang="en-US" sz="1200" dirty="0">
+              <a:rPr lang="en-US" sz="1150" dirty="0">
                 <a:solidFill>
                   <a:srgbClr val="5B6B73"/>
                 </a:solidFill>
@@ -6706,20 +6641,20 @@
               </a:rPr>
               <a:t>용도지역</a:t>
             </a:r>
-            <a:endParaRPr lang="en-US" sz="1200" dirty="0"/>
-          </a:p>
-        </p:txBody>
-      </p:sp>
-      <p:sp>
-        <p:nvSpPr>
-          <p:cNvPr id="11" name="Text 9"/>
-          <p:cNvSpPr/>
-          <p:nvPr/>
-        </p:nvSpPr>
-        <p:spPr>
-          <a:xfrm>
-            <a:off x="2423160" y="1975104"/>
-            <a:ext cx="4937760" cy="329184"/>
+            <a:endParaRPr lang="en-US" sz="1150" dirty="0"/>
+          </a:p>
+        </p:txBody>
+      </p:sp>
+      <p:sp>
+        <p:nvSpPr>
+          <p:cNvPr id="12" name="Text 9"/>
+          <p:cNvSpPr/>
+          <p:nvPr/>
+        </p:nvSpPr>
+        <p:spPr>
+          <a:xfrm>
+            <a:off x="7549323" y="2148840"/>
+            <a:ext cx="4011436" cy="347472"/>
           </a:xfrm>
           <a:prstGeom prst="rect">
             <a:avLst/>
@@ -6738,7 +6673,7 @@
               <a:buNone/>
             </a:pPr>
             <a:r>
-              <a:rPr lang="en-US" sz="1200" b="1" dirty="0">
+              <a:rPr lang="en-US" sz="1150" b="1" dirty="0">
                 <a:solidFill>
                   <a:srgbClr val="132A3A"/>
                 </a:solidFill>
@@ -6748,20 +6683,20 @@
               </a:rPr>
               <a:t>제3종일반주거지역</a:t>
             </a:r>
-            <a:endParaRPr lang="en-US" sz="1200" dirty="0"/>
-          </a:p>
-        </p:txBody>
-      </p:sp>
-      <p:sp>
-        <p:nvSpPr>
-          <p:cNvPr id="12" name="Shape 10"/>
-          <p:cNvSpPr/>
-          <p:nvPr/>
-        </p:nvSpPr>
-        <p:spPr>
-          <a:xfrm>
-            <a:off x="502920" y="2304288"/>
-            <a:ext cx="6858000" cy="0"/>
+            <a:endParaRPr lang="en-US" sz="1150" dirty="0"/>
+          </a:p>
+        </p:txBody>
+      </p:sp>
+      <p:sp>
+        <p:nvSpPr>
+          <p:cNvPr id="13" name="Shape 10"/>
+          <p:cNvSpPr/>
+          <p:nvPr/>
+        </p:nvSpPr>
+        <p:spPr>
+          <a:xfrm>
+            <a:off x="5989320" y="2496312"/>
+            <a:ext cx="5571439" cy="0"/>
           </a:xfrm>
           <a:prstGeom prst="line">
             <a:avLst/>
@@ -6777,14 +6712,14 @@
       </p:sp>
       <p:sp>
         <p:nvSpPr>
-          <p:cNvPr id="13" name="Text 11"/>
-          <p:cNvSpPr/>
-          <p:nvPr/>
-        </p:nvSpPr>
-        <p:spPr>
-          <a:xfrm>
-            <a:off x="502920" y="2304288"/>
-            <a:ext cx="1920240" cy="329184"/>
+          <p:cNvPr id="14" name="Text 11"/>
+          <p:cNvSpPr/>
+          <p:nvPr/>
+        </p:nvSpPr>
+        <p:spPr>
+          <a:xfrm>
+            <a:off x="5989320" y="2496312"/>
+            <a:ext cx="1560003" cy="347472"/>
           </a:xfrm>
           <a:prstGeom prst="rect">
             <a:avLst/>
@@ -6803,7 +6738,7 @@
               <a:buNone/>
             </a:pPr>
             <a:r>
-              <a:rPr lang="en-US" sz="1200" dirty="0">
+              <a:rPr lang="en-US" sz="1150" dirty="0">
                 <a:solidFill>
                   <a:srgbClr val="5B6B73"/>
                 </a:solidFill>
@@ -6813,20 +6748,20 @@
               </a:rPr>
               <a:t>건폐율</a:t>
             </a:r>
-            <a:endParaRPr lang="en-US" sz="1200" dirty="0"/>
-          </a:p>
-        </p:txBody>
-      </p:sp>
-      <p:sp>
-        <p:nvSpPr>
-          <p:cNvPr id="14" name="Text 12"/>
-          <p:cNvSpPr/>
-          <p:nvPr/>
-        </p:nvSpPr>
-        <p:spPr>
-          <a:xfrm>
-            <a:off x="2423160" y="2304288"/>
-            <a:ext cx="4937760" cy="329184"/>
+            <a:endParaRPr lang="en-US" sz="1150" dirty="0"/>
+          </a:p>
+        </p:txBody>
+      </p:sp>
+      <p:sp>
+        <p:nvSpPr>
+          <p:cNvPr id="15" name="Text 12"/>
+          <p:cNvSpPr/>
+          <p:nvPr/>
+        </p:nvSpPr>
+        <p:spPr>
+          <a:xfrm>
+            <a:off x="7549323" y="2496312"/>
+            <a:ext cx="4011436" cy="347472"/>
           </a:xfrm>
           <a:prstGeom prst="rect">
             <a:avLst/>
@@ -6845,7 +6780,7 @@
               <a:buNone/>
             </a:pPr>
             <a:r>
-              <a:rPr lang="en-US" sz="1200" b="1" dirty="0">
+              <a:rPr lang="en-US" sz="1150" b="1" dirty="0">
                 <a:solidFill>
                   <a:srgbClr val="132A3A"/>
                 </a:solidFill>
@@ -6855,20 +6790,20 @@
               </a:rPr>
               <a:t>현행 51.3% (법정 상한 50%)</a:t>
             </a:r>
-            <a:endParaRPr lang="en-US" sz="1200" dirty="0"/>
-          </a:p>
-        </p:txBody>
-      </p:sp>
-      <p:sp>
-        <p:nvSpPr>
-          <p:cNvPr id="15" name="Shape 13"/>
-          <p:cNvSpPr/>
-          <p:nvPr/>
-        </p:nvSpPr>
-        <p:spPr>
-          <a:xfrm>
-            <a:off x="502920" y="2633472"/>
-            <a:ext cx="6858000" cy="0"/>
+            <a:endParaRPr lang="en-US" sz="1150" dirty="0"/>
+          </a:p>
+        </p:txBody>
+      </p:sp>
+      <p:sp>
+        <p:nvSpPr>
+          <p:cNvPr id="16" name="Shape 13"/>
+          <p:cNvSpPr/>
+          <p:nvPr/>
+        </p:nvSpPr>
+        <p:spPr>
+          <a:xfrm>
+            <a:off x="5989320" y="2843784"/>
+            <a:ext cx="5571439" cy="0"/>
           </a:xfrm>
           <a:prstGeom prst="line">
             <a:avLst/>
@@ -6884,14 +6819,14 @@
       </p:sp>
       <p:sp>
         <p:nvSpPr>
-          <p:cNvPr id="16" name="Text 14"/>
-          <p:cNvSpPr/>
-          <p:nvPr/>
-        </p:nvSpPr>
-        <p:spPr>
-          <a:xfrm>
-            <a:off x="502920" y="2633472"/>
-            <a:ext cx="1920240" cy="329184"/>
+          <p:cNvPr id="17" name="Text 14"/>
+          <p:cNvSpPr/>
+          <p:nvPr/>
+        </p:nvSpPr>
+        <p:spPr>
+          <a:xfrm>
+            <a:off x="5989320" y="2843784"/>
+            <a:ext cx="1560003" cy="347472"/>
           </a:xfrm>
           <a:prstGeom prst="rect">
             <a:avLst/>
@@ -6910,7 +6845,7 @@
               <a:buNone/>
             </a:pPr>
             <a:r>
-              <a:rPr lang="en-US" sz="1200" dirty="0">
+              <a:rPr lang="en-US" sz="1150" dirty="0">
                 <a:solidFill>
                   <a:srgbClr val="5B6B73"/>
                 </a:solidFill>
@@ -6920,20 +6855,20 @@
               </a:rPr>
               <a:t>용적률</a:t>
             </a:r>
-            <a:endParaRPr lang="en-US" sz="1200" dirty="0"/>
-          </a:p>
-        </p:txBody>
-      </p:sp>
-      <p:sp>
-        <p:nvSpPr>
-          <p:cNvPr id="17" name="Text 15"/>
-          <p:cNvSpPr/>
-          <p:nvPr/>
-        </p:nvSpPr>
-        <p:spPr>
-          <a:xfrm>
-            <a:off x="2423160" y="2633472"/>
-            <a:ext cx="4937760" cy="329184"/>
+            <a:endParaRPr lang="en-US" sz="1150" dirty="0"/>
+          </a:p>
+        </p:txBody>
+      </p:sp>
+      <p:sp>
+        <p:nvSpPr>
+          <p:cNvPr id="18" name="Text 15"/>
+          <p:cNvSpPr/>
+          <p:nvPr/>
+        </p:nvSpPr>
+        <p:spPr>
+          <a:xfrm>
+            <a:off x="7549323" y="2843784"/>
+            <a:ext cx="4011436" cy="347472"/>
           </a:xfrm>
           <a:prstGeom prst="rect">
             <a:avLst/>
@@ -6952,7 +6887,7 @@
               <a:buNone/>
             </a:pPr>
             <a:r>
-              <a:rPr lang="en-US" sz="1200" b="1" dirty="0">
+              <a:rPr lang="en-US" sz="1150" b="1" dirty="0">
                 <a:solidFill>
                   <a:srgbClr val="132A3A"/>
                 </a:solidFill>
@@ -6962,20 +6897,20 @@
               </a:rPr>
               <a:t>현행 237.2% (법정 상한 250%)</a:t>
             </a:r>
-            <a:endParaRPr lang="en-US" sz="1200" dirty="0"/>
-          </a:p>
-        </p:txBody>
-      </p:sp>
-      <p:sp>
-        <p:nvSpPr>
-          <p:cNvPr id="18" name="Shape 16"/>
-          <p:cNvSpPr/>
-          <p:nvPr/>
-        </p:nvSpPr>
-        <p:spPr>
-          <a:xfrm>
-            <a:off x="502920" y="2962656"/>
-            <a:ext cx="6858000" cy="0"/>
+            <a:endParaRPr lang="en-US" sz="1150" dirty="0"/>
+          </a:p>
+        </p:txBody>
+      </p:sp>
+      <p:sp>
+        <p:nvSpPr>
+          <p:cNvPr id="19" name="Shape 16"/>
+          <p:cNvSpPr/>
+          <p:nvPr/>
+        </p:nvSpPr>
+        <p:spPr>
+          <a:xfrm>
+            <a:off x="5989320" y="3191256"/>
+            <a:ext cx="5571439" cy="0"/>
           </a:xfrm>
           <a:prstGeom prst="line">
             <a:avLst/>
@@ -6991,14 +6926,14 @@
       </p:sp>
       <p:sp>
         <p:nvSpPr>
-          <p:cNvPr id="19" name="Text 17"/>
-          <p:cNvSpPr/>
-          <p:nvPr/>
-        </p:nvSpPr>
-        <p:spPr>
-          <a:xfrm>
-            <a:off x="502920" y="2962656"/>
-            <a:ext cx="1920240" cy="329184"/>
+          <p:cNvPr id="20" name="Text 17"/>
+          <p:cNvSpPr/>
+          <p:nvPr/>
+        </p:nvSpPr>
+        <p:spPr>
+          <a:xfrm>
+            <a:off x="5989320" y="3191256"/>
+            <a:ext cx="1560003" cy="347472"/>
           </a:xfrm>
           <a:prstGeom prst="rect">
             <a:avLst/>
@@ -7017,7 +6952,7 @@
               <a:buNone/>
             </a:pPr>
             <a:r>
-              <a:rPr lang="en-US" sz="1200" dirty="0">
+              <a:rPr lang="en-US" sz="1150" dirty="0">
                 <a:solidFill>
                   <a:srgbClr val="5B6B73"/>
                 </a:solidFill>
@@ -7027,20 +6962,20 @@
               </a:rPr>
               <a:t>도로접면</a:t>
             </a:r>
-            <a:endParaRPr lang="en-US" sz="1200" dirty="0"/>
-          </a:p>
-        </p:txBody>
-      </p:sp>
-      <p:sp>
-        <p:nvSpPr>
-          <p:cNvPr id="20" name="Text 18"/>
-          <p:cNvSpPr/>
-          <p:nvPr/>
-        </p:nvSpPr>
-        <p:spPr>
-          <a:xfrm>
-            <a:off x="2423160" y="2962656"/>
-            <a:ext cx="4937760" cy="329184"/>
+            <a:endParaRPr lang="en-US" sz="1150" dirty="0"/>
+          </a:p>
+        </p:txBody>
+      </p:sp>
+      <p:sp>
+        <p:nvSpPr>
+          <p:cNvPr id="21" name="Text 18"/>
+          <p:cNvSpPr/>
+          <p:nvPr/>
+        </p:nvSpPr>
+        <p:spPr>
+          <a:xfrm>
+            <a:off x="7549323" y="3191256"/>
+            <a:ext cx="4011436" cy="347472"/>
           </a:xfrm>
           <a:prstGeom prst="rect">
             <a:avLst/>
@@ -7059,7 +6994,7 @@
               <a:buNone/>
             </a:pPr>
             <a:r>
-              <a:rPr lang="en-US" sz="1200" b="1" dirty="0">
+              <a:rPr lang="en-US" sz="1150" b="1" dirty="0">
                 <a:solidFill>
                   <a:srgbClr val="132A3A"/>
                 </a:solidFill>
@@ -7069,20 +7004,20 @@
               </a:rPr>
               <a:t>논현로 이면 코너 (북측 8m, 동측 6m)</a:t>
             </a:r>
-            <a:endParaRPr lang="en-US" sz="1200" dirty="0"/>
-          </a:p>
-        </p:txBody>
-      </p:sp>
-      <p:sp>
-        <p:nvSpPr>
-          <p:cNvPr id="21" name="Shape 19"/>
-          <p:cNvSpPr/>
-          <p:nvPr/>
-        </p:nvSpPr>
-        <p:spPr>
-          <a:xfrm>
-            <a:off x="502920" y="3291840"/>
-            <a:ext cx="6858000" cy="0"/>
+            <a:endParaRPr lang="en-US" sz="1150" dirty="0"/>
+          </a:p>
+        </p:txBody>
+      </p:sp>
+      <p:sp>
+        <p:nvSpPr>
+          <p:cNvPr id="22" name="Shape 19"/>
+          <p:cNvSpPr/>
+          <p:nvPr/>
+        </p:nvSpPr>
+        <p:spPr>
+          <a:xfrm>
+            <a:off x="5989320" y="3538728"/>
+            <a:ext cx="5571439" cy="0"/>
           </a:xfrm>
           <a:prstGeom prst="line">
             <a:avLst/>
@@ -7098,14 +7033,14 @@
       </p:sp>
       <p:sp>
         <p:nvSpPr>
-          <p:cNvPr id="22" name="Text 20"/>
-          <p:cNvSpPr/>
-          <p:nvPr/>
-        </p:nvSpPr>
-        <p:spPr>
-          <a:xfrm>
-            <a:off x="502920" y="3291840"/>
-            <a:ext cx="1920240" cy="329184"/>
+          <p:cNvPr id="23" name="Text 20"/>
+          <p:cNvSpPr/>
+          <p:nvPr/>
+        </p:nvSpPr>
+        <p:spPr>
+          <a:xfrm>
+            <a:off x="5989320" y="3538728"/>
+            <a:ext cx="1560003" cy="347472"/>
           </a:xfrm>
           <a:prstGeom prst="rect">
             <a:avLst/>
@@ -7124,7 +7059,7 @@
               <a:buNone/>
             </a:pPr>
             <a:r>
-              <a:rPr lang="en-US" sz="1200" dirty="0">
+              <a:rPr lang="en-US" sz="1150" dirty="0">
                 <a:solidFill>
                   <a:srgbClr val="5B6B73"/>
                 </a:solidFill>
@@ -7134,20 +7069,20 @@
               </a:rPr>
               <a:t>지목</a:t>
             </a:r>
-            <a:endParaRPr lang="en-US" sz="1200" dirty="0"/>
-          </a:p>
-        </p:txBody>
-      </p:sp>
-      <p:sp>
-        <p:nvSpPr>
-          <p:cNvPr id="23" name="Text 21"/>
-          <p:cNvSpPr/>
-          <p:nvPr/>
-        </p:nvSpPr>
-        <p:spPr>
-          <a:xfrm>
-            <a:off x="2423160" y="3291840"/>
-            <a:ext cx="4937760" cy="329184"/>
+            <a:endParaRPr lang="en-US" sz="1150" dirty="0"/>
+          </a:p>
+        </p:txBody>
+      </p:sp>
+      <p:sp>
+        <p:nvSpPr>
+          <p:cNvPr id="24" name="Text 21"/>
+          <p:cNvSpPr/>
+          <p:nvPr/>
+        </p:nvSpPr>
+        <p:spPr>
+          <a:xfrm>
+            <a:off x="7549323" y="3538728"/>
+            <a:ext cx="4011436" cy="347472"/>
           </a:xfrm>
           <a:prstGeom prst="rect">
             <a:avLst/>
@@ -7166,7 +7101,7 @@
               <a:buNone/>
             </a:pPr>
             <a:r>
-              <a:rPr lang="en-US" sz="1200" b="1" dirty="0">
+              <a:rPr lang="en-US" sz="1150" b="1" dirty="0">
                 <a:solidFill>
                   <a:srgbClr val="132A3A"/>
                 </a:solidFill>
@@ -7176,20 +7111,20 @@
               </a:rPr>
               <a:t>대</a:t>
             </a:r>
-            <a:endParaRPr lang="en-US" sz="1200" dirty="0"/>
-          </a:p>
-        </p:txBody>
-      </p:sp>
-      <p:sp>
-        <p:nvSpPr>
-          <p:cNvPr id="24" name="Shape 22"/>
-          <p:cNvSpPr/>
-          <p:nvPr/>
-        </p:nvSpPr>
-        <p:spPr>
-          <a:xfrm>
-            <a:off x="502920" y="3621024"/>
-            <a:ext cx="6858000" cy="0"/>
+            <a:endParaRPr lang="en-US" sz="1150" dirty="0"/>
+          </a:p>
+        </p:txBody>
+      </p:sp>
+      <p:sp>
+        <p:nvSpPr>
+          <p:cNvPr id="25" name="Shape 22"/>
+          <p:cNvSpPr/>
+          <p:nvPr/>
+        </p:nvSpPr>
+        <p:spPr>
+          <a:xfrm>
+            <a:off x="5989320" y="3886200"/>
+            <a:ext cx="5571439" cy="0"/>
           </a:xfrm>
           <a:prstGeom prst="line">
             <a:avLst/>
@@ -7205,14 +7140,14 @@
       </p:sp>
       <p:sp>
         <p:nvSpPr>
-          <p:cNvPr id="25" name="Text 23"/>
-          <p:cNvSpPr/>
-          <p:nvPr/>
-        </p:nvSpPr>
-        <p:spPr>
-          <a:xfrm>
-            <a:off x="502920" y="3621024"/>
-            <a:ext cx="1920240" cy="329184"/>
+          <p:cNvPr id="26" name="Text 23"/>
+          <p:cNvSpPr/>
+          <p:nvPr/>
+        </p:nvSpPr>
+        <p:spPr>
+          <a:xfrm>
+            <a:off x="5989320" y="3886200"/>
+            <a:ext cx="1560003" cy="347472"/>
           </a:xfrm>
           <a:prstGeom prst="rect">
             <a:avLst/>
@@ -7231,7 +7166,7 @@
               <a:buNone/>
             </a:pPr>
             <a:r>
-              <a:rPr lang="en-US" sz="1200" dirty="0">
+              <a:rPr lang="en-US" sz="1150" dirty="0">
                 <a:solidFill>
                   <a:srgbClr val="5B6B73"/>
                 </a:solidFill>
@@ -7241,20 +7176,20 @@
               </a:rPr>
               <a:t>토지평당가</a:t>
             </a:r>
-            <a:endParaRPr lang="en-US" sz="1200" dirty="0"/>
-          </a:p>
-        </p:txBody>
-      </p:sp>
-      <p:sp>
-        <p:nvSpPr>
-          <p:cNvPr id="26" name="Text 24"/>
-          <p:cNvSpPr/>
-          <p:nvPr/>
-        </p:nvSpPr>
-        <p:spPr>
-          <a:xfrm>
-            <a:off x="2423160" y="3621024"/>
-            <a:ext cx="4937760" cy="329184"/>
+            <a:endParaRPr lang="en-US" sz="1150" dirty="0"/>
+          </a:p>
+        </p:txBody>
+      </p:sp>
+      <p:sp>
+        <p:nvSpPr>
+          <p:cNvPr id="27" name="Text 24"/>
+          <p:cNvSpPr/>
+          <p:nvPr/>
+        </p:nvSpPr>
+        <p:spPr>
+          <a:xfrm>
+            <a:off x="7549323" y="3886200"/>
+            <a:ext cx="4011436" cy="347472"/>
           </a:xfrm>
           <a:prstGeom prst="rect">
             <a:avLst/>
@@ -7273,7 +7208,7 @@
               <a:buNone/>
             </a:pPr>
             <a:r>
-              <a:rPr lang="en-US" sz="1200" b="1" dirty="0">
+              <a:rPr lang="en-US" sz="1150" b="1" dirty="0">
                 <a:solidFill>
                   <a:srgbClr val="132A3A"/>
                 </a:solidFill>
@@ -7283,70 +7218,24 @@
               </a:rPr>
               <a:t>약 23,659만 원/평</a:t>
             </a:r>
-            <a:endParaRPr lang="en-US" sz="1200" dirty="0"/>
-          </a:p>
-        </p:txBody>
-      </p:sp>
-      <p:sp>
-        <p:nvSpPr>
-          <p:cNvPr id="27" name="Shape 25"/>
-          <p:cNvSpPr/>
-          <p:nvPr/>
-        </p:nvSpPr>
-        <p:spPr>
-          <a:xfrm>
-            <a:off x="7540600" y="1371600"/>
-            <a:ext cx="0" cy="4754880"/>
-          </a:xfrm>
-          <a:prstGeom prst="line">
-            <a:avLst/>
-          </a:prstGeom>
-          <a:noFill/>
-          <a:ln w="8890">
-            <a:solidFill>
-              <a:srgbClr val="B8860B"/>
-            </a:solidFill>
-            <a:prstDash val="solid"/>
-          </a:ln>
-        </p:spPr>
-      </p:sp>
-      <p:pic>
-        <p:nvPicPr>
-          <p:cNvPr id="28" name="Image 0" descr="preencoded.png">    </p:cNvPr>
-          <p:cNvPicPr>
-            <a:picLocks noChangeAspect="1"/>
-          </p:cNvPicPr>
-          <p:nvPr/>
-        </p:nvPicPr>
-        <p:blipFill>
-          <a:blip r:embed="rId1"/>
-          <a:srcRect l="0" r="0" t="0" b="0"/>
-          <a:stretch/>
-        </p:blipFill>
-        <p:spPr>
-          <a:xfrm>
-            <a:off x="7720279" y="1645920"/>
-            <a:ext cx="3840480" cy="2926080"/>
-          </a:xfrm>
-          <a:prstGeom prst="rect">
-            <a:avLst/>
-          </a:prstGeom>
-        </p:spPr>
-      </p:pic>
-      <p:sp>
-        <p:nvSpPr>
-          <p:cNvPr id="29" name="Shape 26"/>
-          <p:cNvSpPr/>
-          <p:nvPr/>
-        </p:nvSpPr>
-        <p:spPr>
-          <a:xfrm>
-            <a:off x="7720279" y="4681728"/>
-            <a:ext cx="3840480" cy="1508760"/>
+            <a:endParaRPr lang="en-US" sz="1150" dirty="0"/>
+          </a:p>
+        </p:txBody>
+      </p:sp>
+      <p:sp>
+        <p:nvSpPr>
+          <p:cNvPr id="28" name="Shape 25"/>
+          <p:cNvSpPr/>
+          <p:nvPr/>
+        </p:nvSpPr>
+        <p:spPr>
+          <a:xfrm>
+            <a:off x="5989320" y="4343400"/>
+            <a:ext cx="5571439" cy="1234440"/>
           </a:xfrm>
           <a:prstGeom prst="roundRect">
             <a:avLst>
-              <a:gd name="adj" fmla="val 3636"/>
+              <a:gd name="adj" fmla="val 4444"/>
             </a:avLst>
           </a:prstGeom>
           <a:solidFill>
@@ -7357,14 +7246,14 @@
       </p:sp>
       <p:sp>
         <p:nvSpPr>
-          <p:cNvPr id="30" name="Shape 27"/>
-          <p:cNvSpPr/>
-          <p:nvPr/>
-        </p:nvSpPr>
-        <p:spPr>
-          <a:xfrm>
-            <a:off x="7720279" y="4736592"/>
-            <a:ext cx="36576" cy="1399032"/>
+          <p:cNvPr id="29" name="Shape 26"/>
+          <p:cNvSpPr/>
+          <p:nvPr/>
+        </p:nvSpPr>
+        <p:spPr>
+          <a:xfrm>
+            <a:off x="5989320" y="4398264"/>
+            <a:ext cx="36576" cy="1124712"/>
           </a:xfrm>
           <a:prstGeom prst="rect">
             <a:avLst/>
@@ -7377,53 +7266,53 @@
       </p:sp>
       <p:sp>
         <p:nvSpPr>
+          <p:cNvPr id="30" name="Text 27"/>
+          <p:cNvSpPr/>
+          <p:nvPr/>
+        </p:nvSpPr>
+        <p:spPr>
+          <a:xfrm>
+            <a:off x="6135624" y="4434840"/>
+            <a:ext cx="5315407" cy="201168"/>
+          </a:xfrm>
+          <a:prstGeom prst="rect">
+            <a:avLst/>
+          </a:prstGeom>
+          <a:noFill/>
+          <a:ln/>
+        </p:spPr>
+        <p:txBody>
+          <a:bodyPr wrap="square" lIns="0" tIns="0" rIns="0" bIns="0" rtlCol="0" anchor="ctr"/>
+          <a:lstStyle/>
+          <a:p>
+            <a:pPr indent="0" marL="0">
+              <a:buNone/>
+            </a:pPr>
+            <a:r>
+              <a:rPr lang="en-US" sz="1050" b="1" dirty="0">
+                <a:solidFill>
+                  <a:srgbClr val="2E6E82"/>
+                </a:solidFill>
+                <a:latin typeface="맑은 고딕" pitchFamily="34" charset="0"/>
+                <a:ea typeface="맑은 고딕" pitchFamily="34" charset="-122"/>
+                <a:cs typeface="맑은 고딕" pitchFamily="34" charset="-120"/>
+              </a:rPr>
+              <a:t>토지 규제 및 공법 분석</a:t>
+            </a:r>
+            <a:endParaRPr lang="en-US" sz="1050" dirty="0"/>
+          </a:p>
+        </p:txBody>
+      </p:sp>
+      <p:sp>
+        <p:nvSpPr>
           <p:cNvPr id="31" name="Text 28"/>
           <p:cNvSpPr/>
           <p:nvPr/>
         </p:nvSpPr>
         <p:spPr>
           <a:xfrm>
-            <a:off x="7866583" y="4773168"/>
-            <a:ext cx="3584448" cy="201168"/>
-          </a:xfrm>
-          <a:prstGeom prst="rect">
-            <a:avLst/>
-          </a:prstGeom>
-          <a:noFill/>
-          <a:ln/>
-        </p:spPr>
-        <p:txBody>
-          <a:bodyPr wrap="square" lIns="0" tIns="0" rIns="0" bIns="0" rtlCol="0" anchor="ctr"/>
-          <a:lstStyle/>
-          <a:p>
-            <a:pPr indent="0" marL="0">
-              <a:buNone/>
-            </a:pPr>
-            <a:r>
-              <a:rPr lang="en-US" sz="1050" b="1" dirty="0">
-                <a:solidFill>
-                  <a:srgbClr val="2E6E82"/>
-                </a:solidFill>
-                <a:latin typeface="맑은 고딕" pitchFamily="34" charset="0"/>
-                <a:ea typeface="맑은 고딕" pitchFamily="34" charset="-122"/>
-                <a:cs typeface="맑은 고딕" pitchFamily="34" charset="-120"/>
-              </a:rPr>
-              <a:t>자산 하이라이트</a:t>
-            </a:r>
-            <a:endParaRPr lang="en-US" sz="1050" dirty="0"/>
-          </a:p>
-        </p:txBody>
-      </p:sp>
-      <p:sp>
-        <p:nvSpPr>
-          <p:cNvPr id="32" name="Text 29"/>
-          <p:cNvSpPr/>
-          <p:nvPr/>
-        </p:nvSpPr>
-        <p:spPr>
-          <a:xfrm>
-            <a:off x="7866583" y="4974336"/>
-            <a:ext cx="3584448" cy="1179576"/>
+            <a:off x="6135624" y="4636008"/>
+            <a:ext cx="5315407" cy="905256"/>
           </a:xfrm>
           <a:prstGeom prst="rect">
             <a:avLst/>
@@ -7451,9 +7340,99 @@
                 <a:ea typeface="맑은 고딕" pitchFamily="34" charset="-122"/>
                 <a:cs typeface="맑은 고딕" pitchFamily="34" charset="-120"/>
               </a:rPr>
-              <a:t>현 건폐율 51.3%, 용적률 237.2% (법정 상한: 건폐율 50%, 용적률 250%) • 제3종일반주거지역 기준 법정 상한 대비 용적률 상향 및 밸류애드 잠재력 보유 • 논현로 이면 코너 (북측 8m, 동측 6m) 접면으로 보행자 접근성 및 차량 진출입 동선 우수</a:t>
+              <a:t>현 건폐율 51.3%, 용적률 237.2% (법정 상한: 건폐율 50%, 용적률 250%)</a:t>
             </a:r>
             <a:endParaRPr lang="en-US" sz="980" dirty="0"/>
+          </a:p>
+          <a:p>
+            <a:pPr marL="342900" indent="-342900">
+              <a:lnSpc>
+                <a:spcPct val="108000"/>
+              </a:lnSpc>
+              <a:spcBef>
+                <a:spcPts val="300"/>
+              </a:spcBef>
+              <a:buSzPct val="100000"/>
+              <a:buChar char="•"/>
+            </a:pPr>
+            <a:r>
+              <a:rPr lang="en-US" sz="980" dirty="0">
+                <a:solidFill>
+                  <a:srgbClr val="2B2B2B"/>
+                </a:solidFill>
+                <a:latin typeface="맑은 고딕" pitchFamily="34" charset="0"/>
+                <a:ea typeface="맑은 고딕" pitchFamily="34" charset="-122"/>
+                <a:cs typeface="맑은 고딕" pitchFamily="34" charset="-120"/>
+              </a:rPr>
+              <a:t>제3종일반주거지역 기준 법정 상한 대비 용적률 상향 및 밸류애드 잠재력 보유</a:t>
+            </a:r>
+            <a:endParaRPr lang="en-US" sz="980" dirty="0"/>
+          </a:p>
+          <a:p>
+            <a:pPr marL="342900" indent="-342900">
+              <a:lnSpc>
+                <a:spcPct val="108000"/>
+              </a:lnSpc>
+              <a:spcBef>
+                <a:spcPts val="300"/>
+              </a:spcBef>
+              <a:buSzPct val="100000"/>
+              <a:buChar char="•"/>
+            </a:pPr>
+            <a:r>
+              <a:rPr lang="en-US" sz="980" dirty="0">
+                <a:solidFill>
+                  <a:srgbClr val="2B2B2B"/>
+                </a:solidFill>
+                <a:latin typeface="맑은 고딕" pitchFamily="34" charset="0"/>
+                <a:ea typeface="맑은 고딕" pitchFamily="34" charset="-122"/>
+                <a:cs typeface="맑은 고딕" pitchFamily="34" charset="-120"/>
+              </a:rPr>
+              <a:t>논현로 이면 코너 (북측 8m, 동측 6m) 접면으로 보행자 접근성 및 차량 진출입 동선 우수</a:t>
+            </a:r>
+            <a:endParaRPr lang="en-US" sz="980" dirty="0"/>
+          </a:p>
+        </p:txBody>
+      </p:sp>
+      <p:sp>
+        <p:nvSpPr>
+          <p:cNvPr id="32" name="Text 29"/>
+          <p:cNvSpPr/>
+          <p:nvPr/>
+        </p:nvSpPr>
+        <p:spPr>
+          <a:xfrm>
+            <a:off x="5989320" y="5715000"/>
+            <a:ext cx="5571439" cy="384048"/>
+          </a:xfrm>
+          <a:prstGeom prst="rect">
+            <a:avLst/>
+          </a:prstGeom>
+          <a:noFill/>
+          <a:ln/>
+        </p:spPr>
+        <p:txBody>
+          <a:bodyPr wrap="square" lIns="0" tIns="0" rIns="0" bIns="0" rtlCol="0" anchor="ctr"/>
+          <a:lstStyle/>
+          <a:p>
+            <a:pPr indent="0" marL="0">
+              <a:lnSpc>
+                <a:spcPct val="125000"/>
+              </a:lnSpc>
+              <a:buNone/>
+            </a:pPr>
+            <a:r>
+              <a:rPr lang="en-US" sz="1100" dirty="0">
+                <a:solidFill>
+                  <a:srgbClr val="8A9AA3"/>
+                </a:solidFill>
+                <a:latin typeface="맑은 고딕" pitchFamily="34" charset="0"/>
+                <a:ea typeface="맑은 고딕" pitchFamily="34" charset="-122"/>
+                <a:cs typeface="맑은 고딕" pitchFamily="34" charset="-120"/>
+              </a:rPr>
+              <a:t>© V-World 국토교통부 | 2026</a:t>
+            </a:r>
+            <a:endParaRPr lang="en-US" sz="1100" dirty="0"/>
           </a:p>
         </p:txBody>
       </p:sp>
@@ -7659,7 +7638,7 @@
                 <a:ea typeface="Arial" pitchFamily="34" charset="-122"/>
                 <a:cs typeface="Arial" pitchFamily="34" charset="-120"/>
               </a:rPr>
-              <a:t>Cadastral</a:t>
+              <a:t>Gallery</a:t>
             </a:r>
             <a:endParaRPr lang="en-US" sz="950" dirty="0"/>
           </a:p>
@@ -7698,15 +7677,42 @@
                 <a:ea typeface="맑은 고딕" pitchFamily="34" charset="-122"/>
                 <a:cs typeface="맑은 고딕" pitchFamily="34" charset="-120"/>
               </a:rPr>
-              <a:t>지적도</a:t>
+              <a:t>현장 사진</a:t>
             </a:r>
             <a:endParaRPr lang="en-US" sz="2300" dirty="0"/>
           </a:p>
         </p:txBody>
+      </p:sp>
+      <p:sp>
+        <p:nvSpPr>
+          <p:cNvPr id="6" name="Shape 4"/>
+          <p:cNvSpPr/>
+          <p:nvPr/>
+        </p:nvSpPr>
+        <p:spPr>
+          <a:xfrm>
+            <a:off x="502920" y="1234440"/>
+            <a:ext cx="3600602" cy="2290572"/>
+          </a:xfrm>
+          <a:prstGeom prst="roundRect">
+            <a:avLst>
+              <a:gd name="adj" fmla="val 2395"/>
+            </a:avLst>
+          </a:prstGeom>
+          <a:solidFill>
+            <a:srgbClr val="F0F0F0"/>
+          </a:solidFill>
+          <a:ln w="6350">
+            <a:solidFill>
+              <a:srgbClr val="E0E0E0"/>
+            </a:solidFill>
+            <a:prstDash val="solid"/>
+          </a:ln>
+        </p:spPr>
       </p:sp>
       <p:pic>
         <p:nvPicPr>
-          <p:cNvPr id="6" name="Image 0" descr="preencoded.png">    </p:cNvPr>
+          <p:cNvPr id="7" name="Image 0" descr="preencoded.png">    </p:cNvPr>
           <p:cNvPicPr>
             <a:picLocks noChangeAspect="1"/>
           </p:cNvPicPr>
@@ -7714,14 +7720,13 @@
         </p:nvPicPr>
         <p:blipFill>
           <a:blip r:embed="rId1"/>
-          <a:stretch>
-            <a:fillRect/>
-          </a:stretch>
+          <a:srcRect l="0" r="0" t="0" b="0"/>
+          <a:stretch/>
         </p:blipFill>
         <p:spPr>
           <a:xfrm>
-            <a:off x="502920" y="1481328"/>
-            <a:ext cx="5120640" cy="4114800"/>
+            <a:off x="502920" y="1234440"/>
+            <a:ext cx="3600602" cy="2290572"/>
           </a:xfrm>
           <a:prstGeom prst="rect">
             <a:avLst/>
@@ -7730,84 +7735,25 @@
       </p:pic>
       <p:sp>
         <p:nvSpPr>
-          <p:cNvPr id="7" name="Text 4"/>
-          <p:cNvSpPr/>
-          <p:nvPr/>
-        </p:nvSpPr>
-        <p:spPr>
-          <a:xfrm>
-            <a:off x="5989320" y="1481328"/>
-            <a:ext cx="5571439" cy="237744"/>
-          </a:xfrm>
-          <a:prstGeom prst="rect">
-            <a:avLst/>
-          </a:prstGeom>
-          <a:noFill/>
-          <a:ln/>
-        </p:spPr>
-        <p:txBody>
-          <a:bodyPr wrap="square" lIns="0" tIns="0" rIns="0" bIns="0" rtlCol="0" anchor="ctr"/>
-          <a:lstStyle/>
-          <a:p>
-            <a:pPr indent="0" marL="0">
-              <a:buNone/>
-            </a:pPr>
-            <a:r>
-              <a:rPr lang="en-US" sz="1100" b="1" dirty="0">
-                <a:solidFill>
-                  <a:srgbClr val="132A3A"/>
-                </a:solidFill>
-                <a:latin typeface="맑은 고딕" pitchFamily="34" charset="0"/>
-                <a:ea typeface="맑은 고딕" pitchFamily="34" charset="-122"/>
-                <a:cs typeface="맑은 고딕" pitchFamily="34" charset="-120"/>
-              </a:rPr>
-              <a:t>연속지적도 (V-World)</a:t>
-            </a:r>
-            <a:endParaRPr lang="en-US" sz="1100" dirty="0"/>
-          </a:p>
-        </p:txBody>
-      </p:sp>
-      <p:sp>
-        <p:nvSpPr>
-          <p:cNvPr id="8" name="Text 5"/>
-          <p:cNvSpPr/>
-          <p:nvPr/>
-        </p:nvSpPr>
-        <p:spPr>
-          <a:xfrm>
-            <a:off x="5989320" y="1801368"/>
-            <a:ext cx="1560003" cy="493776"/>
-          </a:xfrm>
-          <a:prstGeom prst="rect">
-            <a:avLst/>
-          </a:prstGeom>
-          <a:noFill/>
-          <a:ln/>
-        </p:spPr>
-        <p:txBody>
-          <a:bodyPr wrap="square" lIns="0" tIns="0" rIns="0" bIns="0" rtlCol="0" anchor="ctr"/>
-          <a:lstStyle/>
-          <a:p>
-            <a:pPr indent="0" marL="0">
-              <a:lnSpc>
-                <a:spcPct val="115000"/>
-              </a:lnSpc>
-              <a:buNone/>
-            </a:pPr>
-            <a:r>
-              <a:rPr lang="en-US" sz="1300" dirty="0">
-                <a:solidFill>
-                  <a:srgbClr val="5B6B73"/>
-                </a:solidFill>
-                <a:latin typeface="맑은 고딕" pitchFamily="34" charset="0"/>
-                <a:ea typeface="맑은 고딕" pitchFamily="34" charset="-122"/>
-                <a:cs typeface="맑은 고딕" pitchFamily="34" charset="-120"/>
-              </a:rPr>
-              <a:t>대지면적</a:t>
-            </a:r>
-            <a:endParaRPr lang="en-US" sz="1300" dirty="0"/>
-          </a:p>
-        </p:txBody>
+          <p:cNvPr id="8" name="Shape 5"/>
+          <p:cNvSpPr/>
+          <p:nvPr/>
+        </p:nvSpPr>
+        <p:spPr>
+          <a:xfrm>
+            <a:off x="576072" y="1307592"/>
+            <a:ext cx="868680" cy="237744"/>
+          </a:xfrm>
+          <a:prstGeom prst="rect">
+            <a:avLst/>
+          </a:prstGeom>
+          <a:solidFill>
+            <a:srgbClr val="10161F">
+              <a:alpha val="80000"/>
+            </a:srgbClr>
+          </a:solidFill>
+          <a:ln/>
+        </p:spPr>
       </p:sp>
       <p:sp>
         <p:nvSpPr>
@@ -7817,37 +7763,34 @@
         </p:nvSpPr>
         <p:spPr>
           <a:xfrm>
-            <a:off x="7549323" y="1801368"/>
-            <a:ext cx="4011436" cy="493776"/>
-          </a:xfrm>
-          <a:prstGeom prst="rect">
-            <a:avLst/>
-          </a:prstGeom>
-          <a:noFill/>
-          <a:ln/>
-        </p:spPr>
-        <p:txBody>
-          <a:bodyPr wrap="square" lIns="0" tIns="0" rIns="0" bIns="0" rtlCol="0" anchor="ctr"/>
-          <a:lstStyle/>
-          <a:p>
-            <a:pPr indent="0" marL="0">
-              <a:lnSpc>
-                <a:spcPct val="115000"/>
-              </a:lnSpc>
-              <a:buNone/>
-            </a:pPr>
-            <a:r>
-              <a:rPr lang="en-US" sz="1300" b="1" dirty="0">
-                <a:solidFill>
-                  <a:srgbClr val="132A3A"/>
-                </a:solidFill>
-                <a:latin typeface="맑은 고딕" pitchFamily="34" charset="0"/>
-                <a:ea typeface="맑은 고딕" pitchFamily="34" charset="-122"/>
-                <a:cs typeface="맑은 고딕" pitchFamily="34" charset="-120"/>
-              </a:rPr>
-              <a:t>1,061.9㎡ (321.2평)</a:t>
-            </a:r>
-            <a:endParaRPr lang="en-US" sz="1300" dirty="0"/>
+            <a:off x="576072" y="1307592"/>
+            <a:ext cx="868680" cy="237744"/>
+          </a:xfrm>
+          <a:prstGeom prst="rect">
+            <a:avLst/>
+          </a:prstGeom>
+          <a:noFill/>
+          <a:ln/>
+        </p:spPr>
+        <p:txBody>
+          <a:bodyPr wrap="square" lIns="0" tIns="0" rIns="0" bIns="0" rtlCol="0" anchor="ctr"/>
+          <a:lstStyle/>
+          <a:p>
+            <a:pPr algn="ctr" indent="0" marL="0">
+              <a:buNone/>
+            </a:pPr>
+            <a:r>
+              <a:rPr lang="en-US" sz="900" b="1" dirty="0">
+                <a:solidFill>
+                  <a:srgbClr val="FFFFFF"/>
+                </a:solidFill>
+                <a:latin typeface="맑은 고딕" pitchFamily="34" charset="0"/>
+                <a:ea typeface="맑은 고딕" pitchFamily="34" charset="-122"/>
+                <a:cs typeface="맑은 고딕" pitchFamily="34" charset="-120"/>
+              </a:rPr>
+              <a:t>건물 외관</a:t>
+            </a:r>
+            <a:endParaRPr lang="en-US" sz="900" dirty="0"/>
           </a:p>
         </p:txBody>
       </p:sp>
@@ -7859,364 +7802,750 @@
         </p:nvSpPr>
         <p:spPr>
           <a:xfrm>
-            <a:off x="5989320" y="2295144"/>
-            <a:ext cx="5571439" cy="0"/>
-          </a:xfrm>
-          <a:prstGeom prst="line">
-            <a:avLst/>
-          </a:prstGeom>
-          <a:noFill/>
-          <a:ln w="3810">
+            <a:off x="502920" y="3232404"/>
+            <a:ext cx="3600602" cy="292608"/>
+          </a:xfrm>
+          <a:prstGeom prst="rect">
+            <a:avLst/>
+          </a:prstGeom>
+          <a:solidFill>
+            <a:srgbClr val="000000">
+              <a:alpha val="60000"/>
+            </a:srgbClr>
+          </a:solidFill>
+          <a:ln/>
+        </p:spPr>
+      </p:sp>
+      <p:sp>
+        <p:nvSpPr>
+          <p:cNvPr id="11" name="Text 8"/>
+          <p:cNvSpPr/>
+          <p:nvPr/>
+        </p:nvSpPr>
+        <p:spPr>
+          <a:xfrm>
+            <a:off x="612648" y="3232404"/>
+            <a:ext cx="3381146" cy="292608"/>
+          </a:xfrm>
+          <a:prstGeom prst="rect">
+            <a:avLst/>
+          </a:prstGeom>
+          <a:noFill/>
+          <a:ln/>
+        </p:spPr>
+        <p:txBody>
+          <a:bodyPr wrap="square" lIns="0" tIns="0" rIns="0" bIns="0" rtlCol="0" anchor="ctr"/>
+          <a:lstStyle/>
+          <a:p>
+            <a:pPr indent="0" marL="0">
+              <a:buNone/>
+            </a:pPr>
+            <a:r>
+              <a:rPr lang="en-US" sz="900" dirty="0">
+                <a:solidFill>
+                  <a:srgbClr val="FFFFFF"/>
+                </a:solidFill>
+                <a:latin typeface="맑은 고딕" pitchFamily="34" charset="0"/>
+                <a:ea typeface="맑은 고딕" pitchFamily="34" charset="-122"/>
+                <a:cs typeface="맑은 고딕" pitchFamily="34" charset="-120"/>
+              </a:rPr>
+              <a:t>신사동 590 ICL 빌딩 전경 및 대로변 코너 입지</a:t>
+            </a:r>
+            <a:endParaRPr lang="en-US" sz="900" dirty="0"/>
+          </a:p>
+        </p:txBody>
+      </p:sp>
+      <p:sp>
+        <p:nvSpPr>
+          <p:cNvPr id="12" name="Shape 9"/>
+          <p:cNvSpPr/>
+          <p:nvPr/>
+        </p:nvSpPr>
+        <p:spPr>
+          <a:xfrm>
+            <a:off x="4231538" y="1234440"/>
+            <a:ext cx="3600602" cy="2290572"/>
+          </a:xfrm>
+          <a:prstGeom prst="roundRect">
+            <a:avLst>
+              <a:gd name="adj" fmla="val 2395"/>
+            </a:avLst>
+          </a:prstGeom>
+          <a:solidFill>
+            <a:srgbClr val="F0F0F0"/>
+          </a:solidFill>
+          <a:ln w="6350">
             <a:solidFill>
-              <a:srgbClr val="CBD5E0"/>
+              <a:srgbClr val="E0E0E0"/>
             </a:solidFill>
             <a:prstDash val="solid"/>
           </a:ln>
         </p:spPr>
       </p:sp>
-      <p:sp>
-        <p:nvSpPr>
-          <p:cNvPr id="11" name="Text 8"/>
-          <p:cNvSpPr/>
-          <p:nvPr/>
-        </p:nvSpPr>
-        <p:spPr>
-          <a:xfrm>
-            <a:off x="5989320" y="2295144"/>
-            <a:ext cx="1560003" cy="493776"/>
-          </a:xfrm>
-          <a:prstGeom prst="rect">
-            <a:avLst/>
-          </a:prstGeom>
-          <a:noFill/>
-          <a:ln/>
-        </p:spPr>
-        <p:txBody>
-          <a:bodyPr wrap="square" lIns="0" tIns="0" rIns="0" bIns="0" rtlCol="0" anchor="ctr"/>
-          <a:lstStyle/>
-          <a:p>
-            <a:pPr indent="0" marL="0">
-              <a:lnSpc>
-                <a:spcPct val="115000"/>
-              </a:lnSpc>
-              <a:buNone/>
-            </a:pPr>
-            <a:r>
-              <a:rPr lang="en-US" sz="1300" dirty="0">
-                <a:solidFill>
-                  <a:srgbClr val="5B6B73"/>
-                </a:solidFill>
-                <a:latin typeface="맑은 고딕" pitchFamily="34" charset="0"/>
-                <a:ea typeface="맑은 고딕" pitchFamily="34" charset="-122"/>
-                <a:cs typeface="맑은 고딕" pitchFamily="34" charset="-120"/>
-              </a:rPr>
-              <a:t>용도지역</a:t>
-            </a:r>
-            <a:endParaRPr lang="en-US" sz="1300" dirty="0"/>
-          </a:p>
-        </p:txBody>
-      </p:sp>
-      <p:sp>
-        <p:nvSpPr>
-          <p:cNvPr id="12" name="Text 9"/>
-          <p:cNvSpPr/>
-          <p:nvPr/>
-        </p:nvSpPr>
-        <p:spPr>
-          <a:xfrm>
-            <a:off x="7549323" y="2295144"/>
-            <a:ext cx="4011436" cy="493776"/>
-          </a:xfrm>
-          <a:prstGeom prst="rect">
-            <a:avLst/>
-          </a:prstGeom>
-          <a:noFill/>
-          <a:ln/>
-        </p:spPr>
-        <p:txBody>
-          <a:bodyPr wrap="square" lIns="0" tIns="0" rIns="0" bIns="0" rtlCol="0" anchor="ctr"/>
-          <a:lstStyle/>
-          <a:p>
-            <a:pPr indent="0" marL="0">
-              <a:lnSpc>
-                <a:spcPct val="115000"/>
-              </a:lnSpc>
-              <a:buNone/>
-            </a:pPr>
-            <a:r>
-              <a:rPr lang="en-US" sz="1300" b="1" dirty="0">
-                <a:solidFill>
-                  <a:srgbClr val="132A3A"/>
-                </a:solidFill>
-                <a:latin typeface="맑은 고딕" pitchFamily="34" charset="0"/>
-                <a:ea typeface="맑은 고딕" pitchFamily="34" charset="-122"/>
-                <a:cs typeface="맑은 고딕" pitchFamily="34" charset="-120"/>
-              </a:rPr>
-              <a:t>제3종일반주거지역</a:t>
-            </a:r>
-            <a:endParaRPr lang="en-US" sz="1300" dirty="0"/>
-          </a:p>
-        </p:txBody>
-      </p:sp>
-      <p:sp>
-        <p:nvSpPr>
-          <p:cNvPr id="13" name="Shape 10"/>
-          <p:cNvSpPr/>
-          <p:nvPr/>
-        </p:nvSpPr>
-        <p:spPr>
-          <a:xfrm>
-            <a:off x="5989320" y="2788920"/>
-            <a:ext cx="5571439" cy="0"/>
-          </a:xfrm>
-          <a:prstGeom prst="line">
-            <a:avLst/>
-          </a:prstGeom>
-          <a:noFill/>
-          <a:ln w="3810">
+      <p:pic>
+        <p:nvPicPr>
+          <p:cNvPr id="13" name="Image 1" descr="preencoded.png">    </p:cNvPr>
+          <p:cNvPicPr>
+            <a:picLocks noChangeAspect="1"/>
+          </p:cNvPicPr>
+          <p:nvPr/>
+        </p:nvPicPr>
+        <p:blipFill>
+          <a:blip r:embed="rId2"/>
+          <a:srcRect l="0" r="0" t="0" b="0"/>
+          <a:stretch/>
+        </p:blipFill>
+        <p:spPr>
+          <a:xfrm>
+            <a:off x="4231538" y="1234440"/>
+            <a:ext cx="3600602" cy="2290572"/>
+          </a:xfrm>
+          <a:prstGeom prst="rect">
+            <a:avLst/>
+          </a:prstGeom>
+        </p:spPr>
+      </p:pic>
+      <p:sp>
+        <p:nvSpPr>
+          <p:cNvPr id="14" name="Shape 10"/>
+          <p:cNvSpPr/>
+          <p:nvPr/>
+        </p:nvSpPr>
+        <p:spPr>
+          <a:xfrm>
+            <a:off x="4304690" y="1307592"/>
+            <a:ext cx="868680" cy="237744"/>
+          </a:xfrm>
+          <a:prstGeom prst="rect">
+            <a:avLst/>
+          </a:prstGeom>
+          <a:solidFill>
+            <a:srgbClr val="10161F">
+              <a:alpha val="80000"/>
+            </a:srgbClr>
+          </a:solidFill>
+          <a:ln/>
+        </p:spPr>
+      </p:sp>
+      <p:sp>
+        <p:nvSpPr>
+          <p:cNvPr id="15" name="Text 11"/>
+          <p:cNvSpPr/>
+          <p:nvPr/>
+        </p:nvSpPr>
+        <p:spPr>
+          <a:xfrm>
+            <a:off x="4304690" y="1307592"/>
+            <a:ext cx="868680" cy="237744"/>
+          </a:xfrm>
+          <a:prstGeom prst="rect">
+            <a:avLst/>
+          </a:prstGeom>
+          <a:noFill/>
+          <a:ln/>
+        </p:spPr>
+        <p:txBody>
+          <a:bodyPr wrap="square" lIns="0" tIns="0" rIns="0" bIns="0" rtlCol="0" anchor="ctr"/>
+          <a:lstStyle/>
+          <a:p>
+            <a:pPr algn="ctr" indent="0" marL="0">
+              <a:buNone/>
+            </a:pPr>
+            <a:r>
+              <a:rPr lang="en-US" sz="900" b="1" dirty="0">
+                <a:solidFill>
+                  <a:srgbClr val="FFFFFF"/>
+                </a:solidFill>
+                <a:latin typeface="맑은 고딕" pitchFamily="34" charset="0"/>
+                <a:ea typeface="맑은 고딕" pitchFamily="34" charset="-122"/>
+                <a:cs typeface="맑은 고딕" pitchFamily="34" charset="-120"/>
+              </a:rPr>
+              <a:t>주 출입구</a:t>
+            </a:r>
+            <a:endParaRPr lang="en-US" sz="900" dirty="0"/>
+          </a:p>
+        </p:txBody>
+      </p:sp>
+      <p:sp>
+        <p:nvSpPr>
+          <p:cNvPr id="16" name="Shape 12"/>
+          <p:cNvSpPr/>
+          <p:nvPr/>
+        </p:nvSpPr>
+        <p:spPr>
+          <a:xfrm>
+            <a:off x="4231538" y="3232404"/>
+            <a:ext cx="3600602" cy="292608"/>
+          </a:xfrm>
+          <a:prstGeom prst="rect">
+            <a:avLst/>
+          </a:prstGeom>
+          <a:solidFill>
+            <a:srgbClr val="000000">
+              <a:alpha val="60000"/>
+            </a:srgbClr>
+          </a:solidFill>
+          <a:ln/>
+        </p:spPr>
+      </p:sp>
+      <p:sp>
+        <p:nvSpPr>
+          <p:cNvPr id="17" name="Text 13"/>
+          <p:cNvSpPr/>
+          <p:nvPr/>
+        </p:nvSpPr>
+        <p:spPr>
+          <a:xfrm>
+            <a:off x="4341266" y="3232404"/>
+            <a:ext cx="3381146" cy="292608"/>
+          </a:xfrm>
+          <a:prstGeom prst="rect">
+            <a:avLst/>
+          </a:prstGeom>
+          <a:noFill/>
+          <a:ln/>
+        </p:spPr>
+        <p:txBody>
+          <a:bodyPr wrap="square" lIns="0" tIns="0" rIns="0" bIns="0" rtlCol="0" anchor="ctr"/>
+          <a:lstStyle/>
+          <a:p>
+            <a:pPr indent="0" marL="0">
+              <a:buNone/>
+            </a:pPr>
+            <a:r>
+              <a:rPr lang="en-US" sz="900" dirty="0">
+                <a:solidFill>
+                  <a:srgbClr val="FFFFFF"/>
+                </a:solidFill>
+                <a:latin typeface="맑은 고딕" pitchFamily="34" charset="0"/>
+                <a:ea typeface="맑은 고딕" pitchFamily="34" charset="-122"/>
+                <a:cs typeface="맑은 고딕" pitchFamily="34" charset="-120"/>
+              </a:rPr>
+              <a:t>지상 진입로 및 1층 전면 상가부</a:t>
+            </a:r>
+            <a:endParaRPr lang="en-US" sz="900" dirty="0"/>
+          </a:p>
+        </p:txBody>
+      </p:sp>
+      <p:sp>
+        <p:nvSpPr>
+          <p:cNvPr id="18" name="Shape 14"/>
+          <p:cNvSpPr/>
+          <p:nvPr/>
+        </p:nvSpPr>
+        <p:spPr>
+          <a:xfrm>
+            <a:off x="7960157" y="1234440"/>
+            <a:ext cx="3600602" cy="2290572"/>
+          </a:xfrm>
+          <a:prstGeom prst="roundRect">
+            <a:avLst>
+              <a:gd name="adj" fmla="val 2395"/>
+            </a:avLst>
+          </a:prstGeom>
+          <a:solidFill>
+            <a:srgbClr val="F0F0F0"/>
+          </a:solidFill>
+          <a:ln w="6350">
             <a:solidFill>
-              <a:srgbClr val="CBD5E0"/>
+              <a:srgbClr val="E0E0E0"/>
             </a:solidFill>
             <a:prstDash val="solid"/>
           </a:ln>
         </p:spPr>
       </p:sp>
-      <p:sp>
-        <p:nvSpPr>
-          <p:cNvPr id="14" name="Text 11"/>
-          <p:cNvSpPr/>
-          <p:nvPr/>
-        </p:nvSpPr>
-        <p:spPr>
-          <a:xfrm>
-            <a:off x="5989320" y="2788920"/>
-            <a:ext cx="1560003" cy="493776"/>
-          </a:xfrm>
-          <a:prstGeom prst="rect">
-            <a:avLst/>
-          </a:prstGeom>
-          <a:noFill/>
-          <a:ln/>
-        </p:spPr>
-        <p:txBody>
-          <a:bodyPr wrap="square" lIns="0" tIns="0" rIns="0" bIns="0" rtlCol="0" anchor="ctr"/>
-          <a:lstStyle/>
-          <a:p>
-            <a:pPr indent="0" marL="0">
-              <a:lnSpc>
-                <a:spcPct val="115000"/>
-              </a:lnSpc>
-              <a:buNone/>
-            </a:pPr>
-            <a:r>
-              <a:rPr lang="en-US" sz="1300" dirty="0">
-                <a:solidFill>
-                  <a:srgbClr val="5B6B73"/>
-                </a:solidFill>
-                <a:latin typeface="맑은 고딕" pitchFamily="34" charset="0"/>
-                <a:ea typeface="맑은 고딕" pitchFamily="34" charset="-122"/>
-                <a:cs typeface="맑은 고딕" pitchFamily="34" charset="-120"/>
-              </a:rPr>
-              <a:t>건폐율</a:t>
-            </a:r>
-            <a:endParaRPr lang="en-US" sz="1300" dirty="0"/>
-          </a:p>
-        </p:txBody>
-      </p:sp>
-      <p:sp>
-        <p:nvSpPr>
-          <p:cNvPr id="15" name="Text 12"/>
-          <p:cNvSpPr/>
-          <p:nvPr/>
-        </p:nvSpPr>
-        <p:spPr>
-          <a:xfrm>
-            <a:off x="7549323" y="2788920"/>
-            <a:ext cx="4011436" cy="493776"/>
-          </a:xfrm>
-          <a:prstGeom prst="rect">
-            <a:avLst/>
-          </a:prstGeom>
-          <a:noFill/>
-          <a:ln/>
-        </p:spPr>
-        <p:txBody>
-          <a:bodyPr wrap="square" lIns="0" tIns="0" rIns="0" bIns="0" rtlCol="0" anchor="ctr"/>
-          <a:lstStyle/>
-          <a:p>
-            <a:pPr indent="0" marL="0">
-              <a:lnSpc>
-                <a:spcPct val="115000"/>
-              </a:lnSpc>
-              <a:buNone/>
-            </a:pPr>
-            <a:r>
-              <a:rPr lang="en-US" sz="1300" b="1" dirty="0">
-                <a:solidFill>
-                  <a:srgbClr val="132A3A"/>
-                </a:solidFill>
-                <a:latin typeface="맑은 고딕" pitchFamily="34" charset="0"/>
-                <a:ea typeface="맑은 고딕" pitchFamily="34" charset="-122"/>
-                <a:cs typeface="맑은 고딕" pitchFamily="34" charset="-120"/>
-              </a:rPr>
-              <a:t>현행 51.3% (법정 상한 50%)</a:t>
-            </a:r>
-            <a:endParaRPr lang="en-US" sz="1300" dirty="0"/>
-          </a:p>
-        </p:txBody>
-      </p:sp>
-      <p:sp>
-        <p:nvSpPr>
-          <p:cNvPr id="16" name="Shape 13"/>
-          <p:cNvSpPr/>
-          <p:nvPr/>
-        </p:nvSpPr>
-        <p:spPr>
-          <a:xfrm>
-            <a:off x="5989320" y="3282696"/>
-            <a:ext cx="5571439" cy="0"/>
-          </a:xfrm>
-          <a:prstGeom prst="line">
-            <a:avLst/>
-          </a:prstGeom>
-          <a:noFill/>
-          <a:ln w="3810">
+      <p:pic>
+        <p:nvPicPr>
+          <p:cNvPr id="19" name="Image 2" descr="preencoded.png">    </p:cNvPr>
+          <p:cNvPicPr>
+            <a:picLocks noChangeAspect="1"/>
+          </p:cNvPicPr>
+          <p:nvPr/>
+        </p:nvPicPr>
+        <p:blipFill>
+          <a:blip r:embed="rId3"/>
+          <a:srcRect l="0" r="0" t="0" b="0"/>
+          <a:stretch/>
+        </p:blipFill>
+        <p:spPr>
+          <a:xfrm>
+            <a:off x="7960157" y="1234440"/>
+            <a:ext cx="3600602" cy="2290572"/>
+          </a:xfrm>
+          <a:prstGeom prst="rect">
+            <a:avLst/>
+          </a:prstGeom>
+        </p:spPr>
+      </p:pic>
+      <p:sp>
+        <p:nvSpPr>
+          <p:cNvPr id="20" name="Shape 15"/>
+          <p:cNvSpPr/>
+          <p:nvPr/>
+        </p:nvSpPr>
+        <p:spPr>
+          <a:xfrm>
+            <a:off x="8033309" y="1307592"/>
+            <a:ext cx="868680" cy="237744"/>
+          </a:xfrm>
+          <a:prstGeom prst="rect">
+            <a:avLst/>
+          </a:prstGeom>
+          <a:solidFill>
+            <a:srgbClr val="10161F">
+              <a:alpha val="80000"/>
+            </a:srgbClr>
+          </a:solidFill>
+          <a:ln/>
+        </p:spPr>
+      </p:sp>
+      <p:sp>
+        <p:nvSpPr>
+          <p:cNvPr id="21" name="Text 16"/>
+          <p:cNvSpPr/>
+          <p:nvPr/>
+        </p:nvSpPr>
+        <p:spPr>
+          <a:xfrm>
+            <a:off x="8033309" y="1307592"/>
+            <a:ext cx="868680" cy="237744"/>
+          </a:xfrm>
+          <a:prstGeom prst="rect">
+            <a:avLst/>
+          </a:prstGeom>
+          <a:noFill/>
+          <a:ln/>
+        </p:spPr>
+        <p:txBody>
+          <a:bodyPr wrap="square" lIns="0" tIns="0" rIns="0" bIns="0" rtlCol="0" anchor="ctr"/>
+          <a:lstStyle/>
+          <a:p>
+            <a:pPr algn="ctr" indent="0" marL="0">
+              <a:buNone/>
+            </a:pPr>
+            <a:r>
+              <a:rPr lang="en-US" sz="900" b="1" dirty="0">
+                <a:solidFill>
+                  <a:srgbClr val="FFFFFF"/>
+                </a:solidFill>
+                <a:latin typeface="맑은 고딕" pitchFamily="34" charset="0"/>
+                <a:ea typeface="맑은 고딕" pitchFamily="34" charset="-122"/>
+                <a:cs typeface="맑은 고딕" pitchFamily="34" charset="-120"/>
+              </a:rPr>
+              <a:t>실내 공간</a:t>
+            </a:r>
+            <a:endParaRPr lang="en-US" sz="900" dirty="0"/>
+          </a:p>
+        </p:txBody>
+      </p:sp>
+      <p:sp>
+        <p:nvSpPr>
+          <p:cNvPr id="22" name="Shape 17"/>
+          <p:cNvSpPr/>
+          <p:nvPr/>
+        </p:nvSpPr>
+        <p:spPr>
+          <a:xfrm>
+            <a:off x="7960157" y="3232404"/>
+            <a:ext cx="3600602" cy="292608"/>
+          </a:xfrm>
+          <a:prstGeom prst="rect">
+            <a:avLst/>
+          </a:prstGeom>
+          <a:solidFill>
+            <a:srgbClr val="000000">
+              <a:alpha val="60000"/>
+            </a:srgbClr>
+          </a:solidFill>
+          <a:ln/>
+        </p:spPr>
+      </p:sp>
+      <p:sp>
+        <p:nvSpPr>
+          <p:cNvPr id="23" name="Text 18"/>
+          <p:cNvSpPr/>
+          <p:nvPr/>
+        </p:nvSpPr>
+        <p:spPr>
+          <a:xfrm>
+            <a:off x="8069885" y="3232404"/>
+            <a:ext cx="3381146" cy="292608"/>
+          </a:xfrm>
+          <a:prstGeom prst="rect">
+            <a:avLst/>
+          </a:prstGeom>
+          <a:noFill/>
+          <a:ln/>
+        </p:spPr>
+        <p:txBody>
+          <a:bodyPr wrap="square" lIns="0" tIns="0" rIns="0" bIns="0" rtlCol="0" anchor="ctr"/>
+          <a:lstStyle/>
+          <a:p>
+            <a:pPr indent="0" marL="0">
+              <a:buNone/>
+            </a:pPr>
+            <a:r>
+              <a:rPr lang="en-US" sz="900" dirty="0">
+                <a:solidFill>
+                  <a:srgbClr val="FFFFFF"/>
+                </a:solidFill>
+                <a:latin typeface="맑은 고딕" pitchFamily="34" charset="0"/>
+                <a:ea typeface="맑은 고딕" pitchFamily="34" charset="-122"/>
+                <a:cs typeface="맑은 고딕" pitchFamily="34" charset="-120"/>
+              </a:rPr>
+              <a:t>건물 측면부 및 도로 접면</a:t>
+            </a:r>
+            <a:endParaRPr lang="en-US" sz="900" dirty="0"/>
+          </a:p>
+        </p:txBody>
+      </p:sp>
+      <p:sp>
+        <p:nvSpPr>
+          <p:cNvPr id="24" name="Shape 19"/>
+          <p:cNvSpPr/>
+          <p:nvPr/>
+        </p:nvSpPr>
+        <p:spPr>
+          <a:xfrm>
+            <a:off x="502920" y="3653028"/>
+            <a:ext cx="3600602" cy="2290572"/>
+          </a:xfrm>
+          <a:prstGeom prst="roundRect">
+            <a:avLst>
+              <a:gd name="adj" fmla="val 2395"/>
+            </a:avLst>
+          </a:prstGeom>
+          <a:solidFill>
+            <a:srgbClr val="F0F0F0"/>
+          </a:solidFill>
+          <a:ln w="6350">
             <a:solidFill>
-              <a:srgbClr val="CBD5E0"/>
+              <a:srgbClr val="E0E0E0"/>
             </a:solidFill>
             <a:prstDash val="solid"/>
           </a:ln>
         </p:spPr>
       </p:sp>
-      <p:sp>
-        <p:nvSpPr>
-          <p:cNvPr id="17" name="Text 14"/>
-          <p:cNvSpPr/>
-          <p:nvPr/>
-        </p:nvSpPr>
-        <p:spPr>
-          <a:xfrm>
-            <a:off x="5989320" y="3282696"/>
-            <a:ext cx="1560003" cy="493776"/>
-          </a:xfrm>
-          <a:prstGeom prst="rect">
-            <a:avLst/>
-          </a:prstGeom>
-          <a:noFill/>
-          <a:ln/>
-        </p:spPr>
-        <p:txBody>
-          <a:bodyPr wrap="square" lIns="0" tIns="0" rIns="0" bIns="0" rtlCol="0" anchor="ctr"/>
-          <a:lstStyle/>
-          <a:p>
-            <a:pPr indent="0" marL="0">
-              <a:lnSpc>
-                <a:spcPct val="115000"/>
-              </a:lnSpc>
-              <a:buNone/>
-            </a:pPr>
-            <a:r>
-              <a:rPr lang="en-US" sz="1300" dirty="0">
-                <a:solidFill>
-                  <a:srgbClr val="5B6B73"/>
-                </a:solidFill>
-                <a:latin typeface="맑은 고딕" pitchFamily="34" charset="0"/>
-                <a:ea typeface="맑은 고딕" pitchFamily="34" charset="-122"/>
-                <a:cs typeface="맑은 고딕" pitchFamily="34" charset="-120"/>
-              </a:rPr>
-              <a:t>용적률</a:t>
-            </a:r>
-            <a:endParaRPr lang="en-US" sz="1300" dirty="0"/>
-          </a:p>
-        </p:txBody>
-      </p:sp>
-      <p:sp>
-        <p:nvSpPr>
-          <p:cNvPr id="18" name="Text 15"/>
-          <p:cNvSpPr/>
-          <p:nvPr/>
-        </p:nvSpPr>
-        <p:spPr>
-          <a:xfrm>
-            <a:off x="7549323" y="3282696"/>
-            <a:ext cx="4011436" cy="493776"/>
-          </a:xfrm>
-          <a:prstGeom prst="rect">
-            <a:avLst/>
-          </a:prstGeom>
-          <a:noFill/>
-          <a:ln/>
-        </p:spPr>
-        <p:txBody>
-          <a:bodyPr wrap="square" lIns="0" tIns="0" rIns="0" bIns="0" rtlCol="0" anchor="ctr"/>
-          <a:lstStyle/>
-          <a:p>
-            <a:pPr indent="0" marL="0">
-              <a:lnSpc>
-                <a:spcPct val="115000"/>
-              </a:lnSpc>
-              <a:buNone/>
-            </a:pPr>
-            <a:r>
-              <a:rPr lang="en-US" sz="1300" b="1" dirty="0">
-                <a:solidFill>
-                  <a:srgbClr val="132A3A"/>
-                </a:solidFill>
-                <a:latin typeface="맑은 고딕" pitchFamily="34" charset="0"/>
-                <a:ea typeface="맑은 고딕" pitchFamily="34" charset="-122"/>
-                <a:cs typeface="맑은 고딕" pitchFamily="34" charset="-120"/>
-              </a:rPr>
-              <a:t>현행 237.2% (법정 상한 250%)</a:t>
-            </a:r>
-            <a:endParaRPr lang="en-US" sz="1300" dirty="0"/>
-          </a:p>
-        </p:txBody>
-      </p:sp>
-      <p:sp>
-        <p:nvSpPr>
-          <p:cNvPr id="19" name="Text 16"/>
-          <p:cNvSpPr/>
-          <p:nvPr/>
-        </p:nvSpPr>
-        <p:spPr>
-          <a:xfrm>
-            <a:off x="5989320" y="5715000"/>
-            <a:ext cx="5571439" cy="384048"/>
-          </a:xfrm>
-          <a:prstGeom prst="rect">
-            <a:avLst/>
-          </a:prstGeom>
-          <a:noFill/>
-          <a:ln/>
-        </p:spPr>
-        <p:txBody>
-          <a:bodyPr wrap="square" lIns="0" tIns="0" rIns="0" bIns="0" rtlCol="0" anchor="ctr"/>
-          <a:lstStyle/>
-          <a:p>
-            <a:pPr indent="0" marL="0">
-              <a:lnSpc>
-                <a:spcPct val="125000"/>
-              </a:lnSpc>
-              <a:buNone/>
-            </a:pPr>
-            <a:r>
-              <a:rPr lang="en-US" sz="1100" dirty="0">
-                <a:solidFill>
-                  <a:srgbClr val="8A9AA3"/>
-                </a:solidFill>
-                <a:latin typeface="맑은 고딕" pitchFamily="34" charset="0"/>
-                <a:ea typeface="맑은 고딕" pitchFamily="34" charset="-122"/>
-                <a:cs typeface="맑은 고딕" pitchFamily="34" charset="-120"/>
-              </a:rPr>
-              <a:t>© V-World 국토교통부 | 2026</a:t>
-            </a:r>
-            <a:endParaRPr lang="en-US" sz="1100" dirty="0"/>
-          </a:p>
-        </p:txBody>
-      </p:sp>
-      <p:sp>
-        <p:nvSpPr>
-          <p:cNvPr id="20" name="Text 17"/>
+      <p:pic>
+        <p:nvPicPr>
+          <p:cNvPr id="25" name="Image 3" descr="preencoded.png">    </p:cNvPr>
+          <p:cNvPicPr>
+            <a:picLocks noChangeAspect="1"/>
+          </p:cNvPicPr>
+          <p:nvPr/>
+        </p:nvPicPr>
+        <p:blipFill>
+          <a:blip r:embed="rId4"/>
+          <a:srcRect l="0" r="0" t="0" b="0"/>
+          <a:stretch/>
+        </p:blipFill>
+        <p:spPr>
+          <a:xfrm>
+            <a:off x="502920" y="3653028"/>
+            <a:ext cx="3600602" cy="2290572"/>
+          </a:xfrm>
+          <a:prstGeom prst="rect">
+            <a:avLst/>
+          </a:prstGeom>
+        </p:spPr>
+      </p:pic>
+      <p:sp>
+        <p:nvSpPr>
+          <p:cNvPr id="26" name="Shape 20"/>
+          <p:cNvSpPr/>
+          <p:nvPr/>
+        </p:nvSpPr>
+        <p:spPr>
+          <a:xfrm>
+            <a:off x="576072" y="3726180"/>
+            <a:ext cx="822960" cy="237744"/>
+          </a:xfrm>
+          <a:prstGeom prst="rect">
+            <a:avLst/>
+          </a:prstGeom>
+          <a:solidFill>
+            <a:srgbClr val="10161F">
+              <a:alpha val="80000"/>
+            </a:srgbClr>
+          </a:solidFill>
+          <a:ln/>
+        </p:spPr>
+      </p:sp>
+      <p:sp>
+        <p:nvSpPr>
+          <p:cNvPr id="27" name="Text 21"/>
+          <p:cNvSpPr/>
+          <p:nvPr/>
+        </p:nvSpPr>
+        <p:spPr>
+          <a:xfrm>
+            <a:off x="576072" y="3726180"/>
+            <a:ext cx="822960" cy="237744"/>
+          </a:xfrm>
+          <a:prstGeom prst="rect">
+            <a:avLst/>
+          </a:prstGeom>
+          <a:noFill/>
+          <a:ln/>
+        </p:spPr>
+        <p:txBody>
+          <a:bodyPr wrap="square" lIns="0" tIns="0" rIns="0" bIns="0" rtlCol="0" anchor="ctr"/>
+          <a:lstStyle/>
+          <a:p>
+            <a:pPr algn="ctr" indent="0" marL="0">
+              <a:buNone/>
+            </a:pPr>
+            <a:r>
+              <a:rPr lang="en-US" sz="900" b="1" dirty="0">
+                <a:solidFill>
+                  <a:srgbClr val="FFFFFF"/>
+                </a:solidFill>
+                <a:latin typeface="맑은 고딕" pitchFamily="34" charset="0"/>
+                <a:ea typeface="맑은 고딕" pitchFamily="34" charset="-122"/>
+                <a:cs typeface="맑은 고딕" pitchFamily="34" charset="-120"/>
+              </a:rPr>
+              <a:t>주차장</a:t>
+            </a:r>
+            <a:endParaRPr lang="en-US" sz="900" dirty="0"/>
+          </a:p>
+        </p:txBody>
+      </p:sp>
+      <p:sp>
+        <p:nvSpPr>
+          <p:cNvPr id="28" name="Shape 22"/>
+          <p:cNvSpPr/>
+          <p:nvPr/>
+        </p:nvSpPr>
+        <p:spPr>
+          <a:xfrm>
+            <a:off x="502920" y="5650992"/>
+            <a:ext cx="3600602" cy="292608"/>
+          </a:xfrm>
+          <a:prstGeom prst="rect">
+            <a:avLst/>
+          </a:prstGeom>
+          <a:solidFill>
+            <a:srgbClr val="000000">
+              <a:alpha val="60000"/>
+            </a:srgbClr>
+          </a:solidFill>
+          <a:ln/>
+        </p:spPr>
+      </p:sp>
+      <p:sp>
+        <p:nvSpPr>
+          <p:cNvPr id="29" name="Text 23"/>
+          <p:cNvSpPr/>
+          <p:nvPr/>
+        </p:nvSpPr>
+        <p:spPr>
+          <a:xfrm>
+            <a:off x="612648" y="5650992"/>
+            <a:ext cx="3381146" cy="292608"/>
+          </a:xfrm>
+          <a:prstGeom prst="rect">
+            <a:avLst/>
+          </a:prstGeom>
+          <a:noFill/>
+          <a:ln/>
+        </p:spPr>
+        <p:txBody>
+          <a:bodyPr wrap="square" lIns="0" tIns="0" rIns="0" bIns="0" rtlCol="0" anchor="ctr"/>
+          <a:lstStyle/>
+          <a:p>
+            <a:pPr indent="0" marL="0">
+              <a:buNone/>
+            </a:pPr>
+            <a:r>
+              <a:rPr lang="en-US" sz="900" dirty="0">
+                <a:solidFill>
+                  <a:srgbClr val="FFFFFF"/>
+                </a:solidFill>
+                <a:latin typeface="맑은 고딕" pitchFamily="34" charset="0"/>
+                <a:ea typeface="맑은 고딕" pitchFamily="34" charset="-122"/>
+                <a:cs typeface="맑은 고딕" pitchFamily="34" charset="-120"/>
+              </a:rPr>
+              <a:t>자주식/기계식 주차장 진입로 (총 26대)</a:t>
+            </a:r>
+            <a:endParaRPr lang="en-US" sz="900" dirty="0"/>
+          </a:p>
+        </p:txBody>
+      </p:sp>
+      <p:sp>
+        <p:nvSpPr>
+          <p:cNvPr id="30" name="Shape 24"/>
+          <p:cNvSpPr/>
+          <p:nvPr/>
+        </p:nvSpPr>
+        <p:spPr>
+          <a:xfrm>
+            <a:off x="4231538" y="3653028"/>
+            <a:ext cx="3600602" cy="2290572"/>
+          </a:xfrm>
+          <a:prstGeom prst="roundRect">
+            <a:avLst>
+              <a:gd name="adj" fmla="val 2395"/>
+            </a:avLst>
+          </a:prstGeom>
+          <a:solidFill>
+            <a:srgbClr val="F0F0F0"/>
+          </a:solidFill>
+          <a:ln w="6350">
+            <a:solidFill>
+              <a:srgbClr val="E0E0E0"/>
+            </a:solidFill>
+            <a:prstDash val="solid"/>
+          </a:ln>
+        </p:spPr>
+      </p:sp>
+      <p:pic>
+        <p:nvPicPr>
+          <p:cNvPr id="31" name="Image 4" descr="preencoded.png">    </p:cNvPr>
+          <p:cNvPicPr>
+            <a:picLocks noChangeAspect="1"/>
+          </p:cNvPicPr>
+          <p:nvPr/>
+        </p:nvPicPr>
+        <p:blipFill>
+          <a:blip r:embed="rId5"/>
+          <a:srcRect l="0" r="0" t="0" b="0"/>
+          <a:stretch/>
+        </p:blipFill>
+        <p:spPr>
+          <a:xfrm>
+            <a:off x="4231538" y="3653028"/>
+            <a:ext cx="3600602" cy="2290572"/>
+          </a:xfrm>
+          <a:prstGeom prst="rect">
+            <a:avLst/>
+          </a:prstGeom>
+        </p:spPr>
+      </p:pic>
+      <p:sp>
+        <p:nvSpPr>
+          <p:cNvPr id="32" name="Shape 25"/>
+          <p:cNvSpPr/>
+          <p:nvPr/>
+        </p:nvSpPr>
+        <p:spPr>
+          <a:xfrm>
+            <a:off x="4304690" y="3726180"/>
+            <a:ext cx="996696" cy="237744"/>
+          </a:xfrm>
+          <a:prstGeom prst="rect">
+            <a:avLst/>
+          </a:prstGeom>
+          <a:solidFill>
+            <a:srgbClr val="10161F">
+              <a:alpha val="80000"/>
+            </a:srgbClr>
+          </a:solidFill>
+          <a:ln/>
+        </p:spPr>
+      </p:sp>
+      <p:sp>
+        <p:nvSpPr>
+          <p:cNvPr id="33" name="Text 26"/>
+          <p:cNvSpPr/>
+          <p:nvPr/>
+        </p:nvSpPr>
+        <p:spPr>
+          <a:xfrm>
+            <a:off x="4304690" y="3726180"/>
+            <a:ext cx="996696" cy="237744"/>
+          </a:xfrm>
+          <a:prstGeom prst="rect">
+            <a:avLst/>
+          </a:prstGeom>
+          <a:noFill/>
+          <a:ln/>
+        </p:spPr>
+        <p:txBody>
+          <a:bodyPr wrap="square" lIns="0" tIns="0" rIns="0" bIns="0" rtlCol="0" anchor="ctr"/>
+          <a:lstStyle/>
+          <a:p>
+            <a:pPr algn="ctr" indent="0" marL="0">
+              <a:buNone/>
+            </a:pPr>
+            <a:r>
+              <a:rPr lang="en-US" sz="900" b="1" dirty="0">
+                <a:solidFill>
+                  <a:srgbClr val="FFFFFF"/>
+                </a:solidFill>
+                <a:latin typeface="맑은 고딕" pitchFamily="34" charset="0"/>
+                <a:ea typeface="맑은 고딕" pitchFamily="34" charset="-122"/>
+                <a:cs typeface="맑은 고딕" pitchFamily="34" charset="-120"/>
+              </a:rPr>
+              <a:t>옥상/테라스</a:t>
+            </a:r>
+            <a:endParaRPr lang="en-US" sz="900" dirty="0"/>
+          </a:p>
+        </p:txBody>
+      </p:sp>
+      <p:sp>
+        <p:nvSpPr>
+          <p:cNvPr id="34" name="Shape 27"/>
+          <p:cNvSpPr/>
+          <p:nvPr/>
+        </p:nvSpPr>
+        <p:spPr>
+          <a:xfrm>
+            <a:off x="4231538" y="5650992"/>
+            <a:ext cx="3600602" cy="292608"/>
+          </a:xfrm>
+          <a:prstGeom prst="rect">
+            <a:avLst/>
+          </a:prstGeom>
+          <a:solidFill>
+            <a:srgbClr val="000000">
+              <a:alpha val="60000"/>
+            </a:srgbClr>
+          </a:solidFill>
+          <a:ln/>
+        </p:spPr>
+      </p:sp>
+      <p:sp>
+        <p:nvSpPr>
+          <p:cNvPr id="35" name="Text 28"/>
+          <p:cNvSpPr/>
+          <p:nvPr/>
+        </p:nvSpPr>
+        <p:spPr>
+          <a:xfrm>
+            <a:off x="4341266" y="5650992"/>
+            <a:ext cx="3381146" cy="292608"/>
+          </a:xfrm>
+          <a:prstGeom prst="rect">
+            <a:avLst/>
+          </a:prstGeom>
+          <a:noFill/>
+          <a:ln/>
+        </p:spPr>
+        <p:txBody>
+          <a:bodyPr wrap="square" lIns="0" tIns="0" rIns="0" bIns="0" rtlCol="0" anchor="ctr"/>
+          <a:lstStyle/>
+          <a:p>
+            <a:pPr indent="0" marL="0">
+              <a:buNone/>
+            </a:pPr>
+            <a:r>
+              <a:rPr lang="en-US" sz="900" dirty="0">
+                <a:solidFill>
+                  <a:srgbClr val="FFFFFF"/>
+                </a:solidFill>
+                <a:latin typeface="맑은 고딕" pitchFamily="34" charset="0"/>
+                <a:ea typeface="맑은 고딕" pitchFamily="34" charset="-122"/>
+                <a:cs typeface="맑은 고딕" pitchFamily="34" charset="-120"/>
+              </a:rPr>
+              <a:t>상층부 외관 및 옥상 공간</a:t>
+            </a:r>
+            <a:endParaRPr lang="en-US" sz="900" dirty="0"/>
+          </a:p>
+        </p:txBody>
+      </p:sp>
+      <p:sp>
+        <p:nvSpPr>
+          <p:cNvPr id="36" name="Text 29"/>
           <p:cNvSpPr/>
           <p:nvPr/>
         </p:nvSpPr>
@@ -8255,7 +8584,7 @@
       </p:sp>
       <p:sp>
         <p:nvSpPr>
-          <p:cNvPr id="21" name="Text 18"/>
+          <p:cNvPr id="37" name="Text 30"/>
           <p:cNvSpPr/>
           <p:nvPr/>
         </p:nvSpPr>
@@ -8303,1113 +8632,6 @@
 <file path=ppt/slides/slide7.xml><?xml version="1.0" encoding="utf-8"?>
 <p:sld xmlns:a="http://schemas.openxmlformats.org/drawingml/2006/main" xmlns:r="http://schemas.openxmlformats.org/officeDocument/2006/relationships" xmlns:p="http://schemas.openxmlformats.org/presentationml/2006/main">
   <p:cSld name="Slide 7">
-    <p:bg>
-      <p:bgPr>
-        <a:solidFill>
-          <a:srgbClr val="FFFFFF"/>
-        </a:solidFill>
-      </p:bgPr>
-    </p:bg>
-    <p:spTree>
-      <p:nvGrpSpPr>
-        <p:cNvPr id="1" name=""/>
-        <p:cNvGrpSpPr/>
-        <p:nvPr/>
-      </p:nvGrpSpPr>
-      <p:grpSpPr>
-        <a:xfrm>
-          <a:off x="0" y="0"/>
-          <a:ext cx="0" cy="0"/>
-          <a:chOff x="0" y="0"/>
-          <a:chExt cx="0" cy="0"/>
-        </a:xfrm>
-      </p:grpSpPr>
-      <p:sp>
-        <p:nvSpPr>
-          <p:cNvPr id="2" name="Shape 0"/>
-          <p:cNvSpPr/>
-          <p:nvPr/>
-        </p:nvSpPr>
-        <p:spPr>
-          <a:xfrm>
-            <a:off x="502920" y="457200"/>
-            <a:ext cx="384048" cy="384048"/>
-          </a:xfrm>
-          <a:prstGeom prst="ellipse">
-            <a:avLst/>
-          </a:prstGeom>
-          <a:solidFill>
-            <a:srgbClr val="B8860B"/>
-          </a:solidFill>
-          <a:ln/>
-        </p:spPr>
-      </p:sp>
-      <p:sp>
-        <p:nvSpPr>
-          <p:cNvPr id="3" name="Text 1"/>
-          <p:cNvSpPr/>
-          <p:nvPr/>
-        </p:nvSpPr>
-        <p:spPr>
-          <a:xfrm>
-            <a:off x="502920" y="457200"/>
-            <a:ext cx="384048" cy="384048"/>
-          </a:xfrm>
-          <a:prstGeom prst="rect">
-            <a:avLst/>
-          </a:prstGeom>
-          <a:noFill/>
-          <a:ln/>
-        </p:spPr>
-        <p:txBody>
-          <a:bodyPr wrap="square" lIns="0" tIns="0" rIns="0" bIns="0" rtlCol="0" anchor="ctr"/>
-          <a:lstStyle/>
-          <a:p>
-            <a:pPr algn="ctr" indent="0" marL="0">
-              <a:buNone/>
-            </a:pPr>
-            <a:r>
-              <a:rPr lang="en-US" sz="1300" b="1" dirty="0">
-                <a:solidFill>
-                  <a:srgbClr val="FFFFFF"/>
-                </a:solidFill>
-                <a:latin typeface="Arial" pitchFamily="34" charset="0"/>
-                <a:ea typeface="Arial" pitchFamily="34" charset="-122"/>
-                <a:cs typeface="Arial" pitchFamily="34" charset="-120"/>
-              </a:rPr>
-              <a:t>07</a:t>
-            </a:r>
-            <a:endParaRPr lang="en-US" sz="1300" dirty="0"/>
-          </a:p>
-        </p:txBody>
-      </p:sp>
-      <p:sp>
-        <p:nvSpPr>
-          <p:cNvPr id="4" name="Text 2"/>
-          <p:cNvSpPr/>
-          <p:nvPr/>
-        </p:nvSpPr>
-        <p:spPr>
-          <a:xfrm>
-            <a:off x="1069848" y="457200"/>
-            <a:ext cx="10490911" cy="182880"/>
-          </a:xfrm>
-          <a:prstGeom prst="rect">
-            <a:avLst/>
-          </a:prstGeom>
-          <a:noFill/>
-          <a:ln/>
-        </p:spPr>
-        <p:txBody>
-          <a:bodyPr wrap="square" lIns="0" tIns="0" rIns="0" bIns="0" rtlCol="0" anchor="ctr"/>
-          <a:lstStyle/>
-          <a:p>
-            <a:pPr indent="0" marL="0">
-              <a:buNone/>
-            </a:pPr>
-            <a:r>
-              <a:rPr lang="en-US" sz="950" b="1" spc="200" kern="0" dirty="0">
-                <a:solidFill>
-                  <a:srgbClr val="B8860B"/>
-                </a:solidFill>
-                <a:latin typeface="Arial" pitchFamily="34" charset="0"/>
-                <a:ea typeface="Arial" pitchFamily="34" charset="-122"/>
-                <a:cs typeface="Arial" pitchFamily="34" charset="-120"/>
-              </a:rPr>
-              <a:t>Gallery</a:t>
-            </a:r>
-            <a:endParaRPr lang="en-US" sz="950" dirty="0"/>
-          </a:p>
-        </p:txBody>
-      </p:sp>
-      <p:sp>
-        <p:nvSpPr>
-          <p:cNvPr id="5" name="Text 3"/>
-          <p:cNvSpPr/>
-          <p:nvPr/>
-        </p:nvSpPr>
-        <p:spPr>
-          <a:xfrm>
-            <a:off x="1069848" y="640080"/>
-            <a:ext cx="10490911" cy="365760"/>
-          </a:xfrm>
-          <a:prstGeom prst="rect">
-            <a:avLst/>
-          </a:prstGeom>
-          <a:noFill/>
-          <a:ln/>
-        </p:spPr>
-        <p:txBody>
-          <a:bodyPr wrap="square" lIns="0" tIns="0" rIns="0" bIns="0" rtlCol="0" anchor="ctr"/>
-          <a:lstStyle/>
-          <a:p>
-            <a:pPr indent="0" marL="0">
-              <a:buNone/>
-            </a:pPr>
-            <a:r>
-              <a:rPr lang="en-US" sz="2300" b="1" dirty="0">
-                <a:solidFill>
-                  <a:srgbClr val="132A3A"/>
-                </a:solidFill>
-                <a:latin typeface="맑은 고딕" pitchFamily="34" charset="0"/>
-                <a:ea typeface="맑은 고딕" pitchFamily="34" charset="-122"/>
-                <a:cs typeface="맑은 고딕" pitchFamily="34" charset="-120"/>
-              </a:rPr>
-              <a:t>현장 사진</a:t>
-            </a:r>
-            <a:endParaRPr lang="en-US" sz="2300" dirty="0"/>
-          </a:p>
-        </p:txBody>
-      </p:sp>
-      <p:sp>
-        <p:nvSpPr>
-          <p:cNvPr id="6" name="Shape 4"/>
-          <p:cNvSpPr/>
-          <p:nvPr/>
-        </p:nvSpPr>
-        <p:spPr>
-          <a:xfrm>
-            <a:off x="502920" y="1234440"/>
-            <a:ext cx="3600602" cy="2290572"/>
-          </a:xfrm>
-          <a:prstGeom prst="roundRect">
-            <a:avLst>
-              <a:gd name="adj" fmla="val 2395"/>
-            </a:avLst>
-          </a:prstGeom>
-          <a:solidFill>
-            <a:srgbClr val="F0F0F0"/>
-          </a:solidFill>
-          <a:ln w="6350">
-            <a:solidFill>
-              <a:srgbClr val="E0E0E0"/>
-            </a:solidFill>
-            <a:prstDash val="solid"/>
-          </a:ln>
-        </p:spPr>
-      </p:sp>
-      <p:pic>
-        <p:nvPicPr>
-          <p:cNvPr id="7" name="Image 0" descr="preencoded.png">    </p:cNvPr>
-          <p:cNvPicPr>
-            <a:picLocks noChangeAspect="1"/>
-          </p:cNvPicPr>
-          <p:nvPr/>
-        </p:nvPicPr>
-        <p:blipFill>
-          <a:blip r:embed="rId1"/>
-          <a:srcRect l="0" r="0" t="0" b="0"/>
-          <a:stretch/>
-        </p:blipFill>
-        <p:spPr>
-          <a:xfrm>
-            <a:off x="502920" y="1234440"/>
-            <a:ext cx="3600602" cy="2290572"/>
-          </a:xfrm>
-          <a:prstGeom prst="rect">
-            <a:avLst/>
-          </a:prstGeom>
-        </p:spPr>
-      </p:pic>
-      <p:sp>
-        <p:nvSpPr>
-          <p:cNvPr id="8" name="Shape 5"/>
-          <p:cNvSpPr/>
-          <p:nvPr/>
-        </p:nvSpPr>
-        <p:spPr>
-          <a:xfrm>
-            <a:off x="576072" y="1307592"/>
-            <a:ext cx="868680" cy="237744"/>
-          </a:xfrm>
-          <a:prstGeom prst="rect">
-            <a:avLst/>
-          </a:prstGeom>
-          <a:solidFill>
-            <a:srgbClr val="10161F">
-              <a:alpha val="80000"/>
-            </a:srgbClr>
-          </a:solidFill>
-          <a:ln/>
-        </p:spPr>
-      </p:sp>
-      <p:sp>
-        <p:nvSpPr>
-          <p:cNvPr id="9" name="Text 6"/>
-          <p:cNvSpPr/>
-          <p:nvPr/>
-        </p:nvSpPr>
-        <p:spPr>
-          <a:xfrm>
-            <a:off x="576072" y="1307592"/>
-            <a:ext cx="868680" cy="237744"/>
-          </a:xfrm>
-          <a:prstGeom prst="rect">
-            <a:avLst/>
-          </a:prstGeom>
-          <a:noFill/>
-          <a:ln/>
-        </p:spPr>
-        <p:txBody>
-          <a:bodyPr wrap="square" lIns="0" tIns="0" rIns="0" bIns="0" rtlCol="0" anchor="ctr"/>
-          <a:lstStyle/>
-          <a:p>
-            <a:pPr algn="ctr" indent="0" marL="0">
-              <a:buNone/>
-            </a:pPr>
-            <a:r>
-              <a:rPr lang="en-US" sz="900" b="1" dirty="0">
-                <a:solidFill>
-                  <a:srgbClr val="FFFFFF"/>
-                </a:solidFill>
-                <a:latin typeface="맑은 고딕" pitchFamily="34" charset="0"/>
-                <a:ea typeface="맑은 고딕" pitchFamily="34" charset="-122"/>
-                <a:cs typeface="맑은 고딕" pitchFamily="34" charset="-120"/>
-              </a:rPr>
-              <a:t>건물 외관</a:t>
-            </a:r>
-            <a:endParaRPr lang="en-US" sz="900" dirty="0"/>
-          </a:p>
-        </p:txBody>
-      </p:sp>
-      <p:sp>
-        <p:nvSpPr>
-          <p:cNvPr id="10" name="Shape 7"/>
-          <p:cNvSpPr/>
-          <p:nvPr/>
-        </p:nvSpPr>
-        <p:spPr>
-          <a:xfrm>
-            <a:off x="502920" y="3232404"/>
-            <a:ext cx="3600602" cy="292608"/>
-          </a:xfrm>
-          <a:prstGeom prst="rect">
-            <a:avLst/>
-          </a:prstGeom>
-          <a:solidFill>
-            <a:srgbClr val="000000">
-              <a:alpha val="60000"/>
-            </a:srgbClr>
-          </a:solidFill>
-          <a:ln/>
-        </p:spPr>
-      </p:sp>
-      <p:sp>
-        <p:nvSpPr>
-          <p:cNvPr id="11" name="Text 8"/>
-          <p:cNvSpPr/>
-          <p:nvPr/>
-        </p:nvSpPr>
-        <p:spPr>
-          <a:xfrm>
-            <a:off x="612648" y="3232404"/>
-            <a:ext cx="3381146" cy="292608"/>
-          </a:xfrm>
-          <a:prstGeom prst="rect">
-            <a:avLst/>
-          </a:prstGeom>
-          <a:noFill/>
-          <a:ln/>
-        </p:spPr>
-        <p:txBody>
-          <a:bodyPr wrap="square" lIns="0" tIns="0" rIns="0" bIns="0" rtlCol="0" anchor="ctr"/>
-          <a:lstStyle/>
-          <a:p>
-            <a:pPr indent="0" marL="0">
-              <a:buNone/>
-            </a:pPr>
-            <a:r>
-              <a:rPr lang="en-US" sz="900" dirty="0">
-                <a:solidFill>
-                  <a:srgbClr val="FFFFFF"/>
-                </a:solidFill>
-                <a:latin typeface="맑은 고딕" pitchFamily="34" charset="0"/>
-                <a:ea typeface="맑은 고딕" pitchFamily="34" charset="-122"/>
-                <a:cs typeface="맑은 고딕" pitchFamily="34" charset="-120"/>
-              </a:rPr>
-              <a:t>신사동 590 ICL 빌딩 전경 및 대로변 코너 입지</a:t>
-            </a:r>
-            <a:endParaRPr lang="en-US" sz="900" dirty="0"/>
-          </a:p>
-        </p:txBody>
-      </p:sp>
-      <p:sp>
-        <p:nvSpPr>
-          <p:cNvPr id="12" name="Shape 9"/>
-          <p:cNvSpPr/>
-          <p:nvPr/>
-        </p:nvSpPr>
-        <p:spPr>
-          <a:xfrm>
-            <a:off x="4231538" y="1234440"/>
-            <a:ext cx="3600602" cy="2290572"/>
-          </a:xfrm>
-          <a:prstGeom prst="roundRect">
-            <a:avLst>
-              <a:gd name="adj" fmla="val 2395"/>
-            </a:avLst>
-          </a:prstGeom>
-          <a:solidFill>
-            <a:srgbClr val="F0F0F0"/>
-          </a:solidFill>
-          <a:ln w="6350">
-            <a:solidFill>
-              <a:srgbClr val="E0E0E0"/>
-            </a:solidFill>
-            <a:prstDash val="solid"/>
-          </a:ln>
-        </p:spPr>
-      </p:sp>
-      <p:pic>
-        <p:nvPicPr>
-          <p:cNvPr id="13" name="Image 1" descr="preencoded.png">    </p:cNvPr>
-          <p:cNvPicPr>
-            <a:picLocks noChangeAspect="1"/>
-          </p:cNvPicPr>
-          <p:nvPr/>
-        </p:nvPicPr>
-        <p:blipFill>
-          <a:blip r:embed="rId2"/>
-          <a:srcRect l="0" r="0" t="0" b="0"/>
-          <a:stretch/>
-        </p:blipFill>
-        <p:spPr>
-          <a:xfrm>
-            <a:off x="4231538" y="1234440"/>
-            <a:ext cx="3600602" cy="2290572"/>
-          </a:xfrm>
-          <a:prstGeom prst="rect">
-            <a:avLst/>
-          </a:prstGeom>
-        </p:spPr>
-      </p:pic>
-      <p:sp>
-        <p:nvSpPr>
-          <p:cNvPr id="14" name="Shape 10"/>
-          <p:cNvSpPr/>
-          <p:nvPr/>
-        </p:nvSpPr>
-        <p:spPr>
-          <a:xfrm>
-            <a:off x="4304690" y="1307592"/>
-            <a:ext cx="868680" cy="237744"/>
-          </a:xfrm>
-          <a:prstGeom prst="rect">
-            <a:avLst/>
-          </a:prstGeom>
-          <a:solidFill>
-            <a:srgbClr val="10161F">
-              <a:alpha val="80000"/>
-            </a:srgbClr>
-          </a:solidFill>
-          <a:ln/>
-        </p:spPr>
-      </p:sp>
-      <p:sp>
-        <p:nvSpPr>
-          <p:cNvPr id="15" name="Text 11"/>
-          <p:cNvSpPr/>
-          <p:nvPr/>
-        </p:nvSpPr>
-        <p:spPr>
-          <a:xfrm>
-            <a:off x="4304690" y="1307592"/>
-            <a:ext cx="868680" cy="237744"/>
-          </a:xfrm>
-          <a:prstGeom prst="rect">
-            <a:avLst/>
-          </a:prstGeom>
-          <a:noFill/>
-          <a:ln/>
-        </p:spPr>
-        <p:txBody>
-          <a:bodyPr wrap="square" lIns="0" tIns="0" rIns="0" bIns="0" rtlCol="0" anchor="ctr"/>
-          <a:lstStyle/>
-          <a:p>
-            <a:pPr algn="ctr" indent="0" marL="0">
-              <a:buNone/>
-            </a:pPr>
-            <a:r>
-              <a:rPr lang="en-US" sz="900" b="1" dirty="0">
-                <a:solidFill>
-                  <a:srgbClr val="FFFFFF"/>
-                </a:solidFill>
-                <a:latin typeface="맑은 고딕" pitchFamily="34" charset="0"/>
-                <a:ea typeface="맑은 고딕" pitchFamily="34" charset="-122"/>
-                <a:cs typeface="맑은 고딕" pitchFamily="34" charset="-120"/>
-              </a:rPr>
-              <a:t>주 출입구</a:t>
-            </a:r>
-            <a:endParaRPr lang="en-US" sz="900" dirty="0"/>
-          </a:p>
-        </p:txBody>
-      </p:sp>
-      <p:sp>
-        <p:nvSpPr>
-          <p:cNvPr id="16" name="Shape 12"/>
-          <p:cNvSpPr/>
-          <p:nvPr/>
-        </p:nvSpPr>
-        <p:spPr>
-          <a:xfrm>
-            <a:off x="4231538" y="3232404"/>
-            <a:ext cx="3600602" cy="292608"/>
-          </a:xfrm>
-          <a:prstGeom prst="rect">
-            <a:avLst/>
-          </a:prstGeom>
-          <a:solidFill>
-            <a:srgbClr val="000000">
-              <a:alpha val="60000"/>
-            </a:srgbClr>
-          </a:solidFill>
-          <a:ln/>
-        </p:spPr>
-      </p:sp>
-      <p:sp>
-        <p:nvSpPr>
-          <p:cNvPr id="17" name="Text 13"/>
-          <p:cNvSpPr/>
-          <p:nvPr/>
-        </p:nvSpPr>
-        <p:spPr>
-          <a:xfrm>
-            <a:off x="4341266" y="3232404"/>
-            <a:ext cx="3381146" cy="292608"/>
-          </a:xfrm>
-          <a:prstGeom prst="rect">
-            <a:avLst/>
-          </a:prstGeom>
-          <a:noFill/>
-          <a:ln/>
-        </p:spPr>
-        <p:txBody>
-          <a:bodyPr wrap="square" lIns="0" tIns="0" rIns="0" bIns="0" rtlCol="0" anchor="ctr"/>
-          <a:lstStyle/>
-          <a:p>
-            <a:pPr indent="0" marL="0">
-              <a:buNone/>
-            </a:pPr>
-            <a:r>
-              <a:rPr lang="en-US" sz="900" dirty="0">
-                <a:solidFill>
-                  <a:srgbClr val="FFFFFF"/>
-                </a:solidFill>
-                <a:latin typeface="맑은 고딕" pitchFamily="34" charset="0"/>
-                <a:ea typeface="맑은 고딕" pitchFamily="34" charset="-122"/>
-                <a:cs typeface="맑은 고딕" pitchFamily="34" charset="-120"/>
-              </a:rPr>
-              <a:t>지상 진입로 및 1층 전면 상가부</a:t>
-            </a:r>
-            <a:endParaRPr lang="en-US" sz="900" dirty="0"/>
-          </a:p>
-        </p:txBody>
-      </p:sp>
-      <p:sp>
-        <p:nvSpPr>
-          <p:cNvPr id="18" name="Shape 14"/>
-          <p:cNvSpPr/>
-          <p:nvPr/>
-        </p:nvSpPr>
-        <p:spPr>
-          <a:xfrm>
-            <a:off x="7960157" y="1234440"/>
-            <a:ext cx="3600602" cy="2290572"/>
-          </a:xfrm>
-          <a:prstGeom prst="roundRect">
-            <a:avLst>
-              <a:gd name="adj" fmla="val 2395"/>
-            </a:avLst>
-          </a:prstGeom>
-          <a:solidFill>
-            <a:srgbClr val="F0F0F0"/>
-          </a:solidFill>
-          <a:ln w="6350">
-            <a:solidFill>
-              <a:srgbClr val="E0E0E0"/>
-            </a:solidFill>
-            <a:prstDash val="solid"/>
-          </a:ln>
-        </p:spPr>
-      </p:sp>
-      <p:pic>
-        <p:nvPicPr>
-          <p:cNvPr id="19" name="Image 2" descr="preencoded.png">    </p:cNvPr>
-          <p:cNvPicPr>
-            <a:picLocks noChangeAspect="1"/>
-          </p:cNvPicPr>
-          <p:nvPr/>
-        </p:nvPicPr>
-        <p:blipFill>
-          <a:blip r:embed="rId3"/>
-          <a:srcRect l="0" r="0" t="0" b="0"/>
-          <a:stretch/>
-        </p:blipFill>
-        <p:spPr>
-          <a:xfrm>
-            <a:off x="7960157" y="1234440"/>
-            <a:ext cx="3600602" cy="2290572"/>
-          </a:xfrm>
-          <a:prstGeom prst="rect">
-            <a:avLst/>
-          </a:prstGeom>
-        </p:spPr>
-      </p:pic>
-      <p:sp>
-        <p:nvSpPr>
-          <p:cNvPr id="20" name="Shape 15"/>
-          <p:cNvSpPr/>
-          <p:nvPr/>
-        </p:nvSpPr>
-        <p:spPr>
-          <a:xfrm>
-            <a:off x="8033309" y="1307592"/>
-            <a:ext cx="868680" cy="237744"/>
-          </a:xfrm>
-          <a:prstGeom prst="rect">
-            <a:avLst/>
-          </a:prstGeom>
-          <a:solidFill>
-            <a:srgbClr val="10161F">
-              <a:alpha val="80000"/>
-            </a:srgbClr>
-          </a:solidFill>
-          <a:ln/>
-        </p:spPr>
-      </p:sp>
-      <p:sp>
-        <p:nvSpPr>
-          <p:cNvPr id="21" name="Text 16"/>
-          <p:cNvSpPr/>
-          <p:nvPr/>
-        </p:nvSpPr>
-        <p:spPr>
-          <a:xfrm>
-            <a:off x="8033309" y="1307592"/>
-            <a:ext cx="868680" cy="237744"/>
-          </a:xfrm>
-          <a:prstGeom prst="rect">
-            <a:avLst/>
-          </a:prstGeom>
-          <a:noFill/>
-          <a:ln/>
-        </p:spPr>
-        <p:txBody>
-          <a:bodyPr wrap="square" lIns="0" tIns="0" rIns="0" bIns="0" rtlCol="0" anchor="ctr"/>
-          <a:lstStyle/>
-          <a:p>
-            <a:pPr algn="ctr" indent="0" marL="0">
-              <a:buNone/>
-            </a:pPr>
-            <a:r>
-              <a:rPr lang="en-US" sz="900" b="1" dirty="0">
-                <a:solidFill>
-                  <a:srgbClr val="FFFFFF"/>
-                </a:solidFill>
-                <a:latin typeface="맑은 고딕" pitchFamily="34" charset="0"/>
-                <a:ea typeface="맑은 고딕" pitchFamily="34" charset="-122"/>
-                <a:cs typeface="맑은 고딕" pitchFamily="34" charset="-120"/>
-              </a:rPr>
-              <a:t>실내 공간</a:t>
-            </a:r>
-            <a:endParaRPr lang="en-US" sz="900" dirty="0"/>
-          </a:p>
-        </p:txBody>
-      </p:sp>
-      <p:sp>
-        <p:nvSpPr>
-          <p:cNvPr id="22" name="Shape 17"/>
-          <p:cNvSpPr/>
-          <p:nvPr/>
-        </p:nvSpPr>
-        <p:spPr>
-          <a:xfrm>
-            <a:off x="7960157" y="3232404"/>
-            <a:ext cx="3600602" cy="292608"/>
-          </a:xfrm>
-          <a:prstGeom prst="rect">
-            <a:avLst/>
-          </a:prstGeom>
-          <a:solidFill>
-            <a:srgbClr val="000000">
-              <a:alpha val="60000"/>
-            </a:srgbClr>
-          </a:solidFill>
-          <a:ln/>
-        </p:spPr>
-      </p:sp>
-      <p:sp>
-        <p:nvSpPr>
-          <p:cNvPr id="23" name="Text 18"/>
-          <p:cNvSpPr/>
-          <p:nvPr/>
-        </p:nvSpPr>
-        <p:spPr>
-          <a:xfrm>
-            <a:off x="8069885" y="3232404"/>
-            <a:ext cx="3381146" cy="292608"/>
-          </a:xfrm>
-          <a:prstGeom prst="rect">
-            <a:avLst/>
-          </a:prstGeom>
-          <a:noFill/>
-          <a:ln/>
-        </p:spPr>
-        <p:txBody>
-          <a:bodyPr wrap="square" lIns="0" tIns="0" rIns="0" bIns="0" rtlCol="0" anchor="ctr"/>
-          <a:lstStyle/>
-          <a:p>
-            <a:pPr indent="0" marL="0">
-              <a:buNone/>
-            </a:pPr>
-            <a:r>
-              <a:rPr lang="en-US" sz="900" dirty="0">
-                <a:solidFill>
-                  <a:srgbClr val="FFFFFF"/>
-                </a:solidFill>
-                <a:latin typeface="맑은 고딕" pitchFamily="34" charset="0"/>
-                <a:ea typeface="맑은 고딕" pitchFamily="34" charset="-122"/>
-                <a:cs typeface="맑은 고딕" pitchFamily="34" charset="-120"/>
-              </a:rPr>
-              <a:t>건물 측면부 및 도로 접면</a:t>
-            </a:r>
-            <a:endParaRPr lang="en-US" sz="900" dirty="0"/>
-          </a:p>
-        </p:txBody>
-      </p:sp>
-      <p:sp>
-        <p:nvSpPr>
-          <p:cNvPr id="24" name="Shape 19"/>
-          <p:cNvSpPr/>
-          <p:nvPr/>
-        </p:nvSpPr>
-        <p:spPr>
-          <a:xfrm>
-            <a:off x="502920" y="3653028"/>
-            <a:ext cx="3600602" cy="2290572"/>
-          </a:xfrm>
-          <a:prstGeom prst="roundRect">
-            <a:avLst>
-              <a:gd name="adj" fmla="val 2395"/>
-            </a:avLst>
-          </a:prstGeom>
-          <a:solidFill>
-            <a:srgbClr val="F0F0F0"/>
-          </a:solidFill>
-          <a:ln w="6350">
-            <a:solidFill>
-              <a:srgbClr val="E0E0E0"/>
-            </a:solidFill>
-            <a:prstDash val="solid"/>
-          </a:ln>
-        </p:spPr>
-      </p:sp>
-      <p:pic>
-        <p:nvPicPr>
-          <p:cNvPr id="25" name="Image 3" descr="preencoded.png">    </p:cNvPr>
-          <p:cNvPicPr>
-            <a:picLocks noChangeAspect="1"/>
-          </p:cNvPicPr>
-          <p:nvPr/>
-        </p:nvPicPr>
-        <p:blipFill>
-          <a:blip r:embed="rId4"/>
-          <a:srcRect l="0" r="0" t="0" b="0"/>
-          <a:stretch/>
-        </p:blipFill>
-        <p:spPr>
-          <a:xfrm>
-            <a:off x="502920" y="3653028"/>
-            <a:ext cx="3600602" cy="2290572"/>
-          </a:xfrm>
-          <a:prstGeom prst="rect">
-            <a:avLst/>
-          </a:prstGeom>
-        </p:spPr>
-      </p:pic>
-      <p:sp>
-        <p:nvSpPr>
-          <p:cNvPr id="26" name="Shape 20"/>
-          <p:cNvSpPr/>
-          <p:nvPr/>
-        </p:nvSpPr>
-        <p:spPr>
-          <a:xfrm>
-            <a:off x="576072" y="3726180"/>
-            <a:ext cx="822960" cy="237744"/>
-          </a:xfrm>
-          <a:prstGeom prst="rect">
-            <a:avLst/>
-          </a:prstGeom>
-          <a:solidFill>
-            <a:srgbClr val="10161F">
-              <a:alpha val="80000"/>
-            </a:srgbClr>
-          </a:solidFill>
-          <a:ln/>
-        </p:spPr>
-      </p:sp>
-      <p:sp>
-        <p:nvSpPr>
-          <p:cNvPr id="27" name="Text 21"/>
-          <p:cNvSpPr/>
-          <p:nvPr/>
-        </p:nvSpPr>
-        <p:spPr>
-          <a:xfrm>
-            <a:off x="576072" y="3726180"/>
-            <a:ext cx="822960" cy="237744"/>
-          </a:xfrm>
-          <a:prstGeom prst="rect">
-            <a:avLst/>
-          </a:prstGeom>
-          <a:noFill/>
-          <a:ln/>
-        </p:spPr>
-        <p:txBody>
-          <a:bodyPr wrap="square" lIns="0" tIns="0" rIns="0" bIns="0" rtlCol="0" anchor="ctr"/>
-          <a:lstStyle/>
-          <a:p>
-            <a:pPr algn="ctr" indent="0" marL="0">
-              <a:buNone/>
-            </a:pPr>
-            <a:r>
-              <a:rPr lang="en-US" sz="900" b="1" dirty="0">
-                <a:solidFill>
-                  <a:srgbClr val="FFFFFF"/>
-                </a:solidFill>
-                <a:latin typeface="맑은 고딕" pitchFamily="34" charset="0"/>
-                <a:ea typeface="맑은 고딕" pitchFamily="34" charset="-122"/>
-                <a:cs typeface="맑은 고딕" pitchFamily="34" charset="-120"/>
-              </a:rPr>
-              <a:t>주차장</a:t>
-            </a:r>
-            <a:endParaRPr lang="en-US" sz="900" dirty="0"/>
-          </a:p>
-        </p:txBody>
-      </p:sp>
-      <p:sp>
-        <p:nvSpPr>
-          <p:cNvPr id="28" name="Shape 22"/>
-          <p:cNvSpPr/>
-          <p:nvPr/>
-        </p:nvSpPr>
-        <p:spPr>
-          <a:xfrm>
-            <a:off x="502920" y="5650992"/>
-            <a:ext cx="3600602" cy="292608"/>
-          </a:xfrm>
-          <a:prstGeom prst="rect">
-            <a:avLst/>
-          </a:prstGeom>
-          <a:solidFill>
-            <a:srgbClr val="000000">
-              <a:alpha val="60000"/>
-            </a:srgbClr>
-          </a:solidFill>
-          <a:ln/>
-        </p:spPr>
-      </p:sp>
-      <p:sp>
-        <p:nvSpPr>
-          <p:cNvPr id="29" name="Text 23"/>
-          <p:cNvSpPr/>
-          <p:nvPr/>
-        </p:nvSpPr>
-        <p:spPr>
-          <a:xfrm>
-            <a:off x="612648" y="5650992"/>
-            <a:ext cx="3381146" cy="292608"/>
-          </a:xfrm>
-          <a:prstGeom prst="rect">
-            <a:avLst/>
-          </a:prstGeom>
-          <a:noFill/>
-          <a:ln/>
-        </p:spPr>
-        <p:txBody>
-          <a:bodyPr wrap="square" lIns="0" tIns="0" rIns="0" bIns="0" rtlCol="0" anchor="ctr"/>
-          <a:lstStyle/>
-          <a:p>
-            <a:pPr indent="0" marL="0">
-              <a:buNone/>
-            </a:pPr>
-            <a:r>
-              <a:rPr lang="en-US" sz="900" dirty="0">
-                <a:solidFill>
-                  <a:srgbClr val="FFFFFF"/>
-                </a:solidFill>
-                <a:latin typeface="맑은 고딕" pitchFamily="34" charset="0"/>
-                <a:ea typeface="맑은 고딕" pitchFamily="34" charset="-122"/>
-                <a:cs typeface="맑은 고딕" pitchFamily="34" charset="-120"/>
-              </a:rPr>
-              <a:t>자주식/기계식 주차장 진입로 (총 26대)</a:t>
-            </a:r>
-            <a:endParaRPr lang="en-US" sz="900" dirty="0"/>
-          </a:p>
-        </p:txBody>
-      </p:sp>
-      <p:sp>
-        <p:nvSpPr>
-          <p:cNvPr id="30" name="Shape 24"/>
-          <p:cNvSpPr/>
-          <p:nvPr/>
-        </p:nvSpPr>
-        <p:spPr>
-          <a:xfrm>
-            <a:off x="4231538" y="3653028"/>
-            <a:ext cx="3600602" cy="2290572"/>
-          </a:xfrm>
-          <a:prstGeom prst="roundRect">
-            <a:avLst>
-              <a:gd name="adj" fmla="val 2395"/>
-            </a:avLst>
-          </a:prstGeom>
-          <a:solidFill>
-            <a:srgbClr val="F0F0F0"/>
-          </a:solidFill>
-          <a:ln w="6350">
-            <a:solidFill>
-              <a:srgbClr val="E0E0E0"/>
-            </a:solidFill>
-            <a:prstDash val="solid"/>
-          </a:ln>
-        </p:spPr>
-      </p:sp>
-      <p:pic>
-        <p:nvPicPr>
-          <p:cNvPr id="31" name="Image 4" descr="preencoded.png">    </p:cNvPr>
-          <p:cNvPicPr>
-            <a:picLocks noChangeAspect="1"/>
-          </p:cNvPicPr>
-          <p:nvPr/>
-        </p:nvPicPr>
-        <p:blipFill>
-          <a:blip r:embed="rId5"/>
-          <a:srcRect l="0" r="0" t="0" b="0"/>
-          <a:stretch/>
-        </p:blipFill>
-        <p:spPr>
-          <a:xfrm>
-            <a:off x="4231538" y="3653028"/>
-            <a:ext cx="3600602" cy="2290572"/>
-          </a:xfrm>
-          <a:prstGeom prst="rect">
-            <a:avLst/>
-          </a:prstGeom>
-        </p:spPr>
-      </p:pic>
-      <p:sp>
-        <p:nvSpPr>
-          <p:cNvPr id="32" name="Shape 25"/>
-          <p:cNvSpPr/>
-          <p:nvPr/>
-        </p:nvSpPr>
-        <p:spPr>
-          <a:xfrm>
-            <a:off x="4304690" y="3726180"/>
-            <a:ext cx="996696" cy="237744"/>
-          </a:xfrm>
-          <a:prstGeom prst="rect">
-            <a:avLst/>
-          </a:prstGeom>
-          <a:solidFill>
-            <a:srgbClr val="10161F">
-              <a:alpha val="80000"/>
-            </a:srgbClr>
-          </a:solidFill>
-          <a:ln/>
-        </p:spPr>
-      </p:sp>
-      <p:sp>
-        <p:nvSpPr>
-          <p:cNvPr id="33" name="Text 26"/>
-          <p:cNvSpPr/>
-          <p:nvPr/>
-        </p:nvSpPr>
-        <p:spPr>
-          <a:xfrm>
-            <a:off x="4304690" y="3726180"/>
-            <a:ext cx="996696" cy="237744"/>
-          </a:xfrm>
-          <a:prstGeom prst="rect">
-            <a:avLst/>
-          </a:prstGeom>
-          <a:noFill/>
-          <a:ln/>
-        </p:spPr>
-        <p:txBody>
-          <a:bodyPr wrap="square" lIns="0" tIns="0" rIns="0" bIns="0" rtlCol="0" anchor="ctr"/>
-          <a:lstStyle/>
-          <a:p>
-            <a:pPr algn="ctr" indent="0" marL="0">
-              <a:buNone/>
-            </a:pPr>
-            <a:r>
-              <a:rPr lang="en-US" sz="900" b="1" dirty="0">
-                <a:solidFill>
-                  <a:srgbClr val="FFFFFF"/>
-                </a:solidFill>
-                <a:latin typeface="맑은 고딕" pitchFamily="34" charset="0"/>
-                <a:ea typeface="맑은 고딕" pitchFamily="34" charset="-122"/>
-                <a:cs typeface="맑은 고딕" pitchFamily="34" charset="-120"/>
-              </a:rPr>
-              <a:t>옥상/테라스</a:t>
-            </a:r>
-            <a:endParaRPr lang="en-US" sz="900" dirty="0"/>
-          </a:p>
-        </p:txBody>
-      </p:sp>
-      <p:sp>
-        <p:nvSpPr>
-          <p:cNvPr id="34" name="Shape 27"/>
-          <p:cNvSpPr/>
-          <p:nvPr/>
-        </p:nvSpPr>
-        <p:spPr>
-          <a:xfrm>
-            <a:off x="4231538" y="5650992"/>
-            <a:ext cx="3600602" cy="292608"/>
-          </a:xfrm>
-          <a:prstGeom prst="rect">
-            <a:avLst/>
-          </a:prstGeom>
-          <a:solidFill>
-            <a:srgbClr val="000000">
-              <a:alpha val="60000"/>
-            </a:srgbClr>
-          </a:solidFill>
-          <a:ln/>
-        </p:spPr>
-      </p:sp>
-      <p:sp>
-        <p:nvSpPr>
-          <p:cNvPr id="35" name="Text 28"/>
-          <p:cNvSpPr/>
-          <p:nvPr/>
-        </p:nvSpPr>
-        <p:spPr>
-          <a:xfrm>
-            <a:off x="4341266" y="5650992"/>
-            <a:ext cx="3381146" cy="292608"/>
-          </a:xfrm>
-          <a:prstGeom prst="rect">
-            <a:avLst/>
-          </a:prstGeom>
-          <a:noFill/>
-          <a:ln/>
-        </p:spPr>
-        <p:txBody>
-          <a:bodyPr wrap="square" lIns="0" tIns="0" rIns="0" bIns="0" rtlCol="0" anchor="ctr"/>
-          <a:lstStyle/>
-          <a:p>
-            <a:pPr indent="0" marL="0">
-              <a:buNone/>
-            </a:pPr>
-            <a:r>
-              <a:rPr lang="en-US" sz="900" dirty="0">
-                <a:solidFill>
-                  <a:srgbClr val="FFFFFF"/>
-                </a:solidFill>
-                <a:latin typeface="맑은 고딕" pitchFamily="34" charset="0"/>
-                <a:ea typeface="맑은 고딕" pitchFamily="34" charset="-122"/>
-                <a:cs typeface="맑은 고딕" pitchFamily="34" charset="-120"/>
-              </a:rPr>
-              <a:t>상층부 외관 및 옥상 공간</a:t>
-            </a:r>
-            <a:endParaRPr lang="en-US" sz="900" dirty="0"/>
-          </a:p>
-        </p:txBody>
-      </p:sp>
-      <p:sp>
-        <p:nvSpPr>
-          <p:cNvPr id="36" name="Text 29"/>
-          <p:cNvSpPr/>
-          <p:nvPr/>
-        </p:nvSpPr>
-        <p:spPr>
-          <a:xfrm>
-            <a:off x="502920" y="6382512"/>
-            <a:ext cx="7315200" cy="219456"/>
-          </a:xfrm>
-          <a:prstGeom prst="rect">
-            <a:avLst/>
-          </a:prstGeom>
-          <a:noFill/>
-          <a:ln/>
-        </p:spPr>
-        <p:txBody>
-          <a:bodyPr wrap="square" lIns="0" tIns="0" rIns="0" bIns="0" rtlCol="0" anchor="ctr"/>
-          <a:lstStyle/>
-          <a:p>
-            <a:pPr indent="0" marL="0">
-              <a:buNone/>
-            </a:pPr>
-            <a:r>
-              <a:rPr lang="en-US" sz="800" dirty="0">
-                <a:solidFill>
-                  <a:srgbClr val="5B6B73"/>
-                </a:solidFill>
-                <a:latin typeface="맑은 고딕" pitchFamily="34" charset="0"/>
-                <a:ea typeface="맑은 고딕" pitchFamily="34" charset="-122"/>
-                <a:cs typeface="맑은 고딕" pitchFamily="34" charset="-120"/>
-              </a:rPr>
-              <a:t>CRE DEAL   |   IM-SINSA-590</a:t>
-            </a:r>
-            <a:endParaRPr lang="en-US" sz="800" dirty="0"/>
-          </a:p>
-        </p:txBody>
-      </p:sp>
-      <p:sp>
-        <p:nvSpPr>
-          <p:cNvPr id="37" name="Text 30"/>
-          <p:cNvSpPr/>
-          <p:nvPr/>
-        </p:nvSpPr>
-        <p:spPr>
-          <a:xfrm>
-            <a:off x="10774375" y="6382512"/>
-            <a:ext cx="914400" cy="219456"/>
-          </a:xfrm>
-          <a:prstGeom prst="rect">
-            <a:avLst/>
-          </a:prstGeom>
-          <a:noFill/>
-          <a:ln/>
-        </p:spPr>
-        <p:txBody>
-          <a:bodyPr wrap="square" lIns="0" tIns="0" rIns="0" bIns="0" rtlCol="0" anchor="ctr"/>
-          <a:lstStyle/>
-          <a:p>
-            <a:pPr algn="r" indent="0" marL="0">
-              <a:buNone/>
-            </a:pPr>
-            <a:r>
-              <a:rPr lang="en-US" sz="900" b="1" dirty="0">
-                <a:solidFill>
-                  <a:srgbClr val="B8860B"/>
-                </a:solidFill>
-                <a:latin typeface="Arial" pitchFamily="34" charset="0"/>
-                <a:ea typeface="Arial" pitchFamily="34" charset="-122"/>
-                <a:cs typeface="Arial" pitchFamily="34" charset="-120"/>
-              </a:rPr>
-              <a:t>7</a:t>
-            </a:r>
-            <a:endParaRPr lang="en-US" sz="900" dirty="0"/>
-          </a:p>
-        </p:txBody>
-      </p:sp>
-    </p:spTree>
-  </p:cSld>
-  <p:clrMapOvr>
-    <a:masterClrMapping/>
-  </p:clrMapOvr>
-</p:sld>
-</file>
-
-<file path=ppt/slides/slide8.xml><?xml version="1.0" encoding="utf-8"?>
-<p:sld xmlns:a="http://schemas.openxmlformats.org/drawingml/2006/main" xmlns:r="http://schemas.openxmlformats.org/officeDocument/2006/relationships" xmlns:p="http://schemas.openxmlformats.org/presentationml/2006/main">
-  <p:cSld name="Slide 8">
     <p:bg>
       <p:bgPr>
         <a:solidFill>
@@ -9484,7 +8706,7 @@
                 <a:ea typeface="Arial" pitchFamily="34" charset="-122"/>
                 <a:cs typeface="Arial" pitchFamily="34" charset="-120"/>
               </a:rPr>
-              <a:t>08</a:t>
+              <a:t>07</a:t>
             </a:r>
             <a:endParaRPr lang="en-US" sz="1300" dirty="0"/>
           </a:p>
@@ -11079,7 +10301,7 @@
                 <a:ea typeface="Arial" pitchFamily="34" charset="-122"/>
                 <a:cs typeface="Arial" pitchFamily="34" charset="-120"/>
               </a:rPr>
-              <a:t>8</a:t>
+              <a:t>7</a:t>
             </a:r>
             <a:endParaRPr lang="en-US" sz="900" dirty="0"/>
           </a:p>

--- a/docs/test/golden-outputs/p2-sinsa-r3/sinsa_trading_r3_basic.pptx
+++ b/docs/test/golden-outputs/p2-sinsa-r3/sinsa_trading_r3_basic.pptx
@@ -2021,7 +2021,7 @@
                 <a:ea typeface="맑은 고딕" pitchFamily="34" charset="-122"/>
                 <a:cs typeface="맑은 고딕" pitchFamily="34" charset="-120"/>
               </a:rPr>
-              <a:t>2026.09.22  |  담당자  |  CREDEAL</a:t>
+              <a:t>2026.09.23  |  담당자  |  CREDEAL</a:t>
             </a:r>
             <a:endParaRPr lang="en-US" sz="900" dirty="0"/>
           </a:p>

--- a/docs/test/golden-outputs/p2-sinsa-r3/sinsa_trading_r3_basic.pptx
+++ b/docs/test/golden-outputs/p2-sinsa-r3/sinsa_trading_r3_basic.pptx
@@ -2021,7 +2021,7 @@
                 <a:ea typeface="맑은 고딕" pitchFamily="34" charset="-122"/>
                 <a:cs typeface="맑은 고딕" pitchFamily="34" charset="-120"/>
               </a:rPr>
-              <a:t>2026.09.23  |  담당자  |  CREDEAL</a:t>
+              <a:t>2026.09.24  |  담당자  |  CREDEAL</a:t>
             </a:r>
             <a:endParaRPr lang="en-US" sz="900" dirty="0"/>
           </a:p>

--- a/docs/test/golden-outputs/p2-sinsa-r3/sinsa_trading_r3_basic.pptx
+++ b/docs/test/golden-outputs/p2-sinsa-r3/sinsa_trading_r3_basic.pptx
@@ -2021,7 +2021,7 @@
                 <a:ea typeface="맑은 고딕" pitchFamily="34" charset="-122"/>
                 <a:cs typeface="맑은 고딕" pitchFamily="34" charset="-120"/>
               </a:rPr>
-              <a:t>2026.09.24  |  담당자  |  CREDEAL</a:t>
+              <a:t>2026.09.29  |  담당자  |  CREDEAL</a:t>
             </a:r>
             <a:endParaRPr lang="en-US" sz="900" dirty="0"/>
           </a:p>
@@ -7428,231 +7428,11 @@
         <p:spPr>
           <a:xfrm>
             <a:off x="502920" y="1371600"/>
-            <a:ext cx="11057839" cy="1188720"/>
+            <a:ext cx="11057839" cy="4389120"/>
           </a:xfrm>
           <a:prstGeom prst="roundRect">
             <a:avLst>
-              <a:gd name="adj" fmla="val 6154"/>
-            </a:avLst>
-          </a:prstGeom>
-          <a:solidFill>
-            <a:srgbClr val="F7FAFC"/>
-          </a:solidFill>
-          <a:ln w="9525">
-            <a:solidFill>
-              <a:srgbClr val="CBD5E0"/>
-            </a:solidFill>
-            <a:prstDash val="solid"/>
-          </a:ln>
-        </p:spPr>
-      </p:sp>
-      <p:sp>
-        <p:nvSpPr>
-          <p:cNvPr id="7" name="Text 5"/>
-          <p:cNvSpPr/>
-          <p:nvPr/>
-        </p:nvSpPr>
-        <p:spPr>
-          <a:xfrm>
-            <a:off x="868680" y="1508760"/>
-            <a:ext cx="3200400" cy="822960"/>
-          </a:xfrm>
-          <a:prstGeom prst="rect">
-            <a:avLst/>
-          </a:prstGeom>
-          <a:noFill/>
-          <a:ln/>
-        </p:spPr>
-        <p:txBody>
-          <a:bodyPr wrap="square" rtlCol="0" anchor="ctr"/>
-          <a:lstStyle/>
-          <a:p>
-            <a:pPr indent="0" marL="0">
-              <a:buNone/>
-            </a:pPr>
-            <a:r>
-              <a:rPr lang="en-US" sz="1600" b="1" dirty="0">
-                <a:solidFill>
-                  <a:srgbClr val="132A3A"/>
-                </a:solidFill>
-                <a:latin typeface="맑은 고딕" pitchFamily="34" charset="0"/>
-                <a:ea typeface="맑은 고딕" pitchFamily="34" charset="-122"/>
-                <a:cs typeface="맑은 고딕" pitchFamily="34" charset="-120"/>
-              </a:rPr>
-              <a:t>표면 임대수익률  =</a:t>
-            </a:r>
-            <a:endParaRPr lang="en-US" sz="1600" dirty="0"/>
-          </a:p>
-        </p:txBody>
-      </p:sp>
-      <p:sp>
-        <p:nvSpPr>
-          <p:cNvPr id="8" name="Text 6"/>
-          <p:cNvSpPr/>
-          <p:nvPr/>
-        </p:nvSpPr>
-        <p:spPr>
-          <a:xfrm>
-            <a:off x="4343400" y="1508760"/>
-            <a:ext cx="4572000" cy="365760"/>
-          </a:xfrm>
-          <a:prstGeom prst="rect">
-            <a:avLst/>
-          </a:prstGeom>
-          <a:noFill/>
-          <a:ln/>
-        </p:spPr>
-        <p:txBody>
-          <a:bodyPr wrap="square" rtlCol="0" anchor="b"/>
-          <a:lstStyle/>
-          <a:p>
-            <a:pPr algn="ctr" indent="0" marL="0">
-              <a:buNone/>
-            </a:pPr>
-            <a:r>
-              <a:rPr lang="en-US" sz="1300" b="1" dirty="0">
-                <a:solidFill>
-                  <a:srgbClr val="132A3A"/>
-                </a:solidFill>
-                <a:latin typeface="맑은 고딕" pitchFamily="34" charset="0"/>
-                <a:ea typeface="맑은 고딕" pitchFamily="34" charset="-122"/>
-                <a:cs typeface="맑은 고딕" pitchFamily="34" charset="-120"/>
-              </a:rPr>
-              <a:t>연간 임대료 합계 (관리비 제외)</a:t>
-            </a:r>
-            <a:endParaRPr lang="en-US" sz="1300" dirty="0"/>
-          </a:p>
-        </p:txBody>
-      </p:sp>
-      <p:sp>
-        <p:nvSpPr>
-          <p:cNvPr id="9" name="Shape 7"/>
-          <p:cNvSpPr/>
-          <p:nvPr/>
-        </p:nvSpPr>
-        <p:spPr>
-          <a:xfrm>
-            <a:off x="4526280" y="1920240"/>
-            <a:ext cx="4206240" cy="0"/>
-          </a:xfrm>
-          <a:prstGeom prst="line">
-            <a:avLst/>
-          </a:prstGeom>
-          <a:noFill/>
-          <a:ln w="25400">
-            <a:solidFill>
-              <a:srgbClr val="B8860B"/>
-            </a:solidFill>
-            <a:prstDash val="solid"/>
-          </a:ln>
-        </p:spPr>
-      </p:sp>
-      <p:sp>
-        <p:nvSpPr>
-          <p:cNvPr id="10" name="Text 8"/>
-          <p:cNvSpPr/>
-          <p:nvPr/>
-        </p:nvSpPr>
-        <p:spPr>
-          <a:xfrm>
-            <a:off x="4343400" y="1965960"/>
-            <a:ext cx="4572000" cy="365760"/>
-          </a:xfrm>
-          <a:prstGeom prst="rect">
-            <a:avLst/>
-          </a:prstGeom>
-          <a:noFill/>
-          <a:ln/>
-        </p:spPr>
-        <p:txBody>
-          <a:bodyPr wrap="square" rtlCol="0" anchor="t"/>
-          <a:lstStyle/>
-          <a:p>
-            <a:pPr algn="ctr" indent="0" marL="0">
-              <a:buNone/>
-            </a:pPr>
-            <a:r>
-              <a:rPr lang="en-US" sz="1300" b="1" dirty="0">
-                <a:solidFill>
-                  <a:srgbClr val="132A3A"/>
-                </a:solidFill>
-                <a:latin typeface="맑은 고딕" pitchFamily="34" charset="0"/>
-                <a:ea typeface="맑은 고딕" pitchFamily="34" charset="-122"/>
-                <a:cs typeface="맑은 고딕" pitchFamily="34" charset="-120"/>
-              </a:rPr>
-              <a:t>매매가  −  승계 보증금 합계</a:t>
-            </a:r>
-            <a:endParaRPr lang="en-US" sz="1300" dirty="0"/>
-          </a:p>
-        </p:txBody>
-      </p:sp>
-      <p:sp>
-        <p:nvSpPr>
-          <p:cNvPr id="11" name="Text 9"/>
-          <p:cNvSpPr/>
-          <p:nvPr/>
-        </p:nvSpPr>
-        <p:spPr>
-          <a:xfrm>
-            <a:off x="8726119" y="1508760"/>
-            <a:ext cx="2697480" cy="822960"/>
-          </a:xfrm>
-          <a:prstGeom prst="rect">
-            <a:avLst/>
-          </a:prstGeom>
-          <a:noFill/>
-          <a:ln/>
-        </p:spPr>
-        <p:txBody>
-          <a:bodyPr wrap="square" rtlCol="0" anchor="ctr"/>
-          <a:lstStyle/>
-          <a:p>
-            <a:pPr algn="r" indent="0" marL="0">
-              <a:buNone/>
-            </a:pPr>
-            <a:r>
-              <a:rPr lang="en-US" sz="1100" b="1" dirty="0">
-                <a:solidFill>
-                  <a:srgbClr val="B8860B"/>
-                </a:solidFill>
-                <a:latin typeface="맑은 고딕" pitchFamily="34" charset="0"/>
-                <a:ea typeface="맑은 고딕" pitchFamily="34" charset="-122"/>
-                <a:cs typeface="맑은 고딕" pitchFamily="34" charset="-120"/>
-              </a:rPr>
-              <a:t>0만원</a:t>
-            </a:r>
-            <a:pPr algn="r" indent="0" marL="0">
-              <a:buNone/>
-            </a:pPr>
-            <a:r>
-              <a:rPr lang="en-US" sz="1100" dirty="0">
-                <a:solidFill>
-                  <a:srgbClr val="5B6B73"/>
-                </a:solidFill>
-                <a:latin typeface="맑은 고딕" pitchFamily="34" charset="0"/>
-                <a:ea typeface="맑은 고딕" pitchFamily="34" charset="-122"/>
-                <a:cs typeface="맑은 고딕" pitchFamily="34" charset="-120"/>
-              </a:rPr>
-              <a:t> ÷ (760.0억원 − 0만원)</a:t>
-            </a:r>
-            <a:endParaRPr lang="en-US" sz="1100" dirty="0"/>
-          </a:p>
-        </p:txBody>
-      </p:sp>
-      <p:sp>
-        <p:nvSpPr>
-          <p:cNvPr id="12" name="Shape 10"/>
-          <p:cNvSpPr/>
-          <p:nvPr/>
-        </p:nvSpPr>
-        <p:spPr>
-          <a:xfrm>
-            <a:off x="502920" y="2834640"/>
-            <a:ext cx="11057839" cy="3063240"/>
-          </a:xfrm>
-          <a:prstGeom prst="roundRect">
-            <a:avLst>
-              <a:gd name="adj" fmla="val 2388"/>
+              <a:gd name="adj" fmla="val 1667"/>
             </a:avLst>
           </a:prstGeom>
           <a:solidFill>
@@ -7668,36 +7448,36 @@
       </p:sp>
       <p:sp>
         <p:nvSpPr>
-          <p:cNvPr id="13" name="Shape 11"/>
-          <p:cNvSpPr/>
-          <p:nvPr/>
-        </p:nvSpPr>
-        <p:spPr>
-          <a:xfrm>
-            <a:off x="685800" y="3017520"/>
-            <a:ext cx="1280160" cy="329184"/>
+          <p:cNvPr id="7" name="Shape 5"/>
+          <p:cNvSpPr/>
+          <p:nvPr/>
+        </p:nvSpPr>
+        <p:spPr>
+          <a:xfrm>
+            <a:off x="731520" y="1600200"/>
+            <a:ext cx="10600639" cy="1005840"/>
           </a:xfrm>
           <a:prstGeom prst="roundRect">
             <a:avLst>
-              <a:gd name="adj" fmla="val 11111"/>
+              <a:gd name="adj" fmla="val 7273"/>
             </a:avLst>
           </a:prstGeom>
           <a:solidFill>
-            <a:srgbClr val="F3F6F7"/>
+            <a:srgbClr val="132A3A"/>
           </a:solidFill>
           <a:ln/>
         </p:spPr>
       </p:sp>
       <p:sp>
         <p:nvSpPr>
-          <p:cNvPr id="14" name="Text 12"/>
-          <p:cNvSpPr/>
-          <p:nvPr/>
-        </p:nvSpPr>
-        <p:spPr>
-          <a:xfrm>
-            <a:off x="685800" y="3017520"/>
-            <a:ext cx="1280160" cy="329184"/>
+          <p:cNvPr id="8" name="Text 6"/>
+          <p:cNvSpPr/>
+          <p:nvPr/>
+        </p:nvSpPr>
+        <p:spPr>
+          <a:xfrm>
+            <a:off x="960120" y="1600200"/>
+            <a:ext cx="2286000" cy="1005840"/>
           </a:xfrm>
           <a:prstGeom prst="rect">
             <a:avLst/>
@@ -7709,34 +7489,34 @@
           <a:bodyPr wrap="square" rtlCol="0" anchor="ctr"/>
           <a:lstStyle/>
           <a:p>
-            <a:pPr algn="ctr" indent="0" marL="0">
-              <a:buNone/>
-            </a:pPr>
-            <a:r>
-              <a:rPr lang="en-US" sz="1000" b="1" dirty="0">
-                <a:solidFill>
-                  <a:srgbClr val="132A3A"/>
-                </a:solidFill>
-                <a:latin typeface="맑은 고딕" pitchFamily="34" charset="0"/>
-                <a:ea typeface="맑은 고딕" pitchFamily="34" charset="-122"/>
-                <a:cs typeface="맑은 고딕" pitchFamily="34" charset="-120"/>
-              </a:rPr>
-              <a:t>As-Is (현재)</a:t>
-            </a:r>
-            <a:endParaRPr lang="en-US" sz="1000" dirty="0"/>
-          </a:p>
-        </p:txBody>
-      </p:sp>
-      <p:sp>
-        <p:nvSpPr>
-          <p:cNvPr id="15" name="Text 13"/>
-          <p:cNvSpPr/>
-          <p:nvPr/>
-        </p:nvSpPr>
-        <p:spPr>
-          <a:xfrm>
-            <a:off x="777240" y="3520440"/>
-            <a:ext cx="2743200" cy="402336"/>
+            <a:pPr indent="0" marL="0">
+              <a:buNone/>
+            </a:pPr>
+            <a:r>
+              <a:rPr lang="en-US" sz="1600" b="1" dirty="0">
+                <a:solidFill>
+                  <a:srgbClr val="FFFFFF"/>
+                </a:solidFill>
+                <a:latin typeface="맑은 고딕" pitchFamily="34" charset="0"/>
+                <a:ea typeface="맑은 고딕" pitchFamily="34" charset="-122"/>
+                <a:cs typeface="맑은 고딕" pitchFamily="34" charset="-120"/>
+              </a:rPr>
+              <a:t>수익률</a:t>
+            </a:r>
+            <a:endParaRPr lang="en-US" sz="1600" dirty="0"/>
+          </a:p>
+        </p:txBody>
+      </p:sp>
+      <p:sp>
+        <p:nvSpPr>
+          <p:cNvPr id="9" name="Text 7"/>
+          <p:cNvSpPr/>
+          <p:nvPr/>
+        </p:nvSpPr>
+        <p:spPr>
+          <a:xfrm>
+            <a:off x="8360359" y="1600200"/>
+            <a:ext cx="2743200" cy="1005840"/>
           </a:xfrm>
           <a:prstGeom prst="rect">
             <a:avLst/>
@@ -7748,73 +7528,34 @@
           <a:bodyPr wrap="square" rtlCol="0" anchor="ctr"/>
           <a:lstStyle/>
           <a:p>
-            <a:pPr indent="0" marL="0">
-              <a:buNone/>
-            </a:pPr>
-            <a:r>
-              <a:rPr lang="en-US" sz="1100" dirty="0">
-                <a:solidFill>
-                  <a:srgbClr val="5B6B73"/>
-                </a:solidFill>
-                <a:latin typeface="맑은 고딕" pitchFamily="34" charset="0"/>
-                <a:ea typeface="맑은 고딕" pitchFamily="34" charset="-122"/>
-                <a:cs typeface="맑은 고딕" pitchFamily="34" charset="-120"/>
-              </a:rPr>
-              <a:t>연간 임대료</a:t>
-            </a:r>
-            <a:endParaRPr lang="en-US" sz="1100" dirty="0"/>
-          </a:p>
-        </p:txBody>
-      </p:sp>
-      <p:sp>
-        <p:nvSpPr>
-          <p:cNvPr id="16" name="Text 14"/>
-          <p:cNvSpPr/>
-          <p:nvPr/>
-        </p:nvSpPr>
-        <p:spPr>
-          <a:xfrm>
-            <a:off x="9457639" y="3520440"/>
-            <a:ext cx="1828800" cy="402336"/>
-          </a:xfrm>
-          <a:prstGeom prst="rect">
-            <a:avLst/>
-          </a:prstGeom>
-          <a:noFill/>
-          <a:ln/>
-        </p:spPr>
-        <p:txBody>
-          <a:bodyPr wrap="square" rtlCol="0" anchor="ctr"/>
-          <a:lstStyle/>
-          <a:p>
             <a:pPr algn="r" indent="0" marL="0">
               <a:buNone/>
             </a:pPr>
             <a:r>
-              <a:rPr lang="en-US" sz="1200" b="1" dirty="0">
-                <a:solidFill>
-                  <a:srgbClr val="132A3A"/>
+              <a:rPr lang="en-US" sz="2800" b="1" dirty="0">
+                <a:solidFill>
+                  <a:srgbClr val="B8860B"/>
                 </a:solidFill>
                 <a:latin typeface="Arial" pitchFamily="34" charset="0"/>
                 <a:ea typeface="Arial" pitchFamily="34" charset="-122"/>
                 <a:cs typeface="Arial" pitchFamily="34" charset="-120"/>
               </a:rPr>
-              <a:t>0만원</a:t>
-            </a:r>
-            <a:endParaRPr lang="en-US" sz="1200" dirty="0"/>
-          </a:p>
-        </p:txBody>
-      </p:sp>
-      <p:sp>
-        <p:nvSpPr>
-          <p:cNvPr id="17" name="Text 15"/>
-          <p:cNvSpPr/>
-          <p:nvPr/>
-        </p:nvSpPr>
-        <p:spPr>
-          <a:xfrm>
-            <a:off x="777240" y="3922776"/>
-            <a:ext cx="2743200" cy="402336"/>
+              <a:t>0.00%</a:t>
+            </a:r>
+            <a:endParaRPr lang="en-US" sz="2800" dirty="0"/>
+          </a:p>
+        </p:txBody>
+      </p:sp>
+      <p:sp>
+        <p:nvSpPr>
+          <p:cNvPr id="10" name="Text 8"/>
+          <p:cNvSpPr/>
+          <p:nvPr/>
+        </p:nvSpPr>
+        <p:spPr>
+          <a:xfrm>
+            <a:off x="822960" y="2834640"/>
+            <a:ext cx="2743200" cy="347472"/>
           </a:xfrm>
           <a:prstGeom prst="rect">
             <a:avLst/>
@@ -7838,7 +7579,7 @@
                 <a:ea typeface="맑은 고딕" pitchFamily="34" charset="-122"/>
                 <a:cs typeface="맑은 고딕" pitchFamily="34" charset="-120"/>
               </a:rPr>
-              <a:t>승계 보증금</a:t>
+              <a:t>연간 임대수입</a:t>
             </a:r>
             <a:endParaRPr lang="en-US" sz="1100" dirty="0"/>
           </a:p>
@@ -7846,14 +7587,14 @@
       </p:sp>
       <p:sp>
         <p:nvSpPr>
-          <p:cNvPr id="18" name="Text 16"/>
-          <p:cNvSpPr/>
-          <p:nvPr/>
-        </p:nvSpPr>
-        <p:spPr>
-          <a:xfrm>
-            <a:off x="9457639" y="3922776"/>
-            <a:ext cx="1828800" cy="402336"/>
+          <p:cNvPr id="11" name="Text 9"/>
+          <p:cNvSpPr/>
+          <p:nvPr/>
+        </p:nvSpPr>
+        <p:spPr>
+          <a:xfrm>
+            <a:off x="9000439" y="2834640"/>
+            <a:ext cx="2194560" cy="347472"/>
           </a:xfrm>
           <a:prstGeom prst="rect">
             <a:avLst/>
@@ -7869,7 +7610,7 @@
               <a:buNone/>
             </a:pPr>
             <a:r>
-              <a:rPr lang="en-US" sz="1200" b="1" dirty="0">
+              <a:rPr lang="en-US" sz="1200" dirty="0">
                 <a:solidFill>
                   <a:srgbClr val="132A3A"/>
                 </a:solidFill>
@@ -7885,14 +7626,37 @@
       </p:sp>
       <p:sp>
         <p:nvSpPr>
-          <p:cNvPr id="19" name="Text 17"/>
-          <p:cNvSpPr/>
-          <p:nvPr/>
-        </p:nvSpPr>
-        <p:spPr>
-          <a:xfrm>
-            <a:off x="777240" y="4325112"/>
-            <a:ext cx="2743200" cy="402336"/>
+          <p:cNvPr id="12" name="Shape 10"/>
+          <p:cNvSpPr/>
+          <p:nvPr/>
+        </p:nvSpPr>
+        <p:spPr>
+          <a:xfrm>
+            <a:off x="731520" y="3182112"/>
+            <a:ext cx="10600639" cy="0"/>
+          </a:xfrm>
+          <a:prstGeom prst="line">
+            <a:avLst/>
+          </a:prstGeom>
+          <a:noFill/>
+          <a:ln w="6350">
+            <a:solidFill>
+              <a:srgbClr val="E8E8E8"/>
+            </a:solidFill>
+            <a:prstDash val="solid"/>
+          </a:ln>
+        </p:spPr>
+      </p:sp>
+      <p:sp>
+        <p:nvSpPr>
+          <p:cNvPr id="13" name="Text 11"/>
+          <p:cNvSpPr/>
+          <p:nvPr/>
+        </p:nvSpPr>
+        <p:spPr>
+          <a:xfrm>
+            <a:off x="822960" y="3182112"/>
+            <a:ext cx="2743200" cy="347472"/>
           </a:xfrm>
           <a:prstGeom prst="rect">
             <a:avLst/>
@@ -7916,7 +7680,7 @@
                 <a:ea typeface="맑은 고딕" pitchFamily="34" charset="-122"/>
                 <a:cs typeface="맑은 고딕" pitchFamily="34" charset="-120"/>
               </a:rPr>
-              <a:t>매매가</a:t>
+              <a:t>승계 보증금</a:t>
             </a:r>
             <a:endParaRPr lang="en-US" sz="1100" dirty="0"/>
           </a:p>
@@ -7924,14 +7688,14 @@
       </p:sp>
       <p:sp>
         <p:nvSpPr>
-          <p:cNvPr id="20" name="Text 18"/>
-          <p:cNvSpPr/>
-          <p:nvPr/>
-        </p:nvSpPr>
-        <p:spPr>
-          <a:xfrm>
-            <a:off x="9457639" y="4325112"/>
-            <a:ext cx="1828800" cy="402336"/>
+          <p:cNvPr id="14" name="Text 12"/>
+          <p:cNvSpPr/>
+          <p:nvPr/>
+        </p:nvSpPr>
+        <p:spPr>
+          <a:xfrm>
+            <a:off x="9000439" y="3182112"/>
+            <a:ext cx="2194560" cy="347472"/>
           </a:xfrm>
           <a:prstGeom prst="rect">
             <a:avLst/>
@@ -7947,7 +7711,7 @@
               <a:buNone/>
             </a:pPr>
             <a:r>
-              <a:rPr lang="en-US" sz="1200" b="1" dirty="0">
+              <a:rPr lang="en-US" sz="1200" dirty="0">
                 <a:solidFill>
                   <a:srgbClr val="132A3A"/>
                 </a:solidFill>
@@ -7955,7 +7719,7 @@
                 <a:ea typeface="Arial" pitchFamily="34" charset="-122"/>
                 <a:cs typeface="Arial" pitchFamily="34" charset="-120"/>
               </a:rPr>
-              <a:t>760.0억원</a:t>
+              <a:t>0만원</a:t>
             </a:r>
             <a:endParaRPr lang="en-US" sz="1200" dirty="0"/>
           </a:p>
@@ -7963,36 +7727,37 @@
       </p:sp>
       <p:sp>
         <p:nvSpPr>
-          <p:cNvPr id="21" name="Shape 19"/>
-          <p:cNvSpPr/>
-          <p:nvPr/>
-        </p:nvSpPr>
-        <p:spPr>
-          <a:xfrm>
-            <a:off x="685800" y="4837176"/>
-            <a:ext cx="10692079" cy="594360"/>
-          </a:xfrm>
-          <a:prstGeom prst="roundRect">
-            <a:avLst>
-              <a:gd name="adj" fmla="val 9231"/>
-            </a:avLst>
-          </a:prstGeom>
-          <a:solidFill>
-            <a:srgbClr val="132A3A"/>
-          </a:solidFill>
-          <a:ln/>
-        </p:spPr>
-      </p:sp>
-      <p:sp>
-        <p:nvSpPr>
-          <p:cNvPr id="22" name="Text 20"/>
-          <p:cNvSpPr/>
-          <p:nvPr/>
-        </p:nvSpPr>
-        <p:spPr>
-          <a:xfrm>
-            <a:off x="868680" y="4837176"/>
-            <a:ext cx="2286000" cy="594360"/>
+          <p:cNvPr id="15" name="Shape 13"/>
+          <p:cNvSpPr/>
+          <p:nvPr/>
+        </p:nvSpPr>
+        <p:spPr>
+          <a:xfrm>
+            <a:off x="731520" y="3529584"/>
+            <a:ext cx="10600639" cy="0"/>
+          </a:xfrm>
+          <a:prstGeom prst="line">
+            <a:avLst/>
+          </a:prstGeom>
+          <a:noFill/>
+          <a:ln w="6350">
+            <a:solidFill>
+              <a:srgbClr val="E8E8E8"/>
+            </a:solidFill>
+            <a:prstDash val="solid"/>
+          </a:ln>
+        </p:spPr>
+      </p:sp>
+      <p:sp>
+        <p:nvSpPr>
+          <p:cNvPr id="16" name="Text 14"/>
+          <p:cNvSpPr/>
+          <p:nvPr/>
+        </p:nvSpPr>
+        <p:spPr>
+          <a:xfrm>
+            <a:off x="822960" y="3529584"/>
+            <a:ext cx="2743200" cy="347472"/>
           </a:xfrm>
           <a:prstGeom prst="rect">
             <a:avLst/>
@@ -8008,30 +7773,30 @@
               <a:buNone/>
             </a:pPr>
             <a:r>
-              <a:rPr lang="en-US" sz="1200" b="1" dirty="0">
-                <a:solidFill>
-                  <a:srgbClr val="FFFFFF"/>
-                </a:solidFill>
-                <a:latin typeface="맑은 고딕" pitchFamily="34" charset="0"/>
-                <a:ea typeface="맑은 고딕" pitchFamily="34" charset="-122"/>
-                <a:cs typeface="맑은 고딕" pitchFamily="34" charset="-120"/>
-              </a:rPr>
-              <a:t>Cap Rate</a:t>
-            </a:r>
-            <a:endParaRPr lang="en-US" sz="1200" dirty="0"/>
-          </a:p>
-        </p:txBody>
-      </p:sp>
-      <p:sp>
-        <p:nvSpPr>
-          <p:cNvPr id="23" name="Text 21"/>
-          <p:cNvSpPr/>
-          <p:nvPr/>
-        </p:nvSpPr>
-        <p:spPr>
-          <a:xfrm>
-            <a:off x="9183319" y="4837176"/>
-            <a:ext cx="2011680" cy="594360"/>
+              <a:rPr lang="en-US" sz="1100" dirty="0">
+                <a:solidFill>
+                  <a:srgbClr val="5B6B73"/>
+                </a:solidFill>
+                <a:latin typeface="맑은 고딕" pitchFamily="34" charset="0"/>
+                <a:ea typeface="맑은 고딕" pitchFamily="34" charset="-122"/>
+                <a:cs typeface="맑은 고딕" pitchFamily="34" charset="-120"/>
+              </a:rPr>
+              <a:t>매매가</a:t>
+            </a:r>
+            <a:endParaRPr lang="en-US" sz="1100" dirty="0"/>
+          </a:p>
+        </p:txBody>
+      </p:sp>
+      <p:sp>
+        <p:nvSpPr>
+          <p:cNvPr id="17" name="Text 15"/>
+          <p:cNvSpPr/>
+          <p:nvPr/>
+        </p:nvSpPr>
+        <p:spPr>
+          <a:xfrm>
+            <a:off x="9000439" y="3529584"/>
+            <a:ext cx="2194560" cy="347472"/>
           </a:xfrm>
           <a:prstGeom prst="rect">
             <a:avLst/>
@@ -8047,23 +7812,147 @@
               <a:buNone/>
             </a:pPr>
             <a:r>
-              <a:rPr lang="en-US" sz="2200" b="1" dirty="0">
-                <a:solidFill>
-                  <a:srgbClr val="FFFFFF"/>
+              <a:rPr lang="en-US" sz="1200" dirty="0">
+                <a:solidFill>
+                  <a:srgbClr val="132A3A"/>
                 </a:solidFill>
                 <a:latin typeface="Arial" pitchFamily="34" charset="0"/>
                 <a:ea typeface="Arial" pitchFamily="34" charset="-122"/>
                 <a:cs typeface="Arial" pitchFamily="34" charset="-120"/>
               </a:rPr>
-              <a:t>0.00%</a:t>
-            </a:r>
-            <a:endParaRPr lang="en-US" sz="2200" dirty="0"/>
-          </a:p>
-        </p:txBody>
-      </p:sp>
-      <p:sp>
-        <p:nvSpPr>
-          <p:cNvPr id="24" name="Text 22"/>
+              <a:t>760.0억원</a:t>
+            </a:r>
+            <a:endParaRPr lang="en-US" sz="1200" dirty="0"/>
+          </a:p>
+        </p:txBody>
+      </p:sp>
+      <p:sp>
+        <p:nvSpPr>
+          <p:cNvPr id="18" name="Shape 16"/>
+          <p:cNvSpPr/>
+          <p:nvPr/>
+        </p:nvSpPr>
+        <p:spPr>
+          <a:xfrm>
+            <a:off x="731520" y="3877056"/>
+            <a:ext cx="10600639" cy="0"/>
+          </a:xfrm>
+          <a:prstGeom prst="line">
+            <a:avLst/>
+          </a:prstGeom>
+          <a:noFill/>
+          <a:ln w="6350">
+            <a:solidFill>
+              <a:srgbClr val="E8E8E8"/>
+            </a:solidFill>
+            <a:prstDash val="solid"/>
+          </a:ln>
+        </p:spPr>
+      </p:sp>
+      <p:sp>
+        <p:nvSpPr>
+          <p:cNvPr id="19" name="Text 17"/>
+          <p:cNvSpPr/>
+          <p:nvPr/>
+        </p:nvSpPr>
+        <p:spPr>
+          <a:xfrm>
+            <a:off x="822960" y="3877056"/>
+            <a:ext cx="2743200" cy="347472"/>
+          </a:xfrm>
+          <a:prstGeom prst="rect">
+            <a:avLst/>
+          </a:prstGeom>
+          <a:noFill/>
+          <a:ln/>
+        </p:spPr>
+        <p:txBody>
+          <a:bodyPr wrap="square" rtlCol="0" anchor="ctr"/>
+          <a:lstStyle/>
+          <a:p>
+            <a:pPr indent="0" marL="0">
+              <a:buNone/>
+            </a:pPr>
+            <a:r>
+              <a:rPr lang="en-US" sz="1100" dirty="0">
+                <a:solidFill>
+                  <a:srgbClr val="5B6B73"/>
+                </a:solidFill>
+                <a:latin typeface="맑은 고딕" pitchFamily="34" charset="0"/>
+                <a:ea typeface="맑은 고딕" pitchFamily="34" charset="-122"/>
+                <a:cs typeface="맑은 고딕" pitchFamily="34" charset="-120"/>
+              </a:rPr>
+              <a:t>순투자금 (매매가 − 보증금)</a:t>
+            </a:r>
+            <a:endParaRPr lang="en-US" sz="1100" dirty="0"/>
+          </a:p>
+        </p:txBody>
+      </p:sp>
+      <p:sp>
+        <p:nvSpPr>
+          <p:cNvPr id="20" name="Text 18"/>
+          <p:cNvSpPr/>
+          <p:nvPr/>
+        </p:nvSpPr>
+        <p:spPr>
+          <a:xfrm>
+            <a:off x="9000439" y="3877056"/>
+            <a:ext cx="2194560" cy="347472"/>
+          </a:xfrm>
+          <a:prstGeom prst="rect">
+            <a:avLst/>
+          </a:prstGeom>
+          <a:noFill/>
+          <a:ln/>
+        </p:spPr>
+        <p:txBody>
+          <a:bodyPr wrap="square" rtlCol="0" anchor="ctr"/>
+          <a:lstStyle/>
+          <a:p>
+            <a:pPr algn="r" indent="0" marL="0">
+              <a:buNone/>
+            </a:pPr>
+            <a:r>
+              <a:rPr lang="en-US" sz="1200" b="1" dirty="0">
+                <a:solidFill>
+                  <a:srgbClr val="B8860B"/>
+                </a:solidFill>
+                <a:latin typeface="Arial" pitchFamily="34" charset="0"/>
+                <a:ea typeface="Arial" pitchFamily="34" charset="-122"/>
+                <a:cs typeface="Arial" pitchFamily="34" charset="-120"/>
+              </a:rPr>
+              <a:t>760.0억원</a:t>
+            </a:r>
+            <a:endParaRPr lang="en-US" sz="1200" dirty="0"/>
+          </a:p>
+        </p:txBody>
+      </p:sp>
+      <p:sp>
+        <p:nvSpPr>
+          <p:cNvPr id="21" name="Shape 19"/>
+          <p:cNvSpPr/>
+          <p:nvPr/>
+        </p:nvSpPr>
+        <p:spPr>
+          <a:xfrm>
+            <a:off x="731520" y="4224528"/>
+            <a:ext cx="10600639" cy="0"/>
+          </a:xfrm>
+          <a:prstGeom prst="line">
+            <a:avLst/>
+          </a:prstGeom>
+          <a:noFill/>
+          <a:ln w="6350">
+            <a:solidFill>
+              <a:srgbClr val="E8E8E8"/>
+            </a:solidFill>
+            <a:prstDash val="solid"/>
+          </a:ln>
+        </p:spPr>
+      </p:sp>
+      <p:sp>
+        <p:nvSpPr>
+          <p:cNvPr id="22" name="Text 20"/>
           <p:cNvSpPr/>
           <p:nvPr/>
         </p:nvSpPr>
@@ -8102,7 +7991,7 @@
       </p:sp>
       <p:sp>
         <p:nvSpPr>
-          <p:cNvPr id="25" name="Text 23"/>
+          <p:cNvPr id="23" name="Text 21"/>
           <p:cNvSpPr/>
           <p:nvPr/>
         </p:nvSpPr>

--- a/docs/test/golden-outputs/p2-sinsa-r3/sinsa_trading_r3_basic.pptx
+++ b/docs/test/golden-outputs/p2-sinsa-r3/sinsa_trading_r3_basic.pptx
@@ -12,9 +12,11 @@
     <p:sldId id="260" r:id="rId6"/>
     <p:sldId id="261" r:id="rId7"/>
     <p:sldId id="262" r:id="rId8"/>
+    <p:sldId id="263" r:id="rId9"/>
+    <p:sldId id="264" r:id="rId10"/>
   </p:sldIdLst>
   <p:notesMasterIdLst>
-    <p:notesMasterId r:id="rId9"/>
+    <p:notesMasterId r:id="rId11"/>
   </p:notesMasterIdLst>
   <p:sldSz cx="12192000" cy="6858000"/>
   <p:notesSz cx="6858000" cy="12192000"/>
@@ -1060,6 +1062,182 @@
             <a:fld id="{F7021451-1387-4CA6-816F-3879F97B5CBC}" type="slidenum">
               <a:rPr lang="en-US"/>
               <a:t>7</a:t>
+            </a:fld>
+            <a:endParaRPr lang="en-US"/>
+          </a:p>
+        </p:txBody>
+      </p:sp>
+    </p:spTree>
+    <p:extLst>
+      <p:ext uri="{BB962C8B-B14F-4D97-AF65-F5344CB8AC3E}">
+        <p14:creationId xmlns:p14="http://schemas.microsoft.com/office/powerpoint/2010/main" val="1024086991"/>
+      </p:ext>
+    </p:extLst>
+  </p:cSld>
+  <p:clrMapOvr>
+    <a:masterClrMapping/>
+  </p:clrMapOvr>
+</p:notes>
+</file>
+
+<file path=ppt/notesSlides/notesSlide8.xml><?xml version="1.0" encoding="utf-8"?>
+<p:notes xmlns:a="http://schemas.openxmlformats.org/drawingml/2006/main" xmlns:r="http://schemas.openxmlformats.org/officeDocument/2006/relationships" xmlns:p="http://schemas.openxmlformats.org/presentationml/2006/main">
+  <p:cSld>
+    <p:spTree>
+      <p:nvGrpSpPr>
+        <p:cNvPr id="1" name=""/>
+        <p:cNvGrpSpPr/>
+        <p:nvPr/>
+      </p:nvGrpSpPr>
+      <p:grpSpPr>
+        <a:xfrm>
+          <a:off x="0" y="0"/>
+          <a:ext cx="0" cy="0"/>
+          <a:chOff x="0" y="0"/>
+          <a:chExt cx="0" cy="0"/>
+        </a:xfrm>
+      </p:grpSpPr>
+      <p:sp>
+        <p:nvSpPr>
+          <p:cNvPr id="2" name="Slide Image Placeholder 1"/>
+          <p:cNvSpPr>
+            <a:spLocks noGrp="1" noRot="1" noChangeAspect="1"/>
+          </p:cNvSpPr>
+          <p:nvPr>
+            <p:ph type="sldImg"/>
+          </p:nvPr>
+        </p:nvSpPr>
+        <p:spPr/>
+      </p:sp>
+      <p:sp>
+        <p:nvSpPr>
+          <p:cNvPr id="3" name="Notes Placeholder 2"/>
+          <p:cNvSpPr>
+            <a:spLocks noGrp="1"/>
+          </p:cNvSpPr>
+          <p:nvPr>
+            <p:ph type="body" idx="1"/>
+          </p:nvPr>
+        </p:nvSpPr>
+        <p:spPr/>
+        <p:txBody>
+          <a:bodyPr/>
+          <a:lstStyle/>
+          <a:p>
+            <a:r>
+              <a:rPr lang="en-US" dirty="0"/>
+              <a:t/>
+            </a:r>
+            <a:endParaRPr lang="en-US" dirty="0"/>
+          </a:p>
+        </p:txBody>
+      </p:sp>
+      <p:sp>
+        <p:nvSpPr>
+          <p:cNvPr id="4" name="Slide Number Placeholder 3"/>
+          <p:cNvSpPr>
+            <a:spLocks noGrp="1"/>
+          </p:cNvSpPr>
+          <p:nvPr>
+            <p:ph type="sldNum" sz="quarter" idx="10"/>
+          </p:nvPr>
+        </p:nvSpPr>
+        <p:spPr/>
+        <p:txBody>
+          <a:bodyPr/>
+          <a:lstStyle/>
+          <a:p>
+            <a:fld id="{F7021451-1387-4CA6-816F-3879F97B5CBC}" type="slidenum">
+              <a:rPr lang="en-US"/>
+              <a:t>8</a:t>
+            </a:fld>
+            <a:endParaRPr lang="en-US"/>
+          </a:p>
+        </p:txBody>
+      </p:sp>
+    </p:spTree>
+    <p:extLst>
+      <p:ext uri="{BB962C8B-B14F-4D97-AF65-F5344CB8AC3E}">
+        <p14:creationId xmlns:p14="http://schemas.microsoft.com/office/powerpoint/2010/main" val="1024086991"/>
+      </p:ext>
+    </p:extLst>
+  </p:cSld>
+  <p:clrMapOvr>
+    <a:masterClrMapping/>
+  </p:clrMapOvr>
+</p:notes>
+</file>
+
+<file path=ppt/notesSlides/notesSlide9.xml><?xml version="1.0" encoding="utf-8"?>
+<p:notes xmlns:a="http://schemas.openxmlformats.org/drawingml/2006/main" xmlns:r="http://schemas.openxmlformats.org/officeDocument/2006/relationships" xmlns:p="http://schemas.openxmlformats.org/presentationml/2006/main">
+  <p:cSld>
+    <p:spTree>
+      <p:nvGrpSpPr>
+        <p:cNvPr id="1" name=""/>
+        <p:cNvGrpSpPr/>
+        <p:nvPr/>
+      </p:nvGrpSpPr>
+      <p:grpSpPr>
+        <a:xfrm>
+          <a:off x="0" y="0"/>
+          <a:ext cx="0" cy="0"/>
+          <a:chOff x="0" y="0"/>
+          <a:chExt cx="0" cy="0"/>
+        </a:xfrm>
+      </p:grpSpPr>
+      <p:sp>
+        <p:nvSpPr>
+          <p:cNvPr id="2" name="Slide Image Placeholder 1"/>
+          <p:cNvSpPr>
+            <a:spLocks noGrp="1" noRot="1" noChangeAspect="1"/>
+          </p:cNvSpPr>
+          <p:nvPr>
+            <p:ph type="sldImg"/>
+          </p:nvPr>
+        </p:nvSpPr>
+        <p:spPr/>
+      </p:sp>
+      <p:sp>
+        <p:nvSpPr>
+          <p:cNvPr id="3" name="Notes Placeholder 2"/>
+          <p:cNvSpPr>
+            <a:spLocks noGrp="1"/>
+          </p:cNvSpPr>
+          <p:nvPr>
+            <p:ph type="body" idx="1"/>
+          </p:nvPr>
+        </p:nvSpPr>
+        <p:spPr/>
+        <p:txBody>
+          <a:bodyPr/>
+          <a:lstStyle/>
+          <a:p>
+            <a:r>
+              <a:rPr lang="en-US" dirty="0"/>
+              <a:t/>
+            </a:r>
+            <a:endParaRPr lang="en-US" dirty="0"/>
+          </a:p>
+        </p:txBody>
+      </p:sp>
+      <p:sp>
+        <p:nvSpPr>
+          <p:cNvPr id="4" name="Slide Number Placeholder 3"/>
+          <p:cNvSpPr>
+            <a:spLocks noGrp="1"/>
+          </p:cNvSpPr>
+          <p:nvPr>
+            <p:ph type="sldNum" sz="quarter" idx="10"/>
+          </p:nvPr>
+        </p:nvSpPr>
+        <p:spPr/>
+        <p:txBody>
+          <a:bodyPr/>
+          <a:lstStyle/>
+          <a:p>
+            <a:fld id="{F7021451-1387-4CA6-816F-3879F97B5CBC}" type="slidenum">
+              <a:rPr lang="en-US"/>
+              <a:t>9</a:t>
             </a:fld>
             <a:endParaRPr lang="en-US"/>
           </a:p>
@@ -1560,7 +1738,7 @@
         </p:nvSpPr>
         <p:spPr>
           <a:xfrm>
-            <a:off x="502920" y="475488"/>
+            <a:off x="566928" y="475488"/>
             <a:ext cx="2743200" cy="365760"/>
           </a:xfrm>
           <a:prstGeom prst="rect">
@@ -1613,7 +1791,7 @@
         </p:nvSpPr>
         <p:spPr>
           <a:xfrm>
-            <a:off x="502920" y="2029968"/>
+            <a:off x="566928" y="2029968"/>
             <a:ext cx="7315200" cy="274320"/>
           </a:xfrm>
           <a:prstGeom prst="rect">
@@ -1652,8 +1830,8 @@
         </p:nvSpPr>
         <p:spPr>
           <a:xfrm>
-            <a:off x="502920" y="2304288"/>
-            <a:ext cx="7315200" cy="731520"/>
+            <a:off x="566928" y="2304288"/>
+            <a:ext cx="7315200" cy="1051560"/>
           </a:xfrm>
           <a:prstGeom prst="rect">
             <a:avLst/>
@@ -1669,7 +1847,7 @@
               <a:buNone/>
             </a:pPr>
             <a:r>
-              <a:rPr lang="en-US" sz="3000" b="1" dirty="0">
+              <a:rPr lang="en-US" sz="2600" b="1" dirty="0">
                 <a:solidFill>
                   <a:srgbClr val="FFFFFF"/>
                 </a:solidFill>
@@ -1679,7 +1857,7 @@
               </a:rPr>
               <a:t>서울특별시 강남구 신사동 590 투자설명서</a:t>
             </a:r>
-            <a:endParaRPr lang="en-US" sz="3000" dirty="0"/>
+            <a:endParaRPr lang="en-US" sz="2600" dirty="0"/>
           </a:p>
         </p:txBody>
       </p:sp>
@@ -1691,7 +1869,7 @@
         </p:nvSpPr>
         <p:spPr>
           <a:xfrm>
-            <a:off x="502920" y="3090672"/>
+            <a:off x="566928" y="3410712"/>
             <a:ext cx="7315200" cy="329184"/>
           </a:xfrm>
           <a:prstGeom prst="rect">
@@ -1730,7 +1908,7 @@
         </p:nvSpPr>
         <p:spPr>
           <a:xfrm>
-            <a:off x="502920" y="3474720"/>
+            <a:off x="566928" y="3794760"/>
             <a:ext cx="7315200" cy="256032"/>
           </a:xfrm>
           <a:prstGeom prst="rect">
@@ -1769,7 +1947,7 @@
         </p:nvSpPr>
         <p:spPr>
           <a:xfrm>
-            <a:off x="502920" y="3895344"/>
+            <a:off x="566928" y="4215384"/>
             <a:ext cx="1243584" cy="292608"/>
           </a:xfrm>
           <a:prstGeom prst="roundRect">
@@ -1791,7 +1969,7 @@
         </p:nvSpPr>
         <p:spPr>
           <a:xfrm>
-            <a:off x="502920" y="3895344"/>
+            <a:off x="566928" y="4215384"/>
             <a:ext cx="1243584" cy="292608"/>
           </a:xfrm>
           <a:prstGeom prst="rect">
@@ -1830,7 +2008,7 @@
         </p:nvSpPr>
         <p:spPr>
           <a:xfrm>
-            <a:off x="1837944" y="3895344"/>
+            <a:off x="1901952" y="4215384"/>
             <a:ext cx="1005840" cy="292608"/>
           </a:xfrm>
           <a:prstGeom prst="roundRect">
@@ -1852,7 +2030,7 @@
         </p:nvSpPr>
         <p:spPr>
           <a:xfrm>
-            <a:off x="1837944" y="3895344"/>
+            <a:off x="1901952" y="4215384"/>
             <a:ext cx="1005840" cy="292608"/>
           </a:xfrm>
           <a:prstGeom prst="rect">
@@ -1891,7 +2069,7 @@
         </p:nvSpPr>
         <p:spPr>
           <a:xfrm>
-            <a:off x="502920" y="4334256"/>
+            <a:off x="566928" y="4654296"/>
             <a:ext cx="6858000" cy="1051560"/>
           </a:xfrm>
           <a:prstGeom prst="roundRect">
@@ -1918,7 +2096,7 @@
         </p:nvSpPr>
         <p:spPr>
           <a:xfrm>
-            <a:off x="758952" y="4443984"/>
+            <a:off x="822960" y="4764024"/>
             <a:ext cx="6345936" cy="832104"/>
           </a:xfrm>
           <a:prstGeom prst="rect">
@@ -1957,7 +2135,7 @@
         </p:nvSpPr>
         <p:spPr>
           <a:xfrm>
-            <a:off x="502920" y="1700784"/>
+            <a:off x="566928" y="1700784"/>
             <a:ext cx="7315200" cy="256032"/>
           </a:xfrm>
           <a:prstGeom prst="rect">
@@ -1996,8 +2174,8 @@
         </p:nvSpPr>
         <p:spPr>
           <a:xfrm>
-            <a:off x="502920" y="6035040"/>
-            <a:ext cx="11057839" cy="274320"/>
+            <a:off x="566928" y="5943600"/>
+            <a:ext cx="11057839" cy="201168"/>
           </a:xfrm>
           <a:prstGeom prst="rect">
             <a:avLst/>
@@ -2021,7 +2199,7 @@
                 <a:ea typeface="맑은 고딕" pitchFamily="34" charset="-122"/>
                 <a:cs typeface="맑은 고딕" pitchFamily="34" charset="-120"/>
               </a:rPr>
-              <a:t>2026.09.29  |  담당자  |  CREDEAL</a:t>
+              <a:t>2026.10.02  |  담당자  |  CREDEAL</a:t>
             </a:r>
             <a:endParaRPr lang="en-US" sz="900" dirty="0"/>
           </a:p>
@@ -2035,7 +2213,7 @@
         </p:nvSpPr>
         <p:spPr>
           <a:xfrm>
-            <a:off x="502920" y="6382512"/>
+            <a:off x="566928" y="6382512"/>
             <a:ext cx="7315200" cy="219456"/>
           </a:xfrm>
           <a:prstGeom prst="rect">
@@ -2074,7 +2252,7 @@
         </p:nvSpPr>
         <p:spPr>
           <a:xfrm>
-            <a:off x="10774375" y="6382512"/>
+            <a:off x="10710367" y="6382512"/>
             <a:ext cx="914400" cy="219456"/>
           </a:xfrm>
           <a:prstGeom prst="rect">
@@ -2145,7 +2323,7 @@
         </p:nvSpPr>
         <p:spPr>
           <a:xfrm>
-            <a:off x="502920" y="457200"/>
+            <a:off x="566928" y="457200"/>
             <a:ext cx="384048" cy="384048"/>
           </a:xfrm>
           <a:prstGeom prst="ellipse">
@@ -2165,7 +2343,7 @@
         </p:nvSpPr>
         <p:spPr>
           <a:xfrm>
-            <a:off x="502920" y="457200"/>
+            <a:off x="566928" y="457200"/>
             <a:ext cx="384048" cy="384048"/>
           </a:xfrm>
           <a:prstGeom prst="rect">
@@ -2204,7 +2382,7 @@
         </p:nvSpPr>
         <p:spPr>
           <a:xfrm>
-            <a:off x="1069848" y="457200"/>
+            <a:off x="1133856" y="457200"/>
             <a:ext cx="10490911" cy="182880"/>
           </a:xfrm>
           <a:prstGeom prst="rect">
@@ -2243,7 +2421,7 @@
         </p:nvSpPr>
         <p:spPr>
           <a:xfrm>
-            <a:off x="1069848" y="640080"/>
+            <a:off x="1133856" y="640080"/>
             <a:ext cx="10490911" cy="365760"/>
           </a:xfrm>
           <a:prstGeom prst="rect">
@@ -2253,7 +2431,9 @@
           <a:ln/>
         </p:spPr>
         <p:txBody>
-          <a:bodyPr wrap="square" lIns="0" tIns="0" rIns="0" bIns="0" rtlCol="0" anchor="ctr"/>
+          <a:bodyPr wrap="square" lIns="0" tIns="0" rIns="0" bIns="0" rtlCol="0" anchor="ctr">
+            <a:normAutofit/>
+          </a:bodyPr>
           <a:lstStyle/>
           <a:p>
             <a:pPr indent="0" marL="0">
@@ -2282,7 +2462,7 @@
         </p:nvSpPr>
         <p:spPr>
           <a:xfrm>
-            <a:off x="502920" y="1371600"/>
+            <a:off x="566928" y="1371600"/>
             <a:ext cx="3576218" cy="960120"/>
           </a:xfrm>
           <a:prstGeom prst="roundRect">
@@ -2309,47 +2489,8 @@
         </p:nvSpPr>
         <p:spPr>
           <a:xfrm>
-            <a:off x="667512" y="1499616"/>
+            <a:off x="731520" y="1499616"/>
             <a:ext cx="3247034" cy="201168"/>
-          </a:xfrm>
-          <a:prstGeom prst="rect">
-            <a:avLst/>
-          </a:prstGeom>
-          <a:noFill/>
-          <a:ln/>
-        </p:spPr>
-        <p:txBody>
-          <a:bodyPr wrap="square" lIns="0" tIns="0" rIns="0" bIns="0" rtlCol="0" anchor="ctr"/>
-          <a:lstStyle/>
-          <a:p>
-            <a:pPr indent="0" marL="0">
-              <a:buNone/>
-            </a:pPr>
-            <a:r>
-              <a:rPr lang="en-US" sz="950" dirty="0">
-                <a:solidFill>
-                  <a:srgbClr val="5B6B73"/>
-                </a:solidFill>
-                <a:latin typeface="맑은 고딕" pitchFamily="34" charset="0"/>
-                <a:ea typeface="맑은 고딕" pitchFamily="34" charset="-122"/>
-                <a:cs typeface="맑은 고딕" pitchFamily="34" charset="-120"/>
-              </a:rPr>
-              <a:t>매매 희망가</a:t>
-            </a:r>
-            <a:endParaRPr lang="en-US" sz="950" dirty="0"/>
-          </a:p>
-        </p:txBody>
-      </p:sp>
-      <p:sp>
-        <p:nvSpPr>
-          <p:cNvPr id="8" name="Text 6"/>
-          <p:cNvSpPr/>
-          <p:nvPr/>
-        </p:nvSpPr>
-        <p:spPr>
-          <a:xfrm>
-            <a:off x="667512" y="1719072"/>
-            <a:ext cx="3247034" cy="274320"/>
           </a:xfrm>
           <a:prstGeom prst="rect">
             <a:avLst/>
@@ -2364,6 +2505,47 @@
           <a:lstStyle/>
           <a:p>
             <a:pPr indent="0" marL="0">
+              <a:buNone/>
+            </a:pPr>
+            <a:r>
+              <a:rPr lang="en-US" sz="950" dirty="0">
+                <a:solidFill>
+                  <a:srgbClr val="5B6B73"/>
+                </a:solidFill>
+                <a:latin typeface="맑은 고딕" pitchFamily="34" charset="0"/>
+                <a:ea typeface="맑은 고딕" pitchFamily="34" charset="-122"/>
+                <a:cs typeface="맑은 고딕" pitchFamily="34" charset="-120"/>
+              </a:rPr>
+              <a:t>매매 희망가</a:t>
+            </a:r>
+            <a:endParaRPr lang="en-US" sz="950" dirty="0"/>
+          </a:p>
+        </p:txBody>
+      </p:sp>
+      <p:sp>
+        <p:nvSpPr>
+          <p:cNvPr id="8" name="Text 6"/>
+          <p:cNvSpPr/>
+          <p:nvPr/>
+        </p:nvSpPr>
+        <p:spPr>
+          <a:xfrm>
+            <a:off x="731520" y="1719072"/>
+            <a:ext cx="3247034" cy="279400"/>
+          </a:xfrm>
+          <a:prstGeom prst="rect">
+            <a:avLst/>
+          </a:prstGeom>
+          <a:noFill/>
+          <a:ln/>
+        </p:spPr>
+        <p:txBody>
+          <a:bodyPr wrap="square" lIns="0" tIns="0" rIns="0" bIns="0" rtlCol="0" anchor="ctr">
+            <a:normAutofit/>
+          </a:bodyPr>
+          <a:lstStyle/>
+          <a:p>
+            <a:pPr indent="0" marL="0">
               <a:lnSpc>
                 <a:spcPct val="100000"/>
               </a:lnSpc>
@@ -2392,7 +2574,7 @@
         </p:nvSpPr>
         <p:spPr>
           <a:xfrm>
-            <a:off x="4243730" y="1371600"/>
+            <a:off x="4307738" y="1371600"/>
             <a:ext cx="3576218" cy="960120"/>
           </a:xfrm>
           <a:prstGeom prst="roundRect">
@@ -2419,47 +2601,8 @@
         </p:nvSpPr>
         <p:spPr>
           <a:xfrm>
-            <a:off x="4408322" y="1499616"/>
+            <a:off x="4472330" y="1499616"/>
             <a:ext cx="3247034" cy="201168"/>
-          </a:xfrm>
-          <a:prstGeom prst="rect">
-            <a:avLst/>
-          </a:prstGeom>
-          <a:noFill/>
-          <a:ln/>
-        </p:spPr>
-        <p:txBody>
-          <a:bodyPr wrap="square" lIns="0" tIns="0" rIns="0" bIns="0" rtlCol="0" anchor="ctr"/>
-          <a:lstStyle/>
-          <a:p>
-            <a:pPr indent="0" marL="0">
-              <a:buNone/>
-            </a:pPr>
-            <a:r>
-              <a:rPr lang="en-US" sz="950" dirty="0">
-                <a:solidFill>
-                  <a:srgbClr val="5B6B73"/>
-                </a:solidFill>
-                <a:latin typeface="맑은 고딕" pitchFamily="34" charset="0"/>
-                <a:ea typeface="맑은 고딕" pitchFamily="34" charset="-122"/>
-                <a:cs typeface="맑은 고딕" pitchFamily="34" charset="-120"/>
-              </a:rPr>
-              <a:t>대지면적</a:t>
-            </a:r>
-            <a:endParaRPr lang="en-US" sz="950" dirty="0"/>
-          </a:p>
-        </p:txBody>
-      </p:sp>
-      <p:sp>
-        <p:nvSpPr>
-          <p:cNvPr id="11" name="Text 9"/>
-          <p:cNvSpPr/>
-          <p:nvPr/>
-        </p:nvSpPr>
-        <p:spPr>
-          <a:xfrm>
-            <a:off x="4408322" y="1719072"/>
-            <a:ext cx="3247034" cy="274320"/>
           </a:xfrm>
           <a:prstGeom prst="rect">
             <a:avLst/>
@@ -2474,6 +2617,47 @@
           <a:lstStyle/>
           <a:p>
             <a:pPr indent="0" marL="0">
+              <a:buNone/>
+            </a:pPr>
+            <a:r>
+              <a:rPr lang="en-US" sz="950" dirty="0">
+                <a:solidFill>
+                  <a:srgbClr val="5B6B73"/>
+                </a:solidFill>
+                <a:latin typeface="맑은 고딕" pitchFamily="34" charset="0"/>
+                <a:ea typeface="맑은 고딕" pitchFamily="34" charset="-122"/>
+                <a:cs typeface="맑은 고딕" pitchFamily="34" charset="-120"/>
+              </a:rPr>
+              <a:t>대지면적</a:t>
+            </a:r>
+            <a:endParaRPr lang="en-US" sz="950" dirty="0"/>
+          </a:p>
+        </p:txBody>
+      </p:sp>
+      <p:sp>
+        <p:nvSpPr>
+          <p:cNvPr id="11" name="Text 9"/>
+          <p:cNvSpPr/>
+          <p:nvPr/>
+        </p:nvSpPr>
+        <p:spPr>
+          <a:xfrm>
+            <a:off x="4472330" y="1719072"/>
+            <a:ext cx="3247034" cy="279400"/>
+          </a:xfrm>
+          <a:prstGeom prst="rect">
+            <a:avLst/>
+          </a:prstGeom>
+          <a:noFill/>
+          <a:ln/>
+        </p:spPr>
+        <p:txBody>
+          <a:bodyPr wrap="square" lIns="0" tIns="0" rIns="0" bIns="0" rtlCol="0" anchor="ctr">
+            <a:normAutofit/>
+          </a:bodyPr>
+          <a:lstStyle/>
+          <a:p>
+            <a:pPr indent="0" marL="0">
               <a:lnSpc>
                 <a:spcPct val="100000"/>
               </a:lnSpc>
@@ -2502,7 +2686,7 @@
         </p:nvSpPr>
         <p:spPr>
           <a:xfrm>
-            <a:off x="7984541" y="1371600"/>
+            <a:off x="8048549" y="1371600"/>
             <a:ext cx="3576218" cy="960120"/>
           </a:xfrm>
           <a:prstGeom prst="roundRect">
@@ -2529,47 +2713,8 @@
         </p:nvSpPr>
         <p:spPr>
           <a:xfrm>
-            <a:off x="8149133" y="1499616"/>
+            <a:off x="8213141" y="1499616"/>
             <a:ext cx="3247034" cy="201168"/>
-          </a:xfrm>
-          <a:prstGeom prst="rect">
-            <a:avLst/>
-          </a:prstGeom>
-          <a:noFill/>
-          <a:ln/>
-        </p:spPr>
-        <p:txBody>
-          <a:bodyPr wrap="square" lIns="0" tIns="0" rIns="0" bIns="0" rtlCol="0" anchor="ctr"/>
-          <a:lstStyle/>
-          <a:p>
-            <a:pPr indent="0" marL="0">
-              <a:buNone/>
-            </a:pPr>
-            <a:r>
-              <a:rPr lang="en-US" sz="950" dirty="0">
-                <a:solidFill>
-                  <a:srgbClr val="5B6B73"/>
-                </a:solidFill>
-                <a:latin typeface="맑은 고딕" pitchFamily="34" charset="0"/>
-                <a:ea typeface="맑은 고딕" pitchFamily="34" charset="-122"/>
-                <a:cs typeface="맑은 고딕" pitchFamily="34" charset="-120"/>
-              </a:rPr>
-              <a:t>연면적</a:t>
-            </a:r>
-            <a:endParaRPr lang="en-US" sz="950" dirty="0"/>
-          </a:p>
-        </p:txBody>
-      </p:sp>
-      <p:sp>
-        <p:nvSpPr>
-          <p:cNvPr id="14" name="Text 12"/>
-          <p:cNvSpPr/>
-          <p:nvPr/>
-        </p:nvSpPr>
-        <p:spPr>
-          <a:xfrm>
-            <a:off x="8149133" y="1719072"/>
-            <a:ext cx="3247034" cy="274320"/>
           </a:xfrm>
           <a:prstGeom prst="rect">
             <a:avLst/>
@@ -2584,13 +2729,54 @@
           <a:lstStyle/>
           <a:p>
             <a:pPr indent="0" marL="0">
+              <a:buNone/>
+            </a:pPr>
+            <a:r>
+              <a:rPr lang="en-US" sz="950" dirty="0">
+                <a:solidFill>
+                  <a:srgbClr val="5B6B73"/>
+                </a:solidFill>
+                <a:latin typeface="맑은 고딕" pitchFamily="34" charset="0"/>
+                <a:ea typeface="맑은 고딕" pitchFamily="34" charset="-122"/>
+                <a:cs typeface="맑은 고딕" pitchFamily="34" charset="-120"/>
+              </a:rPr>
+              <a:t>연면적</a:t>
+            </a:r>
+            <a:endParaRPr lang="en-US" sz="950" dirty="0"/>
+          </a:p>
+        </p:txBody>
+      </p:sp>
+      <p:sp>
+        <p:nvSpPr>
+          <p:cNvPr id="14" name="Text 12"/>
+          <p:cNvSpPr/>
+          <p:nvPr/>
+        </p:nvSpPr>
+        <p:spPr>
+          <a:xfrm>
+            <a:off x="8213141" y="1719072"/>
+            <a:ext cx="3247034" cy="279400"/>
+          </a:xfrm>
+          <a:prstGeom prst="rect">
+            <a:avLst/>
+          </a:prstGeom>
+          <a:noFill/>
+          <a:ln/>
+        </p:spPr>
+        <p:txBody>
+          <a:bodyPr wrap="square" lIns="0" tIns="0" rIns="0" bIns="0" rtlCol="0" anchor="ctr">
+            <a:normAutofit/>
+          </a:bodyPr>
+          <a:lstStyle/>
+          <a:p>
+            <a:pPr indent="0" marL="0">
               <a:lnSpc>
                 <a:spcPct val="100000"/>
               </a:lnSpc>
               <a:buNone/>
             </a:pPr>
             <a:r>
-              <a:rPr lang="en-US" sz="1800" b="1" dirty="0">
+              <a:rPr lang="en-US" sz="2200" b="1" dirty="0">
                 <a:solidFill>
                   <a:srgbClr val="132A3A"/>
                 </a:solidFill>
@@ -2600,7 +2786,7 @@
               </a:rPr>
               <a:t>1,010.9평</a:t>
             </a:r>
-            <a:endParaRPr lang="en-US" sz="1800" dirty="0"/>
+            <a:endParaRPr lang="en-US" sz="2200" dirty="0"/>
           </a:p>
         </p:txBody>
       </p:sp>
@@ -2612,7 +2798,7 @@
         </p:nvSpPr>
         <p:spPr>
           <a:xfrm>
-            <a:off x="502920" y="2496312"/>
+            <a:off x="566928" y="2496312"/>
             <a:ext cx="3576218" cy="960120"/>
           </a:xfrm>
           <a:prstGeom prst="roundRect">
@@ -2639,47 +2825,8 @@
         </p:nvSpPr>
         <p:spPr>
           <a:xfrm>
-            <a:off x="667512" y="2624328"/>
+            <a:off x="731520" y="2624328"/>
             <a:ext cx="3247034" cy="201168"/>
-          </a:xfrm>
-          <a:prstGeom prst="rect">
-            <a:avLst/>
-          </a:prstGeom>
-          <a:noFill/>
-          <a:ln/>
-        </p:spPr>
-        <p:txBody>
-          <a:bodyPr wrap="square" lIns="0" tIns="0" rIns="0" bIns="0" rtlCol="0" anchor="ctr"/>
-          <a:lstStyle/>
-          <a:p>
-            <a:pPr indent="0" marL="0">
-              <a:buNone/>
-            </a:pPr>
-            <a:r>
-              <a:rPr lang="en-US" sz="950" dirty="0">
-                <a:solidFill>
-                  <a:srgbClr val="5B6B73"/>
-                </a:solidFill>
-                <a:latin typeface="맑은 고딕" pitchFamily="34" charset="0"/>
-                <a:ea typeface="맑은 고딕" pitchFamily="34" charset="-122"/>
-                <a:cs typeface="맑은 고딕" pitchFamily="34" charset="-120"/>
-              </a:rPr>
-              <a:t>건축규모</a:t>
-            </a:r>
-            <a:endParaRPr lang="en-US" sz="950" dirty="0"/>
-          </a:p>
-        </p:txBody>
-      </p:sp>
-      <p:sp>
-        <p:nvSpPr>
-          <p:cNvPr id="17" name="Text 15"/>
-          <p:cNvSpPr/>
-          <p:nvPr/>
-        </p:nvSpPr>
-        <p:spPr>
-          <a:xfrm>
-            <a:off x="667512" y="2843784"/>
-            <a:ext cx="3247034" cy="274320"/>
           </a:xfrm>
           <a:prstGeom prst="rect">
             <a:avLst/>
@@ -2694,6 +2841,47 @@
           <a:lstStyle/>
           <a:p>
             <a:pPr indent="0" marL="0">
+              <a:buNone/>
+            </a:pPr>
+            <a:r>
+              <a:rPr lang="en-US" sz="950" dirty="0">
+                <a:solidFill>
+                  <a:srgbClr val="5B6B73"/>
+                </a:solidFill>
+                <a:latin typeface="맑은 고딕" pitchFamily="34" charset="0"/>
+                <a:ea typeface="맑은 고딕" pitchFamily="34" charset="-122"/>
+                <a:cs typeface="맑은 고딕" pitchFamily="34" charset="-120"/>
+              </a:rPr>
+              <a:t>건축규모</a:t>
+            </a:r>
+            <a:endParaRPr lang="en-US" sz="950" dirty="0"/>
+          </a:p>
+        </p:txBody>
+      </p:sp>
+      <p:sp>
+        <p:nvSpPr>
+          <p:cNvPr id="17" name="Text 15"/>
+          <p:cNvSpPr/>
+          <p:nvPr/>
+        </p:nvSpPr>
+        <p:spPr>
+          <a:xfrm>
+            <a:off x="731520" y="2843784"/>
+            <a:ext cx="3247034" cy="279400"/>
+          </a:xfrm>
+          <a:prstGeom prst="rect">
+            <a:avLst/>
+          </a:prstGeom>
+          <a:noFill/>
+          <a:ln/>
+        </p:spPr>
+        <p:txBody>
+          <a:bodyPr wrap="square" lIns="0" tIns="0" rIns="0" bIns="0" rtlCol="0" anchor="ctr">
+            <a:normAutofit/>
+          </a:bodyPr>
+          <a:lstStyle/>
+          <a:p>
+            <a:pPr indent="0" marL="0">
               <a:lnSpc>
                 <a:spcPct val="100000"/>
               </a:lnSpc>
@@ -2722,7 +2910,7 @@
         </p:nvSpPr>
         <p:spPr>
           <a:xfrm>
-            <a:off x="4243730" y="2496312"/>
+            <a:off x="4307738" y="2496312"/>
             <a:ext cx="3576218" cy="960120"/>
           </a:xfrm>
           <a:prstGeom prst="roundRect">
@@ -2749,47 +2937,8 @@
         </p:nvSpPr>
         <p:spPr>
           <a:xfrm>
-            <a:off x="4408322" y="2624328"/>
+            <a:off x="4472330" y="2624328"/>
             <a:ext cx="3247034" cy="201168"/>
-          </a:xfrm>
-          <a:prstGeom prst="rect">
-            <a:avLst/>
-          </a:prstGeom>
-          <a:noFill/>
-          <a:ln/>
-        </p:spPr>
-        <p:txBody>
-          <a:bodyPr wrap="square" lIns="0" tIns="0" rIns="0" bIns="0" rtlCol="0" anchor="ctr"/>
-          <a:lstStyle/>
-          <a:p>
-            <a:pPr indent="0" marL="0">
-              <a:buNone/>
-            </a:pPr>
-            <a:r>
-              <a:rPr lang="en-US" sz="950" dirty="0">
-                <a:solidFill>
-                  <a:srgbClr val="5B6B73"/>
-                </a:solidFill>
-                <a:latin typeface="맑은 고딕" pitchFamily="34" charset="0"/>
-                <a:ea typeface="맑은 고딕" pitchFamily="34" charset="-122"/>
-                <a:cs typeface="맑은 고딕" pitchFamily="34" charset="-120"/>
-              </a:rPr>
-              <a:t>공실 현황</a:t>
-            </a:r>
-            <a:endParaRPr lang="en-US" sz="950" dirty="0"/>
-          </a:p>
-        </p:txBody>
-      </p:sp>
-      <p:sp>
-        <p:nvSpPr>
-          <p:cNvPr id="20" name="Text 18"/>
-          <p:cNvSpPr/>
-          <p:nvPr/>
-        </p:nvSpPr>
-        <p:spPr>
-          <a:xfrm>
-            <a:off x="4408322" y="2843784"/>
-            <a:ext cx="3247034" cy="274320"/>
           </a:xfrm>
           <a:prstGeom prst="rect">
             <a:avLst/>
@@ -2804,13 +2953,54 @@
           <a:lstStyle/>
           <a:p>
             <a:pPr indent="0" marL="0">
+              <a:buNone/>
+            </a:pPr>
+            <a:r>
+              <a:rPr lang="en-US" sz="950" dirty="0">
+                <a:solidFill>
+                  <a:srgbClr val="5B6B73"/>
+                </a:solidFill>
+                <a:latin typeface="맑은 고딕" pitchFamily="34" charset="0"/>
+                <a:ea typeface="맑은 고딕" pitchFamily="34" charset="-122"/>
+                <a:cs typeface="맑은 고딕" pitchFamily="34" charset="-120"/>
+              </a:rPr>
+              <a:t>공실 현황</a:t>
+            </a:r>
+            <a:endParaRPr lang="en-US" sz="950" dirty="0"/>
+          </a:p>
+        </p:txBody>
+      </p:sp>
+      <p:sp>
+        <p:nvSpPr>
+          <p:cNvPr id="20" name="Text 18"/>
+          <p:cNvSpPr/>
+          <p:nvPr/>
+        </p:nvSpPr>
+        <p:spPr>
+          <a:xfrm>
+            <a:off x="4472330" y="2843784"/>
+            <a:ext cx="3247034" cy="279400"/>
+          </a:xfrm>
+          <a:prstGeom prst="rect">
+            <a:avLst/>
+          </a:prstGeom>
+          <a:noFill/>
+          <a:ln/>
+        </p:spPr>
+        <p:txBody>
+          <a:bodyPr wrap="square" lIns="0" tIns="0" rIns="0" bIns="0" rtlCol="0" anchor="ctr">
+            <a:normAutofit/>
+          </a:bodyPr>
+          <a:lstStyle/>
+          <a:p>
+            <a:pPr indent="0" marL="0">
               <a:lnSpc>
                 <a:spcPct val="100000"/>
               </a:lnSpc>
               <a:buNone/>
             </a:pPr>
             <a:r>
-              <a:rPr lang="en-US" sz="1400" b="1" dirty="0">
+              <a:rPr lang="en-US" sz="2200" b="1" dirty="0">
                 <a:solidFill>
                   <a:srgbClr val="132A3A"/>
                 </a:solidFill>
@@ -2820,7 +3010,7 @@
               </a:rPr>
               <a:t>만실 운영 (공실 0%)</a:t>
             </a:r>
-            <a:endParaRPr lang="en-US" sz="1400" dirty="0"/>
+            <a:endParaRPr lang="en-US" sz="2200" dirty="0"/>
           </a:p>
         </p:txBody>
       </p:sp>
@@ -2832,7 +3022,7 @@
         </p:nvSpPr>
         <p:spPr>
           <a:xfrm>
-            <a:off x="7984541" y="2496312"/>
+            <a:off x="8048549" y="2496312"/>
             <a:ext cx="3576218" cy="960120"/>
           </a:xfrm>
           <a:prstGeom prst="roundRect">
@@ -2859,47 +3049,8 @@
         </p:nvSpPr>
         <p:spPr>
           <a:xfrm>
-            <a:off x="8149133" y="2624328"/>
+            <a:off x="8213141" y="2624328"/>
             <a:ext cx="3247034" cy="201168"/>
-          </a:xfrm>
-          <a:prstGeom prst="rect">
-            <a:avLst/>
-          </a:prstGeom>
-          <a:noFill/>
-          <a:ln/>
-        </p:spPr>
-        <p:txBody>
-          <a:bodyPr wrap="square" lIns="0" tIns="0" rIns="0" bIns="0" rtlCol="0" anchor="ctr"/>
-          <a:lstStyle/>
-          <a:p>
-            <a:pPr indent="0" marL="0">
-              <a:buNone/>
-            </a:pPr>
-            <a:r>
-              <a:rPr lang="en-US" sz="950" dirty="0">
-                <a:solidFill>
-                  <a:srgbClr val="5B6B73"/>
-                </a:solidFill>
-                <a:latin typeface="맑은 고딕" pitchFamily="34" charset="0"/>
-                <a:ea typeface="맑은 고딕" pitchFamily="34" charset="-122"/>
-                <a:cs typeface="맑은 고딕" pitchFamily="34" charset="-120"/>
-              </a:rPr>
-              <a:t>실투자금</a:t>
-            </a:r>
-            <a:endParaRPr lang="en-US" sz="950" dirty="0"/>
-          </a:p>
-        </p:txBody>
-      </p:sp>
-      <p:sp>
-        <p:nvSpPr>
-          <p:cNvPr id="23" name="Text 21"/>
-          <p:cNvSpPr/>
-          <p:nvPr/>
-        </p:nvSpPr>
-        <p:spPr>
-          <a:xfrm>
-            <a:off x="8149133" y="2843784"/>
-            <a:ext cx="3247034" cy="274320"/>
           </a:xfrm>
           <a:prstGeom prst="rect">
             <a:avLst/>
@@ -2914,13 +3065,54 @@
           <a:lstStyle/>
           <a:p>
             <a:pPr indent="0" marL="0">
+              <a:buNone/>
+            </a:pPr>
+            <a:r>
+              <a:rPr lang="en-US" sz="950" dirty="0">
+                <a:solidFill>
+                  <a:srgbClr val="5B6B73"/>
+                </a:solidFill>
+                <a:latin typeface="맑은 고딕" pitchFamily="34" charset="0"/>
+                <a:ea typeface="맑은 고딕" pitchFamily="34" charset="-122"/>
+                <a:cs typeface="맑은 고딕" pitchFamily="34" charset="-120"/>
+              </a:rPr>
+              <a:t>실투자금</a:t>
+            </a:r>
+            <a:endParaRPr lang="en-US" sz="950" dirty="0"/>
+          </a:p>
+        </p:txBody>
+      </p:sp>
+      <p:sp>
+        <p:nvSpPr>
+          <p:cNvPr id="23" name="Text 21"/>
+          <p:cNvSpPr/>
+          <p:nvPr/>
+        </p:nvSpPr>
+        <p:spPr>
+          <a:xfrm>
+            <a:off x="8213141" y="2843784"/>
+            <a:ext cx="3247034" cy="279400"/>
+          </a:xfrm>
+          <a:prstGeom prst="rect">
+            <a:avLst/>
+          </a:prstGeom>
+          <a:noFill/>
+          <a:ln/>
+        </p:spPr>
+        <p:txBody>
+          <a:bodyPr wrap="square" lIns="0" tIns="0" rIns="0" bIns="0" rtlCol="0" anchor="ctr">
+            <a:normAutofit/>
+          </a:bodyPr>
+          <a:lstStyle/>
+          <a:p>
+            <a:pPr indent="0" marL="0">
               <a:lnSpc>
                 <a:spcPct val="100000"/>
               </a:lnSpc>
               <a:buNone/>
             </a:pPr>
             <a:r>
-              <a:rPr lang="en-US" sz="1800" b="1" dirty="0">
+              <a:rPr lang="en-US" sz="2200" b="1" dirty="0">
                 <a:solidFill>
                   <a:srgbClr val="132A3A"/>
                 </a:solidFill>
@@ -2930,7 +3122,7 @@
               </a:rPr>
               <a:t>약 760억 원</a:t>
             </a:r>
-            <a:endParaRPr lang="en-US" sz="1800" dirty="0"/>
+            <a:endParaRPr lang="en-US" sz="2200" dirty="0"/>
           </a:p>
         </p:txBody>
       </p:sp>
@@ -2942,7 +3134,7 @@
         </p:nvSpPr>
         <p:spPr>
           <a:xfrm>
-            <a:off x="502920" y="3712464"/>
+            <a:off x="566928" y="3712464"/>
             <a:ext cx="11057839" cy="274320"/>
           </a:xfrm>
           <a:prstGeom prst="rect">
@@ -2981,7 +3173,7 @@
         </p:nvSpPr>
         <p:spPr>
           <a:xfrm>
-            <a:off x="502920" y="4041648"/>
+            <a:off x="566928" y="4041648"/>
             <a:ext cx="11057839" cy="585216"/>
           </a:xfrm>
           <a:prstGeom prst="roundRect">
@@ -3008,7 +3200,7 @@
         </p:nvSpPr>
         <p:spPr>
           <a:xfrm>
-            <a:off x="612648" y="4151376"/>
+            <a:off x="676656" y="4151376"/>
             <a:ext cx="411480" cy="365760"/>
           </a:xfrm>
           <a:prstGeom prst="roundRect">
@@ -3035,7 +3227,7 @@
         </p:nvSpPr>
         <p:spPr>
           <a:xfrm>
-            <a:off x="612648" y="4151376"/>
+            <a:off x="676656" y="4151376"/>
             <a:ext cx="411480" cy="365760"/>
           </a:xfrm>
           <a:prstGeom prst="rect">
@@ -3074,7 +3266,7 @@
         </p:nvSpPr>
         <p:spPr>
           <a:xfrm>
-            <a:off x="1143000" y="4078224"/>
+            <a:off x="1207008" y="4078224"/>
             <a:ext cx="10280599" cy="512064"/>
           </a:xfrm>
           <a:prstGeom prst="rect">
@@ -3113,7 +3305,7 @@
         </p:nvSpPr>
         <p:spPr>
           <a:xfrm>
-            <a:off x="502920" y="4722876"/>
+            <a:off x="566928" y="4722876"/>
             <a:ext cx="11057839" cy="585216"/>
           </a:xfrm>
           <a:prstGeom prst="roundRect">
@@ -3140,7 +3332,7 @@
         </p:nvSpPr>
         <p:spPr>
           <a:xfrm>
-            <a:off x="612648" y="4832604"/>
+            <a:off x="676656" y="4832604"/>
             <a:ext cx="411480" cy="365760"/>
           </a:xfrm>
           <a:prstGeom prst="roundRect">
@@ -3167,7 +3359,7 @@
         </p:nvSpPr>
         <p:spPr>
           <a:xfrm>
-            <a:off x="612648" y="4832604"/>
+            <a:off x="676656" y="4832604"/>
             <a:ext cx="411480" cy="365760"/>
           </a:xfrm>
           <a:prstGeom prst="rect">
@@ -3206,7 +3398,7 @@
         </p:nvSpPr>
         <p:spPr>
           <a:xfrm>
-            <a:off x="1143000" y="4759452"/>
+            <a:off x="1207008" y="4759452"/>
             <a:ext cx="10280599" cy="512064"/>
           </a:xfrm>
           <a:prstGeom prst="rect">
@@ -3245,7 +3437,7 @@
         </p:nvSpPr>
         <p:spPr>
           <a:xfrm>
-            <a:off x="502920" y="5404104"/>
+            <a:off x="566928" y="5404104"/>
             <a:ext cx="11057839" cy="585216"/>
           </a:xfrm>
           <a:prstGeom prst="roundRect">
@@ -3272,7 +3464,7 @@
         </p:nvSpPr>
         <p:spPr>
           <a:xfrm>
-            <a:off x="612648" y="5513832"/>
+            <a:off x="676656" y="5513832"/>
             <a:ext cx="411480" cy="365760"/>
           </a:xfrm>
           <a:prstGeom prst="roundRect">
@@ -3299,7 +3491,7 @@
         </p:nvSpPr>
         <p:spPr>
           <a:xfrm>
-            <a:off x="612648" y="5513832"/>
+            <a:off x="676656" y="5513832"/>
             <a:ext cx="411480" cy="365760"/>
           </a:xfrm>
           <a:prstGeom prst="rect">
@@ -3338,7 +3530,7 @@
         </p:nvSpPr>
         <p:spPr>
           <a:xfrm>
-            <a:off x="1143000" y="5440680"/>
+            <a:off x="1207008" y="5440680"/>
             <a:ext cx="10280599" cy="512064"/>
           </a:xfrm>
           <a:prstGeom prst="rect">
@@ -3377,7 +3569,7 @@
         </p:nvSpPr>
         <p:spPr>
           <a:xfrm>
-            <a:off x="502920" y="6382512"/>
+            <a:off x="566928" y="6382512"/>
             <a:ext cx="7315200" cy="219456"/>
           </a:xfrm>
           <a:prstGeom prst="rect">
@@ -3416,7 +3608,7 @@
         </p:nvSpPr>
         <p:spPr>
           <a:xfrm>
-            <a:off x="10774375" y="6382512"/>
+            <a:off x="10710367" y="6382512"/>
             <a:ext cx="914400" cy="219456"/>
           </a:xfrm>
           <a:prstGeom prst="rect">
@@ -3487,7 +3679,7 @@
         </p:nvSpPr>
         <p:spPr>
           <a:xfrm>
-            <a:off x="502920" y="457200"/>
+            <a:off x="566928" y="457200"/>
             <a:ext cx="384048" cy="384048"/>
           </a:xfrm>
           <a:prstGeom prst="ellipse">
@@ -3507,7 +3699,7 @@
         </p:nvSpPr>
         <p:spPr>
           <a:xfrm>
-            <a:off x="502920" y="457200"/>
+            <a:off x="566928" y="457200"/>
             <a:ext cx="384048" cy="384048"/>
           </a:xfrm>
           <a:prstGeom prst="rect">
@@ -3546,7 +3738,7 @@
         </p:nvSpPr>
         <p:spPr>
           <a:xfrm>
-            <a:off x="1069848" y="457200"/>
+            <a:off x="1133856" y="457200"/>
             <a:ext cx="10490911" cy="182880"/>
           </a:xfrm>
           <a:prstGeom prst="rect">
@@ -3585,7 +3777,7 @@
         </p:nvSpPr>
         <p:spPr>
           <a:xfrm>
-            <a:off x="1069848" y="640080"/>
+            <a:off x="1133856" y="640080"/>
             <a:ext cx="10490911" cy="365760"/>
           </a:xfrm>
           <a:prstGeom prst="rect">
@@ -3595,6 +3787,47 @@
           <a:ln/>
         </p:spPr>
         <p:txBody>
+          <a:bodyPr wrap="square" lIns="0" tIns="0" rIns="0" bIns="0" rtlCol="0" anchor="ctr">
+            <a:normAutofit/>
+          </a:bodyPr>
+          <a:lstStyle/>
+          <a:p>
+            <a:pPr indent="0" marL="0">
+              <a:buNone/>
+            </a:pPr>
+            <a:r>
+              <a:rPr lang="en-US" sz="2300" b="1" dirty="0">
+                <a:solidFill>
+                  <a:srgbClr val="132A3A"/>
+                </a:solidFill>
+                <a:latin typeface="맑은 고딕" pitchFamily="34" charset="0"/>
+                <a:ea typeface="맑은 고딕" pitchFamily="34" charset="-122"/>
+                <a:cs typeface="맑은 고딕" pitchFamily="34" charset="-120"/>
+              </a:rPr>
+              <a:t>물건 개요</a:t>
+            </a:r>
+            <a:endParaRPr lang="en-US" sz="2300" dirty="0"/>
+          </a:p>
+        </p:txBody>
+      </p:sp>
+      <p:sp>
+        <p:nvSpPr>
+          <p:cNvPr id="6" name="Text 4"/>
+          <p:cNvSpPr/>
+          <p:nvPr/>
+        </p:nvSpPr>
+        <p:spPr>
+          <a:xfrm>
+            <a:off x="566928" y="1371600"/>
+            <a:ext cx="6858000" cy="237744"/>
+          </a:xfrm>
+          <a:prstGeom prst="rect">
+            <a:avLst/>
+          </a:prstGeom>
+          <a:noFill/>
+          <a:ln/>
+        </p:spPr>
+        <p:txBody>
           <a:bodyPr wrap="square" lIns="0" tIns="0" rIns="0" bIns="0" rtlCol="0" anchor="ctr"/>
           <a:lstStyle/>
           <a:p>
@@ -3602,7 +3835,7 @@
               <a:buNone/>
             </a:pPr>
             <a:r>
-              <a:rPr lang="en-US" sz="2300" b="1" dirty="0">
+              <a:rPr lang="en-US" sz="1100" b="1" dirty="0">
                 <a:solidFill>
                   <a:srgbClr val="132A3A"/>
                 </a:solidFill>
@@ -3610,45 +3843,6 @@
                 <a:ea typeface="맑은 고딕" pitchFamily="34" charset="-122"/>
                 <a:cs typeface="맑은 고딕" pitchFamily="34" charset="-120"/>
               </a:rPr>
-              <a:t>물건 개요</a:t>
-            </a:r>
-            <a:endParaRPr lang="en-US" sz="2300" dirty="0"/>
-          </a:p>
-        </p:txBody>
-      </p:sp>
-      <p:sp>
-        <p:nvSpPr>
-          <p:cNvPr id="6" name="Text 4"/>
-          <p:cNvSpPr/>
-          <p:nvPr/>
-        </p:nvSpPr>
-        <p:spPr>
-          <a:xfrm>
-            <a:off x="502920" y="1371600"/>
-            <a:ext cx="6858000" cy="237744"/>
-          </a:xfrm>
-          <a:prstGeom prst="rect">
-            <a:avLst/>
-          </a:prstGeom>
-          <a:noFill/>
-          <a:ln/>
-        </p:spPr>
-        <p:txBody>
-          <a:bodyPr wrap="square" lIns="0" tIns="0" rIns="0" bIns="0" rtlCol="0" anchor="ctr"/>
-          <a:lstStyle/>
-          <a:p>
-            <a:pPr indent="0" marL="0">
-              <a:buNone/>
-            </a:pPr>
-            <a:r>
-              <a:rPr lang="en-US" sz="1100" b="1" dirty="0">
-                <a:solidFill>
-                  <a:srgbClr val="132A3A"/>
-                </a:solidFill>
-                <a:latin typeface="맑은 고딕" pitchFamily="34" charset="0"/>
-                <a:ea typeface="맑은 고딕" pitchFamily="34" charset="-122"/>
-                <a:cs typeface="맑은 고딕" pitchFamily="34" charset="-120"/>
-              </a:rPr>
               <a:t>건물 기본 정보</a:t>
             </a:r>
             <a:endParaRPr lang="en-US" sz="1100" dirty="0"/>
@@ -3663,7 +3857,7 @@
         </p:nvSpPr>
         <p:spPr>
           <a:xfrm>
-            <a:off x="502920" y="1645920"/>
+            <a:off x="566928" y="1645920"/>
             <a:ext cx="1920240" cy="329184"/>
           </a:xfrm>
           <a:prstGeom prst="rect">
@@ -3673,7 +3867,9 @@
           <a:ln/>
         </p:spPr>
         <p:txBody>
-          <a:bodyPr wrap="square" lIns="0" tIns="0" rIns="0" bIns="0" rtlCol="0" anchor="ctr"/>
+          <a:bodyPr wrap="square" lIns="0" tIns="0" rIns="0" bIns="0" rtlCol="0" anchor="ctr">
+            <a:normAutofit/>
+          </a:bodyPr>
           <a:lstStyle/>
           <a:p>
             <a:pPr indent="0" marL="0">
@@ -3705,7 +3901,7 @@
         </p:nvSpPr>
         <p:spPr>
           <a:xfrm>
-            <a:off x="2423160" y="1645920"/>
+            <a:off x="2487168" y="1645920"/>
             <a:ext cx="4937760" cy="329184"/>
           </a:xfrm>
           <a:prstGeom prst="rect">
@@ -3715,7 +3911,9 @@
           <a:ln/>
         </p:spPr>
         <p:txBody>
-          <a:bodyPr wrap="square" lIns="0" tIns="0" rIns="0" bIns="0" rtlCol="0" anchor="ctr"/>
+          <a:bodyPr wrap="square" lIns="0" tIns="0" rIns="0" bIns="0" rtlCol="0" anchor="ctr">
+            <a:normAutofit/>
+          </a:bodyPr>
           <a:lstStyle/>
           <a:p>
             <a:pPr indent="0" marL="0">
@@ -3747,7 +3945,7 @@
         </p:nvSpPr>
         <p:spPr>
           <a:xfrm>
-            <a:off x="502920" y="1975104"/>
+            <a:off x="566928" y="1975104"/>
             <a:ext cx="6858000" cy="0"/>
           </a:xfrm>
           <a:prstGeom prst="line">
@@ -3770,7 +3968,7 @@
         </p:nvSpPr>
         <p:spPr>
           <a:xfrm>
-            <a:off x="502920" y="1975104"/>
+            <a:off x="566928" y="1975104"/>
             <a:ext cx="1920240" cy="329184"/>
           </a:xfrm>
           <a:prstGeom prst="rect">
@@ -3780,7 +3978,9 @@
           <a:ln/>
         </p:spPr>
         <p:txBody>
-          <a:bodyPr wrap="square" lIns="0" tIns="0" rIns="0" bIns="0" rtlCol="0" anchor="ctr"/>
+          <a:bodyPr wrap="square" lIns="0" tIns="0" rIns="0" bIns="0" rtlCol="0" anchor="ctr">
+            <a:normAutofit/>
+          </a:bodyPr>
           <a:lstStyle/>
           <a:p>
             <a:pPr indent="0" marL="0">
@@ -3812,7 +4012,7 @@
         </p:nvSpPr>
         <p:spPr>
           <a:xfrm>
-            <a:off x="2423160" y="1975104"/>
+            <a:off x="2487168" y="1975104"/>
             <a:ext cx="4937760" cy="329184"/>
           </a:xfrm>
           <a:prstGeom prst="rect">
@@ -3822,7 +4022,9 @@
           <a:ln/>
         </p:spPr>
         <p:txBody>
-          <a:bodyPr wrap="square" lIns="0" tIns="0" rIns="0" bIns="0" rtlCol="0" anchor="ctr"/>
+          <a:bodyPr wrap="square" lIns="0" tIns="0" rIns="0" bIns="0" rtlCol="0" anchor="ctr">
+            <a:normAutofit/>
+          </a:bodyPr>
           <a:lstStyle/>
           <a:p>
             <a:pPr indent="0" marL="0">
@@ -3854,7 +4056,7 @@
         </p:nvSpPr>
         <p:spPr>
           <a:xfrm>
-            <a:off x="502920" y="2304288"/>
+            <a:off x="566928" y="2304288"/>
             <a:ext cx="6858000" cy="0"/>
           </a:xfrm>
           <a:prstGeom prst="line">
@@ -3877,7 +4079,7 @@
         </p:nvSpPr>
         <p:spPr>
           <a:xfrm>
-            <a:off x="502920" y="2304288"/>
+            <a:off x="566928" y="2304288"/>
             <a:ext cx="1920240" cy="329184"/>
           </a:xfrm>
           <a:prstGeom prst="rect">
@@ -3887,7 +4089,9 @@
           <a:ln/>
         </p:spPr>
         <p:txBody>
-          <a:bodyPr wrap="square" lIns="0" tIns="0" rIns="0" bIns="0" rtlCol="0" anchor="ctr"/>
+          <a:bodyPr wrap="square" lIns="0" tIns="0" rIns="0" bIns="0" rtlCol="0" anchor="ctr">
+            <a:normAutofit/>
+          </a:bodyPr>
           <a:lstStyle/>
           <a:p>
             <a:pPr indent="0" marL="0">
@@ -3919,7 +4123,7 @@
         </p:nvSpPr>
         <p:spPr>
           <a:xfrm>
-            <a:off x="2423160" y="2304288"/>
+            <a:off x="2487168" y="2304288"/>
             <a:ext cx="4937760" cy="329184"/>
           </a:xfrm>
           <a:prstGeom prst="rect">
@@ -3929,7 +4133,9 @@
           <a:ln/>
         </p:spPr>
         <p:txBody>
-          <a:bodyPr wrap="square" lIns="0" tIns="0" rIns="0" bIns="0" rtlCol="0" anchor="ctr"/>
+          <a:bodyPr wrap="square" lIns="0" tIns="0" rIns="0" bIns="0" rtlCol="0" anchor="ctr">
+            <a:normAutofit/>
+          </a:bodyPr>
           <a:lstStyle/>
           <a:p>
             <a:pPr indent="0" marL="0">
@@ -3961,7 +4167,7 @@
         </p:nvSpPr>
         <p:spPr>
           <a:xfrm>
-            <a:off x="502920" y="2633472"/>
+            <a:off x="566928" y="2633472"/>
             <a:ext cx="6858000" cy="0"/>
           </a:xfrm>
           <a:prstGeom prst="line">
@@ -3984,7 +4190,7 @@
         </p:nvSpPr>
         <p:spPr>
           <a:xfrm>
-            <a:off x="502920" y="2633472"/>
+            <a:off x="566928" y="2633472"/>
             <a:ext cx="1920240" cy="329184"/>
           </a:xfrm>
           <a:prstGeom prst="rect">
@@ -3994,7 +4200,9 @@
           <a:ln/>
         </p:spPr>
         <p:txBody>
-          <a:bodyPr wrap="square" lIns="0" tIns="0" rIns="0" bIns="0" rtlCol="0" anchor="ctr"/>
+          <a:bodyPr wrap="square" lIns="0" tIns="0" rIns="0" bIns="0" rtlCol="0" anchor="ctr">
+            <a:normAutofit/>
+          </a:bodyPr>
           <a:lstStyle/>
           <a:p>
             <a:pPr indent="0" marL="0">
@@ -4026,7 +4234,7 @@
         </p:nvSpPr>
         <p:spPr>
           <a:xfrm>
-            <a:off x="2423160" y="2633472"/>
+            <a:off x="2487168" y="2633472"/>
             <a:ext cx="4937760" cy="329184"/>
           </a:xfrm>
           <a:prstGeom prst="rect">
@@ -4036,7 +4244,9 @@
           <a:ln/>
         </p:spPr>
         <p:txBody>
-          <a:bodyPr wrap="square" lIns="0" tIns="0" rIns="0" bIns="0" rtlCol="0" anchor="ctr"/>
+          <a:bodyPr wrap="square" lIns="0" tIns="0" rIns="0" bIns="0" rtlCol="0" anchor="ctr">
+            <a:normAutofit/>
+          </a:bodyPr>
           <a:lstStyle/>
           <a:p>
             <a:pPr indent="0" marL="0">
@@ -4068,7 +4278,7 @@
         </p:nvSpPr>
         <p:spPr>
           <a:xfrm>
-            <a:off x="502920" y="2962656"/>
+            <a:off x="566928" y="2962656"/>
             <a:ext cx="6858000" cy="0"/>
           </a:xfrm>
           <a:prstGeom prst="line">
@@ -4091,7 +4301,7 @@
         </p:nvSpPr>
         <p:spPr>
           <a:xfrm>
-            <a:off x="502920" y="2962656"/>
+            <a:off x="566928" y="2962656"/>
             <a:ext cx="1920240" cy="329184"/>
           </a:xfrm>
           <a:prstGeom prst="rect">
@@ -4101,7 +4311,9 @@
           <a:ln/>
         </p:spPr>
         <p:txBody>
-          <a:bodyPr wrap="square" lIns="0" tIns="0" rIns="0" bIns="0" rtlCol="0" anchor="ctr"/>
+          <a:bodyPr wrap="square" lIns="0" tIns="0" rIns="0" bIns="0" rtlCol="0" anchor="ctr">
+            <a:normAutofit/>
+          </a:bodyPr>
           <a:lstStyle/>
           <a:p>
             <a:pPr indent="0" marL="0">
@@ -4133,7 +4345,7 @@
         </p:nvSpPr>
         <p:spPr>
           <a:xfrm>
-            <a:off x="2423160" y="2962656"/>
+            <a:off x="2487168" y="2962656"/>
             <a:ext cx="4937760" cy="329184"/>
           </a:xfrm>
           <a:prstGeom prst="rect">
@@ -4143,7 +4355,9 @@
           <a:ln/>
         </p:spPr>
         <p:txBody>
-          <a:bodyPr wrap="square" lIns="0" tIns="0" rIns="0" bIns="0" rtlCol="0" anchor="ctr"/>
+          <a:bodyPr wrap="square" lIns="0" tIns="0" rIns="0" bIns="0" rtlCol="0" anchor="ctr">
+            <a:normAutofit/>
+          </a:bodyPr>
           <a:lstStyle/>
           <a:p>
             <a:pPr indent="0" marL="0">
@@ -4175,7 +4389,7 @@
         </p:nvSpPr>
         <p:spPr>
           <a:xfrm>
-            <a:off x="502920" y="3291840"/>
+            <a:off x="566928" y="3291840"/>
             <a:ext cx="6858000" cy="0"/>
           </a:xfrm>
           <a:prstGeom prst="line">
@@ -4198,7 +4412,7 @@
         </p:nvSpPr>
         <p:spPr>
           <a:xfrm>
-            <a:off x="502920" y="3291840"/>
+            <a:off x="566928" y="3291840"/>
             <a:ext cx="1920240" cy="329184"/>
           </a:xfrm>
           <a:prstGeom prst="rect">
@@ -4208,7 +4422,9 @@
           <a:ln/>
         </p:spPr>
         <p:txBody>
-          <a:bodyPr wrap="square" lIns="0" tIns="0" rIns="0" bIns="0" rtlCol="0" anchor="ctr"/>
+          <a:bodyPr wrap="square" lIns="0" tIns="0" rIns="0" bIns="0" rtlCol="0" anchor="ctr">
+            <a:normAutofit/>
+          </a:bodyPr>
           <a:lstStyle/>
           <a:p>
             <a:pPr indent="0" marL="0">
@@ -4240,7 +4456,7 @@
         </p:nvSpPr>
         <p:spPr>
           <a:xfrm>
-            <a:off x="2423160" y="3291840"/>
+            <a:off x="2487168" y="3291840"/>
             <a:ext cx="4937760" cy="329184"/>
           </a:xfrm>
           <a:prstGeom prst="rect">
@@ -4250,7 +4466,9 @@
           <a:ln/>
         </p:spPr>
         <p:txBody>
-          <a:bodyPr wrap="square" lIns="0" tIns="0" rIns="0" bIns="0" rtlCol="0" anchor="ctr"/>
+          <a:bodyPr wrap="square" lIns="0" tIns="0" rIns="0" bIns="0" rtlCol="0" anchor="ctr">
+            <a:normAutofit/>
+          </a:bodyPr>
           <a:lstStyle/>
           <a:p>
             <a:pPr indent="0" marL="0">
@@ -4282,7 +4500,7 @@
         </p:nvSpPr>
         <p:spPr>
           <a:xfrm>
-            <a:off x="502920" y="3621024"/>
+            <a:off x="566928" y="3621024"/>
             <a:ext cx="6858000" cy="0"/>
           </a:xfrm>
           <a:prstGeom prst="line">
@@ -4305,7 +4523,7 @@
         </p:nvSpPr>
         <p:spPr>
           <a:xfrm>
-            <a:off x="502920" y="3621024"/>
+            <a:off x="566928" y="3621024"/>
             <a:ext cx="1920240" cy="329184"/>
           </a:xfrm>
           <a:prstGeom prst="rect">
@@ -4315,7 +4533,9 @@
           <a:ln/>
         </p:spPr>
         <p:txBody>
-          <a:bodyPr wrap="square" lIns="0" tIns="0" rIns="0" bIns="0" rtlCol="0" anchor="ctr"/>
+          <a:bodyPr wrap="square" lIns="0" tIns="0" rIns="0" bIns="0" rtlCol="0" anchor="ctr">
+            <a:normAutofit/>
+          </a:bodyPr>
           <a:lstStyle/>
           <a:p>
             <a:pPr indent="0" marL="0">
@@ -4347,7 +4567,7 @@
         </p:nvSpPr>
         <p:spPr>
           <a:xfrm>
-            <a:off x="2423160" y="3621024"/>
+            <a:off x="2487168" y="3621024"/>
             <a:ext cx="4937760" cy="329184"/>
           </a:xfrm>
           <a:prstGeom prst="rect">
@@ -4357,7 +4577,9 @@
           <a:ln/>
         </p:spPr>
         <p:txBody>
-          <a:bodyPr wrap="square" lIns="0" tIns="0" rIns="0" bIns="0" rtlCol="0" anchor="ctr"/>
+          <a:bodyPr wrap="square" lIns="0" tIns="0" rIns="0" bIns="0" rtlCol="0" anchor="ctr">
+            <a:normAutofit/>
+          </a:bodyPr>
           <a:lstStyle/>
           <a:p>
             <a:pPr indent="0" marL="0">
@@ -4389,7 +4611,7 @@
         </p:nvSpPr>
         <p:spPr>
           <a:xfrm>
-            <a:off x="502920" y="3950208"/>
+            <a:off x="566928" y="3950208"/>
             <a:ext cx="6858000" cy="0"/>
           </a:xfrm>
           <a:prstGeom prst="line">
@@ -4412,7 +4634,7 @@
         </p:nvSpPr>
         <p:spPr>
           <a:xfrm>
-            <a:off x="502920" y="3950208"/>
+            <a:off x="566928" y="3950208"/>
             <a:ext cx="1920240" cy="329184"/>
           </a:xfrm>
           <a:prstGeom prst="rect">
@@ -4422,7 +4644,9 @@
           <a:ln/>
         </p:spPr>
         <p:txBody>
-          <a:bodyPr wrap="square" lIns="0" tIns="0" rIns="0" bIns="0" rtlCol="0" anchor="ctr"/>
+          <a:bodyPr wrap="square" lIns="0" tIns="0" rIns="0" bIns="0" rtlCol="0" anchor="ctr">
+            <a:normAutofit/>
+          </a:bodyPr>
           <a:lstStyle/>
           <a:p>
             <a:pPr indent="0" marL="0">
@@ -4454,7 +4678,7 @@
         </p:nvSpPr>
         <p:spPr>
           <a:xfrm>
-            <a:off x="2423160" y="3950208"/>
+            <a:off x="2487168" y="3950208"/>
             <a:ext cx="4937760" cy="329184"/>
           </a:xfrm>
           <a:prstGeom prst="rect">
@@ -4464,7 +4688,9 @@
           <a:ln/>
         </p:spPr>
         <p:txBody>
-          <a:bodyPr wrap="square" lIns="0" tIns="0" rIns="0" bIns="0" rtlCol="0" anchor="ctr"/>
+          <a:bodyPr wrap="square" lIns="0" tIns="0" rIns="0" bIns="0" rtlCol="0" anchor="ctr">
+            <a:normAutofit/>
+          </a:bodyPr>
           <a:lstStyle/>
           <a:p>
             <a:pPr indent="0" marL="0">
@@ -4496,7 +4722,7 @@
         </p:nvSpPr>
         <p:spPr>
           <a:xfrm>
-            <a:off x="502920" y="4389120"/>
+            <a:off x="566928" y="4389120"/>
             <a:ext cx="6858000" cy="1005840"/>
           </a:xfrm>
           <a:prstGeom prst="rect">
@@ -4521,7 +4747,7 @@
         </p:nvSpPr>
         <p:spPr>
           <a:xfrm>
-            <a:off x="685800" y="4389120"/>
+            <a:off x="749808" y="4389120"/>
             <a:ext cx="2726741" cy="502920"/>
           </a:xfrm>
           <a:prstGeom prst="rect">
@@ -4560,7 +4786,7 @@
         </p:nvSpPr>
         <p:spPr>
           <a:xfrm>
-            <a:off x="3412541" y="4389120"/>
+            <a:off x="3476549" y="4389120"/>
             <a:ext cx="3765499" cy="502920"/>
           </a:xfrm>
           <a:prstGeom prst="rect">
@@ -4599,7 +4825,7 @@
         </p:nvSpPr>
         <p:spPr>
           <a:xfrm>
-            <a:off x="640080" y="4892040"/>
+            <a:off x="704088" y="4892040"/>
             <a:ext cx="6583680" cy="0"/>
           </a:xfrm>
           <a:prstGeom prst="line">
@@ -4622,7 +4848,7 @@
         </p:nvSpPr>
         <p:spPr>
           <a:xfrm>
-            <a:off x="685800" y="4892040"/>
+            <a:off x="749808" y="4892040"/>
             <a:ext cx="2726741" cy="457200"/>
           </a:xfrm>
           <a:prstGeom prst="rect">
@@ -4661,7 +4887,7 @@
         </p:nvSpPr>
         <p:spPr>
           <a:xfrm>
-            <a:off x="3412541" y="4892040"/>
+            <a:off x="3476549" y="4892040"/>
             <a:ext cx="3765499" cy="457200"/>
           </a:xfrm>
           <a:prstGeom prst="rect">
@@ -4700,7 +4926,7 @@
         </p:nvSpPr>
         <p:spPr>
           <a:xfrm>
-            <a:off x="7540600" y="1371600"/>
+            <a:off x="7604608" y="1371600"/>
             <a:ext cx="0" cy="4754880"/>
           </a:xfrm>
           <a:prstGeom prst="line">
@@ -4723,7 +4949,7 @@
         </p:nvSpPr>
         <p:spPr>
           <a:xfrm>
-            <a:off x="7720279" y="1645920"/>
+            <a:off x="7784287" y="1645920"/>
             <a:ext cx="3840480" cy="2103120"/>
           </a:xfrm>
           <a:prstGeom prst="roundRect">
@@ -4745,7 +4971,7 @@
         </p:nvSpPr>
         <p:spPr>
           <a:xfrm>
-            <a:off x="7720279" y="1700784"/>
+            <a:off x="7784287" y="1700784"/>
             <a:ext cx="36576" cy="1993392"/>
           </a:xfrm>
           <a:prstGeom prst="rect">
@@ -4765,7 +4991,7 @@
         </p:nvSpPr>
         <p:spPr>
           <a:xfrm>
-            <a:off x="7866583" y="1737360"/>
+            <a:off x="7930591" y="1737360"/>
             <a:ext cx="3584448" cy="201168"/>
           </a:xfrm>
           <a:prstGeom prst="rect">
@@ -4804,7 +5030,7 @@
         </p:nvSpPr>
         <p:spPr>
           <a:xfrm>
-            <a:off x="7866583" y="1938528"/>
+            <a:off x="7930591" y="1938528"/>
             <a:ext cx="3584448" cy="1773936"/>
           </a:xfrm>
           <a:prstGeom prst="rect">
@@ -4895,7 +5121,7 @@
         </p:nvSpPr>
         <p:spPr>
           <a:xfrm>
-            <a:off x="7720279" y="3977640"/>
+            <a:off x="7784287" y="3977640"/>
             <a:ext cx="3840480" cy="2148840"/>
           </a:xfrm>
           <a:prstGeom prst="roundRect">
@@ -4917,7 +5143,7 @@
         </p:nvSpPr>
         <p:spPr>
           <a:xfrm>
-            <a:off x="7720279" y="4032504"/>
+            <a:off x="7784287" y="4032504"/>
             <a:ext cx="36576" cy="2039112"/>
           </a:xfrm>
           <a:prstGeom prst="rect">
@@ -4937,7 +5163,7 @@
         </p:nvSpPr>
         <p:spPr>
           <a:xfrm>
-            <a:off x="7866583" y="4069080"/>
+            <a:off x="7930591" y="4069080"/>
             <a:ext cx="3584448" cy="201168"/>
           </a:xfrm>
           <a:prstGeom prst="rect">
@@ -4976,7 +5202,7 @@
         </p:nvSpPr>
         <p:spPr>
           <a:xfrm>
-            <a:off x="7866583" y="4270248"/>
+            <a:off x="7930591" y="4270248"/>
             <a:ext cx="3584448" cy="1819656"/>
           </a:xfrm>
           <a:prstGeom prst="rect">
@@ -5067,7 +5293,7 @@
         </p:nvSpPr>
         <p:spPr>
           <a:xfrm>
-            <a:off x="502920" y="6382512"/>
+            <a:off x="566928" y="6382512"/>
             <a:ext cx="7315200" cy="219456"/>
           </a:xfrm>
           <a:prstGeom prst="rect">
@@ -5106,7 +5332,7 @@
         </p:nvSpPr>
         <p:spPr>
           <a:xfrm>
-            <a:off x="10774375" y="6382512"/>
+            <a:off x="10710367" y="6382512"/>
             <a:ext cx="914400" cy="219456"/>
           </a:xfrm>
           <a:prstGeom prst="rect">
@@ -5177,7 +5403,7 @@
         </p:nvSpPr>
         <p:spPr>
           <a:xfrm>
-            <a:off x="502920" y="457200"/>
+            <a:off x="566928" y="457200"/>
             <a:ext cx="384048" cy="384048"/>
           </a:xfrm>
           <a:prstGeom prst="ellipse">
@@ -5197,7 +5423,7 @@
         </p:nvSpPr>
         <p:spPr>
           <a:xfrm>
-            <a:off x="502920" y="457200"/>
+            <a:off x="566928" y="457200"/>
             <a:ext cx="384048" cy="384048"/>
           </a:xfrm>
           <a:prstGeom prst="rect">
@@ -5236,7 +5462,7 @@
         </p:nvSpPr>
         <p:spPr>
           <a:xfrm>
-            <a:off x="1069848" y="457200"/>
+            <a:off x="1133856" y="457200"/>
             <a:ext cx="10490911" cy="182880"/>
           </a:xfrm>
           <a:prstGeom prst="rect">
@@ -5275,7 +5501,7 @@
         </p:nvSpPr>
         <p:spPr>
           <a:xfrm>
-            <a:off x="1069848" y="640080"/>
+            <a:off x="1133856" y="640080"/>
             <a:ext cx="10490911" cy="365760"/>
           </a:xfrm>
           <a:prstGeom prst="rect">
@@ -5285,7 +5511,9 @@
           <a:ln/>
         </p:spPr>
         <p:txBody>
-          <a:bodyPr wrap="square" lIns="0" tIns="0" rIns="0" bIns="0" rtlCol="0" anchor="ctr"/>
+          <a:bodyPr wrap="square" lIns="0" tIns="0" rIns="0" bIns="0" rtlCol="0" anchor="ctr">
+            <a:normAutofit/>
+          </a:bodyPr>
           <a:lstStyle/>
           <a:p>
             <a:pPr indent="0" marL="0">
@@ -5322,7 +5550,7 @@
         </p:blipFill>
         <p:spPr>
           <a:xfrm>
-            <a:off x="502920" y="1481328"/>
+            <a:off x="566928" y="1481328"/>
             <a:ext cx="5120640" cy="4114800"/>
           </a:xfrm>
           <a:prstGeom prst="rect">
@@ -5338,7 +5566,7 @@
         </p:nvSpPr>
         <p:spPr>
           <a:xfrm>
-            <a:off x="5989320" y="1481328"/>
+            <a:off x="6053328" y="1481328"/>
             <a:ext cx="5571439" cy="237744"/>
           </a:xfrm>
           <a:prstGeom prst="rect">
@@ -5377,7 +5605,7 @@
         </p:nvSpPr>
         <p:spPr>
           <a:xfrm>
-            <a:off x="5989320" y="1801368"/>
+            <a:off x="6053328" y="1801368"/>
             <a:ext cx="1560003" cy="347472"/>
           </a:xfrm>
           <a:prstGeom prst="rect">
@@ -5387,7 +5615,9 @@
           <a:ln/>
         </p:spPr>
         <p:txBody>
-          <a:bodyPr wrap="square" lIns="0" tIns="0" rIns="0" bIns="0" rtlCol="0" anchor="ctr"/>
+          <a:bodyPr wrap="square" lIns="0" tIns="0" rIns="0" bIns="0" rtlCol="0" anchor="ctr">
+            <a:normAutofit/>
+          </a:bodyPr>
           <a:lstStyle/>
           <a:p>
             <a:pPr indent="0" marL="0">
@@ -5419,7 +5649,7 @@
         </p:nvSpPr>
         <p:spPr>
           <a:xfrm>
-            <a:off x="7549323" y="1801368"/>
+            <a:off x="7613331" y="1801368"/>
             <a:ext cx="4011436" cy="347472"/>
           </a:xfrm>
           <a:prstGeom prst="rect">
@@ -5429,7 +5659,9 @@
           <a:ln/>
         </p:spPr>
         <p:txBody>
-          <a:bodyPr wrap="square" lIns="0" tIns="0" rIns="0" bIns="0" rtlCol="0" anchor="ctr"/>
+          <a:bodyPr wrap="square" lIns="0" tIns="0" rIns="0" bIns="0" rtlCol="0" anchor="ctr">
+            <a:normAutofit/>
+          </a:bodyPr>
           <a:lstStyle/>
           <a:p>
             <a:pPr indent="0" marL="0">
@@ -5461,7 +5693,7 @@
         </p:nvSpPr>
         <p:spPr>
           <a:xfrm>
-            <a:off x="5989320" y="2148840"/>
+            <a:off x="6053328" y="2148840"/>
             <a:ext cx="5571439" cy="0"/>
           </a:xfrm>
           <a:prstGeom prst="line">
@@ -5484,7 +5716,7 @@
         </p:nvSpPr>
         <p:spPr>
           <a:xfrm>
-            <a:off x="5989320" y="2148840"/>
+            <a:off x="6053328" y="2148840"/>
             <a:ext cx="1560003" cy="347472"/>
           </a:xfrm>
           <a:prstGeom prst="rect">
@@ -5494,7 +5726,9 @@
           <a:ln/>
         </p:spPr>
         <p:txBody>
-          <a:bodyPr wrap="square" lIns="0" tIns="0" rIns="0" bIns="0" rtlCol="0" anchor="ctr"/>
+          <a:bodyPr wrap="square" lIns="0" tIns="0" rIns="0" bIns="0" rtlCol="0" anchor="ctr">
+            <a:normAutofit/>
+          </a:bodyPr>
           <a:lstStyle/>
           <a:p>
             <a:pPr indent="0" marL="0">
@@ -5526,7 +5760,7 @@
         </p:nvSpPr>
         <p:spPr>
           <a:xfrm>
-            <a:off x="7549323" y="2148840"/>
+            <a:off x="7613331" y="2148840"/>
             <a:ext cx="4011436" cy="347472"/>
           </a:xfrm>
           <a:prstGeom prst="rect">
@@ -5536,7 +5770,9 @@
           <a:ln/>
         </p:spPr>
         <p:txBody>
-          <a:bodyPr wrap="square" lIns="0" tIns="0" rIns="0" bIns="0" rtlCol="0" anchor="ctr"/>
+          <a:bodyPr wrap="square" lIns="0" tIns="0" rIns="0" bIns="0" rtlCol="0" anchor="ctr">
+            <a:normAutofit/>
+          </a:bodyPr>
           <a:lstStyle/>
           <a:p>
             <a:pPr indent="0" marL="0">
@@ -5568,7 +5804,7 @@
         </p:nvSpPr>
         <p:spPr>
           <a:xfrm>
-            <a:off x="5989320" y="2496312"/>
+            <a:off x="6053328" y="2496312"/>
             <a:ext cx="5571439" cy="0"/>
           </a:xfrm>
           <a:prstGeom prst="line">
@@ -5591,7 +5827,7 @@
         </p:nvSpPr>
         <p:spPr>
           <a:xfrm>
-            <a:off x="5989320" y="2496312"/>
+            <a:off x="6053328" y="2496312"/>
             <a:ext cx="1560003" cy="347472"/>
           </a:xfrm>
           <a:prstGeom prst="rect">
@@ -5601,7 +5837,9 @@
           <a:ln/>
         </p:spPr>
         <p:txBody>
-          <a:bodyPr wrap="square" lIns="0" tIns="0" rIns="0" bIns="0" rtlCol="0" anchor="ctr"/>
+          <a:bodyPr wrap="square" lIns="0" tIns="0" rIns="0" bIns="0" rtlCol="0" anchor="ctr">
+            <a:normAutofit/>
+          </a:bodyPr>
           <a:lstStyle/>
           <a:p>
             <a:pPr indent="0" marL="0">
@@ -5633,7 +5871,7 @@
         </p:nvSpPr>
         <p:spPr>
           <a:xfrm>
-            <a:off x="7549323" y="2496312"/>
+            <a:off x="7613331" y="2496312"/>
             <a:ext cx="4011436" cy="347472"/>
           </a:xfrm>
           <a:prstGeom prst="rect">
@@ -5643,7 +5881,9 @@
           <a:ln/>
         </p:spPr>
         <p:txBody>
-          <a:bodyPr wrap="square" lIns="0" tIns="0" rIns="0" bIns="0" rtlCol="0" anchor="ctr"/>
+          <a:bodyPr wrap="square" lIns="0" tIns="0" rIns="0" bIns="0" rtlCol="0" anchor="ctr">
+            <a:normAutofit/>
+          </a:bodyPr>
           <a:lstStyle/>
           <a:p>
             <a:pPr indent="0" marL="0">
@@ -5675,7 +5915,7 @@
         </p:nvSpPr>
         <p:spPr>
           <a:xfrm>
-            <a:off x="5989320" y="2843784"/>
+            <a:off x="6053328" y="2843784"/>
             <a:ext cx="5571439" cy="0"/>
           </a:xfrm>
           <a:prstGeom prst="line">
@@ -5698,7 +5938,7 @@
         </p:nvSpPr>
         <p:spPr>
           <a:xfrm>
-            <a:off x="5989320" y="2843784"/>
+            <a:off x="6053328" y="2843784"/>
             <a:ext cx="1560003" cy="347472"/>
           </a:xfrm>
           <a:prstGeom prst="rect">
@@ -5708,7 +5948,9 @@
           <a:ln/>
         </p:spPr>
         <p:txBody>
-          <a:bodyPr wrap="square" lIns="0" tIns="0" rIns="0" bIns="0" rtlCol="0" anchor="ctr"/>
+          <a:bodyPr wrap="square" lIns="0" tIns="0" rIns="0" bIns="0" rtlCol="0" anchor="ctr">
+            <a:normAutofit/>
+          </a:bodyPr>
           <a:lstStyle/>
           <a:p>
             <a:pPr indent="0" marL="0">
@@ -5740,7 +5982,7 @@
         </p:nvSpPr>
         <p:spPr>
           <a:xfrm>
-            <a:off x="7549323" y="2843784"/>
+            <a:off x="7613331" y="2843784"/>
             <a:ext cx="4011436" cy="347472"/>
           </a:xfrm>
           <a:prstGeom prst="rect">
@@ -5750,7 +5992,9 @@
           <a:ln/>
         </p:spPr>
         <p:txBody>
-          <a:bodyPr wrap="square" lIns="0" tIns="0" rIns="0" bIns="0" rtlCol="0" anchor="ctr"/>
+          <a:bodyPr wrap="square" lIns="0" tIns="0" rIns="0" bIns="0" rtlCol="0" anchor="ctr">
+            <a:normAutofit/>
+          </a:bodyPr>
           <a:lstStyle/>
           <a:p>
             <a:pPr indent="0" marL="0">
@@ -5782,7 +6026,7 @@
         </p:nvSpPr>
         <p:spPr>
           <a:xfrm>
-            <a:off x="5989320" y="3191256"/>
+            <a:off x="6053328" y="3191256"/>
             <a:ext cx="5571439" cy="0"/>
           </a:xfrm>
           <a:prstGeom prst="line">
@@ -5805,7 +6049,7 @@
         </p:nvSpPr>
         <p:spPr>
           <a:xfrm>
-            <a:off x="5989320" y="3191256"/>
+            <a:off x="6053328" y="3191256"/>
             <a:ext cx="1560003" cy="347472"/>
           </a:xfrm>
           <a:prstGeom prst="rect">
@@ -5815,7 +6059,9 @@
           <a:ln/>
         </p:spPr>
         <p:txBody>
-          <a:bodyPr wrap="square" lIns="0" tIns="0" rIns="0" bIns="0" rtlCol="0" anchor="ctr"/>
+          <a:bodyPr wrap="square" lIns="0" tIns="0" rIns="0" bIns="0" rtlCol="0" anchor="ctr">
+            <a:normAutofit/>
+          </a:bodyPr>
           <a:lstStyle/>
           <a:p>
             <a:pPr indent="0" marL="0">
@@ -5847,7 +6093,7 @@
         </p:nvSpPr>
         <p:spPr>
           <a:xfrm>
-            <a:off x="7549323" y="3191256"/>
+            <a:off x="7613331" y="3191256"/>
             <a:ext cx="4011436" cy="347472"/>
           </a:xfrm>
           <a:prstGeom prst="rect">
@@ -5857,7 +6103,9 @@
           <a:ln/>
         </p:spPr>
         <p:txBody>
-          <a:bodyPr wrap="square" lIns="0" tIns="0" rIns="0" bIns="0" rtlCol="0" anchor="ctr"/>
+          <a:bodyPr wrap="square" lIns="0" tIns="0" rIns="0" bIns="0" rtlCol="0" anchor="ctr">
+            <a:normAutofit/>
+          </a:bodyPr>
           <a:lstStyle/>
           <a:p>
             <a:pPr indent="0" marL="0">
@@ -5889,7 +6137,7 @@
         </p:nvSpPr>
         <p:spPr>
           <a:xfrm>
-            <a:off x="5989320" y="3648456"/>
+            <a:off x="6053328" y="3648456"/>
             <a:ext cx="5571439" cy="877824"/>
           </a:xfrm>
           <a:prstGeom prst="roundRect">
@@ -5911,7 +6159,7 @@
         </p:nvSpPr>
         <p:spPr>
           <a:xfrm>
-            <a:off x="5989320" y="3703320"/>
+            <a:off x="6053328" y="3703320"/>
             <a:ext cx="36576" cy="768096"/>
           </a:xfrm>
           <a:prstGeom prst="rect">
@@ -5931,7 +6179,7 @@
         </p:nvSpPr>
         <p:spPr>
           <a:xfrm>
-            <a:off x="6135624" y="3739896"/>
+            <a:off x="6199632" y="3739896"/>
             <a:ext cx="5315407" cy="201168"/>
           </a:xfrm>
           <a:prstGeom prst="rect">
@@ -5970,7 +6218,7 @@
         </p:nvSpPr>
         <p:spPr>
           <a:xfrm>
-            <a:off x="6135624" y="3941064"/>
+            <a:off x="6199632" y="3941064"/>
             <a:ext cx="5315407" cy="548640"/>
           </a:xfrm>
           <a:prstGeom prst="rect">
@@ -6037,7 +6285,7 @@
         </p:nvSpPr>
         <p:spPr>
           <a:xfrm>
-            <a:off x="502920" y="6382512"/>
+            <a:off x="566928" y="6382512"/>
             <a:ext cx="7315200" cy="219456"/>
           </a:xfrm>
           <a:prstGeom prst="rect">
@@ -6076,7 +6324,7 @@
         </p:nvSpPr>
         <p:spPr>
           <a:xfrm>
-            <a:off x="10774375" y="6382512"/>
+            <a:off x="10710367" y="6382512"/>
             <a:ext cx="914400" cy="219456"/>
           </a:xfrm>
           <a:prstGeom prst="rect">
@@ -6147,7 +6395,7 @@
         </p:nvSpPr>
         <p:spPr>
           <a:xfrm>
-            <a:off x="502920" y="457200"/>
+            <a:off x="566928" y="457200"/>
             <a:ext cx="384048" cy="384048"/>
           </a:xfrm>
           <a:prstGeom prst="ellipse">
@@ -6167,7 +6415,7 @@
         </p:nvSpPr>
         <p:spPr>
           <a:xfrm>
-            <a:off x="502920" y="457200"/>
+            <a:off x="566928" y="457200"/>
             <a:ext cx="384048" cy="384048"/>
           </a:xfrm>
           <a:prstGeom prst="rect">
@@ -6206,7 +6454,7 @@
         </p:nvSpPr>
         <p:spPr>
           <a:xfrm>
-            <a:off x="1069848" y="457200"/>
+            <a:off x="1133856" y="457200"/>
             <a:ext cx="10490911" cy="182880"/>
           </a:xfrm>
           <a:prstGeom prst="rect">
@@ -6245,7 +6493,7 @@
         </p:nvSpPr>
         <p:spPr>
           <a:xfrm>
-            <a:off x="1069848" y="640080"/>
+            <a:off x="1133856" y="640080"/>
             <a:ext cx="10490911" cy="365760"/>
           </a:xfrm>
           <a:prstGeom prst="rect">
@@ -6255,7 +6503,9 @@
           <a:ln/>
         </p:spPr>
         <p:txBody>
-          <a:bodyPr wrap="square" lIns="0" tIns="0" rIns="0" bIns="0" rtlCol="0" anchor="ctr"/>
+          <a:bodyPr wrap="square" lIns="0" tIns="0" rIns="0" bIns="0" rtlCol="0" anchor="ctr">
+            <a:normAutofit/>
+          </a:bodyPr>
           <a:lstStyle/>
           <a:p>
             <a:pPr indent="0" marL="0">
@@ -6292,7 +6542,7 @@
         </p:blipFill>
         <p:spPr>
           <a:xfrm>
-            <a:off x="502920" y="1481328"/>
+            <a:off x="566928" y="1481328"/>
             <a:ext cx="5120640" cy="4114800"/>
           </a:xfrm>
           <a:prstGeom prst="rect">
@@ -6308,7 +6558,7 @@
         </p:nvSpPr>
         <p:spPr>
           <a:xfrm>
-            <a:off x="5989320" y="1481328"/>
+            <a:off x="6053328" y="1481328"/>
             <a:ext cx="5571439" cy="237744"/>
           </a:xfrm>
           <a:prstGeom prst="rect">
@@ -6347,7 +6597,7 @@
         </p:nvSpPr>
         <p:spPr>
           <a:xfrm>
-            <a:off x="5989320" y="1801368"/>
+            <a:off x="6053328" y="1801368"/>
             <a:ext cx="1560003" cy="347472"/>
           </a:xfrm>
           <a:prstGeom prst="rect">
@@ -6357,7 +6607,9 @@
           <a:ln/>
         </p:spPr>
         <p:txBody>
-          <a:bodyPr wrap="square" lIns="0" tIns="0" rIns="0" bIns="0" rtlCol="0" anchor="ctr"/>
+          <a:bodyPr wrap="square" lIns="0" tIns="0" rIns="0" bIns="0" rtlCol="0" anchor="ctr">
+            <a:normAutofit/>
+          </a:bodyPr>
           <a:lstStyle/>
           <a:p>
             <a:pPr indent="0" marL="0">
@@ -6389,7 +6641,7 @@
         </p:nvSpPr>
         <p:spPr>
           <a:xfrm>
-            <a:off x="7549323" y="1801368"/>
+            <a:off x="7613331" y="1801368"/>
             <a:ext cx="4011436" cy="347472"/>
           </a:xfrm>
           <a:prstGeom prst="rect">
@@ -6399,7 +6651,9 @@
           <a:ln/>
         </p:spPr>
         <p:txBody>
-          <a:bodyPr wrap="square" lIns="0" tIns="0" rIns="0" bIns="0" rtlCol="0" anchor="ctr"/>
+          <a:bodyPr wrap="square" lIns="0" tIns="0" rIns="0" bIns="0" rtlCol="0" anchor="ctr">
+            <a:normAutofit/>
+          </a:bodyPr>
           <a:lstStyle/>
           <a:p>
             <a:pPr indent="0" marL="0">
@@ -6431,7 +6685,7 @@
         </p:nvSpPr>
         <p:spPr>
           <a:xfrm>
-            <a:off x="5989320" y="2148840"/>
+            <a:off x="6053328" y="2148840"/>
             <a:ext cx="5571439" cy="0"/>
           </a:xfrm>
           <a:prstGeom prst="line">
@@ -6454,7 +6708,7 @@
         </p:nvSpPr>
         <p:spPr>
           <a:xfrm>
-            <a:off x="5989320" y="2148840"/>
+            <a:off x="6053328" y="2148840"/>
             <a:ext cx="1560003" cy="347472"/>
           </a:xfrm>
           <a:prstGeom prst="rect">
@@ -6464,7 +6718,9 @@
           <a:ln/>
         </p:spPr>
         <p:txBody>
-          <a:bodyPr wrap="square" lIns="0" tIns="0" rIns="0" bIns="0" rtlCol="0" anchor="ctr"/>
+          <a:bodyPr wrap="square" lIns="0" tIns="0" rIns="0" bIns="0" rtlCol="0" anchor="ctr">
+            <a:normAutofit/>
+          </a:bodyPr>
           <a:lstStyle/>
           <a:p>
             <a:pPr indent="0" marL="0">
@@ -6496,7 +6752,7 @@
         </p:nvSpPr>
         <p:spPr>
           <a:xfrm>
-            <a:off x="7549323" y="2148840"/>
+            <a:off x="7613331" y="2148840"/>
             <a:ext cx="4011436" cy="347472"/>
           </a:xfrm>
           <a:prstGeom prst="rect">
@@ -6506,7 +6762,9 @@
           <a:ln/>
         </p:spPr>
         <p:txBody>
-          <a:bodyPr wrap="square" lIns="0" tIns="0" rIns="0" bIns="0" rtlCol="0" anchor="ctr"/>
+          <a:bodyPr wrap="square" lIns="0" tIns="0" rIns="0" bIns="0" rtlCol="0" anchor="ctr">
+            <a:normAutofit/>
+          </a:bodyPr>
           <a:lstStyle/>
           <a:p>
             <a:pPr indent="0" marL="0">
@@ -6538,7 +6796,7 @@
         </p:nvSpPr>
         <p:spPr>
           <a:xfrm>
-            <a:off x="5989320" y="2496312"/>
+            <a:off x="6053328" y="2496312"/>
             <a:ext cx="5571439" cy="0"/>
           </a:xfrm>
           <a:prstGeom prst="line">
@@ -6561,7 +6819,7 @@
         </p:nvSpPr>
         <p:spPr>
           <a:xfrm>
-            <a:off x="5989320" y="2496312"/>
+            <a:off x="6053328" y="2496312"/>
             <a:ext cx="1560003" cy="347472"/>
           </a:xfrm>
           <a:prstGeom prst="rect">
@@ -6571,7 +6829,9 @@
           <a:ln/>
         </p:spPr>
         <p:txBody>
-          <a:bodyPr wrap="square" lIns="0" tIns="0" rIns="0" bIns="0" rtlCol="0" anchor="ctr"/>
+          <a:bodyPr wrap="square" lIns="0" tIns="0" rIns="0" bIns="0" rtlCol="0" anchor="ctr">
+            <a:normAutofit/>
+          </a:bodyPr>
           <a:lstStyle/>
           <a:p>
             <a:pPr indent="0" marL="0">
@@ -6603,7 +6863,7 @@
         </p:nvSpPr>
         <p:spPr>
           <a:xfrm>
-            <a:off x="7549323" y="2496312"/>
+            <a:off x="7613331" y="2496312"/>
             <a:ext cx="4011436" cy="347472"/>
           </a:xfrm>
           <a:prstGeom prst="rect">
@@ -6613,7 +6873,9 @@
           <a:ln/>
         </p:spPr>
         <p:txBody>
-          <a:bodyPr wrap="square" lIns="0" tIns="0" rIns="0" bIns="0" rtlCol="0" anchor="ctr"/>
+          <a:bodyPr wrap="square" lIns="0" tIns="0" rIns="0" bIns="0" rtlCol="0" anchor="ctr">
+            <a:normAutofit/>
+          </a:bodyPr>
           <a:lstStyle/>
           <a:p>
             <a:pPr indent="0" marL="0">
@@ -6645,7 +6907,7 @@
         </p:nvSpPr>
         <p:spPr>
           <a:xfrm>
-            <a:off x="5989320" y="2843784"/>
+            <a:off x="6053328" y="2843784"/>
             <a:ext cx="5571439" cy="0"/>
           </a:xfrm>
           <a:prstGeom prst="line">
@@ -6668,7 +6930,7 @@
         </p:nvSpPr>
         <p:spPr>
           <a:xfrm>
-            <a:off x="5989320" y="2843784"/>
+            <a:off x="6053328" y="2843784"/>
             <a:ext cx="1560003" cy="347472"/>
           </a:xfrm>
           <a:prstGeom prst="rect">
@@ -6678,7 +6940,9 @@
           <a:ln/>
         </p:spPr>
         <p:txBody>
-          <a:bodyPr wrap="square" lIns="0" tIns="0" rIns="0" bIns="0" rtlCol="0" anchor="ctr"/>
+          <a:bodyPr wrap="square" lIns="0" tIns="0" rIns="0" bIns="0" rtlCol="0" anchor="ctr">
+            <a:normAutofit/>
+          </a:bodyPr>
           <a:lstStyle/>
           <a:p>
             <a:pPr indent="0" marL="0">
@@ -6710,7 +6974,7 @@
         </p:nvSpPr>
         <p:spPr>
           <a:xfrm>
-            <a:off x="7549323" y="2843784"/>
+            <a:off x="7613331" y="2843784"/>
             <a:ext cx="4011436" cy="347472"/>
           </a:xfrm>
           <a:prstGeom prst="rect">
@@ -6720,7 +6984,9 @@
           <a:ln/>
         </p:spPr>
         <p:txBody>
-          <a:bodyPr wrap="square" lIns="0" tIns="0" rIns="0" bIns="0" rtlCol="0" anchor="ctr"/>
+          <a:bodyPr wrap="square" lIns="0" tIns="0" rIns="0" bIns="0" rtlCol="0" anchor="ctr">
+            <a:normAutofit/>
+          </a:bodyPr>
           <a:lstStyle/>
           <a:p>
             <a:pPr indent="0" marL="0">
@@ -6752,7 +7018,7 @@
         </p:nvSpPr>
         <p:spPr>
           <a:xfrm>
-            <a:off x="5989320" y="3191256"/>
+            <a:off x="6053328" y="3191256"/>
             <a:ext cx="5571439" cy="0"/>
           </a:xfrm>
           <a:prstGeom prst="line">
@@ -6775,7 +7041,7 @@
         </p:nvSpPr>
         <p:spPr>
           <a:xfrm>
-            <a:off x="5989320" y="3191256"/>
+            <a:off x="6053328" y="3191256"/>
             <a:ext cx="1560003" cy="347472"/>
           </a:xfrm>
           <a:prstGeom prst="rect">
@@ -6785,7 +7051,9 @@
           <a:ln/>
         </p:spPr>
         <p:txBody>
-          <a:bodyPr wrap="square" lIns="0" tIns="0" rIns="0" bIns="0" rtlCol="0" anchor="ctr"/>
+          <a:bodyPr wrap="square" lIns="0" tIns="0" rIns="0" bIns="0" rtlCol="0" anchor="ctr">
+            <a:normAutofit/>
+          </a:bodyPr>
           <a:lstStyle/>
           <a:p>
             <a:pPr indent="0" marL="0">
@@ -6817,7 +7085,7 @@
         </p:nvSpPr>
         <p:spPr>
           <a:xfrm>
-            <a:off x="7549323" y="3191256"/>
+            <a:off x="7613331" y="3191256"/>
             <a:ext cx="4011436" cy="347472"/>
           </a:xfrm>
           <a:prstGeom prst="rect">
@@ -6827,7 +7095,9 @@
           <a:ln/>
         </p:spPr>
         <p:txBody>
-          <a:bodyPr wrap="square" lIns="0" tIns="0" rIns="0" bIns="0" rtlCol="0" anchor="ctr"/>
+          <a:bodyPr wrap="square" lIns="0" tIns="0" rIns="0" bIns="0" rtlCol="0" anchor="ctr">
+            <a:normAutofit/>
+          </a:bodyPr>
           <a:lstStyle/>
           <a:p>
             <a:pPr indent="0" marL="0">
@@ -6859,7 +7129,7 @@
         </p:nvSpPr>
         <p:spPr>
           <a:xfrm>
-            <a:off x="5989320" y="3538728"/>
+            <a:off x="6053328" y="3538728"/>
             <a:ext cx="5571439" cy="0"/>
           </a:xfrm>
           <a:prstGeom prst="line">
@@ -6882,7 +7152,7 @@
         </p:nvSpPr>
         <p:spPr>
           <a:xfrm>
-            <a:off x="5989320" y="3538728"/>
+            <a:off x="6053328" y="3538728"/>
             <a:ext cx="1560003" cy="347472"/>
           </a:xfrm>
           <a:prstGeom prst="rect">
@@ -6892,7 +7162,9 @@
           <a:ln/>
         </p:spPr>
         <p:txBody>
-          <a:bodyPr wrap="square" lIns="0" tIns="0" rIns="0" bIns="0" rtlCol="0" anchor="ctr"/>
+          <a:bodyPr wrap="square" lIns="0" tIns="0" rIns="0" bIns="0" rtlCol="0" anchor="ctr">
+            <a:normAutofit/>
+          </a:bodyPr>
           <a:lstStyle/>
           <a:p>
             <a:pPr indent="0" marL="0">
@@ -6924,7 +7196,7 @@
         </p:nvSpPr>
         <p:spPr>
           <a:xfrm>
-            <a:off x="7549323" y="3538728"/>
+            <a:off x="7613331" y="3538728"/>
             <a:ext cx="4011436" cy="347472"/>
           </a:xfrm>
           <a:prstGeom prst="rect">
@@ -6934,7 +7206,9 @@
           <a:ln/>
         </p:spPr>
         <p:txBody>
-          <a:bodyPr wrap="square" lIns="0" tIns="0" rIns="0" bIns="0" rtlCol="0" anchor="ctr"/>
+          <a:bodyPr wrap="square" lIns="0" tIns="0" rIns="0" bIns="0" rtlCol="0" anchor="ctr">
+            <a:normAutofit/>
+          </a:bodyPr>
           <a:lstStyle/>
           <a:p>
             <a:pPr indent="0" marL="0">
@@ -6966,7 +7240,7 @@
         </p:nvSpPr>
         <p:spPr>
           <a:xfrm>
-            <a:off x="5989320" y="3995928"/>
+            <a:off x="6053328" y="3995928"/>
             <a:ext cx="5571439" cy="1316736"/>
           </a:xfrm>
           <a:prstGeom prst="roundRect">
@@ -6988,7 +7262,7 @@
         </p:nvSpPr>
         <p:spPr>
           <a:xfrm>
-            <a:off x="5989320" y="4050792"/>
+            <a:off x="6053328" y="4050792"/>
             <a:ext cx="36576" cy="1207008"/>
           </a:xfrm>
           <a:prstGeom prst="rect">
@@ -7008,7 +7282,7 @@
         </p:nvSpPr>
         <p:spPr>
           <a:xfrm>
-            <a:off x="6135624" y="4087368"/>
+            <a:off x="6199632" y="4087368"/>
             <a:ext cx="5315407" cy="201168"/>
           </a:xfrm>
           <a:prstGeom prst="rect">
@@ -7047,7 +7321,7 @@
         </p:nvSpPr>
         <p:spPr>
           <a:xfrm>
-            <a:off x="6135624" y="4288536"/>
+            <a:off x="6199632" y="4288536"/>
             <a:ext cx="5315407" cy="987552"/>
           </a:xfrm>
           <a:prstGeom prst="rect">
@@ -7138,7 +7412,7 @@
         </p:nvSpPr>
         <p:spPr>
           <a:xfrm>
-            <a:off x="5989320" y="5715000"/>
+            <a:off x="6053328" y="5715000"/>
             <a:ext cx="5571439" cy="384048"/>
           </a:xfrm>
           <a:prstGeom prst="rect">
@@ -7180,7 +7454,7 @@
         </p:nvSpPr>
         <p:spPr>
           <a:xfrm>
-            <a:off x="502920" y="6382512"/>
+            <a:off x="566928" y="6382512"/>
             <a:ext cx="7315200" cy="219456"/>
           </a:xfrm>
           <a:prstGeom prst="rect">
@@ -7219,7 +7493,7 @@
         </p:nvSpPr>
         <p:spPr>
           <a:xfrm>
-            <a:off x="10774375" y="6382512"/>
+            <a:off x="10710367" y="6382512"/>
             <a:ext cx="914400" cy="219456"/>
           </a:xfrm>
           <a:prstGeom prst="rect">
@@ -7290,7 +7564,7 @@
         </p:nvSpPr>
         <p:spPr>
           <a:xfrm>
-            <a:off x="502920" y="457200"/>
+            <a:off x="566928" y="457200"/>
             <a:ext cx="384048" cy="384048"/>
           </a:xfrm>
           <a:prstGeom prst="ellipse">
@@ -7310,7 +7584,7 @@
         </p:nvSpPr>
         <p:spPr>
           <a:xfrm>
-            <a:off x="502920" y="457200"/>
+            <a:off x="566928" y="457200"/>
             <a:ext cx="384048" cy="384048"/>
           </a:xfrm>
           <a:prstGeom prst="rect">
@@ -7349,7 +7623,7 @@
         </p:nvSpPr>
         <p:spPr>
           <a:xfrm>
-            <a:off x="1069848" y="457200"/>
+            <a:off x="1133856" y="457200"/>
             <a:ext cx="10490911" cy="182880"/>
           </a:xfrm>
           <a:prstGeom prst="rect">
@@ -7374,7 +7648,7 @@
                 <a:ea typeface="Arial" pitchFamily="34" charset="-122"/>
                 <a:cs typeface="Arial" pitchFamily="34" charset="-120"/>
               </a:rPr>
-              <a:t>수익률</a:t>
+              <a:t>렌트롤</a:t>
             </a:r>
             <a:endParaRPr lang="en-US" sz="950" dirty="0"/>
           </a:p>
@@ -7388,7 +7662,7 @@
         </p:nvSpPr>
         <p:spPr>
           <a:xfrm>
-            <a:off x="1069848" y="640080"/>
+            <a:off x="1133856" y="640080"/>
             <a:ext cx="10490911" cy="365760"/>
           </a:xfrm>
           <a:prstGeom prst="rect">
@@ -7398,7 +7672,9 @@
           <a:ln/>
         </p:spPr>
         <p:txBody>
-          <a:bodyPr wrap="square" lIns="0" tIns="0" rIns="0" bIns="0" rtlCol="0" anchor="ctr"/>
+          <a:bodyPr wrap="square" lIns="0" tIns="0" rIns="0" bIns="0" rtlCol="0" anchor="ctr">
+            <a:normAutofit/>
+          </a:bodyPr>
           <a:lstStyle/>
           <a:p>
             <a:pPr indent="0" marL="0">
@@ -7413,7 +7689,7 @@
                 <a:ea typeface="맑은 고딕" pitchFamily="34" charset="-122"/>
                 <a:cs typeface="맑은 고딕" pitchFamily="34" charset="-120"/>
               </a:rPr>
-              <a:t>수익률</a:t>
+              <a:t>렌트롤</a:t>
             </a:r>
             <a:endParaRPr lang="en-US" sz="2300" dirty="0"/>
           </a:p>
@@ -7427,18 +7703,18 @@
         </p:nvSpPr>
         <p:spPr>
           <a:xfrm>
-            <a:off x="502920" y="1371600"/>
+            <a:off x="566928" y="1481328"/>
             <a:ext cx="11057839" cy="4389120"/>
           </a:xfrm>
           <a:prstGeom prst="roundRect">
             <a:avLst>
-              <a:gd name="adj" fmla="val 1667"/>
+              <a:gd name="adj" fmla="val 1250"/>
             </a:avLst>
           </a:prstGeom>
           <a:solidFill>
-            <a:srgbClr val="FFFFFF"/>
+            <a:srgbClr val="F3F6F7"/>
           </a:solidFill>
-          <a:ln w="12700">
+          <a:ln w="6350">
             <a:solidFill>
               <a:srgbClr val="CBD5E0"/>
             </a:solidFill>
@@ -7454,194 +7730,20 @@
         </p:nvSpPr>
         <p:spPr>
           <a:xfrm>
-            <a:off x="731520" y="1600200"/>
-            <a:ext cx="10600639" cy="1005840"/>
+            <a:off x="822960" y="1700784"/>
+            <a:ext cx="1435608" cy="219456"/>
           </a:xfrm>
           <a:prstGeom prst="roundRect">
             <a:avLst>
-              <a:gd name="adj" fmla="val 7273"/>
+              <a:gd name="adj" fmla="val 50000"/>
             </a:avLst>
           </a:prstGeom>
           <a:solidFill>
-            <a:srgbClr val="132A3A"/>
+            <a:srgbClr val="F6F1E4"/>
           </a:solidFill>
-          <a:ln/>
-        </p:spPr>
-      </p:sp>
-      <p:sp>
-        <p:nvSpPr>
-          <p:cNvPr id="8" name="Text 6"/>
-          <p:cNvSpPr/>
-          <p:nvPr/>
-        </p:nvSpPr>
-        <p:spPr>
-          <a:xfrm>
-            <a:off x="960120" y="1600200"/>
-            <a:ext cx="2286000" cy="1005840"/>
-          </a:xfrm>
-          <a:prstGeom prst="rect">
-            <a:avLst/>
-          </a:prstGeom>
-          <a:noFill/>
-          <a:ln/>
-        </p:spPr>
-        <p:txBody>
-          <a:bodyPr wrap="square" rtlCol="0" anchor="ctr"/>
-          <a:lstStyle/>
-          <a:p>
-            <a:pPr indent="0" marL="0">
-              <a:buNone/>
-            </a:pPr>
-            <a:r>
-              <a:rPr lang="en-US" sz="1600" b="1" dirty="0">
-                <a:solidFill>
-                  <a:srgbClr val="FFFFFF"/>
-                </a:solidFill>
-                <a:latin typeface="맑은 고딕" pitchFamily="34" charset="0"/>
-                <a:ea typeface="맑은 고딕" pitchFamily="34" charset="-122"/>
-                <a:cs typeface="맑은 고딕" pitchFamily="34" charset="-120"/>
-              </a:rPr>
-              <a:t>수익률</a:t>
-            </a:r>
-            <a:endParaRPr lang="en-US" sz="1600" dirty="0"/>
-          </a:p>
-        </p:txBody>
-      </p:sp>
-      <p:sp>
-        <p:nvSpPr>
-          <p:cNvPr id="9" name="Text 7"/>
-          <p:cNvSpPr/>
-          <p:nvPr/>
-        </p:nvSpPr>
-        <p:spPr>
-          <a:xfrm>
-            <a:off x="8360359" y="1600200"/>
-            <a:ext cx="2743200" cy="1005840"/>
-          </a:xfrm>
-          <a:prstGeom prst="rect">
-            <a:avLst/>
-          </a:prstGeom>
-          <a:noFill/>
-          <a:ln/>
-        </p:spPr>
-        <p:txBody>
-          <a:bodyPr wrap="square" rtlCol="0" anchor="ctr"/>
-          <a:lstStyle/>
-          <a:p>
-            <a:pPr algn="r" indent="0" marL="0">
-              <a:buNone/>
-            </a:pPr>
-            <a:r>
-              <a:rPr lang="en-US" sz="2800" b="1" dirty="0">
-                <a:solidFill>
-                  <a:srgbClr val="B8860B"/>
-                </a:solidFill>
-                <a:latin typeface="Arial" pitchFamily="34" charset="0"/>
-                <a:ea typeface="Arial" pitchFamily="34" charset="-122"/>
-                <a:cs typeface="Arial" pitchFamily="34" charset="-120"/>
-              </a:rPr>
-              <a:t>0.00%</a:t>
-            </a:r>
-            <a:endParaRPr lang="en-US" sz="2800" dirty="0"/>
-          </a:p>
-        </p:txBody>
-      </p:sp>
-      <p:sp>
-        <p:nvSpPr>
-          <p:cNvPr id="10" name="Text 8"/>
-          <p:cNvSpPr/>
-          <p:nvPr/>
-        </p:nvSpPr>
-        <p:spPr>
-          <a:xfrm>
-            <a:off x="822960" y="2834640"/>
-            <a:ext cx="2743200" cy="347472"/>
-          </a:xfrm>
-          <a:prstGeom prst="rect">
-            <a:avLst/>
-          </a:prstGeom>
-          <a:noFill/>
-          <a:ln/>
-        </p:spPr>
-        <p:txBody>
-          <a:bodyPr wrap="square" rtlCol="0" anchor="ctr"/>
-          <a:lstStyle/>
-          <a:p>
-            <a:pPr indent="0" marL="0">
-              <a:buNone/>
-            </a:pPr>
-            <a:r>
-              <a:rPr lang="en-US" sz="1100" dirty="0">
-                <a:solidFill>
-                  <a:srgbClr val="5B6B73"/>
-                </a:solidFill>
-                <a:latin typeface="맑은 고딕" pitchFamily="34" charset="0"/>
-                <a:ea typeface="맑은 고딕" pitchFamily="34" charset="-122"/>
-                <a:cs typeface="맑은 고딕" pitchFamily="34" charset="-120"/>
-              </a:rPr>
-              <a:t>연간 임대수입</a:t>
-            </a:r>
-            <a:endParaRPr lang="en-US" sz="1100" dirty="0"/>
-          </a:p>
-        </p:txBody>
-      </p:sp>
-      <p:sp>
-        <p:nvSpPr>
-          <p:cNvPr id="11" name="Text 9"/>
-          <p:cNvSpPr/>
-          <p:nvPr/>
-        </p:nvSpPr>
-        <p:spPr>
-          <a:xfrm>
-            <a:off x="9000439" y="2834640"/>
-            <a:ext cx="2194560" cy="347472"/>
-          </a:xfrm>
-          <a:prstGeom prst="rect">
-            <a:avLst/>
-          </a:prstGeom>
-          <a:noFill/>
-          <a:ln/>
-        </p:spPr>
-        <p:txBody>
-          <a:bodyPr wrap="square" rtlCol="0" anchor="ctr"/>
-          <a:lstStyle/>
-          <a:p>
-            <a:pPr algn="r" indent="0" marL="0">
-              <a:buNone/>
-            </a:pPr>
-            <a:r>
-              <a:rPr lang="en-US" sz="1200" dirty="0">
-                <a:solidFill>
-                  <a:srgbClr val="132A3A"/>
-                </a:solidFill>
-                <a:latin typeface="Arial" pitchFamily="34" charset="0"/>
-                <a:ea typeface="Arial" pitchFamily="34" charset="-122"/>
-                <a:cs typeface="Arial" pitchFamily="34" charset="-120"/>
-              </a:rPr>
-              <a:t>0만원</a:t>
-            </a:r>
-            <a:endParaRPr lang="en-US" sz="1200" dirty="0"/>
-          </a:p>
-        </p:txBody>
-      </p:sp>
-      <p:sp>
-        <p:nvSpPr>
-          <p:cNvPr id="12" name="Shape 10"/>
-          <p:cNvSpPr/>
-          <p:nvPr/>
-        </p:nvSpPr>
-        <p:spPr>
-          <a:xfrm>
-            <a:off x="731520" y="3182112"/>
-            <a:ext cx="10600639" cy="0"/>
-          </a:xfrm>
-          <a:prstGeom prst="line">
-            <a:avLst/>
-          </a:prstGeom>
-          <a:noFill/>
           <a:ln w="6350">
             <a:solidFill>
-              <a:srgbClr val="E8E8E8"/>
+              <a:srgbClr val="8B6508"/>
             </a:solidFill>
             <a:prstDash val="solid"/>
           </a:ln>
@@ -7649,30 +7751,111 @@
       </p:sp>
       <p:sp>
         <p:nvSpPr>
-          <p:cNvPr id="13" name="Text 11"/>
-          <p:cNvSpPr/>
-          <p:nvPr/>
-        </p:nvSpPr>
-        <p:spPr>
-          <a:xfrm>
-            <a:off x="822960" y="3182112"/>
-            <a:ext cx="2743200" cy="347472"/>
-          </a:xfrm>
-          <a:prstGeom prst="rect">
-            <a:avLst/>
-          </a:prstGeom>
-          <a:noFill/>
-          <a:ln/>
-        </p:spPr>
-        <p:txBody>
-          <a:bodyPr wrap="square" rtlCol="0" anchor="ctr"/>
-          <a:lstStyle/>
-          <a:p>
-            <a:pPr indent="0" marL="0">
-              <a:buNone/>
-            </a:pPr>
-            <a:r>
-              <a:rPr lang="en-US" sz="1100" dirty="0">
+          <p:cNvPr id="8" name="Text 6"/>
+          <p:cNvSpPr/>
+          <p:nvPr/>
+        </p:nvSpPr>
+        <p:spPr>
+          <a:xfrm>
+            <a:off x="822960" y="1700784"/>
+            <a:ext cx="1435608" cy="219456"/>
+          </a:xfrm>
+          <a:prstGeom prst="rect">
+            <a:avLst/>
+          </a:prstGeom>
+          <a:noFill/>
+          <a:ln/>
+        </p:spPr>
+        <p:txBody>
+          <a:bodyPr wrap="square" lIns="0" tIns="0" rIns="0" bIns="0" rtlCol="0" anchor="ctr"/>
+          <a:lstStyle/>
+          <a:p>
+            <a:pPr algn="ctr" indent="0" marL="0">
+              <a:buNone/>
+            </a:pPr>
+            <a:r>
+              <a:rPr lang="en-US" sz="850" b="1" dirty="0">
+                <a:solidFill>
+                  <a:srgbClr val="8B6508"/>
+                </a:solidFill>
+                <a:latin typeface="맑은 고딕" pitchFamily="34" charset="0"/>
+                <a:ea typeface="맑은 고딕" pitchFamily="34" charset="-122"/>
+                <a:cs typeface="맑은 고딕" pitchFamily="34" charset="-120"/>
+              </a:rPr>
+              <a:t>[ 임대차 실사 안내 ]</a:t>
+            </a:r>
+            <a:endParaRPr lang="en-US" sz="850" dirty="0"/>
+          </a:p>
+        </p:txBody>
+      </p:sp>
+      <p:sp>
+        <p:nvSpPr>
+          <p:cNvPr id="9" name="Text 7"/>
+          <p:cNvSpPr/>
+          <p:nvPr/>
+        </p:nvSpPr>
+        <p:spPr>
+          <a:xfrm>
+            <a:off x="822960" y="1993392"/>
+            <a:ext cx="10545775" cy="274320"/>
+          </a:xfrm>
+          <a:prstGeom prst="rect">
+            <a:avLst/>
+          </a:prstGeom>
+          <a:noFill/>
+          <a:ln/>
+        </p:spPr>
+        <p:txBody>
+          <a:bodyPr wrap="square" lIns="0" tIns="0" rIns="0" bIns="0" rtlCol="0" anchor="ctr"/>
+          <a:lstStyle/>
+          <a:p>
+            <a:pPr indent="0" marL="0">
+              <a:buNone/>
+            </a:pPr>
+            <a:r>
+              <a:rPr lang="en-US" sz="1200" b="1" dirty="0">
+                <a:solidFill>
+                  <a:srgbClr val="132A3A"/>
+                </a:solidFill>
+                <a:latin typeface="맑은 고딕" pitchFamily="34" charset="0"/>
+                <a:ea typeface="맑은 고딕" pitchFamily="34" charset="-122"/>
+                <a:cs typeface="맑은 고딕" pitchFamily="34" charset="-120"/>
+              </a:rPr>
+              <a:t>임대차 계약 및 렌트롤 상세 실사 프로토콜</a:t>
+            </a:r>
+            <a:endParaRPr lang="en-US" sz="1200" dirty="0"/>
+          </a:p>
+        </p:txBody>
+      </p:sp>
+      <p:sp>
+        <p:nvSpPr>
+          <p:cNvPr id="10" name="Text 8"/>
+          <p:cNvSpPr/>
+          <p:nvPr/>
+        </p:nvSpPr>
+        <p:spPr>
+          <a:xfrm>
+            <a:off x="822960" y="2304288"/>
+            <a:ext cx="10545775" cy="438912"/>
+          </a:xfrm>
+          <a:prstGeom prst="rect">
+            <a:avLst/>
+          </a:prstGeom>
+          <a:noFill/>
+          <a:ln/>
+        </p:spPr>
+        <p:txBody>
+          <a:bodyPr wrap="square" lIns="0" tIns="0" rIns="0" bIns="0" rtlCol="0" anchor="t"/>
+          <a:lstStyle/>
+          <a:p>
+            <a:pPr indent="0" marL="0">
+              <a:lnSpc>
+                <a:spcPct val="115000"/>
+              </a:lnSpc>
+              <a:buNone/>
+            </a:pPr>
+            <a:r>
+              <a:rPr lang="en-US" sz="950" dirty="0">
                 <a:solidFill>
                   <a:srgbClr val="5B6B73"/>
                 </a:solidFill>
@@ -7680,69 +7863,30 @@
                 <a:ea typeface="맑은 고딕" pitchFamily="34" charset="-122"/>
                 <a:cs typeface="맑은 고딕" pitchFamily="34" charset="-120"/>
               </a:rPr>
-              <a:t>승계 보증금</a:t>
-            </a:r>
-            <a:endParaRPr lang="en-US" sz="1100" dirty="0"/>
-          </a:p>
-        </p:txBody>
-      </p:sp>
-      <p:sp>
-        <p:nvSpPr>
-          <p:cNvPr id="14" name="Text 12"/>
-          <p:cNvSpPr/>
-          <p:nvPr/>
-        </p:nvSpPr>
-        <p:spPr>
-          <a:xfrm>
-            <a:off x="9000439" y="3182112"/>
-            <a:ext cx="2194560" cy="347472"/>
-          </a:xfrm>
-          <a:prstGeom prst="rect">
-            <a:avLst/>
-          </a:prstGeom>
-          <a:noFill/>
-          <a:ln/>
-        </p:spPr>
-        <p:txBody>
-          <a:bodyPr wrap="square" rtlCol="0" anchor="ctr"/>
-          <a:lstStyle/>
-          <a:p>
-            <a:pPr algn="r" indent="0" marL="0">
-              <a:buNone/>
-            </a:pPr>
-            <a:r>
-              <a:rPr lang="en-US" sz="1200" dirty="0">
-                <a:solidFill>
-                  <a:srgbClr val="132A3A"/>
-                </a:solidFill>
-                <a:latin typeface="Arial" pitchFamily="34" charset="0"/>
-                <a:ea typeface="Arial" pitchFamily="34" charset="-122"/>
-                <a:cs typeface="Arial" pitchFamily="34" charset="-120"/>
-              </a:rPr>
-              <a:t>0만원</a:t>
-            </a:r>
-            <a:endParaRPr lang="en-US" sz="1200" dirty="0"/>
-          </a:p>
-        </p:txBody>
-      </p:sp>
-      <p:sp>
-        <p:nvSpPr>
-          <p:cNvPr id="15" name="Shape 13"/>
-          <p:cNvSpPr/>
-          <p:nvPr/>
-        </p:nvSpPr>
-        <p:spPr>
-          <a:xfrm>
-            <a:off x="731520" y="3529584"/>
-            <a:ext cx="10600639" cy="0"/>
+              <a:t>본 자산의 세부 층별 임대차 계약 원장 및 정산 내역은 매수 의향 접수 및 비밀유지협약(NDA) 체결 후 실측 대조가 진행됩니다.</a:t>
+            </a:r>
+            <a:endParaRPr lang="en-US" sz="950" dirty="0"/>
+          </a:p>
+        </p:txBody>
+      </p:sp>
+      <p:sp>
+        <p:nvSpPr>
+          <p:cNvPr id="11" name="Shape 9"/>
+          <p:cNvSpPr/>
+          <p:nvPr/>
+        </p:nvSpPr>
+        <p:spPr>
+          <a:xfrm>
+            <a:off x="822960" y="2798064"/>
+            <a:ext cx="10545775" cy="0"/>
           </a:xfrm>
           <a:prstGeom prst="line">
             <a:avLst/>
           </a:prstGeom>
           <a:noFill/>
-          <a:ln w="6350">
+          <a:ln w="5080">
             <a:solidFill>
-              <a:srgbClr val="E8E8E8"/>
+              <a:srgbClr val="CBD5E0"/>
             </a:solidFill>
             <a:prstDash val="solid"/>
           </a:ln>
@@ -7750,30 +7894,278 @@
       </p:sp>
       <p:sp>
         <p:nvSpPr>
-          <p:cNvPr id="16" name="Text 14"/>
-          <p:cNvSpPr/>
-          <p:nvPr/>
-        </p:nvSpPr>
-        <p:spPr>
-          <a:xfrm>
-            <a:off x="822960" y="3529584"/>
-            <a:ext cx="2743200" cy="347472"/>
-          </a:xfrm>
-          <a:prstGeom prst="rect">
-            <a:avLst/>
-          </a:prstGeom>
-          <a:noFill/>
-          <a:ln/>
-        </p:spPr>
-        <p:txBody>
-          <a:bodyPr wrap="square" rtlCol="0" anchor="ctr"/>
-          <a:lstStyle/>
-          <a:p>
-            <a:pPr indent="0" marL="0">
-              <a:buNone/>
-            </a:pPr>
-            <a:r>
-              <a:rPr lang="en-US" sz="1100" dirty="0">
+          <p:cNvPr id="12" name="Shape 10"/>
+          <p:cNvSpPr/>
+          <p:nvPr/>
+        </p:nvSpPr>
+        <p:spPr>
+          <a:xfrm>
+            <a:off x="859536" y="2944368"/>
+            <a:ext cx="64008" cy="64008"/>
+          </a:xfrm>
+          <a:prstGeom prst="rect">
+            <a:avLst/>
+          </a:prstGeom>
+          <a:solidFill>
+            <a:srgbClr val="B8860B"/>
+          </a:solidFill>
+          <a:ln/>
+        </p:spPr>
+      </p:sp>
+      <p:sp>
+        <p:nvSpPr>
+          <p:cNvPr id="13" name="Text 11"/>
+          <p:cNvSpPr/>
+          <p:nvPr/>
+        </p:nvSpPr>
+        <p:spPr>
+          <a:xfrm>
+            <a:off x="987552" y="2889504"/>
+            <a:ext cx="10326319" cy="653796"/>
+          </a:xfrm>
+          <a:prstGeom prst="rect">
+            <a:avLst/>
+          </a:prstGeom>
+          <a:noFill/>
+          <a:ln/>
+        </p:spPr>
+        <p:txBody>
+          <a:bodyPr wrap="square" lIns="0" tIns="0" rIns="0" bIns="0" rtlCol="0" anchor="t"/>
+          <a:lstStyle/>
+          <a:p>
+            <a:pPr indent="0" marL="0">
+              <a:lnSpc>
+                <a:spcPct val="112000"/>
+              </a:lnSpc>
+              <a:buNone/>
+            </a:pPr>
+            <a:r>
+              <a:rPr lang="en-US" sz="920" dirty="0">
+                <a:solidFill>
+                  <a:srgbClr val="2B2B2B"/>
+                </a:solidFill>
+                <a:latin typeface="맑은 고딕" pitchFamily="34" charset="0"/>
+                <a:ea typeface="맑은 고딕" pitchFamily="34" charset="-122"/>
+                <a:cs typeface="맑은 고딕" pitchFamily="34" charset="-120"/>
+              </a:rPr>
+              <a:t>임대차 계약서 원본 전수 대조 (임대료, 관리비, 계약기간, 만기일 및 갱신 옵션)</a:t>
+            </a:r>
+            <a:endParaRPr lang="en-US" sz="920" dirty="0"/>
+          </a:p>
+        </p:txBody>
+      </p:sp>
+      <p:sp>
+        <p:nvSpPr>
+          <p:cNvPr id="14" name="Shape 12"/>
+          <p:cNvSpPr/>
+          <p:nvPr/>
+        </p:nvSpPr>
+        <p:spPr>
+          <a:xfrm>
+            <a:off x="859536" y="3634740"/>
+            <a:ext cx="64008" cy="64008"/>
+          </a:xfrm>
+          <a:prstGeom prst="rect">
+            <a:avLst/>
+          </a:prstGeom>
+          <a:solidFill>
+            <a:srgbClr val="B8860B"/>
+          </a:solidFill>
+          <a:ln/>
+        </p:spPr>
+      </p:sp>
+      <p:sp>
+        <p:nvSpPr>
+          <p:cNvPr id="15" name="Text 13"/>
+          <p:cNvSpPr/>
+          <p:nvPr/>
+        </p:nvSpPr>
+        <p:spPr>
+          <a:xfrm>
+            <a:off x="987552" y="3579876"/>
+            <a:ext cx="10326319" cy="653796"/>
+          </a:xfrm>
+          <a:prstGeom prst="rect">
+            <a:avLst/>
+          </a:prstGeom>
+          <a:noFill/>
+          <a:ln/>
+        </p:spPr>
+        <p:txBody>
+          <a:bodyPr wrap="square" lIns="0" tIns="0" rIns="0" bIns="0" rtlCol="0" anchor="t"/>
+          <a:lstStyle/>
+          <a:p>
+            <a:pPr indent="0" marL="0">
+              <a:lnSpc>
+                <a:spcPct val="112000"/>
+              </a:lnSpc>
+              <a:buNone/>
+            </a:pPr>
+            <a:r>
+              <a:rPr lang="en-US" sz="920" dirty="0">
+                <a:solidFill>
+                  <a:srgbClr val="2B2B2B"/>
+                </a:solidFill>
+                <a:latin typeface="맑은 고딕" pitchFamily="34" charset="0"/>
+                <a:ea typeface="맑은 고딕" pitchFamily="34" charset="-122"/>
+                <a:cs typeface="맑은 고딕" pitchFamily="34" charset="-120"/>
+              </a:rPr>
+              <a:t>보증금 및 월임대료 입금 금융 원장 대조·검증 (체납 내역 및 부가가치세 신고서 정합성)</a:t>
+            </a:r>
+            <a:endParaRPr lang="en-US" sz="920" dirty="0"/>
+          </a:p>
+        </p:txBody>
+      </p:sp>
+      <p:sp>
+        <p:nvSpPr>
+          <p:cNvPr id="16" name="Shape 14"/>
+          <p:cNvSpPr/>
+          <p:nvPr/>
+        </p:nvSpPr>
+        <p:spPr>
+          <a:xfrm>
+            <a:off x="859536" y="4325112"/>
+            <a:ext cx="64008" cy="64008"/>
+          </a:xfrm>
+          <a:prstGeom prst="rect">
+            <a:avLst/>
+          </a:prstGeom>
+          <a:solidFill>
+            <a:srgbClr val="B8860B"/>
+          </a:solidFill>
+          <a:ln/>
+        </p:spPr>
+      </p:sp>
+      <p:sp>
+        <p:nvSpPr>
+          <p:cNvPr id="17" name="Text 15"/>
+          <p:cNvSpPr/>
+          <p:nvPr/>
+        </p:nvSpPr>
+        <p:spPr>
+          <a:xfrm>
+            <a:off x="987552" y="4270248"/>
+            <a:ext cx="10326319" cy="653796"/>
+          </a:xfrm>
+          <a:prstGeom prst="rect">
+            <a:avLst/>
+          </a:prstGeom>
+          <a:noFill/>
+          <a:ln/>
+        </p:spPr>
+        <p:txBody>
+          <a:bodyPr wrap="square" lIns="0" tIns="0" rIns="0" bIns="0" rtlCol="0" anchor="t"/>
+          <a:lstStyle/>
+          <a:p>
+            <a:pPr indent="0" marL="0">
+              <a:lnSpc>
+                <a:spcPct val="112000"/>
+              </a:lnSpc>
+              <a:buNone/>
+            </a:pPr>
+            <a:r>
+              <a:rPr lang="en-US" sz="920" dirty="0">
+                <a:solidFill>
+                  <a:srgbClr val="2B2B2B"/>
+                </a:solidFill>
+                <a:latin typeface="맑은 고딕" pitchFamily="34" charset="0"/>
+                <a:ea typeface="맑은 고딕" pitchFamily="34" charset="-122"/>
+                <a:cs typeface="맑은 고딕" pitchFamily="34" charset="-120"/>
+              </a:rPr>
+              <a:t>특약 사항 및 렌트프리(Rent-Free), 핏아웃(Fit-out) 등 실질 유효 임대료(Net Effective Rent) 산정</a:t>
+            </a:r>
+            <a:endParaRPr lang="en-US" sz="920" dirty="0"/>
+          </a:p>
+        </p:txBody>
+      </p:sp>
+      <p:sp>
+        <p:nvSpPr>
+          <p:cNvPr id="18" name="Shape 16"/>
+          <p:cNvSpPr/>
+          <p:nvPr/>
+        </p:nvSpPr>
+        <p:spPr>
+          <a:xfrm>
+            <a:off x="859536" y="5015484"/>
+            <a:ext cx="64008" cy="64008"/>
+          </a:xfrm>
+          <a:prstGeom prst="rect">
+            <a:avLst/>
+          </a:prstGeom>
+          <a:solidFill>
+            <a:srgbClr val="B8860B"/>
+          </a:solidFill>
+          <a:ln/>
+        </p:spPr>
+      </p:sp>
+      <p:sp>
+        <p:nvSpPr>
+          <p:cNvPr id="19" name="Text 17"/>
+          <p:cNvSpPr/>
+          <p:nvPr/>
+        </p:nvSpPr>
+        <p:spPr>
+          <a:xfrm>
+            <a:off x="987552" y="4960620"/>
+            <a:ext cx="10326319" cy="653796"/>
+          </a:xfrm>
+          <a:prstGeom prst="rect">
+            <a:avLst/>
+          </a:prstGeom>
+          <a:noFill/>
+          <a:ln/>
+        </p:spPr>
+        <p:txBody>
+          <a:bodyPr wrap="square" lIns="0" tIns="0" rIns="0" bIns="0" rtlCol="0" anchor="t"/>
+          <a:lstStyle/>
+          <a:p>
+            <a:pPr indent="0" marL="0">
+              <a:lnSpc>
+                <a:spcPct val="112000"/>
+              </a:lnSpc>
+              <a:buNone/>
+            </a:pPr>
+            <a:r>
+              <a:rPr lang="en-US" sz="920" dirty="0">
+                <a:solidFill>
+                  <a:srgbClr val="2B2B2B"/>
+                </a:solidFill>
+                <a:latin typeface="맑은 고딕" pitchFamily="34" charset="0"/>
+                <a:ea typeface="맑은 고딕" pitchFamily="34" charset="-122"/>
+                <a:cs typeface="맑은 고딕" pitchFamily="34" charset="-120"/>
+              </a:rPr>
+              <a:t>상가건물 임대차보호법상 계약갱신요구권 행사 가능 여부 및 명도/재계약 리스크 검토</a:t>
+            </a:r>
+            <a:endParaRPr lang="en-US" sz="920" dirty="0"/>
+          </a:p>
+        </p:txBody>
+      </p:sp>
+      <p:sp>
+        <p:nvSpPr>
+          <p:cNvPr id="20" name="Text 18"/>
+          <p:cNvSpPr/>
+          <p:nvPr/>
+        </p:nvSpPr>
+        <p:spPr>
+          <a:xfrm>
+            <a:off x="566928" y="6382512"/>
+            <a:ext cx="7315200" cy="219456"/>
+          </a:xfrm>
+          <a:prstGeom prst="rect">
+            <a:avLst/>
+          </a:prstGeom>
+          <a:noFill/>
+          <a:ln/>
+        </p:spPr>
+        <p:txBody>
+          <a:bodyPr wrap="square" lIns="0" tIns="0" rIns="0" bIns="0" rtlCol="0" anchor="ctr"/>
+          <a:lstStyle/>
+          <a:p>
+            <a:pPr indent="0" marL="0">
+              <a:buNone/>
+            </a:pPr>
+            <a:r>
+              <a:rPr lang="en-US" sz="800" dirty="0">
                 <a:solidFill>
                   <a:srgbClr val="5B6B73"/>
                 </a:solidFill>
@@ -7781,208 +8173,6 @@
                 <a:ea typeface="맑은 고딕" pitchFamily="34" charset="-122"/>
                 <a:cs typeface="맑은 고딕" pitchFamily="34" charset="-120"/>
               </a:rPr>
-              <a:t>매매가</a:t>
-            </a:r>
-            <a:endParaRPr lang="en-US" sz="1100" dirty="0"/>
-          </a:p>
-        </p:txBody>
-      </p:sp>
-      <p:sp>
-        <p:nvSpPr>
-          <p:cNvPr id="17" name="Text 15"/>
-          <p:cNvSpPr/>
-          <p:nvPr/>
-        </p:nvSpPr>
-        <p:spPr>
-          <a:xfrm>
-            <a:off x="9000439" y="3529584"/>
-            <a:ext cx="2194560" cy="347472"/>
-          </a:xfrm>
-          <a:prstGeom prst="rect">
-            <a:avLst/>
-          </a:prstGeom>
-          <a:noFill/>
-          <a:ln/>
-        </p:spPr>
-        <p:txBody>
-          <a:bodyPr wrap="square" rtlCol="0" anchor="ctr"/>
-          <a:lstStyle/>
-          <a:p>
-            <a:pPr algn="r" indent="0" marL="0">
-              <a:buNone/>
-            </a:pPr>
-            <a:r>
-              <a:rPr lang="en-US" sz="1200" dirty="0">
-                <a:solidFill>
-                  <a:srgbClr val="132A3A"/>
-                </a:solidFill>
-                <a:latin typeface="Arial" pitchFamily="34" charset="0"/>
-                <a:ea typeface="Arial" pitchFamily="34" charset="-122"/>
-                <a:cs typeface="Arial" pitchFamily="34" charset="-120"/>
-              </a:rPr>
-              <a:t>760.0억원</a:t>
-            </a:r>
-            <a:endParaRPr lang="en-US" sz="1200" dirty="0"/>
-          </a:p>
-        </p:txBody>
-      </p:sp>
-      <p:sp>
-        <p:nvSpPr>
-          <p:cNvPr id="18" name="Shape 16"/>
-          <p:cNvSpPr/>
-          <p:nvPr/>
-        </p:nvSpPr>
-        <p:spPr>
-          <a:xfrm>
-            <a:off x="731520" y="3877056"/>
-            <a:ext cx="10600639" cy="0"/>
-          </a:xfrm>
-          <a:prstGeom prst="line">
-            <a:avLst/>
-          </a:prstGeom>
-          <a:noFill/>
-          <a:ln w="6350">
-            <a:solidFill>
-              <a:srgbClr val="E8E8E8"/>
-            </a:solidFill>
-            <a:prstDash val="solid"/>
-          </a:ln>
-        </p:spPr>
-      </p:sp>
-      <p:sp>
-        <p:nvSpPr>
-          <p:cNvPr id="19" name="Text 17"/>
-          <p:cNvSpPr/>
-          <p:nvPr/>
-        </p:nvSpPr>
-        <p:spPr>
-          <a:xfrm>
-            <a:off x="822960" y="3877056"/>
-            <a:ext cx="2743200" cy="347472"/>
-          </a:xfrm>
-          <a:prstGeom prst="rect">
-            <a:avLst/>
-          </a:prstGeom>
-          <a:noFill/>
-          <a:ln/>
-        </p:spPr>
-        <p:txBody>
-          <a:bodyPr wrap="square" rtlCol="0" anchor="ctr"/>
-          <a:lstStyle/>
-          <a:p>
-            <a:pPr indent="0" marL="0">
-              <a:buNone/>
-            </a:pPr>
-            <a:r>
-              <a:rPr lang="en-US" sz="1100" dirty="0">
-                <a:solidFill>
-                  <a:srgbClr val="5B6B73"/>
-                </a:solidFill>
-                <a:latin typeface="맑은 고딕" pitchFamily="34" charset="0"/>
-                <a:ea typeface="맑은 고딕" pitchFamily="34" charset="-122"/>
-                <a:cs typeface="맑은 고딕" pitchFamily="34" charset="-120"/>
-              </a:rPr>
-              <a:t>순투자금 (매매가 − 보증금)</a:t>
-            </a:r>
-            <a:endParaRPr lang="en-US" sz="1100" dirty="0"/>
-          </a:p>
-        </p:txBody>
-      </p:sp>
-      <p:sp>
-        <p:nvSpPr>
-          <p:cNvPr id="20" name="Text 18"/>
-          <p:cNvSpPr/>
-          <p:nvPr/>
-        </p:nvSpPr>
-        <p:spPr>
-          <a:xfrm>
-            <a:off x="9000439" y="3877056"/>
-            <a:ext cx="2194560" cy="347472"/>
-          </a:xfrm>
-          <a:prstGeom prst="rect">
-            <a:avLst/>
-          </a:prstGeom>
-          <a:noFill/>
-          <a:ln/>
-        </p:spPr>
-        <p:txBody>
-          <a:bodyPr wrap="square" rtlCol="0" anchor="ctr"/>
-          <a:lstStyle/>
-          <a:p>
-            <a:pPr algn="r" indent="0" marL="0">
-              <a:buNone/>
-            </a:pPr>
-            <a:r>
-              <a:rPr lang="en-US" sz="1200" b="1" dirty="0">
-                <a:solidFill>
-                  <a:srgbClr val="B8860B"/>
-                </a:solidFill>
-                <a:latin typeface="Arial" pitchFamily="34" charset="0"/>
-                <a:ea typeface="Arial" pitchFamily="34" charset="-122"/>
-                <a:cs typeface="Arial" pitchFamily="34" charset="-120"/>
-              </a:rPr>
-              <a:t>760.0억원</a:t>
-            </a:r>
-            <a:endParaRPr lang="en-US" sz="1200" dirty="0"/>
-          </a:p>
-        </p:txBody>
-      </p:sp>
-      <p:sp>
-        <p:nvSpPr>
-          <p:cNvPr id="21" name="Shape 19"/>
-          <p:cNvSpPr/>
-          <p:nvPr/>
-        </p:nvSpPr>
-        <p:spPr>
-          <a:xfrm>
-            <a:off x="731520" y="4224528"/>
-            <a:ext cx="10600639" cy="0"/>
-          </a:xfrm>
-          <a:prstGeom prst="line">
-            <a:avLst/>
-          </a:prstGeom>
-          <a:noFill/>
-          <a:ln w="6350">
-            <a:solidFill>
-              <a:srgbClr val="E8E8E8"/>
-            </a:solidFill>
-            <a:prstDash val="solid"/>
-          </a:ln>
-        </p:spPr>
-      </p:sp>
-      <p:sp>
-        <p:nvSpPr>
-          <p:cNvPr id="22" name="Text 20"/>
-          <p:cNvSpPr/>
-          <p:nvPr/>
-        </p:nvSpPr>
-        <p:spPr>
-          <a:xfrm>
-            <a:off x="502920" y="6382512"/>
-            <a:ext cx="7315200" cy="219456"/>
-          </a:xfrm>
-          <a:prstGeom prst="rect">
-            <a:avLst/>
-          </a:prstGeom>
-          <a:noFill/>
-          <a:ln/>
-        </p:spPr>
-        <p:txBody>
-          <a:bodyPr wrap="square" lIns="0" tIns="0" rIns="0" bIns="0" rtlCol="0" anchor="ctr"/>
-          <a:lstStyle/>
-          <a:p>
-            <a:pPr indent="0" marL="0">
-              <a:buNone/>
-            </a:pPr>
-            <a:r>
-              <a:rPr lang="en-US" sz="800" dirty="0">
-                <a:solidFill>
-                  <a:srgbClr val="5B6B73"/>
-                </a:solidFill>
-                <a:latin typeface="맑은 고딕" pitchFamily="34" charset="0"/>
-                <a:ea typeface="맑은 고딕" pitchFamily="34" charset="-122"/>
-                <a:cs typeface="맑은 고딕" pitchFamily="34" charset="-120"/>
-              </a:rPr>
               <a:t>CRE DEAL</a:t>
             </a:r>
             <a:endParaRPr lang="en-US" sz="800" dirty="0"/>
@@ -7991,13 +8181,13 @@
       </p:sp>
       <p:sp>
         <p:nvSpPr>
-          <p:cNvPr id="23" name="Text 21"/>
-          <p:cNvSpPr/>
-          <p:nvPr/>
-        </p:nvSpPr>
-        <p:spPr>
-          <a:xfrm>
-            <a:off x="10774375" y="6382512"/>
+          <p:cNvPr id="21" name="Text 19"/>
+          <p:cNvSpPr/>
+          <p:nvPr/>
+        </p:nvSpPr>
+        <p:spPr>
+          <a:xfrm>
+            <a:off x="10710367" y="6382512"/>
             <a:ext cx="914400" cy="219456"/>
           </a:xfrm>
           <a:prstGeom prst="rect">
@@ -8039,6 +8229,1925 @@
 <file path=ppt/slides/slide7.xml><?xml version="1.0" encoding="utf-8"?>
 <p:sld xmlns:a="http://schemas.openxmlformats.org/drawingml/2006/main" xmlns:r="http://schemas.openxmlformats.org/officeDocument/2006/relationships" xmlns:p="http://schemas.openxmlformats.org/presentationml/2006/main">
   <p:cSld name="Slide 7">
+    <p:bg>
+      <p:bgPr>
+        <a:solidFill>
+          <a:srgbClr val="FFFFFF"/>
+        </a:solidFill>
+      </p:bgPr>
+    </p:bg>
+    <p:spTree>
+      <p:nvGrpSpPr>
+        <p:cNvPr id="1" name=""/>
+        <p:cNvGrpSpPr/>
+        <p:nvPr/>
+      </p:nvGrpSpPr>
+      <p:grpSpPr>
+        <a:xfrm>
+          <a:off x="0" y="0"/>
+          <a:ext cx="0" cy="0"/>
+          <a:chOff x="0" y="0"/>
+          <a:chExt cx="0" cy="0"/>
+        </a:xfrm>
+      </p:grpSpPr>
+      <p:sp>
+        <p:nvSpPr>
+          <p:cNvPr id="2" name="Shape 0"/>
+          <p:cNvSpPr/>
+          <p:nvPr/>
+        </p:nvSpPr>
+        <p:spPr>
+          <a:xfrm>
+            <a:off x="566928" y="457200"/>
+            <a:ext cx="384048" cy="384048"/>
+          </a:xfrm>
+          <a:prstGeom prst="ellipse">
+            <a:avLst/>
+          </a:prstGeom>
+          <a:solidFill>
+            <a:srgbClr val="B8860B"/>
+          </a:solidFill>
+          <a:ln/>
+        </p:spPr>
+      </p:sp>
+      <p:sp>
+        <p:nvSpPr>
+          <p:cNvPr id="3" name="Text 1"/>
+          <p:cNvSpPr/>
+          <p:nvPr/>
+        </p:nvSpPr>
+        <p:spPr>
+          <a:xfrm>
+            <a:off x="566928" y="457200"/>
+            <a:ext cx="384048" cy="384048"/>
+          </a:xfrm>
+          <a:prstGeom prst="rect">
+            <a:avLst/>
+          </a:prstGeom>
+          <a:noFill/>
+          <a:ln/>
+        </p:spPr>
+        <p:txBody>
+          <a:bodyPr wrap="square" lIns="0" tIns="0" rIns="0" bIns="0" rtlCol="0" anchor="ctr"/>
+          <a:lstStyle/>
+          <a:p>
+            <a:pPr algn="ctr" indent="0" marL="0">
+              <a:buNone/>
+            </a:pPr>
+            <a:r>
+              <a:rPr lang="en-US" sz="1300" b="1" dirty="0">
+                <a:solidFill>
+                  <a:srgbClr val="FFFFFF"/>
+                </a:solidFill>
+                <a:latin typeface="Arial" pitchFamily="34" charset="0"/>
+                <a:ea typeface="Arial" pitchFamily="34" charset="-122"/>
+                <a:cs typeface="Arial" pitchFamily="34" charset="-120"/>
+              </a:rPr>
+              <a:t>07</a:t>
+            </a:r>
+            <a:endParaRPr lang="en-US" sz="1300" dirty="0"/>
+          </a:p>
+        </p:txBody>
+      </p:sp>
+      <p:sp>
+        <p:nvSpPr>
+          <p:cNvPr id="4" name="Text 2"/>
+          <p:cNvSpPr/>
+          <p:nvPr/>
+        </p:nvSpPr>
+        <p:spPr>
+          <a:xfrm>
+            <a:off x="1133856" y="457200"/>
+            <a:ext cx="10490911" cy="182880"/>
+          </a:xfrm>
+          <a:prstGeom prst="rect">
+            <a:avLst/>
+          </a:prstGeom>
+          <a:noFill/>
+          <a:ln/>
+        </p:spPr>
+        <p:txBody>
+          <a:bodyPr wrap="square" lIns="0" tIns="0" rIns="0" bIns="0" rtlCol="0" anchor="ctr"/>
+          <a:lstStyle/>
+          <a:p>
+            <a:pPr indent="0" marL="0">
+              <a:buNone/>
+            </a:pPr>
+            <a:r>
+              <a:rPr lang="en-US" sz="950" b="1" spc="200" kern="0" dirty="0">
+                <a:solidFill>
+                  <a:srgbClr val="B8860B"/>
+                </a:solidFill>
+                <a:latin typeface="Arial" pitchFamily="34" charset="0"/>
+                <a:ea typeface="Arial" pitchFamily="34" charset="-122"/>
+                <a:cs typeface="Arial" pitchFamily="34" charset="-120"/>
+              </a:rPr>
+              <a:t>수익률</a:t>
+            </a:r>
+            <a:endParaRPr lang="en-US" sz="950" dirty="0"/>
+          </a:p>
+        </p:txBody>
+      </p:sp>
+      <p:sp>
+        <p:nvSpPr>
+          <p:cNvPr id="5" name="Text 3"/>
+          <p:cNvSpPr/>
+          <p:nvPr/>
+        </p:nvSpPr>
+        <p:spPr>
+          <a:xfrm>
+            <a:off x="1133856" y="640080"/>
+            <a:ext cx="10490911" cy="365760"/>
+          </a:xfrm>
+          <a:prstGeom prst="rect">
+            <a:avLst/>
+          </a:prstGeom>
+          <a:noFill/>
+          <a:ln/>
+        </p:spPr>
+        <p:txBody>
+          <a:bodyPr wrap="square" lIns="0" tIns="0" rIns="0" bIns="0" rtlCol="0" anchor="ctr">
+            <a:normAutofit/>
+          </a:bodyPr>
+          <a:lstStyle/>
+          <a:p>
+            <a:pPr indent="0" marL="0">
+              <a:buNone/>
+            </a:pPr>
+            <a:r>
+              <a:rPr lang="en-US" sz="2300" b="1" dirty="0">
+                <a:solidFill>
+                  <a:srgbClr val="132A3A"/>
+                </a:solidFill>
+                <a:latin typeface="맑은 고딕" pitchFamily="34" charset="0"/>
+                <a:ea typeface="맑은 고딕" pitchFamily="34" charset="-122"/>
+                <a:cs typeface="맑은 고딕" pitchFamily="34" charset="-120"/>
+              </a:rPr>
+              <a:t>수익률</a:t>
+            </a:r>
+            <a:endParaRPr lang="en-US" sz="2300" dirty="0"/>
+          </a:p>
+        </p:txBody>
+      </p:sp>
+      <p:sp>
+        <p:nvSpPr>
+          <p:cNvPr id="6" name="Shape 4"/>
+          <p:cNvSpPr/>
+          <p:nvPr/>
+        </p:nvSpPr>
+        <p:spPr>
+          <a:xfrm>
+            <a:off x="566928" y="1371600"/>
+            <a:ext cx="5120640" cy="3840480"/>
+          </a:xfrm>
+          <a:prstGeom prst="roundRect">
+            <a:avLst>
+              <a:gd name="adj" fmla="val 1905"/>
+            </a:avLst>
+          </a:prstGeom>
+          <a:solidFill>
+            <a:srgbClr val="FFFFFF"/>
+          </a:solidFill>
+          <a:ln w="12700">
+            <a:solidFill>
+              <a:srgbClr val="CBD5E0"/>
+            </a:solidFill>
+            <a:prstDash val="solid"/>
+          </a:ln>
+        </p:spPr>
+      </p:sp>
+      <p:sp>
+        <p:nvSpPr>
+          <p:cNvPr id="7" name="Shape 5"/>
+          <p:cNvSpPr/>
+          <p:nvPr/>
+        </p:nvSpPr>
+        <p:spPr>
+          <a:xfrm>
+            <a:off x="795528" y="1600200"/>
+            <a:ext cx="4663440" cy="1005840"/>
+          </a:xfrm>
+          <a:prstGeom prst="roundRect">
+            <a:avLst>
+              <a:gd name="adj" fmla="val 7273"/>
+            </a:avLst>
+          </a:prstGeom>
+          <a:solidFill>
+            <a:srgbClr val="132A3A"/>
+          </a:solidFill>
+          <a:ln/>
+        </p:spPr>
+      </p:sp>
+      <p:sp>
+        <p:nvSpPr>
+          <p:cNvPr id="8" name="Text 6"/>
+          <p:cNvSpPr/>
+          <p:nvPr/>
+        </p:nvSpPr>
+        <p:spPr>
+          <a:xfrm>
+            <a:off x="1024128" y="1600200"/>
+            <a:ext cx="2286000" cy="1005840"/>
+          </a:xfrm>
+          <a:prstGeom prst="rect">
+            <a:avLst/>
+          </a:prstGeom>
+          <a:noFill/>
+          <a:ln/>
+        </p:spPr>
+        <p:txBody>
+          <a:bodyPr wrap="square" rtlCol="0" anchor="ctr"/>
+          <a:lstStyle/>
+          <a:p>
+            <a:pPr indent="0" marL="0">
+              <a:buNone/>
+            </a:pPr>
+            <a:r>
+              <a:rPr lang="en-US" sz="1600" b="1" dirty="0">
+                <a:solidFill>
+                  <a:srgbClr val="FFFFFF"/>
+                </a:solidFill>
+                <a:latin typeface="맑은 고딕" pitchFamily="34" charset="0"/>
+                <a:ea typeface="맑은 고딕" pitchFamily="34" charset="-122"/>
+                <a:cs typeface="맑은 고딕" pitchFamily="34" charset="-120"/>
+              </a:rPr>
+              <a:t>수익률</a:t>
+            </a:r>
+            <a:endParaRPr lang="en-US" sz="1600" dirty="0"/>
+          </a:p>
+        </p:txBody>
+      </p:sp>
+      <p:sp>
+        <p:nvSpPr>
+          <p:cNvPr id="9" name="Text 7"/>
+          <p:cNvSpPr/>
+          <p:nvPr/>
+        </p:nvSpPr>
+        <p:spPr>
+          <a:xfrm>
+            <a:off x="2487168" y="1600200"/>
+            <a:ext cx="2743200" cy="1005840"/>
+          </a:xfrm>
+          <a:prstGeom prst="rect">
+            <a:avLst/>
+          </a:prstGeom>
+          <a:noFill/>
+          <a:ln/>
+        </p:spPr>
+        <p:txBody>
+          <a:bodyPr wrap="square" rtlCol="0" anchor="ctr"/>
+          <a:lstStyle/>
+          <a:p>
+            <a:pPr algn="r" indent="0" marL="0">
+              <a:buNone/>
+            </a:pPr>
+            <a:r>
+              <a:rPr lang="en-US" sz="2800" b="1" dirty="0">
+                <a:solidFill>
+                  <a:srgbClr val="B8860B"/>
+                </a:solidFill>
+                <a:latin typeface="Arial" pitchFamily="34" charset="0"/>
+                <a:ea typeface="Arial" pitchFamily="34" charset="-122"/>
+                <a:cs typeface="Arial" pitchFamily="34" charset="-120"/>
+              </a:rPr>
+              <a:t>0.00%</a:t>
+            </a:r>
+            <a:endParaRPr lang="en-US" sz="2800" dirty="0"/>
+          </a:p>
+        </p:txBody>
+      </p:sp>
+      <p:sp>
+        <p:nvSpPr>
+          <p:cNvPr id="10" name="Text 8"/>
+          <p:cNvSpPr/>
+          <p:nvPr/>
+        </p:nvSpPr>
+        <p:spPr>
+          <a:xfrm>
+            <a:off x="886968" y="2834640"/>
+            <a:ext cx="2743200" cy="347472"/>
+          </a:xfrm>
+          <a:prstGeom prst="rect">
+            <a:avLst/>
+          </a:prstGeom>
+          <a:noFill/>
+          <a:ln/>
+        </p:spPr>
+        <p:txBody>
+          <a:bodyPr wrap="square" rtlCol="0" anchor="ctr"/>
+          <a:lstStyle/>
+          <a:p>
+            <a:pPr indent="0" marL="0">
+              <a:buNone/>
+            </a:pPr>
+            <a:r>
+              <a:rPr lang="en-US" sz="1100" dirty="0">
+                <a:solidFill>
+                  <a:srgbClr val="5B6B73"/>
+                </a:solidFill>
+                <a:latin typeface="맑은 고딕" pitchFamily="34" charset="0"/>
+                <a:ea typeface="맑은 고딕" pitchFamily="34" charset="-122"/>
+                <a:cs typeface="맑은 고딕" pitchFamily="34" charset="-120"/>
+              </a:rPr>
+              <a:t>연간 임대수입</a:t>
+            </a:r>
+            <a:endParaRPr lang="en-US" sz="1100" dirty="0"/>
+          </a:p>
+        </p:txBody>
+      </p:sp>
+      <p:sp>
+        <p:nvSpPr>
+          <p:cNvPr id="11" name="Text 9"/>
+          <p:cNvSpPr/>
+          <p:nvPr/>
+        </p:nvSpPr>
+        <p:spPr>
+          <a:xfrm>
+            <a:off x="3127248" y="2834640"/>
+            <a:ext cx="2194560" cy="347472"/>
+          </a:xfrm>
+          <a:prstGeom prst="rect">
+            <a:avLst/>
+          </a:prstGeom>
+          <a:noFill/>
+          <a:ln/>
+        </p:spPr>
+        <p:txBody>
+          <a:bodyPr wrap="square" rtlCol="0" anchor="ctr"/>
+          <a:lstStyle/>
+          <a:p>
+            <a:pPr algn="r" indent="0" marL="0">
+              <a:buNone/>
+            </a:pPr>
+            <a:r>
+              <a:rPr lang="en-US" sz="1200" dirty="0">
+                <a:solidFill>
+                  <a:srgbClr val="132A3A"/>
+                </a:solidFill>
+                <a:latin typeface="Arial" pitchFamily="34" charset="0"/>
+                <a:ea typeface="Arial" pitchFamily="34" charset="-122"/>
+                <a:cs typeface="Arial" pitchFamily="34" charset="-120"/>
+              </a:rPr>
+              <a:t>0만원</a:t>
+            </a:r>
+            <a:endParaRPr lang="en-US" sz="1200" dirty="0"/>
+          </a:p>
+        </p:txBody>
+      </p:sp>
+      <p:sp>
+        <p:nvSpPr>
+          <p:cNvPr id="12" name="Shape 10"/>
+          <p:cNvSpPr/>
+          <p:nvPr/>
+        </p:nvSpPr>
+        <p:spPr>
+          <a:xfrm>
+            <a:off x="795528" y="3182112"/>
+            <a:ext cx="4663440" cy="0"/>
+          </a:xfrm>
+          <a:prstGeom prst="line">
+            <a:avLst/>
+          </a:prstGeom>
+          <a:noFill/>
+          <a:ln w="6350">
+            <a:solidFill>
+              <a:srgbClr val="E8E8E8"/>
+            </a:solidFill>
+            <a:prstDash val="solid"/>
+          </a:ln>
+        </p:spPr>
+      </p:sp>
+      <p:sp>
+        <p:nvSpPr>
+          <p:cNvPr id="13" name="Text 11"/>
+          <p:cNvSpPr/>
+          <p:nvPr/>
+        </p:nvSpPr>
+        <p:spPr>
+          <a:xfrm>
+            <a:off x="886968" y="3182112"/>
+            <a:ext cx="2743200" cy="347472"/>
+          </a:xfrm>
+          <a:prstGeom prst="rect">
+            <a:avLst/>
+          </a:prstGeom>
+          <a:noFill/>
+          <a:ln/>
+        </p:spPr>
+        <p:txBody>
+          <a:bodyPr wrap="square" rtlCol="0" anchor="ctr"/>
+          <a:lstStyle/>
+          <a:p>
+            <a:pPr indent="0" marL="0">
+              <a:buNone/>
+            </a:pPr>
+            <a:r>
+              <a:rPr lang="en-US" sz="1100" dirty="0">
+                <a:solidFill>
+                  <a:srgbClr val="5B6B73"/>
+                </a:solidFill>
+                <a:latin typeface="맑은 고딕" pitchFamily="34" charset="0"/>
+                <a:ea typeface="맑은 고딕" pitchFamily="34" charset="-122"/>
+                <a:cs typeface="맑은 고딕" pitchFamily="34" charset="-120"/>
+              </a:rPr>
+              <a:t>승계 보증금</a:t>
+            </a:r>
+            <a:endParaRPr lang="en-US" sz="1100" dirty="0"/>
+          </a:p>
+        </p:txBody>
+      </p:sp>
+      <p:sp>
+        <p:nvSpPr>
+          <p:cNvPr id="14" name="Text 12"/>
+          <p:cNvSpPr/>
+          <p:nvPr/>
+        </p:nvSpPr>
+        <p:spPr>
+          <a:xfrm>
+            <a:off x="3127248" y="3182112"/>
+            <a:ext cx="2194560" cy="347472"/>
+          </a:xfrm>
+          <a:prstGeom prst="rect">
+            <a:avLst/>
+          </a:prstGeom>
+          <a:noFill/>
+          <a:ln/>
+        </p:spPr>
+        <p:txBody>
+          <a:bodyPr wrap="square" rtlCol="0" anchor="ctr"/>
+          <a:lstStyle/>
+          <a:p>
+            <a:pPr algn="r" indent="0" marL="0">
+              <a:buNone/>
+            </a:pPr>
+            <a:r>
+              <a:rPr lang="en-US" sz="1200" dirty="0">
+                <a:solidFill>
+                  <a:srgbClr val="132A3A"/>
+                </a:solidFill>
+                <a:latin typeface="Arial" pitchFamily="34" charset="0"/>
+                <a:ea typeface="Arial" pitchFamily="34" charset="-122"/>
+                <a:cs typeface="Arial" pitchFamily="34" charset="-120"/>
+              </a:rPr>
+              <a:t>0만원</a:t>
+            </a:r>
+            <a:endParaRPr lang="en-US" sz="1200" dirty="0"/>
+          </a:p>
+        </p:txBody>
+      </p:sp>
+      <p:sp>
+        <p:nvSpPr>
+          <p:cNvPr id="15" name="Shape 13"/>
+          <p:cNvSpPr/>
+          <p:nvPr/>
+        </p:nvSpPr>
+        <p:spPr>
+          <a:xfrm>
+            <a:off x="795528" y="3529584"/>
+            <a:ext cx="4663440" cy="0"/>
+          </a:xfrm>
+          <a:prstGeom prst="line">
+            <a:avLst/>
+          </a:prstGeom>
+          <a:noFill/>
+          <a:ln w="6350">
+            <a:solidFill>
+              <a:srgbClr val="E8E8E8"/>
+            </a:solidFill>
+            <a:prstDash val="solid"/>
+          </a:ln>
+        </p:spPr>
+      </p:sp>
+      <p:sp>
+        <p:nvSpPr>
+          <p:cNvPr id="16" name="Text 14"/>
+          <p:cNvSpPr/>
+          <p:nvPr/>
+        </p:nvSpPr>
+        <p:spPr>
+          <a:xfrm>
+            <a:off x="886968" y="3529584"/>
+            <a:ext cx="2743200" cy="347472"/>
+          </a:xfrm>
+          <a:prstGeom prst="rect">
+            <a:avLst/>
+          </a:prstGeom>
+          <a:noFill/>
+          <a:ln/>
+        </p:spPr>
+        <p:txBody>
+          <a:bodyPr wrap="square" rtlCol="0" anchor="ctr"/>
+          <a:lstStyle/>
+          <a:p>
+            <a:pPr indent="0" marL="0">
+              <a:buNone/>
+            </a:pPr>
+            <a:r>
+              <a:rPr lang="en-US" sz="1100" dirty="0">
+                <a:solidFill>
+                  <a:srgbClr val="5B6B73"/>
+                </a:solidFill>
+                <a:latin typeface="맑은 고딕" pitchFamily="34" charset="0"/>
+                <a:ea typeface="맑은 고딕" pitchFamily="34" charset="-122"/>
+                <a:cs typeface="맑은 고딕" pitchFamily="34" charset="-120"/>
+              </a:rPr>
+              <a:t>매매가</a:t>
+            </a:r>
+            <a:endParaRPr lang="en-US" sz="1100" dirty="0"/>
+          </a:p>
+        </p:txBody>
+      </p:sp>
+      <p:sp>
+        <p:nvSpPr>
+          <p:cNvPr id="17" name="Text 15"/>
+          <p:cNvSpPr/>
+          <p:nvPr/>
+        </p:nvSpPr>
+        <p:spPr>
+          <a:xfrm>
+            <a:off x="3127248" y="3529584"/>
+            <a:ext cx="2194560" cy="347472"/>
+          </a:xfrm>
+          <a:prstGeom prst="rect">
+            <a:avLst/>
+          </a:prstGeom>
+          <a:noFill/>
+          <a:ln/>
+        </p:spPr>
+        <p:txBody>
+          <a:bodyPr wrap="square" rtlCol="0" anchor="ctr"/>
+          <a:lstStyle/>
+          <a:p>
+            <a:pPr algn="r" indent="0" marL="0">
+              <a:buNone/>
+            </a:pPr>
+            <a:r>
+              <a:rPr lang="en-US" sz="1200" dirty="0">
+                <a:solidFill>
+                  <a:srgbClr val="132A3A"/>
+                </a:solidFill>
+                <a:latin typeface="Arial" pitchFamily="34" charset="0"/>
+                <a:ea typeface="Arial" pitchFamily="34" charset="-122"/>
+                <a:cs typeface="Arial" pitchFamily="34" charset="-120"/>
+              </a:rPr>
+              <a:t>760.0억원</a:t>
+            </a:r>
+            <a:endParaRPr lang="en-US" sz="1200" dirty="0"/>
+          </a:p>
+        </p:txBody>
+      </p:sp>
+      <p:sp>
+        <p:nvSpPr>
+          <p:cNvPr id="18" name="Shape 16"/>
+          <p:cNvSpPr/>
+          <p:nvPr/>
+        </p:nvSpPr>
+        <p:spPr>
+          <a:xfrm>
+            <a:off x="795528" y="3877056"/>
+            <a:ext cx="4663440" cy="0"/>
+          </a:xfrm>
+          <a:prstGeom prst="line">
+            <a:avLst/>
+          </a:prstGeom>
+          <a:noFill/>
+          <a:ln w="6350">
+            <a:solidFill>
+              <a:srgbClr val="E8E8E8"/>
+            </a:solidFill>
+            <a:prstDash val="solid"/>
+          </a:ln>
+        </p:spPr>
+      </p:sp>
+      <p:sp>
+        <p:nvSpPr>
+          <p:cNvPr id="19" name="Text 17"/>
+          <p:cNvSpPr/>
+          <p:nvPr/>
+        </p:nvSpPr>
+        <p:spPr>
+          <a:xfrm>
+            <a:off x="886968" y="3877056"/>
+            <a:ext cx="2743200" cy="347472"/>
+          </a:xfrm>
+          <a:prstGeom prst="rect">
+            <a:avLst/>
+          </a:prstGeom>
+          <a:noFill/>
+          <a:ln/>
+        </p:spPr>
+        <p:txBody>
+          <a:bodyPr wrap="square" rtlCol="0" anchor="ctr"/>
+          <a:lstStyle/>
+          <a:p>
+            <a:pPr indent="0" marL="0">
+              <a:buNone/>
+            </a:pPr>
+            <a:r>
+              <a:rPr lang="en-US" sz="1100" dirty="0">
+                <a:solidFill>
+                  <a:srgbClr val="5B6B73"/>
+                </a:solidFill>
+                <a:latin typeface="맑은 고딕" pitchFamily="34" charset="0"/>
+                <a:ea typeface="맑은 고딕" pitchFamily="34" charset="-122"/>
+                <a:cs typeface="맑은 고딕" pitchFamily="34" charset="-120"/>
+              </a:rPr>
+              <a:t>순투자금 (매매가 − 보증금)</a:t>
+            </a:r>
+            <a:endParaRPr lang="en-US" sz="1100" dirty="0"/>
+          </a:p>
+        </p:txBody>
+      </p:sp>
+      <p:sp>
+        <p:nvSpPr>
+          <p:cNvPr id="20" name="Text 18"/>
+          <p:cNvSpPr/>
+          <p:nvPr/>
+        </p:nvSpPr>
+        <p:spPr>
+          <a:xfrm>
+            <a:off x="3127248" y="3877056"/>
+            <a:ext cx="2194560" cy="347472"/>
+          </a:xfrm>
+          <a:prstGeom prst="rect">
+            <a:avLst/>
+          </a:prstGeom>
+          <a:noFill/>
+          <a:ln/>
+        </p:spPr>
+        <p:txBody>
+          <a:bodyPr wrap="square" rtlCol="0" anchor="ctr"/>
+          <a:lstStyle/>
+          <a:p>
+            <a:pPr algn="r" indent="0" marL="0">
+              <a:buNone/>
+            </a:pPr>
+            <a:r>
+              <a:rPr lang="en-US" sz="1200" b="1" dirty="0">
+                <a:solidFill>
+                  <a:srgbClr val="B8860B"/>
+                </a:solidFill>
+                <a:latin typeface="Arial" pitchFamily="34" charset="0"/>
+                <a:ea typeface="Arial" pitchFamily="34" charset="-122"/>
+                <a:cs typeface="Arial" pitchFamily="34" charset="-120"/>
+              </a:rPr>
+              <a:t>760.0억원</a:t>
+            </a:r>
+            <a:endParaRPr lang="en-US" sz="1200" dirty="0"/>
+          </a:p>
+        </p:txBody>
+      </p:sp>
+      <p:sp>
+        <p:nvSpPr>
+          <p:cNvPr id="21" name="Shape 19"/>
+          <p:cNvSpPr/>
+          <p:nvPr/>
+        </p:nvSpPr>
+        <p:spPr>
+          <a:xfrm>
+            <a:off x="795528" y="4224528"/>
+            <a:ext cx="4663440" cy="0"/>
+          </a:xfrm>
+          <a:prstGeom prst="line">
+            <a:avLst/>
+          </a:prstGeom>
+          <a:noFill/>
+          <a:ln w="6350">
+            <a:solidFill>
+              <a:srgbClr val="E8E8E8"/>
+            </a:solidFill>
+            <a:prstDash val="solid"/>
+          </a:ln>
+        </p:spPr>
+      </p:sp>
+      <p:sp>
+        <p:nvSpPr>
+          <p:cNvPr id="22" name="Shape 20"/>
+          <p:cNvSpPr/>
+          <p:nvPr/>
+        </p:nvSpPr>
+        <p:spPr>
+          <a:xfrm>
+            <a:off x="6053328" y="1371600"/>
+            <a:ext cx="5571439" cy="3840480"/>
+          </a:xfrm>
+          <a:prstGeom prst="roundRect">
+            <a:avLst>
+              <a:gd name="adj" fmla="val 1429"/>
+            </a:avLst>
+          </a:prstGeom>
+          <a:solidFill>
+            <a:srgbClr val="F3F6F7"/>
+          </a:solidFill>
+          <a:ln w="6350">
+            <a:solidFill>
+              <a:srgbClr val="CBD5E0"/>
+            </a:solidFill>
+            <a:prstDash val="solid"/>
+          </a:ln>
+        </p:spPr>
+      </p:sp>
+      <p:sp>
+        <p:nvSpPr>
+          <p:cNvPr id="23" name="Shape 21"/>
+          <p:cNvSpPr/>
+          <p:nvPr/>
+        </p:nvSpPr>
+        <p:spPr>
+          <a:xfrm>
+            <a:off x="6309360" y="1591056"/>
+            <a:ext cx="1554480" cy="219456"/>
+          </a:xfrm>
+          <a:prstGeom prst="roundRect">
+            <a:avLst>
+              <a:gd name="adj" fmla="val 50000"/>
+            </a:avLst>
+          </a:prstGeom>
+          <a:solidFill>
+            <a:srgbClr val="F6F1E4"/>
+          </a:solidFill>
+          <a:ln w="6350">
+            <a:solidFill>
+              <a:srgbClr val="8B6508"/>
+            </a:solidFill>
+            <a:prstDash val="solid"/>
+          </a:ln>
+        </p:spPr>
+      </p:sp>
+      <p:sp>
+        <p:nvSpPr>
+          <p:cNvPr id="24" name="Text 22"/>
+          <p:cNvSpPr/>
+          <p:nvPr/>
+        </p:nvSpPr>
+        <p:spPr>
+          <a:xfrm>
+            <a:off x="6309360" y="1591056"/>
+            <a:ext cx="1554480" cy="219456"/>
+          </a:xfrm>
+          <a:prstGeom prst="rect">
+            <a:avLst/>
+          </a:prstGeom>
+          <a:noFill/>
+          <a:ln/>
+        </p:spPr>
+        <p:txBody>
+          <a:bodyPr wrap="square" lIns="0" tIns="0" rIns="0" bIns="0" rtlCol="0" anchor="ctr"/>
+          <a:lstStyle/>
+          <a:p>
+            <a:pPr algn="ctr" indent="0" marL="0">
+              <a:buNone/>
+            </a:pPr>
+            <a:r>
+              <a:rPr lang="en-US" sz="850" b="1" dirty="0">
+                <a:solidFill>
+                  <a:srgbClr val="8B6508"/>
+                </a:solidFill>
+                <a:latin typeface="맑은 고딕" pitchFamily="34" charset="0"/>
+                <a:ea typeface="맑은 고딕" pitchFamily="34" charset="-122"/>
+                <a:cs typeface="맑은 고딕" pitchFamily="34" charset="-120"/>
+              </a:rPr>
+              <a:t>[ 공시지가 열람 안내 ]</a:t>
+            </a:r>
+            <a:endParaRPr lang="en-US" sz="850" dirty="0"/>
+          </a:p>
+        </p:txBody>
+      </p:sp>
+      <p:sp>
+        <p:nvSpPr>
+          <p:cNvPr id="25" name="Text 23"/>
+          <p:cNvSpPr/>
+          <p:nvPr/>
+        </p:nvSpPr>
+        <p:spPr>
+          <a:xfrm>
+            <a:off x="6309360" y="1883664"/>
+            <a:ext cx="5059375" cy="274320"/>
+          </a:xfrm>
+          <a:prstGeom prst="rect">
+            <a:avLst/>
+          </a:prstGeom>
+          <a:noFill/>
+          <a:ln/>
+        </p:spPr>
+        <p:txBody>
+          <a:bodyPr wrap="square" lIns="0" tIns="0" rIns="0" bIns="0" rtlCol="0" anchor="ctr"/>
+          <a:lstStyle/>
+          <a:p>
+            <a:pPr indent="0" marL="0">
+              <a:buNone/>
+            </a:pPr>
+            <a:r>
+              <a:rPr lang="en-US" sz="1200" b="1" dirty="0">
+                <a:solidFill>
+                  <a:srgbClr val="132A3A"/>
+                </a:solidFill>
+                <a:latin typeface="맑은 고딕" pitchFamily="34" charset="0"/>
+                <a:ea typeface="맑은 고딕" pitchFamily="34" charset="-122"/>
+                <a:cs typeface="맑은 고딕" pitchFamily="34" charset="-120"/>
+              </a:rPr>
+              <a:t>개별공시지가 및 토지 가치 평가 안내</a:t>
+            </a:r>
+            <a:endParaRPr lang="en-US" sz="1200" dirty="0"/>
+          </a:p>
+        </p:txBody>
+      </p:sp>
+      <p:sp>
+        <p:nvSpPr>
+          <p:cNvPr id="26" name="Text 24"/>
+          <p:cNvSpPr/>
+          <p:nvPr/>
+        </p:nvSpPr>
+        <p:spPr>
+          <a:xfrm>
+            <a:off x="6309360" y="2194560"/>
+            <a:ext cx="5059375" cy="384048"/>
+          </a:xfrm>
+          <a:prstGeom prst="rect">
+            <a:avLst/>
+          </a:prstGeom>
+          <a:noFill/>
+          <a:ln/>
+        </p:spPr>
+        <p:txBody>
+          <a:bodyPr wrap="square" lIns="0" tIns="0" rIns="0" bIns="0" rtlCol="0" anchor="t"/>
+          <a:lstStyle/>
+          <a:p>
+            <a:pPr indent="0" marL="0">
+              <a:lnSpc>
+                <a:spcPct val="115000"/>
+              </a:lnSpc>
+              <a:buNone/>
+            </a:pPr>
+            <a:r>
+              <a:rPr lang="en-US" sz="950" dirty="0">
+                <a:solidFill>
+                  <a:srgbClr val="5B6B73"/>
+                </a:solidFill>
+                <a:latin typeface="맑은 고딕" pitchFamily="34" charset="0"/>
+                <a:ea typeface="맑은 고딕" pitchFamily="34" charset="-122"/>
+                <a:cs typeface="맑은 고딕" pitchFamily="34" charset="-120"/>
+              </a:rPr>
+              <a:t>대상 필지의 개별공시지가 연도별 이력 및 표준지 공시지가 대비 배율은 부동산 공시가격 알리미 및 감정평가 공적 자료를 통해 확인합니다.</a:t>
+            </a:r>
+            <a:endParaRPr lang="en-US" sz="950" dirty="0"/>
+          </a:p>
+        </p:txBody>
+      </p:sp>
+      <p:sp>
+        <p:nvSpPr>
+          <p:cNvPr id="27" name="Shape 25"/>
+          <p:cNvSpPr/>
+          <p:nvPr/>
+        </p:nvSpPr>
+        <p:spPr>
+          <a:xfrm>
+            <a:off x="6309360" y="2633472"/>
+            <a:ext cx="5059375" cy="0"/>
+          </a:xfrm>
+          <a:prstGeom prst="line">
+            <a:avLst/>
+          </a:prstGeom>
+          <a:noFill/>
+          <a:ln w="5080">
+            <a:solidFill>
+              <a:srgbClr val="CBD5E0"/>
+            </a:solidFill>
+            <a:prstDash val="solid"/>
+          </a:ln>
+        </p:spPr>
+      </p:sp>
+      <p:sp>
+        <p:nvSpPr>
+          <p:cNvPr id="28" name="Shape 26"/>
+          <p:cNvSpPr/>
+          <p:nvPr/>
+        </p:nvSpPr>
+        <p:spPr>
+          <a:xfrm>
+            <a:off x="6345936" y="2779776"/>
+            <a:ext cx="64008" cy="64008"/>
+          </a:xfrm>
+          <a:prstGeom prst="rect">
+            <a:avLst/>
+          </a:prstGeom>
+          <a:solidFill>
+            <a:srgbClr val="B8860B"/>
+          </a:solidFill>
+          <a:ln/>
+        </p:spPr>
+      </p:sp>
+      <p:sp>
+        <p:nvSpPr>
+          <p:cNvPr id="29" name="Text 27"/>
+          <p:cNvSpPr/>
+          <p:nvPr/>
+        </p:nvSpPr>
+        <p:spPr>
+          <a:xfrm>
+            <a:off x="6473952" y="2724912"/>
+            <a:ext cx="4839919" cy="530352"/>
+          </a:xfrm>
+          <a:prstGeom prst="rect">
+            <a:avLst/>
+          </a:prstGeom>
+          <a:noFill/>
+          <a:ln/>
+        </p:spPr>
+        <p:txBody>
+          <a:bodyPr wrap="square" lIns="0" tIns="0" rIns="0" bIns="0" rtlCol="0" anchor="t"/>
+          <a:lstStyle/>
+          <a:p>
+            <a:pPr indent="0" marL="0">
+              <a:lnSpc>
+                <a:spcPct val="112000"/>
+              </a:lnSpc>
+              <a:buNone/>
+            </a:pPr>
+            <a:r>
+              <a:rPr lang="en-US" sz="920" dirty="0">
+                <a:solidFill>
+                  <a:srgbClr val="2B2B2B"/>
+                </a:solidFill>
+                <a:latin typeface="맑은 고딕" pitchFamily="34" charset="0"/>
+                <a:ea typeface="맑은 고딕" pitchFamily="34" charset="-122"/>
+                <a:cs typeface="맑은 고딕" pitchFamily="34" charset="-120"/>
+              </a:rPr>
+              <a:t>최근 5~10개년 개별공시지가 변동 추이 및 연평균 상승률 분석</a:t>
+            </a:r>
+            <a:endParaRPr lang="en-US" sz="920" dirty="0"/>
+          </a:p>
+        </p:txBody>
+      </p:sp>
+      <p:sp>
+        <p:nvSpPr>
+          <p:cNvPr id="30" name="Shape 28"/>
+          <p:cNvSpPr/>
+          <p:nvPr/>
+        </p:nvSpPr>
+        <p:spPr>
+          <a:xfrm>
+            <a:off x="6345936" y="3346704"/>
+            <a:ext cx="64008" cy="64008"/>
+          </a:xfrm>
+          <a:prstGeom prst="rect">
+            <a:avLst/>
+          </a:prstGeom>
+          <a:solidFill>
+            <a:srgbClr val="B8860B"/>
+          </a:solidFill>
+          <a:ln/>
+        </p:spPr>
+      </p:sp>
+      <p:sp>
+        <p:nvSpPr>
+          <p:cNvPr id="31" name="Text 29"/>
+          <p:cNvSpPr/>
+          <p:nvPr/>
+        </p:nvSpPr>
+        <p:spPr>
+          <a:xfrm>
+            <a:off x="6473952" y="3291840"/>
+            <a:ext cx="4839919" cy="530352"/>
+          </a:xfrm>
+          <a:prstGeom prst="rect">
+            <a:avLst/>
+          </a:prstGeom>
+          <a:noFill/>
+          <a:ln/>
+        </p:spPr>
+        <p:txBody>
+          <a:bodyPr wrap="square" lIns="0" tIns="0" rIns="0" bIns="0" rtlCol="0" anchor="t"/>
+          <a:lstStyle/>
+          <a:p>
+            <a:pPr indent="0" marL="0">
+              <a:lnSpc>
+                <a:spcPct val="112000"/>
+              </a:lnSpc>
+              <a:buNone/>
+            </a:pPr>
+            <a:r>
+              <a:rPr lang="en-US" sz="920" dirty="0">
+                <a:solidFill>
+                  <a:srgbClr val="2B2B2B"/>
+                </a:solidFill>
+                <a:latin typeface="맑은 고딕" pitchFamily="34" charset="0"/>
+                <a:ea typeface="맑은 고딕" pitchFamily="34" charset="-122"/>
+                <a:cs typeface="맑은 고딕" pitchFamily="34" charset="-120"/>
+              </a:rPr>
+              <a:t>인근 표준지 공시지가 대비 토지 특성(도로접면, 형상, 방위) 차이 분석</a:t>
+            </a:r>
+            <a:endParaRPr lang="en-US" sz="920" dirty="0"/>
+          </a:p>
+        </p:txBody>
+      </p:sp>
+      <p:sp>
+        <p:nvSpPr>
+          <p:cNvPr id="32" name="Shape 30"/>
+          <p:cNvSpPr/>
+          <p:nvPr/>
+        </p:nvSpPr>
+        <p:spPr>
+          <a:xfrm>
+            <a:off x="6345936" y="3913632"/>
+            <a:ext cx="64008" cy="64008"/>
+          </a:xfrm>
+          <a:prstGeom prst="rect">
+            <a:avLst/>
+          </a:prstGeom>
+          <a:solidFill>
+            <a:srgbClr val="B8860B"/>
+          </a:solidFill>
+          <a:ln/>
+        </p:spPr>
+      </p:sp>
+      <p:sp>
+        <p:nvSpPr>
+          <p:cNvPr id="33" name="Text 31"/>
+          <p:cNvSpPr/>
+          <p:nvPr/>
+        </p:nvSpPr>
+        <p:spPr>
+          <a:xfrm>
+            <a:off x="6473952" y="3858768"/>
+            <a:ext cx="4839919" cy="530352"/>
+          </a:xfrm>
+          <a:prstGeom prst="rect">
+            <a:avLst/>
+          </a:prstGeom>
+          <a:noFill/>
+          <a:ln/>
+        </p:spPr>
+        <p:txBody>
+          <a:bodyPr wrap="square" lIns="0" tIns="0" rIns="0" bIns="0" rtlCol="0" anchor="t"/>
+          <a:lstStyle/>
+          <a:p>
+            <a:pPr indent="0" marL="0">
+              <a:lnSpc>
+                <a:spcPct val="112000"/>
+              </a:lnSpc>
+              <a:buNone/>
+            </a:pPr>
+            <a:r>
+              <a:rPr lang="en-US" sz="920" dirty="0">
+                <a:solidFill>
+                  <a:srgbClr val="2B2B2B"/>
+                </a:solidFill>
+                <a:latin typeface="맑은 고딕" pitchFamily="34" charset="0"/>
+                <a:ea typeface="맑은 고딕" pitchFamily="34" charset="-122"/>
+                <a:cs typeface="맑은 고딕" pitchFamily="34" charset="-120"/>
+              </a:rPr>
+              <a:t>토지 공시지가 대비 실거래가 매매 배율 및 평당 단가 프리미엄 검증</a:t>
+            </a:r>
+            <a:endParaRPr lang="en-US" sz="920" dirty="0"/>
+          </a:p>
+        </p:txBody>
+      </p:sp>
+      <p:sp>
+        <p:nvSpPr>
+          <p:cNvPr id="34" name="Shape 32"/>
+          <p:cNvSpPr/>
+          <p:nvPr/>
+        </p:nvSpPr>
+        <p:spPr>
+          <a:xfrm>
+            <a:off x="6345936" y="4480560"/>
+            <a:ext cx="64008" cy="64008"/>
+          </a:xfrm>
+          <a:prstGeom prst="rect">
+            <a:avLst/>
+          </a:prstGeom>
+          <a:solidFill>
+            <a:srgbClr val="B8860B"/>
+          </a:solidFill>
+          <a:ln/>
+        </p:spPr>
+      </p:sp>
+      <p:sp>
+        <p:nvSpPr>
+          <p:cNvPr id="35" name="Text 33"/>
+          <p:cNvSpPr/>
+          <p:nvPr/>
+        </p:nvSpPr>
+        <p:spPr>
+          <a:xfrm>
+            <a:off x="6473952" y="4425696"/>
+            <a:ext cx="4839919" cy="530352"/>
+          </a:xfrm>
+          <a:prstGeom prst="rect">
+            <a:avLst/>
+          </a:prstGeom>
+          <a:noFill/>
+          <a:ln/>
+        </p:spPr>
+        <p:txBody>
+          <a:bodyPr wrap="square" lIns="0" tIns="0" rIns="0" bIns="0" rtlCol="0" anchor="t"/>
+          <a:lstStyle/>
+          <a:p>
+            <a:pPr indent="0" marL="0">
+              <a:lnSpc>
+                <a:spcPct val="112000"/>
+              </a:lnSpc>
+              <a:buNone/>
+            </a:pPr>
+            <a:r>
+              <a:rPr lang="en-US" sz="920" dirty="0">
+                <a:solidFill>
+                  <a:srgbClr val="2B2B2B"/>
+                </a:solidFill>
+                <a:latin typeface="맑은 고딕" pitchFamily="34" charset="0"/>
+                <a:ea typeface="맑은 고딕" pitchFamily="34" charset="-122"/>
+                <a:cs typeface="맑은 고딕" pitchFamily="34" charset="-120"/>
+              </a:rPr>
+              <a:t>보유세(재산세·종합부동산세) 과세표준 기준액 산출 및 세무 영향 점검</a:t>
+            </a:r>
+            <a:endParaRPr lang="en-US" sz="920" dirty="0"/>
+          </a:p>
+        </p:txBody>
+      </p:sp>
+      <p:sp>
+        <p:nvSpPr>
+          <p:cNvPr id="36" name="Text 34"/>
+          <p:cNvSpPr/>
+          <p:nvPr/>
+        </p:nvSpPr>
+        <p:spPr>
+          <a:xfrm>
+            <a:off x="566928" y="6382512"/>
+            <a:ext cx="7315200" cy="219456"/>
+          </a:xfrm>
+          <a:prstGeom prst="rect">
+            <a:avLst/>
+          </a:prstGeom>
+          <a:noFill/>
+          <a:ln/>
+        </p:spPr>
+        <p:txBody>
+          <a:bodyPr wrap="square" lIns="0" tIns="0" rIns="0" bIns="0" rtlCol="0" anchor="ctr"/>
+          <a:lstStyle/>
+          <a:p>
+            <a:pPr indent="0" marL="0">
+              <a:buNone/>
+            </a:pPr>
+            <a:r>
+              <a:rPr lang="en-US" sz="800" dirty="0">
+                <a:solidFill>
+                  <a:srgbClr val="5B6B73"/>
+                </a:solidFill>
+                <a:latin typeface="맑은 고딕" pitchFamily="34" charset="0"/>
+                <a:ea typeface="맑은 고딕" pitchFamily="34" charset="-122"/>
+                <a:cs typeface="맑은 고딕" pitchFamily="34" charset="-120"/>
+              </a:rPr>
+              <a:t>CRE DEAL</a:t>
+            </a:r>
+            <a:endParaRPr lang="en-US" sz="800" dirty="0"/>
+          </a:p>
+        </p:txBody>
+      </p:sp>
+      <p:sp>
+        <p:nvSpPr>
+          <p:cNvPr id="37" name="Text 35"/>
+          <p:cNvSpPr/>
+          <p:nvPr/>
+        </p:nvSpPr>
+        <p:spPr>
+          <a:xfrm>
+            <a:off x="10710367" y="6382512"/>
+            <a:ext cx="914400" cy="219456"/>
+          </a:xfrm>
+          <a:prstGeom prst="rect">
+            <a:avLst/>
+          </a:prstGeom>
+          <a:noFill/>
+          <a:ln/>
+        </p:spPr>
+        <p:txBody>
+          <a:bodyPr wrap="square" lIns="0" tIns="0" rIns="0" bIns="0" rtlCol="0" anchor="ctr"/>
+          <a:lstStyle/>
+          <a:p>
+            <a:pPr algn="r" indent="0" marL="0">
+              <a:buNone/>
+            </a:pPr>
+            <a:r>
+              <a:rPr lang="en-US" sz="900" b="1" dirty="0">
+                <a:solidFill>
+                  <a:srgbClr val="B8860B"/>
+                </a:solidFill>
+                <a:latin typeface="Arial" pitchFamily="34" charset="0"/>
+                <a:ea typeface="Arial" pitchFamily="34" charset="-122"/>
+                <a:cs typeface="Arial" pitchFamily="34" charset="-120"/>
+              </a:rPr>
+              <a:t>7</a:t>
+            </a:r>
+            <a:endParaRPr lang="en-US" sz="900" dirty="0"/>
+          </a:p>
+        </p:txBody>
+      </p:sp>
+    </p:spTree>
+  </p:cSld>
+  <p:clrMapOvr>
+    <a:masterClrMapping/>
+  </p:clrMapOvr>
+</p:sld>
+</file>
+
+<file path=ppt/slides/slide8.xml><?xml version="1.0" encoding="utf-8"?>
+<p:sld xmlns:a="http://schemas.openxmlformats.org/drawingml/2006/main" xmlns:r="http://schemas.openxmlformats.org/officeDocument/2006/relationships" xmlns:p="http://schemas.openxmlformats.org/presentationml/2006/main">
+  <p:cSld name="Slide 8">
+    <p:bg>
+      <p:bgPr>
+        <a:solidFill>
+          <a:srgbClr val="FFFFFF"/>
+        </a:solidFill>
+      </p:bgPr>
+    </p:bg>
+    <p:spTree>
+      <p:nvGrpSpPr>
+        <p:cNvPr id="1" name=""/>
+        <p:cNvGrpSpPr/>
+        <p:nvPr/>
+      </p:nvGrpSpPr>
+      <p:grpSpPr>
+        <a:xfrm>
+          <a:off x="0" y="0"/>
+          <a:ext cx="0" cy="0"/>
+          <a:chOff x="0" y="0"/>
+          <a:chExt cx="0" cy="0"/>
+        </a:xfrm>
+      </p:grpSpPr>
+      <p:sp>
+        <p:nvSpPr>
+          <p:cNvPr id="2" name="Shape 0"/>
+          <p:cNvSpPr/>
+          <p:nvPr/>
+        </p:nvSpPr>
+        <p:spPr>
+          <a:xfrm>
+            <a:off x="566928" y="457200"/>
+            <a:ext cx="384048" cy="384048"/>
+          </a:xfrm>
+          <a:prstGeom prst="ellipse">
+            <a:avLst/>
+          </a:prstGeom>
+          <a:solidFill>
+            <a:srgbClr val="B8860B"/>
+          </a:solidFill>
+          <a:ln/>
+        </p:spPr>
+      </p:sp>
+      <p:sp>
+        <p:nvSpPr>
+          <p:cNvPr id="3" name="Text 1"/>
+          <p:cNvSpPr/>
+          <p:nvPr/>
+        </p:nvSpPr>
+        <p:spPr>
+          <a:xfrm>
+            <a:off x="566928" y="457200"/>
+            <a:ext cx="384048" cy="384048"/>
+          </a:xfrm>
+          <a:prstGeom prst="rect">
+            <a:avLst/>
+          </a:prstGeom>
+          <a:noFill/>
+          <a:ln/>
+        </p:spPr>
+        <p:txBody>
+          <a:bodyPr wrap="square" lIns="0" tIns="0" rIns="0" bIns="0" rtlCol="0" anchor="ctr"/>
+          <a:lstStyle/>
+          <a:p>
+            <a:pPr algn="ctr" indent="0" marL="0">
+              <a:buNone/>
+            </a:pPr>
+            <a:r>
+              <a:rPr lang="en-US" sz="1300" b="1" dirty="0">
+                <a:solidFill>
+                  <a:srgbClr val="FFFFFF"/>
+                </a:solidFill>
+                <a:latin typeface="Arial" pitchFamily="34" charset="0"/>
+                <a:ea typeface="Arial" pitchFamily="34" charset="-122"/>
+                <a:cs typeface="Arial" pitchFamily="34" charset="-120"/>
+              </a:rPr>
+              <a:t>08</a:t>
+            </a:r>
+            <a:endParaRPr lang="en-US" sz="1300" dirty="0"/>
+          </a:p>
+        </p:txBody>
+      </p:sp>
+      <p:sp>
+        <p:nvSpPr>
+          <p:cNvPr id="4" name="Text 2"/>
+          <p:cNvSpPr/>
+          <p:nvPr/>
+        </p:nvSpPr>
+        <p:spPr>
+          <a:xfrm>
+            <a:off x="1133856" y="457200"/>
+            <a:ext cx="10490911" cy="182880"/>
+          </a:xfrm>
+          <a:prstGeom prst="rect">
+            <a:avLst/>
+          </a:prstGeom>
+          <a:noFill/>
+          <a:ln/>
+        </p:spPr>
+        <p:txBody>
+          <a:bodyPr wrap="square" lIns="0" tIns="0" rIns="0" bIns="0" rtlCol="0" anchor="ctr"/>
+          <a:lstStyle/>
+          <a:p>
+            <a:pPr indent="0" marL="0">
+              <a:buNone/>
+            </a:pPr>
+            <a:r>
+              <a:rPr lang="en-US" sz="950" b="1" spc="200" kern="0" dirty="0">
+                <a:solidFill>
+                  <a:srgbClr val="B8860B"/>
+                </a:solidFill>
+                <a:latin typeface="Arial" pitchFamily="34" charset="0"/>
+                <a:ea typeface="Arial" pitchFamily="34" charset="-122"/>
+                <a:cs typeface="Arial" pitchFamily="34" charset="-120"/>
+              </a:rPr>
+              <a:t>Gallery</a:t>
+            </a:r>
+            <a:endParaRPr lang="en-US" sz="950" dirty="0"/>
+          </a:p>
+        </p:txBody>
+      </p:sp>
+      <p:sp>
+        <p:nvSpPr>
+          <p:cNvPr id="5" name="Text 3"/>
+          <p:cNvSpPr/>
+          <p:nvPr/>
+        </p:nvSpPr>
+        <p:spPr>
+          <a:xfrm>
+            <a:off x="1133856" y="640080"/>
+            <a:ext cx="10490911" cy="365760"/>
+          </a:xfrm>
+          <a:prstGeom prst="rect">
+            <a:avLst/>
+          </a:prstGeom>
+          <a:noFill/>
+          <a:ln/>
+        </p:spPr>
+        <p:txBody>
+          <a:bodyPr wrap="square" lIns="0" tIns="0" rIns="0" bIns="0" rtlCol="0" anchor="ctr">
+            <a:normAutofit/>
+          </a:bodyPr>
+          <a:lstStyle/>
+          <a:p>
+            <a:pPr indent="0" marL="0">
+              <a:buNone/>
+            </a:pPr>
+            <a:r>
+              <a:rPr lang="en-US" sz="2300" b="1" dirty="0">
+                <a:solidFill>
+                  <a:srgbClr val="132A3A"/>
+                </a:solidFill>
+                <a:latin typeface="맑은 고딕" pitchFamily="34" charset="0"/>
+                <a:ea typeface="맑은 고딕" pitchFamily="34" charset="-122"/>
+                <a:cs typeface="맑은 고딕" pitchFamily="34" charset="-120"/>
+              </a:rPr>
+              <a:t>현장 사진</a:t>
+            </a:r>
+            <a:endParaRPr lang="en-US" sz="2300" dirty="0"/>
+          </a:p>
+        </p:txBody>
+      </p:sp>
+      <p:sp>
+        <p:nvSpPr>
+          <p:cNvPr id="6" name="Shape 4"/>
+          <p:cNvSpPr/>
+          <p:nvPr/>
+        </p:nvSpPr>
+        <p:spPr>
+          <a:xfrm>
+            <a:off x="566928" y="1371600"/>
+            <a:ext cx="11057839" cy="4572000"/>
+          </a:xfrm>
+          <a:prstGeom prst="roundRect">
+            <a:avLst>
+              <a:gd name="adj" fmla="val 1200"/>
+            </a:avLst>
+          </a:prstGeom>
+          <a:solidFill>
+            <a:srgbClr val="F3F6F7"/>
+          </a:solidFill>
+          <a:ln w="6350">
+            <a:solidFill>
+              <a:srgbClr val="CBD5E0"/>
+            </a:solidFill>
+            <a:prstDash val="solid"/>
+          </a:ln>
+        </p:spPr>
+      </p:sp>
+      <p:sp>
+        <p:nvSpPr>
+          <p:cNvPr id="7" name="Shape 5"/>
+          <p:cNvSpPr/>
+          <p:nvPr/>
+        </p:nvSpPr>
+        <p:spPr>
+          <a:xfrm>
+            <a:off x="822960" y="1591056"/>
+            <a:ext cx="1316736" cy="219456"/>
+          </a:xfrm>
+          <a:prstGeom prst="roundRect">
+            <a:avLst>
+              <a:gd name="adj" fmla="val 50000"/>
+            </a:avLst>
+          </a:prstGeom>
+          <a:solidFill>
+            <a:srgbClr val="E8F4F8"/>
+          </a:solidFill>
+          <a:ln w="6350">
+            <a:solidFill>
+              <a:srgbClr val="2E6E82"/>
+            </a:solidFill>
+            <a:prstDash val="solid"/>
+          </a:ln>
+        </p:spPr>
+      </p:sp>
+      <p:sp>
+        <p:nvSpPr>
+          <p:cNvPr id="8" name="Text 6"/>
+          <p:cNvSpPr/>
+          <p:nvPr/>
+        </p:nvSpPr>
+        <p:spPr>
+          <a:xfrm>
+            <a:off x="822960" y="1591056"/>
+            <a:ext cx="1316736" cy="219456"/>
+          </a:xfrm>
+          <a:prstGeom prst="rect">
+            <a:avLst/>
+          </a:prstGeom>
+          <a:noFill/>
+          <a:ln/>
+        </p:spPr>
+        <p:txBody>
+          <a:bodyPr wrap="square" lIns="0" tIns="0" rIns="0" bIns="0" rtlCol="0" anchor="ctr"/>
+          <a:lstStyle/>
+          <a:p>
+            <a:pPr algn="ctr" indent="0" marL="0">
+              <a:buNone/>
+            </a:pPr>
+            <a:r>
+              <a:rPr lang="en-US" sz="850" b="1" dirty="0">
+                <a:solidFill>
+                  <a:srgbClr val="2E6E82"/>
+                </a:solidFill>
+                <a:latin typeface="맑은 고딕" pitchFamily="34" charset="0"/>
+                <a:ea typeface="맑은 고딕" pitchFamily="34" charset="-122"/>
+                <a:cs typeface="맑은 고딕" pitchFamily="34" charset="-120"/>
+              </a:rPr>
+              <a:t>[ 현장 실사 예정 ]</a:t>
+            </a:r>
+            <a:endParaRPr lang="en-US" sz="850" dirty="0"/>
+          </a:p>
+        </p:txBody>
+      </p:sp>
+      <p:sp>
+        <p:nvSpPr>
+          <p:cNvPr id="9" name="Text 7"/>
+          <p:cNvSpPr/>
+          <p:nvPr/>
+        </p:nvSpPr>
+        <p:spPr>
+          <a:xfrm>
+            <a:off x="822960" y="1883664"/>
+            <a:ext cx="10545775" cy="274320"/>
+          </a:xfrm>
+          <a:prstGeom prst="rect">
+            <a:avLst/>
+          </a:prstGeom>
+          <a:noFill/>
+          <a:ln/>
+        </p:spPr>
+        <p:txBody>
+          <a:bodyPr wrap="square" lIns="0" tIns="0" rIns="0" bIns="0" rtlCol="0" anchor="ctr"/>
+          <a:lstStyle/>
+          <a:p>
+            <a:pPr indent="0" marL="0">
+              <a:buNone/>
+            </a:pPr>
+            <a:r>
+              <a:rPr lang="en-US" sz="1200" b="1" dirty="0">
+                <a:solidFill>
+                  <a:srgbClr val="132A3A"/>
+                </a:solidFill>
+                <a:latin typeface="맑은 고딕" pitchFamily="34" charset="0"/>
+                <a:ea typeface="맑은 고딕" pitchFamily="34" charset="-122"/>
+                <a:cs typeface="맑은 고딕" pitchFamily="34" charset="-120"/>
+              </a:rPr>
+              <a:t>건축물 현황 및 물리적 실사 점검 안내</a:t>
+            </a:r>
+            <a:endParaRPr lang="en-US" sz="1200" dirty="0"/>
+          </a:p>
+        </p:txBody>
+      </p:sp>
+      <p:sp>
+        <p:nvSpPr>
+          <p:cNvPr id="10" name="Text 8"/>
+          <p:cNvSpPr/>
+          <p:nvPr/>
+        </p:nvSpPr>
+        <p:spPr>
+          <a:xfrm>
+            <a:off x="822960" y="2194560"/>
+            <a:ext cx="10545775" cy="457200"/>
+          </a:xfrm>
+          <a:prstGeom prst="rect">
+            <a:avLst/>
+          </a:prstGeom>
+          <a:noFill/>
+          <a:ln/>
+        </p:spPr>
+        <p:txBody>
+          <a:bodyPr wrap="square" lIns="0" tIns="0" rIns="0" bIns="0" rtlCol="0" anchor="t"/>
+          <a:lstStyle/>
+          <a:p>
+            <a:pPr indent="0" marL="0">
+              <a:lnSpc>
+                <a:spcPct val="115000"/>
+              </a:lnSpc>
+              <a:buNone/>
+            </a:pPr>
+            <a:r>
+              <a:rPr lang="en-US" sz="950" dirty="0">
+                <a:solidFill>
+                  <a:srgbClr val="5B6B73"/>
+                </a:solidFill>
+                <a:latin typeface="맑은 고딕" pitchFamily="34" charset="0"/>
+                <a:ea typeface="맑은 고딕" pitchFamily="34" charset="-122"/>
+                <a:cs typeface="맑은 고딕" pitchFamily="34" charset="-120"/>
+              </a:rPr>
+              <a:t>본 자산의 내·외관 상태 및 주요 설비 사양은 매수 실사 절차 진행 시 현장 방문 조사를 통해 상세 확인 및 촬영이 진행됩니다.</a:t>
+            </a:r>
+            <a:endParaRPr lang="en-US" sz="950" dirty="0"/>
+          </a:p>
+        </p:txBody>
+      </p:sp>
+      <p:sp>
+        <p:nvSpPr>
+          <p:cNvPr id="11" name="Shape 9"/>
+          <p:cNvSpPr/>
+          <p:nvPr/>
+        </p:nvSpPr>
+        <p:spPr>
+          <a:xfrm>
+            <a:off x="822960" y="2706624"/>
+            <a:ext cx="10545775" cy="0"/>
+          </a:xfrm>
+          <a:prstGeom prst="line">
+            <a:avLst/>
+          </a:prstGeom>
+          <a:noFill/>
+          <a:ln w="5080">
+            <a:solidFill>
+              <a:srgbClr val="CBD5E0"/>
+            </a:solidFill>
+            <a:prstDash val="solid"/>
+          </a:ln>
+        </p:spPr>
+      </p:sp>
+      <p:sp>
+        <p:nvSpPr>
+          <p:cNvPr id="12" name="Shape 10"/>
+          <p:cNvSpPr/>
+          <p:nvPr/>
+        </p:nvSpPr>
+        <p:spPr>
+          <a:xfrm>
+            <a:off x="859536" y="2852928"/>
+            <a:ext cx="64008" cy="64008"/>
+          </a:xfrm>
+          <a:prstGeom prst="rect">
+            <a:avLst/>
+          </a:prstGeom>
+          <a:solidFill>
+            <a:srgbClr val="B8860B"/>
+          </a:solidFill>
+          <a:ln/>
+        </p:spPr>
+      </p:sp>
+      <p:sp>
+        <p:nvSpPr>
+          <p:cNvPr id="13" name="Text 11"/>
+          <p:cNvSpPr/>
+          <p:nvPr/>
+        </p:nvSpPr>
+        <p:spPr>
+          <a:xfrm>
+            <a:off x="987552" y="2798064"/>
+            <a:ext cx="10326319" cy="694944"/>
+          </a:xfrm>
+          <a:prstGeom prst="rect">
+            <a:avLst/>
+          </a:prstGeom>
+          <a:noFill/>
+          <a:ln/>
+        </p:spPr>
+        <p:txBody>
+          <a:bodyPr wrap="square" lIns="0" tIns="0" rIns="0" bIns="0" rtlCol="0" anchor="t"/>
+          <a:lstStyle/>
+          <a:p>
+            <a:pPr indent="0" marL="0">
+              <a:lnSpc>
+                <a:spcPct val="112000"/>
+              </a:lnSpc>
+              <a:buNone/>
+            </a:pPr>
+            <a:r>
+              <a:rPr lang="en-US" sz="920" dirty="0">
+                <a:solidFill>
+                  <a:srgbClr val="2B2B2B"/>
+                </a:solidFill>
+                <a:latin typeface="맑은 고딕" pitchFamily="34" charset="0"/>
+                <a:ea typeface="맑은 고딕" pitchFamily="34" charset="-122"/>
+                <a:cs typeface="맑은 고딕" pitchFamily="34" charset="-120"/>
+              </a:rPr>
+              <a:t>외관 파사드 마감재 보존 상태 및 균열·누수 흔적 정밀 점검</a:t>
+            </a:r>
+            <a:endParaRPr lang="en-US" sz="920" dirty="0"/>
+          </a:p>
+        </p:txBody>
+      </p:sp>
+      <p:sp>
+        <p:nvSpPr>
+          <p:cNvPr id="14" name="Shape 12"/>
+          <p:cNvSpPr/>
+          <p:nvPr/>
+        </p:nvSpPr>
+        <p:spPr>
+          <a:xfrm>
+            <a:off x="859536" y="3584448"/>
+            <a:ext cx="64008" cy="64008"/>
+          </a:xfrm>
+          <a:prstGeom prst="rect">
+            <a:avLst/>
+          </a:prstGeom>
+          <a:solidFill>
+            <a:srgbClr val="B8860B"/>
+          </a:solidFill>
+          <a:ln/>
+        </p:spPr>
+      </p:sp>
+      <p:sp>
+        <p:nvSpPr>
+          <p:cNvPr id="15" name="Text 13"/>
+          <p:cNvSpPr/>
+          <p:nvPr/>
+        </p:nvSpPr>
+        <p:spPr>
+          <a:xfrm>
+            <a:off x="987552" y="3529584"/>
+            <a:ext cx="10326319" cy="694944"/>
+          </a:xfrm>
+          <a:prstGeom prst="rect">
+            <a:avLst/>
+          </a:prstGeom>
+          <a:noFill/>
+          <a:ln/>
+        </p:spPr>
+        <p:txBody>
+          <a:bodyPr wrap="square" lIns="0" tIns="0" rIns="0" bIns="0" rtlCol="0" anchor="t"/>
+          <a:lstStyle/>
+          <a:p>
+            <a:pPr indent="0" marL="0">
+              <a:lnSpc>
+                <a:spcPct val="112000"/>
+              </a:lnSpc>
+              <a:buNone/>
+            </a:pPr>
+            <a:r>
+              <a:rPr lang="en-US" sz="920" dirty="0">
+                <a:solidFill>
+                  <a:srgbClr val="2B2B2B"/>
+                </a:solidFill>
+                <a:latin typeface="맑은 고딕" pitchFamily="34" charset="0"/>
+                <a:ea typeface="맑은 고딕" pitchFamily="34" charset="-122"/>
+                <a:cs typeface="맑은 고딕" pitchFamily="34" charset="-120"/>
+              </a:rPr>
+              <a:t>승강기, 기계식 주차설비, 수배전반 등 핵심 설비 내구연한 및 정기검사 이력</a:t>
+            </a:r>
+            <a:endParaRPr lang="en-US" sz="920" dirty="0"/>
+          </a:p>
+        </p:txBody>
+      </p:sp>
+      <p:sp>
+        <p:nvSpPr>
+          <p:cNvPr id="16" name="Shape 14"/>
+          <p:cNvSpPr/>
+          <p:nvPr/>
+        </p:nvSpPr>
+        <p:spPr>
+          <a:xfrm>
+            <a:off x="859536" y="4315968"/>
+            <a:ext cx="64008" cy="64008"/>
+          </a:xfrm>
+          <a:prstGeom prst="rect">
+            <a:avLst/>
+          </a:prstGeom>
+          <a:solidFill>
+            <a:srgbClr val="B8860B"/>
+          </a:solidFill>
+          <a:ln/>
+        </p:spPr>
+      </p:sp>
+      <p:sp>
+        <p:nvSpPr>
+          <p:cNvPr id="17" name="Text 15"/>
+          <p:cNvSpPr/>
+          <p:nvPr/>
+        </p:nvSpPr>
+        <p:spPr>
+          <a:xfrm>
+            <a:off x="987552" y="4261104"/>
+            <a:ext cx="10326319" cy="694944"/>
+          </a:xfrm>
+          <a:prstGeom prst="rect">
+            <a:avLst/>
+          </a:prstGeom>
+          <a:noFill/>
+          <a:ln/>
+        </p:spPr>
+        <p:txBody>
+          <a:bodyPr wrap="square" lIns="0" tIns="0" rIns="0" bIns="0" rtlCol="0" anchor="t"/>
+          <a:lstStyle/>
+          <a:p>
+            <a:pPr indent="0" marL="0">
+              <a:lnSpc>
+                <a:spcPct val="112000"/>
+              </a:lnSpc>
+              <a:buNone/>
+            </a:pPr>
+            <a:r>
+              <a:rPr lang="en-US" sz="920" dirty="0">
+                <a:solidFill>
+                  <a:srgbClr val="2B2B2B"/>
+                </a:solidFill>
+                <a:latin typeface="맑은 고딕" pitchFamily="34" charset="0"/>
+                <a:ea typeface="맑은 고딕" pitchFamily="34" charset="-122"/>
+                <a:cs typeface="맑은 고딕" pitchFamily="34" charset="-120"/>
+              </a:rPr>
+              <a:t>옥상 방수 상태, 지하층 결로/누수 여부 및 공용부(계단실·화장실) 관리 컨디션</a:t>
+            </a:r>
+            <a:endParaRPr lang="en-US" sz="920" dirty="0"/>
+          </a:p>
+        </p:txBody>
+      </p:sp>
+      <p:sp>
+        <p:nvSpPr>
+          <p:cNvPr id="18" name="Shape 16"/>
+          <p:cNvSpPr/>
+          <p:nvPr/>
+        </p:nvSpPr>
+        <p:spPr>
+          <a:xfrm>
+            <a:off x="859536" y="5047488"/>
+            <a:ext cx="64008" cy="64008"/>
+          </a:xfrm>
+          <a:prstGeom prst="rect">
+            <a:avLst/>
+          </a:prstGeom>
+          <a:solidFill>
+            <a:srgbClr val="B8860B"/>
+          </a:solidFill>
+          <a:ln/>
+        </p:spPr>
+      </p:sp>
+      <p:sp>
+        <p:nvSpPr>
+          <p:cNvPr id="19" name="Text 17"/>
+          <p:cNvSpPr/>
+          <p:nvPr/>
+        </p:nvSpPr>
+        <p:spPr>
+          <a:xfrm>
+            <a:off x="987552" y="4992624"/>
+            <a:ext cx="10326319" cy="694944"/>
+          </a:xfrm>
+          <a:prstGeom prst="rect">
+            <a:avLst/>
+          </a:prstGeom>
+          <a:noFill/>
+          <a:ln/>
+        </p:spPr>
+        <p:txBody>
+          <a:bodyPr wrap="square" lIns="0" tIns="0" rIns="0" bIns="0" rtlCol="0" anchor="t"/>
+          <a:lstStyle/>
+          <a:p>
+            <a:pPr indent="0" marL="0">
+              <a:lnSpc>
+                <a:spcPct val="112000"/>
+              </a:lnSpc>
+              <a:buNone/>
+            </a:pPr>
+            <a:r>
+              <a:rPr lang="en-US" sz="920" dirty="0">
+                <a:solidFill>
+                  <a:srgbClr val="2B2B2B"/>
+                </a:solidFill>
+                <a:latin typeface="맑은 고딕" pitchFamily="34" charset="0"/>
+                <a:ea typeface="맑은 고딕" pitchFamily="34" charset="-122"/>
+                <a:cs typeface="맑은 고딕" pitchFamily="34" charset="-120"/>
+              </a:rPr>
+              <a:t>법정 주차대수 확보 여부, 주차장 진입로 회전반경 및 층고 실측 검증</a:t>
+            </a:r>
+            <a:endParaRPr lang="en-US" sz="920" dirty="0"/>
+          </a:p>
+        </p:txBody>
+      </p:sp>
+      <p:sp>
+        <p:nvSpPr>
+          <p:cNvPr id="20" name="Text 18"/>
+          <p:cNvSpPr/>
+          <p:nvPr/>
+        </p:nvSpPr>
+        <p:spPr>
+          <a:xfrm>
+            <a:off x="566928" y="6382512"/>
+            <a:ext cx="7315200" cy="219456"/>
+          </a:xfrm>
+          <a:prstGeom prst="rect">
+            <a:avLst/>
+          </a:prstGeom>
+          <a:noFill/>
+          <a:ln/>
+        </p:spPr>
+        <p:txBody>
+          <a:bodyPr wrap="square" lIns="0" tIns="0" rIns="0" bIns="0" rtlCol="0" anchor="ctr"/>
+          <a:lstStyle/>
+          <a:p>
+            <a:pPr indent="0" marL="0">
+              <a:buNone/>
+            </a:pPr>
+            <a:r>
+              <a:rPr lang="en-US" sz="800" dirty="0">
+                <a:solidFill>
+                  <a:srgbClr val="5B6B73"/>
+                </a:solidFill>
+                <a:latin typeface="맑은 고딕" pitchFamily="34" charset="0"/>
+                <a:ea typeface="맑은 고딕" pitchFamily="34" charset="-122"/>
+                <a:cs typeface="맑은 고딕" pitchFamily="34" charset="-120"/>
+              </a:rPr>
+              <a:t>CRE DEAL</a:t>
+            </a:r>
+            <a:endParaRPr lang="en-US" sz="800" dirty="0"/>
+          </a:p>
+        </p:txBody>
+      </p:sp>
+      <p:sp>
+        <p:nvSpPr>
+          <p:cNvPr id="21" name="Text 19"/>
+          <p:cNvSpPr/>
+          <p:nvPr/>
+        </p:nvSpPr>
+        <p:spPr>
+          <a:xfrm>
+            <a:off x="10710367" y="6382512"/>
+            <a:ext cx="914400" cy="219456"/>
+          </a:xfrm>
+          <a:prstGeom prst="rect">
+            <a:avLst/>
+          </a:prstGeom>
+          <a:noFill/>
+          <a:ln/>
+        </p:spPr>
+        <p:txBody>
+          <a:bodyPr wrap="square" lIns="0" tIns="0" rIns="0" bIns="0" rtlCol="0" anchor="ctr"/>
+          <a:lstStyle/>
+          <a:p>
+            <a:pPr algn="r" indent="0" marL="0">
+              <a:buNone/>
+            </a:pPr>
+            <a:r>
+              <a:rPr lang="en-US" sz="900" b="1" dirty="0">
+                <a:solidFill>
+                  <a:srgbClr val="B8860B"/>
+                </a:solidFill>
+                <a:latin typeface="Arial" pitchFamily="34" charset="0"/>
+                <a:ea typeface="Arial" pitchFamily="34" charset="-122"/>
+                <a:cs typeface="Arial" pitchFamily="34" charset="-120"/>
+              </a:rPr>
+              <a:t>8</a:t>
+            </a:r>
+            <a:endParaRPr lang="en-US" sz="900" dirty="0"/>
+          </a:p>
+        </p:txBody>
+      </p:sp>
+    </p:spTree>
+  </p:cSld>
+  <p:clrMapOvr>
+    <a:masterClrMapping/>
+  </p:clrMapOvr>
+</p:sld>
+</file>
+
+<file path=ppt/slides/slide9.xml><?xml version="1.0" encoding="utf-8"?>
+<p:sld xmlns:a="http://schemas.openxmlformats.org/drawingml/2006/main" xmlns:r="http://schemas.openxmlformats.org/officeDocument/2006/relationships" xmlns:p="http://schemas.openxmlformats.org/presentationml/2006/main">
+  <p:cSld name="Slide 9">
     <p:bg>
       <p:bgPr>
         <a:solidFill>
@@ -8068,7 +10177,7 @@
         </p:nvSpPr>
         <p:spPr>
           <a:xfrm>
-            <a:off x="502920" y="457200"/>
+            <a:off x="566928" y="457200"/>
             <a:ext cx="384048" cy="384048"/>
           </a:xfrm>
           <a:prstGeom prst="ellipse">
@@ -8088,7 +10197,7 @@
         </p:nvSpPr>
         <p:spPr>
           <a:xfrm>
-            <a:off x="502920" y="457200"/>
+            <a:off x="566928" y="457200"/>
             <a:ext cx="384048" cy="384048"/>
           </a:xfrm>
           <a:prstGeom prst="rect">
@@ -8113,7 +10222,7 @@
                 <a:ea typeface="Arial" pitchFamily="34" charset="-122"/>
                 <a:cs typeface="Arial" pitchFamily="34" charset="-120"/>
               </a:rPr>
-              <a:t>07</a:t>
+              <a:t>09</a:t>
             </a:r>
             <a:endParaRPr lang="en-US" sz="1300" dirty="0"/>
           </a:p>
@@ -8127,7 +10236,7 @@
         </p:nvSpPr>
         <p:spPr>
           <a:xfrm>
-            <a:off x="1069848" y="457200"/>
+            <a:off x="1133856" y="457200"/>
             <a:ext cx="10490911" cy="182880"/>
           </a:xfrm>
           <a:prstGeom prst="rect">
@@ -8166,7 +10275,7 @@
         </p:nvSpPr>
         <p:spPr>
           <a:xfrm>
-            <a:off x="1069848" y="658368"/>
+            <a:off x="1133856" y="658368"/>
             <a:ext cx="10490911" cy="420624"/>
           </a:xfrm>
           <a:prstGeom prst="rect">
@@ -8176,7 +10285,9 @@
           <a:ln/>
         </p:spPr>
         <p:txBody>
-          <a:bodyPr wrap="square" lIns="0" tIns="0" rIns="0" bIns="0" rtlCol="0" anchor="ctr"/>
+          <a:bodyPr wrap="square" lIns="0" tIns="0" rIns="0" bIns="0" rtlCol="0" anchor="ctr">
+            <a:normAutofit/>
+          </a:bodyPr>
           <a:lstStyle/>
           <a:p>
             <a:pPr indent="0" marL="0">
@@ -8205,7 +10316,7 @@
         </p:nvSpPr>
         <p:spPr>
           <a:xfrm>
-            <a:off x="502920" y="1463040"/>
+            <a:off x="566928" y="1463040"/>
             <a:ext cx="3588410" cy="658368"/>
           </a:xfrm>
           <a:prstGeom prst="roundRect">
@@ -8227,7 +10338,7 @@
         </p:nvSpPr>
         <p:spPr>
           <a:xfrm>
-            <a:off x="612648" y="1572768"/>
+            <a:off x="676656" y="1572768"/>
             <a:ext cx="438912" cy="438912"/>
           </a:xfrm>
           <a:prstGeom prst="ellipse">
@@ -8247,7 +10358,7 @@
         </p:nvSpPr>
         <p:spPr>
           <a:xfrm>
-            <a:off x="612648" y="1572768"/>
+            <a:off x="676656" y="1572768"/>
             <a:ext cx="438912" cy="438912"/>
           </a:xfrm>
           <a:prstGeom prst="rect">
@@ -8286,7 +10397,7 @@
         </p:nvSpPr>
         <p:spPr>
           <a:xfrm>
-            <a:off x="1161288" y="1554480"/>
+            <a:off x="1225296" y="1554480"/>
             <a:ext cx="2820314" cy="237744"/>
           </a:xfrm>
           <a:prstGeom prst="rect">
@@ -8325,7 +10436,7 @@
         </p:nvSpPr>
         <p:spPr>
           <a:xfrm>
-            <a:off x="1161288" y="1792224"/>
+            <a:off x="1225296" y="1792224"/>
             <a:ext cx="2820314" cy="256032"/>
           </a:xfrm>
           <a:prstGeom prst="rect">
@@ -8364,7 +10475,7 @@
         </p:nvSpPr>
         <p:spPr>
           <a:xfrm>
-            <a:off x="4091330" y="1600200"/>
+            <a:off x="4155338" y="1600200"/>
             <a:ext cx="146304" cy="384048"/>
           </a:xfrm>
           <a:prstGeom prst="rect">
@@ -8403,7 +10514,7 @@
         </p:nvSpPr>
         <p:spPr>
           <a:xfrm>
-            <a:off x="4237634" y="1463040"/>
+            <a:off x="4301642" y="1463040"/>
             <a:ext cx="3588410" cy="658368"/>
           </a:xfrm>
           <a:prstGeom prst="roundRect">
@@ -8425,7 +10536,7 @@
         </p:nvSpPr>
         <p:spPr>
           <a:xfrm>
-            <a:off x="4347362" y="1572768"/>
+            <a:off x="4411370" y="1572768"/>
             <a:ext cx="438912" cy="438912"/>
           </a:xfrm>
           <a:prstGeom prst="ellipse">
@@ -8445,7 +10556,7 @@
         </p:nvSpPr>
         <p:spPr>
           <a:xfrm>
-            <a:off x="4347362" y="1572768"/>
+            <a:off x="4411370" y="1572768"/>
             <a:ext cx="438912" cy="438912"/>
           </a:xfrm>
           <a:prstGeom prst="rect">
@@ -8484,7 +10595,7 @@
         </p:nvSpPr>
         <p:spPr>
           <a:xfrm>
-            <a:off x="4896002" y="1554480"/>
+            <a:off x="4960010" y="1554480"/>
             <a:ext cx="2820314" cy="237744"/>
           </a:xfrm>
           <a:prstGeom prst="rect">
@@ -8523,7 +10634,7 @@
         </p:nvSpPr>
         <p:spPr>
           <a:xfrm>
-            <a:off x="4896002" y="1792224"/>
+            <a:off x="4960010" y="1792224"/>
             <a:ext cx="2820314" cy="256032"/>
           </a:xfrm>
           <a:prstGeom prst="rect">
@@ -8562,7 +10673,7 @@
         </p:nvSpPr>
         <p:spPr>
           <a:xfrm>
-            <a:off x="7826045" y="1600200"/>
+            <a:off x="7890053" y="1600200"/>
             <a:ext cx="146304" cy="384048"/>
           </a:xfrm>
           <a:prstGeom prst="rect">
@@ -8601,7 +10712,7 @@
         </p:nvSpPr>
         <p:spPr>
           <a:xfrm>
-            <a:off x="7972349" y="1463040"/>
+            <a:off x="8036357" y="1463040"/>
             <a:ext cx="3588410" cy="658368"/>
           </a:xfrm>
           <a:prstGeom prst="roundRect">
@@ -8623,7 +10734,7 @@
         </p:nvSpPr>
         <p:spPr>
           <a:xfrm>
-            <a:off x="8082077" y="1572768"/>
+            <a:off x="8146085" y="1572768"/>
             <a:ext cx="438912" cy="438912"/>
           </a:xfrm>
           <a:prstGeom prst="ellipse">
@@ -8643,7 +10754,7 @@
         </p:nvSpPr>
         <p:spPr>
           <a:xfrm>
-            <a:off x="8082077" y="1572768"/>
+            <a:off x="8146085" y="1572768"/>
             <a:ext cx="438912" cy="438912"/>
           </a:xfrm>
           <a:prstGeom prst="rect">
@@ -8682,7 +10793,7 @@
         </p:nvSpPr>
         <p:spPr>
           <a:xfrm>
-            <a:off x="8630717" y="1554480"/>
+            <a:off x="8694725" y="1554480"/>
             <a:ext cx="2820314" cy="237744"/>
           </a:xfrm>
           <a:prstGeom prst="rect">
@@ -8721,7 +10832,7 @@
         </p:nvSpPr>
         <p:spPr>
           <a:xfrm>
-            <a:off x="8630717" y="1792224"/>
+            <a:off x="8694725" y="1792224"/>
             <a:ext cx="2820314" cy="256032"/>
           </a:xfrm>
           <a:prstGeom prst="rect">
@@ -8760,7 +10871,7 @@
         </p:nvSpPr>
         <p:spPr>
           <a:xfrm>
-            <a:off x="502920" y="2395728"/>
+            <a:off x="566928" y="2395728"/>
             <a:ext cx="5486400" cy="237744"/>
           </a:xfrm>
           <a:prstGeom prst="rect">
@@ -8799,7 +10910,7 @@
         </p:nvSpPr>
         <p:spPr>
           <a:xfrm>
-            <a:off x="502920" y="2724912"/>
+            <a:off x="566928" y="2724912"/>
             <a:ext cx="1280160" cy="292608"/>
           </a:xfrm>
           <a:prstGeom prst="roundRect">
@@ -8821,7 +10932,7 @@
         </p:nvSpPr>
         <p:spPr>
           <a:xfrm>
-            <a:off x="502920" y="2724912"/>
+            <a:off x="566928" y="2724912"/>
             <a:ext cx="1280160" cy="292608"/>
           </a:xfrm>
           <a:prstGeom prst="rect">
@@ -8860,7 +10971,7 @@
         </p:nvSpPr>
         <p:spPr>
           <a:xfrm>
-            <a:off x="1929384" y="2706624"/>
+            <a:off x="1993392" y="2706624"/>
             <a:ext cx="3840480" cy="329184"/>
           </a:xfrm>
           <a:prstGeom prst="rect">
@@ -8899,7 +11010,7 @@
         </p:nvSpPr>
         <p:spPr>
           <a:xfrm>
-            <a:off x="502920" y="3127248"/>
+            <a:off x="566928" y="3127248"/>
             <a:ext cx="1280160" cy="292608"/>
           </a:xfrm>
           <a:prstGeom prst="roundRect">
@@ -8921,7 +11032,7 @@
         </p:nvSpPr>
         <p:spPr>
           <a:xfrm>
-            <a:off x="502920" y="3127248"/>
+            <a:off x="566928" y="3127248"/>
             <a:ext cx="1280160" cy="292608"/>
           </a:xfrm>
           <a:prstGeom prst="rect">
@@ -8960,7 +11071,7 @@
         </p:nvSpPr>
         <p:spPr>
           <a:xfrm>
-            <a:off x="1929384" y="3108960"/>
+            <a:off x="1993392" y="3108960"/>
             <a:ext cx="3840480" cy="329184"/>
           </a:xfrm>
           <a:prstGeom prst="rect">
@@ -8999,7 +11110,7 @@
         </p:nvSpPr>
         <p:spPr>
           <a:xfrm>
-            <a:off x="502920" y="3529584"/>
+            <a:off x="566928" y="3529584"/>
             <a:ext cx="1280160" cy="292608"/>
           </a:xfrm>
           <a:prstGeom prst="roundRect">
@@ -9021,7 +11132,7 @@
         </p:nvSpPr>
         <p:spPr>
           <a:xfrm>
-            <a:off x="502920" y="3529584"/>
+            <a:off x="566928" y="3529584"/>
             <a:ext cx="1280160" cy="292608"/>
           </a:xfrm>
           <a:prstGeom prst="rect">
@@ -9060,7 +11171,7 @@
         </p:nvSpPr>
         <p:spPr>
           <a:xfrm>
-            <a:off x="1929384" y="3511296"/>
+            <a:off x="1993392" y="3511296"/>
             <a:ext cx="3840480" cy="329184"/>
           </a:xfrm>
           <a:prstGeom prst="rect">
@@ -9099,7 +11210,7 @@
         </p:nvSpPr>
         <p:spPr>
           <a:xfrm>
-            <a:off x="502920" y="3931920"/>
+            <a:off x="566928" y="3931920"/>
             <a:ext cx="1280160" cy="292608"/>
           </a:xfrm>
           <a:prstGeom prst="roundRect">
@@ -9121,7 +11232,7 @@
         </p:nvSpPr>
         <p:spPr>
           <a:xfrm>
-            <a:off x="502920" y="3931920"/>
+            <a:off x="566928" y="3931920"/>
             <a:ext cx="1280160" cy="292608"/>
           </a:xfrm>
           <a:prstGeom prst="rect">
@@ -9160,7 +11271,7 @@
         </p:nvSpPr>
         <p:spPr>
           <a:xfrm>
-            <a:off x="1929384" y="3913632"/>
+            <a:off x="1993392" y="3913632"/>
             <a:ext cx="3840480" cy="329184"/>
           </a:xfrm>
           <a:prstGeom prst="rect">
@@ -9199,7 +11310,7 @@
         </p:nvSpPr>
         <p:spPr>
           <a:xfrm>
-            <a:off x="502920" y="4334256"/>
+            <a:off x="566928" y="4334256"/>
             <a:ext cx="1280160" cy="292608"/>
           </a:xfrm>
           <a:prstGeom prst="roundRect">
@@ -9221,7 +11332,7 @@
         </p:nvSpPr>
         <p:spPr>
           <a:xfrm>
-            <a:off x="502920" y="4334256"/>
+            <a:off x="566928" y="4334256"/>
             <a:ext cx="1280160" cy="292608"/>
           </a:xfrm>
           <a:prstGeom prst="rect">
@@ -9260,7 +11371,7 @@
         </p:nvSpPr>
         <p:spPr>
           <a:xfrm>
-            <a:off x="1929384" y="4315968"/>
+            <a:off x="1993392" y="4315968"/>
             <a:ext cx="3840480" cy="329184"/>
           </a:xfrm>
           <a:prstGeom prst="rect">
@@ -9585,7 +11696,7 @@
         </p:nvSpPr>
         <p:spPr>
           <a:xfrm>
-            <a:off x="502920" y="5760720"/>
+            <a:off x="566928" y="5760720"/>
             <a:ext cx="11057839" cy="457200"/>
           </a:xfrm>
           <a:prstGeom prst="rect">
@@ -9605,7 +11716,7 @@
         </p:nvSpPr>
         <p:spPr>
           <a:xfrm>
-            <a:off x="685800" y="5806440"/>
+            <a:off x="749808" y="5806440"/>
             <a:ext cx="10692079" cy="365760"/>
           </a:xfrm>
           <a:prstGeom prst="rect">
@@ -9644,7 +11755,7 @@
         </p:nvSpPr>
         <p:spPr>
           <a:xfrm>
-            <a:off x="502920" y="6382512"/>
+            <a:off x="566928" y="6382512"/>
             <a:ext cx="7315200" cy="219456"/>
           </a:xfrm>
           <a:prstGeom prst="rect">
@@ -9683,7 +11794,7 @@
         </p:nvSpPr>
         <p:spPr>
           <a:xfrm>
-            <a:off x="10774375" y="6382512"/>
+            <a:off x="10710367" y="6382512"/>
             <a:ext cx="914400" cy="219456"/>
           </a:xfrm>
           <a:prstGeom prst="rect">
@@ -9708,7 +11819,7 @@
                 <a:ea typeface="Arial" pitchFamily="34" charset="-122"/>
                 <a:cs typeface="Arial" pitchFamily="34" charset="-120"/>
               </a:rPr>
-              <a:t>7</a:t>
+              <a:t>9</a:t>
             </a:r>
             <a:endParaRPr lang="en-US" sz="900" dirty="0"/>
           </a:p>

--- a/docs/test/golden-outputs/p2-sinsa-r3/sinsa_trading_r3_basic.pptx
+++ b/docs/test/golden-outputs/p2-sinsa-r3/sinsa_trading_r3_basic.pptx
@@ -1840,10 +1840,15 @@
           <a:ln/>
         </p:spPr>
         <p:txBody>
-          <a:bodyPr wrap="square" lIns="0" tIns="0" rIns="0" bIns="0" rtlCol="0" anchor="ctr"/>
+          <a:bodyPr wrap="square" lIns="0" tIns="0" rIns="0" bIns="0" rtlCol="0" anchor="ctr">
+            <a:normAutofit/>
+          </a:bodyPr>
           <a:lstStyle/>
           <a:p>
             <a:pPr algn="l" indent="0" marL="0">
+              <a:lnSpc>
+                <a:spcPct val="100000"/>
+              </a:lnSpc>
               <a:buNone/>
             </a:pPr>
             <a:r>
@@ -1918,7 +1923,9 @@
           <a:ln/>
         </p:spPr>
         <p:txBody>
-          <a:bodyPr wrap="square" lIns="0" tIns="0" rIns="0" bIns="0" rtlCol="0" anchor="ctr"/>
+          <a:bodyPr wrap="square" lIns="0" tIns="0" rIns="0" bIns="0" rtlCol="0" anchor="ctr">
+            <a:normAutofit/>
+          </a:bodyPr>
           <a:lstStyle/>
           <a:p>
             <a:pPr algn="l" indent="0" marL="0">
@@ -2199,7 +2206,7 @@
                 <a:ea typeface="맑은 고딕" pitchFamily="34" charset="-122"/>
                 <a:cs typeface="맑은 고딕" pitchFamily="34" charset="-120"/>
               </a:rPr>
-              <a:t>2026.10.02  |  담당자  |  CREDEAL</a:t>
+              <a:t>2026.10.05  |  담당자  |  CREDEAL</a:t>
             </a:r>
             <a:endParaRPr lang="en-US" sz="900" dirty="0"/>
           </a:p>
@@ -2382,46 +2389,7 @@
         </p:nvSpPr>
         <p:spPr>
           <a:xfrm>
-            <a:off x="1133856" y="457200"/>
-            <a:ext cx="10490911" cy="182880"/>
-          </a:xfrm>
-          <a:prstGeom prst="rect">
-            <a:avLst/>
-          </a:prstGeom>
-          <a:noFill/>
-          <a:ln/>
-        </p:spPr>
-        <p:txBody>
-          <a:bodyPr wrap="square" lIns="0" tIns="0" rIns="0" bIns="0" rtlCol="0" anchor="ctr"/>
-          <a:lstStyle/>
-          <a:p>
-            <a:pPr indent="0" marL="0">
-              <a:buNone/>
-            </a:pPr>
-            <a:r>
-              <a:rPr lang="en-US" sz="950" b="1" spc="200" kern="0" dirty="0">
-                <a:solidFill>
-                  <a:srgbClr val="B8860B"/>
-                </a:solidFill>
-                <a:latin typeface="Arial" pitchFamily="34" charset="0"/>
-                <a:ea typeface="Arial" pitchFamily="34" charset="-122"/>
-                <a:cs typeface="Arial" pitchFamily="34" charset="-120"/>
-              </a:rPr>
-              <a:t>요약</a:t>
-            </a:r>
-            <a:endParaRPr lang="en-US" sz="950" dirty="0"/>
-          </a:p>
-        </p:txBody>
-      </p:sp>
-      <p:sp>
-        <p:nvSpPr>
-          <p:cNvPr id="5" name="Text 3"/>
-          <p:cNvSpPr/>
-          <p:nvPr/>
-        </p:nvSpPr>
-        <p:spPr>
-          <a:xfrm>
-            <a:off x="1133856" y="640080"/>
+            <a:off x="1133856" y="466344"/>
             <a:ext cx="10490911" cy="365760"/>
           </a:xfrm>
           <a:prstGeom prst="rect">
@@ -2456,13 +2424,77 @@
       </p:sp>
       <p:sp>
         <p:nvSpPr>
+          <p:cNvPr id="5" name="Text 3"/>
+          <p:cNvSpPr/>
+          <p:nvPr/>
+        </p:nvSpPr>
+        <p:spPr>
+          <a:xfrm>
+            <a:off x="566928" y="1188720"/>
+            <a:ext cx="11057839" cy="219075"/>
+          </a:xfrm>
+          <a:prstGeom prst="rect">
+            <a:avLst/>
+          </a:prstGeom>
+          <a:noFill/>
+          <a:ln/>
+        </p:spPr>
+        <p:txBody>
+          <a:bodyPr wrap="square" lIns="0" tIns="0" rIns="0" bIns="0" rtlCol="0" anchor="ctr">
+            <a:normAutofit/>
+          </a:bodyPr>
+          <a:lstStyle/>
+          <a:p>
+            <a:pPr indent="0" marL="0">
+              <a:buNone/>
+            </a:pPr>
+            <a:r>
+              <a:rPr lang="en-US" sz="1500" b="1" dirty="0">
+                <a:solidFill>
+                  <a:srgbClr val="132A3A"/>
+                </a:solidFill>
+                <a:latin typeface="맑은 고딕" pitchFamily="34" charset="0"/>
+                <a:ea typeface="맑은 고딕" pitchFamily="34" charset="-122"/>
+                <a:cs typeface="맑은 고딕" pitchFamily="34" charset="-120"/>
+              </a:rPr>
+              <a:t>GBD 제3종일반주거지역에 위치한 1998년 준공, 지하 2층·지상 6층 규모의 임대수익형 근린생활시설입니다.</a:t>
+            </a:r>
+            <a:endParaRPr lang="en-US" sz="1500" dirty="0"/>
+          </a:p>
+        </p:txBody>
+      </p:sp>
+      <p:sp>
+        <p:nvSpPr>
           <p:cNvPr id="6" name="Shape 4"/>
           <p:cNvSpPr/>
           <p:nvPr/>
         </p:nvSpPr>
         <p:spPr>
           <a:xfrm>
-            <a:off x="566928" y="1371600"/>
+            <a:off x="566928" y="1480947"/>
+            <a:ext cx="11057839" cy="0"/>
+          </a:xfrm>
+          <a:prstGeom prst="line">
+            <a:avLst/>
+          </a:prstGeom>
+          <a:noFill/>
+          <a:ln w="19050">
+            <a:solidFill>
+              <a:srgbClr val="B8860B"/>
+            </a:solidFill>
+            <a:prstDash val="solid"/>
+          </a:ln>
+        </p:spPr>
+      </p:sp>
+      <p:sp>
+        <p:nvSpPr>
+          <p:cNvPr id="7" name="Shape 5"/>
+          <p:cNvSpPr/>
+          <p:nvPr/>
+        </p:nvSpPr>
+        <p:spPr>
+          <a:xfrm>
+            <a:off x="566928" y="1618107"/>
             <a:ext cx="3576218" cy="960120"/>
           </a:xfrm>
           <a:prstGeom prst="roundRect">
@@ -2483,13 +2515,13 @@
       </p:sp>
       <p:sp>
         <p:nvSpPr>
-          <p:cNvPr id="7" name="Text 5"/>
-          <p:cNvSpPr/>
-          <p:nvPr/>
-        </p:nvSpPr>
-        <p:spPr>
-          <a:xfrm>
-            <a:off x="731520" y="1499616"/>
+          <p:cNvPr id="8" name="Text 6"/>
+          <p:cNvSpPr/>
+          <p:nvPr/>
+        </p:nvSpPr>
+        <p:spPr>
+          <a:xfrm>
+            <a:off x="731520" y="1746123"/>
             <a:ext cx="3247034" cy="201168"/>
           </a:xfrm>
           <a:prstGeom prst="rect">
@@ -2524,13 +2556,13 @@
       </p:sp>
       <p:sp>
         <p:nvSpPr>
-          <p:cNvPr id="8" name="Text 6"/>
-          <p:cNvSpPr/>
-          <p:nvPr/>
-        </p:nvSpPr>
-        <p:spPr>
-          <a:xfrm>
-            <a:off x="731520" y="1719072"/>
+          <p:cNvPr id="9" name="Text 7"/>
+          <p:cNvSpPr/>
+          <p:nvPr/>
+        </p:nvSpPr>
+        <p:spPr>
+          <a:xfrm>
+            <a:off x="731520" y="1965579"/>
             <a:ext cx="3247034" cy="279400"/>
           </a:xfrm>
           <a:prstGeom prst="rect">
@@ -2568,13 +2600,13 @@
       </p:sp>
       <p:sp>
         <p:nvSpPr>
-          <p:cNvPr id="9" name="Shape 7"/>
-          <p:cNvSpPr/>
-          <p:nvPr/>
-        </p:nvSpPr>
-        <p:spPr>
-          <a:xfrm>
-            <a:off x="4307738" y="1371600"/>
+          <p:cNvPr id="10" name="Shape 8"/>
+          <p:cNvSpPr/>
+          <p:nvPr/>
+        </p:nvSpPr>
+        <p:spPr>
+          <a:xfrm>
+            <a:off x="4307738" y="1618107"/>
             <a:ext cx="3576218" cy="960120"/>
           </a:xfrm>
           <a:prstGeom prst="roundRect">
@@ -2595,13 +2627,13 @@
       </p:sp>
       <p:sp>
         <p:nvSpPr>
-          <p:cNvPr id="10" name="Text 8"/>
-          <p:cNvSpPr/>
-          <p:nvPr/>
-        </p:nvSpPr>
-        <p:spPr>
-          <a:xfrm>
-            <a:off x="4472330" y="1499616"/>
+          <p:cNvPr id="11" name="Text 9"/>
+          <p:cNvSpPr/>
+          <p:nvPr/>
+        </p:nvSpPr>
+        <p:spPr>
+          <a:xfrm>
+            <a:off x="4472330" y="1746123"/>
             <a:ext cx="3247034" cy="201168"/>
           </a:xfrm>
           <a:prstGeom prst="rect">
@@ -2636,13 +2668,13 @@
       </p:sp>
       <p:sp>
         <p:nvSpPr>
-          <p:cNvPr id="11" name="Text 9"/>
-          <p:cNvSpPr/>
-          <p:nvPr/>
-        </p:nvSpPr>
-        <p:spPr>
-          <a:xfrm>
-            <a:off x="4472330" y="1719072"/>
+          <p:cNvPr id="12" name="Text 10"/>
+          <p:cNvSpPr/>
+          <p:nvPr/>
+        </p:nvSpPr>
+        <p:spPr>
+          <a:xfrm>
+            <a:off x="4472330" y="1965579"/>
             <a:ext cx="3247034" cy="279400"/>
           </a:xfrm>
           <a:prstGeom prst="rect">
@@ -2680,13 +2712,13 @@
       </p:sp>
       <p:sp>
         <p:nvSpPr>
-          <p:cNvPr id="12" name="Shape 10"/>
-          <p:cNvSpPr/>
-          <p:nvPr/>
-        </p:nvSpPr>
-        <p:spPr>
-          <a:xfrm>
-            <a:off x="8048549" y="1371600"/>
+          <p:cNvPr id="13" name="Shape 11"/>
+          <p:cNvSpPr/>
+          <p:nvPr/>
+        </p:nvSpPr>
+        <p:spPr>
+          <a:xfrm>
+            <a:off x="8048549" y="1618107"/>
             <a:ext cx="3576218" cy="960120"/>
           </a:xfrm>
           <a:prstGeom prst="roundRect">
@@ -2707,13 +2739,13 @@
       </p:sp>
       <p:sp>
         <p:nvSpPr>
-          <p:cNvPr id="13" name="Text 11"/>
-          <p:cNvSpPr/>
-          <p:nvPr/>
-        </p:nvSpPr>
-        <p:spPr>
-          <a:xfrm>
-            <a:off x="8213141" y="1499616"/>
+          <p:cNvPr id="14" name="Text 12"/>
+          <p:cNvSpPr/>
+          <p:nvPr/>
+        </p:nvSpPr>
+        <p:spPr>
+          <a:xfrm>
+            <a:off x="8213141" y="1746123"/>
             <a:ext cx="3247034" cy="201168"/>
           </a:xfrm>
           <a:prstGeom prst="rect">
@@ -2748,13 +2780,13 @@
       </p:sp>
       <p:sp>
         <p:nvSpPr>
-          <p:cNvPr id="14" name="Text 12"/>
-          <p:cNvSpPr/>
-          <p:nvPr/>
-        </p:nvSpPr>
-        <p:spPr>
-          <a:xfrm>
-            <a:off x="8213141" y="1719072"/>
+          <p:cNvPr id="15" name="Text 13"/>
+          <p:cNvSpPr/>
+          <p:nvPr/>
+        </p:nvSpPr>
+        <p:spPr>
+          <a:xfrm>
+            <a:off x="8213141" y="1965579"/>
             <a:ext cx="3247034" cy="279400"/>
           </a:xfrm>
           <a:prstGeom prst="rect">
@@ -2792,13 +2824,13 @@
       </p:sp>
       <p:sp>
         <p:nvSpPr>
-          <p:cNvPr id="15" name="Shape 13"/>
-          <p:cNvSpPr/>
-          <p:nvPr/>
-        </p:nvSpPr>
-        <p:spPr>
-          <a:xfrm>
-            <a:off x="566928" y="2496312"/>
+          <p:cNvPr id="16" name="Shape 14"/>
+          <p:cNvSpPr/>
+          <p:nvPr/>
+        </p:nvSpPr>
+        <p:spPr>
+          <a:xfrm>
+            <a:off x="566928" y="2742819"/>
             <a:ext cx="3576218" cy="960120"/>
           </a:xfrm>
           <a:prstGeom prst="roundRect">
@@ -2819,13 +2851,13 @@
       </p:sp>
       <p:sp>
         <p:nvSpPr>
-          <p:cNvPr id="16" name="Text 14"/>
-          <p:cNvSpPr/>
-          <p:nvPr/>
-        </p:nvSpPr>
-        <p:spPr>
-          <a:xfrm>
-            <a:off x="731520" y="2624328"/>
+          <p:cNvPr id="17" name="Text 15"/>
+          <p:cNvSpPr/>
+          <p:nvPr/>
+        </p:nvSpPr>
+        <p:spPr>
+          <a:xfrm>
+            <a:off x="731520" y="2870835"/>
             <a:ext cx="3247034" cy="201168"/>
           </a:xfrm>
           <a:prstGeom prst="rect">
@@ -2860,13 +2892,13 @@
       </p:sp>
       <p:sp>
         <p:nvSpPr>
-          <p:cNvPr id="17" name="Text 15"/>
-          <p:cNvSpPr/>
-          <p:nvPr/>
-        </p:nvSpPr>
-        <p:spPr>
-          <a:xfrm>
-            <a:off x="731520" y="2843784"/>
+          <p:cNvPr id="18" name="Text 16"/>
+          <p:cNvSpPr/>
+          <p:nvPr/>
+        </p:nvSpPr>
+        <p:spPr>
+          <a:xfrm>
+            <a:off x="731520" y="3090291"/>
             <a:ext cx="3247034" cy="279400"/>
           </a:xfrm>
           <a:prstGeom prst="rect">
@@ -2904,13 +2936,13 @@
       </p:sp>
       <p:sp>
         <p:nvSpPr>
-          <p:cNvPr id="18" name="Shape 16"/>
-          <p:cNvSpPr/>
-          <p:nvPr/>
-        </p:nvSpPr>
-        <p:spPr>
-          <a:xfrm>
-            <a:off x="4307738" y="2496312"/>
+          <p:cNvPr id="19" name="Shape 17"/>
+          <p:cNvSpPr/>
+          <p:nvPr/>
+        </p:nvSpPr>
+        <p:spPr>
+          <a:xfrm>
+            <a:off x="4307738" y="2742819"/>
             <a:ext cx="3576218" cy="960120"/>
           </a:xfrm>
           <a:prstGeom prst="roundRect">
@@ -2931,13 +2963,13 @@
       </p:sp>
       <p:sp>
         <p:nvSpPr>
-          <p:cNvPr id="19" name="Text 17"/>
-          <p:cNvSpPr/>
-          <p:nvPr/>
-        </p:nvSpPr>
-        <p:spPr>
-          <a:xfrm>
-            <a:off x="4472330" y="2624328"/>
+          <p:cNvPr id="20" name="Text 18"/>
+          <p:cNvSpPr/>
+          <p:nvPr/>
+        </p:nvSpPr>
+        <p:spPr>
+          <a:xfrm>
+            <a:off x="4472330" y="2870835"/>
             <a:ext cx="3247034" cy="201168"/>
           </a:xfrm>
           <a:prstGeom prst="rect">
@@ -2972,13 +3004,13 @@
       </p:sp>
       <p:sp>
         <p:nvSpPr>
-          <p:cNvPr id="20" name="Text 18"/>
-          <p:cNvSpPr/>
-          <p:nvPr/>
-        </p:nvSpPr>
-        <p:spPr>
-          <a:xfrm>
-            <a:off x="4472330" y="2843784"/>
+          <p:cNvPr id="21" name="Text 19"/>
+          <p:cNvSpPr/>
+          <p:nvPr/>
+        </p:nvSpPr>
+        <p:spPr>
+          <a:xfrm>
+            <a:off x="4472330" y="3090291"/>
             <a:ext cx="3247034" cy="279400"/>
           </a:xfrm>
           <a:prstGeom prst="rect">
@@ -3016,13 +3048,13 @@
       </p:sp>
       <p:sp>
         <p:nvSpPr>
-          <p:cNvPr id="21" name="Shape 19"/>
-          <p:cNvSpPr/>
-          <p:nvPr/>
-        </p:nvSpPr>
-        <p:spPr>
-          <a:xfrm>
-            <a:off x="8048549" y="2496312"/>
+          <p:cNvPr id="22" name="Shape 20"/>
+          <p:cNvSpPr/>
+          <p:nvPr/>
+        </p:nvSpPr>
+        <p:spPr>
+          <a:xfrm>
+            <a:off x="8048549" y="2742819"/>
             <a:ext cx="3576218" cy="960120"/>
           </a:xfrm>
           <a:prstGeom prst="roundRect">
@@ -3043,13 +3075,13 @@
       </p:sp>
       <p:sp>
         <p:nvSpPr>
-          <p:cNvPr id="22" name="Text 20"/>
-          <p:cNvSpPr/>
-          <p:nvPr/>
-        </p:nvSpPr>
-        <p:spPr>
-          <a:xfrm>
-            <a:off x="8213141" y="2624328"/>
+          <p:cNvPr id="23" name="Text 21"/>
+          <p:cNvSpPr/>
+          <p:nvPr/>
+        </p:nvSpPr>
+        <p:spPr>
+          <a:xfrm>
+            <a:off x="8213141" y="2870835"/>
             <a:ext cx="3247034" cy="201168"/>
           </a:xfrm>
           <a:prstGeom prst="rect">
@@ -3068,7 +3100,7 @@
               <a:buNone/>
             </a:pPr>
             <a:r>
-              <a:rPr lang="en-US" sz="950" dirty="0">
+              <a:rPr lang="en-US" sz="850" dirty="0">
                 <a:solidFill>
                   <a:srgbClr val="5B6B73"/>
                 </a:solidFill>
@@ -3076,21 +3108,21 @@
                 <a:ea typeface="맑은 고딕" pitchFamily="34" charset="-122"/>
                 <a:cs typeface="맑은 고딕" pitchFamily="34" charset="-120"/>
               </a:rPr>
-              <a:t>실투자금</a:t>
-            </a:r>
-            <a:endParaRPr lang="en-US" sz="950" dirty="0"/>
-          </a:p>
-        </p:txBody>
-      </p:sp>
-      <p:sp>
-        <p:nvSpPr>
-          <p:cNvPr id="23" name="Text 21"/>
-          <p:cNvSpPr/>
-          <p:nvPr/>
-        </p:nvSpPr>
-        <p:spPr>
-          <a:xfrm>
-            <a:off x="8213141" y="2843784"/>
+              <a:t>실투자금 (취득비용 포함)</a:t>
+            </a:r>
+            <a:endParaRPr lang="en-US" sz="850" dirty="0"/>
+          </a:p>
+        </p:txBody>
+      </p:sp>
+      <p:sp>
+        <p:nvSpPr>
+          <p:cNvPr id="24" name="Text 22"/>
+          <p:cNvSpPr/>
+          <p:nvPr/>
+        </p:nvSpPr>
+        <p:spPr>
+          <a:xfrm>
+            <a:off x="8213141" y="3090291"/>
             <a:ext cx="3247034" cy="279400"/>
           </a:xfrm>
           <a:prstGeom prst="rect">
@@ -3128,13 +3160,13 @@
       </p:sp>
       <p:sp>
         <p:nvSpPr>
-          <p:cNvPr id="24" name="Text 22"/>
-          <p:cNvSpPr/>
-          <p:nvPr/>
-        </p:nvSpPr>
-        <p:spPr>
-          <a:xfrm>
-            <a:off x="566928" y="3712464"/>
+          <p:cNvPr id="25" name="Text 23"/>
+          <p:cNvSpPr/>
+          <p:nvPr/>
+        </p:nvSpPr>
+        <p:spPr>
+          <a:xfrm>
+            <a:off x="566928" y="3958971"/>
             <a:ext cx="11057839" cy="274320"/>
           </a:xfrm>
           <a:prstGeom prst="rect">
@@ -3167,18 +3199,18 @@
       </p:sp>
       <p:sp>
         <p:nvSpPr>
-          <p:cNvPr id="25" name="Shape 23"/>
-          <p:cNvSpPr/>
-          <p:nvPr/>
-        </p:nvSpPr>
-        <p:spPr>
-          <a:xfrm>
-            <a:off x="566928" y="4041648"/>
-            <a:ext cx="11057839" cy="585216"/>
+          <p:cNvPr id="26" name="Shape 24"/>
+          <p:cNvSpPr/>
+          <p:nvPr/>
+        </p:nvSpPr>
+        <p:spPr>
+          <a:xfrm>
+            <a:off x="566928" y="4288155"/>
+            <a:ext cx="11057839" cy="512191"/>
           </a:xfrm>
           <a:prstGeom prst="roundRect">
             <a:avLst>
-              <a:gd name="adj" fmla="val 7813"/>
+              <a:gd name="adj" fmla="val 8926"/>
             </a:avLst>
           </a:prstGeom>
           <a:solidFill>
@@ -3194,13 +3226,13 @@
       </p:sp>
       <p:sp>
         <p:nvSpPr>
-          <p:cNvPr id="26" name="Shape 24"/>
-          <p:cNvSpPr/>
-          <p:nvPr/>
-        </p:nvSpPr>
-        <p:spPr>
-          <a:xfrm>
-            <a:off x="676656" y="4151376"/>
+          <p:cNvPr id="27" name="Shape 25"/>
+          <p:cNvSpPr/>
+          <p:nvPr/>
+        </p:nvSpPr>
+        <p:spPr>
+          <a:xfrm>
+            <a:off x="676656" y="4361371"/>
             <a:ext cx="411480" cy="365760"/>
           </a:xfrm>
           <a:prstGeom prst="roundRect">
@@ -3221,13 +3253,13 @@
       </p:sp>
       <p:sp>
         <p:nvSpPr>
-          <p:cNvPr id="27" name="Text 25"/>
-          <p:cNvSpPr/>
-          <p:nvPr/>
-        </p:nvSpPr>
-        <p:spPr>
-          <a:xfrm>
-            <a:off x="676656" y="4151376"/>
+          <p:cNvPr id="28" name="Text 26"/>
+          <p:cNvSpPr/>
+          <p:nvPr/>
+        </p:nvSpPr>
+        <p:spPr>
+          <a:xfrm>
+            <a:off x="676656" y="4361371"/>
             <a:ext cx="411480" cy="365760"/>
           </a:xfrm>
           <a:prstGeom prst="rect">
@@ -3260,23 +3292,25 @@
       </p:sp>
       <p:sp>
         <p:nvSpPr>
-          <p:cNvPr id="28" name="Text 26"/>
-          <p:cNvSpPr/>
-          <p:nvPr/>
-        </p:nvSpPr>
-        <p:spPr>
-          <a:xfrm>
-            <a:off x="1207008" y="4078224"/>
-            <a:ext cx="10280599" cy="512064"/>
-          </a:xfrm>
-          <a:prstGeom prst="rect">
-            <a:avLst/>
-          </a:prstGeom>
-          <a:noFill/>
-          <a:ln/>
-        </p:spPr>
-        <p:txBody>
-          <a:bodyPr wrap="square" lIns="0" tIns="0" rIns="0" bIns="0" rtlCol="0" anchor="ctr"/>
+          <p:cNvPr id="29" name="Text 27"/>
+          <p:cNvSpPr/>
+          <p:nvPr/>
+        </p:nvSpPr>
+        <p:spPr>
+          <a:xfrm>
+            <a:off x="1207008" y="4324731"/>
+            <a:ext cx="10280599" cy="439039"/>
+          </a:xfrm>
+          <a:prstGeom prst="rect">
+            <a:avLst/>
+          </a:prstGeom>
+          <a:noFill/>
+          <a:ln/>
+        </p:spPr>
+        <p:txBody>
+          <a:bodyPr wrap="square" lIns="0" tIns="0" rIns="0" bIns="0" rtlCol="0" anchor="ctr">
+            <a:normAutofit/>
+          </a:bodyPr>
           <a:lstStyle/>
           <a:p>
             <a:pPr indent="0" marL="0">
@@ -3291,7 +3325,7 @@
                 <a:ea typeface="맑은 고딕" pitchFamily="34" charset="-122"/>
                 <a:cs typeface="맑은 고딕" pitchFamily="34" charset="-120"/>
               </a:rPr>
-              <a:t>입지 가치: 압구정역 도보 7분 역세권, 해당 권역 업무·상업 중심지 배후 수요 확보</a:t>
+              <a:t>역세권 입지 — 압구정역(3호선) 도보 7분(약 525m) 거리에 위치합니다.</a:t>
             </a:r>
             <a:endParaRPr lang="en-US" sz="1150" dirty="0"/>
           </a:p>
@@ -3299,18 +3333,18 @@
       </p:sp>
       <p:sp>
         <p:nvSpPr>
-          <p:cNvPr id="29" name="Shape 27"/>
-          <p:cNvSpPr/>
-          <p:nvPr/>
-        </p:nvSpPr>
-        <p:spPr>
-          <a:xfrm>
-            <a:off x="566928" y="4722876"/>
-            <a:ext cx="11057839" cy="585216"/>
+          <p:cNvPr id="30" name="Shape 28"/>
+          <p:cNvSpPr/>
+          <p:nvPr/>
+        </p:nvSpPr>
+        <p:spPr>
+          <a:xfrm>
+            <a:off x="566928" y="4882642"/>
+            <a:ext cx="11057839" cy="512191"/>
           </a:xfrm>
           <a:prstGeom prst="roundRect">
             <a:avLst>
-              <a:gd name="adj" fmla="val 7813"/>
+              <a:gd name="adj" fmla="val 8926"/>
             </a:avLst>
           </a:prstGeom>
           <a:solidFill>
@@ -3326,13 +3360,13 @@
       </p:sp>
       <p:sp>
         <p:nvSpPr>
-          <p:cNvPr id="30" name="Shape 28"/>
-          <p:cNvSpPr/>
-          <p:nvPr/>
-        </p:nvSpPr>
-        <p:spPr>
-          <a:xfrm>
-            <a:off x="676656" y="4832604"/>
+          <p:cNvPr id="31" name="Shape 29"/>
+          <p:cNvSpPr/>
+          <p:nvPr/>
+        </p:nvSpPr>
+        <p:spPr>
+          <a:xfrm>
+            <a:off x="676656" y="4955858"/>
             <a:ext cx="411480" cy="365760"/>
           </a:xfrm>
           <a:prstGeom prst="roundRect">
@@ -3353,13 +3387,13 @@
       </p:sp>
       <p:sp>
         <p:nvSpPr>
-          <p:cNvPr id="31" name="Text 29"/>
-          <p:cNvSpPr/>
-          <p:nvPr/>
-        </p:nvSpPr>
-        <p:spPr>
-          <a:xfrm>
-            <a:off x="676656" y="4832604"/>
+          <p:cNvPr id="32" name="Text 30"/>
+          <p:cNvSpPr/>
+          <p:nvPr/>
+        </p:nvSpPr>
+        <p:spPr>
+          <a:xfrm>
+            <a:off x="676656" y="4955858"/>
             <a:ext cx="411480" cy="365760"/>
           </a:xfrm>
           <a:prstGeom prst="rect">
@@ -3392,23 +3426,25 @@
       </p:sp>
       <p:sp>
         <p:nvSpPr>
-          <p:cNvPr id="32" name="Text 30"/>
-          <p:cNvSpPr/>
-          <p:nvPr/>
-        </p:nvSpPr>
-        <p:spPr>
-          <a:xfrm>
-            <a:off x="1207008" y="4759452"/>
-            <a:ext cx="10280599" cy="512064"/>
-          </a:xfrm>
-          <a:prstGeom prst="rect">
-            <a:avLst/>
-          </a:prstGeom>
-          <a:noFill/>
-          <a:ln/>
-        </p:spPr>
-        <p:txBody>
-          <a:bodyPr wrap="square" lIns="0" tIns="0" rIns="0" bIns="0" rtlCol="0" anchor="ctr"/>
+          <p:cNvPr id="33" name="Text 31"/>
+          <p:cNvSpPr/>
+          <p:nvPr/>
+        </p:nvSpPr>
+        <p:spPr>
+          <a:xfrm>
+            <a:off x="1207008" y="4919218"/>
+            <a:ext cx="10280599" cy="439039"/>
+          </a:xfrm>
+          <a:prstGeom prst="rect">
+            <a:avLst/>
+          </a:prstGeom>
+          <a:noFill/>
+          <a:ln/>
+        </p:spPr>
+        <p:txBody>
+          <a:bodyPr wrap="square" lIns="0" tIns="0" rIns="0" bIns="0" rtlCol="0" anchor="ctr">
+            <a:normAutofit/>
+          </a:bodyPr>
           <a:lstStyle/>
           <a:p>
             <a:pPr indent="0" marL="0">
@@ -3423,7 +3459,7 @@
                 <a:ea typeface="맑은 고딕" pitchFamily="34" charset="-122"/>
                 <a:cs typeface="맑은 고딕" pitchFamily="34" charset="-120"/>
               </a:rPr>
-              <a:t>자산 규모: 대지 321평·연면적 1011평·평당 약 7,518만 원 규모 단독 빌딩</a:t>
+              <a:t>토지 — 제3종일반주거지역 대지 1,061.9㎡ 규모입니다.</a:t>
             </a:r>
             <a:endParaRPr lang="en-US" sz="1150" dirty="0"/>
           </a:p>
@@ -3431,18 +3467,18 @@
       </p:sp>
       <p:sp>
         <p:nvSpPr>
-          <p:cNvPr id="33" name="Shape 31"/>
-          <p:cNvSpPr/>
-          <p:nvPr/>
-        </p:nvSpPr>
-        <p:spPr>
-          <a:xfrm>
-            <a:off x="566928" y="5404104"/>
-            <a:ext cx="11057839" cy="585216"/>
+          <p:cNvPr id="34" name="Shape 32"/>
+          <p:cNvSpPr/>
+          <p:nvPr/>
+        </p:nvSpPr>
+        <p:spPr>
+          <a:xfrm>
+            <a:off x="566928" y="5477129"/>
+            <a:ext cx="11057839" cy="512191"/>
           </a:xfrm>
           <a:prstGeom prst="roundRect">
             <a:avLst>
-              <a:gd name="adj" fmla="val 7813"/>
+              <a:gd name="adj" fmla="val 8926"/>
             </a:avLst>
           </a:prstGeom>
           <a:solidFill>
@@ -3458,13 +3494,13 @@
       </p:sp>
       <p:sp>
         <p:nvSpPr>
-          <p:cNvPr id="34" name="Shape 32"/>
-          <p:cNvSpPr/>
-          <p:nvPr/>
-        </p:nvSpPr>
-        <p:spPr>
-          <a:xfrm>
-            <a:off x="676656" y="5513832"/>
+          <p:cNvPr id="35" name="Shape 33"/>
+          <p:cNvSpPr/>
+          <p:nvPr/>
+        </p:nvSpPr>
+        <p:spPr>
+          <a:xfrm>
+            <a:off x="676656" y="5550345"/>
             <a:ext cx="411480" cy="365760"/>
           </a:xfrm>
           <a:prstGeom prst="roundRect">
@@ -3485,13 +3521,13 @@
       </p:sp>
       <p:sp>
         <p:nvSpPr>
-          <p:cNvPr id="35" name="Text 33"/>
-          <p:cNvSpPr/>
-          <p:nvPr/>
-        </p:nvSpPr>
-        <p:spPr>
-          <a:xfrm>
-            <a:off x="676656" y="5513832"/>
+          <p:cNvPr id="36" name="Text 34"/>
+          <p:cNvSpPr/>
+          <p:nvPr/>
+        </p:nvSpPr>
+        <p:spPr>
+          <a:xfrm>
+            <a:off x="676656" y="5550345"/>
             <a:ext cx="411480" cy="365760"/>
           </a:xfrm>
           <a:prstGeom prst="rect">
@@ -3524,23 +3560,25 @@
       </p:sp>
       <p:sp>
         <p:nvSpPr>
-          <p:cNvPr id="36" name="Text 34"/>
-          <p:cNvSpPr/>
-          <p:nvPr/>
-        </p:nvSpPr>
-        <p:spPr>
-          <a:xfrm>
-            <a:off x="1207008" y="5440680"/>
-            <a:ext cx="10280599" cy="512064"/>
-          </a:xfrm>
-          <a:prstGeom prst="rect">
-            <a:avLst/>
-          </a:prstGeom>
-          <a:noFill/>
-          <a:ln/>
-        </p:spPr>
-        <p:txBody>
-          <a:bodyPr wrap="square" lIns="0" tIns="0" rIns="0" bIns="0" rtlCol="0" anchor="ctr"/>
+          <p:cNvPr id="37" name="Text 35"/>
+          <p:cNvSpPr/>
+          <p:nvPr/>
+        </p:nvSpPr>
+        <p:spPr>
+          <a:xfrm>
+            <a:off x="1207008" y="5513705"/>
+            <a:ext cx="10280599" cy="439039"/>
+          </a:xfrm>
+          <a:prstGeom prst="rect">
+            <a:avLst/>
+          </a:prstGeom>
+          <a:noFill/>
+          <a:ln/>
+        </p:spPr>
+        <p:txBody>
+          <a:bodyPr wrap="square" lIns="0" tIns="0" rIns="0" bIns="0" rtlCol="0" anchor="ctr">
+            <a:normAutofit/>
+          </a:bodyPr>
           <a:lstStyle/>
           <a:p>
             <a:pPr indent="0" marL="0">
@@ -3555,7 +3593,7 @@
                 <a:ea typeface="맑은 고딕" pitchFamily="34" charset="-122"/>
                 <a:cs typeface="맑은 고딕" pitchFamily="34" charset="-120"/>
               </a:rPr>
-              <a:t>수익 안정성: 안정적 임대수익 기반 투자 매물</a:t>
+              <a:t>입지 가치: 압구정역 도보 7분 역세권, 해당 권역 업무·상업 중심지 배후 수요 확보</a:t>
             </a:r>
             <a:endParaRPr lang="en-US" sz="1150" dirty="0"/>
           </a:p>
@@ -3563,7 +3601,7 @@
       </p:sp>
       <p:sp>
         <p:nvSpPr>
-          <p:cNvPr id="37" name="Text 35"/>
+          <p:cNvPr id="38" name="Text 36"/>
           <p:cNvSpPr/>
           <p:nvPr/>
         </p:nvSpPr>
@@ -3602,7 +3640,7 @@
       </p:sp>
       <p:sp>
         <p:nvSpPr>
-          <p:cNvPr id="38" name="Text 36"/>
+          <p:cNvPr id="39" name="Text 37"/>
           <p:cNvSpPr/>
           <p:nvPr/>
         </p:nvSpPr>
@@ -3738,46 +3776,7 @@
         </p:nvSpPr>
         <p:spPr>
           <a:xfrm>
-            <a:off x="1133856" y="457200"/>
-            <a:ext cx="10490911" cy="182880"/>
-          </a:xfrm>
-          <a:prstGeom prst="rect">
-            <a:avLst/>
-          </a:prstGeom>
-          <a:noFill/>
-          <a:ln/>
-        </p:spPr>
-        <p:txBody>
-          <a:bodyPr wrap="square" lIns="0" tIns="0" rIns="0" bIns="0" rtlCol="0" anchor="ctr"/>
-          <a:lstStyle/>
-          <a:p>
-            <a:pPr indent="0" marL="0">
-              <a:buNone/>
-            </a:pPr>
-            <a:r>
-              <a:rPr lang="en-US" sz="950" b="1" spc="200" kern="0" dirty="0">
-                <a:solidFill>
-                  <a:srgbClr val="B8860B"/>
-                </a:solidFill>
-                <a:latin typeface="Arial" pitchFamily="34" charset="0"/>
-                <a:ea typeface="Arial" pitchFamily="34" charset="-122"/>
-                <a:cs typeface="Arial" pitchFamily="34" charset="-120"/>
-              </a:rPr>
-              <a:t>물건 개요</a:t>
-            </a:r>
-            <a:endParaRPr lang="en-US" sz="950" dirty="0"/>
-          </a:p>
-        </p:txBody>
-      </p:sp>
-      <p:sp>
-        <p:nvSpPr>
-          <p:cNvPr id="5" name="Text 3"/>
-          <p:cNvSpPr/>
-          <p:nvPr/>
-        </p:nvSpPr>
-        <p:spPr>
-          <a:xfrm>
-            <a:off x="1133856" y="640080"/>
+            <a:off x="1133856" y="466344"/>
             <a:ext cx="10490911" cy="365760"/>
           </a:xfrm>
           <a:prstGeom prst="rect">
@@ -3812,7 +3811,7 @@
       </p:sp>
       <p:sp>
         <p:nvSpPr>
-          <p:cNvPr id="6" name="Text 4"/>
+          <p:cNvPr id="5" name="Text 3"/>
           <p:cNvSpPr/>
           <p:nvPr/>
         </p:nvSpPr>
@@ -3851,7 +3850,7 @@
       </p:sp>
       <p:sp>
         <p:nvSpPr>
-          <p:cNvPr id="7" name="Text 5"/>
+          <p:cNvPr id="6" name="Text 4"/>
           <p:cNvSpPr/>
           <p:nvPr/>
         </p:nvSpPr>
@@ -3895,7 +3894,7 @@
       </p:sp>
       <p:sp>
         <p:nvSpPr>
-          <p:cNvPr id="8" name="Text 6"/>
+          <p:cNvPr id="7" name="Text 5"/>
           <p:cNvSpPr/>
           <p:nvPr/>
         </p:nvSpPr>
@@ -3939,7 +3938,7 @@
       </p:sp>
       <p:sp>
         <p:nvSpPr>
-          <p:cNvPr id="9" name="Shape 7"/>
+          <p:cNvPr id="8" name="Shape 6"/>
           <p:cNvSpPr/>
           <p:nvPr/>
         </p:nvSpPr>
@@ -3962,7 +3961,7 @@
       </p:sp>
       <p:sp>
         <p:nvSpPr>
-          <p:cNvPr id="10" name="Text 8"/>
+          <p:cNvPr id="9" name="Text 7"/>
           <p:cNvSpPr/>
           <p:nvPr/>
         </p:nvSpPr>
@@ -4006,7 +4005,7 @@
       </p:sp>
       <p:sp>
         <p:nvSpPr>
-          <p:cNvPr id="11" name="Text 9"/>
+          <p:cNvPr id="10" name="Text 8"/>
           <p:cNvSpPr/>
           <p:nvPr/>
         </p:nvSpPr>
@@ -4050,7 +4049,7 @@
       </p:sp>
       <p:sp>
         <p:nvSpPr>
-          <p:cNvPr id="12" name="Shape 10"/>
+          <p:cNvPr id="11" name="Shape 9"/>
           <p:cNvSpPr/>
           <p:nvPr/>
         </p:nvSpPr>
@@ -4073,7 +4072,7 @@
       </p:sp>
       <p:sp>
         <p:nvSpPr>
-          <p:cNvPr id="13" name="Text 11"/>
+          <p:cNvPr id="12" name="Text 10"/>
           <p:cNvSpPr/>
           <p:nvPr/>
         </p:nvSpPr>
@@ -4117,7 +4116,7 @@
       </p:sp>
       <p:sp>
         <p:nvSpPr>
-          <p:cNvPr id="14" name="Text 12"/>
+          <p:cNvPr id="13" name="Text 11"/>
           <p:cNvSpPr/>
           <p:nvPr/>
         </p:nvSpPr>
@@ -4161,7 +4160,7 @@
       </p:sp>
       <p:sp>
         <p:nvSpPr>
-          <p:cNvPr id="15" name="Shape 13"/>
+          <p:cNvPr id="14" name="Shape 12"/>
           <p:cNvSpPr/>
           <p:nvPr/>
         </p:nvSpPr>
@@ -4184,7 +4183,7 @@
       </p:sp>
       <p:sp>
         <p:nvSpPr>
-          <p:cNvPr id="16" name="Text 14"/>
+          <p:cNvPr id="15" name="Text 13"/>
           <p:cNvSpPr/>
           <p:nvPr/>
         </p:nvSpPr>
@@ -4228,7 +4227,7 @@
       </p:sp>
       <p:sp>
         <p:nvSpPr>
-          <p:cNvPr id="17" name="Text 15"/>
+          <p:cNvPr id="16" name="Text 14"/>
           <p:cNvSpPr/>
           <p:nvPr/>
         </p:nvSpPr>
@@ -4272,7 +4271,7 @@
       </p:sp>
       <p:sp>
         <p:nvSpPr>
-          <p:cNvPr id="18" name="Shape 16"/>
+          <p:cNvPr id="17" name="Shape 15"/>
           <p:cNvSpPr/>
           <p:nvPr/>
         </p:nvSpPr>
@@ -4295,7 +4294,7 @@
       </p:sp>
       <p:sp>
         <p:nvSpPr>
-          <p:cNvPr id="19" name="Text 17"/>
+          <p:cNvPr id="18" name="Text 16"/>
           <p:cNvSpPr/>
           <p:nvPr/>
         </p:nvSpPr>
@@ -4339,7 +4338,7 @@
       </p:sp>
       <p:sp>
         <p:nvSpPr>
-          <p:cNvPr id="20" name="Text 18"/>
+          <p:cNvPr id="19" name="Text 17"/>
           <p:cNvSpPr/>
           <p:nvPr/>
         </p:nvSpPr>
@@ -4383,7 +4382,7 @@
       </p:sp>
       <p:sp>
         <p:nvSpPr>
-          <p:cNvPr id="21" name="Shape 19"/>
+          <p:cNvPr id="20" name="Shape 18"/>
           <p:cNvSpPr/>
           <p:nvPr/>
         </p:nvSpPr>
@@ -4406,7 +4405,7 @@
       </p:sp>
       <p:sp>
         <p:nvSpPr>
-          <p:cNvPr id="22" name="Text 20"/>
+          <p:cNvPr id="21" name="Text 19"/>
           <p:cNvSpPr/>
           <p:nvPr/>
         </p:nvSpPr>
@@ -4450,7 +4449,7 @@
       </p:sp>
       <p:sp>
         <p:nvSpPr>
-          <p:cNvPr id="23" name="Text 21"/>
+          <p:cNvPr id="22" name="Text 20"/>
           <p:cNvSpPr/>
           <p:nvPr/>
         </p:nvSpPr>
@@ -4494,7 +4493,7 @@
       </p:sp>
       <p:sp>
         <p:nvSpPr>
-          <p:cNvPr id="24" name="Shape 22"/>
+          <p:cNvPr id="23" name="Shape 21"/>
           <p:cNvSpPr/>
           <p:nvPr/>
         </p:nvSpPr>
@@ -4517,7 +4516,7 @@
       </p:sp>
       <p:sp>
         <p:nvSpPr>
-          <p:cNvPr id="25" name="Text 23"/>
+          <p:cNvPr id="24" name="Text 22"/>
           <p:cNvSpPr/>
           <p:nvPr/>
         </p:nvSpPr>
@@ -4561,7 +4560,7 @@
       </p:sp>
       <p:sp>
         <p:nvSpPr>
-          <p:cNvPr id="26" name="Text 24"/>
+          <p:cNvPr id="25" name="Text 23"/>
           <p:cNvSpPr/>
           <p:nvPr/>
         </p:nvSpPr>
@@ -4605,7 +4604,7 @@
       </p:sp>
       <p:sp>
         <p:nvSpPr>
-          <p:cNvPr id="27" name="Shape 25"/>
+          <p:cNvPr id="26" name="Shape 24"/>
           <p:cNvSpPr/>
           <p:nvPr/>
         </p:nvSpPr>
@@ -4628,7 +4627,7 @@
       </p:sp>
       <p:sp>
         <p:nvSpPr>
-          <p:cNvPr id="28" name="Text 26"/>
+          <p:cNvPr id="27" name="Text 25"/>
           <p:cNvSpPr/>
           <p:nvPr/>
         </p:nvSpPr>
@@ -4672,7 +4671,7 @@
       </p:sp>
       <p:sp>
         <p:nvSpPr>
-          <p:cNvPr id="29" name="Text 27"/>
+          <p:cNvPr id="28" name="Text 26"/>
           <p:cNvSpPr/>
           <p:nvPr/>
         </p:nvSpPr>
@@ -4716,7 +4715,342 @@
       </p:sp>
       <p:sp>
         <p:nvSpPr>
-          <p:cNvPr id="30" name="Shape 28"/>
+          <p:cNvPr id="29" name="Shape 27"/>
+          <p:cNvSpPr/>
+          <p:nvPr/>
+        </p:nvSpPr>
+        <p:spPr>
+          <a:xfrm>
+            <a:off x="7604608" y="1371600"/>
+            <a:ext cx="0" cy="4754880"/>
+          </a:xfrm>
+          <a:prstGeom prst="line">
+            <a:avLst/>
+          </a:prstGeom>
+          <a:noFill/>
+          <a:ln w="8890">
+            <a:solidFill>
+              <a:srgbClr val="B8860B"/>
+            </a:solidFill>
+            <a:prstDash val="solid"/>
+          </a:ln>
+        </p:spPr>
+      </p:sp>
+      <p:pic>
+        <p:nvPicPr>
+          <p:cNvPr id="30" name="Image 0" descr="preencoded.png">    </p:cNvPr>
+          <p:cNvPicPr>
+            <a:picLocks noChangeAspect="1"/>
+          </p:cNvPicPr>
+          <p:nvPr/>
+        </p:nvPicPr>
+        <p:blipFill>
+          <a:blip r:embed="rId1"/>
+          <a:srcRect l="0" r="0" t="10000" b="10000"/>
+          <a:stretch/>
+        </p:blipFill>
+        <p:spPr>
+          <a:xfrm>
+            <a:off x="7784287" y="1645920"/>
+            <a:ext cx="3840480" cy="2304288"/>
+          </a:xfrm>
+          <a:prstGeom prst="rect">
+            <a:avLst/>
+          </a:prstGeom>
+        </p:spPr>
+      </p:pic>
+      <p:sp>
+        <p:nvSpPr>
+          <p:cNvPr id="31" name="Shape 28"/>
+          <p:cNvSpPr/>
+          <p:nvPr/>
+        </p:nvSpPr>
+        <p:spPr>
+          <a:xfrm>
+            <a:off x="7784287" y="4087368"/>
+            <a:ext cx="3840480" cy="1307592"/>
+          </a:xfrm>
+          <a:prstGeom prst="roundRect">
+            <a:avLst>
+              <a:gd name="adj" fmla="val 3497"/>
+            </a:avLst>
+          </a:prstGeom>
+          <a:solidFill>
+            <a:srgbClr val="F6F1E4"/>
+          </a:solidFill>
+          <a:ln w="9525">
+            <a:solidFill>
+              <a:srgbClr val="D4C89A"/>
+            </a:solidFill>
+            <a:prstDash val="solid"/>
+          </a:ln>
+        </p:spPr>
+      </p:sp>
+      <p:sp>
+        <p:nvSpPr>
+          <p:cNvPr id="32" name="Shape 29"/>
+          <p:cNvSpPr/>
+          <p:nvPr/>
+        </p:nvSpPr>
+        <p:spPr>
+          <a:xfrm>
+            <a:off x="7784287" y="4160520"/>
+            <a:ext cx="45720" cy="1161288"/>
+          </a:xfrm>
+          <a:prstGeom prst="rect">
+            <a:avLst/>
+          </a:prstGeom>
+          <a:solidFill>
+            <a:srgbClr val="B8860B"/>
+          </a:solidFill>
+          <a:ln w="12700">
+            <a:solidFill>
+              <a:srgbClr val="B8860B"/>
+            </a:solidFill>
+            <a:prstDash val="solid"/>
+          </a:ln>
+        </p:spPr>
+      </p:sp>
+      <p:sp>
+        <p:nvSpPr>
+          <p:cNvPr id="33" name="Text 30"/>
+          <p:cNvSpPr/>
+          <p:nvPr/>
+        </p:nvSpPr>
+        <p:spPr>
+          <a:xfrm>
+            <a:off x="7967167" y="4197096"/>
+            <a:ext cx="3547872" cy="237744"/>
+          </a:xfrm>
+          <a:prstGeom prst="rect">
+            <a:avLst/>
+          </a:prstGeom>
+          <a:noFill/>
+          <a:ln/>
+        </p:spPr>
+        <p:txBody>
+          <a:bodyPr wrap="square" lIns="0" tIns="0" rIns="0" bIns="0" rtlCol="0" anchor="ctr"/>
+          <a:lstStyle/>
+          <a:p>
+            <a:pPr indent="0" marL="0">
+              <a:buNone/>
+            </a:pPr>
+            <a:r>
+              <a:rPr lang="en-US" sz="1100" b="1" dirty="0">
+                <a:solidFill>
+                  <a:srgbClr val="8B6508"/>
+                </a:solidFill>
+                <a:latin typeface="맑은 고딕" pitchFamily="34" charset="0"/>
+                <a:ea typeface="맑은 고딕" pitchFamily="34" charset="-122"/>
+                <a:cs typeface="맑은 고딕" pitchFamily="34" charset="-120"/>
+              </a:rPr>
+              <a:t>자산 하이라이트</a:t>
+            </a:r>
+            <a:endParaRPr lang="en-US" sz="1100" dirty="0"/>
+          </a:p>
+        </p:txBody>
+      </p:sp>
+      <p:sp>
+        <p:nvSpPr>
+          <p:cNvPr id="34" name="Shape 31"/>
+          <p:cNvSpPr/>
+          <p:nvPr/>
+        </p:nvSpPr>
+        <p:spPr>
+          <a:xfrm>
+            <a:off x="7985455" y="4613148"/>
+            <a:ext cx="54864" cy="54864"/>
+          </a:xfrm>
+          <a:prstGeom prst="rect">
+            <a:avLst/>
+          </a:prstGeom>
+          <a:solidFill>
+            <a:srgbClr val="B8860B"/>
+          </a:solidFill>
+          <a:ln w="12700">
+            <a:solidFill>
+              <a:srgbClr val="B8860B"/>
+            </a:solidFill>
+            <a:prstDash val="solid"/>
+          </a:ln>
+        </p:spPr>
+      </p:sp>
+      <p:sp>
+        <p:nvSpPr>
+          <p:cNvPr id="35" name="Text 32"/>
+          <p:cNvSpPr/>
+          <p:nvPr/>
+        </p:nvSpPr>
+        <p:spPr>
+          <a:xfrm>
+            <a:off x="8113471" y="4507992"/>
+            <a:ext cx="3383280" cy="265176"/>
+          </a:xfrm>
+          <a:prstGeom prst="rect">
+            <a:avLst/>
+          </a:prstGeom>
+          <a:noFill/>
+          <a:ln/>
+        </p:spPr>
+        <p:txBody>
+          <a:bodyPr wrap="square" lIns="0" tIns="0" rIns="0" bIns="0" rtlCol="0" anchor="ctr">
+            <a:normAutofit/>
+          </a:bodyPr>
+          <a:lstStyle/>
+          <a:p>
+            <a:pPr indent="0" marL="0">
+              <a:buNone/>
+            </a:pPr>
+            <a:r>
+              <a:rPr lang="en-US" sz="1050" dirty="0">
+                <a:solidFill>
+                  <a:srgbClr val="132A3A"/>
+                </a:solidFill>
+                <a:latin typeface="맑은 고딕" pitchFamily="34" charset="0"/>
+                <a:ea typeface="맑은 고딕" pitchFamily="34" charset="-122"/>
+                <a:cs typeface="맑은 고딕" pitchFamily="34" charset="-120"/>
+              </a:rPr>
+              <a:t>압구정역(3호선) 도보 7분 역세권</a:t>
+            </a:r>
+            <a:endParaRPr lang="en-US" sz="1050" dirty="0"/>
+          </a:p>
+        </p:txBody>
+      </p:sp>
+      <p:sp>
+        <p:nvSpPr>
+          <p:cNvPr id="36" name="Shape 33"/>
+          <p:cNvSpPr/>
+          <p:nvPr/>
+        </p:nvSpPr>
+        <p:spPr>
+          <a:xfrm>
+            <a:off x="7985455" y="4878324"/>
+            <a:ext cx="54864" cy="54864"/>
+          </a:xfrm>
+          <a:prstGeom prst="rect">
+            <a:avLst/>
+          </a:prstGeom>
+          <a:solidFill>
+            <a:srgbClr val="B8860B"/>
+          </a:solidFill>
+          <a:ln w="12700">
+            <a:solidFill>
+              <a:srgbClr val="B8860B"/>
+            </a:solidFill>
+            <a:prstDash val="solid"/>
+          </a:ln>
+        </p:spPr>
+      </p:sp>
+      <p:sp>
+        <p:nvSpPr>
+          <p:cNvPr id="37" name="Text 34"/>
+          <p:cNvSpPr/>
+          <p:nvPr/>
+        </p:nvSpPr>
+        <p:spPr>
+          <a:xfrm>
+            <a:off x="8113471" y="4773168"/>
+            <a:ext cx="3383280" cy="265176"/>
+          </a:xfrm>
+          <a:prstGeom prst="rect">
+            <a:avLst/>
+          </a:prstGeom>
+          <a:noFill/>
+          <a:ln/>
+        </p:spPr>
+        <p:txBody>
+          <a:bodyPr wrap="square" lIns="0" tIns="0" rIns="0" bIns="0" rtlCol="0" anchor="ctr">
+            <a:normAutofit/>
+          </a:bodyPr>
+          <a:lstStyle/>
+          <a:p>
+            <a:pPr indent="0" marL="0">
+              <a:buNone/>
+            </a:pPr>
+            <a:r>
+              <a:rPr lang="en-US" sz="1050" dirty="0">
+                <a:solidFill>
+                  <a:srgbClr val="132A3A"/>
+                </a:solidFill>
+                <a:latin typeface="맑은 고딕" pitchFamily="34" charset="0"/>
+                <a:ea typeface="맑은 고딕" pitchFamily="34" charset="-122"/>
+                <a:cs typeface="맑은 고딕" pitchFamily="34" charset="-120"/>
+              </a:rPr>
+              <a:t>대지 1,061.9㎡ · 제3종일반주거지역</a:t>
+            </a:r>
+            <a:endParaRPr lang="en-US" sz="1050" dirty="0"/>
+          </a:p>
+        </p:txBody>
+      </p:sp>
+      <p:sp>
+        <p:nvSpPr>
+          <p:cNvPr id="38" name="Shape 35"/>
+          <p:cNvSpPr/>
+          <p:nvPr/>
+        </p:nvSpPr>
+        <p:spPr>
+          <a:xfrm>
+            <a:off x="7985455" y="5143500"/>
+            <a:ext cx="54864" cy="54864"/>
+          </a:xfrm>
+          <a:prstGeom prst="rect">
+            <a:avLst/>
+          </a:prstGeom>
+          <a:solidFill>
+            <a:srgbClr val="B8860B"/>
+          </a:solidFill>
+          <a:ln w="12700">
+            <a:solidFill>
+              <a:srgbClr val="B8860B"/>
+            </a:solidFill>
+            <a:prstDash val="solid"/>
+          </a:ln>
+        </p:spPr>
+      </p:sp>
+      <p:sp>
+        <p:nvSpPr>
+          <p:cNvPr id="39" name="Text 36"/>
+          <p:cNvSpPr/>
+          <p:nvPr/>
+        </p:nvSpPr>
+        <p:spPr>
+          <a:xfrm>
+            <a:off x="8113471" y="5038344"/>
+            <a:ext cx="3383280" cy="265176"/>
+          </a:xfrm>
+          <a:prstGeom prst="rect">
+            <a:avLst/>
+          </a:prstGeom>
+          <a:noFill/>
+          <a:ln/>
+        </p:spPr>
+        <p:txBody>
+          <a:bodyPr wrap="square" lIns="0" tIns="0" rIns="0" bIns="0" rtlCol="0" anchor="ctr">
+            <a:normAutofit/>
+          </a:bodyPr>
+          <a:lstStyle/>
+          <a:p>
+            <a:pPr indent="0" marL="0">
+              <a:buNone/>
+            </a:pPr>
+            <a:r>
+              <a:rPr lang="en-US" sz="1050" dirty="0">
+                <a:solidFill>
+                  <a:srgbClr val="132A3A"/>
+                </a:solidFill>
+                <a:latin typeface="맑은 고딕" pitchFamily="34" charset="0"/>
+                <a:ea typeface="맑은 고딕" pitchFamily="34" charset="-122"/>
+                <a:cs typeface="맑은 고딕" pitchFamily="34" charset="-120"/>
+              </a:rPr>
+              <a:t>1998년 준공 · 지하 2층·지상 6층</a:t>
+            </a:r>
+            <a:endParaRPr lang="en-US" sz="1050" dirty="0"/>
+          </a:p>
+        </p:txBody>
+      </p:sp>
+      <p:sp>
+        <p:nvSpPr>
+          <p:cNvPr id="40" name="Shape 37"/>
           <p:cNvSpPr/>
           <p:nvPr/>
         </p:nvSpPr>
@@ -4741,7 +5075,7 @@
       </p:sp>
       <p:sp>
         <p:nvSpPr>
-          <p:cNvPr id="31" name="Text 29"/>
+          <p:cNvPr id="41" name="Text 38"/>
           <p:cNvSpPr/>
           <p:nvPr/>
         </p:nvSpPr>
@@ -4780,7 +5114,7 @@
       </p:sp>
       <p:sp>
         <p:nvSpPr>
-          <p:cNvPr id="32" name="Text 30"/>
+          <p:cNvPr id="42" name="Text 39"/>
           <p:cNvSpPr/>
           <p:nvPr/>
         </p:nvSpPr>
@@ -4819,7 +5153,7 @@
       </p:sp>
       <p:sp>
         <p:nvSpPr>
-          <p:cNvPr id="33" name="Shape 31"/>
+          <p:cNvPr id="43" name="Shape 40"/>
           <p:cNvSpPr/>
           <p:nvPr/>
         </p:nvSpPr>
@@ -4842,7 +5176,7 @@
       </p:sp>
       <p:sp>
         <p:nvSpPr>
-          <p:cNvPr id="34" name="Text 32"/>
+          <p:cNvPr id="44" name="Text 41"/>
           <p:cNvSpPr/>
           <p:nvPr/>
         </p:nvSpPr>
@@ -4881,7 +5215,7 @@
       </p:sp>
       <p:sp>
         <p:nvSpPr>
-          <p:cNvPr id="35" name="Text 33"/>
+          <p:cNvPr id="45" name="Text 42"/>
           <p:cNvSpPr/>
           <p:nvPr/>
         </p:nvSpPr>
@@ -4920,374 +5254,7 @@
       </p:sp>
       <p:sp>
         <p:nvSpPr>
-          <p:cNvPr id="36" name="Shape 34"/>
-          <p:cNvSpPr/>
-          <p:nvPr/>
-        </p:nvSpPr>
-        <p:spPr>
-          <a:xfrm>
-            <a:off x="7604608" y="1371600"/>
-            <a:ext cx="0" cy="4754880"/>
-          </a:xfrm>
-          <a:prstGeom prst="line">
-            <a:avLst/>
-          </a:prstGeom>
-          <a:noFill/>
-          <a:ln w="8890">
-            <a:solidFill>
-              <a:srgbClr val="B8860B"/>
-            </a:solidFill>
-            <a:prstDash val="solid"/>
-          </a:ln>
-        </p:spPr>
-      </p:sp>
-      <p:sp>
-        <p:nvSpPr>
-          <p:cNvPr id="37" name="Shape 35"/>
-          <p:cNvSpPr/>
-          <p:nvPr/>
-        </p:nvSpPr>
-        <p:spPr>
-          <a:xfrm>
-            <a:off x="7784287" y="1645920"/>
-            <a:ext cx="3840480" cy="2103120"/>
-          </a:xfrm>
-          <a:prstGeom prst="roundRect">
-            <a:avLst>
-              <a:gd name="adj" fmla="val 2609"/>
-            </a:avLst>
-          </a:prstGeom>
-          <a:solidFill>
-            <a:srgbClr val="E8F4F8"/>
-          </a:solidFill>
-          <a:ln/>
-        </p:spPr>
-      </p:sp>
-      <p:sp>
-        <p:nvSpPr>
-          <p:cNvPr id="38" name="Shape 36"/>
-          <p:cNvSpPr/>
-          <p:nvPr/>
-        </p:nvSpPr>
-        <p:spPr>
-          <a:xfrm>
-            <a:off x="7784287" y="1700784"/>
-            <a:ext cx="36576" cy="1993392"/>
-          </a:xfrm>
-          <a:prstGeom prst="rect">
-            <a:avLst/>
-          </a:prstGeom>
-          <a:solidFill>
-            <a:srgbClr val="2E6E82"/>
-          </a:solidFill>
-          <a:ln/>
-        </p:spPr>
-      </p:sp>
-      <p:sp>
-        <p:nvSpPr>
-          <p:cNvPr id="39" name="Text 37"/>
-          <p:cNvSpPr/>
-          <p:nvPr/>
-        </p:nvSpPr>
-        <p:spPr>
-          <a:xfrm>
-            <a:off x="7930591" y="1737360"/>
-            <a:ext cx="3584448" cy="201168"/>
-          </a:xfrm>
-          <a:prstGeom prst="rect">
-            <a:avLst/>
-          </a:prstGeom>
-          <a:noFill/>
-          <a:ln/>
-        </p:spPr>
-        <p:txBody>
-          <a:bodyPr wrap="square" lIns="0" tIns="0" rIns="0" bIns="0" rtlCol="0" anchor="ctr"/>
-          <a:lstStyle/>
-          <a:p>
-            <a:pPr indent="0" marL="0">
-              <a:buNone/>
-            </a:pPr>
-            <a:r>
-              <a:rPr lang="en-US" sz="1050" b="1" dirty="0">
-                <a:solidFill>
-                  <a:srgbClr val="2E6E82"/>
-                </a:solidFill>
-                <a:latin typeface="맑은 고딕" pitchFamily="34" charset="0"/>
-                <a:ea typeface="맑은 고딕" pitchFamily="34" charset="-122"/>
-                <a:cs typeface="맑은 고딕" pitchFamily="34" charset="-120"/>
-              </a:rPr>
-              <a:t>입지 및 자산 개요</a:t>
-            </a:r>
-            <a:endParaRPr lang="en-US" sz="1050" dirty="0"/>
-          </a:p>
-        </p:txBody>
-      </p:sp>
-      <p:sp>
-        <p:nvSpPr>
-          <p:cNvPr id="40" name="Text 38"/>
-          <p:cNvSpPr/>
-          <p:nvPr/>
-        </p:nvSpPr>
-        <p:spPr>
-          <a:xfrm>
-            <a:off x="7930591" y="1938528"/>
-            <a:ext cx="3584448" cy="1773936"/>
-          </a:xfrm>
-          <a:prstGeom prst="rect">
-            <a:avLst/>
-          </a:prstGeom>
-          <a:noFill/>
-          <a:ln/>
-        </p:spPr>
-        <p:txBody>
-          <a:bodyPr wrap="square" lIns="0" tIns="0" rIns="0" bIns="0" rtlCol="0" anchor="t"/>
-          <a:lstStyle/>
-          <a:p>
-            <a:pPr marL="342900" indent="-342900">
-              <a:lnSpc>
-                <a:spcPct val="108000"/>
-              </a:lnSpc>
-              <a:buSzPct val="100000"/>
-              <a:buChar char="•"/>
-            </a:pPr>
-            <a:r>
-              <a:rPr lang="en-US" sz="980" dirty="0">
-                <a:solidFill>
-                  <a:srgbClr val="2B2B2B"/>
-                </a:solidFill>
-                <a:latin typeface="맑은 고딕" pitchFamily="34" charset="0"/>
-                <a:ea typeface="맑은 고딕" pitchFamily="34" charset="-122"/>
-                <a:cs typeface="맑은 고딕" pitchFamily="34" charset="-120"/>
-              </a:rPr>
-              <a:t>투자 검토 대상 상업용 자산</a:t>
-            </a:r>
-            <a:endParaRPr lang="en-US" sz="980" dirty="0"/>
-          </a:p>
-          <a:p>
-            <a:pPr marL="342900" indent="-342900">
-              <a:lnSpc>
-                <a:spcPct val="108000"/>
-              </a:lnSpc>
-              <a:spcBef>
-                <a:spcPts val="300"/>
-              </a:spcBef>
-              <a:buSzPct val="100000"/>
-              <a:buChar char="•"/>
-            </a:pPr>
-            <a:r>
-              <a:rPr lang="en-US" sz="980" dirty="0">
-                <a:solidFill>
-                  <a:srgbClr val="2B2B2B"/>
-                </a:solidFill>
-                <a:latin typeface="맑은 고딕" pitchFamily="34" charset="0"/>
-                <a:ea typeface="맑은 고딕" pitchFamily="34" charset="-122"/>
-                <a:cs typeface="맑은 고딕" pitchFamily="34" charset="-120"/>
-              </a:rPr>
-              <a:t>권리관계 및 임대차 계약 구조 분석</a:t>
-            </a:r>
-            <a:endParaRPr lang="en-US" sz="980" dirty="0"/>
-          </a:p>
-          <a:p>
-            <a:pPr marL="342900" indent="-342900">
-              <a:lnSpc>
-                <a:spcPct val="108000"/>
-              </a:lnSpc>
-              <a:spcBef>
-                <a:spcPts val="300"/>
-              </a:spcBef>
-              <a:buSzPct val="100000"/>
-              <a:buChar char="•"/>
-            </a:pPr>
-            <a:r>
-              <a:rPr lang="en-US" sz="980" dirty="0">
-                <a:solidFill>
-                  <a:srgbClr val="2B2B2B"/>
-                </a:solidFill>
-                <a:latin typeface="맑은 고딕" pitchFamily="34" charset="0"/>
-                <a:ea typeface="맑은 고딕" pitchFamily="34" charset="-122"/>
-                <a:cs typeface="맑은 고딕" pitchFamily="34" charset="-120"/>
-              </a:rPr>
-              <a:t>상세 인접 인프라 및 입지 환경 분석</a:t>
-            </a:r>
-            <a:endParaRPr lang="en-US" sz="980" dirty="0"/>
-          </a:p>
-        </p:txBody>
-      </p:sp>
-      <p:sp>
-        <p:nvSpPr>
-          <p:cNvPr id="41" name="Shape 39"/>
-          <p:cNvSpPr/>
-          <p:nvPr/>
-        </p:nvSpPr>
-        <p:spPr>
-          <a:xfrm>
-            <a:off x="7784287" y="3977640"/>
-            <a:ext cx="3840480" cy="2148840"/>
-          </a:xfrm>
-          <a:prstGeom prst="roundRect">
-            <a:avLst>
-              <a:gd name="adj" fmla="val 2553"/>
-            </a:avLst>
-          </a:prstGeom>
-          <a:solidFill>
-            <a:srgbClr val="E8F4F8"/>
-          </a:solidFill>
-          <a:ln/>
-        </p:spPr>
-      </p:sp>
-      <p:sp>
-        <p:nvSpPr>
-          <p:cNvPr id="42" name="Shape 40"/>
-          <p:cNvSpPr/>
-          <p:nvPr/>
-        </p:nvSpPr>
-        <p:spPr>
-          <a:xfrm>
-            <a:off x="7784287" y="4032504"/>
-            <a:ext cx="36576" cy="2039112"/>
-          </a:xfrm>
-          <a:prstGeom prst="rect">
-            <a:avLst/>
-          </a:prstGeom>
-          <a:solidFill>
-            <a:srgbClr val="2E6E82"/>
-          </a:solidFill>
-          <a:ln/>
-        </p:spPr>
-      </p:sp>
-      <p:sp>
-        <p:nvSpPr>
-          <p:cNvPr id="43" name="Text 41"/>
-          <p:cNvSpPr/>
-          <p:nvPr/>
-        </p:nvSpPr>
-        <p:spPr>
-          <a:xfrm>
-            <a:off x="7930591" y="4069080"/>
-            <a:ext cx="3584448" cy="201168"/>
-          </a:xfrm>
-          <a:prstGeom prst="rect">
-            <a:avLst/>
-          </a:prstGeom>
-          <a:noFill/>
-          <a:ln/>
-        </p:spPr>
-        <p:txBody>
-          <a:bodyPr wrap="square" lIns="0" tIns="0" rIns="0" bIns="0" rtlCol="0" anchor="ctr"/>
-          <a:lstStyle/>
-          <a:p>
-            <a:pPr indent="0" marL="0">
-              <a:buNone/>
-            </a:pPr>
-            <a:r>
-              <a:rPr lang="en-US" sz="1050" b="1" dirty="0">
-                <a:solidFill>
-                  <a:srgbClr val="2E6E82"/>
-                </a:solidFill>
-                <a:latin typeface="맑은 고딕" pitchFamily="34" charset="0"/>
-                <a:ea typeface="맑은 고딕" pitchFamily="34" charset="-122"/>
-                <a:cs typeface="맑은 고딕" pitchFamily="34" charset="-120"/>
-              </a:rPr>
-              <a:t>투자 수익 및 운영 현황</a:t>
-            </a:r>
-            <a:endParaRPr lang="en-US" sz="1050" dirty="0"/>
-          </a:p>
-        </p:txBody>
-      </p:sp>
-      <p:sp>
-        <p:nvSpPr>
-          <p:cNvPr id="44" name="Text 42"/>
-          <p:cNvSpPr/>
-          <p:nvPr/>
-        </p:nvSpPr>
-        <p:spPr>
-          <a:xfrm>
-            <a:off x="7930591" y="4270248"/>
-            <a:ext cx="3584448" cy="1819656"/>
-          </a:xfrm>
-          <a:prstGeom prst="rect">
-            <a:avLst/>
-          </a:prstGeom>
-          <a:noFill/>
-          <a:ln/>
-        </p:spPr>
-        <p:txBody>
-          <a:bodyPr wrap="square" lIns="0" tIns="0" rIns="0" bIns="0" rtlCol="0" anchor="t"/>
-          <a:lstStyle/>
-          <a:p>
-            <a:pPr marL="342900" indent="-342900">
-              <a:lnSpc>
-                <a:spcPct val="108000"/>
-              </a:lnSpc>
-              <a:buSzPct val="100000"/>
-              <a:buChar char="•"/>
-            </a:pPr>
-            <a:r>
-              <a:rPr lang="en-US" sz="980" dirty="0">
-                <a:solidFill>
-                  <a:srgbClr val="2B2B2B"/>
-                </a:solidFill>
-                <a:latin typeface="맑은 고딕" pitchFamily="34" charset="0"/>
-                <a:ea typeface="맑은 고딕" pitchFamily="34" charset="-122"/>
-                <a:cs typeface="맑은 고딕" pitchFamily="34" charset="-120"/>
-              </a:rPr>
-              <a:t>투자 검토 대상 자산</a:t>
-            </a:r>
-            <a:endParaRPr lang="en-US" sz="980" dirty="0"/>
-          </a:p>
-          <a:p>
-            <a:pPr marL="342900" indent="-342900">
-              <a:lnSpc>
-                <a:spcPct val="108000"/>
-              </a:lnSpc>
-              <a:spcBef>
-                <a:spcPts val="300"/>
-              </a:spcBef>
-              <a:buSzPct val="100000"/>
-              <a:buChar char="•"/>
-            </a:pPr>
-            <a:r>
-              <a:rPr lang="en-US" sz="980" dirty="0">
-                <a:solidFill>
-                  <a:srgbClr val="2B2B2B"/>
-                </a:solidFill>
-                <a:latin typeface="맑은 고딕" pitchFamily="34" charset="0"/>
-                <a:ea typeface="맑은 고딕" pitchFamily="34" charset="-122"/>
-                <a:cs typeface="맑은 고딕" pitchFamily="34" charset="-120"/>
-              </a:rPr>
-              <a:t>임대차 계약 조건 및 운영비 구조 분석</a:t>
-            </a:r>
-            <a:endParaRPr lang="en-US" sz="980" dirty="0"/>
-          </a:p>
-          <a:p>
-            <a:pPr marL="342900" indent="-342900">
-              <a:lnSpc>
-                <a:spcPct val="108000"/>
-              </a:lnSpc>
-              <a:spcBef>
-                <a:spcPts val="300"/>
-              </a:spcBef>
-              <a:buSzPct val="100000"/>
-              <a:buChar char="•"/>
-            </a:pPr>
-            <a:r>
-              <a:rPr lang="en-US" sz="980" dirty="0">
-                <a:solidFill>
-                  <a:srgbClr val="2B2B2B"/>
-                </a:solidFill>
-                <a:latin typeface="맑은 고딕" pitchFamily="34" charset="0"/>
-                <a:ea typeface="맑은 고딕" pitchFamily="34" charset="-122"/>
-                <a:cs typeface="맑은 고딕" pitchFamily="34" charset="-120"/>
-              </a:rPr>
-              <a:t>매입 후 운용 계획에 따른 수익성 분석</a:t>
-            </a:r>
-            <a:endParaRPr lang="en-US" sz="980" dirty="0"/>
-          </a:p>
-        </p:txBody>
-      </p:sp>
-      <p:sp>
-        <p:nvSpPr>
-          <p:cNvPr id="45" name="Text 43"/>
+          <p:cNvPr id="46" name="Text 43"/>
           <p:cNvSpPr/>
           <p:nvPr/>
         </p:nvSpPr>
@@ -5326,7 +5293,7 @@
       </p:sp>
       <p:sp>
         <p:nvSpPr>
-          <p:cNvPr id="46" name="Text 44"/>
+          <p:cNvPr id="47" name="Text 44"/>
           <p:cNvSpPr/>
           <p:nvPr/>
         </p:nvSpPr>
@@ -5462,46 +5429,7 @@
         </p:nvSpPr>
         <p:spPr>
           <a:xfrm>
-            <a:off x="1133856" y="457200"/>
-            <a:ext cx="10490911" cy="182880"/>
-          </a:xfrm>
-          <a:prstGeom prst="rect">
-            <a:avLst/>
-          </a:prstGeom>
-          <a:noFill/>
-          <a:ln/>
-        </p:spPr>
-        <p:txBody>
-          <a:bodyPr wrap="square" lIns="0" tIns="0" rIns="0" bIns="0" rtlCol="0" anchor="ctr"/>
-          <a:lstStyle/>
-          <a:p>
-            <a:pPr indent="0" marL="0">
-              <a:buNone/>
-            </a:pPr>
-            <a:r>
-              <a:rPr lang="en-US" sz="950" b="1" spc="200" kern="0" dirty="0">
-                <a:solidFill>
-                  <a:srgbClr val="B8860B"/>
-                </a:solidFill>
-                <a:latin typeface="Arial" pitchFamily="34" charset="0"/>
-                <a:ea typeface="Arial" pitchFamily="34" charset="-122"/>
-                <a:cs typeface="Arial" pitchFamily="34" charset="-120"/>
-              </a:rPr>
-              <a:t>입지 정보</a:t>
-            </a:r>
-            <a:endParaRPr lang="en-US" sz="950" dirty="0"/>
-          </a:p>
-        </p:txBody>
-      </p:sp>
-      <p:sp>
-        <p:nvSpPr>
-          <p:cNvPr id="5" name="Text 3"/>
-          <p:cNvSpPr/>
-          <p:nvPr/>
-        </p:nvSpPr>
-        <p:spPr>
-          <a:xfrm>
-            <a:off x="1133856" y="640080"/>
+            <a:off x="1133856" y="466344"/>
             <a:ext cx="10490911" cy="365760"/>
           </a:xfrm>
           <a:prstGeom prst="rect">
@@ -5536,7 +5464,7 @@
       </p:sp>
       <p:pic>
         <p:nvPicPr>
-          <p:cNvPr id="6" name="Image 0" descr="preencoded.png">    </p:cNvPr>
+          <p:cNvPr id="5" name="Image 0" descr="preencoded.png">    </p:cNvPr>
           <p:cNvPicPr>
             <a:picLocks noChangeAspect="1"/>
           </p:cNvPicPr>
@@ -5560,14 +5488,66 @@
       </p:pic>
       <p:sp>
         <p:nvSpPr>
-          <p:cNvPr id="7" name="Text 4"/>
-          <p:cNvSpPr/>
-          <p:nvPr/>
-        </p:nvSpPr>
-        <p:spPr>
-          <a:xfrm>
-            <a:off x="6053328" y="1481328"/>
-            <a:ext cx="5571439" cy="237744"/>
+          <p:cNvPr id="6" name="Shape 3"/>
+          <p:cNvSpPr/>
+          <p:nvPr/>
+        </p:nvSpPr>
+        <p:spPr>
+          <a:xfrm>
+            <a:off x="2889504" y="2953512"/>
+            <a:ext cx="475488" cy="219456"/>
+          </a:xfrm>
+          <a:prstGeom prst="roundRect">
+            <a:avLst>
+              <a:gd name="adj" fmla="val 20833"/>
+            </a:avLst>
+          </a:prstGeom>
+          <a:solidFill>
+            <a:srgbClr val="132A3A"/>
+          </a:solidFill>
+          <a:ln w="12700">
+            <a:solidFill>
+              <a:srgbClr val="FFFFFF"/>
+            </a:solidFill>
+            <a:prstDash val="solid"/>
+          </a:ln>
+        </p:spPr>
+      </p:sp>
+      <p:sp>
+        <p:nvSpPr>
+          <p:cNvPr id="7" name="Shape 4"/>
+          <p:cNvSpPr/>
+          <p:nvPr/>
+        </p:nvSpPr>
+        <p:spPr>
+          <a:xfrm rot="10800000">
+            <a:off x="3072384" y="3163824"/>
+            <a:ext cx="109728" cy="64008"/>
+          </a:xfrm>
+          <a:prstGeom prst="triangle">
+            <a:avLst/>
+          </a:prstGeom>
+          <a:solidFill>
+            <a:srgbClr val="132A3A"/>
+          </a:solidFill>
+          <a:ln w="12700">
+            <a:solidFill>
+              <a:srgbClr val="132A3A"/>
+            </a:solidFill>
+            <a:prstDash val="solid"/>
+          </a:ln>
+        </p:spPr>
+      </p:sp>
+      <p:sp>
+        <p:nvSpPr>
+          <p:cNvPr id="8" name="Text 5"/>
+          <p:cNvSpPr/>
+          <p:nvPr/>
+        </p:nvSpPr>
+        <p:spPr>
+          <a:xfrm>
+            <a:off x="2889504" y="2953512"/>
+            <a:ext cx="475488" cy="219456"/>
           </a:xfrm>
           <a:prstGeom prst="rect">
             <a:avLst/>
@@ -5579,34 +5559,98 @@
           <a:bodyPr wrap="square" lIns="0" tIns="0" rIns="0" bIns="0" rtlCol="0" anchor="ctr"/>
           <a:lstStyle/>
           <a:p>
-            <a:pPr indent="0" marL="0">
-              <a:buNone/>
-            </a:pPr>
-            <a:r>
-              <a:rPr lang="en-US" sz="1100" b="1" dirty="0">
-                <a:solidFill>
-                  <a:srgbClr val="132A3A"/>
-                </a:solidFill>
-                <a:latin typeface="맑은 고딕" pitchFamily="34" charset="0"/>
-                <a:ea typeface="맑은 고딕" pitchFamily="34" charset="-122"/>
-                <a:cs typeface="맑은 고딕" pitchFamily="34" charset="-120"/>
-              </a:rPr>
-              <a:t>입지 정보</a:t>
-            </a:r>
-            <a:endParaRPr lang="en-US" sz="1100" dirty="0"/>
-          </a:p>
-        </p:txBody>
-      </p:sp>
-      <p:sp>
-        <p:nvSpPr>
-          <p:cNvPr id="8" name="Text 5"/>
-          <p:cNvSpPr/>
-          <p:nvPr/>
-        </p:nvSpPr>
-        <p:spPr>
-          <a:xfrm>
-            <a:off x="6053328" y="1801368"/>
-            <a:ext cx="1560003" cy="347472"/>
+            <a:pPr algn="ctr" indent="0" marL="0">
+              <a:buNone/>
+            </a:pPr>
+            <a:r>
+              <a:rPr lang="en-US" sz="950" b="1" dirty="0">
+                <a:solidFill>
+                  <a:srgbClr val="FFFFFF"/>
+                </a:solidFill>
+                <a:latin typeface="맑은 고딕" pitchFamily="34" charset="0"/>
+                <a:ea typeface="맑은 고딕" pitchFamily="34" charset="-122"/>
+                <a:cs typeface="맑은 고딕" pitchFamily="34" charset="-120"/>
+              </a:rPr>
+              <a:t>본건</a:t>
+            </a:r>
+            <a:endParaRPr lang="en-US" sz="950" dirty="0"/>
+          </a:p>
+        </p:txBody>
+      </p:sp>
+      <p:sp>
+        <p:nvSpPr>
+          <p:cNvPr id="9" name="Shape 6"/>
+          <p:cNvSpPr/>
+          <p:nvPr/>
+        </p:nvSpPr>
+        <p:spPr>
+          <a:xfrm>
+            <a:off x="566928" y="5673852"/>
+            <a:ext cx="155448" cy="155448"/>
+          </a:xfrm>
+          <a:prstGeom prst="ellipse">
+            <a:avLst/>
+          </a:prstGeom>
+          <a:solidFill>
+            <a:srgbClr val="1D4ED8"/>
+          </a:solidFill>
+          <a:ln w="9525">
+            <a:solidFill>
+              <a:srgbClr val="FFFFFF"/>
+            </a:solidFill>
+            <a:prstDash val="solid"/>
+          </a:ln>
+        </p:spPr>
+      </p:sp>
+      <p:sp>
+        <p:nvSpPr>
+          <p:cNvPr id="10" name="Text 7"/>
+          <p:cNvSpPr/>
+          <p:nvPr/>
+        </p:nvSpPr>
+        <p:spPr>
+          <a:xfrm>
+            <a:off x="566928" y="5673852"/>
+            <a:ext cx="155448" cy="155448"/>
+          </a:xfrm>
+          <a:prstGeom prst="rect">
+            <a:avLst/>
+          </a:prstGeom>
+          <a:noFill/>
+          <a:ln/>
+        </p:spPr>
+        <p:txBody>
+          <a:bodyPr wrap="square" lIns="0" tIns="0" rIns="0" bIns="0" rtlCol="0" anchor="ctr"/>
+          <a:lstStyle/>
+          <a:p>
+            <a:pPr algn="ctr" indent="0" marL="0">
+              <a:buNone/>
+            </a:pPr>
+            <a:r>
+              <a:rPr lang="en-US" sz="750" b="1" dirty="0">
+                <a:solidFill>
+                  <a:srgbClr val="FFFFFF"/>
+                </a:solidFill>
+                <a:latin typeface="맑은 고딕" pitchFamily="34" charset="0"/>
+                <a:ea typeface="맑은 고딕" pitchFamily="34" charset="-122"/>
+                <a:cs typeface="맑은 고딕" pitchFamily="34" charset="-120"/>
+              </a:rPr>
+              <a:t>1</a:t>
+            </a:r>
+            <a:endParaRPr lang="en-US" sz="750" dirty="0"/>
+          </a:p>
+        </p:txBody>
+      </p:sp>
+      <p:sp>
+        <p:nvSpPr>
+          <p:cNvPr id="11" name="Text 8"/>
+          <p:cNvSpPr/>
+          <p:nvPr/>
+        </p:nvSpPr>
+        <p:spPr>
+          <a:xfrm>
+            <a:off x="768096" y="5650992"/>
+            <a:ext cx="2322576" cy="201168"/>
           </a:xfrm>
           <a:prstGeom prst="rect">
             <a:avLst/>
@@ -5621,13 +5665,593 @@
           <a:lstStyle/>
           <a:p>
             <a:pPr indent="0" marL="0">
+              <a:buNone/>
+            </a:pPr>
+            <a:r>
+              <a:rPr lang="en-US" sz="850" dirty="0">
+                <a:solidFill>
+                  <a:srgbClr val="1E293B"/>
+                </a:solidFill>
+                <a:latin typeface="맑은 고딕" pitchFamily="34" charset="0"/>
+                <a:ea typeface="맑은 고딕" pitchFamily="34" charset="-122"/>
+                <a:cs typeface="맑은 고딕" pitchFamily="34" charset="-120"/>
+              </a:rPr>
+              <a:t>압구정역(3호선) 북 0.5km</a:t>
+            </a:r>
+            <a:endParaRPr lang="en-US" sz="850" dirty="0"/>
+          </a:p>
+        </p:txBody>
+      </p:sp>
+      <p:sp>
+        <p:nvSpPr>
+          <p:cNvPr id="12" name="Shape 9"/>
+          <p:cNvSpPr/>
+          <p:nvPr/>
+        </p:nvSpPr>
+        <p:spPr>
+          <a:xfrm>
+            <a:off x="3127248" y="5673852"/>
+            <a:ext cx="155448" cy="155448"/>
+          </a:xfrm>
+          <a:prstGeom prst="ellipse">
+            <a:avLst/>
+          </a:prstGeom>
+          <a:solidFill>
+            <a:srgbClr val="132A3A"/>
+          </a:solidFill>
+          <a:ln w="9525">
+            <a:solidFill>
+              <a:srgbClr val="FFFFFF"/>
+            </a:solidFill>
+            <a:prstDash val="solid"/>
+          </a:ln>
+        </p:spPr>
+      </p:sp>
+      <p:sp>
+        <p:nvSpPr>
+          <p:cNvPr id="13" name="Text 10"/>
+          <p:cNvSpPr/>
+          <p:nvPr/>
+        </p:nvSpPr>
+        <p:spPr>
+          <a:xfrm>
+            <a:off x="3127248" y="5673852"/>
+            <a:ext cx="155448" cy="155448"/>
+          </a:xfrm>
+          <a:prstGeom prst="rect">
+            <a:avLst/>
+          </a:prstGeom>
+          <a:noFill/>
+          <a:ln/>
+        </p:spPr>
+        <p:txBody>
+          <a:bodyPr wrap="square" lIns="0" tIns="0" rIns="0" bIns="0" rtlCol="0" anchor="ctr"/>
+          <a:lstStyle/>
+          <a:p>
+            <a:pPr algn="ctr" indent="0" marL="0">
+              <a:buNone/>
+            </a:pPr>
+            <a:r>
+              <a:rPr lang="en-US" sz="750" b="1" dirty="0">
+                <a:solidFill>
+                  <a:srgbClr val="FFFFFF"/>
+                </a:solidFill>
+                <a:latin typeface="맑은 고딕" pitchFamily="34" charset="0"/>
+                <a:ea typeface="맑은 고딕" pitchFamily="34" charset="-122"/>
+                <a:cs typeface="맑은 고딕" pitchFamily="34" charset="-120"/>
+              </a:rPr>
+              <a:t>2</a:t>
+            </a:r>
+            <a:endParaRPr lang="en-US" sz="750" dirty="0"/>
+          </a:p>
+        </p:txBody>
+      </p:sp>
+      <p:sp>
+        <p:nvSpPr>
+          <p:cNvPr id="14" name="Text 11"/>
+          <p:cNvSpPr/>
+          <p:nvPr/>
+        </p:nvSpPr>
+        <p:spPr>
+          <a:xfrm>
+            <a:off x="3328416" y="5650992"/>
+            <a:ext cx="2322576" cy="201168"/>
+          </a:xfrm>
+          <a:prstGeom prst="rect">
+            <a:avLst/>
+          </a:prstGeom>
+          <a:noFill/>
+          <a:ln/>
+        </p:spPr>
+        <p:txBody>
+          <a:bodyPr wrap="square" lIns="0" tIns="0" rIns="0" bIns="0" rtlCol="0" anchor="ctr">
+            <a:normAutofit/>
+          </a:bodyPr>
+          <a:lstStyle/>
+          <a:p>
+            <a:pPr indent="0" marL="0">
+              <a:buNone/>
+            </a:pPr>
+            <a:r>
+              <a:rPr lang="en-US" sz="850" dirty="0">
+                <a:solidFill>
+                  <a:srgbClr val="1E293B"/>
+                </a:solidFill>
+                <a:latin typeface="맑은 고딕" pitchFamily="34" charset="0"/>
+                <a:ea typeface="맑은 고딕" pitchFamily="34" charset="-122"/>
+                <a:cs typeface="맑은 고딕" pitchFamily="34" charset="-120"/>
+              </a:rPr>
+              <a:t>에듀카프 도보 2분</a:t>
+            </a:r>
+            <a:endParaRPr lang="en-US" sz="850" dirty="0"/>
+          </a:p>
+        </p:txBody>
+      </p:sp>
+      <p:sp>
+        <p:nvSpPr>
+          <p:cNvPr id="15" name="Shape 12"/>
+          <p:cNvSpPr/>
+          <p:nvPr/>
+        </p:nvSpPr>
+        <p:spPr>
+          <a:xfrm>
+            <a:off x="566928" y="5875020"/>
+            <a:ext cx="155448" cy="155448"/>
+          </a:xfrm>
+          <a:prstGeom prst="ellipse">
+            <a:avLst/>
+          </a:prstGeom>
+          <a:solidFill>
+            <a:srgbClr val="132A3A"/>
+          </a:solidFill>
+          <a:ln w="9525">
+            <a:solidFill>
+              <a:srgbClr val="FFFFFF"/>
+            </a:solidFill>
+            <a:prstDash val="solid"/>
+          </a:ln>
+        </p:spPr>
+      </p:sp>
+      <p:sp>
+        <p:nvSpPr>
+          <p:cNvPr id="16" name="Text 13"/>
+          <p:cNvSpPr/>
+          <p:nvPr/>
+        </p:nvSpPr>
+        <p:spPr>
+          <a:xfrm>
+            <a:off x="566928" y="5875020"/>
+            <a:ext cx="155448" cy="155448"/>
+          </a:xfrm>
+          <a:prstGeom prst="rect">
+            <a:avLst/>
+          </a:prstGeom>
+          <a:noFill/>
+          <a:ln/>
+        </p:spPr>
+        <p:txBody>
+          <a:bodyPr wrap="square" lIns="0" tIns="0" rIns="0" bIns="0" rtlCol="0" anchor="ctr"/>
+          <a:lstStyle/>
+          <a:p>
+            <a:pPr algn="ctr" indent="0" marL="0">
+              <a:buNone/>
+            </a:pPr>
+            <a:r>
+              <a:rPr lang="en-US" sz="750" b="1" dirty="0">
+                <a:solidFill>
+                  <a:srgbClr val="FFFFFF"/>
+                </a:solidFill>
+                <a:latin typeface="맑은 고딕" pitchFamily="34" charset="0"/>
+                <a:ea typeface="맑은 고딕" pitchFamily="34" charset="-122"/>
+                <a:cs typeface="맑은 고딕" pitchFamily="34" charset="-120"/>
+              </a:rPr>
+              <a:t>3</a:t>
+            </a:r>
+            <a:endParaRPr lang="en-US" sz="750" dirty="0"/>
+          </a:p>
+        </p:txBody>
+      </p:sp>
+      <p:sp>
+        <p:nvSpPr>
+          <p:cNvPr id="17" name="Text 14"/>
+          <p:cNvSpPr/>
+          <p:nvPr/>
+        </p:nvSpPr>
+        <p:spPr>
+          <a:xfrm>
+            <a:off x="768096" y="5852160"/>
+            <a:ext cx="2322576" cy="201168"/>
+          </a:xfrm>
+          <a:prstGeom prst="rect">
+            <a:avLst/>
+          </a:prstGeom>
+          <a:noFill/>
+          <a:ln/>
+        </p:spPr>
+        <p:txBody>
+          <a:bodyPr wrap="square" lIns="0" tIns="0" rIns="0" bIns="0" rtlCol="0" anchor="ctr">
+            <a:normAutofit/>
+          </a:bodyPr>
+          <a:lstStyle/>
+          <a:p>
+            <a:pPr indent="0" marL="0">
+              <a:buNone/>
+            </a:pPr>
+            <a:r>
+              <a:rPr lang="en-US" sz="850" dirty="0">
+                <a:solidFill>
+                  <a:srgbClr val="1E293B"/>
+                </a:solidFill>
+                <a:latin typeface="맑은 고딕" pitchFamily="34" charset="0"/>
+                <a:ea typeface="맑은 고딕" pitchFamily="34" charset="-122"/>
+                <a:cs typeface="맑은 고딕" pitchFamily="34" charset="-120"/>
+              </a:rPr>
+              <a:t>강남을지대학교병원 도보 4분</a:t>
+            </a:r>
+            <a:endParaRPr lang="en-US" sz="850" dirty="0"/>
+          </a:p>
+        </p:txBody>
+      </p:sp>
+      <p:sp>
+        <p:nvSpPr>
+          <p:cNvPr id="18" name="Shape 15"/>
+          <p:cNvSpPr/>
+          <p:nvPr/>
+        </p:nvSpPr>
+        <p:spPr>
+          <a:xfrm>
+            <a:off x="3127248" y="5875020"/>
+            <a:ext cx="155448" cy="155448"/>
+          </a:xfrm>
+          <a:prstGeom prst="ellipse">
+            <a:avLst/>
+          </a:prstGeom>
+          <a:solidFill>
+            <a:srgbClr val="132A3A"/>
+          </a:solidFill>
+          <a:ln w="9525">
+            <a:solidFill>
+              <a:srgbClr val="FFFFFF"/>
+            </a:solidFill>
+            <a:prstDash val="solid"/>
+          </a:ln>
+        </p:spPr>
+      </p:sp>
+      <p:sp>
+        <p:nvSpPr>
+          <p:cNvPr id="19" name="Text 16"/>
+          <p:cNvSpPr/>
+          <p:nvPr/>
+        </p:nvSpPr>
+        <p:spPr>
+          <a:xfrm>
+            <a:off x="3127248" y="5875020"/>
+            <a:ext cx="155448" cy="155448"/>
+          </a:xfrm>
+          <a:prstGeom prst="rect">
+            <a:avLst/>
+          </a:prstGeom>
+          <a:noFill/>
+          <a:ln/>
+        </p:spPr>
+        <p:txBody>
+          <a:bodyPr wrap="square" lIns="0" tIns="0" rIns="0" bIns="0" rtlCol="0" anchor="ctr"/>
+          <a:lstStyle/>
+          <a:p>
+            <a:pPr algn="ctr" indent="0" marL="0">
+              <a:buNone/>
+            </a:pPr>
+            <a:r>
+              <a:rPr lang="en-US" sz="750" b="1" dirty="0">
+                <a:solidFill>
+                  <a:srgbClr val="FFFFFF"/>
+                </a:solidFill>
+                <a:latin typeface="맑은 고딕" pitchFamily="34" charset="0"/>
+                <a:ea typeface="맑은 고딕" pitchFamily="34" charset="-122"/>
+                <a:cs typeface="맑은 고딕" pitchFamily="34" charset="-120"/>
+              </a:rPr>
+              <a:t>4</a:t>
+            </a:r>
+            <a:endParaRPr lang="en-US" sz="750" dirty="0"/>
+          </a:p>
+        </p:txBody>
+      </p:sp>
+      <p:sp>
+        <p:nvSpPr>
+          <p:cNvPr id="20" name="Text 17"/>
+          <p:cNvSpPr/>
+          <p:nvPr/>
+        </p:nvSpPr>
+        <p:spPr>
+          <a:xfrm>
+            <a:off x="3328416" y="5852160"/>
+            <a:ext cx="2322576" cy="201168"/>
+          </a:xfrm>
+          <a:prstGeom prst="rect">
+            <a:avLst/>
+          </a:prstGeom>
+          <a:noFill/>
+          <a:ln/>
+        </p:spPr>
+        <p:txBody>
+          <a:bodyPr wrap="square" lIns="0" tIns="0" rIns="0" bIns="0" rtlCol="0" anchor="ctr">
+            <a:normAutofit/>
+          </a:bodyPr>
+          <a:lstStyle/>
+          <a:p>
+            <a:pPr indent="0" marL="0">
+              <a:buNone/>
+            </a:pPr>
+            <a:r>
+              <a:rPr lang="en-US" sz="850" dirty="0">
+                <a:solidFill>
+                  <a:srgbClr val="1E293B"/>
+                </a:solidFill>
+                <a:latin typeface="맑은 고딕" pitchFamily="34" charset="0"/>
+                <a:ea typeface="맑은 고딕" pitchFamily="34" charset="-122"/>
+                <a:cs typeface="맑은 고딕" pitchFamily="34" charset="-120"/>
+              </a:rPr>
+              <a:t>뒤로수길 도보 4분</a:t>
+            </a:r>
+            <a:endParaRPr lang="en-US" sz="850" dirty="0"/>
+          </a:p>
+        </p:txBody>
+      </p:sp>
+      <p:sp>
+        <p:nvSpPr>
+          <p:cNvPr id="21" name="Shape 18"/>
+          <p:cNvSpPr/>
+          <p:nvPr/>
+        </p:nvSpPr>
+        <p:spPr>
+          <a:xfrm>
+            <a:off x="566928" y="6076188"/>
+            <a:ext cx="155448" cy="155448"/>
+          </a:xfrm>
+          <a:prstGeom prst="ellipse">
+            <a:avLst/>
+          </a:prstGeom>
+          <a:solidFill>
+            <a:srgbClr val="132A3A"/>
+          </a:solidFill>
+          <a:ln w="9525">
+            <a:solidFill>
+              <a:srgbClr val="FFFFFF"/>
+            </a:solidFill>
+            <a:prstDash val="solid"/>
+          </a:ln>
+        </p:spPr>
+      </p:sp>
+      <p:sp>
+        <p:nvSpPr>
+          <p:cNvPr id="22" name="Text 19"/>
+          <p:cNvSpPr/>
+          <p:nvPr/>
+        </p:nvSpPr>
+        <p:spPr>
+          <a:xfrm>
+            <a:off x="566928" y="6076188"/>
+            <a:ext cx="155448" cy="155448"/>
+          </a:xfrm>
+          <a:prstGeom prst="rect">
+            <a:avLst/>
+          </a:prstGeom>
+          <a:noFill/>
+          <a:ln/>
+        </p:spPr>
+        <p:txBody>
+          <a:bodyPr wrap="square" lIns="0" tIns="0" rIns="0" bIns="0" rtlCol="0" anchor="ctr"/>
+          <a:lstStyle/>
+          <a:p>
+            <a:pPr algn="ctr" indent="0" marL="0">
+              <a:buNone/>
+            </a:pPr>
+            <a:r>
+              <a:rPr lang="en-US" sz="750" b="1" dirty="0">
+                <a:solidFill>
+                  <a:srgbClr val="FFFFFF"/>
+                </a:solidFill>
+                <a:latin typeface="맑은 고딕" pitchFamily="34" charset="0"/>
+                <a:ea typeface="맑은 고딕" pitchFamily="34" charset="-122"/>
+                <a:cs typeface="맑은 고딕" pitchFamily="34" charset="-120"/>
+              </a:rPr>
+              <a:t>5</a:t>
+            </a:r>
+            <a:endParaRPr lang="en-US" sz="750" dirty="0"/>
+          </a:p>
+        </p:txBody>
+      </p:sp>
+      <p:sp>
+        <p:nvSpPr>
+          <p:cNvPr id="23" name="Text 20"/>
+          <p:cNvSpPr/>
+          <p:nvPr/>
+        </p:nvSpPr>
+        <p:spPr>
+          <a:xfrm>
+            <a:off x="768096" y="6053328"/>
+            <a:ext cx="2322576" cy="201168"/>
+          </a:xfrm>
+          <a:prstGeom prst="rect">
+            <a:avLst/>
+          </a:prstGeom>
+          <a:noFill/>
+          <a:ln/>
+        </p:spPr>
+        <p:txBody>
+          <a:bodyPr wrap="square" lIns="0" tIns="0" rIns="0" bIns="0" rtlCol="0" anchor="ctr">
+            <a:normAutofit/>
+          </a:bodyPr>
+          <a:lstStyle/>
+          <a:p>
+            <a:pPr indent="0" marL="0">
+              <a:buNone/>
+            </a:pPr>
+            <a:r>
+              <a:rPr lang="en-US" sz="850" dirty="0">
+                <a:solidFill>
+                  <a:srgbClr val="1E293B"/>
+                </a:solidFill>
+                <a:latin typeface="맑은 고딕" pitchFamily="34" charset="0"/>
+                <a:ea typeface="맑은 고딕" pitchFamily="34" charset="-122"/>
+                <a:cs typeface="맑은 고딕" pitchFamily="34" charset="-120"/>
+              </a:rPr>
+              <a:t>국제예술대학교 국제아트센터 남 0.5km</a:t>
+            </a:r>
+            <a:endParaRPr lang="en-US" sz="850" dirty="0"/>
+          </a:p>
+        </p:txBody>
+      </p:sp>
+      <p:sp>
+        <p:nvSpPr>
+          <p:cNvPr id="24" name="Text 21"/>
+          <p:cNvSpPr/>
+          <p:nvPr/>
+        </p:nvSpPr>
+        <p:spPr>
+          <a:xfrm>
+            <a:off x="3127248" y="6053328"/>
+            <a:ext cx="155448" cy="201168"/>
+          </a:xfrm>
+          <a:prstGeom prst="rect">
+            <a:avLst/>
+          </a:prstGeom>
+          <a:noFill/>
+          <a:ln/>
+        </p:spPr>
+        <p:txBody>
+          <a:bodyPr wrap="square" lIns="0" tIns="0" rIns="0" bIns="0" rtlCol="0" anchor="ctr"/>
+          <a:lstStyle/>
+          <a:p>
+            <a:pPr algn="ctr" indent="0" marL="0">
+              <a:buNone/>
+            </a:pPr>
+            <a:r>
+              <a:rPr lang="en-US" sz="1000" b="1" dirty="0">
+                <a:solidFill>
+                  <a:srgbClr val="B8860B"/>
+                </a:solidFill>
+                <a:latin typeface="맑은 고딕" pitchFamily="34" charset="0"/>
+                <a:ea typeface="맑은 고딕" pitchFamily="34" charset="-122"/>
+                <a:cs typeface="맑은 고딕" pitchFamily="34" charset="-120"/>
+              </a:rPr>
+              <a:t>╌</a:t>
+            </a:r>
+            <a:endParaRPr lang="en-US" sz="1000" dirty="0"/>
+          </a:p>
+        </p:txBody>
+      </p:sp>
+      <p:sp>
+        <p:nvSpPr>
+          <p:cNvPr id="25" name="Text 22"/>
+          <p:cNvSpPr/>
+          <p:nvPr/>
+        </p:nvSpPr>
+        <p:spPr>
+          <a:xfrm>
+            <a:off x="3328416" y="6053328"/>
+            <a:ext cx="2322576" cy="201168"/>
+          </a:xfrm>
+          <a:prstGeom prst="rect">
+            <a:avLst/>
+          </a:prstGeom>
+          <a:noFill/>
+          <a:ln/>
+        </p:spPr>
+        <p:txBody>
+          <a:bodyPr wrap="square" lIns="0" tIns="0" rIns="0" bIns="0" rtlCol="0" anchor="ctr">
+            <a:normAutofit/>
+          </a:bodyPr>
+          <a:lstStyle/>
+          <a:p>
+            <a:pPr indent="0" marL="0">
+              <a:buNone/>
+            </a:pPr>
+            <a:r>
+              <a:rPr lang="en-US" sz="850" dirty="0">
+                <a:solidFill>
+                  <a:srgbClr val="1E293B"/>
+                </a:solidFill>
+                <a:latin typeface="맑은 고딕" pitchFamily="34" charset="0"/>
+                <a:ea typeface="맑은 고딕" pitchFamily="34" charset="-122"/>
+                <a:cs typeface="맑은 고딕" pitchFamily="34" charset="-120"/>
+              </a:rPr>
+              <a:t>도보 5분 반경 (약 400m)</a:t>
+            </a:r>
+            <a:endParaRPr lang="en-US" sz="850" dirty="0"/>
+          </a:p>
+        </p:txBody>
+      </p:sp>
+      <p:sp>
+        <p:nvSpPr>
+          <p:cNvPr id="26" name="Text 23"/>
+          <p:cNvSpPr/>
+          <p:nvPr/>
+        </p:nvSpPr>
+        <p:spPr>
+          <a:xfrm>
+            <a:off x="6053328" y="1481328"/>
+            <a:ext cx="5571439" cy="237744"/>
+          </a:xfrm>
+          <a:prstGeom prst="rect">
+            <a:avLst/>
+          </a:prstGeom>
+          <a:noFill/>
+          <a:ln/>
+        </p:spPr>
+        <p:txBody>
+          <a:bodyPr wrap="square" lIns="0" tIns="0" rIns="0" bIns="0" rtlCol="0" anchor="ctr"/>
+          <a:lstStyle/>
+          <a:p>
+            <a:pPr indent="0" marL="0">
+              <a:buNone/>
+            </a:pPr>
+            <a:r>
+              <a:rPr lang="en-US" sz="1100" b="1" dirty="0">
+                <a:solidFill>
+                  <a:srgbClr val="132A3A"/>
+                </a:solidFill>
+                <a:latin typeface="맑은 고딕" pitchFamily="34" charset="0"/>
+                <a:ea typeface="맑은 고딕" pitchFamily="34" charset="-122"/>
+                <a:cs typeface="맑은 고딕" pitchFamily="34" charset="-120"/>
+              </a:rPr>
+              <a:t>입지 정보</a:t>
+            </a:r>
+            <a:endParaRPr lang="en-US" sz="1100" dirty="0"/>
+          </a:p>
+        </p:txBody>
+      </p:sp>
+      <p:sp>
+        <p:nvSpPr>
+          <p:cNvPr id="27" name="Text 24"/>
+          <p:cNvSpPr/>
+          <p:nvPr/>
+        </p:nvSpPr>
+        <p:spPr>
+          <a:xfrm>
+            <a:off x="6053328" y="1801368"/>
+            <a:ext cx="1560003" cy="457200"/>
+          </a:xfrm>
+          <a:prstGeom prst="rect">
+            <a:avLst/>
+          </a:prstGeom>
+          <a:noFill/>
+          <a:ln/>
+        </p:spPr>
+        <p:txBody>
+          <a:bodyPr wrap="square" lIns="0" tIns="0" rIns="0" bIns="0" rtlCol="0" anchor="ctr">
+            <a:normAutofit/>
+          </a:bodyPr>
+          <a:lstStyle/>
+          <a:p>
+            <a:pPr indent="0" marL="0">
               <a:lnSpc>
                 <a:spcPct val="115000"/>
               </a:lnSpc>
               <a:buNone/>
             </a:pPr>
             <a:r>
-              <a:rPr lang="en-US" sz="1150" dirty="0">
+              <a:rPr lang="en-US" sz="1250" dirty="0">
                 <a:solidFill>
                   <a:srgbClr val="5B6B73"/>
                 </a:solidFill>
@@ -5637,20 +6261,20 @@
               </a:rPr>
               <a:t>소재지</a:t>
             </a:r>
-            <a:endParaRPr lang="en-US" sz="1150" dirty="0"/>
-          </a:p>
-        </p:txBody>
-      </p:sp>
-      <p:sp>
-        <p:nvSpPr>
-          <p:cNvPr id="9" name="Text 6"/>
+            <a:endParaRPr lang="en-US" sz="1250" dirty="0"/>
+          </a:p>
+        </p:txBody>
+      </p:sp>
+      <p:sp>
+        <p:nvSpPr>
+          <p:cNvPr id="28" name="Text 25"/>
           <p:cNvSpPr/>
           <p:nvPr/>
         </p:nvSpPr>
         <p:spPr>
           <a:xfrm>
             <a:off x="7613331" y="1801368"/>
-            <a:ext cx="4011436" cy="347472"/>
+            <a:ext cx="4011436" cy="457200"/>
           </a:xfrm>
           <a:prstGeom prst="rect">
             <a:avLst/>
@@ -5671,7 +6295,7 @@
               <a:buNone/>
             </a:pPr>
             <a:r>
-              <a:rPr lang="en-US" sz="1150" b="1" dirty="0">
+              <a:rPr lang="en-US" sz="1250" b="1" dirty="0">
                 <a:solidFill>
                   <a:srgbClr val="132A3A"/>
                 </a:solidFill>
@@ -5681,19 +6305,19 @@
               </a:rPr>
               <a:t>서울특별시 강남구 신사동 590</a:t>
             </a:r>
-            <a:endParaRPr lang="en-US" sz="1150" dirty="0"/>
-          </a:p>
-        </p:txBody>
-      </p:sp>
-      <p:sp>
-        <p:nvSpPr>
-          <p:cNvPr id="10" name="Shape 7"/>
-          <p:cNvSpPr/>
-          <p:nvPr/>
-        </p:nvSpPr>
-        <p:spPr>
-          <a:xfrm>
-            <a:off x="6053328" y="2148840"/>
+            <a:endParaRPr lang="en-US" sz="1250" dirty="0"/>
+          </a:p>
+        </p:txBody>
+      </p:sp>
+      <p:sp>
+        <p:nvSpPr>
+          <p:cNvPr id="29" name="Shape 26"/>
+          <p:cNvSpPr/>
+          <p:nvPr/>
+        </p:nvSpPr>
+        <p:spPr>
+          <a:xfrm>
+            <a:off x="6053328" y="2258568"/>
             <a:ext cx="5571439" cy="0"/>
           </a:xfrm>
           <a:prstGeom prst="line">
@@ -5710,14 +6334,14 @@
       </p:sp>
       <p:sp>
         <p:nvSpPr>
-          <p:cNvPr id="11" name="Text 8"/>
-          <p:cNvSpPr/>
-          <p:nvPr/>
-        </p:nvSpPr>
-        <p:spPr>
-          <a:xfrm>
-            <a:off x="6053328" y="2148840"/>
-            <a:ext cx="1560003" cy="347472"/>
+          <p:cNvPr id="30" name="Text 27"/>
+          <p:cNvSpPr/>
+          <p:nvPr/>
+        </p:nvSpPr>
+        <p:spPr>
+          <a:xfrm>
+            <a:off x="6053328" y="2258568"/>
+            <a:ext cx="1560003" cy="457200"/>
           </a:xfrm>
           <a:prstGeom prst="rect">
             <a:avLst/>
@@ -5738,7 +6362,7 @@
               <a:buNone/>
             </a:pPr>
             <a:r>
-              <a:rPr lang="en-US" sz="1150" dirty="0">
+              <a:rPr lang="en-US" sz="1250" dirty="0">
                 <a:solidFill>
                   <a:srgbClr val="5B6B73"/>
                 </a:solidFill>
@@ -5748,20 +6372,20 @@
               </a:rPr>
               <a:t>대중교통</a:t>
             </a:r>
-            <a:endParaRPr lang="en-US" sz="1150" dirty="0"/>
-          </a:p>
-        </p:txBody>
-      </p:sp>
-      <p:sp>
-        <p:nvSpPr>
-          <p:cNvPr id="12" name="Text 9"/>
-          <p:cNvSpPr/>
-          <p:nvPr/>
-        </p:nvSpPr>
-        <p:spPr>
-          <a:xfrm>
-            <a:off x="7613331" y="2148840"/>
-            <a:ext cx="4011436" cy="347472"/>
+            <a:endParaRPr lang="en-US" sz="1250" dirty="0"/>
+          </a:p>
+        </p:txBody>
+      </p:sp>
+      <p:sp>
+        <p:nvSpPr>
+          <p:cNvPr id="31" name="Text 28"/>
+          <p:cNvSpPr/>
+          <p:nvPr/>
+        </p:nvSpPr>
+        <p:spPr>
+          <a:xfrm>
+            <a:off x="7613331" y="2258568"/>
+            <a:ext cx="4011436" cy="457200"/>
           </a:xfrm>
           <a:prstGeom prst="rect">
             <a:avLst/>
@@ -5782,7 +6406,7 @@
               <a:buNone/>
             </a:pPr>
             <a:r>
-              <a:rPr lang="en-US" sz="1150" b="1" dirty="0">
+              <a:rPr lang="en-US" sz="1250" b="1" dirty="0">
                 <a:solidFill>
                   <a:srgbClr val="132A3A"/>
                 </a:solidFill>
@@ -5792,19 +6416,19 @@
               </a:rPr>
               <a:t>압구정역 3호선 도보 7분 (약 525m)</a:t>
             </a:r>
-            <a:endParaRPr lang="en-US" sz="1150" dirty="0"/>
-          </a:p>
-        </p:txBody>
-      </p:sp>
-      <p:sp>
-        <p:nvSpPr>
-          <p:cNvPr id="13" name="Shape 10"/>
-          <p:cNvSpPr/>
-          <p:nvPr/>
-        </p:nvSpPr>
-        <p:spPr>
-          <a:xfrm>
-            <a:off x="6053328" y="2496312"/>
+            <a:endParaRPr lang="en-US" sz="1250" dirty="0"/>
+          </a:p>
+        </p:txBody>
+      </p:sp>
+      <p:sp>
+        <p:nvSpPr>
+          <p:cNvPr id="32" name="Shape 29"/>
+          <p:cNvSpPr/>
+          <p:nvPr/>
+        </p:nvSpPr>
+        <p:spPr>
+          <a:xfrm>
+            <a:off x="6053328" y="2715768"/>
             <a:ext cx="5571439" cy="0"/>
           </a:xfrm>
           <a:prstGeom prst="line">
@@ -5821,14 +6445,14 @@
       </p:sp>
       <p:sp>
         <p:nvSpPr>
-          <p:cNvPr id="14" name="Text 11"/>
-          <p:cNvSpPr/>
-          <p:nvPr/>
-        </p:nvSpPr>
-        <p:spPr>
-          <a:xfrm>
-            <a:off x="6053328" y="2496312"/>
-            <a:ext cx="1560003" cy="347472"/>
+          <p:cNvPr id="33" name="Text 30"/>
+          <p:cNvSpPr/>
+          <p:nvPr/>
+        </p:nvSpPr>
+        <p:spPr>
+          <a:xfrm>
+            <a:off x="6053328" y="2715768"/>
+            <a:ext cx="1560003" cy="457200"/>
           </a:xfrm>
           <a:prstGeom prst="rect">
             <a:avLst/>
@@ -5849,7 +6473,7 @@
               <a:buNone/>
             </a:pPr>
             <a:r>
-              <a:rPr lang="en-US" sz="1150" dirty="0">
+              <a:rPr lang="en-US" sz="1250" dirty="0">
                 <a:solidFill>
                   <a:srgbClr val="5B6B73"/>
                 </a:solidFill>
@@ -5859,20 +6483,20 @@
               </a:rPr>
               <a:t>상권권역</a:t>
             </a:r>
-            <a:endParaRPr lang="en-US" sz="1150" dirty="0"/>
-          </a:p>
-        </p:txBody>
-      </p:sp>
-      <p:sp>
-        <p:nvSpPr>
-          <p:cNvPr id="15" name="Text 12"/>
-          <p:cNvSpPr/>
-          <p:nvPr/>
-        </p:nvSpPr>
-        <p:spPr>
-          <a:xfrm>
-            <a:off x="7613331" y="2496312"/>
-            <a:ext cx="4011436" cy="347472"/>
+            <a:endParaRPr lang="en-US" sz="1250" dirty="0"/>
+          </a:p>
+        </p:txBody>
+      </p:sp>
+      <p:sp>
+        <p:nvSpPr>
+          <p:cNvPr id="34" name="Text 31"/>
+          <p:cNvSpPr/>
+          <p:nvPr/>
+        </p:nvSpPr>
+        <p:spPr>
+          <a:xfrm>
+            <a:off x="7613331" y="2715768"/>
+            <a:ext cx="4011436" cy="457200"/>
           </a:xfrm>
           <a:prstGeom prst="rect">
             <a:avLst/>
@@ -5893,7 +6517,7 @@
               <a:buNone/>
             </a:pPr>
             <a:r>
-              <a:rPr lang="en-US" sz="1150" b="1" dirty="0">
+              <a:rPr lang="en-US" sz="1250" b="1" dirty="0">
                 <a:solidFill>
                   <a:srgbClr val="132A3A"/>
                 </a:solidFill>
@@ -5903,241 +6527,19 @@
               </a:rPr>
               <a:t>GBD 주요 상업·업무 권역</a:t>
             </a:r>
-            <a:endParaRPr lang="en-US" sz="1150" dirty="0"/>
-          </a:p>
-        </p:txBody>
-      </p:sp>
-      <p:sp>
-        <p:nvSpPr>
-          <p:cNvPr id="16" name="Shape 13"/>
-          <p:cNvSpPr/>
-          <p:nvPr/>
-        </p:nvSpPr>
-        <p:spPr>
-          <a:xfrm>
-            <a:off x="6053328" y="2843784"/>
-            <a:ext cx="5571439" cy="0"/>
-          </a:xfrm>
-          <a:prstGeom prst="line">
-            <a:avLst/>
-          </a:prstGeom>
-          <a:noFill/>
-          <a:ln w="3810">
-            <a:solidFill>
-              <a:srgbClr val="CBD5E0"/>
-            </a:solidFill>
-            <a:prstDash val="solid"/>
-          </a:ln>
-        </p:spPr>
-      </p:sp>
-      <p:sp>
-        <p:nvSpPr>
-          <p:cNvPr id="17" name="Text 14"/>
-          <p:cNvSpPr/>
-          <p:nvPr/>
-        </p:nvSpPr>
-        <p:spPr>
-          <a:xfrm>
-            <a:off x="6053328" y="2843784"/>
-            <a:ext cx="1560003" cy="347472"/>
-          </a:xfrm>
-          <a:prstGeom prst="rect">
-            <a:avLst/>
-          </a:prstGeom>
-          <a:noFill/>
-          <a:ln/>
-        </p:spPr>
-        <p:txBody>
-          <a:bodyPr wrap="square" lIns="0" tIns="0" rIns="0" bIns="0" rtlCol="0" anchor="ctr">
-            <a:normAutofit/>
-          </a:bodyPr>
-          <a:lstStyle/>
-          <a:p>
-            <a:pPr indent="0" marL="0">
-              <a:lnSpc>
-                <a:spcPct val="115000"/>
-              </a:lnSpc>
-              <a:buNone/>
-            </a:pPr>
-            <a:r>
-              <a:rPr lang="en-US" sz="1150" dirty="0">
-                <a:solidFill>
-                  <a:srgbClr val="5B6B73"/>
-                </a:solidFill>
-                <a:latin typeface="맑은 고딕" pitchFamily="34" charset="0"/>
-                <a:ea typeface="맑은 고딕" pitchFamily="34" charset="-122"/>
-                <a:cs typeface="맑은 고딕" pitchFamily="34" charset="-120"/>
-              </a:rPr>
-              <a:t>주요시설</a:t>
-            </a:r>
-            <a:endParaRPr lang="en-US" sz="1150" dirty="0"/>
-          </a:p>
-        </p:txBody>
-      </p:sp>
-      <p:sp>
-        <p:nvSpPr>
-          <p:cNvPr id="18" name="Text 15"/>
-          <p:cNvSpPr/>
-          <p:nvPr/>
-        </p:nvSpPr>
-        <p:spPr>
-          <a:xfrm>
-            <a:off x="7613331" y="2843784"/>
-            <a:ext cx="4011436" cy="347472"/>
-          </a:xfrm>
-          <a:prstGeom prst="rect">
-            <a:avLst/>
-          </a:prstGeom>
-          <a:noFill/>
-          <a:ln/>
-        </p:spPr>
-        <p:txBody>
-          <a:bodyPr wrap="square" lIns="0" tIns="0" rIns="0" bIns="0" rtlCol="0" anchor="ctr">
-            <a:normAutofit/>
-          </a:bodyPr>
-          <a:lstStyle/>
-          <a:p>
-            <a:pPr indent="0" marL="0">
-              <a:lnSpc>
-                <a:spcPct val="115000"/>
-              </a:lnSpc>
-              <a:buNone/>
-            </a:pPr>
-            <a:r>
-              <a:rPr lang="en-US" sz="1150" b="1" dirty="0">
-                <a:solidFill>
-                  <a:srgbClr val="132A3A"/>
-                </a:solidFill>
-                <a:latin typeface="맑은 고딕" pitchFamily="34" charset="0"/>
-                <a:ea typeface="맑은 고딕" pitchFamily="34" charset="-122"/>
-                <a:cs typeface="맑은 고딕" pitchFamily="34" charset="-120"/>
-              </a:rPr>
-              <a:t>토미아파트 도보 1분 (약 39m)</a:t>
-            </a:r>
-            <a:endParaRPr lang="en-US" sz="1150" dirty="0"/>
-          </a:p>
-        </p:txBody>
-      </p:sp>
-      <p:sp>
-        <p:nvSpPr>
-          <p:cNvPr id="19" name="Shape 16"/>
-          <p:cNvSpPr/>
-          <p:nvPr/>
-        </p:nvSpPr>
-        <p:spPr>
-          <a:xfrm>
-            <a:off x="6053328" y="3191256"/>
-            <a:ext cx="5571439" cy="0"/>
-          </a:xfrm>
-          <a:prstGeom prst="line">
-            <a:avLst/>
-          </a:prstGeom>
-          <a:noFill/>
-          <a:ln w="3810">
-            <a:solidFill>
-              <a:srgbClr val="CBD5E0"/>
-            </a:solidFill>
-            <a:prstDash val="solid"/>
-          </a:ln>
-        </p:spPr>
-      </p:sp>
-      <p:sp>
-        <p:nvSpPr>
-          <p:cNvPr id="20" name="Text 17"/>
-          <p:cNvSpPr/>
-          <p:nvPr/>
-        </p:nvSpPr>
-        <p:spPr>
-          <a:xfrm>
-            <a:off x="6053328" y="3191256"/>
-            <a:ext cx="1560003" cy="347472"/>
-          </a:xfrm>
-          <a:prstGeom prst="rect">
-            <a:avLst/>
-          </a:prstGeom>
-          <a:noFill/>
-          <a:ln/>
-        </p:spPr>
-        <p:txBody>
-          <a:bodyPr wrap="square" lIns="0" tIns="0" rIns="0" bIns="0" rtlCol="0" anchor="ctr">
-            <a:normAutofit/>
-          </a:bodyPr>
-          <a:lstStyle/>
-          <a:p>
-            <a:pPr indent="0" marL="0">
-              <a:lnSpc>
-                <a:spcPct val="115000"/>
-              </a:lnSpc>
-              <a:buNone/>
-            </a:pPr>
-            <a:r>
-              <a:rPr lang="en-US" sz="1150" dirty="0">
-                <a:solidFill>
-                  <a:srgbClr val="5B6B73"/>
-                </a:solidFill>
-                <a:latin typeface="맑은 고딕" pitchFamily="34" charset="0"/>
-                <a:ea typeface="맑은 고딕" pitchFamily="34" charset="-122"/>
-                <a:cs typeface="맑은 고딕" pitchFamily="34" charset="-120"/>
-              </a:rPr>
-              <a:t>주요시설</a:t>
-            </a:r>
-            <a:endParaRPr lang="en-US" sz="1150" dirty="0"/>
-          </a:p>
-        </p:txBody>
-      </p:sp>
-      <p:sp>
-        <p:nvSpPr>
-          <p:cNvPr id="21" name="Text 18"/>
-          <p:cNvSpPr/>
-          <p:nvPr/>
-        </p:nvSpPr>
-        <p:spPr>
-          <a:xfrm>
-            <a:off x="7613331" y="3191256"/>
-            <a:ext cx="4011436" cy="347472"/>
-          </a:xfrm>
-          <a:prstGeom prst="rect">
-            <a:avLst/>
-          </a:prstGeom>
-          <a:noFill/>
-          <a:ln/>
-        </p:spPr>
-        <p:txBody>
-          <a:bodyPr wrap="square" lIns="0" tIns="0" rIns="0" bIns="0" rtlCol="0" anchor="ctr">
-            <a:normAutofit/>
-          </a:bodyPr>
-          <a:lstStyle/>
-          <a:p>
-            <a:pPr indent="0" marL="0">
-              <a:lnSpc>
-                <a:spcPct val="115000"/>
-              </a:lnSpc>
-              <a:buNone/>
-            </a:pPr>
-            <a:r>
-              <a:rPr lang="en-US" sz="1150" b="1" dirty="0">
-                <a:solidFill>
-                  <a:srgbClr val="132A3A"/>
-                </a:solidFill>
-                <a:latin typeface="맑은 고딕" pitchFamily="34" charset="0"/>
-                <a:ea typeface="맑은 고딕" pitchFamily="34" charset="-122"/>
-                <a:cs typeface="맑은 고딕" pitchFamily="34" charset="-120"/>
-              </a:rPr>
-              <a:t>압구정아인빌아파트 도보 1분 (약 66m)</a:t>
-            </a:r>
-            <a:endParaRPr lang="en-US" sz="1150" dirty="0"/>
-          </a:p>
-        </p:txBody>
-      </p:sp>
-      <p:sp>
-        <p:nvSpPr>
-          <p:cNvPr id="22" name="Shape 19"/>
-          <p:cNvSpPr/>
-          <p:nvPr/>
-        </p:nvSpPr>
-        <p:spPr>
-          <a:xfrm>
-            <a:off x="6053328" y="3648456"/>
+            <a:endParaRPr lang="en-US" sz="1250" dirty="0"/>
+          </a:p>
+        </p:txBody>
+      </p:sp>
+      <p:sp>
+        <p:nvSpPr>
+          <p:cNvPr id="35" name="Shape 32"/>
+          <p:cNvSpPr/>
+          <p:nvPr/>
+        </p:nvSpPr>
+        <p:spPr>
+          <a:xfrm>
+            <a:off x="6053328" y="3282696"/>
             <a:ext cx="5571439" cy="877824"/>
           </a:xfrm>
           <a:prstGeom prst="roundRect">
@@ -6153,13 +6555,13 @@
       </p:sp>
       <p:sp>
         <p:nvSpPr>
-          <p:cNvPr id="23" name="Shape 20"/>
-          <p:cNvSpPr/>
-          <p:nvPr/>
-        </p:nvSpPr>
-        <p:spPr>
-          <a:xfrm>
-            <a:off x="6053328" y="3703320"/>
+          <p:cNvPr id="36" name="Shape 33"/>
+          <p:cNvSpPr/>
+          <p:nvPr/>
+        </p:nvSpPr>
+        <p:spPr>
+          <a:xfrm>
+            <a:off x="6053328" y="3337560"/>
             <a:ext cx="36576" cy="768096"/>
           </a:xfrm>
           <a:prstGeom prst="rect">
@@ -6173,13 +6575,13 @@
       </p:sp>
       <p:sp>
         <p:nvSpPr>
-          <p:cNvPr id="24" name="Text 21"/>
-          <p:cNvSpPr/>
-          <p:nvPr/>
-        </p:nvSpPr>
-        <p:spPr>
-          <a:xfrm>
-            <a:off x="6199632" y="3739896"/>
+          <p:cNvPr id="37" name="Text 34"/>
+          <p:cNvSpPr/>
+          <p:nvPr/>
+        </p:nvSpPr>
+        <p:spPr>
+          <a:xfrm>
+            <a:off x="6199632" y="3374136"/>
             <a:ext cx="5315407" cy="201168"/>
           </a:xfrm>
           <a:prstGeom prst="rect">
@@ -6212,13 +6614,13 @@
       </p:sp>
       <p:sp>
         <p:nvSpPr>
-          <p:cNvPr id="25" name="Text 22"/>
-          <p:cNvSpPr/>
-          <p:nvPr/>
-        </p:nvSpPr>
-        <p:spPr>
-          <a:xfrm>
-            <a:off x="6199632" y="3941064"/>
+          <p:cNvPr id="38" name="Text 35"/>
+          <p:cNvSpPr/>
+          <p:nvPr/>
+        </p:nvSpPr>
+        <p:spPr>
+          <a:xfrm>
+            <a:off x="6199632" y="3575304"/>
             <a:ext cx="5315407" cy="548640"/>
           </a:xfrm>
           <a:prstGeom prst="rect">
@@ -6279,7 +6681,7 @@
       </p:sp>
       <p:sp>
         <p:nvSpPr>
-          <p:cNvPr id="26" name="Text 23"/>
+          <p:cNvPr id="39" name="Text 36"/>
           <p:cNvSpPr/>
           <p:nvPr/>
         </p:nvSpPr>
@@ -6318,7 +6720,7 @@
       </p:sp>
       <p:sp>
         <p:nvSpPr>
-          <p:cNvPr id="27" name="Text 24"/>
+          <p:cNvPr id="40" name="Text 37"/>
           <p:cNvSpPr/>
           <p:nvPr/>
         </p:nvSpPr>
@@ -6454,46 +6856,7 @@
         </p:nvSpPr>
         <p:spPr>
           <a:xfrm>
-            <a:off x="1133856" y="457200"/>
-            <a:ext cx="10490911" cy="182880"/>
-          </a:xfrm>
-          <a:prstGeom prst="rect">
-            <a:avLst/>
-          </a:prstGeom>
-          <a:noFill/>
-          <a:ln/>
-        </p:spPr>
-        <p:txBody>
-          <a:bodyPr wrap="square" lIns="0" tIns="0" rIns="0" bIns="0" rtlCol="0" anchor="ctr"/>
-          <a:lstStyle/>
-          <a:p>
-            <a:pPr indent="0" marL="0">
-              <a:buNone/>
-            </a:pPr>
-            <a:r>
-              <a:rPr lang="en-US" sz="950" b="1" spc="200" kern="0" dirty="0">
-                <a:solidFill>
-                  <a:srgbClr val="B8860B"/>
-                </a:solidFill>
-                <a:latin typeface="Arial" pitchFamily="34" charset="0"/>
-                <a:ea typeface="Arial" pitchFamily="34" charset="-122"/>
-                <a:cs typeface="Arial" pitchFamily="34" charset="-120"/>
-              </a:rPr>
-              <a:t>Land &amp; Cadastral</a:t>
-            </a:r>
-            <a:endParaRPr lang="en-US" sz="950" dirty="0"/>
-          </a:p>
-        </p:txBody>
-      </p:sp>
-      <p:sp>
-        <p:nvSpPr>
-          <p:cNvPr id="5" name="Text 3"/>
-          <p:cNvSpPr/>
-          <p:nvPr/>
-        </p:nvSpPr>
-        <p:spPr>
-          <a:xfrm>
-            <a:off x="1133856" y="640080"/>
+            <a:off x="1133856" y="466344"/>
             <a:ext cx="10490911" cy="365760"/>
           </a:xfrm>
           <a:prstGeom prst="rect">
@@ -6528,7 +6891,7 @@
       </p:sp>
       <p:pic>
         <p:nvPicPr>
-          <p:cNvPr id="6" name="Image 0" descr="preencoded.png">    </p:cNvPr>
+          <p:cNvPr id="5" name="Image 0" descr="preencoded.png">    </p:cNvPr>
           <p:cNvPicPr>
             <a:picLocks noChangeAspect="1"/>
           </p:cNvPicPr>
@@ -6552,7 +6915,98 @@
       </p:pic>
       <p:sp>
         <p:nvSpPr>
-          <p:cNvPr id="7" name="Text 4"/>
+          <p:cNvPr id="6" name="Shape 3"/>
+          <p:cNvSpPr/>
+          <p:nvPr/>
+        </p:nvSpPr>
+        <p:spPr>
+          <a:xfrm>
+            <a:off x="2887054" y="3186662"/>
+            <a:ext cx="475488" cy="219456"/>
+          </a:xfrm>
+          <a:prstGeom prst="roundRect">
+            <a:avLst>
+              <a:gd name="adj" fmla="val 20833"/>
+            </a:avLst>
+          </a:prstGeom>
+          <a:solidFill>
+            <a:srgbClr val="DC2626"/>
+          </a:solidFill>
+          <a:ln w="12700">
+            <a:solidFill>
+              <a:srgbClr val="FFFFFF"/>
+            </a:solidFill>
+            <a:prstDash val="solid"/>
+          </a:ln>
+        </p:spPr>
+      </p:sp>
+      <p:sp>
+        <p:nvSpPr>
+          <p:cNvPr id="7" name="Shape 4"/>
+          <p:cNvSpPr/>
+          <p:nvPr/>
+        </p:nvSpPr>
+        <p:spPr>
+          <a:xfrm rot="10800000">
+            <a:off x="3069934" y="3396974"/>
+            <a:ext cx="109728" cy="64008"/>
+          </a:xfrm>
+          <a:prstGeom prst="triangle">
+            <a:avLst/>
+          </a:prstGeom>
+          <a:solidFill>
+            <a:srgbClr val="DC2626"/>
+          </a:solidFill>
+          <a:ln w="12700">
+            <a:solidFill>
+              <a:srgbClr val="DC2626"/>
+            </a:solidFill>
+            <a:prstDash val="solid"/>
+          </a:ln>
+        </p:spPr>
+      </p:sp>
+      <p:sp>
+        <p:nvSpPr>
+          <p:cNvPr id="8" name="Text 5"/>
+          <p:cNvSpPr/>
+          <p:nvPr/>
+        </p:nvSpPr>
+        <p:spPr>
+          <a:xfrm>
+            <a:off x="2887054" y="3186662"/>
+            <a:ext cx="475488" cy="219456"/>
+          </a:xfrm>
+          <a:prstGeom prst="rect">
+            <a:avLst/>
+          </a:prstGeom>
+          <a:noFill/>
+          <a:ln/>
+        </p:spPr>
+        <p:txBody>
+          <a:bodyPr wrap="square" lIns="0" tIns="0" rIns="0" bIns="0" rtlCol="0" anchor="ctr"/>
+          <a:lstStyle/>
+          <a:p>
+            <a:pPr algn="ctr" indent="0" marL="0">
+              <a:buNone/>
+            </a:pPr>
+            <a:r>
+              <a:rPr lang="en-US" sz="950" b="1" dirty="0">
+                <a:solidFill>
+                  <a:srgbClr val="FFFFFF"/>
+                </a:solidFill>
+                <a:latin typeface="맑은 고딕" pitchFamily="34" charset="0"/>
+                <a:ea typeface="맑은 고딕" pitchFamily="34" charset="-122"/>
+                <a:cs typeface="맑은 고딕" pitchFamily="34" charset="-120"/>
+              </a:rPr>
+              <a:t>본건</a:t>
+            </a:r>
+            <a:endParaRPr lang="en-US" sz="950" dirty="0"/>
+          </a:p>
+        </p:txBody>
+      </p:sp>
+      <p:sp>
+        <p:nvSpPr>
+          <p:cNvPr id="9" name="Text 6"/>
           <p:cNvSpPr/>
           <p:nvPr/>
         </p:nvSpPr>
@@ -6591,7 +7045,7 @@
       </p:sp>
       <p:sp>
         <p:nvSpPr>
-          <p:cNvPr id="8" name="Text 5"/>
+          <p:cNvPr id="10" name="Text 7"/>
           <p:cNvSpPr/>
           <p:nvPr/>
         </p:nvSpPr>
@@ -6635,7 +7089,7 @@
       </p:sp>
       <p:sp>
         <p:nvSpPr>
-          <p:cNvPr id="9" name="Text 6"/>
+          <p:cNvPr id="11" name="Text 8"/>
           <p:cNvSpPr/>
           <p:nvPr/>
         </p:nvSpPr>
@@ -6679,7 +7133,7 @@
       </p:sp>
       <p:sp>
         <p:nvSpPr>
-          <p:cNvPr id="10" name="Shape 7"/>
+          <p:cNvPr id="12" name="Shape 9"/>
           <p:cNvSpPr/>
           <p:nvPr/>
         </p:nvSpPr>
@@ -6702,7 +7156,7 @@
       </p:sp>
       <p:sp>
         <p:nvSpPr>
-          <p:cNvPr id="11" name="Text 8"/>
+          <p:cNvPr id="13" name="Text 10"/>
           <p:cNvSpPr/>
           <p:nvPr/>
         </p:nvSpPr>
@@ -6746,7 +7200,7 @@
       </p:sp>
       <p:sp>
         <p:nvSpPr>
-          <p:cNvPr id="12" name="Text 9"/>
+          <p:cNvPr id="14" name="Text 11"/>
           <p:cNvSpPr/>
           <p:nvPr/>
         </p:nvSpPr>
@@ -6790,7 +7244,7 @@
       </p:sp>
       <p:sp>
         <p:nvSpPr>
-          <p:cNvPr id="13" name="Shape 10"/>
+          <p:cNvPr id="15" name="Shape 12"/>
           <p:cNvSpPr/>
           <p:nvPr/>
         </p:nvSpPr>
@@ -6813,7 +7267,7 @@
       </p:sp>
       <p:sp>
         <p:nvSpPr>
-          <p:cNvPr id="14" name="Text 11"/>
+          <p:cNvPr id="16" name="Text 13"/>
           <p:cNvSpPr/>
           <p:nvPr/>
         </p:nvSpPr>
@@ -6857,7 +7311,7 @@
       </p:sp>
       <p:sp>
         <p:nvSpPr>
-          <p:cNvPr id="15" name="Text 12"/>
+          <p:cNvPr id="17" name="Text 14"/>
           <p:cNvSpPr/>
           <p:nvPr/>
         </p:nvSpPr>
@@ -6901,7 +7355,7 @@
       </p:sp>
       <p:sp>
         <p:nvSpPr>
-          <p:cNvPr id="16" name="Shape 13"/>
+          <p:cNvPr id="18" name="Shape 15"/>
           <p:cNvSpPr/>
           <p:nvPr/>
         </p:nvSpPr>
@@ -6924,7 +7378,7 @@
       </p:sp>
       <p:sp>
         <p:nvSpPr>
-          <p:cNvPr id="17" name="Text 14"/>
+          <p:cNvPr id="19" name="Text 16"/>
           <p:cNvSpPr/>
           <p:nvPr/>
         </p:nvSpPr>
@@ -6968,7 +7422,7 @@
       </p:sp>
       <p:sp>
         <p:nvSpPr>
-          <p:cNvPr id="18" name="Text 15"/>
+          <p:cNvPr id="20" name="Text 17"/>
           <p:cNvSpPr/>
           <p:nvPr/>
         </p:nvSpPr>
@@ -7012,7 +7466,7 @@
       </p:sp>
       <p:sp>
         <p:nvSpPr>
-          <p:cNvPr id="19" name="Shape 16"/>
+          <p:cNvPr id="21" name="Shape 18"/>
           <p:cNvSpPr/>
           <p:nvPr/>
         </p:nvSpPr>
@@ -7035,7 +7489,7 @@
       </p:sp>
       <p:sp>
         <p:nvSpPr>
-          <p:cNvPr id="20" name="Text 17"/>
+          <p:cNvPr id="22" name="Text 19"/>
           <p:cNvSpPr/>
           <p:nvPr/>
         </p:nvSpPr>
@@ -7079,7 +7533,7 @@
       </p:sp>
       <p:sp>
         <p:nvSpPr>
-          <p:cNvPr id="21" name="Text 18"/>
+          <p:cNvPr id="23" name="Text 20"/>
           <p:cNvSpPr/>
           <p:nvPr/>
         </p:nvSpPr>
@@ -7123,7 +7577,7 @@
       </p:sp>
       <p:sp>
         <p:nvSpPr>
-          <p:cNvPr id="22" name="Shape 19"/>
+          <p:cNvPr id="24" name="Shape 21"/>
           <p:cNvSpPr/>
           <p:nvPr/>
         </p:nvSpPr>
@@ -7146,7 +7600,7 @@
       </p:sp>
       <p:sp>
         <p:nvSpPr>
-          <p:cNvPr id="23" name="Text 20"/>
+          <p:cNvPr id="25" name="Text 22"/>
           <p:cNvSpPr/>
           <p:nvPr/>
         </p:nvSpPr>
@@ -7190,7 +7644,7 @@
       </p:sp>
       <p:sp>
         <p:nvSpPr>
-          <p:cNvPr id="24" name="Text 21"/>
+          <p:cNvPr id="26" name="Text 23"/>
           <p:cNvSpPr/>
           <p:nvPr/>
         </p:nvSpPr>
@@ -7234,7 +7688,7 @@
       </p:sp>
       <p:sp>
         <p:nvSpPr>
-          <p:cNvPr id="25" name="Shape 22"/>
+          <p:cNvPr id="27" name="Shape 24"/>
           <p:cNvSpPr/>
           <p:nvPr/>
         </p:nvSpPr>
@@ -7256,7 +7710,7 @@
       </p:sp>
       <p:sp>
         <p:nvSpPr>
-          <p:cNvPr id="26" name="Shape 23"/>
+          <p:cNvPr id="28" name="Shape 25"/>
           <p:cNvSpPr/>
           <p:nvPr/>
         </p:nvSpPr>
@@ -7276,7 +7730,7 @@
       </p:sp>
       <p:sp>
         <p:nvSpPr>
-          <p:cNvPr id="27" name="Text 24"/>
+          <p:cNvPr id="29" name="Text 26"/>
           <p:cNvSpPr/>
           <p:nvPr/>
         </p:nvSpPr>
@@ -7315,7 +7769,7 @@
       </p:sp>
       <p:sp>
         <p:nvSpPr>
-          <p:cNvPr id="28" name="Text 25"/>
+          <p:cNvPr id="30" name="Text 27"/>
           <p:cNvSpPr/>
           <p:nvPr/>
         </p:nvSpPr>
@@ -7406,7 +7860,7 @@
       </p:sp>
       <p:sp>
         <p:nvSpPr>
-          <p:cNvPr id="29" name="Text 26"/>
+          <p:cNvPr id="31" name="Text 28"/>
           <p:cNvSpPr/>
           <p:nvPr/>
         </p:nvSpPr>
@@ -7448,7 +7902,7 @@
       </p:sp>
       <p:sp>
         <p:nvSpPr>
-          <p:cNvPr id="30" name="Text 27"/>
+          <p:cNvPr id="32" name="Text 29"/>
           <p:cNvSpPr/>
           <p:nvPr/>
         </p:nvSpPr>
@@ -7487,7 +7941,7 @@
       </p:sp>
       <p:sp>
         <p:nvSpPr>
-          <p:cNvPr id="31" name="Text 28"/>
+          <p:cNvPr id="33" name="Text 30"/>
           <p:cNvSpPr/>
           <p:nvPr/>
         </p:nvSpPr>
@@ -7623,46 +8077,7 @@
         </p:nvSpPr>
         <p:spPr>
           <a:xfrm>
-            <a:off x="1133856" y="457200"/>
-            <a:ext cx="10490911" cy="182880"/>
-          </a:xfrm>
-          <a:prstGeom prst="rect">
-            <a:avLst/>
-          </a:prstGeom>
-          <a:noFill/>
-          <a:ln/>
-        </p:spPr>
-        <p:txBody>
-          <a:bodyPr wrap="square" lIns="0" tIns="0" rIns="0" bIns="0" rtlCol="0" anchor="ctr"/>
-          <a:lstStyle/>
-          <a:p>
-            <a:pPr indent="0" marL="0">
-              <a:buNone/>
-            </a:pPr>
-            <a:r>
-              <a:rPr lang="en-US" sz="950" b="1" spc="200" kern="0" dirty="0">
-                <a:solidFill>
-                  <a:srgbClr val="B8860B"/>
-                </a:solidFill>
-                <a:latin typeface="Arial" pitchFamily="34" charset="0"/>
-                <a:ea typeface="Arial" pitchFamily="34" charset="-122"/>
-                <a:cs typeface="Arial" pitchFamily="34" charset="-120"/>
-              </a:rPr>
-              <a:t>렌트롤</a:t>
-            </a:r>
-            <a:endParaRPr lang="en-US" sz="950" dirty="0"/>
-          </a:p>
-        </p:txBody>
-      </p:sp>
-      <p:sp>
-        <p:nvSpPr>
-          <p:cNvPr id="5" name="Text 3"/>
-          <p:cNvSpPr/>
-          <p:nvPr/>
-        </p:nvSpPr>
-        <p:spPr>
-          <a:xfrm>
-            <a:off x="1133856" y="640080"/>
+            <a:off x="1133856" y="466344"/>
             <a:ext cx="10490911" cy="365760"/>
           </a:xfrm>
           <a:prstGeom prst="rect">
@@ -7697,7 +8112,7 @@
       </p:sp>
       <p:sp>
         <p:nvSpPr>
-          <p:cNvPr id="6" name="Shape 4"/>
+          <p:cNvPr id="5" name="Shape 3"/>
           <p:cNvSpPr/>
           <p:nvPr/>
         </p:nvSpPr>
@@ -7724,7 +8139,7 @@
       </p:sp>
       <p:sp>
         <p:nvSpPr>
-          <p:cNvPr id="7" name="Shape 5"/>
+          <p:cNvPr id="6" name="Shape 4"/>
           <p:cNvSpPr/>
           <p:nvPr/>
         </p:nvSpPr>
@@ -7751,7 +8166,7 @@
       </p:sp>
       <p:sp>
         <p:nvSpPr>
-          <p:cNvPr id="8" name="Text 6"/>
+          <p:cNvPr id="7" name="Text 5"/>
           <p:cNvSpPr/>
           <p:nvPr/>
         </p:nvSpPr>
@@ -7790,7 +8205,7 @@
       </p:sp>
       <p:sp>
         <p:nvSpPr>
-          <p:cNvPr id="9" name="Text 7"/>
+          <p:cNvPr id="8" name="Text 6"/>
           <p:cNvSpPr/>
           <p:nvPr/>
         </p:nvSpPr>
@@ -7829,7 +8244,7 @@
       </p:sp>
       <p:sp>
         <p:nvSpPr>
-          <p:cNvPr id="10" name="Text 8"/>
+          <p:cNvPr id="9" name="Text 7"/>
           <p:cNvSpPr/>
           <p:nvPr/>
         </p:nvSpPr>
@@ -7871,7 +8286,7 @@
       </p:sp>
       <p:sp>
         <p:nvSpPr>
-          <p:cNvPr id="11" name="Shape 9"/>
+          <p:cNvPr id="10" name="Shape 8"/>
           <p:cNvSpPr/>
           <p:nvPr/>
         </p:nvSpPr>
@@ -7894,7 +8309,7 @@
       </p:sp>
       <p:sp>
         <p:nvSpPr>
-          <p:cNvPr id="12" name="Shape 10"/>
+          <p:cNvPr id="11" name="Shape 9"/>
           <p:cNvSpPr/>
           <p:nvPr/>
         </p:nvSpPr>
@@ -7914,7 +8329,7 @@
       </p:sp>
       <p:sp>
         <p:nvSpPr>
-          <p:cNvPr id="13" name="Text 11"/>
+          <p:cNvPr id="12" name="Text 10"/>
           <p:cNvSpPr/>
           <p:nvPr/>
         </p:nvSpPr>
@@ -7956,7 +8371,7 @@
       </p:sp>
       <p:sp>
         <p:nvSpPr>
-          <p:cNvPr id="14" name="Shape 12"/>
+          <p:cNvPr id="13" name="Shape 11"/>
           <p:cNvSpPr/>
           <p:nvPr/>
         </p:nvSpPr>
@@ -7976,7 +8391,7 @@
       </p:sp>
       <p:sp>
         <p:nvSpPr>
-          <p:cNvPr id="15" name="Text 13"/>
+          <p:cNvPr id="14" name="Text 12"/>
           <p:cNvSpPr/>
           <p:nvPr/>
         </p:nvSpPr>
@@ -8018,7 +8433,7 @@
       </p:sp>
       <p:sp>
         <p:nvSpPr>
-          <p:cNvPr id="16" name="Shape 14"/>
+          <p:cNvPr id="15" name="Shape 13"/>
           <p:cNvSpPr/>
           <p:nvPr/>
         </p:nvSpPr>
@@ -8038,7 +8453,7 @@
       </p:sp>
       <p:sp>
         <p:nvSpPr>
-          <p:cNvPr id="17" name="Text 15"/>
+          <p:cNvPr id="16" name="Text 14"/>
           <p:cNvSpPr/>
           <p:nvPr/>
         </p:nvSpPr>
@@ -8080,7 +8495,7 @@
       </p:sp>
       <p:sp>
         <p:nvSpPr>
-          <p:cNvPr id="18" name="Shape 16"/>
+          <p:cNvPr id="17" name="Shape 15"/>
           <p:cNvSpPr/>
           <p:nvPr/>
         </p:nvSpPr>
@@ -8100,7 +8515,7 @@
       </p:sp>
       <p:sp>
         <p:nvSpPr>
-          <p:cNvPr id="19" name="Text 17"/>
+          <p:cNvPr id="18" name="Text 16"/>
           <p:cNvSpPr/>
           <p:nvPr/>
         </p:nvSpPr>
@@ -8142,7 +8557,7 @@
       </p:sp>
       <p:sp>
         <p:nvSpPr>
-          <p:cNvPr id="20" name="Text 18"/>
+          <p:cNvPr id="19" name="Text 17"/>
           <p:cNvSpPr/>
           <p:nvPr/>
         </p:nvSpPr>
@@ -8181,7 +8596,7 @@
       </p:sp>
       <p:sp>
         <p:nvSpPr>
-          <p:cNvPr id="21" name="Text 19"/>
+          <p:cNvPr id="20" name="Text 18"/>
           <p:cNvSpPr/>
           <p:nvPr/>
         </p:nvSpPr>
@@ -8317,46 +8732,7 @@
         </p:nvSpPr>
         <p:spPr>
           <a:xfrm>
-            <a:off x="1133856" y="457200"/>
-            <a:ext cx="10490911" cy="182880"/>
-          </a:xfrm>
-          <a:prstGeom prst="rect">
-            <a:avLst/>
-          </a:prstGeom>
-          <a:noFill/>
-          <a:ln/>
-        </p:spPr>
-        <p:txBody>
-          <a:bodyPr wrap="square" lIns="0" tIns="0" rIns="0" bIns="0" rtlCol="0" anchor="ctr"/>
-          <a:lstStyle/>
-          <a:p>
-            <a:pPr indent="0" marL="0">
-              <a:buNone/>
-            </a:pPr>
-            <a:r>
-              <a:rPr lang="en-US" sz="950" b="1" spc="200" kern="0" dirty="0">
-                <a:solidFill>
-                  <a:srgbClr val="B8860B"/>
-                </a:solidFill>
-                <a:latin typeface="Arial" pitchFamily="34" charset="0"/>
-                <a:ea typeface="Arial" pitchFamily="34" charset="-122"/>
-                <a:cs typeface="Arial" pitchFamily="34" charset="-120"/>
-              </a:rPr>
-              <a:t>수익률</a:t>
-            </a:r>
-            <a:endParaRPr lang="en-US" sz="950" dirty="0"/>
-          </a:p>
-        </p:txBody>
-      </p:sp>
-      <p:sp>
-        <p:nvSpPr>
-          <p:cNvPr id="5" name="Text 3"/>
-          <p:cNvSpPr/>
-          <p:nvPr/>
-        </p:nvSpPr>
-        <p:spPr>
-          <a:xfrm>
-            <a:off x="1133856" y="640080"/>
+            <a:off x="1133856" y="466344"/>
             <a:ext cx="10490911" cy="365760"/>
           </a:xfrm>
           <a:prstGeom prst="rect">
@@ -8391,18 +8767,18 @@
       </p:sp>
       <p:sp>
         <p:nvSpPr>
-          <p:cNvPr id="6" name="Shape 4"/>
-          <p:cNvSpPr/>
-          <p:nvPr/>
-        </p:nvSpPr>
-        <p:spPr>
-          <a:xfrm>
-            <a:off x="566928" y="1371600"/>
-            <a:ext cx="5120640" cy="3840480"/>
+          <p:cNvPr id="5" name="Shape 3"/>
+          <p:cNvSpPr/>
+          <p:nvPr/>
+        </p:nvSpPr>
+        <p:spPr>
+          <a:xfrm>
+            <a:off x="566928" y="1325880"/>
+            <a:ext cx="5120640" cy="4023360"/>
           </a:xfrm>
           <a:prstGeom prst="roundRect">
             <a:avLst>
-              <a:gd name="adj" fmla="val 1905"/>
+              <a:gd name="adj" fmla="val 1818"/>
             </a:avLst>
           </a:prstGeom>
           <a:solidFill>
@@ -8418,18 +8794,18 @@
       </p:sp>
       <p:sp>
         <p:nvSpPr>
-          <p:cNvPr id="7" name="Shape 5"/>
-          <p:cNvSpPr/>
-          <p:nvPr/>
-        </p:nvSpPr>
-        <p:spPr>
-          <a:xfrm>
-            <a:off x="795528" y="1600200"/>
-            <a:ext cx="4663440" cy="1005840"/>
+          <p:cNvPr id="6" name="Shape 4"/>
+          <p:cNvSpPr/>
+          <p:nvPr/>
+        </p:nvSpPr>
+        <p:spPr>
+          <a:xfrm>
+            <a:off x="795528" y="1508760"/>
+            <a:ext cx="4663440" cy="566928"/>
           </a:xfrm>
           <a:prstGeom prst="roundRect">
             <a:avLst>
-              <a:gd name="adj" fmla="val 7273"/>
+              <a:gd name="adj" fmla="val 12903"/>
             </a:avLst>
           </a:prstGeom>
           <a:solidFill>
@@ -8440,69 +8816,71 @@
       </p:sp>
       <p:sp>
         <p:nvSpPr>
+          <p:cNvPr id="7" name="Text 5"/>
+          <p:cNvSpPr/>
+          <p:nvPr/>
+        </p:nvSpPr>
+        <p:spPr>
+          <a:xfrm>
+            <a:off x="978408" y="1581912"/>
+            <a:ext cx="2880360" cy="420624"/>
+          </a:xfrm>
+          <a:prstGeom prst="rect">
+            <a:avLst/>
+          </a:prstGeom>
+          <a:noFill/>
+          <a:ln/>
+        </p:spPr>
+        <p:txBody>
+          <a:bodyPr wrap="square" lIns="0" tIns="0" rIns="0" bIns="0" rtlCol="0" anchor="ctr">
+            <a:normAutofit/>
+          </a:bodyPr>
+          <a:lstStyle/>
+          <a:p>
+            <a:pPr indent="0" marL="0">
+              <a:buNone/>
+            </a:pPr>
+            <a:r>
+              <a:rPr lang="en-US" sz="1050" b="1" dirty="0">
+                <a:solidFill>
+                  <a:srgbClr val="FFFFFF"/>
+                </a:solidFill>
+                <a:latin typeface="맑은 고딕" pitchFamily="34" charset="0"/>
+                <a:ea typeface="맑은 고딕" pitchFamily="34" charset="-122"/>
+                <a:cs typeface="맑은 고딕" pitchFamily="34" charset="-120"/>
+              </a:rPr>
+              <a:t>임대수익률 (Gross, 매매가−보증금 대비)</a:t>
+            </a:r>
+            <a:endParaRPr lang="en-US" sz="1050" dirty="0"/>
+          </a:p>
+        </p:txBody>
+      </p:sp>
+      <p:sp>
+        <p:nvSpPr>
           <p:cNvPr id="8" name="Text 6"/>
           <p:cNvSpPr/>
           <p:nvPr/>
         </p:nvSpPr>
         <p:spPr>
           <a:xfrm>
-            <a:off x="1024128" y="1600200"/>
-            <a:ext cx="2286000" cy="1005840"/>
-          </a:xfrm>
-          <a:prstGeom prst="rect">
-            <a:avLst/>
-          </a:prstGeom>
-          <a:noFill/>
-          <a:ln/>
-        </p:spPr>
-        <p:txBody>
-          <a:bodyPr wrap="square" rtlCol="0" anchor="ctr"/>
-          <a:lstStyle/>
-          <a:p>
-            <a:pPr indent="0" marL="0">
-              <a:buNone/>
-            </a:pPr>
-            <a:r>
-              <a:rPr lang="en-US" sz="1600" b="1" dirty="0">
-                <a:solidFill>
-                  <a:srgbClr val="FFFFFF"/>
-                </a:solidFill>
-                <a:latin typeface="맑은 고딕" pitchFamily="34" charset="0"/>
-                <a:ea typeface="맑은 고딕" pitchFamily="34" charset="-122"/>
-                <a:cs typeface="맑은 고딕" pitchFamily="34" charset="-120"/>
-              </a:rPr>
-              <a:t>수익률</a:t>
-            </a:r>
-            <a:endParaRPr lang="en-US" sz="1600" dirty="0"/>
-          </a:p>
-        </p:txBody>
-      </p:sp>
-      <p:sp>
-        <p:nvSpPr>
-          <p:cNvPr id="9" name="Text 7"/>
-          <p:cNvSpPr/>
-          <p:nvPr/>
-        </p:nvSpPr>
-        <p:spPr>
-          <a:xfrm>
-            <a:off x="2487168" y="1600200"/>
-            <a:ext cx="2743200" cy="1005840"/>
-          </a:xfrm>
-          <a:prstGeom prst="rect">
-            <a:avLst/>
-          </a:prstGeom>
-          <a:noFill/>
-          <a:ln/>
-        </p:spPr>
-        <p:txBody>
-          <a:bodyPr wrap="square" rtlCol="0" anchor="ctr"/>
+            <a:off x="3904488" y="1581912"/>
+            <a:ext cx="1417320" cy="420624"/>
+          </a:xfrm>
+          <a:prstGeom prst="rect">
+            <a:avLst/>
+          </a:prstGeom>
+          <a:noFill/>
+          <a:ln/>
+        </p:spPr>
+        <p:txBody>
+          <a:bodyPr wrap="square" lIns="0" tIns="0" rIns="0" bIns="0" rtlCol="0" anchor="ctr"/>
           <a:lstStyle/>
           <a:p>
             <a:pPr algn="r" indent="0" marL="0">
               <a:buNone/>
             </a:pPr>
             <a:r>
-              <a:rPr lang="en-US" sz="2800" b="1" dirty="0">
+              <a:rPr lang="en-US" sz="2400" b="1" dirty="0">
                 <a:solidFill>
                   <a:srgbClr val="B8860B"/>
                 </a:solidFill>
@@ -8512,7 +8890,46 @@
               </a:rPr>
               <a:t>0.00%</a:t>
             </a:r>
-            <a:endParaRPr lang="en-US" sz="2800" dirty="0"/>
+            <a:endParaRPr lang="en-US" sz="2400" dirty="0"/>
+          </a:p>
+        </p:txBody>
+      </p:sp>
+      <p:sp>
+        <p:nvSpPr>
+          <p:cNvPr id="9" name="Text 7"/>
+          <p:cNvSpPr/>
+          <p:nvPr/>
+        </p:nvSpPr>
+        <p:spPr>
+          <a:xfrm>
+            <a:off x="886968" y="2185416"/>
+            <a:ext cx="2743200" cy="347472"/>
+          </a:xfrm>
+          <a:prstGeom prst="rect">
+            <a:avLst/>
+          </a:prstGeom>
+          <a:noFill/>
+          <a:ln/>
+        </p:spPr>
+        <p:txBody>
+          <a:bodyPr wrap="square" rtlCol="0" anchor="ctr"/>
+          <a:lstStyle/>
+          <a:p>
+            <a:pPr indent="0" marL="0">
+              <a:buNone/>
+            </a:pPr>
+            <a:r>
+              <a:rPr lang="en-US" sz="1100" dirty="0">
+                <a:solidFill>
+                  <a:srgbClr val="5B6B73"/>
+                </a:solidFill>
+                <a:latin typeface="맑은 고딕" pitchFamily="34" charset="0"/>
+                <a:ea typeface="맑은 고딕" pitchFamily="34" charset="-122"/>
+                <a:cs typeface="맑은 고딕" pitchFamily="34" charset="-120"/>
+              </a:rPr>
+              <a:t>연간 임대수입</a:t>
+            </a:r>
+            <a:endParaRPr lang="en-US" sz="1100" dirty="0"/>
           </a:p>
         </p:txBody>
       </p:sp>
@@ -8524,46 +8941,7 @@
         </p:nvSpPr>
         <p:spPr>
           <a:xfrm>
-            <a:off x="886968" y="2834640"/>
-            <a:ext cx="2743200" cy="347472"/>
-          </a:xfrm>
-          <a:prstGeom prst="rect">
-            <a:avLst/>
-          </a:prstGeom>
-          <a:noFill/>
-          <a:ln/>
-        </p:spPr>
-        <p:txBody>
-          <a:bodyPr wrap="square" rtlCol="0" anchor="ctr"/>
-          <a:lstStyle/>
-          <a:p>
-            <a:pPr indent="0" marL="0">
-              <a:buNone/>
-            </a:pPr>
-            <a:r>
-              <a:rPr lang="en-US" sz="1100" dirty="0">
-                <a:solidFill>
-                  <a:srgbClr val="5B6B73"/>
-                </a:solidFill>
-                <a:latin typeface="맑은 고딕" pitchFamily="34" charset="0"/>
-                <a:ea typeface="맑은 고딕" pitchFamily="34" charset="-122"/>
-                <a:cs typeface="맑은 고딕" pitchFamily="34" charset="-120"/>
-              </a:rPr>
-              <a:t>연간 임대수입</a:t>
-            </a:r>
-            <a:endParaRPr lang="en-US" sz="1100" dirty="0"/>
-          </a:p>
-        </p:txBody>
-      </p:sp>
-      <p:sp>
-        <p:nvSpPr>
-          <p:cNvPr id="11" name="Text 9"/>
-          <p:cNvSpPr/>
-          <p:nvPr/>
-        </p:nvSpPr>
-        <p:spPr>
-          <a:xfrm>
-            <a:off x="3127248" y="2834640"/>
+            <a:off x="3127248" y="2185416"/>
             <a:ext cx="2194560" cy="347472"/>
           </a:xfrm>
           <a:prstGeom prst="rect">
@@ -8596,13 +8974,13 @@
       </p:sp>
       <p:sp>
         <p:nvSpPr>
-          <p:cNvPr id="12" name="Shape 10"/>
-          <p:cNvSpPr/>
-          <p:nvPr/>
-        </p:nvSpPr>
-        <p:spPr>
-          <a:xfrm>
-            <a:off x="795528" y="3182112"/>
+          <p:cNvPr id="11" name="Shape 9"/>
+          <p:cNvSpPr/>
+          <p:nvPr/>
+        </p:nvSpPr>
+        <p:spPr>
+          <a:xfrm>
+            <a:off x="795528" y="2532888"/>
             <a:ext cx="4663440" cy="0"/>
           </a:xfrm>
           <a:prstGeom prst="line">
@@ -8619,52 +8997,52 @@
       </p:sp>
       <p:sp>
         <p:nvSpPr>
+          <p:cNvPr id="12" name="Text 10"/>
+          <p:cNvSpPr/>
+          <p:nvPr/>
+        </p:nvSpPr>
+        <p:spPr>
+          <a:xfrm>
+            <a:off x="886968" y="2532888"/>
+            <a:ext cx="2743200" cy="347472"/>
+          </a:xfrm>
+          <a:prstGeom prst="rect">
+            <a:avLst/>
+          </a:prstGeom>
+          <a:noFill/>
+          <a:ln/>
+        </p:spPr>
+        <p:txBody>
+          <a:bodyPr wrap="square" rtlCol="0" anchor="ctr"/>
+          <a:lstStyle/>
+          <a:p>
+            <a:pPr indent="0" marL="0">
+              <a:buNone/>
+            </a:pPr>
+            <a:r>
+              <a:rPr lang="en-US" sz="1100" dirty="0">
+                <a:solidFill>
+                  <a:srgbClr val="5B6B73"/>
+                </a:solidFill>
+                <a:latin typeface="맑은 고딕" pitchFamily="34" charset="0"/>
+                <a:ea typeface="맑은 고딕" pitchFamily="34" charset="-122"/>
+                <a:cs typeface="맑은 고딕" pitchFamily="34" charset="-120"/>
+              </a:rPr>
+              <a:t>승계 보증금</a:t>
+            </a:r>
+            <a:endParaRPr lang="en-US" sz="1100" dirty="0"/>
+          </a:p>
+        </p:txBody>
+      </p:sp>
+      <p:sp>
+        <p:nvSpPr>
           <p:cNvPr id="13" name="Text 11"/>
           <p:cNvSpPr/>
           <p:nvPr/>
         </p:nvSpPr>
         <p:spPr>
           <a:xfrm>
-            <a:off x="886968" y="3182112"/>
-            <a:ext cx="2743200" cy="347472"/>
-          </a:xfrm>
-          <a:prstGeom prst="rect">
-            <a:avLst/>
-          </a:prstGeom>
-          <a:noFill/>
-          <a:ln/>
-        </p:spPr>
-        <p:txBody>
-          <a:bodyPr wrap="square" rtlCol="0" anchor="ctr"/>
-          <a:lstStyle/>
-          <a:p>
-            <a:pPr indent="0" marL="0">
-              <a:buNone/>
-            </a:pPr>
-            <a:r>
-              <a:rPr lang="en-US" sz="1100" dirty="0">
-                <a:solidFill>
-                  <a:srgbClr val="5B6B73"/>
-                </a:solidFill>
-                <a:latin typeface="맑은 고딕" pitchFamily="34" charset="0"/>
-                <a:ea typeface="맑은 고딕" pitchFamily="34" charset="-122"/>
-                <a:cs typeface="맑은 고딕" pitchFamily="34" charset="-120"/>
-              </a:rPr>
-              <a:t>승계 보증금</a:t>
-            </a:r>
-            <a:endParaRPr lang="en-US" sz="1100" dirty="0"/>
-          </a:p>
-        </p:txBody>
-      </p:sp>
-      <p:sp>
-        <p:nvSpPr>
-          <p:cNvPr id="14" name="Text 12"/>
-          <p:cNvSpPr/>
-          <p:nvPr/>
-        </p:nvSpPr>
-        <p:spPr>
-          <a:xfrm>
-            <a:off x="3127248" y="3182112"/>
+            <a:off x="3127248" y="2532888"/>
             <a:ext cx="2194560" cy="347472"/>
           </a:xfrm>
           <a:prstGeom prst="rect">
@@ -8697,13 +9075,13 @@
       </p:sp>
       <p:sp>
         <p:nvSpPr>
-          <p:cNvPr id="15" name="Shape 13"/>
-          <p:cNvSpPr/>
-          <p:nvPr/>
-        </p:nvSpPr>
-        <p:spPr>
-          <a:xfrm>
-            <a:off x="795528" y="3529584"/>
+          <p:cNvPr id="14" name="Shape 12"/>
+          <p:cNvSpPr/>
+          <p:nvPr/>
+        </p:nvSpPr>
+        <p:spPr>
+          <a:xfrm>
+            <a:off x="795528" y="2880360"/>
             <a:ext cx="4663440" cy="0"/>
           </a:xfrm>
           <a:prstGeom prst="line">
@@ -8720,52 +9098,52 @@
       </p:sp>
       <p:sp>
         <p:nvSpPr>
+          <p:cNvPr id="15" name="Text 13"/>
+          <p:cNvSpPr/>
+          <p:nvPr/>
+        </p:nvSpPr>
+        <p:spPr>
+          <a:xfrm>
+            <a:off x="886968" y="2880360"/>
+            <a:ext cx="2743200" cy="347472"/>
+          </a:xfrm>
+          <a:prstGeom prst="rect">
+            <a:avLst/>
+          </a:prstGeom>
+          <a:noFill/>
+          <a:ln/>
+        </p:spPr>
+        <p:txBody>
+          <a:bodyPr wrap="square" rtlCol="0" anchor="ctr"/>
+          <a:lstStyle/>
+          <a:p>
+            <a:pPr indent="0" marL="0">
+              <a:buNone/>
+            </a:pPr>
+            <a:r>
+              <a:rPr lang="en-US" sz="1100" dirty="0">
+                <a:solidFill>
+                  <a:srgbClr val="5B6B73"/>
+                </a:solidFill>
+                <a:latin typeface="맑은 고딕" pitchFamily="34" charset="0"/>
+                <a:ea typeface="맑은 고딕" pitchFamily="34" charset="-122"/>
+                <a:cs typeface="맑은 고딕" pitchFamily="34" charset="-120"/>
+              </a:rPr>
+              <a:t>매매가</a:t>
+            </a:r>
+            <a:endParaRPr lang="en-US" sz="1100" dirty="0"/>
+          </a:p>
+        </p:txBody>
+      </p:sp>
+      <p:sp>
+        <p:nvSpPr>
           <p:cNvPr id="16" name="Text 14"/>
           <p:cNvSpPr/>
           <p:nvPr/>
         </p:nvSpPr>
         <p:spPr>
           <a:xfrm>
-            <a:off x="886968" y="3529584"/>
-            <a:ext cx="2743200" cy="347472"/>
-          </a:xfrm>
-          <a:prstGeom prst="rect">
-            <a:avLst/>
-          </a:prstGeom>
-          <a:noFill/>
-          <a:ln/>
-        </p:spPr>
-        <p:txBody>
-          <a:bodyPr wrap="square" rtlCol="0" anchor="ctr"/>
-          <a:lstStyle/>
-          <a:p>
-            <a:pPr indent="0" marL="0">
-              <a:buNone/>
-            </a:pPr>
-            <a:r>
-              <a:rPr lang="en-US" sz="1100" dirty="0">
-                <a:solidFill>
-                  <a:srgbClr val="5B6B73"/>
-                </a:solidFill>
-                <a:latin typeface="맑은 고딕" pitchFamily="34" charset="0"/>
-                <a:ea typeface="맑은 고딕" pitchFamily="34" charset="-122"/>
-                <a:cs typeface="맑은 고딕" pitchFamily="34" charset="-120"/>
-              </a:rPr>
-              <a:t>매매가</a:t>
-            </a:r>
-            <a:endParaRPr lang="en-US" sz="1100" dirty="0"/>
-          </a:p>
-        </p:txBody>
-      </p:sp>
-      <p:sp>
-        <p:nvSpPr>
-          <p:cNvPr id="17" name="Text 15"/>
-          <p:cNvSpPr/>
-          <p:nvPr/>
-        </p:nvSpPr>
-        <p:spPr>
-          <a:xfrm>
-            <a:off x="3127248" y="3529584"/>
+            <a:off x="3127248" y="2880360"/>
             <a:ext cx="2194560" cy="347472"/>
           </a:xfrm>
           <a:prstGeom prst="rect">
@@ -8798,13 +9176,13 @@
       </p:sp>
       <p:sp>
         <p:nvSpPr>
-          <p:cNvPr id="18" name="Shape 16"/>
-          <p:cNvSpPr/>
-          <p:nvPr/>
-        </p:nvSpPr>
-        <p:spPr>
-          <a:xfrm>
-            <a:off x="795528" y="3877056"/>
+          <p:cNvPr id="17" name="Shape 15"/>
+          <p:cNvSpPr/>
+          <p:nvPr/>
+        </p:nvSpPr>
+        <p:spPr>
+          <a:xfrm>
+            <a:off x="795528" y="3227832"/>
             <a:ext cx="4663440" cy="0"/>
           </a:xfrm>
           <a:prstGeom prst="line">
@@ -8821,52 +9199,52 @@
       </p:sp>
       <p:sp>
         <p:nvSpPr>
+          <p:cNvPr id="18" name="Text 16"/>
+          <p:cNvSpPr/>
+          <p:nvPr/>
+        </p:nvSpPr>
+        <p:spPr>
+          <a:xfrm>
+            <a:off x="886968" y="3227832"/>
+            <a:ext cx="2743200" cy="347472"/>
+          </a:xfrm>
+          <a:prstGeom prst="rect">
+            <a:avLst/>
+          </a:prstGeom>
+          <a:noFill/>
+          <a:ln/>
+        </p:spPr>
+        <p:txBody>
+          <a:bodyPr wrap="square" rtlCol="0" anchor="ctr"/>
+          <a:lstStyle/>
+          <a:p>
+            <a:pPr indent="0" marL="0">
+              <a:buNone/>
+            </a:pPr>
+            <a:r>
+              <a:rPr lang="en-US" sz="1100" dirty="0">
+                <a:solidFill>
+                  <a:srgbClr val="5B6B73"/>
+                </a:solidFill>
+                <a:latin typeface="맑은 고딕" pitchFamily="34" charset="0"/>
+                <a:ea typeface="맑은 고딕" pitchFamily="34" charset="-122"/>
+                <a:cs typeface="맑은 고딕" pitchFamily="34" charset="-120"/>
+              </a:rPr>
+              <a:t>보증금 차감 매입가 (매매가−보증금)</a:t>
+            </a:r>
+            <a:endParaRPr lang="en-US" sz="1100" dirty="0"/>
+          </a:p>
+        </p:txBody>
+      </p:sp>
+      <p:sp>
+        <p:nvSpPr>
           <p:cNvPr id="19" name="Text 17"/>
           <p:cNvSpPr/>
           <p:nvPr/>
         </p:nvSpPr>
         <p:spPr>
           <a:xfrm>
-            <a:off x="886968" y="3877056"/>
-            <a:ext cx="2743200" cy="347472"/>
-          </a:xfrm>
-          <a:prstGeom prst="rect">
-            <a:avLst/>
-          </a:prstGeom>
-          <a:noFill/>
-          <a:ln/>
-        </p:spPr>
-        <p:txBody>
-          <a:bodyPr wrap="square" rtlCol="0" anchor="ctr"/>
-          <a:lstStyle/>
-          <a:p>
-            <a:pPr indent="0" marL="0">
-              <a:buNone/>
-            </a:pPr>
-            <a:r>
-              <a:rPr lang="en-US" sz="1100" dirty="0">
-                <a:solidFill>
-                  <a:srgbClr val="5B6B73"/>
-                </a:solidFill>
-                <a:latin typeface="맑은 고딕" pitchFamily="34" charset="0"/>
-                <a:ea typeface="맑은 고딕" pitchFamily="34" charset="-122"/>
-                <a:cs typeface="맑은 고딕" pitchFamily="34" charset="-120"/>
-              </a:rPr>
-              <a:t>순투자금 (매매가 − 보증금)</a:t>
-            </a:r>
-            <a:endParaRPr lang="en-US" sz="1100" dirty="0"/>
-          </a:p>
-        </p:txBody>
-      </p:sp>
-      <p:sp>
-        <p:nvSpPr>
-          <p:cNvPr id="20" name="Text 18"/>
-          <p:cNvSpPr/>
-          <p:nvPr/>
-        </p:nvSpPr>
-        <p:spPr>
-          <a:xfrm>
-            <a:off x="3127248" y="3877056"/>
+            <a:off x="3127248" y="3227832"/>
             <a:ext cx="2194560" cy="347472"/>
           </a:xfrm>
           <a:prstGeom prst="rect">
@@ -8899,13 +9277,13 @@
       </p:sp>
       <p:sp>
         <p:nvSpPr>
-          <p:cNvPr id="21" name="Shape 19"/>
-          <p:cNvSpPr/>
-          <p:nvPr/>
-        </p:nvSpPr>
-        <p:spPr>
-          <a:xfrm>
-            <a:off x="795528" y="4224528"/>
+          <p:cNvPr id="20" name="Shape 18"/>
+          <p:cNvSpPr/>
+          <p:nvPr/>
+        </p:nvSpPr>
+        <p:spPr>
+          <a:xfrm>
+            <a:off x="795528" y="3575304"/>
             <a:ext cx="4663440" cy="0"/>
           </a:xfrm>
           <a:prstGeom prst="line">
@@ -8922,18 +9300,18 @@
       </p:sp>
       <p:sp>
         <p:nvSpPr>
-          <p:cNvPr id="22" name="Shape 20"/>
-          <p:cNvSpPr/>
-          <p:nvPr/>
-        </p:nvSpPr>
-        <p:spPr>
-          <a:xfrm>
-            <a:off x="6053328" y="1371600"/>
-            <a:ext cx="5571439" cy="3840480"/>
+          <p:cNvPr id="21" name="Shape 19"/>
+          <p:cNvSpPr/>
+          <p:nvPr/>
+        </p:nvSpPr>
+        <p:spPr>
+          <a:xfrm>
+            <a:off x="6053328" y="1325880"/>
+            <a:ext cx="5571439" cy="4023360"/>
           </a:xfrm>
           <a:prstGeom prst="roundRect">
             <a:avLst>
-              <a:gd name="adj" fmla="val 1429"/>
+              <a:gd name="adj" fmla="val 1364"/>
             </a:avLst>
           </a:prstGeom>
           <a:solidFill>
@@ -8949,13 +9327,13 @@
       </p:sp>
       <p:sp>
         <p:nvSpPr>
-          <p:cNvPr id="23" name="Shape 21"/>
-          <p:cNvSpPr/>
-          <p:nvPr/>
-        </p:nvSpPr>
-        <p:spPr>
-          <a:xfrm>
-            <a:off x="6309360" y="1591056"/>
+          <p:cNvPr id="22" name="Shape 20"/>
+          <p:cNvSpPr/>
+          <p:nvPr/>
+        </p:nvSpPr>
+        <p:spPr>
+          <a:xfrm>
+            <a:off x="6309360" y="1545336"/>
             <a:ext cx="1554480" cy="219456"/>
           </a:xfrm>
           <a:prstGeom prst="roundRect">
@@ -8976,14 +9354,53 @@
       </p:sp>
       <p:sp>
         <p:nvSpPr>
+          <p:cNvPr id="23" name="Text 21"/>
+          <p:cNvSpPr/>
+          <p:nvPr/>
+        </p:nvSpPr>
+        <p:spPr>
+          <a:xfrm>
+            <a:off x="6309360" y="1545336"/>
+            <a:ext cx="1554480" cy="219456"/>
+          </a:xfrm>
+          <a:prstGeom prst="rect">
+            <a:avLst/>
+          </a:prstGeom>
+          <a:noFill/>
+          <a:ln/>
+        </p:spPr>
+        <p:txBody>
+          <a:bodyPr wrap="square" lIns="0" tIns="0" rIns="0" bIns="0" rtlCol="0" anchor="ctr"/>
+          <a:lstStyle/>
+          <a:p>
+            <a:pPr algn="ctr" indent="0" marL="0">
+              <a:buNone/>
+            </a:pPr>
+            <a:r>
+              <a:rPr lang="en-US" sz="850" b="1" dirty="0">
+                <a:solidFill>
+                  <a:srgbClr val="8B6508"/>
+                </a:solidFill>
+                <a:latin typeface="맑은 고딕" pitchFamily="34" charset="0"/>
+                <a:ea typeface="맑은 고딕" pitchFamily="34" charset="-122"/>
+                <a:cs typeface="맑은 고딕" pitchFamily="34" charset="-120"/>
+              </a:rPr>
+              <a:t>[ 공시지가 열람 안내 ]</a:t>
+            </a:r>
+            <a:endParaRPr lang="en-US" sz="850" dirty="0"/>
+          </a:p>
+        </p:txBody>
+      </p:sp>
+      <p:sp>
+        <p:nvSpPr>
           <p:cNvPr id="24" name="Text 22"/>
           <p:cNvSpPr/>
           <p:nvPr/>
         </p:nvSpPr>
         <p:spPr>
           <a:xfrm>
-            <a:off x="6309360" y="1591056"/>
-            <a:ext cx="1554480" cy="219456"/>
+            <a:off x="6309360" y="1837944"/>
+            <a:ext cx="5059375" cy="274320"/>
           </a:xfrm>
           <a:prstGeom prst="rect">
             <a:avLst/>
@@ -8995,21 +9412,21 @@
           <a:bodyPr wrap="square" lIns="0" tIns="0" rIns="0" bIns="0" rtlCol="0" anchor="ctr"/>
           <a:lstStyle/>
           <a:p>
-            <a:pPr algn="ctr" indent="0" marL="0">
-              <a:buNone/>
-            </a:pPr>
-            <a:r>
-              <a:rPr lang="en-US" sz="850" b="1" dirty="0">
-                <a:solidFill>
-                  <a:srgbClr val="8B6508"/>
-                </a:solidFill>
-                <a:latin typeface="맑은 고딕" pitchFamily="34" charset="0"/>
-                <a:ea typeface="맑은 고딕" pitchFamily="34" charset="-122"/>
-                <a:cs typeface="맑은 고딕" pitchFamily="34" charset="-120"/>
-              </a:rPr>
-              <a:t>[ 공시지가 열람 안내 ]</a:t>
-            </a:r>
-            <a:endParaRPr lang="en-US" sz="850" dirty="0"/>
+            <a:pPr indent="0" marL="0">
+              <a:buNone/>
+            </a:pPr>
+            <a:r>
+              <a:rPr lang="en-US" sz="1200" b="1" dirty="0">
+                <a:solidFill>
+                  <a:srgbClr val="132A3A"/>
+                </a:solidFill>
+                <a:latin typeface="맑은 고딕" pitchFamily="34" charset="0"/>
+                <a:ea typeface="맑은 고딕" pitchFamily="34" charset="-122"/>
+                <a:cs typeface="맑은 고딕" pitchFamily="34" charset="-120"/>
+              </a:rPr>
+              <a:t>개별공시지가 및 토지 가치 평가 안내</a:t>
+            </a:r>
+            <a:endParaRPr lang="en-US" sz="1200" dirty="0"/>
           </a:p>
         </p:txBody>
       </p:sp>
@@ -9021,47 +9438,8 @@
         </p:nvSpPr>
         <p:spPr>
           <a:xfrm>
-            <a:off x="6309360" y="1883664"/>
-            <a:ext cx="5059375" cy="274320"/>
-          </a:xfrm>
-          <a:prstGeom prst="rect">
-            <a:avLst/>
-          </a:prstGeom>
-          <a:noFill/>
-          <a:ln/>
-        </p:spPr>
-        <p:txBody>
-          <a:bodyPr wrap="square" lIns="0" tIns="0" rIns="0" bIns="0" rtlCol="0" anchor="ctr"/>
-          <a:lstStyle/>
-          <a:p>
-            <a:pPr indent="0" marL="0">
-              <a:buNone/>
-            </a:pPr>
-            <a:r>
-              <a:rPr lang="en-US" sz="1200" b="1" dirty="0">
-                <a:solidFill>
-                  <a:srgbClr val="132A3A"/>
-                </a:solidFill>
-                <a:latin typeface="맑은 고딕" pitchFamily="34" charset="0"/>
-                <a:ea typeface="맑은 고딕" pitchFamily="34" charset="-122"/>
-                <a:cs typeface="맑은 고딕" pitchFamily="34" charset="-120"/>
-              </a:rPr>
-              <a:t>개별공시지가 및 토지 가치 평가 안내</a:t>
-            </a:r>
-            <a:endParaRPr lang="en-US" sz="1200" dirty="0"/>
-          </a:p>
-        </p:txBody>
-      </p:sp>
-      <p:sp>
-        <p:nvSpPr>
-          <p:cNvPr id="26" name="Text 24"/>
-          <p:cNvSpPr/>
-          <p:nvPr/>
-        </p:nvSpPr>
-        <p:spPr>
-          <a:xfrm>
-            <a:off x="6309360" y="2194560"/>
-            <a:ext cx="5059375" cy="384048"/>
+            <a:off x="6309360" y="2148840"/>
+            <a:ext cx="5059375" cy="402336"/>
           </a:xfrm>
           <a:prstGeom prst="rect">
             <a:avLst/>
@@ -9096,13 +9474,13 @@
       </p:sp>
       <p:sp>
         <p:nvSpPr>
-          <p:cNvPr id="27" name="Shape 25"/>
-          <p:cNvSpPr/>
-          <p:nvPr/>
-        </p:nvSpPr>
-        <p:spPr>
-          <a:xfrm>
-            <a:off x="6309360" y="2633472"/>
+          <p:cNvPr id="26" name="Shape 24"/>
+          <p:cNvSpPr/>
+          <p:nvPr/>
+        </p:nvSpPr>
+        <p:spPr>
+          <a:xfrm>
+            <a:off x="6309360" y="2606040"/>
             <a:ext cx="5059375" cy="0"/>
           </a:xfrm>
           <a:prstGeom prst="line">
@@ -9119,13 +9497,13 @@
       </p:sp>
       <p:sp>
         <p:nvSpPr>
-          <p:cNvPr id="28" name="Shape 26"/>
-          <p:cNvSpPr/>
-          <p:nvPr/>
-        </p:nvSpPr>
-        <p:spPr>
-          <a:xfrm>
-            <a:off x="6345936" y="2779776"/>
+          <p:cNvPr id="27" name="Shape 25"/>
+          <p:cNvSpPr/>
+          <p:nvPr/>
+        </p:nvSpPr>
+        <p:spPr>
+          <a:xfrm>
+            <a:off x="6345936" y="2752344"/>
             <a:ext cx="64008" cy="64008"/>
           </a:xfrm>
           <a:prstGeom prst="rect">
@@ -9139,14 +9517,14 @@
       </p:sp>
       <p:sp>
         <p:nvSpPr>
-          <p:cNvPr id="29" name="Text 27"/>
-          <p:cNvSpPr/>
-          <p:nvPr/>
-        </p:nvSpPr>
-        <p:spPr>
-          <a:xfrm>
-            <a:off x="6473952" y="2724912"/>
-            <a:ext cx="4839919" cy="530352"/>
+          <p:cNvPr id="28" name="Text 26"/>
+          <p:cNvSpPr/>
+          <p:nvPr/>
+        </p:nvSpPr>
+        <p:spPr>
+          <a:xfrm>
+            <a:off x="6473952" y="2697480"/>
+            <a:ext cx="4839919" cy="571500"/>
           </a:xfrm>
           <a:prstGeom prst="rect">
             <a:avLst/>
@@ -9181,13 +9559,13 @@
       </p:sp>
       <p:sp>
         <p:nvSpPr>
-          <p:cNvPr id="30" name="Shape 28"/>
-          <p:cNvSpPr/>
-          <p:nvPr/>
-        </p:nvSpPr>
-        <p:spPr>
-          <a:xfrm>
-            <a:off x="6345936" y="3346704"/>
+          <p:cNvPr id="29" name="Shape 27"/>
+          <p:cNvSpPr/>
+          <p:nvPr/>
+        </p:nvSpPr>
+        <p:spPr>
+          <a:xfrm>
+            <a:off x="6345936" y="3360420"/>
             <a:ext cx="64008" cy="64008"/>
           </a:xfrm>
           <a:prstGeom prst="rect">
@@ -9201,14 +9579,14 @@
       </p:sp>
       <p:sp>
         <p:nvSpPr>
-          <p:cNvPr id="31" name="Text 29"/>
-          <p:cNvSpPr/>
-          <p:nvPr/>
-        </p:nvSpPr>
-        <p:spPr>
-          <a:xfrm>
-            <a:off x="6473952" y="3291840"/>
-            <a:ext cx="4839919" cy="530352"/>
+          <p:cNvPr id="30" name="Text 28"/>
+          <p:cNvSpPr/>
+          <p:nvPr/>
+        </p:nvSpPr>
+        <p:spPr>
+          <a:xfrm>
+            <a:off x="6473952" y="3305556"/>
+            <a:ext cx="4839919" cy="571500"/>
           </a:xfrm>
           <a:prstGeom prst="rect">
             <a:avLst/>
@@ -9243,13 +9621,13 @@
       </p:sp>
       <p:sp>
         <p:nvSpPr>
-          <p:cNvPr id="32" name="Shape 30"/>
-          <p:cNvSpPr/>
-          <p:nvPr/>
-        </p:nvSpPr>
-        <p:spPr>
-          <a:xfrm>
-            <a:off x="6345936" y="3913632"/>
+          <p:cNvPr id="31" name="Shape 29"/>
+          <p:cNvSpPr/>
+          <p:nvPr/>
+        </p:nvSpPr>
+        <p:spPr>
+          <a:xfrm>
+            <a:off x="6345936" y="3968496"/>
             <a:ext cx="64008" cy="64008"/>
           </a:xfrm>
           <a:prstGeom prst="rect">
@@ -9263,14 +9641,14 @@
       </p:sp>
       <p:sp>
         <p:nvSpPr>
-          <p:cNvPr id="33" name="Text 31"/>
-          <p:cNvSpPr/>
-          <p:nvPr/>
-        </p:nvSpPr>
-        <p:spPr>
-          <a:xfrm>
-            <a:off x="6473952" y="3858768"/>
-            <a:ext cx="4839919" cy="530352"/>
+          <p:cNvPr id="32" name="Text 30"/>
+          <p:cNvSpPr/>
+          <p:nvPr/>
+        </p:nvSpPr>
+        <p:spPr>
+          <a:xfrm>
+            <a:off x="6473952" y="3913632"/>
+            <a:ext cx="4839919" cy="571500"/>
           </a:xfrm>
           <a:prstGeom prst="rect">
             <a:avLst/>
@@ -9305,13 +9683,13 @@
       </p:sp>
       <p:sp>
         <p:nvSpPr>
-          <p:cNvPr id="34" name="Shape 32"/>
-          <p:cNvSpPr/>
-          <p:nvPr/>
-        </p:nvSpPr>
-        <p:spPr>
-          <a:xfrm>
-            <a:off x="6345936" y="4480560"/>
+          <p:cNvPr id="33" name="Shape 31"/>
+          <p:cNvSpPr/>
+          <p:nvPr/>
+        </p:nvSpPr>
+        <p:spPr>
+          <a:xfrm>
+            <a:off x="6345936" y="4576572"/>
             <a:ext cx="64008" cy="64008"/>
           </a:xfrm>
           <a:prstGeom prst="rect">
@@ -9325,14 +9703,14 @@
       </p:sp>
       <p:sp>
         <p:nvSpPr>
-          <p:cNvPr id="35" name="Text 33"/>
-          <p:cNvSpPr/>
-          <p:nvPr/>
-        </p:nvSpPr>
-        <p:spPr>
-          <a:xfrm>
-            <a:off x="6473952" y="4425696"/>
-            <a:ext cx="4839919" cy="530352"/>
+          <p:cNvPr id="34" name="Text 32"/>
+          <p:cNvSpPr/>
+          <p:nvPr/>
+        </p:nvSpPr>
+        <p:spPr>
+          <a:xfrm>
+            <a:off x="6473952" y="4521708"/>
+            <a:ext cx="4839919" cy="571500"/>
           </a:xfrm>
           <a:prstGeom prst="rect">
             <a:avLst/>
@@ -9362,6 +9740,47 @@
               <a:t>보유세(재산세·종합부동산세) 과세표준 기준액 산출 및 세무 영향 점검</a:t>
             </a:r>
             <a:endParaRPr lang="en-US" sz="920" dirty="0"/>
+          </a:p>
+        </p:txBody>
+      </p:sp>
+      <p:sp>
+        <p:nvSpPr>
+          <p:cNvPr id="35" name="Text 33"/>
+          <p:cNvSpPr/>
+          <p:nvPr/>
+        </p:nvSpPr>
+        <p:spPr>
+          <a:xfrm>
+            <a:off x="566928" y="5952744"/>
+            <a:ext cx="11057839" cy="219456"/>
+          </a:xfrm>
+          <a:prstGeom prst="rect">
+            <a:avLst/>
+          </a:prstGeom>
+          <a:noFill/>
+          <a:ln/>
+        </p:spPr>
+        <p:txBody>
+          <a:bodyPr wrap="square" lIns="0" tIns="0" rIns="0" bIns="0" rtlCol="0" anchor="ctr">
+            <a:normAutofit/>
+          </a:bodyPr>
+          <a:lstStyle/>
+          <a:p>
+            <a:pPr indent="0" marL="0">
+              <a:buNone/>
+            </a:pPr>
+            <a:r>
+              <a:rPr lang="en-US" sz="800" dirty="0">
+                <a:solidFill>
+                  <a:srgbClr val="8A8A8A"/>
+                </a:solidFill>
+                <a:latin typeface="맑은 고딕" pitchFamily="34" charset="0"/>
+                <a:ea typeface="맑은 고딕" pitchFamily="34" charset="-122"/>
+                <a:cs typeface="맑은 고딕" pitchFamily="34" charset="-120"/>
+              </a:rPr>
+              <a:t>※ 운영비율 가정, 공실충당 5%, 보증금 승계 가정. 임대수익률은 운영비 차감 전, Cap Rate는 차감 후.</a:t>
+            </a:r>
+            <a:endParaRPr lang="en-US" sz="800" dirty="0"/>
           </a:p>
         </p:txBody>
       </p:sp>
@@ -9542,46 +9961,7 @@
         </p:nvSpPr>
         <p:spPr>
           <a:xfrm>
-            <a:off x="1133856" y="457200"/>
-            <a:ext cx="10490911" cy="182880"/>
-          </a:xfrm>
-          <a:prstGeom prst="rect">
-            <a:avLst/>
-          </a:prstGeom>
-          <a:noFill/>
-          <a:ln/>
-        </p:spPr>
-        <p:txBody>
-          <a:bodyPr wrap="square" lIns="0" tIns="0" rIns="0" bIns="0" rtlCol="0" anchor="ctr"/>
-          <a:lstStyle/>
-          <a:p>
-            <a:pPr indent="0" marL="0">
-              <a:buNone/>
-            </a:pPr>
-            <a:r>
-              <a:rPr lang="en-US" sz="950" b="1" spc="200" kern="0" dirty="0">
-                <a:solidFill>
-                  <a:srgbClr val="B8860B"/>
-                </a:solidFill>
-                <a:latin typeface="Arial" pitchFamily="34" charset="0"/>
-                <a:ea typeface="Arial" pitchFamily="34" charset="-122"/>
-                <a:cs typeface="Arial" pitchFamily="34" charset="-120"/>
-              </a:rPr>
-              <a:t>Gallery</a:t>
-            </a:r>
-            <a:endParaRPr lang="en-US" sz="950" dirty="0"/>
-          </a:p>
-        </p:txBody>
-      </p:sp>
-      <p:sp>
-        <p:nvSpPr>
-          <p:cNvPr id="5" name="Text 3"/>
-          <p:cNvSpPr/>
-          <p:nvPr/>
-        </p:nvSpPr>
-        <p:spPr>
-          <a:xfrm>
-            <a:off x="1133856" y="640080"/>
+            <a:off x="1133856" y="466344"/>
             <a:ext cx="10490911" cy="365760"/>
           </a:xfrm>
           <a:prstGeom prst="rect">
@@ -9616,68 +9996,199 @@
       </p:sp>
       <p:sp>
         <p:nvSpPr>
-          <p:cNvPr id="6" name="Shape 4"/>
-          <p:cNvSpPr/>
-          <p:nvPr/>
-        </p:nvSpPr>
-        <p:spPr>
-          <a:xfrm>
-            <a:off x="566928" y="1371600"/>
-            <a:ext cx="11057839" cy="4572000"/>
+          <p:cNvPr id="5" name="Shape 3"/>
+          <p:cNvSpPr/>
+          <p:nvPr/>
+        </p:nvSpPr>
+        <p:spPr>
+          <a:xfrm>
+            <a:off x="566928" y="1234440"/>
+            <a:ext cx="3600602" cy="2290572"/>
           </a:xfrm>
           <a:prstGeom prst="roundRect">
             <a:avLst>
-              <a:gd name="adj" fmla="val 1200"/>
+              <a:gd name="adj" fmla="val 2395"/>
             </a:avLst>
           </a:prstGeom>
           <a:solidFill>
-            <a:srgbClr val="F3F6F7"/>
+            <a:srgbClr val="F0F0F0"/>
           </a:solidFill>
           <a:ln w="6350">
             <a:solidFill>
-              <a:srgbClr val="CBD5E0"/>
+              <a:srgbClr val="E0E0E0"/>
             </a:solidFill>
             <a:prstDash val="solid"/>
           </a:ln>
         </p:spPr>
       </p:sp>
-      <p:sp>
-        <p:nvSpPr>
-          <p:cNvPr id="7" name="Shape 5"/>
-          <p:cNvSpPr/>
-          <p:nvPr/>
-        </p:nvSpPr>
-        <p:spPr>
-          <a:xfrm>
-            <a:off x="822960" y="1591056"/>
-            <a:ext cx="1316736" cy="219456"/>
+      <p:pic>
+        <p:nvPicPr>
+          <p:cNvPr id="6" name="Image 0" descr="preencoded.png">    </p:cNvPr>
+          <p:cNvPicPr>
+            <a:picLocks noChangeAspect="1"/>
+          </p:cNvPicPr>
+          <p:nvPr/>
+        </p:nvPicPr>
+        <p:blipFill>
+          <a:blip r:embed="rId1"/>
+          <a:stretch>
+            <a:fillRect/>
+          </a:stretch>
+        </p:blipFill>
+        <p:spPr>
+          <a:xfrm>
+            <a:off x="840181" y="1234440"/>
+            <a:ext cx="3054096" cy="2290572"/>
+          </a:xfrm>
+          <a:prstGeom prst="rect">
+            <a:avLst/>
+          </a:prstGeom>
+        </p:spPr>
+      </p:pic>
+      <p:sp>
+        <p:nvSpPr>
+          <p:cNvPr id="7" name="Shape 4"/>
+          <p:cNvSpPr/>
+          <p:nvPr/>
+        </p:nvSpPr>
+        <p:spPr>
+          <a:xfrm>
+            <a:off x="640080" y="1307592"/>
+            <a:ext cx="868680" cy="237744"/>
+          </a:xfrm>
+          <a:prstGeom prst="rect">
+            <a:avLst/>
+          </a:prstGeom>
+          <a:solidFill>
+            <a:srgbClr val="10161F">
+              <a:alpha val="80000"/>
+            </a:srgbClr>
+          </a:solidFill>
+          <a:ln/>
+        </p:spPr>
+      </p:sp>
+      <p:sp>
+        <p:nvSpPr>
+          <p:cNvPr id="8" name="Text 5"/>
+          <p:cNvSpPr/>
+          <p:nvPr/>
+        </p:nvSpPr>
+        <p:spPr>
+          <a:xfrm>
+            <a:off x="640080" y="1307592"/>
+            <a:ext cx="868680" cy="237744"/>
+          </a:xfrm>
+          <a:prstGeom prst="rect">
+            <a:avLst/>
+          </a:prstGeom>
+          <a:noFill/>
+          <a:ln/>
+        </p:spPr>
+        <p:txBody>
+          <a:bodyPr wrap="square" lIns="0" tIns="0" rIns="0" bIns="0" rtlCol="0" anchor="ctr"/>
+          <a:lstStyle/>
+          <a:p>
+            <a:pPr algn="ctr" indent="0" marL="0">
+              <a:buNone/>
+            </a:pPr>
+            <a:r>
+              <a:rPr lang="en-US" sz="900" b="1" dirty="0">
+                <a:solidFill>
+                  <a:srgbClr val="FFFFFF"/>
+                </a:solidFill>
+                <a:latin typeface="맑은 고딕" pitchFamily="34" charset="0"/>
+                <a:ea typeface="맑은 고딕" pitchFamily="34" charset="-122"/>
+                <a:cs typeface="맑은 고딕" pitchFamily="34" charset="-120"/>
+              </a:rPr>
+              <a:t>건물 외관</a:t>
+            </a:r>
+            <a:endParaRPr lang="en-US" sz="900" dirty="0"/>
+          </a:p>
+        </p:txBody>
+      </p:sp>
+      <p:sp>
+        <p:nvSpPr>
+          <p:cNvPr id="9" name="Shape 6"/>
+          <p:cNvSpPr/>
+          <p:nvPr/>
+        </p:nvSpPr>
+        <p:spPr>
+          <a:xfrm>
+            <a:off x="4295546" y="1234440"/>
+            <a:ext cx="3600602" cy="2290572"/>
           </a:xfrm>
           <a:prstGeom prst="roundRect">
             <a:avLst>
-              <a:gd name="adj" fmla="val 50000"/>
+              <a:gd name="adj" fmla="val 2395"/>
             </a:avLst>
           </a:prstGeom>
           <a:solidFill>
-            <a:srgbClr val="E8F4F8"/>
+            <a:srgbClr val="F0F0F0"/>
           </a:solidFill>
           <a:ln w="6350">
             <a:solidFill>
-              <a:srgbClr val="2E6E82"/>
+              <a:srgbClr val="E0E0E0"/>
             </a:solidFill>
             <a:prstDash val="solid"/>
           </a:ln>
         </p:spPr>
       </p:sp>
-      <p:sp>
-        <p:nvSpPr>
-          <p:cNvPr id="8" name="Text 6"/>
-          <p:cNvSpPr/>
-          <p:nvPr/>
-        </p:nvSpPr>
-        <p:spPr>
-          <a:xfrm>
-            <a:off x="822960" y="1591056"/>
-            <a:ext cx="1316736" cy="219456"/>
+      <p:pic>
+        <p:nvPicPr>
+          <p:cNvPr id="10" name="Image 1" descr="preencoded.png">    </p:cNvPr>
+          <p:cNvPicPr>
+            <a:picLocks noChangeAspect="1"/>
+          </p:cNvPicPr>
+          <p:nvPr/>
+        </p:nvPicPr>
+        <p:blipFill>
+          <a:blip r:embed="rId2"/>
+          <a:stretch>
+            <a:fillRect/>
+          </a:stretch>
+        </p:blipFill>
+        <p:spPr>
+          <a:xfrm>
+            <a:off x="4568800" y="1234440"/>
+            <a:ext cx="3054096" cy="2290572"/>
+          </a:xfrm>
+          <a:prstGeom prst="rect">
+            <a:avLst/>
+          </a:prstGeom>
+        </p:spPr>
+      </p:pic>
+      <p:sp>
+        <p:nvSpPr>
+          <p:cNvPr id="11" name="Shape 7"/>
+          <p:cNvSpPr/>
+          <p:nvPr/>
+        </p:nvSpPr>
+        <p:spPr>
+          <a:xfrm>
+            <a:off x="4295546" y="3232404"/>
+            <a:ext cx="3600602" cy="292608"/>
+          </a:xfrm>
+          <a:prstGeom prst="rect">
+            <a:avLst/>
+          </a:prstGeom>
+          <a:solidFill>
+            <a:srgbClr val="000000">
+              <a:alpha val="60000"/>
+            </a:srgbClr>
+          </a:solidFill>
+          <a:ln/>
+        </p:spPr>
+      </p:sp>
+      <p:sp>
+        <p:nvSpPr>
+          <p:cNvPr id="12" name="Text 8"/>
+          <p:cNvSpPr/>
+          <p:nvPr/>
+        </p:nvSpPr>
+        <p:spPr>
+          <a:xfrm>
+            <a:off x="4405274" y="3232404"/>
+            <a:ext cx="3381146" cy="292608"/>
           </a:xfrm>
           <a:prstGeom prst="rect">
             <a:avLst/>
@@ -9689,379 +10200,475 @@
           <a:bodyPr wrap="square" lIns="0" tIns="0" rIns="0" bIns="0" rtlCol="0" anchor="ctr"/>
           <a:lstStyle/>
           <a:p>
-            <a:pPr algn="ctr" indent="0" marL="0">
-              <a:buNone/>
-            </a:pPr>
-            <a:r>
-              <a:rPr lang="en-US" sz="850" b="1" dirty="0">
-                <a:solidFill>
-                  <a:srgbClr val="2E6E82"/>
-                </a:solidFill>
-                <a:latin typeface="맑은 고딕" pitchFamily="34" charset="0"/>
-                <a:ea typeface="맑은 고딕" pitchFamily="34" charset="-122"/>
-                <a:cs typeface="맑은 고딕" pitchFamily="34" charset="-120"/>
-              </a:rPr>
-              <a:t>[ 현장 실사 예정 ]</a:t>
-            </a:r>
-            <a:endParaRPr lang="en-US" sz="850" dirty="0"/>
-          </a:p>
-        </p:txBody>
-      </p:sp>
-      <p:sp>
-        <p:nvSpPr>
-          <p:cNvPr id="9" name="Text 7"/>
-          <p:cNvSpPr/>
-          <p:nvPr/>
-        </p:nvSpPr>
-        <p:spPr>
-          <a:xfrm>
-            <a:off x="822960" y="1883664"/>
-            <a:ext cx="10545775" cy="274320"/>
-          </a:xfrm>
-          <a:prstGeom prst="rect">
-            <a:avLst/>
-          </a:prstGeom>
-          <a:noFill/>
-          <a:ln/>
-        </p:spPr>
-        <p:txBody>
-          <a:bodyPr wrap="square" lIns="0" tIns="0" rIns="0" bIns="0" rtlCol="0" anchor="ctr"/>
-          <a:lstStyle/>
-          <a:p>
-            <a:pPr indent="0" marL="0">
-              <a:buNone/>
-            </a:pPr>
-            <a:r>
-              <a:rPr lang="en-US" sz="1200" b="1" dirty="0">
-                <a:solidFill>
-                  <a:srgbClr val="132A3A"/>
-                </a:solidFill>
-                <a:latin typeface="맑은 고딕" pitchFamily="34" charset="0"/>
-                <a:ea typeface="맑은 고딕" pitchFamily="34" charset="-122"/>
-                <a:cs typeface="맑은 고딕" pitchFamily="34" charset="-120"/>
-              </a:rPr>
-              <a:t>건축물 현황 및 물리적 실사 점검 안내</a:t>
-            </a:r>
-            <a:endParaRPr lang="en-US" sz="1200" dirty="0"/>
-          </a:p>
-        </p:txBody>
-      </p:sp>
-      <p:sp>
-        <p:nvSpPr>
-          <p:cNvPr id="10" name="Text 8"/>
-          <p:cNvSpPr/>
-          <p:nvPr/>
-        </p:nvSpPr>
-        <p:spPr>
-          <a:xfrm>
-            <a:off x="822960" y="2194560"/>
-            <a:ext cx="10545775" cy="457200"/>
-          </a:xfrm>
-          <a:prstGeom prst="rect">
-            <a:avLst/>
-          </a:prstGeom>
-          <a:noFill/>
-          <a:ln/>
-        </p:spPr>
-        <p:txBody>
-          <a:bodyPr wrap="square" lIns="0" tIns="0" rIns="0" bIns="0" rtlCol="0" anchor="t"/>
-          <a:lstStyle/>
-          <a:p>
-            <a:pPr indent="0" marL="0">
-              <a:lnSpc>
-                <a:spcPct val="115000"/>
-              </a:lnSpc>
-              <a:buNone/>
-            </a:pPr>
-            <a:r>
-              <a:rPr lang="en-US" sz="950" dirty="0">
-                <a:solidFill>
-                  <a:srgbClr val="5B6B73"/>
-                </a:solidFill>
-                <a:latin typeface="맑은 고딕" pitchFamily="34" charset="0"/>
-                <a:ea typeface="맑은 고딕" pitchFamily="34" charset="-122"/>
-                <a:cs typeface="맑은 고딕" pitchFamily="34" charset="-120"/>
-              </a:rPr>
-              <a:t>본 자산의 내·외관 상태 및 주요 설비 사양은 매수 실사 절차 진행 시 현장 방문 조사를 통해 상세 확인 및 촬영이 진행됩니다.</a:t>
-            </a:r>
-            <a:endParaRPr lang="en-US" sz="950" dirty="0"/>
-          </a:p>
-        </p:txBody>
-      </p:sp>
-      <p:sp>
-        <p:nvSpPr>
-          <p:cNvPr id="11" name="Shape 9"/>
-          <p:cNvSpPr/>
-          <p:nvPr/>
-        </p:nvSpPr>
-        <p:spPr>
-          <a:xfrm>
-            <a:off x="822960" y="2706624"/>
-            <a:ext cx="10545775" cy="0"/>
-          </a:xfrm>
-          <a:prstGeom prst="line">
-            <a:avLst/>
-          </a:prstGeom>
-          <a:noFill/>
-          <a:ln w="5080">
+            <a:pPr indent="0" marL="0">
+              <a:buNone/>
+            </a:pPr>
+            <a:r>
+              <a:rPr lang="en-US" sz="900" dirty="0">
+                <a:solidFill>
+                  <a:srgbClr val="FFFFFF"/>
+                </a:solidFill>
+                <a:latin typeface="맑은 고딕" pitchFamily="34" charset="0"/>
+                <a:ea typeface="맑은 고딕" pitchFamily="34" charset="-122"/>
+                <a:cs typeface="맑은 고딕" pitchFamily="34" charset="-120"/>
+              </a:rPr>
+              <a:t>주변 도로 및 접근로</a:t>
+            </a:r>
+            <a:endParaRPr lang="en-US" sz="900" dirty="0"/>
+          </a:p>
+        </p:txBody>
+      </p:sp>
+      <p:sp>
+        <p:nvSpPr>
+          <p:cNvPr id="13" name="Shape 9"/>
+          <p:cNvSpPr/>
+          <p:nvPr/>
+        </p:nvSpPr>
+        <p:spPr>
+          <a:xfrm>
+            <a:off x="8024165" y="1234440"/>
+            <a:ext cx="3600602" cy="2290572"/>
+          </a:xfrm>
+          <a:prstGeom prst="roundRect">
+            <a:avLst>
+              <a:gd name="adj" fmla="val 2395"/>
+            </a:avLst>
+          </a:prstGeom>
+          <a:solidFill>
+            <a:srgbClr val="F0F0F0"/>
+          </a:solidFill>
+          <a:ln w="6350">
             <a:solidFill>
-              <a:srgbClr val="CBD5E0"/>
+              <a:srgbClr val="E0E0E0"/>
             </a:solidFill>
             <a:prstDash val="solid"/>
           </a:ln>
         </p:spPr>
       </p:sp>
-      <p:sp>
-        <p:nvSpPr>
-          <p:cNvPr id="12" name="Shape 10"/>
-          <p:cNvSpPr/>
-          <p:nvPr/>
-        </p:nvSpPr>
-        <p:spPr>
-          <a:xfrm>
-            <a:off x="859536" y="2852928"/>
-            <a:ext cx="64008" cy="64008"/>
+      <p:pic>
+        <p:nvPicPr>
+          <p:cNvPr id="14" name="Image 2" descr="preencoded.png">    </p:cNvPr>
+          <p:cNvPicPr>
+            <a:picLocks noChangeAspect="1"/>
+          </p:cNvPicPr>
+          <p:nvPr/>
+        </p:nvPicPr>
+        <p:blipFill>
+          <a:blip r:embed="rId3"/>
+          <a:stretch>
+            <a:fillRect/>
+          </a:stretch>
+        </p:blipFill>
+        <p:spPr>
+          <a:xfrm>
+            <a:off x="8297418" y="1234440"/>
+            <a:ext cx="3054096" cy="2290572"/>
+          </a:xfrm>
+          <a:prstGeom prst="rect">
+            <a:avLst/>
+          </a:prstGeom>
+        </p:spPr>
+      </p:pic>
+      <p:sp>
+        <p:nvSpPr>
+          <p:cNvPr id="15" name="Shape 10"/>
+          <p:cNvSpPr/>
+          <p:nvPr/>
+        </p:nvSpPr>
+        <p:spPr>
+          <a:xfrm>
+            <a:off x="8097317" y="1307592"/>
+            <a:ext cx="868680" cy="237744"/>
           </a:xfrm>
           <a:prstGeom prst="rect">
             <a:avLst/>
           </a:prstGeom>
           <a:solidFill>
-            <a:srgbClr val="B8860B"/>
+            <a:srgbClr val="10161F">
+              <a:alpha val="80000"/>
+            </a:srgbClr>
           </a:solidFill>
           <a:ln/>
         </p:spPr>
       </p:sp>
       <p:sp>
         <p:nvSpPr>
-          <p:cNvPr id="13" name="Text 11"/>
-          <p:cNvSpPr/>
-          <p:nvPr/>
-        </p:nvSpPr>
-        <p:spPr>
-          <a:xfrm>
-            <a:off x="987552" y="2798064"/>
-            <a:ext cx="10326319" cy="694944"/>
-          </a:xfrm>
-          <a:prstGeom prst="rect">
-            <a:avLst/>
-          </a:prstGeom>
-          <a:noFill/>
-          <a:ln/>
-        </p:spPr>
-        <p:txBody>
-          <a:bodyPr wrap="square" lIns="0" tIns="0" rIns="0" bIns="0" rtlCol="0" anchor="t"/>
-          <a:lstStyle/>
-          <a:p>
-            <a:pPr indent="0" marL="0">
-              <a:lnSpc>
-                <a:spcPct val="112000"/>
-              </a:lnSpc>
-              <a:buNone/>
-            </a:pPr>
-            <a:r>
-              <a:rPr lang="en-US" sz="920" dirty="0">
-                <a:solidFill>
-                  <a:srgbClr val="2B2B2B"/>
-                </a:solidFill>
-                <a:latin typeface="맑은 고딕" pitchFamily="34" charset="0"/>
-                <a:ea typeface="맑은 고딕" pitchFamily="34" charset="-122"/>
-                <a:cs typeface="맑은 고딕" pitchFamily="34" charset="-120"/>
-              </a:rPr>
-              <a:t>외관 파사드 마감재 보존 상태 및 균열·누수 흔적 정밀 점검</a:t>
-            </a:r>
-            <a:endParaRPr lang="en-US" sz="920" dirty="0"/>
-          </a:p>
-        </p:txBody>
-      </p:sp>
-      <p:sp>
-        <p:nvSpPr>
-          <p:cNvPr id="14" name="Shape 12"/>
-          <p:cNvSpPr/>
-          <p:nvPr/>
-        </p:nvSpPr>
-        <p:spPr>
-          <a:xfrm>
-            <a:off x="859536" y="3584448"/>
-            <a:ext cx="64008" cy="64008"/>
-          </a:xfrm>
-          <a:prstGeom prst="rect">
-            <a:avLst/>
+          <p:cNvPr id="16" name="Text 11"/>
+          <p:cNvSpPr/>
+          <p:nvPr/>
+        </p:nvSpPr>
+        <p:spPr>
+          <a:xfrm>
+            <a:off x="8097317" y="1307592"/>
+            <a:ext cx="868680" cy="237744"/>
+          </a:xfrm>
+          <a:prstGeom prst="rect">
+            <a:avLst/>
+          </a:prstGeom>
+          <a:noFill/>
+          <a:ln/>
+        </p:spPr>
+        <p:txBody>
+          <a:bodyPr wrap="square" lIns="0" tIns="0" rIns="0" bIns="0" rtlCol="0" anchor="ctr"/>
+          <a:lstStyle/>
+          <a:p>
+            <a:pPr algn="ctr" indent="0" marL="0">
+              <a:buNone/>
+            </a:pPr>
+            <a:r>
+              <a:rPr lang="en-US" sz="900" b="1" dirty="0">
+                <a:solidFill>
+                  <a:srgbClr val="FFFFFF"/>
+                </a:solidFill>
+                <a:latin typeface="맑은 고딕" pitchFamily="34" charset="0"/>
+                <a:ea typeface="맑은 고딕" pitchFamily="34" charset="-122"/>
+                <a:cs typeface="맑은 고딕" pitchFamily="34" charset="-120"/>
+              </a:rPr>
+              <a:t>1층 로비</a:t>
+            </a:r>
+            <a:endParaRPr lang="en-US" sz="900" dirty="0"/>
+          </a:p>
+        </p:txBody>
+      </p:sp>
+      <p:sp>
+        <p:nvSpPr>
+          <p:cNvPr id="17" name="Shape 12"/>
+          <p:cNvSpPr/>
+          <p:nvPr/>
+        </p:nvSpPr>
+        <p:spPr>
+          <a:xfrm>
+            <a:off x="566928" y="3653028"/>
+            <a:ext cx="3600602" cy="2290572"/>
+          </a:xfrm>
+          <a:prstGeom prst="roundRect">
+            <a:avLst>
+              <a:gd name="adj" fmla="val 2395"/>
+            </a:avLst>
           </a:prstGeom>
           <a:solidFill>
-            <a:srgbClr val="B8860B"/>
+            <a:srgbClr val="F0F0F0"/>
           </a:solidFill>
-          <a:ln/>
-        </p:spPr>
-      </p:sp>
-      <p:sp>
-        <p:nvSpPr>
-          <p:cNvPr id="15" name="Text 13"/>
-          <p:cNvSpPr/>
-          <p:nvPr/>
-        </p:nvSpPr>
-        <p:spPr>
-          <a:xfrm>
-            <a:off x="987552" y="3529584"/>
-            <a:ext cx="10326319" cy="694944"/>
-          </a:xfrm>
-          <a:prstGeom prst="rect">
-            <a:avLst/>
-          </a:prstGeom>
-          <a:noFill/>
-          <a:ln/>
-        </p:spPr>
-        <p:txBody>
-          <a:bodyPr wrap="square" lIns="0" tIns="0" rIns="0" bIns="0" rtlCol="0" anchor="t"/>
-          <a:lstStyle/>
-          <a:p>
-            <a:pPr indent="0" marL="0">
-              <a:lnSpc>
-                <a:spcPct val="112000"/>
-              </a:lnSpc>
-              <a:buNone/>
-            </a:pPr>
-            <a:r>
-              <a:rPr lang="en-US" sz="920" dirty="0">
-                <a:solidFill>
-                  <a:srgbClr val="2B2B2B"/>
-                </a:solidFill>
-                <a:latin typeface="맑은 고딕" pitchFamily="34" charset="0"/>
-                <a:ea typeface="맑은 고딕" pitchFamily="34" charset="-122"/>
-                <a:cs typeface="맑은 고딕" pitchFamily="34" charset="-120"/>
-              </a:rPr>
-              <a:t>승강기, 기계식 주차설비, 수배전반 등 핵심 설비 내구연한 및 정기검사 이력</a:t>
-            </a:r>
-            <a:endParaRPr lang="en-US" sz="920" dirty="0"/>
-          </a:p>
-        </p:txBody>
-      </p:sp>
-      <p:sp>
-        <p:nvSpPr>
-          <p:cNvPr id="16" name="Shape 14"/>
-          <p:cNvSpPr/>
-          <p:nvPr/>
-        </p:nvSpPr>
-        <p:spPr>
-          <a:xfrm>
-            <a:off x="859536" y="4315968"/>
-            <a:ext cx="64008" cy="64008"/>
+          <a:ln w="6350">
+            <a:solidFill>
+              <a:srgbClr val="E0E0E0"/>
+            </a:solidFill>
+            <a:prstDash val="solid"/>
+          </a:ln>
+        </p:spPr>
+      </p:sp>
+      <p:pic>
+        <p:nvPicPr>
+          <p:cNvPr id="18" name="Image 3" descr="preencoded.png">    </p:cNvPr>
+          <p:cNvPicPr>
+            <a:picLocks noChangeAspect="1"/>
+          </p:cNvPicPr>
+          <p:nvPr/>
+        </p:nvPicPr>
+        <p:blipFill>
+          <a:blip r:embed="rId4"/>
+          <a:stretch>
+            <a:fillRect/>
+          </a:stretch>
+        </p:blipFill>
+        <p:spPr>
+          <a:xfrm>
+            <a:off x="840181" y="3653028"/>
+            <a:ext cx="3054096" cy="2290572"/>
+          </a:xfrm>
+          <a:prstGeom prst="rect">
+            <a:avLst/>
+          </a:prstGeom>
+        </p:spPr>
+      </p:pic>
+      <p:sp>
+        <p:nvSpPr>
+          <p:cNvPr id="19" name="Shape 13"/>
+          <p:cNvSpPr/>
+          <p:nvPr/>
+        </p:nvSpPr>
+        <p:spPr>
+          <a:xfrm>
+            <a:off x="566928" y="5650992"/>
+            <a:ext cx="3600602" cy="292608"/>
           </a:xfrm>
           <a:prstGeom prst="rect">
             <a:avLst/>
           </a:prstGeom>
           <a:solidFill>
-            <a:srgbClr val="B8860B"/>
+            <a:srgbClr val="000000">
+              <a:alpha val="60000"/>
+            </a:srgbClr>
           </a:solidFill>
           <a:ln/>
         </p:spPr>
       </p:sp>
       <p:sp>
         <p:nvSpPr>
-          <p:cNvPr id="17" name="Text 15"/>
-          <p:cNvSpPr/>
-          <p:nvPr/>
-        </p:nvSpPr>
-        <p:spPr>
-          <a:xfrm>
-            <a:off x="987552" y="4261104"/>
-            <a:ext cx="10326319" cy="694944"/>
-          </a:xfrm>
-          <a:prstGeom prst="rect">
-            <a:avLst/>
-          </a:prstGeom>
-          <a:noFill/>
-          <a:ln/>
-        </p:spPr>
-        <p:txBody>
-          <a:bodyPr wrap="square" lIns="0" tIns="0" rIns="0" bIns="0" rtlCol="0" anchor="t"/>
-          <a:lstStyle/>
-          <a:p>
-            <a:pPr indent="0" marL="0">
-              <a:lnSpc>
-                <a:spcPct val="112000"/>
-              </a:lnSpc>
-              <a:buNone/>
-            </a:pPr>
-            <a:r>
-              <a:rPr lang="en-US" sz="920" dirty="0">
-                <a:solidFill>
-                  <a:srgbClr val="2B2B2B"/>
-                </a:solidFill>
-                <a:latin typeface="맑은 고딕" pitchFamily="34" charset="0"/>
-                <a:ea typeface="맑은 고딕" pitchFamily="34" charset="-122"/>
-                <a:cs typeface="맑은 고딕" pitchFamily="34" charset="-120"/>
-              </a:rPr>
-              <a:t>옥상 방수 상태, 지하층 결로/누수 여부 및 공용부(계단실·화장실) 관리 컨디션</a:t>
-            </a:r>
-            <a:endParaRPr lang="en-US" sz="920" dirty="0"/>
-          </a:p>
-        </p:txBody>
-      </p:sp>
-      <p:sp>
-        <p:nvSpPr>
-          <p:cNvPr id="18" name="Shape 16"/>
-          <p:cNvSpPr/>
-          <p:nvPr/>
-        </p:nvSpPr>
-        <p:spPr>
-          <a:xfrm>
-            <a:off x="859536" y="5047488"/>
-            <a:ext cx="64008" cy="64008"/>
-          </a:xfrm>
-          <a:prstGeom prst="rect">
-            <a:avLst/>
+          <p:cNvPr id="20" name="Text 14"/>
+          <p:cNvSpPr/>
+          <p:nvPr/>
+        </p:nvSpPr>
+        <p:spPr>
+          <a:xfrm>
+            <a:off x="676656" y="5650992"/>
+            <a:ext cx="3381146" cy="292608"/>
+          </a:xfrm>
+          <a:prstGeom prst="rect">
+            <a:avLst/>
+          </a:prstGeom>
+          <a:noFill/>
+          <a:ln/>
+        </p:spPr>
+        <p:txBody>
+          <a:bodyPr wrap="square" lIns="0" tIns="0" rIns="0" bIns="0" rtlCol="0" anchor="ctr"/>
+          <a:lstStyle/>
+          <a:p>
+            <a:pPr indent="0" marL="0">
+              <a:buNone/>
+            </a:pPr>
+            <a:r>
+              <a:rPr lang="en-US" sz="900" dirty="0">
+                <a:solidFill>
+                  <a:srgbClr val="FFFFFF"/>
+                </a:solidFill>
+                <a:latin typeface="맑은 고딕" pitchFamily="34" charset="0"/>
+                <a:ea typeface="맑은 고딕" pitchFamily="34" charset="-122"/>
+                <a:cs typeface="맑은 고딕" pitchFamily="34" charset="-120"/>
+              </a:rPr>
+              <a:t>실내 전용 공간</a:t>
+            </a:r>
+            <a:endParaRPr lang="en-US" sz="900" dirty="0"/>
+          </a:p>
+        </p:txBody>
+      </p:sp>
+      <p:sp>
+        <p:nvSpPr>
+          <p:cNvPr id="21" name="Shape 15"/>
+          <p:cNvSpPr/>
+          <p:nvPr/>
+        </p:nvSpPr>
+        <p:spPr>
+          <a:xfrm>
+            <a:off x="4295546" y="3653028"/>
+            <a:ext cx="3600602" cy="2290572"/>
+          </a:xfrm>
+          <a:prstGeom prst="roundRect">
+            <a:avLst>
+              <a:gd name="adj" fmla="val 2395"/>
+            </a:avLst>
           </a:prstGeom>
           <a:solidFill>
-            <a:srgbClr val="B8860B"/>
+            <a:srgbClr val="F0F0F0"/>
           </a:solidFill>
-          <a:ln/>
-        </p:spPr>
-      </p:sp>
-      <p:sp>
-        <p:nvSpPr>
-          <p:cNvPr id="19" name="Text 17"/>
-          <p:cNvSpPr/>
-          <p:nvPr/>
-        </p:nvSpPr>
-        <p:spPr>
-          <a:xfrm>
-            <a:off x="987552" y="4992624"/>
-            <a:ext cx="10326319" cy="694944"/>
-          </a:xfrm>
-          <a:prstGeom prst="rect">
-            <a:avLst/>
-          </a:prstGeom>
-          <a:noFill/>
-          <a:ln/>
-        </p:spPr>
-        <p:txBody>
-          <a:bodyPr wrap="square" lIns="0" tIns="0" rIns="0" bIns="0" rtlCol="0" anchor="t"/>
-          <a:lstStyle/>
-          <a:p>
-            <a:pPr indent="0" marL="0">
-              <a:lnSpc>
-                <a:spcPct val="112000"/>
-              </a:lnSpc>
-              <a:buNone/>
-            </a:pPr>
-            <a:r>
-              <a:rPr lang="en-US" sz="920" dirty="0">
-                <a:solidFill>
-                  <a:srgbClr val="2B2B2B"/>
-                </a:solidFill>
-                <a:latin typeface="맑은 고딕" pitchFamily="34" charset="0"/>
-                <a:ea typeface="맑은 고딕" pitchFamily="34" charset="-122"/>
-                <a:cs typeface="맑은 고딕" pitchFamily="34" charset="-120"/>
-              </a:rPr>
-              <a:t>법정 주차대수 확보 여부, 주차장 진입로 회전반경 및 층고 실측 검증</a:t>
-            </a:r>
-            <a:endParaRPr lang="en-US" sz="920" dirty="0"/>
-          </a:p>
-        </p:txBody>
-      </p:sp>
-      <p:sp>
-        <p:nvSpPr>
-          <p:cNvPr id="20" name="Text 18"/>
+          <a:ln w="6350">
+            <a:solidFill>
+              <a:srgbClr val="E0E0E0"/>
+            </a:solidFill>
+            <a:prstDash val="solid"/>
+          </a:ln>
+        </p:spPr>
+      </p:sp>
+      <p:pic>
+        <p:nvPicPr>
+          <p:cNvPr id="22" name="Image 4" descr="preencoded.png">    </p:cNvPr>
+          <p:cNvPicPr>
+            <a:picLocks noChangeAspect="1"/>
+          </p:cNvPicPr>
+          <p:nvPr/>
+        </p:nvPicPr>
+        <p:blipFill>
+          <a:blip r:embed="rId5"/>
+          <a:stretch>
+            <a:fillRect/>
+          </a:stretch>
+        </p:blipFill>
+        <p:spPr>
+          <a:xfrm>
+            <a:off x="4950562" y="3653028"/>
+            <a:ext cx="2290572" cy="2290572"/>
+          </a:xfrm>
+          <a:prstGeom prst="rect">
+            <a:avLst/>
+          </a:prstGeom>
+        </p:spPr>
+      </p:pic>
+      <p:sp>
+        <p:nvSpPr>
+          <p:cNvPr id="23" name="Shape 16"/>
+          <p:cNvSpPr/>
+          <p:nvPr/>
+        </p:nvSpPr>
+        <p:spPr>
+          <a:xfrm>
+            <a:off x="4295546" y="5650992"/>
+            <a:ext cx="3600602" cy="292608"/>
+          </a:xfrm>
+          <a:prstGeom prst="rect">
+            <a:avLst/>
+          </a:prstGeom>
+          <a:solidFill>
+            <a:srgbClr val="000000">
+              <a:alpha val="60000"/>
+            </a:srgbClr>
+          </a:solidFill>
+          <a:ln/>
+        </p:spPr>
+      </p:sp>
+      <p:sp>
+        <p:nvSpPr>
+          <p:cNvPr id="24" name="Text 17"/>
+          <p:cNvSpPr/>
+          <p:nvPr/>
+        </p:nvSpPr>
+        <p:spPr>
+          <a:xfrm>
+            <a:off x="4405274" y="5650992"/>
+            <a:ext cx="3381146" cy="292608"/>
+          </a:xfrm>
+          <a:prstGeom prst="rect">
+            <a:avLst/>
+          </a:prstGeom>
+          <a:noFill/>
+          <a:ln/>
+        </p:spPr>
+        <p:txBody>
+          <a:bodyPr wrap="square" lIns="0" tIns="0" rIns="0" bIns="0" rtlCol="0" anchor="ctr"/>
+          <a:lstStyle/>
+          <a:p>
+            <a:pPr indent="0" marL="0">
+              <a:buNone/>
+            </a:pPr>
+            <a:r>
+              <a:rPr lang="en-US" sz="900" dirty="0">
+                <a:solidFill>
+                  <a:srgbClr val="FFFFFF"/>
+                </a:solidFill>
+                <a:latin typeface="맑은 고딕" pitchFamily="34" charset="0"/>
+                <a:ea typeface="맑은 고딕" pitchFamily="34" charset="-122"/>
+                <a:cs typeface="맑은 고딕" pitchFamily="34" charset="-120"/>
+              </a:rPr>
+              <a:t>실내 전용 공간</a:t>
+            </a:r>
+            <a:endParaRPr lang="en-US" sz="900" dirty="0"/>
+          </a:p>
+        </p:txBody>
+      </p:sp>
+      <p:sp>
+        <p:nvSpPr>
+          <p:cNvPr id="25" name="Shape 18"/>
+          <p:cNvSpPr/>
+          <p:nvPr/>
+        </p:nvSpPr>
+        <p:spPr>
+          <a:xfrm>
+            <a:off x="8024165" y="3653028"/>
+            <a:ext cx="3600602" cy="2290572"/>
+          </a:xfrm>
+          <a:prstGeom prst="roundRect">
+            <a:avLst>
+              <a:gd name="adj" fmla="val 2395"/>
+            </a:avLst>
+          </a:prstGeom>
+          <a:solidFill>
+            <a:srgbClr val="F0F0F0"/>
+          </a:solidFill>
+          <a:ln w="6350">
+            <a:solidFill>
+              <a:srgbClr val="E0E0E0"/>
+            </a:solidFill>
+            <a:prstDash val="solid"/>
+          </a:ln>
+        </p:spPr>
+      </p:sp>
+      <p:pic>
+        <p:nvPicPr>
+          <p:cNvPr id="26" name="Image 5" descr="preencoded.png">    </p:cNvPr>
+          <p:cNvPicPr>
+            <a:picLocks noChangeAspect="1"/>
+          </p:cNvPicPr>
+          <p:nvPr/>
+        </p:nvPicPr>
+        <p:blipFill>
+          <a:blip r:embed="rId6"/>
+          <a:stretch>
+            <a:fillRect/>
+          </a:stretch>
+        </p:blipFill>
+        <p:spPr>
+          <a:xfrm>
+            <a:off x="8024165" y="3685217"/>
+            <a:ext cx="3600602" cy="2226194"/>
+          </a:xfrm>
+          <a:prstGeom prst="rect">
+            <a:avLst/>
+          </a:prstGeom>
+        </p:spPr>
+      </p:pic>
+      <p:sp>
+        <p:nvSpPr>
+          <p:cNvPr id="27" name="Shape 19"/>
+          <p:cNvSpPr/>
+          <p:nvPr/>
+        </p:nvSpPr>
+        <p:spPr>
+          <a:xfrm>
+            <a:off x="8024165" y="5650992"/>
+            <a:ext cx="3600602" cy="292608"/>
+          </a:xfrm>
+          <a:prstGeom prst="rect">
+            <a:avLst/>
+          </a:prstGeom>
+          <a:solidFill>
+            <a:srgbClr val="000000">
+              <a:alpha val="60000"/>
+            </a:srgbClr>
+          </a:solidFill>
+          <a:ln/>
+        </p:spPr>
+      </p:sp>
+      <p:sp>
+        <p:nvSpPr>
+          <p:cNvPr id="28" name="Text 20"/>
+          <p:cNvSpPr/>
+          <p:nvPr/>
+        </p:nvSpPr>
+        <p:spPr>
+          <a:xfrm>
+            <a:off x="8133893" y="5650992"/>
+            <a:ext cx="3381146" cy="292608"/>
+          </a:xfrm>
+          <a:prstGeom prst="rect">
+            <a:avLst/>
+          </a:prstGeom>
+          <a:noFill/>
+          <a:ln/>
+        </p:spPr>
+        <p:txBody>
+          <a:bodyPr wrap="square" lIns="0" tIns="0" rIns="0" bIns="0" rtlCol="0" anchor="ctr"/>
+          <a:lstStyle/>
+          <a:p>
+            <a:pPr indent="0" marL="0">
+              <a:buNone/>
+            </a:pPr>
+            <a:r>
+              <a:rPr lang="en-US" sz="900" dirty="0">
+                <a:solidFill>
+                  <a:srgbClr val="FFFFFF"/>
+                </a:solidFill>
+                <a:latin typeface="맑은 고딕" pitchFamily="34" charset="0"/>
+                <a:ea typeface="맑은 고딕" pitchFamily="34" charset="-122"/>
+                <a:cs typeface="맑은 고딕" pitchFamily="34" charset="-120"/>
+              </a:rPr>
+              <a:t>실내 전용 공간</a:t>
+            </a:r>
+            <a:endParaRPr lang="en-US" sz="900" dirty="0"/>
+          </a:p>
+        </p:txBody>
+      </p:sp>
+      <p:sp>
+        <p:nvSpPr>
+          <p:cNvPr id="29" name="Text 21"/>
           <p:cNvSpPr/>
           <p:nvPr/>
         </p:nvSpPr>
@@ -10100,7 +10707,7 @@
       </p:sp>
       <p:sp>
         <p:nvSpPr>
-          <p:cNvPr id="21" name="Text 19"/>
+          <p:cNvPr id="30" name="Text 22"/>
           <p:cNvSpPr/>
           <p:nvPr/>
         </p:nvSpPr>
@@ -10236,46 +10843,7 @@
         </p:nvSpPr>
         <p:spPr>
           <a:xfrm>
-            <a:off x="1133856" y="457200"/>
-            <a:ext cx="10490911" cy="182880"/>
-          </a:xfrm>
-          <a:prstGeom prst="rect">
-            <a:avLst/>
-          </a:prstGeom>
-          <a:noFill/>
-          <a:ln/>
-        </p:spPr>
-        <p:txBody>
-          <a:bodyPr wrap="square" lIns="0" tIns="0" rIns="0" bIns="0" rtlCol="0" anchor="ctr"/>
-          <a:lstStyle/>
-          <a:p>
-            <a:pPr indent="0" marL="0">
-              <a:buNone/>
-            </a:pPr>
-            <a:r>
-              <a:rPr lang="en-US" sz="950" b="1" spc="200" kern="0" dirty="0">
-                <a:solidFill>
-                  <a:srgbClr val="B8860B"/>
-                </a:solidFill>
-                <a:latin typeface="Arial" pitchFamily="34" charset="0"/>
-                <a:ea typeface="Arial" pitchFamily="34" charset="-122"/>
-                <a:cs typeface="Arial" pitchFamily="34" charset="-120"/>
-              </a:rPr>
-              <a:t>문의/유의</a:t>
-            </a:r>
-            <a:endParaRPr lang="en-US" sz="950" dirty="0"/>
-          </a:p>
-        </p:txBody>
-      </p:sp>
-      <p:sp>
-        <p:nvSpPr>
-          <p:cNvPr id="5" name="Text 3"/>
-          <p:cNvSpPr/>
-          <p:nvPr/>
-        </p:nvSpPr>
-        <p:spPr>
-          <a:xfrm>
-            <a:off x="1133856" y="658368"/>
+            <a:off x="1133856" y="438912"/>
             <a:ext cx="10490911" cy="420624"/>
           </a:xfrm>
           <a:prstGeom prst="rect">
@@ -10310,7 +10878,7 @@
       </p:sp>
       <p:sp>
         <p:nvSpPr>
-          <p:cNvPr id="6" name="Shape 4"/>
+          <p:cNvPr id="5" name="Shape 3"/>
           <p:cNvSpPr/>
           <p:nvPr/>
         </p:nvSpPr>
@@ -10332,7 +10900,7 @@
       </p:sp>
       <p:sp>
         <p:nvSpPr>
-          <p:cNvPr id="7" name="Shape 5"/>
+          <p:cNvPr id="6" name="Shape 4"/>
           <p:cNvSpPr/>
           <p:nvPr/>
         </p:nvSpPr>
@@ -10352,7 +10920,7 @@
       </p:sp>
       <p:sp>
         <p:nvSpPr>
-          <p:cNvPr id="8" name="Text 6"/>
+          <p:cNvPr id="7" name="Text 5"/>
           <p:cNvSpPr/>
           <p:nvPr/>
         </p:nvSpPr>
@@ -10391,7 +10959,7 @@
       </p:sp>
       <p:sp>
         <p:nvSpPr>
-          <p:cNvPr id="9" name="Text 7"/>
+          <p:cNvPr id="8" name="Text 6"/>
           <p:cNvSpPr/>
           <p:nvPr/>
         </p:nvSpPr>
@@ -10430,7 +10998,7 @@
       </p:sp>
       <p:sp>
         <p:nvSpPr>
-          <p:cNvPr id="10" name="Text 8"/>
+          <p:cNvPr id="9" name="Text 7"/>
           <p:cNvSpPr/>
           <p:nvPr/>
         </p:nvSpPr>
@@ -10469,7 +11037,7 @@
       </p:sp>
       <p:sp>
         <p:nvSpPr>
-          <p:cNvPr id="11" name="Text 9"/>
+          <p:cNvPr id="10" name="Text 8"/>
           <p:cNvSpPr/>
           <p:nvPr/>
         </p:nvSpPr>
@@ -10508,7 +11076,7 @@
       </p:sp>
       <p:sp>
         <p:nvSpPr>
-          <p:cNvPr id="12" name="Shape 10"/>
+          <p:cNvPr id="11" name="Shape 9"/>
           <p:cNvSpPr/>
           <p:nvPr/>
         </p:nvSpPr>
@@ -10530,7 +11098,7 @@
       </p:sp>
       <p:sp>
         <p:nvSpPr>
-          <p:cNvPr id="13" name="Shape 11"/>
+          <p:cNvPr id="12" name="Shape 10"/>
           <p:cNvSpPr/>
           <p:nvPr/>
         </p:nvSpPr>
@@ -10550,7 +11118,7 @@
       </p:sp>
       <p:sp>
         <p:nvSpPr>
-          <p:cNvPr id="14" name="Text 12"/>
+          <p:cNvPr id="13" name="Text 11"/>
           <p:cNvSpPr/>
           <p:nvPr/>
         </p:nvSpPr>
@@ -10589,7 +11157,7 @@
       </p:sp>
       <p:sp>
         <p:nvSpPr>
-          <p:cNvPr id="15" name="Text 13"/>
+          <p:cNvPr id="14" name="Text 12"/>
           <p:cNvSpPr/>
           <p:nvPr/>
         </p:nvSpPr>
@@ -10628,7 +11196,7 @@
       </p:sp>
       <p:sp>
         <p:nvSpPr>
-          <p:cNvPr id="16" name="Text 14"/>
+          <p:cNvPr id="15" name="Text 13"/>
           <p:cNvSpPr/>
           <p:nvPr/>
         </p:nvSpPr>
@@ -10667,7 +11235,7 @@
       </p:sp>
       <p:sp>
         <p:nvSpPr>
-          <p:cNvPr id="17" name="Text 15"/>
+          <p:cNvPr id="16" name="Text 14"/>
           <p:cNvSpPr/>
           <p:nvPr/>
         </p:nvSpPr>
@@ -10706,7 +11274,7 @@
       </p:sp>
       <p:sp>
         <p:nvSpPr>
-          <p:cNvPr id="18" name="Shape 16"/>
+          <p:cNvPr id="17" name="Shape 15"/>
           <p:cNvSpPr/>
           <p:nvPr/>
         </p:nvSpPr>
@@ -10728,7 +11296,7 @@
       </p:sp>
       <p:sp>
         <p:nvSpPr>
-          <p:cNvPr id="19" name="Shape 17"/>
+          <p:cNvPr id="18" name="Shape 16"/>
           <p:cNvSpPr/>
           <p:nvPr/>
         </p:nvSpPr>
@@ -10748,7 +11316,7 @@
       </p:sp>
       <p:sp>
         <p:nvSpPr>
-          <p:cNvPr id="20" name="Text 18"/>
+          <p:cNvPr id="19" name="Text 17"/>
           <p:cNvSpPr/>
           <p:nvPr/>
         </p:nvSpPr>
@@ -10787,7 +11355,7 @@
       </p:sp>
       <p:sp>
         <p:nvSpPr>
-          <p:cNvPr id="21" name="Text 19"/>
+          <p:cNvPr id="20" name="Text 18"/>
           <p:cNvSpPr/>
           <p:nvPr/>
         </p:nvSpPr>
@@ -10826,7 +11394,7 @@
       </p:sp>
       <p:sp>
         <p:nvSpPr>
-          <p:cNvPr id="22" name="Text 20"/>
+          <p:cNvPr id="21" name="Text 19"/>
           <p:cNvSpPr/>
           <p:nvPr/>
         </p:nvSpPr>
@@ -10865,7 +11433,7 @@
       </p:sp>
       <p:sp>
         <p:nvSpPr>
-          <p:cNvPr id="23" name="Text 21"/>
+          <p:cNvPr id="22" name="Text 20"/>
           <p:cNvSpPr/>
           <p:nvPr/>
         </p:nvSpPr>
@@ -10904,7 +11472,7 @@
       </p:sp>
       <p:sp>
         <p:nvSpPr>
-          <p:cNvPr id="24" name="Shape 22"/>
+          <p:cNvPr id="23" name="Shape 21"/>
           <p:cNvSpPr/>
           <p:nvPr/>
         </p:nvSpPr>
@@ -10926,7 +11494,7 @@
       </p:sp>
       <p:sp>
         <p:nvSpPr>
-          <p:cNvPr id="25" name="Text 23"/>
+          <p:cNvPr id="24" name="Text 22"/>
           <p:cNvSpPr/>
           <p:nvPr/>
         </p:nvSpPr>
@@ -10965,7 +11533,7 @@
       </p:sp>
       <p:sp>
         <p:nvSpPr>
-          <p:cNvPr id="26" name="Text 24"/>
+          <p:cNvPr id="25" name="Text 23"/>
           <p:cNvSpPr/>
           <p:nvPr/>
         </p:nvSpPr>
@@ -11004,7 +11572,7 @@
       </p:sp>
       <p:sp>
         <p:nvSpPr>
-          <p:cNvPr id="27" name="Shape 25"/>
+          <p:cNvPr id="26" name="Shape 24"/>
           <p:cNvSpPr/>
           <p:nvPr/>
         </p:nvSpPr>
@@ -11026,7 +11594,7 @@
       </p:sp>
       <p:sp>
         <p:nvSpPr>
-          <p:cNvPr id="28" name="Text 26"/>
+          <p:cNvPr id="27" name="Text 25"/>
           <p:cNvSpPr/>
           <p:nvPr/>
         </p:nvSpPr>
@@ -11065,7 +11633,7 @@
       </p:sp>
       <p:sp>
         <p:nvSpPr>
-          <p:cNvPr id="29" name="Text 27"/>
+          <p:cNvPr id="28" name="Text 26"/>
           <p:cNvSpPr/>
           <p:nvPr/>
         </p:nvSpPr>
@@ -11104,7 +11672,7 @@
       </p:sp>
       <p:sp>
         <p:nvSpPr>
-          <p:cNvPr id="30" name="Shape 28"/>
+          <p:cNvPr id="29" name="Shape 27"/>
           <p:cNvSpPr/>
           <p:nvPr/>
         </p:nvSpPr>
@@ -11126,7 +11694,7 @@
       </p:sp>
       <p:sp>
         <p:nvSpPr>
-          <p:cNvPr id="31" name="Text 29"/>
+          <p:cNvPr id="30" name="Text 28"/>
           <p:cNvSpPr/>
           <p:nvPr/>
         </p:nvSpPr>
@@ -11165,7 +11733,7 @@
       </p:sp>
       <p:sp>
         <p:nvSpPr>
-          <p:cNvPr id="32" name="Text 30"/>
+          <p:cNvPr id="31" name="Text 29"/>
           <p:cNvSpPr/>
           <p:nvPr/>
         </p:nvSpPr>
@@ -11204,7 +11772,7 @@
       </p:sp>
       <p:sp>
         <p:nvSpPr>
-          <p:cNvPr id="33" name="Shape 31"/>
+          <p:cNvPr id="32" name="Shape 30"/>
           <p:cNvSpPr/>
           <p:nvPr/>
         </p:nvSpPr>
@@ -11226,7 +11794,7 @@
       </p:sp>
       <p:sp>
         <p:nvSpPr>
-          <p:cNvPr id="34" name="Text 32"/>
+          <p:cNvPr id="33" name="Text 31"/>
           <p:cNvSpPr/>
           <p:nvPr/>
         </p:nvSpPr>
@@ -11265,7 +11833,7 @@
       </p:sp>
       <p:sp>
         <p:nvSpPr>
-          <p:cNvPr id="35" name="Text 33"/>
+          <p:cNvPr id="34" name="Text 32"/>
           <p:cNvSpPr/>
           <p:nvPr/>
         </p:nvSpPr>
@@ -11304,7 +11872,7 @@
       </p:sp>
       <p:sp>
         <p:nvSpPr>
-          <p:cNvPr id="36" name="Shape 34"/>
+          <p:cNvPr id="35" name="Shape 33"/>
           <p:cNvSpPr/>
           <p:nvPr/>
         </p:nvSpPr>
@@ -11326,7 +11894,7 @@
       </p:sp>
       <p:sp>
         <p:nvSpPr>
-          <p:cNvPr id="37" name="Text 35"/>
+          <p:cNvPr id="36" name="Text 34"/>
           <p:cNvSpPr/>
           <p:nvPr/>
         </p:nvSpPr>
@@ -11365,7 +11933,7 @@
       </p:sp>
       <p:sp>
         <p:nvSpPr>
-          <p:cNvPr id="38" name="Text 36"/>
+          <p:cNvPr id="37" name="Text 35"/>
           <p:cNvSpPr/>
           <p:nvPr/>
         </p:nvSpPr>
@@ -11404,7 +11972,7 @@
       </p:sp>
       <p:sp>
         <p:nvSpPr>
-          <p:cNvPr id="39" name="Text 37"/>
+          <p:cNvPr id="38" name="Text 36"/>
           <p:cNvSpPr/>
           <p:nvPr/>
         </p:nvSpPr>
@@ -11443,7 +12011,7 @@
       </p:sp>
       <p:sp>
         <p:nvSpPr>
-          <p:cNvPr id="40" name="Shape 38"/>
+          <p:cNvPr id="39" name="Shape 37"/>
           <p:cNvSpPr/>
           <p:nvPr/>
         </p:nvSpPr>
@@ -11470,7 +12038,7 @@
       </p:sp>
       <p:sp>
         <p:nvSpPr>
-          <p:cNvPr id="41" name="Text 39"/>
+          <p:cNvPr id="40" name="Text 38"/>
           <p:cNvSpPr/>
           <p:nvPr/>
         </p:nvSpPr>
@@ -11501,7 +12069,7 @@
                 <a:ea typeface="맑은 고딕" pitchFamily="34" charset="-122"/>
                 <a:cs typeface="맑은 고딕" pitchFamily="34" charset="-120"/>
               </a:rPr>
-              <a:t>📞  담당자  </a:t>
+              <a:t>담당자</a:t>
             </a:r>
             <a:endParaRPr lang="en-US" sz="1100" dirty="0"/>
           </a:p>
@@ -11509,7 +12077,7 @@
       </p:sp>
       <p:sp>
         <p:nvSpPr>
-          <p:cNvPr id="42" name="Text 40"/>
+          <p:cNvPr id="41" name="Text 39"/>
           <p:cNvSpPr/>
           <p:nvPr/>
         </p:nvSpPr>
@@ -11548,7 +12116,7 @@
       </p:sp>
       <p:sp>
         <p:nvSpPr>
-          <p:cNvPr id="43" name="Text 41"/>
+          <p:cNvPr id="42" name="Text 40"/>
           <p:cNvSpPr/>
           <p:nvPr/>
         </p:nvSpPr>
@@ -11587,7 +12155,7 @@
       </p:sp>
       <p:sp>
         <p:nvSpPr>
-          <p:cNvPr id="44" name="Text 42"/>
+          <p:cNvPr id="43" name="Text 41"/>
           <p:cNvSpPr/>
           <p:nvPr/>
         </p:nvSpPr>
@@ -11626,7 +12194,7 @@
       </p:sp>
       <p:sp>
         <p:nvSpPr>
-          <p:cNvPr id="45" name="Shape 43"/>
+          <p:cNvPr id="44" name="Shape 42"/>
           <p:cNvSpPr/>
           <p:nvPr/>
         </p:nvSpPr>
@@ -11648,7 +12216,7 @@
       </p:sp>
       <p:sp>
         <p:nvSpPr>
-          <p:cNvPr id="46" name="Text 44"/>
+          <p:cNvPr id="45" name="Text 43"/>
           <p:cNvSpPr/>
           <p:nvPr/>
         </p:nvSpPr>
@@ -11690,7 +12258,7 @@
       </p:sp>
       <p:sp>
         <p:nvSpPr>
-          <p:cNvPr id="47" name="Shape 45"/>
+          <p:cNvPr id="46" name="Shape 44"/>
           <p:cNvSpPr/>
           <p:nvPr/>
         </p:nvSpPr>
@@ -11710,7 +12278,7 @@
       </p:sp>
       <p:sp>
         <p:nvSpPr>
-          <p:cNvPr id="48" name="Text 46"/>
+          <p:cNvPr id="47" name="Text 45"/>
           <p:cNvSpPr/>
           <p:nvPr/>
         </p:nvSpPr>
@@ -11749,7 +12317,7 @@
       </p:sp>
       <p:sp>
         <p:nvSpPr>
-          <p:cNvPr id="49" name="Text 47"/>
+          <p:cNvPr id="48" name="Text 46"/>
           <p:cNvSpPr/>
           <p:nvPr/>
         </p:nvSpPr>
@@ -11788,7 +12356,7 @@
       </p:sp>
       <p:sp>
         <p:nvSpPr>
-          <p:cNvPr id="50" name="Text 48"/>
+          <p:cNvPr id="49" name="Text 47"/>
           <p:cNvSpPr/>
           <p:nvPr/>
         </p:nvSpPr>
